--- a/slides/Lecture_Chapter06.pptx
+++ b/slides/Lecture_Chapter06.pptx
@@ -16,7 +16,7 @@
     <p:sldId id="387" r:id="rId10"/>
     <p:sldId id="390" r:id="rId11"/>
     <p:sldId id="391" r:id="rId12"/>
-    <p:sldId id="392" r:id="rId13"/>
+    <p:sldId id="402" r:id="rId13"/>
     <p:sldId id="393" r:id="rId14"/>
     <p:sldId id="398" r:id="rId15"/>
     <p:sldId id="395" r:id="rId16"/>
@@ -140,7 +140,7 @@
             <p14:sldId id="387"/>
             <p14:sldId id="390"/>
             <p14:sldId id="391"/>
-            <p14:sldId id="392"/>
+            <p14:sldId id="402"/>
             <p14:sldId id="393"/>
             <p14:sldId id="398"/>
             <p14:sldId id="395"/>
@@ -308,7 +308,7 @@
           <a:p>
             <a:fld id="{3E22BF2E-04DA-469E-97C5-BB68A0368813}" type="datetimeFigureOut">
               <a:rPr lang="en-US" smtClean="0"/>
-              <a:t>9/18/2025</a:t>
+              <a:t>11/29/2025</a:t>
             </a:fld>
             <a:endParaRPr lang="en-US"/>
           </a:p>
@@ -506,7 +506,7 @@
           <a:p>
             <a:fld id="{3E22BF2E-04DA-469E-97C5-BB68A0368813}" type="datetimeFigureOut">
               <a:rPr lang="en-US" smtClean="0"/>
-              <a:t>9/18/2025</a:t>
+              <a:t>11/29/2025</a:t>
             </a:fld>
             <a:endParaRPr lang="en-US"/>
           </a:p>
@@ -714,7 +714,7 @@
           <a:p>
             <a:fld id="{3E22BF2E-04DA-469E-97C5-BB68A0368813}" type="datetimeFigureOut">
               <a:rPr lang="en-US" smtClean="0"/>
-              <a:t>9/18/2025</a:t>
+              <a:t>11/29/2025</a:t>
             </a:fld>
             <a:endParaRPr lang="en-US"/>
           </a:p>
@@ -922,7 +922,7 @@
           <a:p>
             <a:fld id="{3E22BF2E-04DA-469E-97C5-BB68A0368813}" type="datetimeFigureOut">
               <a:rPr lang="en-US" smtClean="0"/>
-              <a:t>9/18/2025</a:t>
+              <a:t>11/29/2025</a:t>
             </a:fld>
             <a:endParaRPr lang="en-US"/>
           </a:p>
@@ -1197,7 +1197,7 @@
           <a:p>
             <a:fld id="{3E22BF2E-04DA-469E-97C5-BB68A0368813}" type="datetimeFigureOut">
               <a:rPr lang="en-US" smtClean="0"/>
-              <a:t>9/18/2025</a:t>
+              <a:t>11/29/2025</a:t>
             </a:fld>
             <a:endParaRPr lang="en-US"/>
           </a:p>
@@ -1462,7 +1462,7 @@
           <a:p>
             <a:fld id="{3E22BF2E-04DA-469E-97C5-BB68A0368813}" type="datetimeFigureOut">
               <a:rPr lang="en-US" smtClean="0"/>
-              <a:t>9/18/2025</a:t>
+              <a:t>11/29/2025</a:t>
             </a:fld>
             <a:endParaRPr lang="en-US"/>
           </a:p>
@@ -1874,7 +1874,7 @@
           <a:p>
             <a:fld id="{3E22BF2E-04DA-469E-97C5-BB68A0368813}" type="datetimeFigureOut">
               <a:rPr lang="en-US" smtClean="0"/>
-              <a:t>9/18/2025</a:t>
+              <a:t>11/29/2025</a:t>
             </a:fld>
             <a:endParaRPr lang="en-US"/>
           </a:p>
@@ -2015,7 +2015,7 @@
           <a:p>
             <a:fld id="{3E22BF2E-04DA-469E-97C5-BB68A0368813}" type="datetimeFigureOut">
               <a:rPr lang="en-US" smtClean="0"/>
-              <a:t>9/18/2025</a:t>
+              <a:t>11/29/2025</a:t>
             </a:fld>
             <a:endParaRPr lang="en-US"/>
           </a:p>
@@ -2128,7 +2128,7 @@
           <a:p>
             <a:fld id="{3E22BF2E-04DA-469E-97C5-BB68A0368813}" type="datetimeFigureOut">
               <a:rPr lang="en-US" smtClean="0"/>
-              <a:t>9/18/2025</a:t>
+              <a:t>11/29/2025</a:t>
             </a:fld>
             <a:endParaRPr lang="en-US"/>
           </a:p>
@@ -2439,7 +2439,7 @@
           <a:p>
             <a:fld id="{3E22BF2E-04DA-469E-97C5-BB68A0368813}" type="datetimeFigureOut">
               <a:rPr lang="en-US" smtClean="0"/>
-              <a:t>9/18/2025</a:t>
+              <a:t>11/29/2025</a:t>
             </a:fld>
             <a:endParaRPr lang="en-US"/>
           </a:p>
@@ -2727,7 +2727,7 @@
           <a:p>
             <a:fld id="{3E22BF2E-04DA-469E-97C5-BB68A0368813}" type="datetimeFigureOut">
               <a:rPr lang="en-US" smtClean="0"/>
-              <a:t>9/18/2025</a:t>
+              <a:t>11/29/2025</a:t>
             </a:fld>
             <a:endParaRPr lang="en-US"/>
           </a:p>
@@ -2968,7 +2968,7 @@
           <a:p>
             <a:fld id="{3E22BF2E-04DA-469E-97C5-BB68A0368813}" type="datetimeFigureOut">
               <a:rPr lang="en-US" smtClean="0"/>
-              <a:t>9/18/2025</a:t>
+              <a:t>11/29/2025</a:t>
             </a:fld>
             <a:endParaRPr lang="en-US"/>
           </a:p>
@@ -3485,7 +3485,7 @@
         </p:blipFill>
         <p:spPr bwMode="auto">
           <a:xfrm>
-            <a:off x="3653200" y="-18278"/>
+            <a:off x="3523485" y="10"/>
             <a:ext cx="8668512" cy="6857990"/>
           </a:xfrm>
           <a:prstGeom prst="rect">
@@ -3958,6 +3958,53 @@
           </a:prstGeom>
         </p:spPr>
       </p:pic>
+      <p:pic>
+        <p:nvPicPr>
+          <p:cNvPr id="6" name="Picture 5">
+            <a:extLst>
+              <a:ext uri="{FF2B5EF4-FFF2-40B4-BE49-F238E27FC236}">
+                <a16:creationId xmlns:a16="http://schemas.microsoft.com/office/drawing/2014/main" id="{8AD28C7D-14A3-CFEB-3DEC-2E01272844F2}"/>
+              </a:ext>
+            </a:extLst>
+          </p:cNvPr>
+          <p:cNvPicPr>
+            <a:picLocks noChangeAspect="1" noChangeArrowheads="1"/>
+          </p:cNvPicPr>
+          <p:nvPr/>
+        </p:nvPicPr>
+        <p:blipFill>
+          <a:blip r:embed="rId5">
+            <a:extLst>
+              <a:ext uri="{28A0092B-C50C-407E-A947-70E740481C1C}">
+                <a14:useLocalDpi xmlns:a14="http://schemas.microsoft.com/office/drawing/2010/main" val="0"/>
+              </a:ext>
+            </a:extLst>
+          </a:blip>
+          <a:srcRect/>
+          <a:stretch>
+            <a:fillRect/>
+          </a:stretch>
+        </p:blipFill>
+        <p:spPr bwMode="auto">
+          <a:xfrm>
+            <a:off x="7857741" y="198362"/>
+            <a:ext cx="4182403" cy="1000945"/>
+          </a:xfrm>
+          <a:prstGeom prst="rect">
+            <a:avLst/>
+          </a:prstGeom>
+          <a:noFill/>
+          <a:extLst>
+            <a:ext uri="{909E8E84-426E-40DD-AFC4-6F175D3DCCD1}">
+              <a14:hiddenFill xmlns:a14="http://schemas.microsoft.com/office/drawing/2010/main">
+                <a:solidFill>
+                  <a:srgbClr val="FFFFFF"/>
+                </a:solidFill>
+              </a14:hiddenFill>
+            </a:ext>
+          </a:extLst>
+        </p:spPr>
+      </p:pic>
     </p:spTree>
     <p:extLst>
       <p:ext uri="{BB962C8B-B14F-4D97-AF65-F5344CB8AC3E}">
@@ -4711,6 +4758,26 @@
                   <a:t> Off-policy</a:t>
                 </a:r>
               </a:p>
+              <a:p>
+                <a:r>
+                  <a:rPr lang="en-US" dirty="0"/>
+                  <a:t>Converges to the optimal value function:</a:t>
+                </a:r>
+              </a:p>
+              <a:p>
+                <a:pPr lvl="1"/>
+                <a:r>
+                  <a:rPr lang="en-US" dirty="0"/>
+                  <a:t>State-action pairs are represented discretely (in a table)</a:t>
+                </a:r>
+              </a:p>
+              <a:p>
+                <a:pPr lvl="1"/>
+                <a:r>
+                  <a:rPr lang="en-US" dirty="0"/>
+                  <a:t>All action are repeatedly sampled in all states (keeps exploring).</a:t>
+                </a:r>
+              </a:p>
             </p:txBody>
           </p:sp>
         </mc:Choice>
@@ -4735,7 +4802,7 @@
               <a:blipFill>
                 <a:blip r:embed="rId2"/>
                 <a:stretch>
-                  <a:fillRect l="-1043" t="-2168"/>
+                  <a:fillRect l="-1043" t="-2168" b="-1403"/>
                 </a:stretch>
               </a:blipFill>
             </p:spPr>
@@ -4810,7 +4877,7 @@
     </p:spTree>
     <p:extLst>
       <p:ext uri="{BB962C8B-B14F-4D97-AF65-F5344CB8AC3E}">
-        <p14:creationId xmlns:p14="http://schemas.microsoft.com/office/powerpoint/2010/main" val="4004526775"/>
+        <p14:creationId xmlns:p14="http://schemas.microsoft.com/office/powerpoint/2010/main" val="903677266"/>
       </p:ext>
     </p:extLst>
   </p:cSld>
@@ -6550,10 +6617,9 @@
           <a:lstStyle/>
           <a:p>
             <a:r>
-              <a:rPr lang="en-US" dirty="0" err="1"/>
-              <a:t>Comaprison</a:t>
+              <a:rPr lang="en-US" dirty="0"/>
+              <a:t>Comparison</a:t>
             </a:r>
-            <a:endParaRPr lang="en-US" dirty="0"/>
           </a:p>
         </p:txBody>
       </p:sp>
@@ -8064,8 +8130,8 @@
             </p:txBody>
           </p:sp>
         </p:grpSp>
-        <mc:AlternateContent xmlns:mc="http://schemas.openxmlformats.org/markup-compatibility/2006">
-          <mc:Choice xmlns:a14="http://schemas.microsoft.com/office/drawing/2010/main" Requires="a14">
+        <mc:AlternateContent xmlns:mc="http://schemas.openxmlformats.org/markup-compatibility/2006" xmlns:a14="http://schemas.microsoft.com/office/drawing/2010/main">
+          <mc:Choice Requires="a14">
             <p:sp>
               <p:nvSpPr>
                 <p:cNvPr id="6" name="Speech Bubble: Rectangle with Corners Rounded 5">
@@ -8156,7 +8222,7 @@
               </p:txBody>
             </p:sp>
           </mc:Choice>
-          <mc:Fallback>
+          <mc:Fallback xmlns="">
             <p:sp>
               <p:nvSpPr>
                 <p:cNvPr id="6" name="Speech Bubble: Rectangle with Corners Rounded 5">
@@ -11603,14 +11669,24 @@
             <p:ph type="title"/>
           </p:nvPr>
         </p:nvSpPr>
-        <p:spPr/>
+        <p:spPr>
+          <a:xfrm>
+            <a:off x="838200" y="365126"/>
+            <a:ext cx="4446864" cy="1551758"/>
+          </a:xfrm>
+        </p:spPr>
         <p:txBody>
-          <a:bodyPr/>
+          <a:bodyPr>
+            <a:normAutofit fontScale="90000"/>
+          </a:bodyPr>
           <a:lstStyle/>
           <a:p>
+            <a:br>
+              <a:rPr lang="en-US" dirty="0"/>
+            </a:br>
             <a:r>
               <a:rPr lang="en-US" dirty="0"/>
-              <a:t>Comparison</a:t>
+              <a:t>Experimental Comparison</a:t>
             </a:r>
           </a:p>
         </p:txBody>

--- a/slides/Lecture_Chapter06.pptx
+++ b/slides/Lecture_Chapter06.pptx
@@ -6,7 +6,7 @@
   </p:sldMasterIdLst>
   <p:sldIdLst>
     <p:sldId id="256" r:id="rId2"/>
-    <p:sldId id="384" r:id="rId3"/>
+    <p:sldId id="381" r:id="rId3"/>
     <p:sldId id="382" r:id="rId4"/>
     <p:sldId id="389" r:id="rId5"/>
     <p:sldId id="383" r:id="rId6"/>
@@ -130,7 +130,7 @@
         <p14:section name="Default Section" id="{83286E67-F0F0-421C-8F74-7B93ABA17FBF}">
           <p14:sldIdLst>
             <p14:sldId id="256"/>
-            <p14:sldId id="384"/>
+            <p14:sldId id="381"/>
             <p14:sldId id="382"/>
             <p14:sldId id="389"/>
             <p14:sldId id="383"/>
@@ -308,7 +308,7 @@
           <a:p>
             <a:fld id="{3E22BF2E-04DA-469E-97C5-BB68A0368813}" type="datetimeFigureOut">
               <a:rPr lang="en-US" smtClean="0"/>
-              <a:t>11/29/2025</a:t>
+              <a:t>1/8/2026</a:t>
             </a:fld>
             <a:endParaRPr lang="en-US"/>
           </a:p>
@@ -506,7 +506,7 @@
           <a:p>
             <a:fld id="{3E22BF2E-04DA-469E-97C5-BB68A0368813}" type="datetimeFigureOut">
               <a:rPr lang="en-US" smtClean="0"/>
-              <a:t>11/29/2025</a:t>
+              <a:t>1/8/2026</a:t>
             </a:fld>
             <a:endParaRPr lang="en-US"/>
           </a:p>
@@ -714,7 +714,7 @@
           <a:p>
             <a:fld id="{3E22BF2E-04DA-469E-97C5-BB68A0368813}" type="datetimeFigureOut">
               <a:rPr lang="en-US" smtClean="0"/>
-              <a:t>11/29/2025</a:t>
+              <a:t>1/8/2026</a:t>
             </a:fld>
             <a:endParaRPr lang="en-US"/>
           </a:p>
@@ -922,7 +922,7 @@
           <a:p>
             <a:fld id="{3E22BF2E-04DA-469E-97C5-BB68A0368813}" type="datetimeFigureOut">
               <a:rPr lang="en-US" smtClean="0"/>
-              <a:t>11/29/2025</a:t>
+              <a:t>1/8/2026</a:t>
             </a:fld>
             <a:endParaRPr lang="en-US"/>
           </a:p>
@@ -1197,7 +1197,7 @@
           <a:p>
             <a:fld id="{3E22BF2E-04DA-469E-97C5-BB68A0368813}" type="datetimeFigureOut">
               <a:rPr lang="en-US" smtClean="0"/>
-              <a:t>11/29/2025</a:t>
+              <a:t>1/8/2026</a:t>
             </a:fld>
             <a:endParaRPr lang="en-US"/>
           </a:p>
@@ -1462,7 +1462,7 @@
           <a:p>
             <a:fld id="{3E22BF2E-04DA-469E-97C5-BB68A0368813}" type="datetimeFigureOut">
               <a:rPr lang="en-US" smtClean="0"/>
-              <a:t>11/29/2025</a:t>
+              <a:t>1/8/2026</a:t>
             </a:fld>
             <a:endParaRPr lang="en-US"/>
           </a:p>
@@ -1874,7 +1874,7 @@
           <a:p>
             <a:fld id="{3E22BF2E-04DA-469E-97C5-BB68A0368813}" type="datetimeFigureOut">
               <a:rPr lang="en-US" smtClean="0"/>
-              <a:t>11/29/2025</a:t>
+              <a:t>1/8/2026</a:t>
             </a:fld>
             <a:endParaRPr lang="en-US"/>
           </a:p>
@@ -2015,7 +2015,7 @@
           <a:p>
             <a:fld id="{3E22BF2E-04DA-469E-97C5-BB68A0368813}" type="datetimeFigureOut">
               <a:rPr lang="en-US" smtClean="0"/>
-              <a:t>11/29/2025</a:t>
+              <a:t>1/8/2026</a:t>
             </a:fld>
             <a:endParaRPr lang="en-US"/>
           </a:p>
@@ -2128,7 +2128,7 @@
           <a:p>
             <a:fld id="{3E22BF2E-04DA-469E-97C5-BB68A0368813}" type="datetimeFigureOut">
               <a:rPr lang="en-US" smtClean="0"/>
-              <a:t>11/29/2025</a:t>
+              <a:t>1/8/2026</a:t>
             </a:fld>
             <a:endParaRPr lang="en-US"/>
           </a:p>
@@ -2439,7 +2439,7 @@
           <a:p>
             <a:fld id="{3E22BF2E-04DA-469E-97C5-BB68A0368813}" type="datetimeFigureOut">
               <a:rPr lang="en-US" smtClean="0"/>
-              <a:t>11/29/2025</a:t>
+              <a:t>1/8/2026</a:t>
             </a:fld>
             <a:endParaRPr lang="en-US"/>
           </a:p>
@@ -2727,7 +2727,7 @@
           <a:p>
             <a:fld id="{3E22BF2E-04DA-469E-97C5-BB68A0368813}" type="datetimeFigureOut">
               <a:rPr lang="en-US" smtClean="0"/>
-              <a:t>11/29/2025</a:t>
+              <a:t>1/8/2026</a:t>
             </a:fld>
             <a:endParaRPr lang="en-US"/>
           </a:p>
@@ -2968,7 +2968,7 @@
           <a:p>
             <a:fld id="{3E22BF2E-04DA-469E-97C5-BB68A0368813}" type="datetimeFigureOut">
               <a:rPr lang="en-US" smtClean="0"/>
-              <a:t>11/29/2025</a:t>
+              <a:t>1/8/2026</a:t>
             </a:fld>
             <a:endParaRPr lang="en-US"/>
           </a:p>
@@ -3641,7 +3641,7 @@
                   <a:schemeClr val="bg1"/>
                 </a:solidFill>
               </a:rPr>
-              <a:t>Temporal Difference Learning</a:t>
+              <a:t>Temporal-Difference Learning</a:t>
             </a:r>
             <a:br>
               <a:rPr lang="en-US" sz="4000" dirty="0">
@@ -3664,21 +3664,8 @@
                   <a:schemeClr val="bg1"/>
                 </a:solidFill>
               </a:rPr>
-              <a:t> </a:t>
+              <a:t> Chapter 6</a:t>
             </a:r>
-            <a:r>
-              <a:rPr lang="en-US" sz="2700">
-                <a:solidFill>
-                  <a:schemeClr val="bg1"/>
-                </a:solidFill>
-              </a:rPr>
-              <a:t>Chapter 6</a:t>
-            </a:r>
-            <a:endParaRPr lang="en-US" sz="2700" dirty="0">
-              <a:solidFill>
-                <a:schemeClr val="bg1"/>
-              </a:solidFill>
-            </a:endParaRPr>
           </a:p>
         </p:txBody>
       </p:sp>
@@ -4174,7 +4161,10 @@
           <a:bodyPr/>
           <a:lstStyle/>
           <a:p>
-            <a:endParaRPr lang="en-US"/>
+            <a:r>
+              <a:rPr lang="en-US" dirty="0"/>
+              <a:t>Find a good policy.</a:t>
+            </a:r>
           </a:p>
         </p:txBody>
       </p:sp>
@@ -4231,7 +4221,7 @@
           <a:p>
             <a:r>
               <a:rPr lang="en-US" dirty="0"/>
-              <a:t>Q-learning</a:t>
+              <a:t>Q-Learning</a:t>
             </a:r>
           </a:p>
         </p:txBody>
@@ -4840,8 +4830,8 @@
           </a:xfrm>
           <a:prstGeom prst="wedgeRoundRectCallout">
             <a:avLst>
-              <a:gd name="adj1" fmla="val -35067"/>
-              <a:gd name="adj2" fmla="val -77500"/>
+              <a:gd name="adj1" fmla="val -33678"/>
+              <a:gd name="adj2" fmla="val -101095"/>
               <a:gd name="adj3" fmla="val 16667"/>
             </a:avLst>
           </a:prstGeom>
@@ -4869,7 +4859,7 @@
             <a:pPr algn="ctr"/>
             <a:r>
               <a:rPr lang="en-US" sz="1400" dirty="0"/>
-              <a:t>The next action is not observed, but greedily chosen!</a:t>
+              <a:t>The next action has not yet been observed. It is greedily chosen!</a:t>
             </a:r>
           </a:p>
         </p:txBody>
@@ -5022,8 +5012,8 @@
           </a:p>
         </p:txBody>
       </p:sp>
-      <mc:AlternateContent xmlns:mc="http://schemas.openxmlformats.org/markup-compatibility/2006" xmlns:a14="http://schemas.microsoft.com/office/drawing/2010/main">
-        <mc:Choice Requires="a14">
+      <mc:AlternateContent xmlns:mc="http://schemas.openxmlformats.org/markup-compatibility/2006">
+        <mc:Choice xmlns:a14="http://schemas.microsoft.com/office/drawing/2010/main" Requires="a14">
           <p:sp>
             <p:nvSpPr>
               <p:cNvPr id="3" name="Content Placeholder 2">
@@ -5048,24 +5038,229 @@
             </p:spPr>
             <p:txBody>
               <a:bodyPr>
-                <a:normAutofit fontScale="85000" lnSpcReduction="10000"/>
+                <a:normAutofit fontScale="55000" lnSpcReduction="20000"/>
               </a:bodyPr>
               <a:lstStyle/>
               <a:p>
                 <a:r>
                   <a:rPr lang="en-US" dirty="0"/>
-                  <a:t>Q-learning has a </a:t>
-                </a:r>
-                <a:r>
-                  <a:rPr lang="en-US" b="1" dirty="0"/>
-                  <a:t>maximization bias</a:t>
-                </a:r>
-                <a:r>
-                  <a:rPr lang="en-US" dirty="0"/>
-                  <a:t>: </a:t>
+                  <a:t>Q-learning update: </a:t>
                 </a:r>
                 <a14:m>
                   <m:oMath xmlns:m="http://schemas.openxmlformats.org/officeDocument/2006/math">
+                    <m:r>
+                      <a:rPr lang="en-US" i="1">
+                        <a:latin typeface="Cambria Math" panose="02040503050406030204" pitchFamily="18" charset="0"/>
+                      </a:rPr>
+                      <m:t>𝑄</m:t>
+                    </m:r>
+                    <m:d>
+                      <m:dPr>
+                        <m:ctrlPr>
+                          <a:rPr lang="en-US" i="1">
+                            <a:latin typeface="Cambria Math" panose="02040503050406030204" pitchFamily="18" charset="0"/>
+                          </a:rPr>
+                        </m:ctrlPr>
+                      </m:dPr>
+                      <m:e>
+                        <m:sSub>
+                          <m:sSubPr>
+                            <m:ctrlPr>
+                              <a:rPr lang="en-US" i="1">
+                                <a:latin typeface="Cambria Math" panose="02040503050406030204" pitchFamily="18" charset="0"/>
+                              </a:rPr>
+                            </m:ctrlPr>
+                          </m:sSubPr>
+                          <m:e>
+                            <m:r>
+                              <a:rPr lang="en-US" i="1">
+                                <a:latin typeface="Cambria Math" panose="02040503050406030204" pitchFamily="18" charset="0"/>
+                              </a:rPr>
+                              <m:t>𝑆</m:t>
+                            </m:r>
+                          </m:e>
+                          <m:sub>
+                            <m:r>
+                              <a:rPr lang="en-US" i="1">
+                                <a:latin typeface="Cambria Math" panose="02040503050406030204" pitchFamily="18" charset="0"/>
+                              </a:rPr>
+                              <m:t>𝑡</m:t>
+                            </m:r>
+                          </m:sub>
+                        </m:sSub>
+                        <m:r>
+                          <a:rPr lang="en-US" i="1">
+                            <a:latin typeface="Cambria Math" panose="02040503050406030204" pitchFamily="18" charset="0"/>
+                          </a:rPr>
+                          <m:t>,</m:t>
+                        </m:r>
+                        <m:sSub>
+                          <m:sSubPr>
+                            <m:ctrlPr>
+                              <a:rPr lang="en-US" i="1">
+                                <a:latin typeface="Cambria Math" panose="02040503050406030204" pitchFamily="18" charset="0"/>
+                              </a:rPr>
+                            </m:ctrlPr>
+                          </m:sSubPr>
+                          <m:e>
+                            <m:r>
+                              <a:rPr lang="en-US" i="1">
+                                <a:latin typeface="Cambria Math" panose="02040503050406030204" pitchFamily="18" charset="0"/>
+                              </a:rPr>
+                              <m:t>𝐴</m:t>
+                            </m:r>
+                          </m:e>
+                          <m:sub>
+                            <m:r>
+                              <a:rPr lang="en-US" i="1">
+                                <a:latin typeface="Cambria Math" panose="02040503050406030204" pitchFamily="18" charset="0"/>
+                              </a:rPr>
+                              <m:t>𝑡</m:t>
+                            </m:r>
+                          </m:sub>
+                        </m:sSub>
+                      </m:e>
+                    </m:d>
+                    <m:r>
+                      <a:rPr lang="en-US" i="1">
+                        <a:latin typeface="Cambria Math" panose="02040503050406030204" pitchFamily="18" charset="0"/>
+                      </a:rPr>
+                      <m:t>←</m:t>
+                    </m:r>
+                    <m:r>
+                      <a:rPr lang="en-US" i="1">
+                        <a:latin typeface="Cambria Math" panose="02040503050406030204" pitchFamily="18" charset="0"/>
+                      </a:rPr>
+                      <m:t>𝑄</m:t>
+                    </m:r>
+                    <m:d>
+                      <m:dPr>
+                        <m:ctrlPr>
+                          <a:rPr lang="en-US" i="1">
+                            <a:latin typeface="Cambria Math" panose="02040503050406030204" pitchFamily="18" charset="0"/>
+                          </a:rPr>
+                        </m:ctrlPr>
+                      </m:dPr>
+                      <m:e>
+                        <m:sSub>
+                          <m:sSubPr>
+                            <m:ctrlPr>
+                              <a:rPr lang="en-US" i="1">
+                                <a:latin typeface="Cambria Math" panose="02040503050406030204" pitchFamily="18" charset="0"/>
+                              </a:rPr>
+                            </m:ctrlPr>
+                          </m:sSubPr>
+                          <m:e>
+                            <m:r>
+                              <a:rPr lang="en-US" i="1">
+                                <a:latin typeface="Cambria Math" panose="02040503050406030204" pitchFamily="18" charset="0"/>
+                              </a:rPr>
+                              <m:t>𝑆</m:t>
+                            </m:r>
+                          </m:e>
+                          <m:sub>
+                            <m:r>
+                              <a:rPr lang="en-US" i="1">
+                                <a:latin typeface="Cambria Math" panose="02040503050406030204" pitchFamily="18" charset="0"/>
+                              </a:rPr>
+                              <m:t>𝑡</m:t>
+                            </m:r>
+                          </m:sub>
+                        </m:sSub>
+                        <m:r>
+                          <a:rPr lang="en-US" i="1">
+                            <a:latin typeface="Cambria Math" panose="02040503050406030204" pitchFamily="18" charset="0"/>
+                          </a:rPr>
+                          <m:t>,</m:t>
+                        </m:r>
+                        <m:sSub>
+                          <m:sSubPr>
+                            <m:ctrlPr>
+                              <a:rPr lang="en-US" i="1">
+                                <a:latin typeface="Cambria Math" panose="02040503050406030204" pitchFamily="18" charset="0"/>
+                              </a:rPr>
+                            </m:ctrlPr>
+                          </m:sSubPr>
+                          <m:e>
+                            <m:r>
+                              <a:rPr lang="en-US" i="1">
+                                <a:latin typeface="Cambria Math" panose="02040503050406030204" pitchFamily="18" charset="0"/>
+                              </a:rPr>
+                              <m:t>𝐴</m:t>
+                            </m:r>
+                          </m:e>
+                          <m:sub>
+                            <m:r>
+                              <a:rPr lang="en-US" i="1">
+                                <a:latin typeface="Cambria Math" panose="02040503050406030204" pitchFamily="18" charset="0"/>
+                              </a:rPr>
+                              <m:t>𝑡</m:t>
+                            </m:r>
+                          </m:sub>
+                        </m:sSub>
+                      </m:e>
+                    </m:d>
+                    <m:r>
+                      <a:rPr lang="en-US" i="1">
+                        <a:latin typeface="Cambria Math" panose="02040503050406030204" pitchFamily="18" charset="0"/>
+                      </a:rPr>
+                      <m:t>+</m:t>
+                    </m:r>
+                    <m:r>
+                      <a:rPr lang="en-US" i="1">
+                        <a:latin typeface="Cambria Math" panose="02040503050406030204" pitchFamily="18" charset="0"/>
+                      </a:rPr>
+                      <m:t>𝛼</m:t>
+                    </m:r>
+                    <m:r>
+                      <a:rPr lang="en-US" i="1">
+                        <a:latin typeface="Cambria Math" panose="02040503050406030204" pitchFamily="18" charset="0"/>
+                      </a:rPr>
+                      <m:t>[</m:t>
+                    </m:r>
+                    <m:sSub>
+                      <m:sSubPr>
+                        <m:ctrlPr>
+                          <a:rPr lang="en-US" i="1">
+                            <a:latin typeface="Cambria Math" panose="02040503050406030204" pitchFamily="18" charset="0"/>
+                          </a:rPr>
+                        </m:ctrlPr>
+                      </m:sSubPr>
+                      <m:e>
+                        <m:r>
+                          <a:rPr lang="en-US" i="1">
+                            <a:latin typeface="Cambria Math" panose="02040503050406030204" pitchFamily="18" charset="0"/>
+                          </a:rPr>
+                          <m:t>𝑅</m:t>
+                        </m:r>
+                      </m:e>
+                      <m:sub>
+                        <m:r>
+                          <a:rPr lang="en-US" i="1">
+                            <a:latin typeface="Cambria Math" panose="02040503050406030204" pitchFamily="18" charset="0"/>
+                          </a:rPr>
+                          <m:t>𝑡</m:t>
+                        </m:r>
+                        <m:r>
+                          <a:rPr lang="en-US" i="1">
+                            <a:latin typeface="Cambria Math" panose="02040503050406030204" pitchFamily="18" charset="0"/>
+                          </a:rPr>
+                          <m:t>+1</m:t>
+                        </m:r>
+                      </m:sub>
+                    </m:sSub>
+                    <m:r>
+                      <a:rPr lang="en-US" i="1">
+                        <a:latin typeface="Cambria Math" panose="02040503050406030204" pitchFamily="18" charset="0"/>
+                      </a:rPr>
+                      <m:t>+</m:t>
+                    </m:r>
+                    <m:r>
+                      <a:rPr lang="en-US" i="1">
+                        <a:latin typeface="Cambria Math" panose="02040503050406030204" pitchFamily="18" charset="0"/>
+                      </a:rPr>
+                      <m:t>𝛾</m:t>
+                    </m:r>
                     <m:func>
                       <m:funcPr>
                         <m:ctrlPr>
@@ -5167,16 +5362,154 @@
                         </m:d>
                       </m:e>
                     </m:func>
+                    <m:r>
+                      <a:rPr lang="en-US" i="1">
+                        <a:latin typeface="Cambria Math" panose="02040503050406030204" pitchFamily="18" charset="0"/>
+                      </a:rPr>
+                      <m:t>−</m:t>
+                    </m:r>
+                    <m:r>
+                      <a:rPr lang="en-US" i="1">
+                        <a:latin typeface="Cambria Math" panose="02040503050406030204" pitchFamily="18" charset="0"/>
+                      </a:rPr>
+                      <m:t>𝑄</m:t>
+                    </m:r>
+                    <m:d>
+                      <m:dPr>
+                        <m:ctrlPr>
+                          <a:rPr lang="en-US" i="1">
+                            <a:latin typeface="Cambria Math" panose="02040503050406030204" pitchFamily="18" charset="0"/>
+                          </a:rPr>
+                        </m:ctrlPr>
+                      </m:dPr>
+                      <m:e>
+                        <m:sSub>
+                          <m:sSubPr>
+                            <m:ctrlPr>
+                              <a:rPr lang="en-US" i="1">
+                                <a:latin typeface="Cambria Math" panose="02040503050406030204" pitchFamily="18" charset="0"/>
+                              </a:rPr>
+                            </m:ctrlPr>
+                          </m:sSubPr>
+                          <m:e>
+                            <m:r>
+                              <a:rPr lang="en-US" i="1">
+                                <a:latin typeface="Cambria Math" panose="02040503050406030204" pitchFamily="18" charset="0"/>
+                              </a:rPr>
+                              <m:t>𝑆</m:t>
+                            </m:r>
+                          </m:e>
+                          <m:sub>
+                            <m:r>
+                              <a:rPr lang="en-US" i="1">
+                                <a:latin typeface="Cambria Math" panose="02040503050406030204" pitchFamily="18" charset="0"/>
+                              </a:rPr>
+                              <m:t>𝑡</m:t>
+                            </m:r>
+                          </m:sub>
+                        </m:sSub>
+                        <m:r>
+                          <a:rPr lang="en-US" i="1">
+                            <a:latin typeface="Cambria Math" panose="02040503050406030204" pitchFamily="18" charset="0"/>
+                          </a:rPr>
+                          <m:t>,</m:t>
+                        </m:r>
+                        <m:sSub>
+                          <m:sSubPr>
+                            <m:ctrlPr>
+                              <a:rPr lang="en-US" i="1">
+                                <a:latin typeface="Cambria Math" panose="02040503050406030204" pitchFamily="18" charset="0"/>
+                              </a:rPr>
+                            </m:ctrlPr>
+                          </m:sSubPr>
+                          <m:e>
+                            <m:r>
+                              <a:rPr lang="en-US" i="1">
+                                <a:latin typeface="Cambria Math" panose="02040503050406030204" pitchFamily="18" charset="0"/>
+                              </a:rPr>
+                              <m:t>𝐴</m:t>
+                            </m:r>
+                          </m:e>
+                          <m:sub>
+                            <m:r>
+                              <a:rPr lang="en-US" i="1">
+                                <a:latin typeface="Cambria Math" panose="02040503050406030204" pitchFamily="18" charset="0"/>
+                              </a:rPr>
+                              <m:t>𝑡</m:t>
+                            </m:r>
+                          </m:sub>
+                        </m:sSub>
+                      </m:e>
+                    </m:d>
+                    <m:r>
+                      <a:rPr lang="en-US" i="1">
+                        <a:latin typeface="Cambria Math" panose="02040503050406030204" pitchFamily="18" charset="0"/>
+                      </a:rPr>
+                      <m:t>]</m:t>
+                    </m:r>
                   </m:oMath>
                 </a14:m>
-                <a:r>
-                  <a:rPr lang="en-US" dirty="0"/>
-                  <a:t> always takes the maximum overestimates and thus will have a positive bias.</a:t>
-                </a:r>
+                <a:endParaRPr lang="en-US" dirty="0"/>
               </a:p>
               <a:p>
                 <a:r>
                   <a:rPr lang="en-US" dirty="0"/>
+                  <a:t>The next action is not observed, but </a:t>
+                </a:r>
+                <a14:m>
+                  <m:oMath xmlns:m="http://schemas.openxmlformats.org/officeDocument/2006/math">
+                    <m:r>
+                      <a:rPr lang="en-US" i="1" dirty="0" smtClean="0">
+                        <a:latin typeface="Cambria Math" panose="02040503050406030204" pitchFamily="18" charset="0"/>
+                      </a:rPr>
+                      <m:t>𝑄</m:t>
+                    </m:r>
+                  </m:oMath>
+                </a14:m>
+                <a:r>
+                  <a:rPr lang="en-US" dirty="0"/>
+                  <a:t>-values are updated by choosing the next action as the maximum over </a:t>
+                </a:r>
+                <a14:m>
+                  <m:oMath xmlns:m="http://schemas.openxmlformats.org/officeDocument/2006/math">
+                    <m:r>
+                      <a:rPr lang="en-US" i="1" dirty="0" smtClean="0">
+                        <a:latin typeface="Cambria Math" panose="02040503050406030204" pitchFamily="18" charset="0"/>
+                      </a:rPr>
+                      <m:t>𝑄</m:t>
+                    </m:r>
+                  </m:oMath>
+                </a14:m>
+                <a:r>
+                  <a:rPr lang="en-US" dirty="0"/>
+                  <a:t>-values. This cycle creates a </a:t>
+                </a:r>
+                <a:r>
+                  <a:rPr lang="en-US" b="1" dirty="0"/>
+                  <a:t>maximization bias </a:t>
+                </a:r>
+                <a:r>
+                  <a:rPr lang="en-US" dirty="0"/>
+                  <a:t>that leads to overestimating the </a:t>
+                </a:r>
+                <a14:m>
+                  <m:oMath xmlns:m="http://schemas.openxmlformats.org/officeDocument/2006/math">
+                    <m:r>
+                      <a:rPr lang="en-US" i="1" dirty="0">
+                        <a:latin typeface="Cambria Math" panose="02040503050406030204" pitchFamily="18" charset="0"/>
+                      </a:rPr>
+                      <m:t>𝑄</m:t>
+                    </m:r>
+                  </m:oMath>
+                </a14:m>
+                <a:r>
+                  <a:rPr lang="en-US" dirty="0"/>
+                  <a:t>- values.</a:t>
+                </a:r>
+              </a:p>
+              <a:p>
+                <a:r>
+                  <a:rPr lang="en-US" dirty="0"/>
                   <a:t>Solution: </a:t>
                 </a:r>
                 <a:r>
@@ -5185,7 +5518,7 @@
                 </a:r>
                 <a:r>
                   <a:rPr lang="en-US" dirty="0"/>
-                  <a:t>by learning two </a:t>
+                  <a:t>by learning two independent </a:t>
                 </a:r>
                 <a14:m>
                   <m:oMath xmlns:m="http://schemas.openxmlformats.org/officeDocument/2006/math">
@@ -5199,13 +5532,13 @@
                 </a14:m>
                 <a:r>
                   <a:rPr lang="en-US" dirty="0"/>
-                  <a:t> functions and averaging them.  </a:t>
+                  <a:t>-functions and using one for the action selection and the other one for the bootstrap estimation.</a:t>
                 </a:r>
               </a:p>
             </p:txBody>
           </p:sp>
         </mc:Choice>
-        <mc:Fallback xmlns="">
+        <mc:Fallback>
           <p:sp>
             <p:nvSpPr>
               <p:cNvPr id="3" name="Content Placeholder 2">
@@ -5230,7 +5563,7 @@
               <a:blipFill>
                 <a:blip r:embed="rId2"/>
                 <a:stretch>
-                  <a:fillRect l="-812" t="-8571" r="-1739" b="-4762"/>
+                  <a:fillRect l="-174" t="-5714"/>
                 </a:stretch>
               </a:blipFill>
             </p:spPr>
@@ -5279,6 +5612,113 @@
           </a:prstGeom>
         </p:spPr>
       </p:pic>
+      <p:sp>
+        <p:nvSpPr>
+          <p:cNvPr id="4" name="Speech Bubble: Rectangle with Corners Rounded 3">
+            <a:extLst>
+              <a:ext uri="{FF2B5EF4-FFF2-40B4-BE49-F238E27FC236}">
+                <a16:creationId xmlns:a16="http://schemas.microsoft.com/office/drawing/2014/main" id="{6B201E6C-66C1-30D3-1175-0AC396397A92}"/>
+              </a:ext>
+            </a:extLst>
+          </p:cNvPr>
+          <p:cNvSpPr/>
+          <p:nvPr/>
+        </p:nvSpPr>
+        <p:spPr>
+          <a:xfrm>
+            <a:off x="7308220" y="6247236"/>
+            <a:ext cx="816677" cy="361229"/>
+          </a:xfrm>
+          <a:prstGeom prst="wedgeRoundRectCallout">
+            <a:avLst>
+              <a:gd name="adj1" fmla="val -15705"/>
+              <a:gd name="adj2" fmla="val -139197"/>
+              <a:gd name="adj3" fmla="val 16667"/>
+            </a:avLst>
+          </a:prstGeom>
+        </p:spPr>
+        <p:style>
+          <a:lnRef idx="2">
+            <a:schemeClr val="accent1">
+              <a:shade val="15000"/>
+            </a:schemeClr>
+          </a:lnRef>
+          <a:fillRef idx="1">
+            <a:schemeClr val="accent1"/>
+          </a:fillRef>
+          <a:effectRef idx="0">
+            <a:schemeClr val="accent1"/>
+          </a:effectRef>
+          <a:fontRef idx="minor">
+            <a:schemeClr val="lt1"/>
+          </a:fontRef>
+        </p:style>
+        <p:txBody>
+          <a:bodyPr rtlCol="0" anchor="ctr"/>
+          <a:lstStyle/>
+          <a:p>
+            <a:pPr algn="ctr"/>
+            <a:r>
+              <a:rPr lang="en-US" sz="1100" dirty="0"/>
+              <a:t>Action selection</a:t>
+            </a:r>
+          </a:p>
+        </p:txBody>
+      </p:sp>
+      <p:sp>
+        <p:nvSpPr>
+          <p:cNvPr id="6" name="Speech Bubble: Rectangle with Corners Rounded 5">
+            <a:extLst>
+              <a:ext uri="{FF2B5EF4-FFF2-40B4-BE49-F238E27FC236}">
+                <a16:creationId xmlns:a16="http://schemas.microsoft.com/office/drawing/2014/main" id="{9F778E84-BBCC-BCE2-5C99-07B29039B196}"/>
+              </a:ext>
+            </a:extLst>
+          </p:cNvPr>
+          <p:cNvSpPr/>
+          <p:nvPr/>
+        </p:nvSpPr>
+        <p:spPr>
+          <a:xfrm>
+            <a:off x="5883106" y="6247236"/>
+            <a:ext cx="887643" cy="361229"/>
+          </a:xfrm>
+          <a:prstGeom prst="wedgeRoundRectCallout">
+            <a:avLst>
+              <a:gd name="adj1" fmla="val -15705"/>
+              <a:gd name="adj2" fmla="val -139197"/>
+              <a:gd name="adj3" fmla="val 16667"/>
+            </a:avLst>
+          </a:prstGeom>
+        </p:spPr>
+        <p:style>
+          <a:lnRef idx="2">
+            <a:schemeClr val="accent1">
+              <a:shade val="15000"/>
+            </a:schemeClr>
+          </a:lnRef>
+          <a:fillRef idx="1">
+            <a:schemeClr val="accent1"/>
+          </a:fillRef>
+          <a:effectRef idx="0">
+            <a:schemeClr val="accent1"/>
+          </a:effectRef>
+          <a:fontRef idx="minor">
+            <a:schemeClr val="lt1"/>
+          </a:fontRef>
+        </p:style>
+        <p:txBody>
+          <a:bodyPr rtlCol="0" anchor="ctr"/>
+          <a:lstStyle/>
+          <a:p>
+            <a:pPr algn="ctr"/>
+            <a:r>
+              <a:rPr lang="en-US" sz="1100"/>
+              <a:t>Bootstrap estimation</a:t>
+            </a:r>
+            <a:endParaRPr lang="en-US" sz="1100" dirty="0"/>
+          </a:p>
+        </p:txBody>
+      </p:sp>
     </p:spTree>
     <p:extLst>
       <p:ext uri="{BB962C8B-B14F-4D97-AF65-F5344CB8AC3E}">
@@ -8704,7 +9144,7 @@
             <p:spPr>
               <a:xfrm>
                 <a:off x="6211474" y="1140632"/>
-                <a:ext cx="5273179" cy="2049857"/>
+                <a:ext cx="5273179" cy="1735924"/>
               </a:xfrm>
             </p:spPr>
             <p:style>
@@ -9081,6 +9521,193 @@
                 </a:pPr>
                 <a14:m>
                   <m:oMath xmlns:m="http://schemas.openxmlformats.org/officeDocument/2006/math">
+                    <m:r>
+                      <a:rPr lang="en-US" sz="1200" i="1" dirty="0">
+                        <a:solidFill>
+                          <a:schemeClr val="tx1"/>
+                        </a:solidFill>
+                        <a:latin typeface="Cambria Math" panose="02040503050406030204" pitchFamily="18" charset="0"/>
+                      </a:rPr>
+                      <m:t>𝑉</m:t>
+                    </m:r>
+                    <m:r>
+                      <a:rPr lang="en-US" sz="1200" i="1" dirty="0">
+                        <a:solidFill>
+                          <a:schemeClr val="tx1"/>
+                        </a:solidFill>
+                        <a:latin typeface="Cambria Math" panose="02040503050406030204" pitchFamily="18" charset="0"/>
+                      </a:rPr>
+                      <m:t>, </m:t>
+                    </m:r>
+                    <m:sSub>
+                      <m:sSubPr>
+                        <m:ctrlPr>
+                          <a:rPr lang="en-US" sz="1200" i="1" dirty="0">
+                            <a:solidFill>
+                              <a:schemeClr val="tx1"/>
+                            </a:solidFill>
+                            <a:latin typeface="Cambria Math" panose="02040503050406030204" pitchFamily="18" charset="0"/>
+                          </a:rPr>
+                        </m:ctrlPr>
+                      </m:sSubPr>
+                      <m:e>
+                        <m:r>
+                          <a:rPr lang="en-US" sz="1200" i="1" dirty="0">
+                            <a:solidFill>
+                              <a:schemeClr val="tx1"/>
+                            </a:solidFill>
+                            <a:latin typeface="Cambria Math" panose="02040503050406030204" pitchFamily="18" charset="0"/>
+                          </a:rPr>
+                          <m:t>𝑉</m:t>
+                        </m:r>
+                      </m:e>
+                      <m:sub>
+                        <m:r>
+                          <a:rPr lang="en-US" sz="1200" i="1" dirty="0">
+                            <a:solidFill>
+                              <a:schemeClr val="tx1"/>
+                            </a:solidFill>
+                            <a:latin typeface="Cambria Math" panose="02040503050406030204" pitchFamily="18" charset="0"/>
+                          </a:rPr>
+                          <m:t>𝑡</m:t>
+                        </m:r>
+                      </m:sub>
+                    </m:sSub>
+                    <m:r>
+                      <a:rPr lang="en-US" sz="1200" i="1" dirty="0">
+                        <a:solidFill>
+                          <a:schemeClr val="tx1"/>
+                        </a:solidFill>
+                        <a:latin typeface="Cambria Math" panose="02040503050406030204" pitchFamily="18" charset="0"/>
+                      </a:rPr>
+                      <m:t> </m:t>
+                    </m:r>
+                  </m:oMath>
+                </a14:m>
+                <a:r>
+                  <a:rPr lang="en-US" sz="1200" dirty="0">
+                    <a:solidFill>
+                      <a:schemeClr val="tx1"/>
+                    </a:solidFill>
+                  </a:rPr>
+                  <a:t>	array estimates of state-value function </a:t>
+                </a:r>
+                <a14:m>
+                  <m:oMath xmlns:m="http://schemas.openxmlformats.org/officeDocument/2006/math">
+                    <m:sSub>
+                      <m:sSubPr>
+                        <m:ctrlPr>
+                          <a:rPr lang="en-US" sz="1200" i="1" dirty="0">
+                            <a:solidFill>
+                              <a:schemeClr val="tx1"/>
+                            </a:solidFill>
+                            <a:latin typeface="Cambria Math" panose="02040503050406030204" pitchFamily="18" charset="0"/>
+                          </a:rPr>
+                        </m:ctrlPr>
+                      </m:sSubPr>
+                      <m:e>
+                        <m:r>
+                          <a:rPr lang="en-US" sz="1200" i="1" dirty="0">
+                            <a:solidFill>
+                              <a:schemeClr val="tx1"/>
+                            </a:solidFill>
+                            <a:latin typeface="Cambria Math" panose="02040503050406030204" pitchFamily="18" charset="0"/>
+                          </a:rPr>
+                          <m:t>𝑣</m:t>
+                        </m:r>
+                      </m:e>
+                      <m:sub>
+                        <m:r>
+                          <a:rPr lang="en-US" sz="1200" i="1" dirty="0">
+                            <a:solidFill>
+                              <a:schemeClr val="tx1"/>
+                            </a:solidFill>
+                            <a:latin typeface="Cambria Math" panose="02040503050406030204" pitchFamily="18" charset="0"/>
+                          </a:rPr>
+                          <m:t>𝜋</m:t>
+                        </m:r>
+                      </m:sub>
+                    </m:sSub>
+                    <m:r>
+                      <a:rPr lang="en-US" sz="1200" i="1" dirty="0">
+                        <a:solidFill>
+                          <a:schemeClr val="tx1"/>
+                        </a:solidFill>
+                        <a:latin typeface="Cambria Math" panose="02040503050406030204" pitchFamily="18" charset="0"/>
+                      </a:rPr>
+                      <m:t> </m:t>
+                    </m:r>
+                  </m:oMath>
+                </a14:m>
+                <a:r>
+                  <a:rPr lang="en-US" sz="1200" dirty="0">
+                    <a:solidFill>
+                      <a:schemeClr val="tx1"/>
+                    </a:solidFill>
+                  </a:rPr>
+                  <a:t>or </a:t>
+                </a:r>
+                <a14:m>
+                  <m:oMath xmlns:m="http://schemas.openxmlformats.org/officeDocument/2006/math">
+                    <m:sSub>
+                      <m:sSubPr>
+                        <m:ctrlPr>
+                          <a:rPr lang="en-US" sz="1200" i="1" dirty="0">
+                            <a:solidFill>
+                              <a:schemeClr val="tx1"/>
+                            </a:solidFill>
+                            <a:latin typeface="Cambria Math" panose="02040503050406030204" pitchFamily="18" charset="0"/>
+                          </a:rPr>
+                        </m:ctrlPr>
+                      </m:sSubPr>
+                      <m:e>
+                        <m:r>
+                          <a:rPr lang="en-US" sz="1200" i="1" dirty="0">
+                            <a:solidFill>
+                              <a:schemeClr val="tx1"/>
+                            </a:solidFill>
+                            <a:latin typeface="Cambria Math" panose="02040503050406030204" pitchFamily="18" charset="0"/>
+                          </a:rPr>
+                          <m:t>𝑣</m:t>
+                        </m:r>
+                      </m:e>
+                      <m:sub>
+                        <m:r>
+                          <a:rPr lang="en-US" sz="1200" i="1" dirty="0">
+                            <a:solidFill>
+                              <a:schemeClr val="tx1"/>
+                            </a:solidFill>
+                            <a:latin typeface="Cambria Math" panose="02040503050406030204" pitchFamily="18" charset="0"/>
+                          </a:rPr>
+                          <m:t>∗</m:t>
+                        </m:r>
+                      </m:sub>
+                    </m:sSub>
+                    <m:r>
+                      <a:rPr lang="en-US" sz="1200" i="1" dirty="0">
+                        <a:solidFill>
+                          <a:schemeClr val="tx1"/>
+                        </a:solidFill>
+                        <a:latin typeface="Cambria Math" panose="02040503050406030204" pitchFamily="18" charset="0"/>
+                      </a:rPr>
+                      <m:t> </m:t>
+                    </m:r>
+                  </m:oMath>
+                </a14:m>
+                <a:endParaRPr lang="en-US" sz="1200" dirty="0"/>
+              </a:p>
+              <a:p>
+                <a:pPr marL="0" indent="0">
+                  <a:lnSpc>
+                    <a:spcPct val="100000"/>
+                  </a:lnSpc>
+                  <a:spcBef>
+                    <a:spcPts val="0"/>
+                  </a:spcBef>
+                  <a:buNone/>
+                </a:pPr>
+                <a14:m>
+                  <m:oMath xmlns:m="http://schemas.openxmlformats.org/officeDocument/2006/math">
                     <m:sSub>
                       <m:sSubPr>
                         <m:ctrlPr>
@@ -9283,194 +9910,6 @@
                   <a:rPr lang="en-US" sz="1200" dirty="0"/>
                   <a:t> under the optimal policy</a:t>
                 </a:r>
-              </a:p>
-              <a:p>
-                <a:pPr marL="0" indent="0">
-                  <a:spcBef>
-                    <a:spcPts val="0"/>
-                  </a:spcBef>
-                  <a:buNone/>
-                </a:pPr>
-                <a14:m>
-                  <m:oMath xmlns:m="http://schemas.openxmlformats.org/officeDocument/2006/math">
-                    <m:r>
-                      <a:rPr lang="en-US" sz="1200" i="1" dirty="0">
-                        <a:solidFill>
-                          <a:schemeClr val="tx1"/>
-                        </a:solidFill>
-                        <a:latin typeface="Cambria Math" panose="02040503050406030204" pitchFamily="18" charset="0"/>
-                      </a:rPr>
-                      <m:t>𝑉</m:t>
-                    </m:r>
-                    <m:r>
-                      <a:rPr lang="en-US" sz="1200" i="1" dirty="0">
-                        <a:solidFill>
-                          <a:schemeClr val="tx1"/>
-                        </a:solidFill>
-                        <a:latin typeface="Cambria Math" panose="02040503050406030204" pitchFamily="18" charset="0"/>
-                      </a:rPr>
-                      <m:t>, </m:t>
-                    </m:r>
-                    <m:sSub>
-                      <m:sSubPr>
-                        <m:ctrlPr>
-                          <a:rPr lang="en-US" sz="1200" i="1" dirty="0">
-                            <a:solidFill>
-                              <a:schemeClr val="tx1"/>
-                            </a:solidFill>
-                            <a:latin typeface="Cambria Math" panose="02040503050406030204" pitchFamily="18" charset="0"/>
-                          </a:rPr>
-                        </m:ctrlPr>
-                      </m:sSubPr>
-                      <m:e>
-                        <m:r>
-                          <a:rPr lang="en-US" sz="1200" i="1" dirty="0">
-                            <a:solidFill>
-                              <a:schemeClr val="tx1"/>
-                            </a:solidFill>
-                            <a:latin typeface="Cambria Math" panose="02040503050406030204" pitchFamily="18" charset="0"/>
-                          </a:rPr>
-                          <m:t>𝑉</m:t>
-                        </m:r>
-                      </m:e>
-                      <m:sub>
-                        <m:r>
-                          <a:rPr lang="en-US" sz="1200" i="1" dirty="0">
-                            <a:solidFill>
-                              <a:schemeClr val="tx1"/>
-                            </a:solidFill>
-                            <a:latin typeface="Cambria Math" panose="02040503050406030204" pitchFamily="18" charset="0"/>
-                          </a:rPr>
-                          <m:t>𝑡</m:t>
-                        </m:r>
-                      </m:sub>
-                    </m:sSub>
-                    <m:r>
-                      <a:rPr lang="en-US" sz="1200" i="1" dirty="0">
-                        <a:solidFill>
-                          <a:schemeClr val="tx1"/>
-                        </a:solidFill>
-                        <a:latin typeface="Cambria Math" panose="02040503050406030204" pitchFamily="18" charset="0"/>
-                      </a:rPr>
-                      <m:t> </m:t>
-                    </m:r>
-                  </m:oMath>
-                </a14:m>
-                <a:r>
-                  <a:rPr lang="en-US" sz="1200" dirty="0">
-                    <a:solidFill>
-                      <a:schemeClr val="tx1"/>
-                    </a:solidFill>
-                  </a:rPr>
-                  <a:t>	array estimates of state-value function </a:t>
-                </a:r>
-                <a14:m>
-                  <m:oMath xmlns:m="http://schemas.openxmlformats.org/officeDocument/2006/math">
-                    <m:sSub>
-                      <m:sSubPr>
-                        <m:ctrlPr>
-                          <a:rPr lang="en-US" sz="1200" i="1" dirty="0">
-                            <a:solidFill>
-                              <a:schemeClr val="tx1"/>
-                            </a:solidFill>
-                            <a:latin typeface="Cambria Math" panose="02040503050406030204" pitchFamily="18" charset="0"/>
-                          </a:rPr>
-                        </m:ctrlPr>
-                      </m:sSubPr>
-                      <m:e>
-                        <m:r>
-                          <a:rPr lang="en-US" sz="1200" i="1" dirty="0">
-                            <a:solidFill>
-                              <a:schemeClr val="tx1"/>
-                            </a:solidFill>
-                            <a:latin typeface="Cambria Math" panose="02040503050406030204" pitchFamily="18" charset="0"/>
-                          </a:rPr>
-                          <m:t>𝑣</m:t>
-                        </m:r>
-                      </m:e>
-                      <m:sub>
-                        <m:r>
-                          <a:rPr lang="en-US" sz="1200" i="1" dirty="0">
-                            <a:solidFill>
-                              <a:schemeClr val="tx1"/>
-                            </a:solidFill>
-                            <a:latin typeface="Cambria Math" panose="02040503050406030204" pitchFamily="18" charset="0"/>
-                          </a:rPr>
-                          <m:t>𝜋</m:t>
-                        </m:r>
-                      </m:sub>
-                    </m:sSub>
-                    <m:r>
-                      <a:rPr lang="en-US" sz="1200" i="1" dirty="0">
-                        <a:solidFill>
-                          <a:schemeClr val="tx1"/>
-                        </a:solidFill>
-                        <a:latin typeface="Cambria Math" panose="02040503050406030204" pitchFamily="18" charset="0"/>
-                      </a:rPr>
-                      <m:t> </m:t>
-                    </m:r>
-                  </m:oMath>
-                </a14:m>
-                <a:r>
-                  <a:rPr lang="en-US" sz="1200" dirty="0">
-                    <a:solidFill>
-                      <a:schemeClr val="tx1"/>
-                    </a:solidFill>
-                  </a:rPr>
-                  <a:t>or </a:t>
-                </a:r>
-                <a14:m>
-                  <m:oMath xmlns:m="http://schemas.openxmlformats.org/officeDocument/2006/math">
-                    <m:sSub>
-                      <m:sSubPr>
-                        <m:ctrlPr>
-                          <a:rPr lang="en-US" sz="1200" i="1" dirty="0">
-                            <a:solidFill>
-                              <a:schemeClr val="tx1"/>
-                            </a:solidFill>
-                            <a:latin typeface="Cambria Math" panose="02040503050406030204" pitchFamily="18" charset="0"/>
-                          </a:rPr>
-                        </m:ctrlPr>
-                      </m:sSubPr>
-                      <m:e>
-                        <m:r>
-                          <a:rPr lang="en-US" sz="1200" i="1" dirty="0">
-                            <a:solidFill>
-                              <a:schemeClr val="tx1"/>
-                            </a:solidFill>
-                            <a:latin typeface="Cambria Math" panose="02040503050406030204" pitchFamily="18" charset="0"/>
-                          </a:rPr>
-                          <m:t>𝑣</m:t>
-                        </m:r>
-                      </m:e>
-                      <m:sub>
-                        <m:r>
-                          <a:rPr lang="en-US" sz="1200" i="1" dirty="0">
-                            <a:solidFill>
-                              <a:schemeClr val="tx1"/>
-                            </a:solidFill>
-                            <a:latin typeface="Cambria Math" panose="02040503050406030204" pitchFamily="18" charset="0"/>
-                          </a:rPr>
-                          <m:t>∗</m:t>
-                        </m:r>
-                      </m:sub>
-                    </m:sSub>
-                    <m:r>
-                      <a:rPr lang="en-US" sz="1200" i="1" dirty="0">
-                        <a:solidFill>
-                          <a:schemeClr val="tx1"/>
-                        </a:solidFill>
-                        <a:latin typeface="Cambria Math" panose="02040503050406030204" pitchFamily="18" charset="0"/>
-                      </a:rPr>
-                      <m:t> </m:t>
-                    </m:r>
-                  </m:oMath>
-                </a14:m>
-                <a:endParaRPr lang="en-US" sz="1200" dirty="0">
-                  <a:solidFill>
-                    <a:schemeClr val="tx1"/>
-                  </a:solidFill>
-                </a:endParaRPr>
               </a:p>
               <a:p>
                 <a:pPr marL="0" indent="0">
@@ -9651,183 +10090,6 @@
                   </a:solidFill>
                 </a:endParaRPr>
               </a:p>
-              <a:p>
-                <a:pPr marL="0" indent="0">
-                  <a:spcBef>
-                    <a:spcPts val="0"/>
-                  </a:spcBef>
-                  <a:buNone/>
-                </a:pPr>
-                <a14:m>
-                  <m:oMath xmlns:m="http://schemas.openxmlformats.org/officeDocument/2006/math">
-                    <m:sSub>
-                      <m:sSubPr>
-                        <m:ctrlPr>
-                          <a:rPr lang="en-US" sz="1200" i="1" dirty="0">
-                            <a:solidFill>
-                              <a:schemeClr val="tx1"/>
-                            </a:solidFill>
-                            <a:latin typeface="Cambria Math" panose="02040503050406030204" pitchFamily="18" charset="0"/>
-                          </a:rPr>
-                        </m:ctrlPr>
-                      </m:sSubPr>
-                      <m:e>
-                        <m:acc>
-                          <m:accPr>
-                            <m:chr m:val="̅"/>
-                            <m:ctrlPr>
-                              <a:rPr lang="en-US" sz="1200" i="1" dirty="0">
-                                <a:solidFill>
-                                  <a:schemeClr val="tx1"/>
-                                </a:solidFill>
-                                <a:latin typeface="Cambria Math" panose="02040503050406030204" pitchFamily="18" charset="0"/>
-                              </a:rPr>
-                            </m:ctrlPr>
-                          </m:accPr>
-                          <m:e>
-                            <m:r>
-                              <a:rPr lang="en-US" sz="1200" i="1" dirty="0">
-                                <a:solidFill>
-                                  <a:schemeClr val="tx1"/>
-                                </a:solidFill>
-                                <a:latin typeface="Cambria Math" panose="02040503050406030204" pitchFamily="18" charset="0"/>
-                              </a:rPr>
-                              <m:t>𝑉</m:t>
-                            </m:r>
-                          </m:e>
-                        </m:acc>
-                      </m:e>
-                      <m:sub>
-                        <m:r>
-                          <a:rPr lang="en-US" sz="1200" i="1" dirty="0">
-                            <a:solidFill>
-                              <a:schemeClr val="tx1"/>
-                            </a:solidFill>
-                            <a:latin typeface="Cambria Math" panose="02040503050406030204" pitchFamily="18" charset="0"/>
-                          </a:rPr>
-                          <m:t>𝑡</m:t>
-                        </m:r>
-                      </m:sub>
-                    </m:sSub>
-                    <m:r>
-                      <a:rPr lang="en-US" sz="1200" i="1" dirty="0">
-                        <a:solidFill>
-                          <a:schemeClr val="tx1"/>
-                        </a:solidFill>
-                        <a:latin typeface="Cambria Math" panose="02040503050406030204" pitchFamily="18" charset="0"/>
-                      </a:rPr>
-                      <m:t>(</m:t>
-                    </m:r>
-                    <m:r>
-                      <a:rPr lang="en-US" sz="1200" i="1" dirty="0">
-                        <a:solidFill>
-                          <a:schemeClr val="tx1"/>
-                        </a:solidFill>
-                        <a:latin typeface="Cambria Math" panose="02040503050406030204" pitchFamily="18" charset="0"/>
-                      </a:rPr>
-                      <m:t>𝑠</m:t>
-                    </m:r>
-                    <m:r>
-                      <a:rPr lang="en-US" sz="1200" i="1" dirty="0">
-                        <a:solidFill>
-                          <a:schemeClr val="tx1"/>
-                        </a:solidFill>
-                        <a:latin typeface="Cambria Math" panose="02040503050406030204" pitchFamily="18" charset="0"/>
-                      </a:rPr>
-                      <m:t>) </m:t>
-                    </m:r>
-                  </m:oMath>
-                </a14:m>
-                <a:r>
-                  <a:rPr lang="en-US" sz="1200" dirty="0">
-                    <a:solidFill>
-                      <a:schemeClr val="tx1"/>
-                    </a:solidFill>
-                  </a:rPr>
-                  <a:t>	expected approximate action value</a:t>
-                </a:r>
-              </a:p>
-              <a:p>
-                <a:pPr marL="0" indent="0">
-                  <a:spcBef>
-                    <a:spcPts val="0"/>
-                  </a:spcBef>
-                  <a:buNone/>
-                </a:pPr>
-                <a14:m>
-                  <m:oMath xmlns:m="http://schemas.openxmlformats.org/officeDocument/2006/math">
-                    <m:sSub>
-                      <m:sSubPr>
-                        <m:ctrlPr>
-                          <a:rPr lang="en-US" sz="1200" i="1" dirty="0">
-                            <a:solidFill>
-                              <a:schemeClr val="tx1"/>
-                            </a:solidFill>
-                            <a:latin typeface="Cambria Math" panose="02040503050406030204" pitchFamily="18" charset="0"/>
-                          </a:rPr>
-                        </m:ctrlPr>
-                      </m:sSubPr>
-                      <m:e>
-                        <m:r>
-                          <a:rPr lang="en-US" sz="1200" i="1" dirty="0">
-                            <a:solidFill>
-                              <a:schemeClr val="tx1"/>
-                            </a:solidFill>
-                            <a:latin typeface="Cambria Math" panose="02040503050406030204" pitchFamily="18" charset="0"/>
-                          </a:rPr>
-                          <m:t>𝑈</m:t>
-                        </m:r>
-                      </m:e>
-                      <m:sub>
-                        <m:r>
-                          <a:rPr lang="en-US" sz="1200" i="1" dirty="0">
-                            <a:solidFill>
-                              <a:schemeClr val="tx1"/>
-                            </a:solidFill>
-                            <a:latin typeface="Cambria Math" panose="02040503050406030204" pitchFamily="18" charset="0"/>
-                          </a:rPr>
-                          <m:t>𝑡</m:t>
-                        </m:r>
-                      </m:sub>
-                    </m:sSub>
-                  </m:oMath>
-                </a14:m>
-                <a:r>
-                  <a:rPr lang="en-US" sz="1200" dirty="0">
-                    <a:solidFill>
-                      <a:schemeClr val="tx1"/>
-                    </a:solidFill>
-                  </a:rPr>
-                  <a:t>	target for estimate at time</a:t>
-                </a:r>
-                <a14:m>
-                  <m:oMath xmlns:m="http://schemas.openxmlformats.org/officeDocument/2006/math">
-                    <m:r>
-                      <a:rPr lang="en-US" sz="1200" i="1" dirty="0">
-                        <a:solidFill>
-                          <a:schemeClr val="tx1"/>
-                        </a:solidFill>
-                        <a:latin typeface="Cambria Math" panose="02040503050406030204" pitchFamily="18" charset="0"/>
-                      </a:rPr>
-                      <m:t> </m:t>
-                    </m:r>
-                    <m:r>
-                      <a:rPr lang="en-US" sz="1200" i="1" dirty="0">
-                        <a:solidFill>
-                          <a:schemeClr val="tx1"/>
-                        </a:solidFill>
-                        <a:latin typeface="Cambria Math" panose="02040503050406030204" pitchFamily="18" charset="0"/>
-                      </a:rPr>
-                      <m:t>𝑡</m:t>
-                    </m:r>
-                  </m:oMath>
-                </a14:m>
-                <a:endParaRPr lang="en-US" sz="1200" dirty="0">
-                  <a:solidFill>
-                    <a:schemeClr val="tx1"/>
-                  </a:solidFill>
-                </a:endParaRPr>
-              </a:p>
             </p:txBody>
           </p:sp>
         </mc:Choice>
@@ -9851,12 +10113,12 @@
             <p:spPr>
               <a:xfrm>
                 <a:off x="6211474" y="1140632"/>
-                <a:ext cx="5273179" cy="2049857"/>
+                <a:ext cx="5273179" cy="1735924"/>
               </a:xfrm>
               <a:blipFill>
                 <a:blip r:embed="rId2"/>
                 <a:stretch>
-                  <a:fillRect b="-885"/>
+                  <a:fillRect b="-1042"/>
                 </a:stretch>
               </a:blipFill>
             </p:spPr>
@@ -10273,6 +10535,20 @@
                 </a:r>
                 <a14:m>
                   <m:oMath xmlns:m="http://schemas.openxmlformats.org/officeDocument/2006/math">
+                    <m:r>
+                      <a:rPr lang="en-US" sz="1200" b="0" i="0" smtClean="0">
+                        <a:latin typeface="Cambria Math" panose="02040503050406030204" pitchFamily="18" charset="0"/>
+                        <a:ea typeface="Cambria Math" panose="02040503050406030204" pitchFamily="18" charset="0"/>
+                      </a:rPr>
+                      <m:t> </m:t>
+                    </m:r>
+                    <m:r>
+                      <a:rPr lang="en-US" sz="1200" b="0" i="1" smtClean="0">
+                        <a:latin typeface="Cambria Math" panose="02040503050406030204" pitchFamily="18" charset="0"/>
+                        <a:ea typeface="Cambria Math" panose="02040503050406030204" pitchFamily="18" charset="0"/>
+                      </a:rPr>
+                      <m:t> </m:t>
+                    </m:r>
                     <m:r>
                       <a:rPr lang="en-US" sz="1200" i="1">
                         <a:latin typeface="Cambria Math" panose="02040503050406030204" pitchFamily="18" charset="0"/>
@@ -10895,8 +11171,13 @@
                 </a14:m>
                 <a:r>
                   <a:rPr lang="en-US" sz="1200" dirty="0"/>
-                  <a:t> are all states </a:t>
-                </a:r>
+                  <a:t> are </a:t>
+                </a:r>
+                <a:r>
+                  <a:rPr lang="en-US" sz="1200"/>
+                  <a:t>all states </a:t>
+                </a:r>
+                <a:endParaRPr lang="en-US" sz="1200" dirty="0"/>
               </a:p>
               <a:p>
                 <a:pPr marL="0" indent="0">
@@ -11593,10 +11874,425 @@
           </p:sp>
         </mc:Fallback>
       </mc:AlternateContent>
+      <mc:AlternateContent xmlns:mc="http://schemas.openxmlformats.org/markup-compatibility/2006" xmlns:a14="http://schemas.microsoft.com/office/drawing/2010/main">
+        <mc:Choice Requires="a14">
+          <p:sp>
+            <p:nvSpPr>
+              <p:cNvPr id="4" name="Content Placeholder 2">
+                <a:extLst>
+                  <a:ext uri="{FF2B5EF4-FFF2-40B4-BE49-F238E27FC236}">
+                    <a16:creationId xmlns:a16="http://schemas.microsoft.com/office/drawing/2014/main" id="{4F4C60C7-0132-6EC0-3150-3FC296CE2D6F}"/>
+                  </a:ext>
+                </a:extLst>
+              </p:cNvPr>
+              <p:cNvSpPr txBox="1">
+                <a:spLocks/>
+              </p:cNvSpPr>
+              <p:nvPr/>
+            </p:nvSpPr>
+            <p:spPr>
+              <a:xfrm>
+                <a:off x="6211474" y="3010149"/>
+                <a:ext cx="5273179" cy="646331"/>
+              </a:xfrm>
+              <a:prstGeom prst="rect">
+                <a:avLst/>
+              </a:prstGeom>
+            </p:spPr>
+            <p:style>
+              <a:lnRef idx="2">
+                <a:schemeClr val="accent2"/>
+              </a:lnRef>
+              <a:fillRef idx="1">
+                <a:schemeClr val="lt1"/>
+              </a:fillRef>
+              <a:effectRef idx="0">
+                <a:schemeClr val="accent2"/>
+              </a:effectRef>
+              <a:fontRef idx="minor">
+                <a:schemeClr val="dk1"/>
+              </a:fontRef>
+            </p:style>
+            <p:txBody>
+              <a:bodyPr vert="horz" lIns="91440" tIns="45720" rIns="91440" bIns="45720" rtlCol="0">
+                <a:spAutoFit/>
+              </a:bodyPr>
+              <a:lstStyle>
+                <a:lvl1pPr marL="228600" indent="-228600" algn="l" defTabSz="914400" rtl="0" eaLnBrk="1" latinLnBrk="0" hangingPunct="1">
+                  <a:lnSpc>
+                    <a:spcPct val="90000"/>
+                  </a:lnSpc>
+                  <a:spcBef>
+                    <a:spcPts val="1000"/>
+                  </a:spcBef>
+                  <a:buFont typeface="Arial" panose="020B0604020202020204" pitchFamily="34" charset="0"/>
+                  <a:buChar char="•"/>
+                  <a:defRPr sz="2800" kern="1200">
+                    <a:solidFill>
+                      <a:schemeClr val="dk1"/>
+                    </a:solidFill>
+                    <a:latin typeface="+mn-lt"/>
+                    <a:ea typeface="+mn-ea"/>
+                    <a:cs typeface="+mn-cs"/>
+                  </a:defRPr>
+                </a:lvl1pPr>
+                <a:lvl2pPr marL="685800" indent="-228600" algn="l" defTabSz="914400" rtl="0" eaLnBrk="1" latinLnBrk="0" hangingPunct="1">
+                  <a:lnSpc>
+                    <a:spcPct val="90000"/>
+                  </a:lnSpc>
+                  <a:spcBef>
+                    <a:spcPts val="500"/>
+                  </a:spcBef>
+                  <a:buFont typeface="Arial" panose="020B0604020202020204" pitchFamily="34" charset="0"/>
+                  <a:buChar char="•"/>
+                  <a:defRPr sz="2400" kern="1200">
+                    <a:solidFill>
+                      <a:schemeClr val="dk1"/>
+                    </a:solidFill>
+                    <a:latin typeface="+mn-lt"/>
+                    <a:ea typeface="+mn-ea"/>
+                    <a:cs typeface="+mn-cs"/>
+                  </a:defRPr>
+                </a:lvl2pPr>
+                <a:lvl3pPr marL="1143000" indent="-228600" algn="l" defTabSz="914400" rtl="0" eaLnBrk="1" latinLnBrk="0" hangingPunct="1">
+                  <a:lnSpc>
+                    <a:spcPct val="90000"/>
+                  </a:lnSpc>
+                  <a:spcBef>
+                    <a:spcPts val="500"/>
+                  </a:spcBef>
+                  <a:buFont typeface="Arial" panose="020B0604020202020204" pitchFamily="34" charset="0"/>
+                  <a:buChar char="•"/>
+                  <a:defRPr sz="2000" kern="1200">
+                    <a:solidFill>
+                      <a:schemeClr val="dk1"/>
+                    </a:solidFill>
+                    <a:latin typeface="+mn-lt"/>
+                    <a:ea typeface="+mn-ea"/>
+                    <a:cs typeface="+mn-cs"/>
+                  </a:defRPr>
+                </a:lvl3pPr>
+                <a:lvl4pPr marL="1600200" indent="-228600" algn="l" defTabSz="914400" rtl="0" eaLnBrk="1" latinLnBrk="0" hangingPunct="1">
+                  <a:lnSpc>
+                    <a:spcPct val="90000"/>
+                  </a:lnSpc>
+                  <a:spcBef>
+                    <a:spcPts val="500"/>
+                  </a:spcBef>
+                  <a:buFont typeface="Arial" panose="020B0604020202020204" pitchFamily="34" charset="0"/>
+                  <a:buChar char="•"/>
+                  <a:defRPr sz="1800" kern="1200">
+                    <a:solidFill>
+                      <a:schemeClr val="dk1"/>
+                    </a:solidFill>
+                    <a:latin typeface="+mn-lt"/>
+                    <a:ea typeface="+mn-ea"/>
+                    <a:cs typeface="+mn-cs"/>
+                  </a:defRPr>
+                </a:lvl4pPr>
+                <a:lvl5pPr marL="2057400" indent="-228600" algn="l" defTabSz="914400" rtl="0" eaLnBrk="1" latinLnBrk="0" hangingPunct="1">
+                  <a:lnSpc>
+                    <a:spcPct val="90000"/>
+                  </a:lnSpc>
+                  <a:spcBef>
+                    <a:spcPts val="500"/>
+                  </a:spcBef>
+                  <a:buFont typeface="Arial" panose="020B0604020202020204" pitchFamily="34" charset="0"/>
+                  <a:buChar char="•"/>
+                  <a:defRPr sz="1800" kern="1200">
+                    <a:solidFill>
+                      <a:schemeClr val="dk1"/>
+                    </a:solidFill>
+                    <a:latin typeface="+mn-lt"/>
+                    <a:ea typeface="+mn-ea"/>
+                    <a:cs typeface="+mn-cs"/>
+                  </a:defRPr>
+                </a:lvl5pPr>
+                <a:lvl6pPr marL="2514600" indent="-228600" algn="l" defTabSz="914400" rtl="0" eaLnBrk="1" latinLnBrk="0" hangingPunct="1">
+                  <a:lnSpc>
+                    <a:spcPct val="90000"/>
+                  </a:lnSpc>
+                  <a:spcBef>
+                    <a:spcPts val="500"/>
+                  </a:spcBef>
+                  <a:buFont typeface="Arial" panose="020B0604020202020204" pitchFamily="34" charset="0"/>
+                  <a:buChar char="•"/>
+                  <a:defRPr sz="1800" kern="1200">
+                    <a:solidFill>
+                      <a:schemeClr val="dk1"/>
+                    </a:solidFill>
+                    <a:latin typeface="+mn-lt"/>
+                    <a:ea typeface="+mn-ea"/>
+                    <a:cs typeface="+mn-cs"/>
+                  </a:defRPr>
+                </a:lvl6pPr>
+                <a:lvl7pPr marL="2971800" indent="-228600" algn="l" defTabSz="914400" rtl="0" eaLnBrk="1" latinLnBrk="0" hangingPunct="1">
+                  <a:lnSpc>
+                    <a:spcPct val="90000"/>
+                  </a:lnSpc>
+                  <a:spcBef>
+                    <a:spcPts val="500"/>
+                  </a:spcBef>
+                  <a:buFont typeface="Arial" panose="020B0604020202020204" pitchFamily="34" charset="0"/>
+                  <a:buChar char="•"/>
+                  <a:defRPr sz="1800" kern="1200">
+                    <a:solidFill>
+                      <a:schemeClr val="dk1"/>
+                    </a:solidFill>
+                    <a:latin typeface="+mn-lt"/>
+                    <a:ea typeface="+mn-ea"/>
+                    <a:cs typeface="+mn-cs"/>
+                  </a:defRPr>
+                </a:lvl7pPr>
+                <a:lvl8pPr marL="3429000" indent="-228600" algn="l" defTabSz="914400" rtl="0" eaLnBrk="1" latinLnBrk="0" hangingPunct="1">
+                  <a:lnSpc>
+                    <a:spcPct val="90000"/>
+                  </a:lnSpc>
+                  <a:spcBef>
+                    <a:spcPts val="500"/>
+                  </a:spcBef>
+                  <a:buFont typeface="Arial" panose="020B0604020202020204" pitchFamily="34" charset="0"/>
+                  <a:buChar char="•"/>
+                  <a:defRPr sz="1800" kern="1200">
+                    <a:solidFill>
+                      <a:schemeClr val="dk1"/>
+                    </a:solidFill>
+                    <a:latin typeface="+mn-lt"/>
+                    <a:ea typeface="+mn-ea"/>
+                    <a:cs typeface="+mn-cs"/>
+                  </a:defRPr>
+                </a:lvl8pPr>
+                <a:lvl9pPr marL="3886200" indent="-228600" algn="l" defTabSz="914400" rtl="0" eaLnBrk="1" latinLnBrk="0" hangingPunct="1">
+                  <a:lnSpc>
+                    <a:spcPct val="90000"/>
+                  </a:lnSpc>
+                  <a:spcBef>
+                    <a:spcPts val="500"/>
+                  </a:spcBef>
+                  <a:buFont typeface="Arial" panose="020B0604020202020204" pitchFamily="34" charset="0"/>
+                  <a:buChar char="•"/>
+                  <a:defRPr sz="1800" kern="1200">
+                    <a:solidFill>
+                      <a:schemeClr val="dk1"/>
+                    </a:solidFill>
+                    <a:latin typeface="+mn-lt"/>
+                    <a:ea typeface="+mn-ea"/>
+                    <a:cs typeface="+mn-cs"/>
+                  </a:defRPr>
+                </a:lvl9pPr>
+              </a:lstStyle>
+              <a:p>
+                <a:pPr marL="0" indent="0">
+                  <a:lnSpc>
+                    <a:spcPct val="100000"/>
+                  </a:lnSpc>
+                  <a:spcBef>
+                    <a:spcPts val="0"/>
+                  </a:spcBef>
+                  <a:buFont typeface="Arial" panose="020B0604020202020204" pitchFamily="34" charset="0"/>
+                  <a:buNone/>
+                </a:pPr>
+                <a:r>
+                  <a:rPr lang="en-US" sz="1200" b="1" dirty="0"/>
+                  <a:t>Temporal Differencing</a:t>
+                </a:r>
+                <a:endParaRPr lang="en-US" sz="1200" i="1" dirty="0">
+                  <a:latin typeface="Cambria Math" panose="02040503050406030204" pitchFamily="18" charset="0"/>
+                </a:endParaRPr>
+              </a:p>
+              <a:p>
+                <a:pPr marL="0" indent="0">
+                  <a:lnSpc>
+                    <a:spcPct val="100000"/>
+                  </a:lnSpc>
+                  <a:spcBef>
+                    <a:spcPts val="0"/>
+                  </a:spcBef>
+                  <a:buNone/>
+                </a:pPr>
+                <a14:m>
+                  <m:oMath xmlns:m="http://schemas.openxmlformats.org/officeDocument/2006/math">
+                    <m:sSub>
+                      <m:sSubPr>
+                        <m:ctrlPr>
+                          <a:rPr lang="en-US" sz="1200" i="1" dirty="0">
+                            <a:solidFill>
+                              <a:schemeClr val="tx1"/>
+                            </a:solidFill>
+                            <a:latin typeface="Cambria Math" panose="02040503050406030204" pitchFamily="18" charset="0"/>
+                          </a:rPr>
+                        </m:ctrlPr>
+                      </m:sSubPr>
+                      <m:e>
+                        <m:r>
+                          <a:rPr lang="en-US" sz="1200" i="1" dirty="0">
+                            <a:solidFill>
+                              <a:schemeClr val="tx1"/>
+                            </a:solidFill>
+                            <a:latin typeface="Cambria Math" panose="02040503050406030204" pitchFamily="18" charset="0"/>
+                          </a:rPr>
+                          <m:t>𝑈</m:t>
+                        </m:r>
+                      </m:e>
+                      <m:sub>
+                        <m:r>
+                          <a:rPr lang="en-US" sz="1200" i="1" dirty="0">
+                            <a:solidFill>
+                              <a:schemeClr val="tx1"/>
+                            </a:solidFill>
+                            <a:latin typeface="Cambria Math" panose="02040503050406030204" pitchFamily="18" charset="0"/>
+                          </a:rPr>
+                          <m:t>𝑡</m:t>
+                        </m:r>
+                      </m:sub>
+                    </m:sSub>
+                  </m:oMath>
+                </a14:m>
+                <a:r>
+                  <a:rPr lang="en-US" sz="1200" dirty="0">
+                    <a:solidFill>
+                      <a:schemeClr val="tx1"/>
+                    </a:solidFill>
+                  </a:rPr>
+                  <a:t>	target for estimate at time</a:t>
+                </a:r>
+                <a14:m>
+                  <m:oMath xmlns:m="http://schemas.openxmlformats.org/officeDocument/2006/math">
+                    <m:r>
+                      <a:rPr lang="en-US" sz="1200" i="1" dirty="0">
+                        <a:solidFill>
+                          <a:schemeClr val="tx1"/>
+                        </a:solidFill>
+                        <a:latin typeface="Cambria Math" panose="02040503050406030204" pitchFamily="18" charset="0"/>
+                      </a:rPr>
+                      <m:t> </m:t>
+                    </m:r>
+                    <m:r>
+                      <a:rPr lang="en-US" sz="1200" i="1" dirty="0">
+                        <a:solidFill>
+                          <a:schemeClr val="tx1"/>
+                        </a:solidFill>
+                        <a:latin typeface="Cambria Math" panose="02040503050406030204" pitchFamily="18" charset="0"/>
+                      </a:rPr>
+                      <m:t>𝑡</m:t>
+                    </m:r>
+                  </m:oMath>
+                </a14:m>
+                <a:endParaRPr lang="en-US" sz="1200" dirty="0">
+                  <a:solidFill>
+                    <a:schemeClr val="tx1"/>
+                  </a:solidFill>
+                </a:endParaRPr>
+              </a:p>
+              <a:p>
+                <a:pPr marL="0" indent="0">
+                  <a:lnSpc>
+                    <a:spcPct val="100000"/>
+                  </a:lnSpc>
+                  <a:spcBef>
+                    <a:spcPts val="0"/>
+                  </a:spcBef>
+                  <a:buNone/>
+                </a:pPr>
+                <a14:m>
+                  <m:oMath xmlns:m="http://schemas.openxmlformats.org/officeDocument/2006/math">
+                    <m:sSub>
+                      <m:sSubPr>
+                        <m:ctrlPr>
+                          <a:rPr lang="en-US" sz="1200" i="1" dirty="0">
+                            <a:solidFill>
+                              <a:schemeClr val="tx1"/>
+                            </a:solidFill>
+                            <a:latin typeface="Cambria Math" panose="02040503050406030204" pitchFamily="18" charset="0"/>
+                          </a:rPr>
+                        </m:ctrlPr>
+                      </m:sSubPr>
+                      <m:e>
+                        <m:r>
+                          <a:rPr lang="en-US" sz="1200" b="0" i="1" dirty="0" smtClean="0">
+                            <a:solidFill>
+                              <a:schemeClr val="tx1"/>
+                            </a:solidFill>
+                            <a:latin typeface="Cambria Math" panose="02040503050406030204" pitchFamily="18" charset="0"/>
+                          </a:rPr>
+                          <m:t>𝛿</m:t>
+                        </m:r>
+                      </m:e>
+                      <m:sub>
+                        <m:r>
+                          <a:rPr lang="en-US" sz="1200" i="1" dirty="0">
+                            <a:solidFill>
+                              <a:schemeClr val="tx1"/>
+                            </a:solidFill>
+                            <a:latin typeface="Cambria Math" panose="02040503050406030204" pitchFamily="18" charset="0"/>
+                          </a:rPr>
+                          <m:t>𝑡</m:t>
+                        </m:r>
+                      </m:sub>
+                    </m:sSub>
+                  </m:oMath>
+                </a14:m>
+                <a:r>
+                  <a:rPr lang="en-US" sz="1200" dirty="0">
+                    <a:solidFill>
+                      <a:schemeClr val="tx1"/>
+                    </a:solidFill>
+                  </a:rPr>
+                  <a:t>	TD error</a:t>
+                </a:r>
+              </a:p>
+            </p:txBody>
+          </p:sp>
+        </mc:Choice>
+        <mc:Fallback xmlns="">
+          <p:sp>
+            <p:nvSpPr>
+              <p:cNvPr id="4" name="Content Placeholder 2">
+                <a:extLst>
+                  <a:ext uri="{FF2B5EF4-FFF2-40B4-BE49-F238E27FC236}">
+                    <a16:creationId xmlns:a16="http://schemas.microsoft.com/office/drawing/2014/main" id="{4F4C60C7-0132-6EC0-3150-3FC296CE2D6F}"/>
+                  </a:ext>
+                </a:extLst>
+              </p:cNvPr>
+              <p:cNvSpPr txBox="1">
+                <a:spLocks noRot="1" noChangeAspect="1" noMove="1" noResize="1" noEditPoints="1" noAdjustHandles="1" noChangeArrowheads="1" noChangeShapeType="1" noTextEdit="1"/>
+              </p:cNvSpPr>
+              <p:nvPr/>
+            </p:nvSpPr>
+            <p:spPr>
+              <a:xfrm>
+                <a:off x="6211474" y="3010149"/>
+                <a:ext cx="5273179" cy="646331"/>
+              </a:xfrm>
+              <a:prstGeom prst="rect">
+                <a:avLst/>
+              </a:prstGeom>
+              <a:blipFill>
+                <a:blip r:embed="rId5"/>
+                <a:stretch>
+                  <a:fillRect b="-4587"/>
+                </a:stretch>
+              </a:blipFill>
+            </p:spPr>
+            <p:txBody>
+              <a:bodyPr/>
+              <a:lstStyle/>
+              <a:p>
+                <a:r>
+                  <a:rPr lang="en-US">
+                    <a:noFill/>
+                  </a:rPr>
+                  <a:t> </a:t>
+                </a:r>
+              </a:p>
+            </p:txBody>
+          </p:sp>
+        </mc:Fallback>
+      </mc:AlternateContent>
     </p:spTree>
     <p:extLst>
       <p:ext uri="{BB962C8B-B14F-4D97-AF65-F5344CB8AC3E}">
-        <p14:creationId xmlns:p14="http://schemas.microsoft.com/office/powerpoint/2010/main" val="920694018"/>
+        <p14:creationId xmlns:p14="http://schemas.microsoft.com/office/powerpoint/2010/main" val="2575471504"/>
       </p:ext>
     </p:extLst>
   </p:cSld>
@@ -11995,7 +12691,7 @@
           <a:p>
             <a:r>
               <a:rPr lang="en-US" dirty="0"/>
-              <a:t>Temporal Difference (TD)</a:t>
+              <a:t>Temporal-Difference (TD) Learning</a:t>
             </a:r>
           </a:p>
         </p:txBody>
@@ -12488,15 +13184,7 @@
                 <a:pPr lvl="1"/>
                 <a:r>
                   <a:rPr lang="en-US" dirty="0"/>
-                  <a:t>From DP: estimate without waiting for the final outcome (aka </a:t>
-                </a:r>
-                <a:r>
-                  <a:rPr lang="en-US" dirty="0" err="1"/>
-                  <a:t>bootstraping</a:t>
-                </a:r>
-                <a:r>
-                  <a:rPr lang="en-US" dirty="0"/>
-                  <a:t>)</a:t>
+                  <a:t>From DP: calculates the error between two value estimates without waiting for the end of the episode. </a:t>
                 </a:r>
               </a:p>
             </p:txBody>
@@ -12621,7 +13309,10 @@
           <a:bodyPr/>
           <a:lstStyle/>
           <a:p>
-            <a:endParaRPr lang="en-US"/>
+            <a:r>
+              <a:rPr lang="en-US" dirty="0"/>
+              <a:t>Estimate the value function for a policy.</a:t>
+            </a:r>
           </a:p>
         </p:txBody>
       </p:sp>
@@ -12701,9 +13392,16 @@
                 <p:ph idx="1"/>
               </p:nvPr>
             </p:nvSpPr>
-            <p:spPr/>
+            <p:spPr>
+              <a:xfrm>
+                <a:off x="838200" y="1397330"/>
+                <a:ext cx="10515600" cy="4933668"/>
+              </a:xfrm>
+            </p:spPr>
             <p:txBody>
-              <a:bodyPr/>
+              <a:bodyPr>
+                <a:normAutofit lnSpcReduction="10000"/>
+              </a:bodyPr>
               <a:lstStyle/>
               <a:p>
                 <a:r>
@@ -13264,6 +13962,19 @@
               <a:p>
                 <a:endParaRPr lang="en-US" dirty="0"/>
               </a:p>
+              <a:p>
+                <a:endParaRPr lang="en-US" dirty="0"/>
+              </a:p>
+              <a:p>
+                <a:r>
+                  <a:rPr lang="en-US" dirty="0"/>
+                  <a:t>Updating an estimate using another estimate is called </a:t>
+                </a:r>
+                <a:r>
+                  <a:rPr lang="en-US" b="1" dirty="0"/>
+                  <a:t>“bootstrapping.”</a:t>
+                </a:r>
+              </a:p>
             </p:txBody>
           </p:sp>
         </mc:Choice>
@@ -13285,10 +13996,14 @@
               </p:nvPr>
             </p:nvSpPr>
             <p:spPr>
+              <a:xfrm>
+                <a:off x="838200" y="1397330"/>
+                <a:ext cx="10515600" cy="4933668"/>
+              </a:xfrm>
               <a:blipFill>
                 <a:blip r:embed="rId2"/>
                 <a:stretch>
-                  <a:fillRect l="-1043" t="-2168"/>
+                  <a:fillRect l="-1043" t="-2716"/>
                 </a:stretch>
               </a:blipFill>
             </p:spPr>
@@ -13321,10 +14036,10 @@
         </p:nvGrpSpPr>
         <p:grpSpPr>
           <a:xfrm>
-            <a:off x="4699685" y="1920094"/>
-            <a:ext cx="1541724" cy="537879"/>
-            <a:chOff x="4699685" y="1920094"/>
-            <a:chExt cx="1541724" cy="537879"/>
+            <a:off x="4029524" y="1879051"/>
+            <a:ext cx="3370666" cy="488182"/>
+            <a:chOff x="4029524" y="1969791"/>
+            <a:chExt cx="3370666" cy="488182"/>
           </a:xfrm>
         </p:grpSpPr>
         <p:sp>
@@ -13385,8 +14100,8 @@
           </p:nvSpPr>
           <p:spPr>
             <a:xfrm>
-              <a:off x="4942165" y="1920094"/>
-              <a:ext cx="1056764" cy="369332"/>
+              <a:off x="4029524" y="1969791"/>
+              <a:ext cx="3370666" cy="369332"/>
             </a:xfrm>
             <a:prstGeom prst="rect">
               <a:avLst/>
@@ -13402,7 +14117,7 @@
               <a:pPr algn="ctr"/>
               <a:r>
                 <a:rPr lang="en-US" dirty="0"/>
-                <a:t>MC Error</a:t>
+                <a:t>MC Error over complete episode</a:t>
               </a:r>
             </a:p>
           </p:txBody>
@@ -13422,7 +14137,7 @@
         </p:nvGrpSpPr>
         <p:grpSpPr>
           <a:xfrm>
-            <a:off x="4512329" y="3510649"/>
+            <a:off x="4512329" y="3273328"/>
             <a:ext cx="3725659" cy="537879"/>
             <a:chOff x="4699685" y="1920094"/>
             <a:chExt cx="1541724" cy="537879"/>
@@ -13486,8 +14201,8 @@
           </p:nvSpPr>
           <p:spPr>
             <a:xfrm>
-              <a:off x="5267152" y="1920094"/>
-              <a:ext cx="406788" cy="369332"/>
+              <a:off x="5014554" y="1920094"/>
+              <a:ext cx="911990" cy="369332"/>
             </a:xfrm>
             <a:prstGeom prst="rect">
               <a:avLst/>
@@ -13503,7 +14218,7 @@
               <a:pPr algn="ctr"/>
               <a:r>
                 <a:rPr lang="en-US" dirty="0"/>
-                <a:t>TD Error</a:t>
+                <a:t>TD Error for one step</a:t>
               </a:r>
             </a:p>
           </p:txBody>
@@ -13523,10 +14238,10 @@
         </p:nvGrpSpPr>
         <p:grpSpPr>
           <a:xfrm>
-            <a:off x="2115130" y="4571292"/>
-            <a:ext cx="7537064" cy="847117"/>
-            <a:chOff x="3220703" y="2257187"/>
-            <a:chExt cx="4619580" cy="847117"/>
+            <a:off x="3421385" y="4333971"/>
+            <a:ext cx="4924554" cy="570118"/>
+            <a:chOff x="4021326" y="2257187"/>
+            <a:chExt cx="3018333" cy="570118"/>
           </a:xfrm>
         </p:grpSpPr>
         <p:sp>
@@ -13573,50 +14288,174 @@
             </a:p>
           </p:txBody>
         </p:sp>
-        <p:sp>
-          <p:nvSpPr>
-            <p:cNvPr id="13" name="TextBox 12">
-              <a:extLst>
-                <a:ext uri="{FF2B5EF4-FFF2-40B4-BE49-F238E27FC236}">
-                  <a16:creationId xmlns:a16="http://schemas.microsoft.com/office/drawing/2014/main" id="{167C0F56-3D54-6751-0D3D-658F027B96FA}"/>
-                </a:ext>
-              </a:extLst>
-            </p:cNvPr>
-            <p:cNvSpPr txBox="1"/>
-            <p:nvPr/>
-          </p:nvSpPr>
-          <p:spPr>
-            <a:xfrm>
-              <a:off x="3220703" y="2457973"/>
-              <a:ext cx="4619580" cy="646331"/>
-            </a:xfrm>
-            <a:prstGeom prst="rect">
-              <a:avLst/>
-            </a:prstGeom>
-            <a:noFill/>
-          </p:spPr>
-          <p:txBody>
-            <a:bodyPr wrap="none" rtlCol="0">
-              <a:spAutoFit/>
-            </a:bodyPr>
-            <a:lstStyle/>
-            <a:p>
-              <a:pPr algn="ctr"/>
-              <a:r>
-                <a:rPr lang="en-US" dirty="0"/>
-                <a:t>Uses reward + estimate for next state = target</a:t>
-              </a:r>
-            </a:p>
-            <a:p>
-              <a:pPr algn="ctr"/>
-              <a:r>
-                <a:rPr lang="en-US" dirty="0"/>
-                <a:t>Without waiting for the end of the sequence. Similar to bootstrapping in DP</a:t>
-              </a:r>
-            </a:p>
-          </p:txBody>
-        </p:sp>
+        <mc:AlternateContent xmlns:mc="http://schemas.openxmlformats.org/markup-compatibility/2006" xmlns:a14="http://schemas.microsoft.com/office/drawing/2010/main">
+          <mc:Choice Requires="a14">
+            <p:sp>
+              <p:nvSpPr>
+                <p:cNvPr id="13" name="TextBox 12">
+                  <a:extLst>
+                    <a:ext uri="{FF2B5EF4-FFF2-40B4-BE49-F238E27FC236}">
+                      <a16:creationId xmlns:a16="http://schemas.microsoft.com/office/drawing/2014/main" id="{167C0F56-3D54-6751-0D3D-658F027B96FA}"/>
+                    </a:ext>
+                  </a:extLst>
+                </p:cNvPr>
+                <p:cNvSpPr txBox="1"/>
+                <p:nvPr/>
+              </p:nvSpPr>
+              <p:spPr>
+                <a:xfrm>
+                  <a:off x="4021326" y="2457973"/>
+                  <a:ext cx="3018333" cy="369332"/>
+                </a:xfrm>
+                <a:prstGeom prst="rect">
+                  <a:avLst/>
+                </a:prstGeom>
+                <a:noFill/>
+              </p:spPr>
+              <p:txBody>
+                <a:bodyPr wrap="none" rtlCol="0">
+                  <a:spAutoFit/>
+                </a:bodyPr>
+                <a:lstStyle/>
+                <a:p>
+                  <a:pPr algn="ctr"/>
+                  <a:r>
+                    <a:rPr lang="en-US" dirty="0"/>
+                    <a:t>Uses reward + estimate for next state = target </a:t>
+                  </a:r>
+                  <a14:m>
+                    <m:oMath xmlns:m="http://schemas.openxmlformats.org/officeDocument/2006/math">
+                      <m:sSub>
+                        <m:sSubPr>
+                          <m:ctrlPr>
+                            <a:rPr lang="en-US" b="0" i="1" smtClean="0">
+                              <a:latin typeface="Cambria Math" panose="02040503050406030204" pitchFamily="18" charset="0"/>
+                            </a:rPr>
+                          </m:ctrlPr>
+                        </m:sSubPr>
+                        <m:e>
+                          <m:r>
+                            <a:rPr lang="en-US" b="0" i="1" smtClean="0">
+                              <a:latin typeface="Cambria Math" panose="02040503050406030204" pitchFamily="18" charset="0"/>
+                            </a:rPr>
+                            <m:t>𝑈</m:t>
+                          </m:r>
+                        </m:e>
+                        <m:sub>
+                          <m:r>
+                            <a:rPr lang="en-US" b="0" i="1" smtClean="0">
+                              <a:latin typeface="Cambria Math" panose="02040503050406030204" pitchFamily="18" charset="0"/>
+                            </a:rPr>
+                            <m:t>𝑡</m:t>
+                          </m:r>
+                        </m:sub>
+                      </m:sSub>
+                    </m:oMath>
+                  </a14:m>
+                  <a:endParaRPr lang="en-US" dirty="0"/>
+                </a:p>
+              </p:txBody>
+            </p:sp>
+          </mc:Choice>
+          <mc:Fallback xmlns="">
+            <p:sp>
+              <p:nvSpPr>
+                <p:cNvPr id="13" name="TextBox 12">
+                  <a:extLst>
+                    <a:ext uri="{FF2B5EF4-FFF2-40B4-BE49-F238E27FC236}">
+                      <a16:creationId xmlns:a16="http://schemas.microsoft.com/office/drawing/2014/main" id="{167C0F56-3D54-6751-0D3D-658F027B96FA}"/>
+                    </a:ext>
+                  </a:extLst>
+                </p:cNvPr>
+                <p:cNvSpPr txBox="1">
+                  <a:spLocks noRot="1" noChangeAspect="1" noMove="1" noResize="1" noEditPoints="1" noAdjustHandles="1" noChangeArrowheads="1" noChangeShapeType="1" noTextEdit="1"/>
+                </p:cNvSpPr>
+                <p:nvPr/>
+              </p:nvSpPr>
+              <p:spPr>
+                <a:xfrm>
+                  <a:off x="4021326" y="2457973"/>
+                  <a:ext cx="3018333" cy="369332"/>
+                </a:xfrm>
+                <a:prstGeom prst="rect">
+                  <a:avLst/>
+                </a:prstGeom>
+                <a:blipFill>
+                  <a:blip r:embed="rId3"/>
+                  <a:stretch>
+                    <a:fillRect l="-495" t="-8333" b="-28333"/>
+                  </a:stretch>
+                </a:blipFill>
+              </p:spPr>
+              <p:txBody>
+                <a:bodyPr/>
+                <a:lstStyle/>
+                <a:p>
+                  <a:r>
+                    <a:rPr lang="en-US">
+                      <a:noFill/>
+                    </a:rPr>
+                    <a:t> </a:t>
+                  </a:r>
+                </a:p>
+              </p:txBody>
+            </p:sp>
+          </mc:Fallback>
+        </mc:AlternateContent>
       </p:grpSp>
+      <p:sp>
+        <p:nvSpPr>
+          <p:cNvPr id="5" name="Speech Bubble: Rectangle with Corners Rounded 4">
+            <a:extLst>
+              <a:ext uri="{FF2B5EF4-FFF2-40B4-BE49-F238E27FC236}">
+                <a16:creationId xmlns:a16="http://schemas.microsoft.com/office/drawing/2014/main" id="{6A0B74D7-9C8E-74BE-DB63-95D4B6C89ACD}"/>
+              </a:ext>
+            </a:extLst>
+          </p:cNvPr>
+          <p:cNvSpPr/>
+          <p:nvPr/>
+        </p:nvSpPr>
+        <p:spPr>
+          <a:xfrm>
+            <a:off x="8753111" y="1221527"/>
+            <a:ext cx="2352312" cy="1451871"/>
+          </a:xfrm>
+          <a:prstGeom prst="wedgeRoundRectCallout">
+            <a:avLst>
+              <a:gd name="adj1" fmla="val -143682"/>
+              <a:gd name="adj2" fmla="val 44712"/>
+              <a:gd name="adj3" fmla="val 16667"/>
+            </a:avLst>
+          </a:prstGeom>
+        </p:spPr>
+        <p:style>
+          <a:lnRef idx="2">
+            <a:schemeClr val="accent1">
+              <a:shade val="15000"/>
+            </a:schemeClr>
+          </a:lnRef>
+          <a:fillRef idx="1">
+            <a:schemeClr val="accent1"/>
+          </a:fillRef>
+          <a:effectRef idx="0">
+            <a:schemeClr val="accent1"/>
+          </a:effectRef>
+          <a:fontRef idx="minor">
+            <a:schemeClr val="lt1"/>
+          </a:fontRef>
+        </p:style>
+        <p:txBody>
+          <a:bodyPr rtlCol="0" anchor="ctr"/>
+          <a:lstStyle/>
+          <a:p>
+            <a:pPr algn="ctr"/>
+            <a:r>
+              <a:rPr lang="en-US" dirty="0"/>
+              <a:t>Compare with the incremental Implementation of MC methods.</a:t>
+            </a:r>
+          </a:p>
+        </p:txBody>
+      </p:sp>
     </p:spTree>
     <p:extLst>
       <p:ext uri="{BB962C8B-B14F-4D97-AF65-F5344CB8AC3E}">
@@ -14266,7 +15105,10 @@
           <a:bodyPr/>
           <a:lstStyle/>
           <a:p>
-            <a:endParaRPr lang="en-US"/>
+            <a:r>
+              <a:rPr lang="en-US" dirty="0"/>
+              <a:t>Find a good policy.</a:t>
+            </a:r>
           </a:p>
         </p:txBody>
       </p:sp>
@@ -14349,7 +15191,7 @@
             <p:spPr/>
             <p:txBody>
               <a:bodyPr>
-                <a:normAutofit/>
+                <a:normAutofit fontScale="92500" lnSpcReduction="10000"/>
               </a:bodyPr>
               <a:lstStyle/>
               <a:p>
@@ -14432,7 +15274,7 @@
                 </a14:m>
                 <a:r>
                   <a:rPr lang="en-US" dirty="0"/>
-                  <a:t> using the table </a:t>
+                  <a:t> using the </a:t>
                 </a:r>
                 <a14:m>
                   <m:oMath xmlns:m="http://schemas.openxmlformats.org/officeDocument/2006/math">
@@ -14446,7 +15288,7 @@
                 </a14:m>
                 <a:r>
                   <a:rPr lang="en-US" dirty="0"/>
-                  <a:t> for current behavior </a:t>
+                  <a:t>-table for current behavior </a:t>
                 </a:r>
                 <a14:m>
                   <m:oMath xmlns:m="http://schemas.openxmlformats.org/officeDocument/2006/math">
@@ -14482,6 +15324,9 @@
                   <a:rPr lang="en-US" dirty="0"/>
                   <a:t> </a:t>
                 </a:r>
+              </a:p>
+              <a:p>
+                <a:endParaRPr lang="en-US" dirty="0"/>
               </a:p>
               <a:p>
                 <a:pPr marL="0" indent="0" algn="ctr">
@@ -15012,8 +15857,35 @@
               </a:p>
               <a:p>
                 <a:r>
+                  <a:rPr lang="en-US" b="1" dirty="0"/>
+                  <a:t>Prediction</a:t>
+                </a:r>
+                <a:r>
                   <a:rPr lang="en-US" dirty="0"/>
-                  <a:t>Update uses </a:t>
+                  <a:t>: Create a soft policy based on </a:t>
+                </a:r>
+                <a14:m>
+                  <m:oMath xmlns:m="http://schemas.openxmlformats.org/officeDocument/2006/math">
+                    <m:r>
+                      <a:rPr lang="en-US" i="1" dirty="0" smtClean="0">
+                        <a:latin typeface="Cambria Math" panose="02040503050406030204" pitchFamily="18" charset="0"/>
+                      </a:rPr>
+                      <m:t>𝑄</m:t>
+                    </m:r>
+                  </m:oMath>
+                </a14:m>
+                <a:r>
+                  <a:rPr lang="en-US" dirty="0"/>
+                  <a:t>.</a:t>
+                </a:r>
+              </a:p>
+              <a:p>
+                <a:endParaRPr lang="en-US" dirty="0"/>
+              </a:p>
+              <a:p>
+                <a:r>
+                  <a:rPr lang="en-US" dirty="0"/>
+                  <a:t>Note: Update uses </a:t>
                 </a:r>
                 <a14:m>
                   <m:oMath xmlns:m="http://schemas.openxmlformats.org/officeDocument/2006/math">
@@ -15200,11 +16072,11 @@
                 </a14:m>
                 <a:r>
                   <a:rPr lang="en-US" dirty="0"/>
-                  <a:t> and is called </a:t>
+                  <a:t> which leads to the name </a:t>
                 </a:r>
                 <a:r>
                   <a:rPr lang="en-US" b="1" dirty="0"/>
-                  <a:t>Sarsa</a:t>
+                  <a:t>Sarsa.</a:t>
                 </a:r>
               </a:p>
             </p:txBody>
@@ -15231,7 +16103,7 @@
               <a:blipFill>
                 <a:blip r:embed="rId2"/>
                 <a:stretch>
-                  <a:fillRect l="-1043" t="-2168" r="-580"/>
+                  <a:fillRect l="-928" t="-2551" r="-522"/>
                 </a:stretch>
               </a:blipFill>
             </p:spPr>

--- a/slides/Lecture_Chapter06.pptx
+++ b/slides/Lecture_Chapter06.pptx
@@ -18,14 +18,16 @@
     <p:sldId id="391" r:id="rId12"/>
     <p:sldId id="402" r:id="rId13"/>
     <p:sldId id="393" r:id="rId14"/>
-    <p:sldId id="398" r:id="rId15"/>
-    <p:sldId id="395" r:id="rId16"/>
-    <p:sldId id="397" r:id="rId17"/>
-    <p:sldId id="399" r:id="rId18"/>
-    <p:sldId id="394" r:id="rId19"/>
-    <p:sldId id="396" r:id="rId20"/>
-    <p:sldId id="401" r:id="rId21"/>
-    <p:sldId id="400" r:id="rId22"/>
+    <p:sldId id="404" r:id="rId15"/>
+    <p:sldId id="397" r:id="rId16"/>
+    <p:sldId id="405" r:id="rId17"/>
+    <p:sldId id="398" r:id="rId18"/>
+    <p:sldId id="403" r:id="rId19"/>
+    <p:sldId id="399" r:id="rId20"/>
+    <p:sldId id="394" r:id="rId21"/>
+    <p:sldId id="396" r:id="rId22"/>
+    <p:sldId id="401" r:id="rId23"/>
+    <p:sldId id="400" r:id="rId24"/>
   </p:sldIdLst>
   <p:sldSz cx="12192000" cy="6858000"/>
   <p:notesSz cx="6858000" cy="9144000"/>
@@ -142,9 +144,11 @@
             <p14:sldId id="391"/>
             <p14:sldId id="402"/>
             <p14:sldId id="393"/>
+            <p14:sldId id="404"/>
+            <p14:sldId id="397"/>
+            <p14:sldId id="405"/>
             <p14:sldId id="398"/>
-            <p14:sldId id="395"/>
-            <p14:sldId id="397"/>
+            <p14:sldId id="403"/>
             <p14:sldId id="399"/>
             <p14:sldId id="394"/>
             <p14:sldId id="396"/>
@@ -4052,6 +4056,36 @@
       </p:sp>
       <p:pic>
         <p:nvPicPr>
+          <p:cNvPr id="3" name="Content Placeholder 4">
+            <a:extLst>
+              <a:ext uri="{FF2B5EF4-FFF2-40B4-BE49-F238E27FC236}">
+                <a16:creationId xmlns:a16="http://schemas.microsoft.com/office/drawing/2014/main" id="{318D103E-5321-14FF-CCC2-395C1CC0051F}"/>
+              </a:ext>
+            </a:extLst>
+          </p:cNvPr>
+          <p:cNvPicPr>
+            <a:picLocks noChangeAspect="1"/>
+          </p:cNvPicPr>
+          <p:nvPr/>
+        </p:nvPicPr>
+        <p:blipFill>
+          <a:blip r:embed="rId2"/>
+          <a:stretch>
+            <a:fillRect/>
+          </a:stretch>
+        </p:blipFill>
+        <p:spPr>
+          <a:xfrm>
+            <a:off x="328648" y="1124198"/>
+            <a:ext cx="7810209" cy="3497737"/>
+          </a:xfrm>
+          <a:prstGeom prst="rect">
+            <a:avLst/>
+          </a:prstGeom>
+        </p:spPr>
+      </p:pic>
+      <p:pic>
+        <p:nvPicPr>
           <p:cNvPr id="5" name="Content Placeholder 4">
             <a:extLst>
               <a:ext uri="{FF2B5EF4-FFF2-40B4-BE49-F238E27FC236}">
@@ -4067,21 +4101,174 @@
           </p:nvPr>
         </p:nvPicPr>
         <p:blipFill>
-          <a:blip r:embed="rId2"/>
+          <a:blip r:embed="rId3"/>
+          <a:srcRect l="881" t="2315"/>
           <a:stretch>
             <a:fillRect/>
           </a:stretch>
         </p:blipFill>
         <p:spPr>
           <a:xfrm>
-            <a:off x="838200" y="1396010"/>
-            <a:ext cx="10515600" cy="4732956"/>
+            <a:off x="2778100" y="2303693"/>
+            <a:ext cx="8813024" cy="3909253"/>
           </a:xfrm>
           <a:prstGeom prst="rect">
             <a:avLst/>
           </a:prstGeom>
         </p:spPr>
       </p:pic>
+      <p:sp>
+        <p:nvSpPr>
+          <p:cNvPr id="4" name="Arrow: Down 3">
+            <a:extLst>
+              <a:ext uri="{FF2B5EF4-FFF2-40B4-BE49-F238E27FC236}">
+                <a16:creationId xmlns:a16="http://schemas.microsoft.com/office/drawing/2014/main" id="{F0C5B7EE-01C9-2D78-163C-913D0732A91E}"/>
+              </a:ext>
+            </a:extLst>
+          </p:cNvPr>
+          <p:cNvSpPr/>
+          <p:nvPr/>
+        </p:nvSpPr>
+        <p:spPr>
+          <a:xfrm rot="16930409">
+            <a:off x="2168618" y="2756389"/>
+            <a:ext cx="868261" cy="767593"/>
+          </a:xfrm>
+          <a:prstGeom prst="downArrow">
+            <a:avLst/>
+          </a:prstGeom>
+        </p:spPr>
+        <p:style>
+          <a:lnRef idx="2">
+            <a:schemeClr val="accent1">
+              <a:shade val="15000"/>
+            </a:schemeClr>
+          </a:lnRef>
+          <a:fillRef idx="1">
+            <a:schemeClr val="accent1"/>
+          </a:fillRef>
+          <a:effectRef idx="0">
+            <a:schemeClr val="accent1"/>
+          </a:effectRef>
+          <a:fontRef idx="minor">
+            <a:schemeClr val="lt1"/>
+          </a:fontRef>
+        </p:style>
+        <p:txBody>
+          <a:bodyPr rtlCol="0" anchor="ctr"/>
+          <a:lstStyle/>
+          <a:p>
+            <a:pPr algn="ctr"/>
+            <a:endParaRPr lang="en-US"/>
+          </a:p>
+        </p:txBody>
+      </p:sp>
+      <p:sp>
+        <p:nvSpPr>
+          <p:cNvPr id="6" name="Speech Bubble: Rectangle with Corners Rounded 5">
+            <a:extLst>
+              <a:ext uri="{FF2B5EF4-FFF2-40B4-BE49-F238E27FC236}">
+                <a16:creationId xmlns:a16="http://schemas.microsoft.com/office/drawing/2014/main" id="{53595906-8F94-26CC-2214-B8E6821BE78C}"/>
+              </a:ext>
+            </a:extLst>
+          </p:cNvPr>
+          <p:cNvSpPr/>
+          <p:nvPr/>
+        </p:nvSpPr>
+        <p:spPr>
+          <a:xfrm>
+            <a:off x="8285441" y="1033063"/>
+            <a:ext cx="1703157" cy="921380"/>
+          </a:xfrm>
+          <a:prstGeom prst="wedgeRoundRectCallout">
+            <a:avLst>
+              <a:gd name="adj1" fmla="val -48291"/>
+              <a:gd name="adj2" fmla="val 95875"/>
+              <a:gd name="adj3" fmla="val 16667"/>
+            </a:avLst>
+          </a:prstGeom>
+        </p:spPr>
+        <p:style>
+          <a:lnRef idx="2">
+            <a:schemeClr val="accent1">
+              <a:shade val="15000"/>
+            </a:schemeClr>
+          </a:lnRef>
+          <a:fillRef idx="1">
+            <a:schemeClr val="accent1"/>
+          </a:fillRef>
+          <a:effectRef idx="0">
+            <a:schemeClr val="accent1"/>
+          </a:effectRef>
+          <a:fontRef idx="minor">
+            <a:schemeClr val="lt1"/>
+          </a:fontRef>
+        </p:style>
+        <p:txBody>
+          <a:bodyPr rtlCol="0" anchor="ctr"/>
+          <a:lstStyle/>
+          <a:p>
+            <a:pPr algn="ctr"/>
+            <a:r>
+              <a:rPr lang="en-US" sz="1400" dirty="0"/>
+              <a:t>The learned and followed policy is expressed as a Q-function.</a:t>
+            </a:r>
+          </a:p>
+        </p:txBody>
+      </p:sp>
+      <p:sp>
+        <p:nvSpPr>
+          <p:cNvPr id="7" name="Speech Bubble: Rectangle with Corners Rounded 6">
+            <a:extLst>
+              <a:ext uri="{FF2B5EF4-FFF2-40B4-BE49-F238E27FC236}">
+                <a16:creationId xmlns:a16="http://schemas.microsoft.com/office/drawing/2014/main" id="{42895067-CBCB-93E1-7A6D-13DB95242BA9}"/>
+              </a:ext>
+            </a:extLst>
+          </p:cNvPr>
+          <p:cNvSpPr/>
+          <p:nvPr/>
+        </p:nvSpPr>
+        <p:spPr>
+          <a:xfrm>
+            <a:off x="9520928" y="5646943"/>
+            <a:ext cx="2261570" cy="638683"/>
+          </a:xfrm>
+          <a:prstGeom prst="wedgeRoundRectCallout">
+            <a:avLst>
+              <a:gd name="adj1" fmla="val -76886"/>
+              <a:gd name="adj2" fmla="val -115675"/>
+              <a:gd name="adj3" fmla="val 16667"/>
+            </a:avLst>
+          </a:prstGeom>
+        </p:spPr>
+        <p:style>
+          <a:lnRef idx="2">
+            <a:schemeClr val="accent1">
+              <a:shade val="15000"/>
+            </a:schemeClr>
+          </a:lnRef>
+          <a:fillRef idx="1">
+            <a:schemeClr val="accent1"/>
+          </a:fillRef>
+          <a:effectRef idx="0">
+            <a:schemeClr val="accent1"/>
+          </a:effectRef>
+          <a:fontRef idx="minor">
+            <a:schemeClr val="lt1"/>
+          </a:fontRef>
+        </p:style>
+        <p:txBody>
+          <a:bodyPr rtlCol="0" anchor="ctr"/>
+          <a:lstStyle/>
+          <a:p>
+            <a:pPr algn="ctr"/>
+            <a:r>
+              <a:rPr lang="en-US" sz="1400" dirty="0"/>
+              <a:t>Follow the policy derived from the Q-function + update the Q-function.</a:t>
+            </a:r>
+          </a:p>
+        </p:txBody>
+      </p:sp>
     </p:spTree>
     <p:extLst>
       <p:ext uri="{BB962C8B-B14F-4D97-AF65-F5344CB8AC3E}">
@@ -4135,7 +4322,7 @@
           <a:p>
             <a:r>
               <a:rPr lang="en-US" dirty="0"/>
-              <a:t>Q-learning: Off-policy TD Control</a:t>
+              <a:t>Q-Learning: Off-policy TD Control</a:t>
             </a:r>
           </a:p>
         </p:txBody>
@@ -4226,8 +4413,8 @@
           </a:p>
         </p:txBody>
       </p:sp>
-      <mc:AlternateContent xmlns:mc="http://schemas.openxmlformats.org/markup-compatibility/2006" xmlns:a14="http://schemas.microsoft.com/office/drawing/2010/main">
-        <mc:Choice Requires="a14">
+      <mc:AlternateContent xmlns:mc="http://schemas.openxmlformats.org/markup-compatibility/2006">
+        <mc:Choice xmlns:a14="http://schemas.microsoft.com/office/drawing/2010/main" Requires="a14">
           <p:sp>
             <p:nvSpPr>
               <p:cNvPr id="3" name="Content Placeholder 2">
@@ -4246,7 +4433,9 @@
             </p:nvSpPr>
             <p:spPr/>
             <p:txBody>
-              <a:bodyPr/>
+              <a:bodyPr>
+                <a:normAutofit fontScale="92500" lnSpcReduction="20000"/>
+              </a:bodyPr>
               <a:lstStyle/>
               <a:p>
                 <a:r>
@@ -4257,8 +4446,11 @@
               <a:p>
                 <a:r>
                   <a:rPr lang="en-US" dirty="0"/>
-                  <a:t>Update rule only uses Sars:</a:t>
-                </a:r>
+                  <a:t>Update rule only uses observed Sars:</a:t>
+                </a:r>
+              </a:p>
+              <a:p>
+                <a:endParaRPr lang="en-US" dirty="0"/>
               </a:p>
               <a:p>
                 <a:pPr marL="0" indent="0" algn="ctr">
@@ -4689,6 +4881,34 @@
                 <a14:m>
                   <m:oMath xmlns:m="http://schemas.openxmlformats.org/officeDocument/2006/math">
                     <m:r>
+                      <m:rPr>
+                        <m:nor/>
+                      </m:rPr>
+                      <a:rPr lang="en-US" b="1" dirty="0"/>
+                      <m:t>Off</m:t>
+                    </m:r>
+                    <m:r>
+                      <m:rPr>
+                        <m:nor/>
+                      </m:rPr>
+                      <a:rPr lang="en-US" b="1" dirty="0"/>
+                      <m:t>-</m:t>
+                    </m:r>
+                    <m:r>
+                      <m:rPr>
+                        <m:nor/>
+                      </m:rPr>
+                      <a:rPr lang="en-US" b="1" dirty="0"/>
+                      <m:t>policy</m:t>
+                    </m:r>
+                    <m:r>
+                      <m:rPr>
+                        <m:nor/>
+                      </m:rPr>
+                      <a:rPr lang="en-US" b="0" i="0" dirty="0" smtClean="0"/>
+                      <m:t>: </m:t>
+                    </m:r>
+                    <m:r>
                       <a:rPr lang="en-US" i="1" dirty="0" smtClean="0">
                         <a:latin typeface="Cambria Math" panose="02040503050406030204" pitchFamily="18" charset="0"/>
                       </a:rPr>
@@ -4733,45 +4953,41 @@
                   <a:rPr lang="en-US" dirty="0"/>
                   <a:t> independent of the behavior policy being followed! </a:t>
                 </a:r>
-                <a14:m>
-                  <m:oMath xmlns:m="http://schemas.openxmlformats.org/officeDocument/2006/math">
-                    <m:r>
-                      <a:rPr lang="en-US" b="0" i="1" smtClean="0">
-                        <a:latin typeface="Cambria Math" panose="02040503050406030204" pitchFamily="18" charset="0"/>
-                      </a:rPr>
-                      <m:t>→</m:t>
-                    </m:r>
-                  </m:oMath>
-                </a14:m>
-                <a:r>
-                  <a:rPr lang="en-US" dirty="0"/>
-                  <a:t> Off-policy</a:t>
-                </a:r>
               </a:p>
               <a:p>
                 <a:r>
+                  <a:rPr lang="en-US" b="1" dirty="0"/>
+                  <a:t>Converges</a:t>
+                </a:r>
+                <a:r>
                   <a:rPr lang="en-US" dirty="0"/>
-                  <a:t>Converges to the optimal value function:</a:t>
+                  <a:t> to the optimal value function if:</a:t>
                 </a:r>
               </a:p>
               <a:p>
-                <a:pPr lvl="1"/>
+                <a:pPr marL="914400" lvl="1" indent="-457200">
+                  <a:buFont typeface="+mj-lt"/>
+                  <a:buAutoNum type="alphaLcParenR"/>
+                </a:pPr>
                 <a:r>
                   <a:rPr lang="en-US" dirty="0"/>
-                  <a:t>State-action pairs are represented discretely (in a table)</a:t>
+                  <a:t>State-action pairs are represented discretely (in a table).</a:t>
                 </a:r>
               </a:p>
               <a:p>
-                <a:pPr lvl="1"/>
+                <a:pPr marL="914400" lvl="1" indent="-457200">
+                  <a:buFont typeface="+mj-lt"/>
+                  <a:buAutoNum type="alphaLcParenR"/>
+                </a:pPr>
                 <a:r>
                   <a:rPr lang="en-US" dirty="0"/>
-                  <a:t>All action are repeatedly sampled in all states (keeps exploring).</a:t>
+                  <a:t>All action are repeatedly sampled in all states (behavior policy keeps exploring).</a:t>
                 </a:r>
               </a:p>
             </p:txBody>
           </p:sp>
         </mc:Choice>
-        <mc:Fallback xmlns="">
+        <mc:Fallback>
           <p:sp>
             <p:nvSpPr>
               <p:cNvPr id="3" name="Content Placeholder 2">
@@ -4792,7 +5008,7 @@
               <a:blipFill>
                 <a:blip r:embed="rId2"/>
                 <a:stretch>
-                  <a:fillRect l="-1043" t="-2168" b="-1403"/>
+                  <a:fillRect l="-928" t="-3189"/>
                 </a:stretch>
               </a:blipFill>
             </p:spPr>
@@ -4825,13 +5041,13 @@
         </p:nvSpPr>
         <p:spPr>
           <a:xfrm>
-            <a:off x="8411083" y="3043347"/>
-            <a:ext cx="2010286" cy="621233"/>
+            <a:off x="7147676" y="3354377"/>
+            <a:ext cx="4143302" cy="432769"/>
           </a:xfrm>
           <a:prstGeom prst="wedgeRoundRectCallout">
             <a:avLst>
-              <a:gd name="adj1" fmla="val -33678"/>
-              <a:gd name="adj2" fmla="val -101095"/>
+              <a:gd name="adj1" fmla="val -17411"/>
+              <a:gd name="adj2" fmla="val -157547"/>
               <a:gd name="adj3" fmla="val 16667"/>
             </a:avLst>
           </a:prstGeom>
@@ -4859,7 +5075,7 @@
             <a:pPr algn="ctr"/>
             <a:r>
               <a:rPr lang="en-US" sz="1400" dirty="0"/>
-              <a:t>The next action has not yet been observed. It is greedily chosen!</a:t>
+              <a:t>The next action has not yet been observed. It assumes the greedy/optimal action will be chosen!</a:t>
             </a:r>
           </a:p>
         </p:txBody>
@@ -4924,6 +5140,37 @@
       </p:sp>
       <p:pic>
         <p:nvPicPr>
+          <p:cNvPr id="3" name="Content Placeholder 4">
+            <a:extLst>
+              <a:ext uri="{FF2B5EF4-FFF2-40B4-BE49-F238E27FC236}">
+                <a16:creationId xmlns:a16="http://schemas.microsoft.com/office/drawing/2014/main" id="{ACE9FA26-BA72-1C07-AB30-BF0FA0951771}"/>
+              </a:ext>
+            </a:extLst>
+          </p:cNvPr>
+          <p:cNvPicPr>
+            <a:picLocks noChangeAspect="1"/>
+          </p:cNvPicPr>
+          <p:nvPr/>
+        </p:nvPicPr>
+        <p:blipFill>
+          <a:blip r:embed="rId2"/>
+          <a:srcRect l="881" t="2315"/>
+          <a:stretch>
+            <a:fillRect/>
+          </a:stretch>
+        </p:blipFill>
+        <p:spPr>
+          <a:xfrm>
+            <a:off x="586439" y="1390498"/>
+            <a:ext cx="8326425" cy="3693409"/>
+          </a:xfrm>
+          <a:prstGeom prst="rect">
+            <a:avLst/>
+          </a:prstGeom>
+        </p:spPr>
+      </p:pic>
+      <p:pic>
+        <p:nvPicPr>
           <p:cNvPr id="5" name="Content Placeholder 4">
             <a:extLst>
               <a:ext uri="{FF2B5EF4-FFF2-40B4-BE49-F238E27FC236}">
@@ -4939,673 +5186,16 @@
           </p:nvPr>
         </p:nvPicPr>
         <p:blipFill>
-          <a:blip r:embed="rId2"/>
+          <a:blip r:embed="rId3"/>
+          <a:srcRect l="735" t="1870"/>
           <a:stretch>
             <a:fillRect/>
           </a:stretch>
         </p:blipFill>
         <p:spPr>
           <a:xfrm>
-            <a:off x="2087336" y="1927972"/>
-            <a:ext cx="8154789" cy="3427800"/>
-          </a:xfrm>
-          <a:prstGeom prst="rect">
-            <a:avLst/>
-          </a:prstGeom>
-        </p:spPr>
-      </p:pic>
-    </p:spTree>
-    <p:extLst>
-      <p:ext uri="{BB962C8B-B14F-4D97-AF65-F5344CB8AC3E}">
-        <p14:creationId xmlns:p14="http://schemas.microsoft.com/office/powerpoint/2010/main" val="81018147"/>
-      </p:ext>
-    </p:extLst>
-  </p:cSld>
-  <p:clrMapOvr>
-    <a:masterClrMapping/>
-  </p:clrMapOvr>
-</p:sld>
-</file>
-
-<file path=ppt/slides/slide14.xml><?xml version="1.0" encoding="utf-8"?>
-<p:sld xmlns:a="http://schemas.openxmlformats.org/drawingml/2006/main" xmlns:r="http://schemas.openxmlformats.org/officeDocument/2006/relationships" xmlns:p="http://schemas.openxmlformats.org/presentationml/2006/main">
-  <p:cSld>
-    <p:spTree>
-      <p:nvGrpSpPr>
-        <p:cNvPr id="1" name=""/>
-        <p:cNvGrpSpPr/>
-        <p:nvPr/>
-      </p:nvGrpSpPr>
-      <p:grpSpPr>
-        <a:xfrm>
-          <a:off x="0" y="0"/>
-          <a:ext cx="0" cy="0"/>
-          <a:chOff x="0" y="0"/>
-          <a:chExt cx="0" cy="0"/>
-        </a:xfrm>
-      </p:grpSpPr>
-      <p:sp>
-        <p:nvSpPr>
-          <p:cNvPr id="2" name="Title 1">
-            <a:extLst>
-              <a:ext uri="{FF2B5EF4-FFF2-40B4-BE49-F238E27FC236}">
-                <a16:creationId xmlns:a16="http://schemas.microsoft.com/office/drawing/2014/main" id="{4F2C6363-9D21-FCAF-D518-75DBE389F9B3}"/>
-              </a:ext>
-            </a:extLst>
-          </p:cNvPr>
-          <p:cNvSpPr>
-            <a:spLocks noGrp="1"/>
-          </p:cNvSpPr>
-          <p:nvPr>
-            <p:ph type="title"/>
-          </p:nvPr>
-        </p:nvSpPr>
-        <p:spPr/>
-        <p:txBody>
-          <a:bodyPr/>
-          <a:lstStyle/>
-          <a:p>
-            <a:r>
-              <a:rPr lang="en-US" dirty="0"/>
-              <a:t>Q-Learning’s Maximization Bias</a:t>
-            </a:r>
-          </a:p>
-        </p:txBody>
-      </p:sp>
-      <mc:AlternateContent xmlns:mc="http://schemas.openxmlformats.org/markup-compatibility/2006">
-        <mc:Choice xmlns:a14="http://schemas.microsoft.com/office/drawing/2010/main" Requires="a14">
-          <p:sp>
-            <p:nvSpPr>
-              <p:cNvPr id="3" name="Content Placeholder 2">
-                <a:extLst>
-                  <a:ext uri="{FF2B5EF4-FFF2-40B4-BE49-F238E27FC236}">
-                    <a16:creationId xmlns:a16="http://schemas.microsoft.com/office/drawing/2014/main" id="{C34E4FF9-9BED-6723-C7F4-56C4276CC291}"/>
-                  </a:ext>
-                </a:extLst>
-              </p:cNvPr>
-              <p:cNvSpPr>
-                <a:spLocks noGrp="1"/>
-              </p:cNvSpPr>
-              <p:nvPr>
-                <p:ph idx="1"/>
-              </p:nvPr>
-            </p:nvSpPr>
-            <p:spPr>
-              <a:xfrm>
-                <a:off x="838200" y="1173965"/>
-                <a:ext cx="10515600" cy="1283049"/>
-              </a:xfrm>
-            </p:spPr>
-            <p:txBody>
-              <a:bodyPr>
-                <a:normAutofit fontScale="55000" lnSpcReduction="20000"/>
-              </a:bodyPr>
-              <a:lstStyle/>
-              <a:p>
-                <a:r>
-                  <a:rPr lang="en-US" dirty="0"/>
-                  <a:t>Q-learning update: </a:t>
-                </a:r>
-                <a14:m>
-                  <m:oMath xmlns:m="http://schemas.openxmlformats.org/officeDocument/2006/math">
-                    <m:r>
-                      <a:rPr lang="en-US" i="1">
-                        <a:latin typeface="Cambria Math" panose="02040503050406030204" pitchFamily="18" charset="0"/>
-                      </a:rPr>
-                      <m:t>𝑄</m:t>
-                    </m:r>
-                    <m:d>
-                      <m:dPr>
-                        <m:ctrlPr>
-                          <a:rPr lang="en-US" i="1">
-                            <a:latin typeface="Cambria Math" panose="02040503050406030204" pitchFamily="18" charset="0"/>
-                          </a:rPr>
-                        </m:ctrlPr>
-                      </m:dPr>
-                      <m:e>
-                        <m:sSub>
-                          <m:sSubPr>
-                            <m:ctrlPr>
-                              <a:rPr lang="en-US" i="1">
-                                <a:latin typeface="Cambria Math" panose="02040503050406030204" pitchFamily="18" charset="0"/>
-                              </a:rPr>
-                            </m:ctrlPr>
-                          </m:sSubPr>
-                          <m:e>
-                            <m:r>
-                              <a:rPr lang="en-US" i="1">
-                                <a:latin typeface="Cambria Math" panose="02040503050406030204" pitchFamily="18" charset="0"/>
-                              </a:rPr>
-                              <m:t>𝑆</m:t>
-                            </m:r>
-                          </m:e>
-                          <m:sub>
-                            <m:r>
-                              <a:rPr lang="en-US" i="1">
-                                <a:latin typeface="Cambria Math" panose="02040503050406030204" pitchFamily="18" charset="0"/>
-                              </a:rPr>
-                              <m:t>𝑡</m:t>
-                            </m:r>
-                          </m:sub>
-                        </m:sSub>
-                        <m:r>
-                          <a:rPr lang="en-US" i="1">
-                            <a:latin typeface="Cambria Math" panose="02040503050406030204" pitchFamily="18" charset="0"/>
-                          </a:rPr>
-                          <m:t>,</m:t>
-                        </m:r>
-                        <m:sSub>
-                          <m:sSubPr>
-                            <m:ctrlPr>
-                              <a:rPr lang="en-US" i="1">
-                                <a:latin typeface="Cambria Math" panose="02040503050406030204" pitchFamily="18" charset="0"/>
-                              </a:rPr>
-                            </m:ctrlPr>
-                          </m:sSubPr>
-                          <m:e>
-                            <m:r>
-                              <a:rPr lang="en-US" i="1">
-                                <a:latin typeface="Cambria Math" panose="02040503050406030204" pitchFamily="18" charset="0"/>
-                              </a:rPr>
-                              <m:t>𝐴</m:t>
-                            </m:r>
-                          </m:e>
-                          <m:sub>
-                            <m:r>
-                              <a:rPr lang="en-US" i="1">
-                                <a:latin typeface="Cambria Math" panose="02040503050406030204" pitchFamily="18" charset="0"/>
-                              </a:rPr>
-                              <m:t>𝑡</m:t>
-                            </m:r>
-                          </m:sub>
-                        </m:sSub>
-                      </m:e>
-                    </m:d>
-                    <m:r>
-                      <a:rPr lang="en-US" i="1">
-                        <a:latin typeface="Cambria Math" panose="02040503050406030204" pitchFamily="18" charset="0"/>
-                      </a:rPr>
-                      <m:t>←</m:t>
-                    </m:r>
-                    <m:r>
-                      <a:rPr lang="en-US" i="1">
-                        <a:latin typeface="Cambria Math" panose="02040503050406030204" pitchFamily="18" charset="0"/>
-                      </a:rPr>
-                      <m:t>𝑄</m:t>
-                    </m:r>
-                    <m:d>
-                      <m:dPr>
-                        <m:ctrlPr>
-                          <a:rPr lang="en-US" i="1">
-                            <a:latin typeface="Cambria Math" panose="02040503050406030204" pitchFamily="18" charset="0"/>
-                          </a:rPr>
-                        </m:ctrlPr>
-                      </m:dPr>
-                      <m:e>
-                        <m:sSub>
-                          <m:sSubPr>
-                            <m:ctrlPr>
-                              <a:rPr lang="en-US" i="1">
-                                <a:latin typeface="Cambria Math" panose="02040503050406030204" pitchFamily="18" charset="0"/>
-                              </a:rPr>
-                            </m:ctrlPr>
-                          </m:sSubPr>
-                          <m:e>
-                            <m:r>
-                              <a:rPr lang="en-US" i="1">
-                                <a:latin typeface="Cambria Math" panose="02040503050406030204" pitchFamily="18" charset="0"/>
-                              </a:rPr>
-                              <m:t>𝑆</m:t>
-                            </m:r>
-                          </m:e>
-                          <m:sub>
-                            <m:r>
-                              <a:rPr lang="en-US" i="1">
-                                <a:latin typeface="Cambria Math" panose="02040503050406030204" pitchFamily="18" charset="0"/>
-                              </a:rPr>
-                              <m:t>𝑡</m:t>
-                            </m:r>
-                          </m:sub>
-                        </m:sSub>
-                        <m:r>
-                          <a:rPr lang="en-US" i="1">
-                            <a:latin typeface="Cambria Math" panose="02040503050406030204" pitchFamily="18" charset="0"/>
-                          </a:rPr>
-                          <m:t>,</m:t>
-                        </m:r>
-                        <m:sSub>
-                          <m:sSubPr>
-                            <m:ctrlPr>
-                              <a:rPr lang="en-US" i="1">
-                                <a:latin typeface="Cambria Math" panose="02040503050406030204" pitchFamily="18" charset="0"/>
-                              </a:rPr>
-                            </m:ctrlPr>
-                          </m:sSubPr>
-                          <m:e>
-                            <m:r>
-                              <a:rPr lang="en-US" i="1">
-                                <a:latin typeface="Cambria Math" panose="02040503050406030204" pitchFamily="18" charset="0"/>
-                              </a:rPr>
-                              <m:t>𝐴</m:t>
-                            </m:r>
-                          </m:e>
-                          <m:sub>
-                            <m:r>
-                              <a:rPr lang="en-US" i="1">
-                                <a:latin typeface="Cambria Math" panose="02040503050406030204" pitchFamily="18" charset="0"/>
-                              </a:rPr>
-                              <m:t>𝑡</m:t>
-                            </m:r>
-                          </m:sub>
-                        </m:sSub>
-                      </m:e>
-                    </m:d>
-                    <m:r>
-                      <a:rPr lang="en-US" i="1">
-                        <a:latin typeface="Cambria Math" panose="02040503050406030204" pitchFamily="18" charset="0"/>
-                      </a:rPr>
-                      <m:t>+</m:t>
-                    </m:r>
-                    <m:r>
-                      <a:rPr lang="en-US" i="1">
-                        <a:latin typeface="Cambria Math" panose="02040503050406030204" pitchFamily="18" charset="0"/>
-                      </a:rPr>
-                      <m:t>𝛼</m:t>
-                    </m:r>
-                    <m:r>
-                      <a:rPr lang="en-US" i="1">
-                        <a:latin typeface="Cambria Math" panose="02040503050406030204" pitchFamily="18" charset="0"/>
-                      </a:rPr>
-                      <m:t>[</m:t>
-                    </m:r>
-                    <m:sSub>
-                      <m:sSubPr>
-                        <m:ctrlPr>
-                          <a:rPr lang="en-US" i="1">
-                            <a:latin typeface="Cambria Math" panose="02040503050406030204" pitchFamily="18" charset="0"/>
-                          </a:rPr>
-                        </m:ctrlPr>
-                      </m:sSubPr>
-                      <m:e>
-                        <m:r>
-                          <a:rPr lang="en-US" i="1">
-                            <a:latin typeface="Cambria Math" panose="02040503050406030204" pitchFamily="18" charset="0"/>
-                          </a:rPr>
-                          <m:t>𝑅</m:t>
-                        </m:r>
-                      </m:e>
-                      <m:sub>
-                        <m:r>
-                          <a:rPr lang="en-US" i="1">
-                            <a:latin typeface="Cambria Math" panose="02040503050406030204" pitchFamily="18" charset="0"/>
-                          </a:rPr>
-                          <m:t>𝑡</m:t>
-                        </m:r>
-                        <m:r>
-                          <a:rPr lang="en-US" i="1">
-                            <a:latin typeface="Cambria Math" panose="02040503050406030204" pitchFamily="18" charset="0"/>
-                          </a:rPr>
-                          <m:t>+1</m:t>
-                        </m:r>
-                      </m:sub>
-                    </m:sSub>
-                    <m:r>
-                      <a:rPr lang="en-US" i="1">
-                        <a:latin typeface="Cambria Math" panose="02040503050406030204" pitchFamily="18" charset="0"/>
-                      </a:rPr>
-                      <m:t>+</m:t>
-                    </m:r>
-                    <m:r>
-                      <a:rPr lang="en-US" i="1">
-                        <a:latin typeface="Cambria Math" panose="02040503050406030204" pitchFamily="18" charset="0"/>
-                      </a:rPr>
-                      <m:t>𝛾</m:t>
-                    </m:r>
-                    <m:func>
-                      <m:funcPr>
-                        <m:ctrlPr>
-                          <a:rPr lang="en-US" i="1">
-                            <a:latin typeface="Cambria Math" panose="02040503050406030204" pitchFamily="18" charset="0"/>
-                          </a:rPr>
-                        </m:ctrlPr>
-                      </m:funcPr>
-                      <m:fName>
-                        <m:limLow>
-                          <m:limLowPr>
-                            <m:ctrlPr>
-                              <a:rPr lang="en-US" i="1">
-                                <a:latin typeface="Cambria Math" panose="02040503050406030204" pitchFamily="18" charset="0"/>
-                              </a:rPr>
-                            </m:ctrlPr>
-                          </m:limLowPr>
-                          <m:e>
-                            <m:r>
-                              <m:rPr>
-                                <m:sty m:val="p"/>
-                              </m:rPr>
-                              <a:rPr lang="en-US">
-                                <a:latin typeface="Cambria Math" panose="02040503050406030204" pitchFamily="18" charset="0"/>
-                              </a:rPr>
-                              <m:t>max</m:t>
-                            </m:r>
-                          </m:e>
-                          <m:lim>
-                            <m:r>
-                              <a:rPr lang="en-US" i="1">
-                                <a:latin typeface="Cambria Math" panose="02040503050406030204" pitchFamily="18" charset="0"/>
-                              </a:rPr>
-                              <m:t>𝑎</m:t>
-                            </m:r>
-                          </m:lim>
-                        </m:limLow>
-                      </m:fName>
-                      <m:e>
-                        <m:r>
-                          <a:rPr lang="en-US" i="1">
-                            <a:latin typeface="Cambria Math" panose="02040503050406030204" pitchFamily="18" charset="0"/>
-                          </a:rPr>
-                          <m:t>𝑄</m:t>
-                        </m:r>
-                        <m:d>
-                          <m:dPr>
-                            <m:ctrlPr>
-                              <a:rPr lang="en-US" i="1">
-                                <a:latin typeface="Cambria Math" panose="02040503050406030204" pitchFamily="18" charset="0"/>
-                              </a:rPr>
-                            </m:ctrlPr>
-                          </m:dPr>
-                          <m:e>
-                            <m:sSub>
-                              <m:sSubPr>
-                                <m:ctrlPr>
-                                  <a:rPr lang="en-US" i="1">
-                                    <a:latin typeface="Cambria Math" panose="02040503050406030204" pitchFamily="18" charset="0"/>
-                                  </a:rPr>
-                                </m:ctrlPr>
-                              </m:sSubPr>
-                              <m:e>
-                                <m:r>
-                                  <a:rPr lang="en-US" i="1">
-                                    <a:latin typeface="Cambria Math" panose="02040503050406030204" pitchFamily="18" charset="0"/>
-                                  </a:rPr>
-                                  <m:t>𝑆</m:t>
-                                </m:r>
-                              </m:e>
-                              <m:sub>
-                                <m:r>
-                                  <a:rPr lang="en-US" i="1">
-                                    <a:latin typeface="Cambria Math" panose="02040503050406030204" pitchFamily="18" charset="0"/>
-                                  </a:rPr>
-                                  <m:t>𝑡</m:t>
-                                </m:r>
-                                <m:r>
-                                  <a:rPr lang="en-US" i="1">
-                                    <a:latin typeface="Cambria Math" panose="02040503050406030204" pitchFamily="18" charset="0"/>
-                                  </a:rPr>
-                                  <m:t>+1</m:t>
-                                </m:r>
-                              </m:sub>
-                            </m:sSub>
-                            <m:r>
-                              <a:rPr lang="en-US" i="1">
-                                <a:latin typeface="Cambria Math" panose="02040503050406030204" pitchFamily="18" charset="0"/>
-                              </a:rPr>
-                              <m:t>,</m:t>
-                            </m:r>
-                            <m:r>
-                              <a:rPr lang="en-US" i="1">
-                                <a:latin typeface="Cambria Math" panose="02040503050406030204" pitchFamily="18" charset="0"/>
-                              </a:rPr>
-                              <m:t>𝑎</m:t>
-                            </m:r>
-                          </m:e>
-                        </m:d>
-                      </m:e>
-                    </m:func>
-                    <m:r>
-                      <a:rPr lang="en-US" i="1">
-                        <a:latin typeface="Cambria Math" panose="02040503050406030204" pitchFamily="18" charset="0"/>
-                      </a:rPr>
-                      <m:t>−</m:t>
-                    </m:r>
-                    <m:r>
-                      <a:rPr lang="en-US" i="1">
-                        <a:latin typeface="Cambria Math" panose="02040503050406030204" pitchFamily="18" charset="0"/>
-                      </a:rPr>
-                      <m:t>𝑄</m:t>
-                    </m:r>
-                    <m:d>
-                      <m:dPr>
-                        <m:ctrlPr>
-                          <a:rPr lang="en-US" i="1">
-                            <a:latin typeface="Cambria Math" panose="02040503050406030204" pitchFamily="18" charset="0"/>
-                          </a:rPr>
-                        </m:ctrlPr>
-                      </m:dPr>
-                      <m:e>
-                        <m:sSub>
-                          <m:sSubPr>
-                            <m:ctrlPr>
-                              <a:rPr lang="en-US" i="1">
-                                <a:latin typeface="Cambria Math" panose="02040503050406030204" pitchFamily="18" charset="0"/>
-                              </a:rPr>
-                            </m:ctrlPr>
-                          </m:sSubPr>
-                          <m:e>
-                            <m:r>
-                              <a:rPr lang="en-US" i="1">
-                                <a:latin typeface="Cambria Math" panose="02040503050406030204" pitchFamily="18" charset="0"/>
-                              </a:rPr>
-                              <m:t>𝑆</m:t>
-                            </m:r>
-                          </m:e>
-                          <m:sub>
-                            <m:r>
-                              <a:rPr lang="en-US" i="1">
-                                <a:latin typeface="Cambria Math" panose="02040503050406030204" pitchFamily="18" charset="0"/>
-                              </a:rPr>
-                              <m:t>𝑡</m:t>
-                            </m:r>
-                          </m:sub>
-                        </m:sSub>
-                        <m:r>
-                          <a:rPr lang="en-US" i="1">
-                            <a:latin typeface="Cambria Math" panose="02040503050406030204" pitchFamily="18" charset="0"/>
-                          </a:rPr>
-                          <m:t>,</m:t>
-                        </m:r>
-                        <m:sSub>
-                          <m:sSubPr>
-                            <m:ctrlPr>
-                              <a:rPr lang="en-US" i="1">
-                                <a:latin typeface="Cambria Math" panose="02040503050406030204" pitchFamily="18" charset="0"/>
-                              </a:rPr>
-                            </m:ctrlPr>
-                          </m:sSubPr>
-                          <m:e>
-                            <m:r>
-                              <a:rPr lang="en-US" i="1">
-                                <a:latin typeface="Cambria Math" panose="02040503050406030204" pitchFamily="18" charset="0"/>
-                              </a:rPr>
-                              <m:t>𝐴</m:t>
-                            </m:r>
-                          </m:e>
-                          <m:sub>
-                            <m:r>
-                              <a:rPr lang="en-US" i="1">
-                                <a:latin typeface="Cambria Math" panose="02040503050406030204" pitchFamily="18" charset="0"/>
-                              </a:rPr>
-                              <m:t>𝑡</m:t>
-                            </m:r>
-                          </m:sub>
-                        </m:sSub>
-                      </m:e>
-                    </m:d>
-                    <m:r>
-                      <a:rPr lang="en-US" i="1">
-                        <a:latin typeface="Cambria Math" panose="02040503050406030204" pitchFamily="18" charset="0"/>
-                      </a:rPr>
-                      <m:t>]</m:t>
-                    </m:r>
-                  </m:oMath>
-                </a14:m>
-                <a:endParaRPr lang="en-US" dirty="0"/>
-              </a:p>
-              <a:p>
-                <a:r>
-                  <a:rPr lang="en-US" dirty="0"/>
-                  <a:t>The next action is not observed, but </a:t>
-                </a:r>
-                <a14:m>
-                  <m:oMath xmlns:m="http://schemas.openxmlformats.org/officeDocument/2006/math">
-                    <m:r>
-                      <a:rPr lang="en-US" i="1" dirty="0" smtClean="0">
-                        <a:latin typeface="Cambria Math" panose="02040503050406030204" pitchFamily="18" charset="0"/>
-                      </a:rPr>
-                      <m:t>𝑄</m:t>
-                    </m:r>
-                  </m:oMath>
-                </a14:m>
-                <a:r>
-                  <a:rPr lang="en-US" dirty="0"/>
-                  <a:t>-values are updated by choosing the next action as the maximum over </a:t>
-                </a:r>
-                <a14:m>
-                  <m:oMath xmlns:m="http://schemas.openxmlformats.org/officeDocument/2006/math">
-                    <m:r>
-                      <a:rPr lang="en-US" i="1" dirty="0" smtClean="0">
-                        <a:latin typeface="Cambria Math" panose="02040503050406030204" pitchFamily="18" charset="0"/>
-                      </a:rPr>
-                      <m:t>𝑄</m:t>
-                    </m:r>
-                  </m:oMath>
-                </a14:m>
-                <a:r>
-                  <a:rPr lang="en-US" dirty="0"/>
-                  <a:t>-values. This cycle creates a </a:t>
-                </a:r>
-                <a:r>
-                  <a:rPr lang="en-US" b="1" dirty="0"/>
-                  <a:t>maximization bias </a:t>
-                </a:r>
-                <a:r>
-                  <a:rPr lang="en-US" dirty="0"/>
-                  <a:t>that leads to overestimating the </a:t>
-                </a:r>
-                <a14:m>
-                  <m:oMath xmlns:m="http://schemas.openxmlformats.org/officeDocument/2006/math">
-                    <m:r>
-                      <a:rPr lang="en-US" i="1" dirty="0">
-                        <a:latin typeface="Cambria Math" panose="02040503050406030204" pitchFamily="18" charset="0"/>
-                      </a:rPr>
-                      <m:t>𝑄</m:t>
-                    </m:r>
-                  </m:oMath>
-                </a14:m>
-                <a:r>
-                  <a:rPr lang="en-US" dirty="0"/>
-                  <a:t>- values.</a:t>
-                </a:r>
-              </a:p>
-              <a:p>
-                <a:r>
-                  <a:rPr lang="en-US" dirty="0"/>
-                  <a:t>Solution: </a:t>
-                </a:r>
-                <a:r>
-                  <a:rPr lang="en-US" b="1" dirty="0"/>
-                  <a:t>double Q-learning </a:t>
-                </a:r>
-                <a:r>
-                  <a:rPr lang="en-US" dirty="0"/>
-                  <a:t>by learning two independent </a:t>
-                </a:r>
-                <a14:m>
-                  <m:oMath xmlns:m="http://schemas.openxmlformats.org/officeDocument/2006/math">
-                    <m:r>
-                      <a:rPr lang="en-US" b="0" i="1" smtClean="0">
-                        <a:latin typeface="Cambria Math" panose="02040503050406030204" pitchFamily="18" charset="0"/>
-                      </a:rPr>
-                      <m:t>𝑄</m:t>
-                    </m:r>
-                  </m:oMath>
-                </a14:m>
-                <a:r>
-                  <a:rPr lang="en-US" dirty="0"/>
-                  <a:t>-functions and using one for the action selection and the other one for the bootstrap estimation.</a:t>
-                </a:r>
-              </a:p>
-            </p:txBody>
-          </p:sp>
-        </mc:Choice>
-        <mc:Fallback>
-          <p:sp>
-            <p:nvSpPr>
-              <p:cNvPr id="3" name="Content Placeholder 2">
-                <a:extLst>
-                  <a:ext uri="{FF2B5EF4-FFF2-40B4-BE49-F238E27FC236}">
-                    <a16:creationId xmlns:a16="http://schemas.microsoft.com/office/drawing/2014/main" id="{C34E4FF9-9BED-6723-C7F4-56C4276CC291}"/>
-                  </a:ext>
-                </a:extLst>
-              </p:cNvPr>
-              <p:cNvSpPr>
-                <a:spLocks noGrp="1" noRot="1" noChangeAspect="1" noMove="1" noResize="1" noEditPoints="1" noAdjustHandles="1" noChangeArrowheads="1" noChangeShapeType="1" noTextEdit="1"/>
-              </p:cNvSpPr>
-              <p:nvPr>
-                <p:ph idx="1"/>
-              </p:nvPr>
-            </p:nvSpPr>
-            <p:spPr>
-              <a:xfrm>
-                <a:off x="838200" y="1173965"/>
-                <a:ext cx="10515600" cy="1283049"/>
-              </a:xfrm>
-              <a:blipFill>
-                <a:blip r:embed="rId2"/>
-                <a:stretch>
-                  <a:fillRect l="-174" t="-5714"/>
-                </a:stretch>
-              </a:blipFill>
-            </p:spPr>
-            <p:txBody>
-              <a:bodyPr/>
-              <a:lstStyle/>
-              <a:p>
-                <a:r>
-                  <a:rPr lang="en-US">
-                    <a:noFill/>
-                  </a:rPr>
-                  <a:t> </a:t>
-                </a:r>
-              </a:p>
-            </p:txBody>
-          </p:sp>
-        </mc:Fallback>
-      </mc:AlternateContent>
-      <p:pic>
-        <p:nvPicPr>
-          <p:cNvPr id="5" name="Picture 4">
-            <a:extLst>
-              <a:ext uri="{FF2B5EF4-FFF2-40B4-BE49-F238E27FC236}">
-                <a16:creationId xmlns:a16="http://schemas.microsoft.com/office/drawing/2014/main" id="{DAD96510-1563-B66E-3094-A8C2EBB9C48C}"/>
-              </a:ext>
-            </a:extLst>
-          </p:cNvPr>
-          <p:cNvPicPr>
-            <a:picLocks noChangeAspect="1"/>
-          </p:cNvPicPr>
-          <p:nvPr/>
-        </p:nvPicPr>
-        <p:blipFill>
-          <a:blip r:embed="rId3"/>
-          <a:stretch>
-            <a:fillRect/>
-          </a:stretch>
-        </p:blipFill>
-        <p:spPr>
-          <a:xfrm>
-            <a:off x="2190496" y="2506781"/>
-            <a:ext cx="7811008" cy="4051918"/>
+            <a:off x="3233926" y="2661557"/>
+            <a:ext cx="8445114" cy="3509203"/>
           </a:xfrm>
           <a:prstGeom prst="rect">
             <a:avLst/>
@@ -5614,10 +5204,10 @@
       </p:pic>
       <p:sp>
         <p:nvSpPr>
-          <p:cNvPr id="4" name="Speech Bubble: Rectangle with Corners Rounded 3">
+          <p:cNvPr id="4" name="Arrow: Down 3">
             <a:extLst>
               <a:ext uri="{FF2B5EF4-FFF2-40B4-BE49-F238E27FC236}">
-                <a16:creationId xmlns:a16="http://schemas.microsoft.com/office/drawing/2014/main" id="{6B201E6C-66C1-30D3-1175-0AC396397A92}"/>
+                <a16:creationId xmlns:a16="http://schemas.microsoft.com/office/drawing/2014/main" id="{50E9F303-0610-DA79-680F-09CEC3B03339}"/>
               </a:ext>
             </a:extLst>
           </p:cNvPr>
@@ -5625,16 +5215,12 @@
           <p:nvPr/>
         </p:nvSpPr>
         <p:spPr>
-          <a:xfrm>
-            <a:off x="7308220" y="6247236"/>
-            <a:ext cx="816677" cy="361229"/>
+          <a:xfrm rot="16930409">
+            <a:off x="2666640" y="2911510"/>
+            <a:ext cx="868261" cy="767593"/>
           </a:xfrm>
-          <a:prstGeom prst="wedgeRoundRectCallout">
-            <a:avLst>
-              <a:gd name="adj1" fmla="val -15705"/>
-              <a:gd name="adj2" fmla="val -139197"/>
-              <a:gd name="adj3" fmla="val 16667"/>
-            </a:avLst>
+          <a:prstGeom prst="downArrow">
+            <a:avLst/>
           </a:prstGeom>
         </p:spPr>
         <p:style>
@@ -5658,71 +5244,379 @@
           <a:lstStyle/>
           <a:p>
             <a:pPr algn="ctr"/>
-            <a:r>
-              <a:rPr lang="en-US" sz="1100" dirty="0"/>
-              <a:t>Action selection</a:t>
-            </a:r>
+            <a:endParaRPr lang="en-US"/>
           </a:p>
         </p:txBody>
       </p:sp>
-      <p:sp>
-        <p:nvSpPr>
-          <p:cNvPr id="6" name="Speech Bubble: Rectangle with Corners Rounded 5">
+      <p:grpSp>
+        <p:nvGrpSpPr>
+          <p:cNvPr id="11" name="Group 10">
             <a:extLst>
               <a:ext uri="{FF2B5EF4-FFF2-40B4-BE49-F238E27FC236}">
-                <a16:creationId xmlns:a16="http://schemas.microsoft.com/office/drawing/2014/main" id="{9F778E84-BBCC-BCE2-5C99-07B29039B196}"/>
+                <a16:creationId xmlns:a16="http://schemas.microsoft.com/office/drawing/2014/main" id="{E220D628-0C2D-1B3D-85F4-BBFF28A8CE9F}"/>
               </a:ext>
             </a:extLst>
           </p:cNvPr>
-          <p:cNvSpPr/>
+          <p:cNvGrpSpPr/>
           <p:nvPr/>
-        </p:nvSpPr>
+        </p:nvGrpSpPr>
+        <p:grpSpPr>
+          <a:xfrm>
+            <a:off x="1635871" y="3777583"/>
+            <a:ext cx="1298121" cy="285750"/>
+            <a:chOff x="1635871" y="3777583"/>
+            <a:chExt cx="1298121" cy="285750"/>
+          </a:xfrm>
+        </p:grpSpPr>
+        <p:cxnSp>
+          <p:nvCxnSpPr>
+            <p:cNvPr id="7" name="Straight Connector 6">
+              <a:extLst>
+                <a:ext uri="{FF2B5EF4-FFF2-40B4-BE49-F238E27FC236}">
+                  <a16:creationId xmlns:a16="http://schemas.microsoft.com/office/drawing/2014/main" id="{975A43C0-3EBD-08A8-4E00-AF9FE5A218CC}"/>
+                </a:ext>
+              </a:extLst>
+            </p:cNvPr>
+            <p:cNvCxnSpPr/>
+            <p:nvPr/>
+          </p:nvCxnSpPr>
+          <p:spPr>
+            <a:xfrm>
+              <a:off x="1635871" y="3777583"/>
+              <a:ext cx="1298121" cy="285750"/>
+            </a:xfrm>
+            <a:prstGeom prst="line">
+              <a:avLst/>
+            </a:prstGeom>
+          </p:spPr>
+          <p:style>
+            <a:lnRef idx="2">
+              <a:schemeClr val="accent2"/>
+            </a:lnRef>
+            <a:fillRef idx="0">
+              <a:schemeClr val="accent2"/>
+            </a:fillRef>
+            <a:effectRef idx="1">
+              <a:schemeClr val="accent2"/>
+            </a:effectRef>
+            <a:fontRef idx="minor">
+              <a:schemeClr val="tx1"/>
+            </a:fontRef>
+          </p:style>
+        </p:cxnSp>
+        <p:cxnSp>
+          <p:nvCxnSpPr>
+            <p:cNvPr id="8" name="Straight Connector 7">
+              <a:extLst>
+                <a:ext uri="{FF2B5EF4-FFF2-40B4-BE49-F238E27FC236}">
+                  <a16:creationId xmlns:a16="http://schemas.microsoft.com/office/drawing/2014/main" id="{02810518-C59E-4B01-556C-D62FA1F00F4A}"/>
+                </a:ext>
+              </a:extLst>
+            </p:cNvPr>
+            <p:cNvCxnSpPr>
+              <a:cxnSpLocks/>
+            </p:cNvCxnSpPr>
+            <p:nvPr/>
+          </p:nvCxnSpPr>
+          <p:spPr>
+            <a:xfrm flipV="1">
+              <a:off x="1635871" y="3777583"/>
+              <a:ext cx="1298121" cy="236005"/>
+            </a:xfrm>
+            <a:prstGeom prst="line">
+              <a:avLst/>
+            </a:prstGeom>
+          </p:spPr>
+          <p:style>
+            <a:lnRef idx="2">
+              <a:schemeClr val="accent2"/>
+            </a:lnRef>
+            <a:fillRef idx="0">
+              <a:schemeClr val="accent2"/>
+            </a:fillRef>
+            <a:effectRef idx="1">
+              <a:schemeClr val="accent2"/>
+            </a:effectRef>
+            <a:fontRef idx="minor">
+              <a:schemeClr val="tx1"/>
+            </a:fontRef>
+          </p:style>
+        </p:cxnSp>
+      </p:grpSp>
+      <p:cxnSp>
+        <p:nvCxnSpPr>
+          <p:cNvPr id="13" name="Straight Connector 12">
+            <a:extLst>
+              <a:ext uri="{FF2B5EF4-FFF2-40B4-BE49-F238E27FC236}">
+                <a16:creationId xmlns:a16="http://schemas.microsoft.com/office/drawing/2014/main" id="{4CC62624-3244-ED9B-CD61-A0C791B616E9}"/>
+              </a:ext>
+            </a:extLst>
+          </p:cNvPr>
+          <p:cNvCxnSpPr/>
+          <p:nvPr/>
+        </p:nvCxnSpPr>
         <p:spPr>
           <a:xfrm>
-            <a:off x="5883106" y="6247236"/>
-            <a:ext cx="887643" cy="361229"/>
+            <a:off x="7022034" y="5374718"/>
+            <a:ext cx="1305288" cy="0"/>
           </a:xfrm>
-          <a:prstGeom prst="wedgeRoundRectCallout">
-            <a:avLst>
-              <a:gd name="adj1" fmla="val -15705"/>
-              <a:gd name="adj2" fmla="val -139197"/>
-              <a:gd name="adj3" fmla="val 16667"/>
-            </a:avLst>
+          <a:prstGeom prst="line">
+            <a:avLst/>
           </a:prstGeom>
         </p:spPr>
         <p:style>
           <a:lnRef idx="2">
-            <a:schemeClr val="accent1">
-              <a:shade val="15000"/>
-            </a:schemeClr>
+            <a:schemeClr val="accent2"/>
           </a:lnRef>
-          <a:fillRef idx="1">
-            <a:schemeClr val="accent1"/>
+          <a:fillRef idx="0">
+            <a:schemeClr val="accent2"/>
           </a:fillRef>
-          <a:effectRef idx="0">
-            <a:schemeClr val="accent1"/>
+          <a:effectRef idx="1">
+            <a:schemeClr val="accent2"/>
           </a:effectRef>
           <a:fontRef idx="minor">
-            <a:schemeClr val="lt1"/>
+            <a:schemeClr val="tx1"/>
           </a:fontRef>
         </p:style>
-        <p:txBody>
-          <a:bodyPr rtlCol="0" anchor="ctr"/>
-          <a:lstStyle/>
-          <a:p>
-            <a:pPr algn="ctr"/>
-            <a:r>
-              <a:rPr lang="en-US" sz="1100"/>
-              <a:t>Bootstrap estimation</a:t>
-            </a:r>
-            <a:endParaRPr lang="en-US" sz="1100" dirty="0"/>
-          </a:p>
-        </p:txBody>
-      </p:sp>
+      </p:cxnSp>
+      <mc:AlternateContent xmlns:mc="http://schemas.openxmlformats.org/markup-compatibility/2006">
+        <mc:Choice xmlns:a14="http://schemas.microsoft.com/office/drawing/2010/main" Requires="a14">
+          <p:sp>
+            <p:nvSpPr>
+              <p:cNvPr id="14" name="Speech Bubble: Rectangle with Corners Rounded 13">
+                <a:extLst>
+                  <a:ext uri="{FF2B5EF4-FFF2-40B4-BE49-F238E27FC236}">
+                    <a16:creationId xmlns:a16="http://schemas.microsoft.com/office/drawing/2014/main" id="{7E602A33-7788-B630-6EB2-2D579E74980F}"/>
+                  </a:ext>
+                </a:extLst>
+              </p:cNvPr>
+              <p:cNvSpPr/>
+              <p:nvPr/>
+            </p:nvSpPr>
+            <p:spPr>
+              <a:xfrm>
+                <a:off x="6096000" y="5639963"/>
+                <a:ext cx="3864677" cy="397869"/>
+              </a:xfrm>
+              <a:prstGeom prst="wedgeRoundRectCallout">
+                <a:avLst>
+                  <a:gd name="adj1" fmla="val -8272"/>
+                  <a:gd name="adj2" fmla="val -109788"/>
+                  <a:gd name="adj3" fmla="val 16667"/>
+                </a:avLst>
+              </a:prstGeom>
+            </p:spPr>
+            <p:style>
+              <a:lnRef idx="2">
+                <a:schemeClr val="accent1">
+                  <a:shade val="15000"/>
+                </a:schemeClr>
+              </a:lnRef>
+              <a:fillRef idx="1">
+                <a:schemeClr val="accent1"/>
+              </a:fillRef>
+              <a:effectRef idx="0">
+                <a:schemeClr val="accent1"/>
+              </a:effectRef>
+              <a:fontRef idx="minor">
+                <a:schemeClr val="lt1"/>
+              </a:fontRef>
+            </p:style>
+            <p:txBody>
+              <a:bodyPr rtlCol="0" anchor="ctr"/>
+              <a:lstStyle/>
+              <a:p>
+                <a:pPr algn="ctr"/>
+                <a:r>
+                  <a:rPr lang="en-US" sz="1200" dirty="0"/>
+                  <a:t>Does not use the actual </a:t>
+                </a:r>
+                <a14:m>
+                  <m:oMath xmlns:m="http://schemas.openxmlformats.org/officeDocument/2006/math">
+                    <m:r>
+                      <a:rPr lang="en-US" sz="1200" b="0" i="1" smtClean="0">
+                        <a:latin typeface="Cambria Math" panose="02040503050406030204" pitchFamily="18" charset="0"/>
+                      </a:rPr>
+                      <m:t>𝐴</m:t>
+                    </m:r>
+                    <m:r>
+                      <a:rPr lang="en-US" sz="1200" b="0" i="1" smtClean="0">
+                        <a:latin typeface="Cambria Math" panose="02040503050406030204" pitchFamily="18" charset="0"/>
+                      </a:rPr>
+                      <m:t>′</m:t>
+                    </m:r>
+                  </m:oMath>
+                </a14:m>
+                <a:r>
+                  <a:rPr lang="en-US" sz="1200" dirty="0"/>
+                  <a:t> for the update! Uses instead what </a:t>
+                </a:r>
+                <a14:m>
+                  <m:oMath xmlns:m="http://schemas.openxmlformats.org/officeDocument/2006/math">
+                    <m:r>
+                      <a:rPr lang="en-US" sz="1200" b="0" i="1" smtClean="0">
+                        <a:latin typeface="Cambria Math" panose="02040503050406030204" pitchFamily="18" charset="0"/>
+                      </a:rPr>
+                      <m:t>𝑄</m:t>
+                    </m:r>
+                  </m:oMath>
+                </a14:m>
+                <a:r>
+                  <a:rPr lang="en-US" sz="1200" dirty="0"/>
+                  <a:t> thinks would be the optimal next action.</a:t>
+                </a:r>
+              </a:p>
+            </p:txBody>
+          </p:sp>
+        </mc:Choice>
+        <mc:Fallback>
+          <p:sp>
+            <p:nvSpPr>
+              <p:cNvPr id="14" name="Speech Bubble: Rectangle with Corners Rounded 13">
+                <a:extLst>
+                  <a:ext uri="{FF2B5EF4-FFF2-40B4-BE49-F238E27FC236}">
+                    <a16:creationId xmlns:a16="http://schemas.microsoft.com/office/drawing/2014/main" id="{7E602A33-7788-B630-6EB2-2D579E74980F}"/>
+                  </a:ext>
+                </a:extLst>
+              </p:cNvPr>
+              <p:cNvSpPr>
+                <a:spLocks noRot="1" noChangeAspect="1" noMove="1" noResize="1" noEditPoints="1" noAdjustHandles="1" noChangeArrowheads="1" noChangeShapeType="1" noTextEdit="1"/>
+              </p:cNvSpPr>
+              <p:nvPr/>
+            </p:nvSpPr>
+            <p:spPr>
+              <a:xfrm>
+                <a:off x="6096000" y="5639963"/>
+                <a:ext cx="3864677" cy="397869"/>
+              </a:xfrm>
+              <a:prstGeom prst="wedgeRoundRectCallout">
+                <a:avLst>
+                  <a:gd name="adj1" fmla="val -8272"/>
+                  <a:gd name="adj2" fmla="val -109788"/>
+                  <a:gd name="adj3" fmla="val 16667"/>
+                </a:avLst>
+              </a:prstGeom>
+              <a:blipFill>
+                <a:blip r:embed="rId4"/>
+                <a:stretch>
+                  <a:fillRect b="-10185"/>
+                </a:stretch>
+              </a:blipFill>
+            </p:spPr>
+            <p:txBody>
+              <a:bodyPr/>
+              <a:lstStyle/>
+              <a:p>
+                <a:r>
+                  <a:rPr lang="en-US">
+                    <a:noFill/>
+                  </a:rPr>
+                  <a:t> </a:t>
+                </a:r>
+              </a:p>
+            </p:txBody>
+          </p:sp>
+        </mc:Fallback>
+      </mc:AlternateContent>
+      <p:grpSp>
+        <p:nvGrpSpPr>
+          <p:cNvPr id="15" name="Group 14">
+            <a:extLst>
+              <a:ext uri="{FF2B5EF4-FFF2-40B4-BE49-F238E27FC236}">
+                <a16:creationId xmlns:a16="http://schemas.microsoft.com/office/drawing/2014/main" id="{6B2F30FF-D3B9-E426-E674-2402ADDD54E3}"/>
+              </a:ext>
+            </a:extLst>
+          </p:cNvPr>
+          <p:cNvGrpSpPr/>
+          <p:nvPr/>
+        </p:nvGrpSpPr>
+        <p:grpSpPr>
+          <a:xfrm>
+            <a:off x="2269363" y="4302597"/>
+            <a:ext cx="664630" cy="285750"/>
+            <a:chOff x="1635871" y="3777583"/>
+            <a:chExt cx="1298121" cy="285750"/>
+          </a:xfrm>
+        </p:grpSpPr>
+        <p:cxnSp>
+          <p:nvCxnSpPr>
+            <p:cNvPr id="16" name="Straight Connector 15">
+              <a:extLst>
+                <a:ext uri="{FF2B5EF4-FFF2-40B4-BE49-F238E27FC236}">
+                  <a16:creationId xmlns:a16="http://schemas.microsoft.com/office/drawing/2014/main" id="{B6DD8F5B-8EA2-E148-3B92-B869DE6F1A01}"/>
+                </a:ext>
+              </a:extLst>
+            </p:cNvPr>
+            <p:cNvCxnSpPr/>
+            <p:nvPr/>
+          </p:nvCxnSpPr>
+          <p:spPr>
+            <a:xfrm>
+              <a:off x="1635871" y="3777583"/>
+              <a:ext cx="1298121" cy="285750"/>
+            </a:xfrm>
+            <a:prstGeom prst="line">
+              <a:avLst/>
+            </a:prstGeom>
+          </p:spPr>
+          <p:style>
+            <a:lnRef idx="2">
+              <a:schemeClr val="accent2"/>
+            </a:lnRef>
+            <a:fillRef idx="0">
+              <a:schemeClr val="accent2"/>
+            </a:fillRef>
+            <a:effectRef idx="1">
+              <a:schemeClr val="accent2"/>
+            </a:effectRef>
+            <a:fontRef idx="minor">
+              <a:schemeClr val="tx1"/>
+            </a:fontRef>
+          </p:style>
+        </p:cxnSp>
+        <p:cxnSp>
+          <p:nvCxnSpPr>
+            <p:cNvPr id="17" name="Straight Connector 16">
+              <a:extLst>
+                <a:ext uri="{FF2B5EF4-FFF2-40B4-BE49-F238E27FC236}">
+                  <a16:creationId xmlns:a16="http://schemas.microsoft.com/office/drawing/2014/main" id="{9FEE99F0-86A8-29AC-DC20-F44F476EE9CA}"/>
+                </a:ext>
+              </a:extLst>
+            </p:cNvPr>
+            <p:cNvCxnSpPr>
+              <a:cxnSpLocks/>
+            </p:cNvCxnSpPr>
+            <p:nvPr/>
+          </p:nvCxnSpPr>
+          <p:spPr>
+            <a:xfrm flipV="1">
+              <a:off x="1635871" y="3777583"/>
+              <a:ext cx="1298121" cy="236005"/>
+            </a:xfrm>
+            <a:prstGeom prst="line">
+              <a:avLst/>
+            </a:prstGeom>
+          </p:spPr>
+          <p:style>
+            <a:lnRef idx="2">
+              <a:schemeClr val="accent2"/>
+            </a:lnRef>
+            <a:fillRef idx="0">
+              <a:schemeClr val="accent2"/>
+            </a:fillRef>
+            <a:effectRef idx="1">
+              <a:schemeClr val="accent2"/>
+            </a:effectRef>
+            <a:fontRef idx="minor">
+              <a:schemeClr val="tx1"/>
+            </a:fontRef>
+          </p:style>
+        </p:cxnSp>
+      </p:grpSp>
     </p:spTree>
     <p:extLst>
       <p:ext uri="{BB962C8B-B14F-4D97-AF65-F5344CB8AC3E}">
-        <p14:creationId xmlns:p14="http://schemas.microsoft.com/office/powerpoint/2010/main" val="2764700168"/>
+        <p14:creationId xmlns:p14="http://schemas.microsoft.com/office/powerpoint/2010/main" val="81018147"/>
       </p:ext>
     </p:extLst>
   </p:cSld>
@@ -5732,12 +5626,18 @@
 </p:sld>
 </file>
 
-<file path=ppt/slides/slide15.xml><?xml version="1.0" encoding="utf-8"?>
+<file path=ppt/slides/slide14.xml><?xml version="1.0" encoding="utf-8"?>
 <p:sld xmlns:a="http://schemas.openxmlformats.org/drawingml/2006/main" xmlns:r="http://schemas.openxmlformats.org/officeDocument/2006/relationships" xmlns:p="http://schemas.openxmlformats.org/presentationml/2006/main">
   <p:cSld>
     <p:spTree>
       <p:nvGrpSpPr>
-        <p:cNvPr id="1" name=""/>
+        <p:cNvPr id="1" name="">
+          <a:extLst>
+            <a:ext uri="{FF2B5EF4-FFF2-40B4-BE49-F238E27FC236}">
+              <a16:creationId xmlns:a16="http://schemas.microsoft.com/office/drawing/2014/main" id="{56E7ACE1-D949-6959-F883-5FFFEC216B73}"/>
+            </a:ext>
+          </a:extLst>
+        </p:cNvPr>
         <p:cNvGrpSpPr/>
         <p:nvPr/>
       </p:nvGrpSpPr>
@@ -5754,7 +5654,7 @@
           <p:cNvPr id="4" name="Title 3">
             <a:extLst>
               <a:ext uri="{FF2B5EF4-FFF2-40B4-BE49-F238E27FC236}">
-                <a16:creationId xmlns:a16="http://schemas.microsoft.com/office/drawing/2014/main" id="{7372C525-9440-DBEC-A10C-3B5C71AC3E70}"/>
+                <a16:creationId xmlns:a16="http://schemas.microsoft.com/office/drawing/2014/main" id="{4A61C794-2342-ECB0-7D60-69CE67C5AEEE}"/>
               </a:ext>
             </a:extLst>
           </p:cNvPr>
@@ -5772,7 +5672,7 @@
           <a:p>
             <a:r>
               <a:rPr lang="en-US" dirty="0"/>
-              <a:t>Expected Sarsa</a:t>
+              <a:t>Expected Sarsa: Off-policy TD Control</a:t>
             </a:r>
           </a:p>
         </p:txBody>
@@ -5782,7 +5682,7 @@
           <p:cNvPr id="5" name="Text Placeholder 4">
             <a:extLst>
               <a:ext uri="{FF2B5EF4-FFF2-40B4-BE49-F238E27FC236}">
-                <a16:creationId xmlns:a16="http://schemas.microsoft.com/office/drawing/2014/main" id="{F4E25947-2373-C66A-17CA-F57992596414}"/>
+                <a16:creationId xmlns:a16="http://schemas.microsoft.com/office/drawing/2014/main" id="{CA7666E1-9180-C127-BF1F-38950CF4145B}"/>
               </a:ext>
             </a:extLst>
           </p:cNvPr>
@@ -5798,14 +5698,17 @@
           <a:bodyPr/>
           <a:lstStyle/>
           <a:p>
-            <a:endParaRPr lang="en-US"/>
+            <a:r>
+              <a:rPr lang="en-US" dirty="0"/>
+              <a:t>Find a good policy.</a:t>
+            </a:r>
           </a:p>
         </p:txBody>
       </p:sp>
     </p:spTree>
     <p:extLst>
       <p:ext uri="{BB962C8B-B14F-4D97-AF65-F5344CB8AC3E}">
-        <p14:creationId xmlns:p14="http://schemas.microsoft.com/office/powerpoint/2010/main" val="3448291315"/>
+        <p14:creationId xmlns:p14="http://schemas.microsoft.com/office/powerpoint/2010/main" val="1438864125"/>
       </p:ext>
     </p:extLst>
   </p:cSld>
@@ -5815,7 +5718,7 @@
 </p:sld>
 </file>
 
-<file path=ppt/slides/slide16.xml><?xml version="1.0" encoding="utf-8"?>
+<file path=ppt/slides/slide15.xml><?xml version="1.0" encoding="utf-8"?>
 <p:sld xmlns:a="http://schemas.openxmlformats.org/drawingml/2006/main" xmlns:r="http://schemas.openxmlformats.org/officeDocument/2006/relationships" xmlns:p="http://schemas.openxmlformats.org/presentationml/2006/main">
   <p:cSld>
     <p:spTree>
@@ -5860,8 +5763,8 @@
           </a:p>
         </p:txBody>
       </p:sp>
-      <mc:AlternateContent xmlns:mc="http://schemas.openxmlformats.org/markup-compatibility/2006" xmlns:a14="http://schemas.microsoft.com/office/drawing/2010/main">
-        <mc:Choice Requires="a14">
+      <mc:AlternateContent xmlns:mc="http://schemas.openxmlformats.org/markup-compatibility/2006">
+        <mc:Choice xmlns:a14="http://schemas.microsoft.com/office/drawing/2010/main" Requires="a14">
           <p:sp>
             <p:nvSpPr>
               <p:cNvPr id="3" name="Content Placeholder 2">
@@ -5887,62 +5790,8 @@
               <a:p>
                 <a:r>
                   <a:rPr lang="en-US" dirty="0"/>
-                  <a:t>Like Q-learning, but use the expectation over all actions instead of </a:t>
-                </a:r>
-                <a14:m>
-                  <m:oMath xmlns:m="http://schemas.openxmlformats.org/officeDocument/2006/math">
-                    <m:func>
-                      <m:funcPr>
-                        <m:ctrlPr>
-                          <a:rPr lang="en-US" i="1" smtClean="0">
-                            <a:latin typeface="Cambria Math" panose="02040503050406030204" pitchFamily="18" charset="0"/>
-                          </a:rPr>
-                        </m:ctrlPr>
-                      </m:funcPr>
-                      <m:fName>
-                        <m:limLow>
-                          <m:limLowPr>
-                            <m:ctrlPr>
-                              <a:rPr lang="en-US" i="1" smtClean="0">
-                                <a:latin typeface="Cambria Math" panose="02040503050406030204" pitchFamily="18" charset="0"/>
-                              </a:rPr>
-                            </m:ctrlPr>
-                          </m:limLowPr>
-                          <m:e>
-                            <m:r>
-                              <m:rPr>
-                                <m:sty m:val="p"/>
-                              </m:rPr>
-                              <a:rPr lang="en-US" i="0" smtClean="0">
-                                <a:latin typeface="Cambria Math" panose="02040503050406030204" pitchFamily="18" charset="0"/>
-                              </a:rPr>
-                              <m:t>m</m:t>
-                            </m:r>
-                            <m:r>
-                              <m:rPr>
-                                <m:sty m:val="p"/>
-                              </m:rPr>
-                              <a:rPr lang="en-US" b="0" i="0" smtClean="0">
-                                <a:latin typeface="Cambria Math" panose="02040503050406030204" pitchFamily="18" charset="0"/>
-                              </a:rPr>
-                              <m:t>ax</m:t>
-                            </m:r>
-                          </m:e>
-                          <m:lim>
-                            <m:r>
-                              <a:rPr lang="en-US" b="0" i="1" smtClean="0">
-                                <a:latin typeface="Cambria Math" panose="02040503050406030204" pitchFamily="18" charset="0"/>
-                              </a:rPr>
-                              <m:t>𝑎</m:t>
-                            </m:r>
-                          </m:lim>
-                        </m:limLow>
-                      </m:fName>
-                      <m:e/>
-                    </m:func>
-                  </m:oMath>
-                </a14:m>
-                <a:endParaRPr lang="en-US" dirty="0"/>
+                  <a:t>Like Q-learning, but use the expectation over all possible next actions instead of the currently best action:</a:t>
+                </a:r>
               </a:p>
               <a:p>
                 <a:endParaRPr lang="en-US" dirty="0"/>
@@ -6864,7 +6713,7 @@
                 </a:pPr>
                 <a:r>
                   <a:rPr lang="en-US" dirty="0"/>
-                  <a:t>Eliminates Sarsa’s variance due to the random selection of </a:t>
+                  <a:t>Eliminates Sarsa’s variance due to the selection of </a:t>
                 </a:r>
                 <a14:m>
                   <m:oMath xmlns:m="http://schemas.openxmlformats.org/officeDocument/2006/math">
@@ -6903,7 +6752,7 @@
                 </a14:m>
                 <a:r>
                   <a:rPr lang="en-US" dirty="0"/>
-                  <a:t>.</a:t>
+                  <a:t> from a soft policy.</a:t>
                 </a:r>
               </a:p>
               <a:p>
@@ -6965,7 +6814,7 @@
             </p:txBody>
           </p:sp>
         </mc:Choice>
-        <mc:Fallback xmlns="">
+        <mc:Fallback>
           <p:sp>
             <p:nvSpPr>
               <p:cNvPr id="3" name="Content Placeholder 2">
@@ -7018,7 +6867,1270 @@
 </p:sld>
 </file>
 
+<file path=ppt/slides/slide16.xml><?xml version="1.0" encoding="utf-8"?>
+<p:sld xmlns:a="http://schemas.openxmlformats.org/drawingml/2006/main" xmlns:r="http://schemas.openxmlformats.org/officeDocument/2006/relationships" xmlns:p="http://schemas.openxmlformats.org/presentationml/2006/main">
+  <p:cSld>
+    <p:spTree>
+      <p:nvGrpSpPr>
+        <p:cNvPr id="1" name=""/>
+        <p:cNvGrpSpPr/>
+        <p:nvPr/>
+      </p:nvGrpSpPr>
+      <p:grpSpPr>
+        <a:xfrm>
+          <a:off x="0" y="0"/>
+          <a:ext cx="0" cy="0"/>
+          <a:chOff x="0" y="0"/>
+          <a:chExt cx="0" cy="0"/>
+        </a:xfrm>
+      </p:grpSpPr>
+      <p:sp>
+        <p:nvSpPr>
+          <p:cNvPr id="4" name="Title 3">
+            <a:extLst>
+              <a:ext uri="{FF2B5EF4-FFF2-40B4-BE49-F238E27FC236}">
+                <a16:creationId xmlns:a16="http://schemas.microsoft.com/office/drawing/2014/main" id="{C4B85368-75FE-0ABE-A947-10367985D24C}"/>
+              </a:ext>
+            </a:extLst>
+          </p:cNvPr>
+          <p:cNvSpPr>
+            <a:spLocks noGrp="1"/>
+          </p:cNvSpPr>
+          <p:nvPr>
+            <p:ph type="title"/>
+          </p:nvPr>
+        </p:nvSpPr>
+        <p:spPr/>
+        <p:txBody>
+          <a:bodyPr/>
+          <a:lstStyle/>
+          <a:p>
+            <a:r>
+              <a:rPr lang="en-US" dirty="0"/>
+              <a:t>Maximization Bias</a:t>
+            </a:r>
+          </a:p>
+        </p:txBody>
+      </p:sp>
+      <p:sp>
+        <p:nvSpPr>
+          <p:cNvPr id="5" name="Text Placeholder 4">
+            <a:extLst>
+              <a:ext uri="{FF2B5EF4-FFF2-40B4-BE49-F238E27FC236}">
+                <a16:creationId xmlns:a16="http://schemas.microsoft.com/office/drawing/2014/main" id="{92BF81C1-38C4-6FA3-D28D-0B1044ACA6E7}"/>
+              </a:ext>
+            </a:extLst>
+          </p:cNvPr>
+          <p:cNvSpPr>
+            <a:spLocks noGrp="1"/>
+          </p:cNvSpPr>
+          <p:nvPr>
+            <p:ph type="body" idx="1"/>
+          </p:nvPr>
+        </p:nvSpPr>
+        <p:spPr/>
+        <p:txBody>
+          <a:bodyPr/>
+          <a:lstStyle/>
+          <a:p>
+            <a:endParaRPr lang="en-US"/>
+          </a:p>
+        </p:txBody>
+      </p:sp>
+    </p:spTree>
+    <p:extLst>
+      <p:ext uri="{BB962C8B-B14F-4D97-AF65-F5344CB8AC3E}">
+        <p14:creationId xmlns:p14="http://schemas.microsoft.com/office/powerpoint/2010/main" val="1219949752"/>
+      </p:ext>
+    </p:extLst>
+  </p:cSld>
+  <p:clrMapOvr>
+    <a:masterClrMapping/>
+  </p:clrMapOvr>
+</p:sld>
+</file>
+
 <file path=ppt/slides/slide17.xml><?xml version="1.0" encoding="utf-8"?>
+<p:sld xmlns:a="http://schemas.openxmlformats.org/drawingml/2006/main" xmlns:r="http://schemas.openxmlformats.org/officeDocument/2006/relationships" xmlns:p="http://schemas.openxmlformats.org/presentationml/2006/main">
+  <p:cSld>
+    <p:spTree>
+      <p:nvGrpSpPr>
+        <p:cNvPr id="1" name=""/>
+        <p:cNvGrpSpPr/>
+        <p:nvPr/>
+      </p:nvGrpSpPr>
+      <p:grpSpPr>
+        <a:xfrm>
+          <a:off x="0" y="0"/>
+          <a:ext cx="0" cy="0"/>
+          <a:chOff x="0" y="0"/>
+          <a:chExt cx="0" cy="0"/>
+        </a:xfrm>
+      </p:grpSpPr>
+      <p:sp>
+        <p:nvSpPr>
+          <p:cNvPr id="2" name="Title 1">
+            <a:extLst>
+              <a:ext uri="{FF2B5EF4-FFF2-40B4-BE49-F238E27FC236}">
+                <a16:creationId xmlns:a16="http://schemas.microsoft.com/office/drawing/2014/main" id="{4F2C6363-9D21-FCAF-D518-75DBE389F9B3}"/>
+              </a:ext>
+            </a:extLst>
+          </p:cNvPr>
+          <p:cNvSpPr>
+            <a:spLocks noGrp="1"/>
+          </p:cNvSpPr>
+          <p:nvPr>
+            <p:ph type="title"/>
+          </p:nvPr>
+        </p:nvSpPr>
+        <p:spPr/>
+        <p:txBody>
+          <a:bodyPr/>
+          <a:lstStyle/>
+          <a:p>
+            <a:r>
+              <a:rPr lang="en-US" dirty="0"/>
+              <a:t>Q-Learning’s Maximization Bias</a:t>
+            </a:r>
+          </a:p>
+        </p:txBody>
+      </p:sp>
+      <mc:AlternateContent xmlns:mc="http://schemas.openxmlformats.org/markup-compatibility/2006">
+        <mc:Choice xmlns:a14="http://schemas.microsoft.com/office/drawing/2010/main" Requires="a14">
+          <p:sp>
+            <p:nvSpPr>
+              <p:cNvPr id="3" name="Content Placeholder 2">
+                <a:extLst>
+                  <a:ext uri="{FF2B5EF4-FFF2-40B4-BE49-F238E27FC236}">
+                    <a16:creationId xmlns:a16="http://schemas.microsoft.com/office/drawing/2014/main" id="{C34E4FF9-9BED-6723-C7F4-56C4276CC291}"/>
+                  </a:ext>
+                </a:extLst>
+              </p:cNvPr>
+              <p:cNvSpPr>
+                <a:spLocks noGrp="1"/>
+              </p:cNvSpPr>
+              <p:nvPr>
+                <p:ph idx="1"/>
+              </p:nvPr>
+            </p:nvSpPr>
+            <p:spPr>
+              <a:xfrm>
+                <a:off x="838200" y="1173965"/>
+                <a:ext cx="10515600" cy="4012288"/>
+              </a:xfrm>
+            </p:spPr>
+            <p:txBody>
+              <a:bodyPr>
+                <a:normAutofit fontScale="85000" lnSpcReduction="20000"/>
+              </a:bodyPr>
+              <a:lstStyle/>
+              <a:p>
+                <a:r>
+                  <a:rPr lang="en-US" dirty="0"/>
+                  <a:t>Q-learning update: </a:t>
+                </a:r>
+                <a:endParaRPr lang="en-US" i="1" dirty="0">
+                  <a:latin typeface="Cambria Math" panose="02040503050406030204" pitchFamily="18" charset="0"/>
+                </a:endParaRPr>
+              </a:p>
+              <a:p>
+                <a:pPr marL="0" indent="0">
+                  <a:buNone/>
+                </a:pPr>
+                <a14:m>
+                  <m:oMathPara xmlns:m="http://schemas.openxmlformats.org/officeDocument/2006/math">
+                    <m:oMathParaPr>
+                      <m:jc m:val="centerGroup"/>
+                    </m:oMathParaPr>
+                    <m:oMath xmlns:m="http://schemas.openxmlformats.org/officeDocument/2006/math">
+                      <m:r>
+                        <a:rPr lang="en-US" i="1">
+                          <a:latin typeface="Cambria Math" panose="02040503050406030204" pitchFamily="18" charset="0"/>
+                        </a:rPr>
+                        <m:t>𝑄</m:t>
+                      </m:r>
+                      <m:d>
+                        <m:dPr>
+                          <m:ctrlPr>
+                            <a:rPr lang="en-US" i="1">
+                              <a:latin typeface="Cambria Math" panose="02040503050406030204" pitchFamily="18" charset="0"/>
+                            </a:rPr>
+                          </m:ctrlPr>
+                        </m:dPr>
+                        <m:e>
+                          <m:sSub>
+                            <m:sSubPr>
+                              <m:ctrlPr>
+                                <a:rPr lang="en-US" i="1">
+                                  <a:latin typeface="Cambria Math" panose="02040503050406030204" pitchFamily="18" charset="0"/>
+                                </a:rPr>
+                              </m:ctrlPr>
+                            </m:sSubPr>
+                            <m:e>
+                              <m:r>
+                                <a:rPr lang="en-US" i="1">
+                                  <a:latin typeface="Cambria Math" panose="02040503050406030204" pitchFamily="18" charset="0"/>
+                                </a:rPr>
+                                <m:t>𝑆</m:t>
+                              </m:r>
+                            </m:e>
+                            <m:sub>
+                              <m:r>
+                                <a:rPr lang="en-US" i="1">
+                                  <a:latin typeface="Cambria Math" panose="02040503050406030204" pitchFamily="18" charset="0"/>
+                                </a:rPr>
+                                <m:t>𝑡</m:t>
+                              </m:r>
+                            </m:sub>
+                          </m:sSub>
+                          <m:r>
+                            <a:rPr lang="en-US" i="1">
+                              <a:latin typeface="Cambria Math" panose="02040503050406030204" pitchFamily="18" charset="0"/>
+                            </a:rPr>
+                            <m:t>,</m:t>
+                          </m:r>
+                          <m:sSub>
+                            <m:sSubPr>
+                              <m:ctrlPr>
+                                <a:rPr lang="en-US" i="1">
+                                  <a:latin typeface="Cambria Math" panose="02040503050406030204" pitchFamily="18" charset="0"/>
+                                </a:rPr>
+                              </m:ctrlPr>
+                            </m:sSubPr>
+                            <m:e>
+                              <m:r>
+                                <a:rPr lang="en-US" i="1">
+                                  <a:latin typeface="Cambria Math" panose="02040503050406030204" pitchFamily="18" charset="0"/>
+                                </a:rPr>
+                                <m:t>𝐴</m:t>
+                              </m:r>
+                            </m:e>
+                            <m:sub>
+                              <m:r>
+                                <a:rPr lang="en-US" i="1">
+                                  <a:latin typeface="Cambria Math" panose="02040503050406030204" pitchFamily="18" charset="0"/>
+                                </a:rPr>
+                                <m:t>𝑡</m:t>
+                              </m:r>
+                            </m:sub>
+                          </m:sSub>
+                        </m:e>
+                      </m:d>
+                      <m:r>
+                        <a:rPr lang="en-US" i="1">
+                          <a:latin typeface="Cambria Math" panose="02040503050406030204" pitchFamily="18" charset="0"/>
+                        </a:rPr>
+                        <m:t>←</m:t>
+                      </m:r>
+                      <m:r>
+                        <a:rPr lang="en-US" i="1">
+                          <a:latin typeface="Cambria Math" panose="02040503050406030204" pitchFamily="18" charset="0"/>
+                        </a:rPr>
+                        <m:t>𝑄</m:t>
+                      </m:r>
+                      <m:d>
+                        <m:dPr>
+                          <m:ctrlPr>
+                            <a:rPr lang="en-US" i="1">
+                              <a:latin typeface="Cambria Math" panose="02040503050406030204" pitchFamily="18" charset="0"/>
+                            </a:rPr>
+                          </m:ctrlPr>
+                        </m:dPr>
+                        <m:e>
+                          <m:sSub>
+                            <m:sSubPr>
+                              <m:ctrlPr>
+                                <a:rPr lang="en-US" i="1">
+                                  <a:latin typeface="Cambria Math" panose="02040503050406030204" pitchFamily="18" charset="0"/>
+                                </a:rPr>
+                              </m:ctrlPr>
+                            </m:sSubPr>
+                            <m:e>
+                              <m:r>
+                                <a:rPr lang="en-US" i="1">
+                                  <a:latin typeface="Cambria Math" panose="02040503050406030204" pitchFamily="18" charset="0"/>
+                                </a:rPr>
+                                <m:t>𝑆</m:t>
+                              </m:r>
+                            </m:e>
+                            <m:sub>
+                              <m:r>
+                                <a:rPr lang="en-US" i="1">
+                                  <a:latin typeface="Cambria Math" panose="02040503050406030204" pitchFamily="18" charset="0"/>
+                                </a:rPr>
+                                <m:t>𝑡</m:t>
+                              </m:r>
+                            </m:sub>
+                          </m:sSub>
+                          <m:r>
+                            <a:rPr lang="en-US" i="1">
+                              <a:latin typeface="Cambria Math" panose="02040503050406030204" pitchFamily="18" charset="0"/>
+                            </a:rPr>
+                            <m:t>,</m:t>
+                          </m:r>
+                          <m:sSub>
+                            <m:sSubPr>
+                              <m:ctrlPr>
+                                <a:rPr lang="en-US" i="1">
+                                  <a:latin typeface="Cambria Math" panose="02040503050406030204" pitchFamily="18" charset="0"/>
+                                </a:rPr>
+                              </m:ctrlPr>
+                            </m:sSubPr>
+                            <m:e>
+                              <m:r>
+                                <a:rPr lang="en-US" i="1">
+                                  <a:latin typeface="Cambria Math" panose="02040503050406030204" pitchFamily="18" charset="0"/>
+                                </a:rPr>
+                                <m:t>𝐴</m:t>
+                              </m:r>
+                            </m:e>
+                            <m:sub>
+                              <m:r>
+                                <a:rPr lang="en-US" i="1">
+                                  <a:latin typeface="Cambria Math" panose="02040503050406030204" pitchFamily="18" charset="0"/>
+                                </a:rPr>
+                                <m:t>𝑡</m:t>
+                              </m:r>
+                            </m:sub>
+                          </m:sSub>
+                        </m:e>
+                      </m:d>
+                      <m:r>
+                        <a:rPr lang="en-US" i="1">
+                          <a:latin typeface="Cambria Math" panose="02040503050406030204" pitchFamily="18" charset="0"/>
+                        </a:rPr>
+                        <m:t>+</m:t>
+                      </m:r>
+                      <m:r>
+                        <a:rPr lang="en-US" i="1">
+                          <a:latin typeface="Cambria Math" panose="02040503050406030204" pitchFamily="18" charset="0"/>
+                        </a:rPr>
+                        <m:t>𝛼</m:t>
+                      </m:r>
+                      <m:r>
+                        <a:rPr lang="en-US" i="1">
+                          <a:latin typeface="Cambria Math" panose="02040503050406030204" pitchFamily="18" charset="0"/>
+                        </a:rPr>
+                        <m:t>[</m:t>
+                      </m:r>
+                      <m:sSub>
+                        <m:sSubPr>
+                          <m:ctrlPr>
+                            <a:rPr lang="en-US" i="1">
+                              <a:latin typeface="Cambria Math" panose="02040503050406030204" pitchFamily="18" charset="0"/>
+                            </a:rPr>
+                          </m:ctrlPr>
+                        </m:sSubPr>
+                        <m:e>
+                          <m:r>
+                            <a:rPr lang="en-US" i="1">
+                              <a:latin typeface="Cambria Math" panose="02040503050406030204" pitchFamily="18" charset="0"/>
+                            </a:rPr>
+                            <m:t>𝑅</m:t>
+                          </m:r>
+                        </m:e>
+                        <m:sub>
+                          <m:r>
+                            <a:rPr lang="en-US" i="1">
+                              <a:latin typeface="Cambria Math" panose="02040503050406030204" pitchFamily="18" charset="0"/>
+                            </a:rPr>
+                            <m:t>𝑡</m:t>
+                          </m:r>
+                          <m:r>
+                            <a:rPr lang="en-US" i="1">
+                              <a:latin typeface="Cambria Math" panose="02040503050406030204" pitchFamily="18" charset="0"/>
+                            </a:rPr>
+                            <m:t>+1</m:t>
+                          </m:r>
+                        </m:sub>
+                      </m:sSub>
+                      <m:r>
+                        <a:rPr lang="en-US" i="1">
+                          <a:latin typeface="Cambria Math" panose="02040503050406030204" pitchFamily="18" charset="0"/>
+                        </a:rPr>
+                        <m:t>+</m:t>
+                      </m:r>
+                      <m:r>
+                        <a:rPr lang="en-US" i="1">
+                          <a:latin typeface="Cambria Math" panose="02040503050406030204" pitchFamily="18" charset="0"/>
+                        </a:rPr>
+                        <m:t>𝛾</m:t>
+                      </m:r>
+                      <m:func>
+                        <m:funcPr>
+                          <m:ctrlPr>
+                            <a:rPr lang="en-US" i="1">
+                              <a:latin typeface="Cambria Math" panose="02040503050406030204" pitchFamily="18" charset="0"/>
+                            </a:rPr>
+                          </m:ctrlPr>
+                        </m:funcPr>
+                        <m:fName>
+                          <m:limLow>
+                            <m:limLowPr>
+                              <m:ctrlPr>
+                                <a:rPr lang="en-US" i="1">
+                                  <a:latin typeface="Cambria Math" panose="02040503050406030204" pitchFamily="18" charset="0"/>
+                                </a:rPr>
+                              </m:ctrlPr>
+                            </m:limLowPr>
+                            <m:e>
+                              <m:r>
+                                <m:rPr>
+                                  <m:sty m:val="p"/>
+                                </m:rPr>
+                                <a:rPr lang="en-US">
+                                  <a:latin typeface="Cambria Math" panose="02040503050406030204" pitchFamily="18" charset="0"/>
+                                </a:rPr>
+                                <m:t>max</m:t>
+                              </m:r>
+                            </m:e>
+                            <m:lim>
+                              <m:r>
+                                <a:rPr lang="en-US" i="1">
+                                  <a:latin typeface="Cambria Math" panose="02040503050406030204" pitchFamily="18" charset="0"/>
+                                </a:rPr>
+                                <m:t>𝑎</m:t>
+                              </m:r>
+                            </m:lim>
+                          </m:limLow>
+                        </m:fName>
+                        <m:e>
+                          <m:r>
+                            <a:rPr lang="en-US" i="1">
+                              <a:latin typeface="Cambria Math" panose="02040503050406030204" pitchFamily="18" charset="0"/>
+                            </a:rPr>
+                            <m:t>𝑄</m:t>
+                          </m:r>
+                          <m:d>
+                            <m:dPr>
+                              <m:ctrlPr>
+                                <a:rPr lang="en-US" i="1">
+                                  <a:latin typeface="Cambria Math" panose="02040503050406030204" pitchFamily="18" charset="0"/>
+                                </a:rPr>
+                              </m:ctrlPr>
+                            </m:dPr>
+                            <m:e>
+                              <m:sSub>
+                                <m:sSubPr>
+                                  <m:ctrlPr>
+                                    <a:rPr lang="en-US" i="1">
+                                      <a:latin typeface="Cambria Math" panose="02040503050406030204" pitchFamily="18" charset="0"/>
+                                    </a:rPr>
+                                  </m:ctrlPr>
+                                </m:sSubPr>
+                                <m:e>
+                                  <m:r>
+                                    <a:rPr lang="en-US" i="1">
+                                      <a:latin typeface="Cambria Math" panose="02040503050406030204" pitchFamily="18" charset="0"/>
+                                    </a:rPr>
+                                    <m:t>𝑆</m:t>
+                                  </m:r>
+                                </m:e>
+                                <m:sub>
+                                  <m:r>
+                                    <a:rPr lang="en-US" i="1">
+                                      <a:latin typeface="Cambria Math" panose="02040503050406030204" pitchFamily="18" charset="0"/>
+                                    </a:rPr>
+                                    <m:t>𝑡</m:t>
+                                  </m:r>
+                                  <m:r>
+                                    <a:rPr lang="en-US" i="1">
+                                      <a:latin typeface="Cambria Math" panose="02040503050406030204" pitchFamily="18" charset="0"/>
+                                    </a:rPr>
+                                    <m:t>+1</m:t>
+                                  </m:r>
+                                </m:sub>
+                              </m:sSub>
+                              <m:r>
+                                <a:rPr lang="en-US" i="1">
+                                  <a:latin typeface="Cambria Math" panose="02040503050406030204" pitchFamily="18" charset="0"/>
+                                </a:rPr>
+                                <m:t>,</m:t>
+                              </m:r>
+                              <m:r>
+                                <a:rPr lang="en-US" i="1">
+                                  <a:latin typeface="Cambria Math" panose="02040503050406030204" pitchFamily="18" charset="0"/>
+                                </a:rPr>
+                                <m:t>𝑎</m:t>
+                              </m:r>
+                            </m:e>
+                          </m:d>
+                        </m:e>
+                      </m:func>
+                      <m:r>
+                        <a:rPr lang="en-US" i="1">
+                          <a:latin typeface="Cambria Math" panose="02040503050406030204" pitchFamily="18" charset="0"/>
+                        </a:rPr>
+                        <m:t>−</m:t>
+                      </m:r>
+                      <m:r>
+                        <a:rPr lang="en-US" i="1">
+                          <a:latin typeface="Cambria Math" panose="02040503050406030204" pitchFamily="18" charset="0"/>
+                        </a:rPr>
+                        <m:t>𝑄</m:t>
+                      </m:r>
+                      <m:d>
+                        <m:dPr>
+                          <m:ctrlPr>
+                            <a:rPr lang="en-US" i="1">
+                              <a:latin typeface="Cambria Math" panose="02040503050406030204" pitchFamily="18" charset="0"/>
+                            </a:rPr>
+                          </m:ctrlPr>
+                        </m:dPr>
+                        <m:e>
+                          <m:sSub>
+                            <m:sSubPr>
+                              <m:ctrlPr>
+                                <a:rPr lang="en-US" i="1">
+                                  <a:latin typeface="Cambria Math" panose="02040503050406030204" pitchFamily="18" charset="0"/>
+                                </a:rPr>
+                              </m:ctrlPr>
+                            </m:sSubPr>
+                            <m:e>
+                              <m:r>
+                                <a:rPr lang="en-US" i="1">
+                                  <a:latin typeface="Cambria Math" panose="02040503050406030204" pitchFamily="18" charset="0"/>
+                                </a:rPr>
+                                <m:t>𝑆</m:t>
+                              </m:r>
+                            </m:e>
+                            <m:sub>
+                              <m:r>
+                                <a:rPr lang="en-US" i="1">
+                                  <a:latin typeface="Cambria Math" panose="02040503050406030204" pitchFamily="18" charset="0"/>
+                                </a:rPr>
+                                <m:t>𝑡</m:t>
+                              </m:r>
+                            </m:sub>
+                          </m:sSub>
+                          <m:r>
+                            <a:rPr lang="en-US" i="1">
+                              <a:latin typeface="Cambria Math" panose="02040503050406030204" pitchFamily="18" charset="0"/>
+                            </a:rPr>
+                            <m:t>,</m:t>
+                          </m:r>
+                          <m:sSub>
+                            <m:sSubPr>
+                              <m:ctrlPr>
+                                <a:rPr lang="en-US" i="1">
+                                  <a:latin typeface="Cambria Math" panose="02040503050406030204" pitchFamily="18" charset="0"/>
+                                </a:rPr>
+                              </m:ctrlPr>
+                            </m:sSubPr>
+                            <m:e>
+                              <m:r>
+                                <a:rPr lang="en-US" i="1">
+                                  <a:latin typeface="Cambria Math" panose="02040503050406030204" pitchFamily="18" charset="0"/>
+                                </a:rPr>
+                                <m:t>𝐴</m:t>
+                              </m:r>
+                            </m:e>
+                            <m:sub>
+                              <m:r>
+                                <a:rPr lang="en-US" i="1">
+                                  <a:latin typeface="Cambria Math" panose="02040503050406030204" pitchFamily="18" charset="0"/>
+                                </a:rPr>
+                                <m:t>𝑡</m:t>
+                              </m:r>
+                            </m:sub>
+                          </m:sSub>
+                        </m:e>
+                      </m:d>
+                      <m:r>
+                        <a:rPr lang="en-US" i="1">
+                          <a:latin typeface="Cambria Math" panose="02040503050406030204" pitchFamily="18" charset="0"/>
+                        </a:rPr>
+                        <m:t>]</m:t>
+                      </m:r>
+                    </m:oMath>
+                  </m:oMathPara>
+                </a14:m>
+                <a:endParaRPr lang="en-US" dirty="0"/>
+              </a:p>
+              <a:p>
+                <a:endParaRPr lang="en-US" dirty="0"/>
+              </a:p>
+              <a:p>
+                <a:r>
+                  <a:rPr lang="en-US" dirty="0"/>
+                  <a:t>The next action is not observed, but the next best action according to </a:t>
+                </a:r>
+                <a14:m>
+                  <m:oMath xmlns:m="http://schemas.openxmlformats.org/officeDocument/2006/math">
+                    <m:r>
+                      <a:rPr lang="en-US" i="1" dirty="0" smtClean="0">
+                        <a:latin typeface="Cambria Math" panose="02040503050406030204" pitchFamily="18" charset="0"/>
+                      </a:rPr>
+                      <m:t>𝑄</m:t>
+                    </m:r>
+                  </m:oMath>
+                </a14:m>
+                <a:r>
+                  <a:rPr lang="en-US" dirty="0"/>
+                  <a:t> is used in the update of </a:t>
+                </a:r>
+                <a14:m>
+                  <m:oMath xmlns:m="http://schemas.openxmlformats.org/officeDocument/2006/math">
+                    <m:r>
+                      <a:rPr lang="en-US" b="0" i="1" smtClean="0">
+                        <a:latin typeface="Cambria Math" panose="02040503050406030204" pitchFamily="18" charset="0"/>
+                      </a:rPr>
+                      <m:t>𝑄</m:t>
+                    </m:r>
+                  </m:oMath>
+                </a14:m>
+                <a:r>
+                  <a:rPr lang="en-US" dirty="0"/>
+                  <a:t>. </a:t>
+                </a:r>
+              </a:p>
+              <a:p>
+                <a:r>
+                  <a:rPr lang="en-US" dirty="0"/>
+                  <a:t>This cycle creates a </a:t>
+                </a:r>
+                <a:r>
+                  <a:rPr lang="en-US" b="1" dirty="0"/>
+                  <a:t>maximization bias </a:t>
+                </a:r>
+                <a:r>
+                  <a:rPr lang="en-US" dirty="0"/>
+                  <a:t>that leads to overestimating the </a:t>
+                </a:r>
+                <a14:m>
+                  <m:oMath xmlns:m="http://schemas.openxmlformats.org/officeDocument/2006/math">
+                    <m:r>
+                      <a:rPr lang="en-US" i="1" dirty="0">
+                        <a:latin typeface="Cambria Math" panose="02040503050406030204" pitchFamily="18" charset="0"/>
+                      </a:rPr>
+                      <m:t>𝑄</m:t>
+                    </m:r>
+                  </m:oMath>
+                </a14:m>
+                <a:r>
+                  <a:rPr lang="en-US" dirty="0"/>
+                  <a:t>- values.</a:t>
+                </a:r>
+              </a:p>
+              <a:p>
+                <a:endParaRPr lang="en-US" dirty="0"/>
+              </a:p>
+              <a:p>
+                <a:r>
+                  <a:rPr lang="en-US" dirty="0"/>
+                  <a:t>Solution: </a:t>
+                </a:r>
+              </a:p>
+              <a:p>
+                <a:pPr lvl="1"/>
+                <a:r>
+                  <a:rPr lang="en-US" b="1" dirty="0"/>
+                  <a:t>Double learning </a:t>
+                </a:r>
+                <a:r>
+                  <a:rPr lang="en-US" dirty="0"/>
+                  <a:t>by learning two independent </a:t>
+                </a:r>
+                <a14:m>
+                  <m:oMath xmlns:m="http://schemas.openxmlformats.org/officeDocument/2006/math">
+                    <m:r>
+                      <a:rPr lang="en-US" b="0" i="1" smtClean="0">
+                        <a:latin typeface="Cambria Math" panose="02040503050406030204" pitchFamily="18" charset="0"/>
+                      </a:rPr>
+                      <m:t>𝑄</m:t>
+                    </m:r>
+                  </m:oMath>
+                </a14:m>
+                <a:r>
+                  <a:rPr lang="en-US" dirty="0"/>
+                  <a:t>-functions and using one for the action selection and the other one for the bootstrap estimate.</a:t>
+                </a:r>
+              </a:p>
+            </p:txBody>
+          </p:sp>
+        </mc:Choice>
+        <mc:Fallback>
+          <p:sp>
+            <p:nvSpPr>
+              <p:cNvPr id="3" name="Content Placeholder 2">
+                <a:extLst>
+                  <a:ext uri="{FF2B5EF4-FFF2-40B4-BE49-F238E27FC236}">
+                    <a16:creationId xmlns:a16="http://schemas.microsoft.com/office/drawing/2014/main" id="{C34E4FF9-9BED-6723-C7F4-56C4276CC291}"/>
+                  </a:ext>
+                </a:extLst>
+              </p:cNvPr>
+              <p:cNvSpPr>
+                <a:spLocks noGrp="1" noRot="1" noChangeAspect="1" noMove="1" noResize="1" noEditPoints="1" noAdjustHandles="1" noChangeArrowheads="1" noChangeShapeType="1" noTextEdit="1"/>
+              </p:cNvSpPr>
+              <p:nvPr>
+                <p:ph idx="1"/>
+              </p:nvPr>
+            </p:nvSpPr>
+            <p:spPr>
+              <a:xfrm>
+                <a:off x="838200" y="1173965"/>
+                <a:ext cx="10515600" cy="4012288"/>
+              </a:xfrm>
+              <a:blipFill>
+                <a:blip r:embed="rId2"/>
+                <a:stretch>
+                  <a:fillRect l="-812" t="-3343"/>
+                </a:stretch>
+              </a:blipFill>
+            </p:spPr>
+            <p:txBody>
+              <a:bodyPr/>
+              <a:lstStyle/>
+              <a:p>
+                <a:r>
+                  <a:rPr lang="en-US">
+                    <a:noFill/>
+                  </a:rPr>
+                  <a:t> </a:t>
+                </a:r>
+              </a:p>
+            </p:txBody>
+          </p:sp>
+        </mc:Fallback>
+      </mc:AlternateContent>
+    </p:spTree>
+    <p:extLst>
+      <p:ext uri="{BB962C8B-B14F-4D97-AF65-F5344CB8AC3E}">
+        <p14:creationId xmlns:p14="http://schemas.microsoft.com/office/powerpoint/2010/main" val="2764700168"/>
+      </p:ext>
+    </p:extLst>
+  </p:cSld>
+  <p:clrMapOvr>
+    <a:masterClrMapping/>
+  </p:clrMapOvr>
+</p:sld>
+</file>
+
+<file path=ppt/slides/slide18.xml><?xml version="1.0" encoding="utf-8"?>
+<p:sld xmlns:a="http://schemas.openxmlformats.org/drawingml/2006/main" xmlns:r="http://schemas.openxmlformats.org/officeDocument/2006/relationships" xmlns:p="http://schemas.openxmlformats.org/presentationml/2006/main">
+  <p:cSld>
+    <p:spTree>
+      <p:nvGrpSpPr>
+        <p:cNvPr id="1" name="">
+          <a:extLst>
+            <a:ext uri="{FF2B5EF4-FFF2-40B4-BE49-F238E27FC236}">
+              <a16:creationId xmlns:a16="http://schemas.microsoft.com/office/drawing/2014/main" id="{1F1A9B86-C713-6476-4BAC-706F7BE18D22}"/>
+            </a:ext>
+          </a:extLst>
+        </p:cNvPr>
+        <p:cNvGrpSpPr/>
+        <p:nvPr/>
+      </p:nvGrpSpPr>
+      <p:grpSpPr>
+        <a:xfrm>
+          <a:off x="0" y="0"/>
+          <a:ext cx="0" cy="0"/>
+          <a:chOff x="0" y="0"/>
+          <a:chExt cx="0" cy="0"/>
+        </a:xfrm>
+      </p:grpSpPr>
+      <p:sp>
+        <p:nvSpPr>
+          <p:cNvPr id="2" name="Title 1">
+            <a:extLst>
+              <a:ext uri="{FF2B5EF4-FFF2-40B4-BE49-F238E27FC236}">
+                <a16:creationId xmlns:a16="http://schemas.microsoft.com/office/drawing/2014/main" id="{4FBB1961-CA51-2458-1636-A04654FFC557}"/>
+              </a:ext>
+            </a:extLst>
+          </p:cNvPr>
+          <p:cNvSpPr>
+            <a:spLocks noGrp="1"/>
+          </p:cNvSpPr>
+          <p:nvPr>
+            <p:ph type="title"/>
+          </p:nvPr>
+        </p:nvSpPr>
+        <p:spPr/>
+        <p:txBody>
+          <a:bodyPr/>
+          <a:lstStyle/>
+          <a:p>
+            <a:r>
+              <a:rPr lang="en-US" dirty="0"/>
+              <a:t>Double Q-Learning</a:t>
+            </a:r>
+          </a:p>
+        </p:txBody>
+      </p:sp>
+      <mc:AlternateContent xmlns:mc="http://schemas.openxmlformats.org/markup-compatibility/2006">
+        <mc:Choice xmlns:a14="http://schemas.microsoft.com/office/drawing/2010/main" Requires="a14">
+          <p:sp>
+            <p:nvSpPr>
+              <p:cNvPr id="3" name="Content Placeholder 2">
+                <a:extLst>
+                  <a:ext uri="{FF2B5EF4-FFF2-40B4-BE49-F238E27FC236}">
+                    <a16:creationId xmlns:a16="http://schemas.microsoft.com/office/drawing/2014/main" id="{DAD73CEC-B27D-5D7D-F62B-D4CB109A78BE}"/>
+                  </a:ext>
+                </a:extLst>
+              </p:cNvPr>
+              <p:cNvSpPr>
+                <a:spLocks noGrp="1"/>
+              </p:cNvSpPr>
+              <p:nvPr>
+                <p:ph idx="1"/>
+              </p:nvPr>
+            </p:nvSpPr>
+            <p:spPr>
+              <a:xfrm>
+                <a:off x="838200" y="1173966"/>
+                <a:ext cx="10515600" cy="585939"/>
+              </a:xfrm>
+            </p:spPr>
+            <p:txBody>
+              <a:bodyPr>
+                <a:normAutofit fontScale="77500" lnSpcReduction="20000"/>
+              </a:bodyPr>
+              <a:lstStyle/>
+              <a:p>
+                <a:r>
+                  <a:rPr lang="en-US" dirty="0"/>
+                  <a:t>Learns</a:t>
+                </a:r>
+                <a:r>
+                  <a:rPr lang="en-US" b="1" dirty="0"/>
+                  <a:t> </a:t>
+                </a:r>
+                <a:r>
+                  <a:rPr lang="en-US" dirty="0"/>
+                  <a:t>two independent </a:t>
+                </a:r>
+                <a14:m>
+                  <m:oMath xmlns:m="http://schemas.openxmlformats.org/officeDocument/2006/math">
+                    <m:r>
+                      <a:rPr lang="en-US" b="0" i="1" smtClean="0">
+                        <a:latin typeface="Cambria Math" panose="02040503050406030204" pitchFamily="18" charset="0"/>
+                      </a:rPr>
+                      <m:t>𝑄</m:t>
+                    </m:r>
+                  </m:oMath>
+                </a14:m>
+                <a:r>
+                  <a:rPr lang="en-US" dirty="0"/>
+                  <a:t>-functions. One is used for action selection and the other one for the bootstrap estimate.</a:t>
+                </a:r>
+              </a:p>
+            </p:txBody>
+          </p:sp>
+        </mc:Choice>
+        <mc:Fallback>
+          <p:sp>
+            <p:nvSpPr>
+              <p:cNvPr id="3" name="Content Placeholder 2">
+                <a:extLst>
+                  <a:ext uri="{FF2B5EF4-FFF2-40B4-BE49-F238E27FC236}">
+                    <a16:creationId xmlns:a16="http://schemas.microsoft.com/office/drawing/2014/main" id="{DAD73CEC-B27D-5D7D-F62B-D4CB109A78BE}"/>
+                  </a:ext>
+                </a:extLst>
+              </p:cNvPr>
+              <p:cNvSpPr>
+                <a:spLocks noGrp="1" noRot="1" noChangeAspect="1" noMove="1" noResize="1" noEditPoints="1" noAdjustHandles="1" noChangeArrowheads="1" noChangeShapeType="1" noTextEdit="1"/>
+              </p:cNvSpPr>
+              <p:nvPr>
+                <p:ph idx="1"/>
+              </p:nvPr>
+            </p:nvSpPr>
+            <p:spPr>
+              <a:xfrm>
+                <a:off x="838200" y="1173966"/>
+                <a:ext cx="10515600" cy="585939"/>
+              </a:xfrm>
+              <a:blipFill>
+                <a:blip r:embed="rId2"/>
+                <a:stretch>
+                  <a:fillRect l="-696" t="-20833" r="-232" b="-19792"/>
+                </a:stretch>
+              </a:blipFill>
+            </p:spPr>
+            <p:txBody>
+              <a:bodyPr/>
+              <a:lstStyle/>
+              <a:p>
+                <a:r>
+                  <a:rPr lang="en-US">
+                    <a:noFill/>
+                  </a:rPr>
+                  <a:t> </a:t>
+                </a:r>
+              </a:p>
+            </p:txBody>
+          </p:sp>
+        </mc:Fallback>
+      </mc:AlternateContent>
+      <p:grpSp>
+        <p:nvGrpSpPr>
+          <p:cNvPr id="10" name="Group 9">
+            <a:extLst>
+              <a:ext uri="{FF2B5EF4-FFF2-40B4-BE49-F238E27FC236}">
+                <a16:creationId xmlns:a16="http://schemas.microsoft.com/office/drawing/2014/main" id="{0F54D989-C1C4-B92B-B40B-AAB5F3FF6A71}"/>
+              </a:ext>
+            </a:extLst>
+          </p:cNvPr>
+          <p:cNvGrpSpPr/>
+          <p:nvPr/>
+        </p:nvGrpSpPr>
+        <p:grpSpPr>
+          <a:xfrm>
+            <a:off x="2253317" y="1759905"/>
+            <a:ext cx="7811008" cy="4122625"/>
+            <a:chOff x="2239357" y="2185695"/>
+            <a:chExt cx="7811008" cy="4122625"/>
+          </a:xfrm>
+        </p:grpSpPr>
+        <p:pic>
+          <p:nvPicPr>
+            <p:cNvPr id="5" name="Picture 4">
+              <a:extLst>
+                <a:ext uri="{FF2B5EF4-FFF2-40B4-BE49-F238E27FC236}">
+                  <a16:creationId xmlns:a16="http://schemas.microsoft.com/office/drawing/2014/main" id="{C034FF89-75D8-9358-4C07-163A138A5480}"/>
+                </a:ext>
+              </a:extLst>
+            </p:cNvPr>
+            <p:cNvPicPr>
+              <a:picLocks noChangeAspect="1"/>
+            </p:cNvPicPr>
+            <p:nvPr/>
+          </p:nvPicPr>
+          <p:blipFill>
+            <a:blip r:embed="rId3"/>
+            <a:stretch>
+              <a:fillRect/>
+            </a:stretch>
+          </p:blipFill>
+          <p:spPr>
+            <a:xfrm>
+              <a:off x="2239357" y="2185695"/>
+              <a:ext cx="7811008" cy="4051918"/>
+            </a:xfrm>
+            <a:prstGeom prst="rect">
+              <a:avLst/>
+            </a:prstGeom>
+          </p:spPr>
+        </p:pic>
+        <p:sp>
+          <p:nvSpPr>
+            <p:cNvPr id="4" name="Speech Bubble: Rectangle with Corners Rounded 3">
+              <a:extLst>
+                <a:ext uri="{FF2B5EF4-FFF2-40B4-BE49-F238E27FC236}">
+                  <a16:creationId xmlns:a16="http://schemas.microsoft.com/office/drawing/2014/main" id="{81EC9BCF-C1C5-6BB6-41FA-130AD6AA9D1A}"/>
+                </a:ext>
+              </a:extLst>
+            </p:cNvPr>
+            <p:cNvSpPr/>
+            <p:nvPr/>
+          </p:nvSpPr>
+          <p:spPr>
+            <a:xfrm>
+              <a:off x="7308220" y="5947091"/>
+              <a:ext cx="816677" cy="361229"/>
+            </a:xfrm>
+            <a:prstGeom prst="wedgeRoundRectCallout">
+              <a:avLst>
+                <a:gd name="adj1" fmla="val -15705"/>
+                <a:gd name="adj2" fmla="val -139197"/>
+                <a:gd name="adj3" fmla="val 16667"/>
+              </a:avLst>
+            </a:prstGeom>
+          </p:spPr>
+          <p:style>
+            <a:lnRef idx="2">
+              <a:schemeClr val="accent1">
+                <a:shade val="15000"/>
+              </a:schemeClr>
+            </a:lnRef>
+            <a:fillRef idx="1">
+              <a:schemeClr val="accent1"/>
+            </a:fillRef>
+            <a:effectRef idx="0">
+              <a:schemeClr val="accent1"/>
+            </a:effectRef>
+            <a:fontRef idx="minor">
+              <a:schemeClr val="lt1"/>
+            </a:fontRef>
+          </p:style>
+          <p:txBody>
+            <a:bodyPr rtlCol="0" anchor="ctr"/>
+            <a:lstStyle/>
+            <a:p>
+              <a:pPr algn="ctr"/>
+              <a:r>
+                <a:rPr lang="en-US" sz="1100" dirty="0"/>
+                <a:t>Action selection</a:t>
+              </a:r>
+            </a:p>
+          </p:txBody>
+        </p:sp>
+        <p:sp>
+          <p:nvSpPr>
+            <p:cNvPr id="6" name="Speech Bubble: Rectangle with Corners Rounded 5">
+              <a:extLst>
+                <a:ext uri="{FF2B5EF4-FFF2-40B4-BE49-F238E27FC236}">
+                  <a16:creationId xmlns:a16="http://schemas.microsoft.com/office/drawing/2014/main" id="{593CB310-66AF-43E6-3435-FE7EEBE22E92}"/>
+                </a:ext>
+              </a:extLst>
+            </p:cNvPr>
+            <p:cNvSpPr/>
+            <p:nvPr/>
+          </p:nvSpPr>
+          <p:spPr>
+            <a:xfrm>
+              <a:off x="5883106" y="5947091"/>
+              <a:ext cx="887643" cy="361229"/>
+            </a:xfrm>
+            <a:prstGeom prst="wedgeRoundRectCallout">
+              <a:avLst>
+                <a:gd name="adj1" fmla="val -15705"/>
+                <a:gd name="adj2" fmla="val -139197"/>
+                <a:gd name="adj3" fmla="val 16667"/>
+              </a:avLst>
+            </a:prstGeom>
+          </p:spPr>
+          <p:style>
+            <a:lnRef idx="2">
+              <a:schemeClr val="accent1">
+                <a:shade val="15000"/>
+              </a:schemeClr>
+            </a:lnRef>
+            <a:fillRef idx="1">
+              <a:schemeClr val="accent1"/>
+            </a:fillRef>
+            <a:effectRef idx="0">
+              <a:schemeClr val="accent1"/>
+            </a:effectRef>
+            <a:fontRef idx="minor">
+              <a:schemeClr val="lt1"/>
+            </a:fontRef>
+          </p:style>
+          <p:txBody>
+            <a:bodyPr rtlCol="0" anchor="ctr"/>
+            <a:lstStyle/>
+            <a:p>
+              <a:pPr algn="ctr"/>
+              <a:r>
+                <a:rPr lang="en-US" sz="1100" dirty="0"/>
+                <a:t>Bootstrap estimate</a:t>
+              </a:r>
+            </a:p>
+          </p:txBody>
+        </p:sp>
+      </p:grpSp>
+      <p:sp>
+        <p:nvSpPr>
+          <p:cNvPr id="9" name="Content Placeholder 2">
+            <a:extLst>
+              <a:ext uri="{FF2B5EF4-FFF2-40B4-BE49-F238E27FC236}">
+                <a16:creationId xmlns:a16="http://schemas.microsoft.com/office/drawing/2014/main" id="{1926431E-CC5D-4EF0-79C5-590919834425}"/>
+              </a:ext>
+            </a:extLst>
+          </p:cNvPr>
+          <p:cNvSpPr txBox="1">
+            <a:spLocks/>
+          </p:cNvSpPr>
+          <p:nvPr/>
+        </p:nvSpPr>
+        <p:spPr>
+          <a:xfrm>
+            <a:off x="838200" y="6035201"/>
+            <a:ext cx="10515600" cy="585939"/>
+          </a:xfrm>
+          <a:prstGeom prst="rect">
+            <a:avLst/>
+          </a:prstGeom>
+        </p:spPr>
+        <p:txBody>
+          <a:bodyPr vert="horz" lIns="91440" tIns="45720" rIns="91440" bIns="45720" rtlCol="0">
+            <a:normAutofit fontScale="77500" lnSpcReduction="20000"/>
+          </a:bodyPr>
+          <a:lstStyle>
+            <a:lvl1pPr marL="228600" indent="-228600" algn="l" defTabSz="914400" rtl="0" eaLnBrk="1" latinLnBrk="0" hangingPunct="1">
+              <a:lnSpc>
+                <a:spcPct val="90000"/>
+              </a:lnSpc>
+              <a:spcBef>
+                <a:spcPts val="1000"/>
+              </a:spcBef>
+              <a:buFont typeface="Arial" panose="020B0604020202020204" pitchFamily="34" charset="0"/>
+              <a:buChar char="•"/>
+              <a:defRPr sz="2800" kern="1200">
+                <a:solidFill>
+                  <a:schemeClr val="tx1"/>
+                </a:solidFill>
+                <a:latin typeface="+mn-lt"/>
+                <a:ea typeface="+mn-ea"/>
+                <a:cs typeface="+mn-cs"/>
+              </a:defRPr>
+            </a:lvl1pPr>
+            <a:lvl2pPr marL="685800" indent="-228600" algn="l" defTabSz="914400" rtl="0" eaLnBrk="1" latinLnBrk="0" hangingPunct="1">
+              <a:lnSpc>
+                <a:spcPct val="90000"/>
+              </a:lnSpc>
+              <a:spcBef>
+                <a:spcPts val="500"/>
+              </a:spcBef>
+              <a:buFont typeface="Arial" panose="020B0604020202020204" pitchFamily="34" charset="0"/>
+              <a:buChar char="•"/>
+              <a:defRPr sz="2400" kern="1200">
+                <a:solidFill>
+                  <a:schemeClr val="tx1"/>
+                </a:solidFill>
+                <a:latin typeface="+mn-lt"/>
+                <a:ea typeface="+mn-ea"/>
+                <a:cs typeface="+mn-cs"/>
+              </a:defRPr>
+            </a:lvl2pPr>
+            <a:lvl3pPr marL="1143000" indent="-228600" algn="l" defTabSz="914400" rtl="0" eaLnBrk="1" latinLnBrk="0" hangingPunct="1">
+              <a:lnSpc>
+                <a:spcPct val="90000"/>
+              </a:lnSpc>
+              <a:spcBef>
+                <a:spcPts val="500"/>
+              </a:spcBef>
+              <a:buFont typeface="Arial" panose="020B0604020202020204" pitchFamily="34" charset="0"/>
+              <a:buChar char="•"/>
+              <a:defRPr sz="2000" kern="1200">
+                <a:solidFill>
+                  <a:schemeClr val="tx1"/>
+                </a:solidFill>
+                <a:latin typeface="+mn-lt"/>
+                <a:ea typeface="+mn-ea"/>
+                <a:cs typeface="+mn-cs"/>
+              </a:defRPr>
+            </a:lvl3pPr>
+            <a:lvl4pPr marL="1600200" indent="-228600" algn="l" defTabSz="914400" rtl="0" eaLnBrk="1" latinLnBrk="0" hangingPunct="1">
+              <a:lnSpc>
+                <a:spcPct val="90000"/>
+              </a:lnSpc>
+              <a:spcBef>
+                <a:spcPts val="500"/>
+              </a:spcBef>
+              <a:buFont typeface="Arial" panose="020B0604020202020204" pitchFamily="34" charset="0"/>
+              <a:buChar char="•"/>
+              <a:defRPr sz="1800" kern="1200">
+                <a:solidFill>
+                  <a:schemeClr val="tx1"/>
+                </a:solidFill>
+                <a:latin typeface="+mn-lt"/>
+                <a:ea typeface="+mn-ea"/>
+                <a:cs typeface="+mn-cs"/>
+              </a:defRPr>
+            </a:lvl4pPr>
+            <a:lvl5pPr marL="2057400" indent="-228600" algn="l" defTabSz="914400" rtl="0" eaLnBrk="1" latinLnBrk="0" hangingPunct="1">
+              <a:lnSpc>
+                <a:spcPct val="90000"/>
+              </a:lnSpc>
+              <a:spcBef>
+                <a:spcPts val="500"/>
+              </a:spcBef>
+              <a:buFont typeface="Arial" panose="020B0604020202020204" pitchFamily="34" charset="0"/>
+              <a:buChar char="•"/>
+              <a:defRPr sz="1800" kern="1200">
+                <a:solidFill>
+                  <a:schemeClr val="tx1"/>
+                </a:solidFill>
+                <a:latin typeface="+mn-lt"/>
+                <a:ea typeface="+mn-ea"/>
+                <a:cs typeface="+mn-cs"/>
+              </a:defRPr>
+            </a:lvl5pPr>
+            <a:lvl6pPr marL="2514600" indent="-228600" algn="l" defTabSz="914400" rtl="0" eaLnBrk="1" latinLnBrk="0" hangingPunct="1">
+              <a:lnSpc>
+                <a:spcPct val="90000"/>
+              </a:lnSpc>
+              <a:spcBef>
+                <a:spcPts val="500"/>
+              </a:spcBef>
+              <a:buFont typeface="Arial" panose="020B0604020202020204" pitchFamily="34" charset="0"/>
+              <a:buChar char="•"/>
+              <a:defRPr sz="1800" kern="1200">
+                <a:solidFill>
+                  <a:schemeClr val="tx1"/>
+                </a:solidFill>
+                <a:latin typeface="+mn-lt"/>
+                <a:ea typeface="+mn-ea"/>
+                <a:cs typeface="+mn-cs"/>
+              </a:defRPr>
+            </a:lvl6pPr>
+            <a:lvl7pPr marL="2971800" indent="-228600" algn="l" defTabSz="914400" rtl="0" eaLnBrk="1" latinLnBrk="0" hangingPunct="1">
+              <a:lnSpc>
+                <a:spcPct val="90000"/>
+              </a:lnSpc>
+              <a:spcBef>
+                <a:spcPts val="500"/>
+              </a:spcBef>
+              <a:buFont typeface="Arial" panose="020B0604020202020204" pitchFamily="34" charset="0"/>
+              <a:buChar char="•"/>
+              <a:defRPr sz="1800" kern="1200">
+                <a:solidFill>
+                  <a:schemeClr val="tx1"/>
+                </a:solidFill>
+                <a:latin typeface="+mn-lt"/>
+                <a:ea typeface="+mn-ea"/>
+                <a:cs typeface="+mn-cs"/>
+              </a:defRPr>
+            </a:lvl7pPr>
+            <a:lvl8pPr marL="3429000" indent="-228600" algn="l" defTabSz="914400" rtl="0" eaLnBrk="1" latinLnBrk="0" hangingPunct="1">
+              <a:lnSpc>
+                <a:spcPct val="90000"/>
+              </a:lnSpc>
+              <a:spcBef>
+                <a:spcPts val="500"/>
+              </a:spcBef>
+              <a:buFont typeface="Arial" panose="020B0604020202020204" pitchFamily="34" charset="0"/>
+              <a:buChar char="•"/>
+              <a:defRPr sz="1800" kern="1200">
+                <a:solidFill>
+                  <a:schemeClr val="tx1"/>
+                </a:solidFill>
+                <a:latin typeface="+mn-lt"/>
+                <a:ea typeface="+mn-ea"/>
+                <a:cs typeface="+mn-cs"/>
+              </a:defRPr>
+            </a:lvl8pPr>
+            <a:lvl9pPr marL="3886200" indent="-228600" algn="l" defTabSz="914400" rtl="0" eaLnBrk="1" latinLnBrk="0" hangingPunct="1">
+              <a:lnSpc>
+                <a:spcPct val="90000"/>
+              </a:lnSpc>
+              <a:spcBef>
+                <a:spcPts val="500"/>
+              </a:spcBef>
+              <a:buFont typeface="Arial" panose="020B0604020202020204" pitchFamily="34" charset="0"/>
+              <a:buChar char="•"/>
+              <a:defRPr sz="1800" kern="1200">
+                <a:solidFill>
+                  <a:schemeClr val="tx1"/>
+                </a:solidFill>
+                <a:latin typeface="+mn-lt"/>
+                <a:ea typeface="+mn-ea"/>
+                <a:cs typeface="+mn-cs"/>
+              </a:defRPr>
+            </a:lvl9pPr>
+          </a:lstStyle>
+          <a:p>
+            <a:r>
+              <a:rPr lang="en-US" dirty="0"/>
+              <a:t>Sarsa and Expected Sarsa have a similar bias and double learning extension for these algorithms also exist, </a:t>
+            </a:r>
+          </a:p>
+        </p:txBody>
+      </p:sp>
+    </p:spTree>
+    <p:extLst>
+      <p:ext uri="{BB962C8B-B14F-4D97-AF65-F5344CB8AC3E}">
+        <p14:creationId xmlns:p14="http://schemas.microsoft.com/office/powerpoint/2010/main" val="4180389892"/>
+      </p:ext>
+    </p:extLst>
+  </p:cSld>
+  <p:clrMapOvr>
+    <a:masterClrMapping/>
+  </p:clrMapOvr>
+</p:sld>
+</file>
+
+<file path=ppt/slides/slide19.xml><?xml version="1.0" encoding="utf-8"?>
 <p:sld xmlns:a="http://schemas.openxmlformats.org/drawingml/2006/main" xmlns:r="http://schemas.openxmlformats.org/officeDocument/2006/relationships" xmlns:p="http://schemas.openxmlformats.org/presentationml/2006/main">
   <p:cSld>
     <p:spTree>
@@ -7084,7 +8196,10 @@
           <a:bodyPr/>
           <a:lstStyle/>
           <a:p>
-            <a:endParaRPr lang="en-US"/>
+            <a:r>
+              <a:rPr lang="en-US" dirty="0"/>
+              <a:t>Sarsa vs. Q-Learning vs. Expected Sarsa</a:t>
+            </a:r>
           </a:p>
         </p:txBody>
       </p:sp>
@@ -7092,1983 +8207,6 @@
     <p:extLst>
       <p:ext uri="{BB962C8B-B14F-4D97-AF65-F5344CB8AC3E}">
         <p14:creationId xmlns:p14="http://schemas.microsoft.com/office/powerpoint/2010/main" val="592175334"/>
-      </p:ext>
-    </p:extLst>
-  </p:cSld>
-  <p:clrMapOvr>
-    <a:masterClrMapping/>
-  </p:clrMapOvr>
-</p:sld>
-</file>
-
-<file path=ppt/slides/slide18.xml><?xml version="1.0" encoding="utf-8"?>
-<p:sld xmlns:a="http://schemas.openxmlformats.org/drawingml/2006/main" xmlns:r="http://schemas.openxmlformats.org/officeDocument/2006/relationships" xmlns:p="http://schemas.openxmlformats.org/presentationml/2006/main">
-  <p:cSld>
-    <p:spTree>
-      <p:nvGrpSpPr>
-        <p:cNvPr id="1" name=""/>
-        <p:cNvGrpSpPr/>
-        <p:nvPr/>
-      </p:nvGrpSpPr>
-      <p:grpSpPr>
-        <a:xfrm>
-          <a:off x="0" y="0"/>
-          <a:ext cx="0" cy="0"/>
-          <a:chOff x="0" y="0"/>
-          <a:chExt cx="0" cy="0"/>
-        </a:xfrm>
-      </p:grpSpPr>
-      <p:sp>
-        <p:nvSpPr>
-          <p:cNvPr id="2" name="Title 1">
-            <a:extLst>
-              <a:ext uri="{FF2B5EF4-FFF2-40B4-BE49-F238E27FC236}">
-                <a16:creationId xmlns:a16="http://schemas.microsoft.com/office/drawing/2014/main" id="{47EA2BBB-A726-1EF6-3427-57B33AC4A406}"/>
-              </a:ext>
-            </a:extLst>
-          </p:cNvPr>
-          <p:cNvSpPr>
-            <a:spLocks noGrp="1"/>
-          </p:cNvSpPr>
-          <p:nvPr>
-            <p:ph type="title"/>
-          </p:nvPr>
-        </p:nvSpPr>
-        <p:spPr/>
-        <p:txBody>
-          <a:bodyPr/>
-          <a:lstStyle/>
-          <a:p>
-            <a:r>
-              <a:rPr lang="en-US" dirty="0"/>
-              <a:t>Comparison: 1-step Backup Diagrams</a:t>
-            </a:r>
-          </a:p>
-        </p:txBody>
-      </p:sp>
-      <p:pic>
-        <p:nvPicPr>
-          <p:cNvPr id="5" name="Picture 4">
-            <a:extLst>
-              <a:ext uri="{FF2B5EF4-FFF2-40B4-BE49-F238E27FC236}">
-                <a16:creationId xmlns:a16="http://schemas.microsoft.com/office/drawing/2014/main" id="{F027D81A-F2A7-9C05-925E-39F3F345BA1A}"/>
-              </a:ext>
-            </a:extLst>
-          </p:cNvPr>
-          <p:cNvPicPr>
-            <a:picLocks noChangeAspect="1"/>
-          </p:cNvPicPr>
-          <p:nvPr/>
-        </p:nvPicPr>
-        <p:blipFill>
-          <a:blip r:embed="rId2"/>
-          <a:stretch>
-            <a:fillRect/>
-          </a:stretch>
-        </p:blipFill>
-        <p:spPr>
-          <a:xfrm>
-            <a:off x="4608340" y="3640886"/>
-            <a:ext cx="5734850" cy="2229161"/>
-          </a:xfrm>
-          <a:prstGeom prst="rect">
-            <a:avLst/>
-          </a:prstGeom>
-        </p:spPr>
-      </p:pic>
-      <p:pic>
-        <p:nvPicPr>
-          <p:cNvPr id="7" name="Picture 6">
-            <a:extLst>
-              <a:ext uri="{FF2B5EF4-FFF2-40B4-BE49-F238E27FC236}">
-                <a16:creationId xmlns:a16="http://schemas.microsoft.com/office/drawing/2014/main" id="{D1A8F4E1-AA11-EA65-8209-64A2D6CE0DBB}"/>
-              </a:ext>
-            </a:extLst>
-          </p:cNvPr>
-          <p:cNvPicPr>
-            <a:picLocks noChangeAspect="1"/>
-          </p:cNvPicPr>
-          <p:nvPr/>
-        </p:nvPicPr>
-        <p:blipFill>
-          <a:blip r:embed="rId3"/>
-          <a:stretch>
-            <a:fillRect/>
-          </a:stretch>
-        </p:blipFill>
-        <p:spPr>
-          <a:xfrm>
-            <a:off x="1674286" y="3731387"/>
-            <a:ext cx="1038370" cy="2048161"/>
-          </a:xfrm>
-          <a:prstGeom prst="rect">
-            <a:avLst/>
-          </a:prstGeom>
-        </p:spPr>
-      </p:pic>
-      <mc:AlternateContent xmlns:mc="http://schemas.openxmlformats.org/markup-compatibility/2006" xmlns:a14="http://schemas.microsoft.com/office/drawing/2010/main">
-        <mc:Choice Requires="a14">
-          <p:sp>
-            <p:nvSpPr>
-              <p:cNvPr id="8" name="TextBox 7">
-                <a:extLst>
-                  <a:ext uri="{FF2B5EF4-FFF2-40B4-BE49-F238E27FC236}">
-                    <a16:creationId xmlns:a16="http://schemas.microsoft.com/office/drawing/2014/main" id="{778A0168-D948-DB08-23EA-3F5C62A0CDFE}"/>
-                  </a:ext>
-                </a:extLst>
-              </p:cNvPr>
-              <p:cNvSpPr txBox="1"/>
-              <p:nvPr/>
-            </p:nvSpPr>
-            <p:spPr>
-              <a:xfrm>
-                <a:off x="2083014" y="3384236"/>
-                <a:ext cx="430631" cy="369332"/>
-              </a:xfrm>
-              <a:prstGeom prst="rect">
-                <a:avLst/>
-              </a:prstGeom>
-              <a:noFill/>
-            </p:spPr>
-            <p:txBody>
-              <a:bodyPr wrap="none" rtlCol="0">
-                <a:spAutoFit/>
-              </a:bodyPr>
-              <a:lstStyle/>
-              <a:p>
-                <a:pPr/>
-                <a14:m>
-                  <m:oMathPara xmlns:m="http://schemas.openxmlformats.org/officeDocument/2006/math">
-                    <m:oMathParaPr>
-                      <m:jc m:val="centerGroup"/>
-                    </m:oMathParaPr>
-                    <m:oMath xmlns:m="http://schemas.openxmlformats.org/officeDocument/2006/math">
-                      <m:sSub>
-                        <m:sSubPr>
-                          <m:ctrlPr>
-                            <a:rPr lang="en-US" b="0" i="1" smtClean="0">
-                              <a:latin typeface="Cambria Math" panose="02040503050406030204" pitchFamily="18" charset="0"/>
-                            </a:rPr>
-                          </m:ctrlPr>
-                        </m:sSubPr>
-                        <m:e>
-                          <m:r>
-                            <a:rPr lang="en-US" b="0" i="1" smtClean="0">
-                              <a:latin typeface="Cambria Math" panose="02040503050406030204" pitchFamily="18" charset="0"/>
-                            </a:rPr>
-                            <m:t>𝑆</m:t>
-                          </m:r>
-                        </m:e>
-                        <m:sub>
-                          <m:r>
-                            <a:rPr lang="en-US" b="0" i="1" smtClean="0">
-                              <a:latin typeface="Cambria Math" panose="02040503050406030204" pitchFamily="18" charset="0"/>
-                            </a:rPr>
-                            <m:t>𝑡</m:t>
-                          </m:r>
-                        </m:sub>
-                      </m:sSub>
-                    </m:oMath>
-                  </m:oMathPara>
-                </a14:m>
-                <a:endParaRPr lang="en-US" dirty="0"/>
-              </a:p>
-            </p:txBody>
-          </p:sp>
-        </mc:Choice>
-        <mc:Fallback xmlns="">
-          <p:sp>
-            <p:nvSpPr>
-              <p:cNvPr id="8" name="TextBox 7">
-                <a:extLst>
-                  <a:ext uri="{FF2B5EF4-FFF2-40B4-BE49-F238E27FC236}">
-                    <a16:creationId xmlns:a16="http://schemas.microsoft.com/office/drawing/2014/main" id="{778A0168-D948-DB08-23EA-3F5C62A0CDFE}"/>
-                  </a:ext>
-                </a:extLst>
-              </p:cNvPr>
-              <p:cNvSpPr txBox="1">
-                <a:spLocks noRot="1" noChangeAspect="1" noMove="1" noResize="1" noEditPoints="1" noAdjustHandles="1" noChangeArrowheads="1" noChangeShapeType="1" noTextEdit="1"/>
-              </p:cNvSpPr>
-              <p:nvPr/>
-            </p:nvSpPr>
-            <p:spPr>
-              <a:xfrm>
-                <a:off x="2083014" y="3384236"/>
-                <a:ext cx="430631" cy="369332"/>
-              </a:xfrm>
-              <a:prstGeom prst="rect">
-                <a:avLst/>
-              </a:prstGeom>
-              <a:blipFill>
-                <a:blip r:embed="rId4"/>
-                <a:stretch>
-                  <a:fillRect/>
-                </a:stretch>
-              </a:blipFill>
-            </p:spPr>
-            <p:txBody>
-              <a:bodyPr/>
-              <a:lstStyle/>
-              <a:p>
-                <a:r>
-                  <a:rPr lang="en-US">
-                    <a:noFill/>
-                  </a:rPr>
-                  <a:t> </a:t>
-                </a:r>
-              </a:p>
-            </p:txBody>
-          </p:sp>
-        </mc:Fallback>
-      </mc:AlternateContent>
-      <mc:AlternateContent xmlns:mc="http://schemas.openxmlformats.org/markup-compatibility/2006" xmlns:a14="http://schemas.microsoft.com/office/drawing/2010/main">
-        <mc:Choice Requires="a14">
-          <p:sp>
-            <p:nvSpPr>
-              <p:cNvPr id="9" name="TextBox 8">
-                <a:extLst>
-                  <a:ext uri="{FF2B5EF4-FFF2-40B4-BE49-F238E27FC236}">
-                    <a16:creationId xmlns:a16="http://schemas.microsoft.com/office/drawing/2014/main" id="{7CBB00F4-1A5A-D5B1-1923-30E7AB671293}"/>
-                  </a:ext>
-                </a:extLst>
-              </p:cNvPr>
-              <p:cNvSpPr txBox="1"/>
-              <p:nvPr/>
-            </p:nvSpPr>
-            <p:spPr>
-              <a:xfrm>
-                <a:off x="2298329" y="4446711"/>
-                <a:ext cx="650243" cy="369332"/>
-              </a:xfrm>
-              <a:prstGeom prst="rect">
-                <a:avLst/>
-              </a:prstGeom>
-              <a:noFill/>
-            </p:spPr>
-            <p:txBody>
-              <a:bodyPr wrap="none" rtlCol="0">
-                <a:spAutoFit/>
-              </a:bodyPr>
-              <a:lstStyle/>
-              <a:p>
-                <a:pPr/>
-                <a14:m>
-                  <m:oMathPara xmlns:m="http://schemas.openxmlformats.org/officeDocument/2006/math">
-                    <m:oMathParaPr>
-                      <m:jc m:val="centerGroup"/>
-                    </m:oMathParaPr>
-                    <m:oMath xmlns:m="http://schemas.openxmlformats.org/officeDocument/2006/math">
-                      <m:sSub>
-                        <m:sSubPr>
-                          <m:ctrlPr>
-                            <a:rPr lang="en-US" b="0" i="1" smtClean="0">
-                              <a:latin typeface="Cambria Math" panose="02040503050406030204" pitchFamily="18" charset="0"/>
-                            </a:rPr>
-                          </m:ctrlPr>
-                        </m:sSubPr>
-                        <m:e>
-                          <m:r>
-                            <a:rPr lang="en-US" b="0" i="1" smtClean="0">
-                              <a:latin typeface="Cambria Math" panose="02040503050406030204" pitchFamily="18" charset="0"/>
-                            </a:rPr>
-                            <m:t>𝑆</m:t>
-                          </m:r>
-                        </m:e>
-                        <m:sub>
-                          <m:r>
-                            <a:rPr lang="en-US" b="0" i="1" smtClean="0">
-                              <a:latin typeface="Cambria Math" panose="02040503050406030204" pitchFamily="18" charset="0"/>
-                            </a:rPr>
-                            <m:t>𝑡</m:t>
-                          </m:r>
-                          <m:r>
-                            <a:rPr lang="en-US" b="0" i="1" smtClean="0">
-                              <a:latin typeface="Cambria Math" panose="02040503050406030204" pitchFamily="18" charset="0"/>
-                            </a:rPr>
-                            <m:t>+1</m:t>
-                          </m:r>
-                        </m:sub>
-                      </m:sSub>
-                    </m:oMath>
-                  </m:oMathPara>
-                </a14:m>
-                <a:endParaRPr lang="en-US" dirty="0"/>
-              </a:p>
-            </p:txBody>
-          </p:sp>
-        </mc:Choice>
-        <mc:Fallback xmlns="">
-          <p:sp>
-            <p:nvSpPr>
-              <p:cNvPr id="9" name="TextBox 8">
-                <a:extLst>
-                  <a:ext uri="{FF2B5EF4-FFF2-40B4-BE49-F238E27FC236}">
-                    <a16:creationId xmlns:a16="http://schemas.microsoft.com/office/drawing/2014/main" id="{7CBB00F4-1A5A-D5B1-1923-30E7AB671293}"/>
-                  </a:ext>
-                </a:extLst>
-              </p:cNvPr>
-              <p:cNvSpPr txBox="1">
-                <a:spLocks noRot="1" noChangeAspect="1" noMove="1" noResize="1" noEditPoints="1" noAdjustHandles="1" noChangeArrowheads="1" noChangeShapeType="1" noTextEdit="1"/>
-              </p:cNvSpPr>
-              <p:nvPr/>
-            </p:nvSpPr>
-            <p:spPr>
-              <a:xfrm>
-                <a:off x="2298329" y="4446711"/>
-                <a:ext cx="650243" cy="369332"/>
-              </a:xfrm>
-              <a:prstGeom prst="rect">
-                <a:avLst/>
-              </a:prstGeom>
-              <a:blipFill>
-                <a:blip r:embed="rId5"/>
-                <a:stretch>
-                  <a:fillRect/>
-                </a:stretch>
-              </a:blipFill>
-            </p:spPr>
-            <p:txBody>
-              <a:bodyPr/>
-              <a:lstStyle/>
-              <a:p>
-                <a:r>
-                  <a:rPr lang="en-US">
-                    <a:noFill/>
-                  </a:rPr>
-                  <a:t> </a:t>
-                </a:r>
-              </a:p>
-            </p:txBody>
-          </p:sp>
-        </mc:Fallback>
-      </mc:AlternateContent>
-      <mc:AlternateContent xmlns:mc="http://schemas.openxmlformats.org/markup-compatibility/2006" xmlns:a14="http://schemas.microsoft.com/office/drawing/2010/main">
-        <mc:Choice Requires="a14">
-          <p:sp>
-            <p:nvSpPr>
-              <p:cNvPr id="11" name="TextBox 10">
-                <a:extLst>
-                  <a:ext uri="{FF2B5EF4-FFF2-40B4-BE49-F238E27FC236}">
-                    <a16:creationId xmlns:a16="http://schemas.microsoft.com/office/drawing/2014/main" id="{AAD4DCAB-8567-439C-FC82-BD0F72977E73}"/>
-                  </a:ext>
-                </a:extLst>
-              </p:cNvPr>
-              <p:cNvSpPr txBox="1"/>
-              <p:nvPr/>
-            </p:nvSpPr>
-            <p:spPr>
-              <a:xfrm>
-                <a:off x="2298330" y="5096376"/>
-                <a:ext cx="602038" cy="369332"/>
-              </a:xfrm>
-              <a:prstGeom prst="rect">
-                <a:avLst/>
-              </a:prstGeom>
-              <a:noFill/>
-            </p:spPr>
-            <p:txBody>
-              <a:bodyPr wrap="square">
-                <a:spAutoFit/>
-              </a:bodyPr>
-              <a:lstStyle/>
-              <a:p>
-                <a:pPr/>
-                <a14:m>
-                  <m:oMathPara xmlns:m="http://schemas.openxmlformats.org/officeDocument/2006/math">
-                    <m:oMathParaPr>
-                      <m:jc m:val="centerGroup"/>
-                    </m:oMathParaPr>
-                    <m:oMath xmlns:m="http://schemas.openxmlformats.org/officeDocument/2006/math">
-                      <m:sSub>
-                        <m:sSubPr>
-                          <m:ctrlPr>
-                            <a:rPr lang="en-US" b="0" i="1" smtClean="0">
-                              <a:latin typeface="Cambria Math" panose="02040503050406030204" pitchFamily="18" charset="0"/>
-                            </a:rPr>
-                          </m:ctrlPr>
-                        </m:sSubPr>
-                        <m:e>
-                          <m:r>
-                            <a:rPr lang="en-US" b="0" i="1" smtClean="0">
-                              <a:latin typeface="Cambria Math" panose="02040503050406030204" pitchFamily="18" charset="0"/>
-                            </a:rPr>
-                            <m:t>𝐴</m:t>
-                          </m:r>
-                        </m:e>
-                        <m:sub>
-                          <m:r>
-                            <a:rPr lang="en-US" b="0" i="1" smtClean="0">
-                              <a:latin typeface="Cambria Math" panose="02040503050406030204" pitchFamily="18" charset="0"/>
-                            </a:rPr>
-                            <m:t>𝑡</m:t>
-                          </m:r>
-                          <m:r>
-                            <a:rPr lang="en-US" b="0" i="1" smtClean="0">
-                              <a:latin typeface="Cambria Math" panose="02040503050406030204" pitchFamily="18" charset="0"/>
-                            </a:rPr>
-                            <m:t>+1</m:t>
-                          </m:r>
-                        </m:sub>
-                      </m:sSub>
-                    </m:oMath>
-                  </m:oMathPara>
-                </a14:m>
-                <a:endParaRPr lang="en-US" dirty="0"/>
-              </a:p>
-            </p:txBody>
-          </p:sp>
-        </mc:Choice>
-        <mc:Fallback xmlns="">
-          <p:sp>
-            <p:nvSpPr>
-              <p:cNvPr id="11" name="TextBox 10">
-                <a:extLst>
-                  <a:ext uri="{FF2B5EF4-FFF2-40B4-BE49-F238E27FC236}">
-                    <a16:creationId xmlns:a16="http://schemas.microsoft.com/office/drawing/2014/main" id="{AAD4DCAB-8567-439C-FC82-BD0F72977E73}"/>
-                  </a:ext>
-                </a:extLst>
-              </p:cNvPr>
-              <p:cNvSpPr txBox="1">
-                <a:spLocks noRot="1" noChangeAspect="1" noMove="1" noResize="1" noEditPoints="1" noAdjustHandles="1" noChangeArrowheads="1" noChangeShapeType="1" noTextEdit="1"/>
-              </p:cNvSpPr>
-              <p:nvPr/>
-            </p:nvSpPr>
-            <p:spPr>
-              <a:xfrm>
-                <a:off x="2298330" y="5096376"/>
-                <a:ext cx="602038" cy="369332"/>
-              </a:xfrm>
-              <a:prstGeom prst="rect">
-                <a:avLst/>
-              </a:prstGeom>
-              <a:blipFill>
-                <a:blip r:embed="rId6"/>
-                <a:stretch>
-                  <a:fillRect/>
-                </a:stretch>
-              </a:blipFill>
-            </p:spPr>
-            <p:txBody>
-              <a:bodyPr/>
-              <a:lstStyle/>
-              <a:p>
-                <a:r>
-                  <a:rPr lang="en-US">
-                    <a:noFill/>
-                  </a:rPr>
-                  <a:t> </a:t>
-                </a:r>
-              </a:p>
-            </p:txBody>
-          </p:sp>
-        </mc:Fallback>
-      </mc:AlternateContent>
-      <mc:AlternateContent xmlns:mc="http://schemas.openxmlformats.org/markup-compatibility/2006" xmlns:a14="http://schemas.microsoft.com/office/drawing/2010/main">
-        <mc:Choice Requires="a14">
-          <p:sp>
-            <p:nvSpPr>
-              <p:cNvPr id="12" name="TextBox 11">
-                <a:extLst>
-                  <a:ext uri="{FF2B5EF4-FFF2-40B4-BE49-F238E27FC236}">
-                    <a16:creationId xmlns:a16="http://schemas.microsoft.com/office/drawing/2014/main" id="{AE811601-E15B-A2EA-6A3C-8E69FECEDE50}"/>
-                  </a:ext>
-                </a:extLst>
-              </p:cNvPr>
-              <p:cNvSpPr txBox="1"/>
-              <p:nvPr/>
-            </p:nvSpPr>
-            <p:spPr>
-              <a:xfrm>
-                <a:off x="2186529" y="3775749"/>
-                <a:ext cx="602038" cy="369332"/>
-              </a:xfrm>
-              <a:prstGeom prst="rect">
-                <a:avLst/>
-              </a:prstGeom>
-              <a:noFill/>
-            </p:spPr>
-            <p:txBody>
-              <a:bodyPr wrap="square">
-                <a:spAutoFit/>
-              </a:bodyPr>
-              <a:lstStyle/>
-              <a:p>
-                <a:pPr/>
-                <a14:m>
-                  <m:oMathPara xmlns:m="http://schemas.openxmlformats.org/officeDocument/2006/math">
-                    <m:oMathParaPr>
-                      <m:jc m:val="centerGroup"/>
-                    </m:oMathParaPr>
-                    <m:oMath xmlns:m="http://schemas.openxmlformats.org/officeDocument/2006/math">
-                      <m:sSub>
-                        <m:sSubPr>
-                          <m:ctrlPr>
-                            <a:rPr lang="en-US" i="1">
-                              <a:latin typeface="Cambria Math" panose="02040503050406030204" pitchFamily="18" charset="0"/>
-                            </a:rPr>
-                          </m:ctrlPr>
-                        </m:sSubPr>
-                        <m:e>
-                          <m:r>
-                            <a:rPr lang="en-US" i="1">
-                              <a:latin typeface="Cambria Math" panose="02040503050406030204" pitchFamily="18" charset="0"/>
-                            </a:rPr>
-                            <m:t>𝐴</m:t>
-                          </m:r>
-                        </m:e>
-                        <m:sub>
-                          <m:r>
-                            <a:rPr lang="en-US" i="1">
-                              <a:latin typeface="Cambria Math" panose="02040503050406030204" pitchFamily="18" charset="0"/>
-                            </a:rPr>
-                            <m:t>𝑡</m:t>
-                          </m:r>
-                        </m:sub>
-                      </m:sSub>
-                    </m:oMath>
-                  </m:oMathPara>
-                </a14:m>
-                <a:endParaRPr lang="en-US" dirty="0"/>
-              </a:p>
-            </p:txBody>
-          </p:sp>
-        </mc:Choice>
-        <mc:Fallback xmlns="">
-          <p:sp>
-            <p:nvSpPr>
-              <p:cNvPr id="12" name="TextBox 11">
-                <a:extLst>
-                  <a:ext uri="{FF2B5EF4-FFF2-40B4-BE49-F238E27FC236}">
-                    <a16:creationId xmlns:a16="http://schemas.microsoft.com/office/drawing/2014/main" id="{AE811601-E15B-A2EA-6A3C-8E69FECEDE50}"/>
-                  </a:ext>
-                </a:extLst>
-              </p:cNvPr>
-              <p:cNvSpPr txBox="1">
-                <a:spLocks noRot="1" noChangeAspect="1" noMove="1" noResize="1" noEditPoints="1" noAdjustHandles="1" noChangeArrowheads="1" noChangeShapeType="1" noTextEdit="1"/>
-              </p:cNvSpPr>
-              <p:nvPr/>
-            </p:nvSpPr>
-            <p:spPr>
-              <a:xfrm>
-                <a:off x="2186529" y="3775749"/>
-                <a:ext cx="602038" cy="369332"/>
-              </a:xfrm>
-              <a:prstGeom prst="rect">
-                <a:avLst/>
-              </a:prstGeom>
-              <a:blipFill>
-                <a:blip r:embed="rId7"/>
-                <a:stretch>
-                  <a:fillRect/>
-                </a:stretch>
-              </a:blipFill>
-            </p:spPr>
-            <p:txBody>
-              <a:bodyPr/>
-              <a:lstStyle/>
-              <a:p>
-                <a:r>
-                  <a:rPr lang="en-US">
-                    <a:noFill/>
-                  </a:rPr>
-                  <a:t> </a:t>
-                </a:r>
-              </a:p>
-            </p:txBody>
-          </p:sp>
-        </mc:Fallback>
-      </mc:AlternateContent>
-      <mc:AlternateContent xmlns:mc="http://schemas.openxmlformats.org/markup-compatibility/2006" xmlns:a14="http://schemas.microsoft.com/office/drawing/2010/main">
-        <mc:Choice Requires="a14">
-          <p:sp>
-            <p:nvSpPr>
-              <p:cNvPr id="13" name="TextBox 12">
-                <a:extLst>
-                  <a:ext uri="{FF2B5EF4-FFF2-40B4-BE49-F238E27FC236}">
-                    <a16:creationId xmlns:a16="http://schemas.microsoft.com/office/drawing/2014/main" id="{AF84C7A8-3D3A-7BB1-3E84-0C6C6A718B86}"/>
-                  </a:ext>
-                </a:extLst>
-              </p:cNvPr>
-              <p:cNvSpPr txBox="1"/>
-              <p:nvPr/>
-            </p:nvSpPr>
-            <p:spPr>
-              <a:xfrm>
-                <a:off x="1698460" y="4013981"/>
-                <a:ext cx="602038" cy="369332"/>
-              </a:xfrm>
-              <a:prstGeom prst="rect">
-                <a:avLst/>
-              </a:prstGeom>
-              <a:noFill/>
-            </p:spPr>
-            <p:txBody>
-              <a:bodyPr wrap="square">
-                <a:spAutoFit/>
-              </a:bodyPr>
-              <a:lstStyle/>
-              <a:p>
-                <a:pPr/>
-                <a14:m>
-                  <m:oMathPara xmlns:m="http://schemas.openxmlformats.org/officeDocument/2006/math">
-                    <m:oMathParaPr>
-                      <m:jc m:val="centerGroup"/>
-                    </m:oMathParaPr>
-                    <m:oMath xmlns:m="http://schemas.openxmlformats.org/officeDocument/2006/math">
-                      <m:sSub>
-                        <m:sSubPr>
-                          <m:ctrlPr>
-                            <a:rPr lang="en-US" i="1" smtClean="0">
-                              <a:latin typeface="Cambria Math" panose="02040503050406030204" pitchFamily="18" charset="0"/>
-                            </a:rPr>
-                          </m:ctrlPr>
-                        </m:sSubPr>
-                        <m:e>
-                          <m:r>
-                            <a:rPr lang="en-US" b="0" i="1" smtClean="0">
-                              <a:latin typeface="Cambria Math" panose="02040503050406030204" pitchFamily="18" charset="0"/>
-                            </a:rPr>
-                            <m:t>𝑅</m:t>
-                          </m:r>
-                        </m:e>
-                        <m:sub>
-                          <m:r>
-                            <a:rPr lang="en-US" i="1">
-                              <a:latin typeface="Cambria Math" panose="02040503050406030204" pitchFamily="18" charset="0"/>
-                            </a:rPr>
-                            <m:t>𝑡</m:t>
-                          </m:r>
-                          <m:r>
-                            <a:rPr lang="en-US" b="0" i="1" smtClean="0">
-                              <a:latin typeface="Cambria Math" panose="02040503050406030204" pitchFamily="18" charset="0"/>
-                            </a:rPr>
-                            <m:t>+1</m:t>
-                          </m:r>
-                        </m:sub>
-                      </m:sSub>
-                    </m:oMath>
-                  </m:oMathPara>
-                </a14:m>
-                <a:endParaRPr lang="en-US" dirty="0"/>
-              </a:p>
-            </p:txBody>
-          </p:sp>
-        </mc:Choice>
-        <mc:Fallback xmlns="">
-          <p:sp>
-            <p:nvSpPr>
-              <p:cNvPr id="13" name="TextBox 12">
-                <a:extLst>
-                  <a:ext uri="{FF2B5EF4-FFF2-40B4-BE49-F238E27FC236}">
-                    <a16:creationId xmlns:a16="http://schemas.microsoft.com/office/drawing/2014/main" id="{AF84C7A8-3D3A-7BB1-3E84-0C6C6A718B86}"/>
-                  </a:ext>
-                </a:extLst>
-              </p:cNvPr>
-              <p:cNvSpPr txBox="1">
-                <a:spLocks noRot="1" noChangeAspect="1" noMove="1" noResize="1" noEditPoints="1" noAdjustHandles="1" noChangeArrowheads="1" noChangeShapeType="1" noTextEdit="1"/>
-              </p:cNvSpPr>
-              <p:nvPr/>
-            </p:nvSpPr>
-            <p:spPr>
-              <a:xfrm>
-                <a:off x="1698460" y="4013981"/>
-                <a:ext cx="602038" cy="369332"/>
-              </a:xfrm>
-              <a:prstGeom prst="rect">
-                <a:avLst/>
-              </a:prstGeom>
-              <a:blipFill>
-                <a:blip r:embed="rId8"/>
-                <a:stretch>
-                  <a:fillRect/>
-                </a:stretch>
-              </a:blipFill>
-            </p:spPr>
-            <p:txBody>
-              <a:bodyPr/>
-              <a:lstStyle/>
-              <a:p>
-                <a:r>
-                  <a:rPr lang="en-US">
-                    <a:noFill/>
-                  </a:rPr>
-                  <a:t> </a:t>
-                </a:r>
-              </a:p>
-            </p:txBody>
-          </p:sp>
-        </mc:Fallback>
-      </mc:AlternateContent>
-      <mc:AlternateContent xmlns:mc="http://schemas.openxmlformats.org/markup-compatibility/2006" xmlns:a14="http://schemas.microsoft.com/office/drawing/2010/main">
-        <mc:Choice Requires="a14">
-          <p:sp>
-            <p:nvSpPr>
-              <p:cNvPr id="14" name="TextBox 13">
-                <a:extLst>
-                  <a:ext uri="{FF2B5EF4-FFF2-40B4-BE49-F238E27FC236}">
-                    <a16:creationId xmlns:a16="http://schemas.microsoft.com/office/drawing/2014/main" id="{89506427-5DBB-46F6-7064-8C167FF27BD1}"/>
-                  </a:ext>
-                </a:extLst>
-              </p:cNvPr>
-              <p:cNvSpPr txBox="1"/>
-              <p:nvPr/>
-            </p:nvSpPr>
-            <p:spPr>
-              <a:xfrm>
-                <a:off x="5598300" y="4661302"/>
-                <a:ext cx="647933" cy="369332"/>
-              </a:xfrm>
-              <a:prstGeom prst="rect">
-                <a:avLst/>
-              </a:prstGeom>
-              <a:noFill/>
-            </p:spPr>
-            <p:txBody>
-              <a:bodyPr wrap="none" rtlCol="0">
-                <a:spAutoFit/>
-              </a:bodyPr>
-              <a:lstStyle/>
-              <a:p>
-                <a:pPr/>
-                <a14:m>
-                  <m:oMathPara xmlns:m="http://schemas.openxmlformats.org/officeDocument/2006/math">
-                    <m:oMathParaPr>
-                      <m:jc m:val="centerGroup"/>
-                    </m:oMathParaPr>
-                    <m:oMath xmlns:m="http://schemas.openxmlformats.org/officeDocument/2006/math">
-                      <m:r>
-                        <m:rPr>
-                          <m:nor/>
-                        </m:rPr>
-                        <a:rPr lang="en-US" b="0" i="0" smtClean="0">
-                          <a:latin typeface="Cambria Math" panose="02040503050406030204" pitchFamily="18" charset="0"/>
-                        </a:rPr>
-                        <m:t>max</m:t>
-                      </m:r>
-                    </m:oMath>
-                  </m:oMathPara>
-                </a14:m>
-                <a:endParaRPr lang="en-US" dirty="0"/>
-              </a:p>
-            </p:txBody>
-          </p:sp>
-        </mc:Choice>
-        <mc:Fallback xmlns="">
-          <p:sp>
-            <p:nvSpPr>
-              <p:cNvPr id="14" name="TextBox 13">
-                <a:extLst>
-                  <a:ext uri="{FF2B5EF4-FFF2-40B4-BE49-F238E27FC236}">
-                    <a16:creationId xmlns:a16="http://schemas.microsoft.com/office/drawing/2014/main" id="{89506427-5DBB-46F6-7064-8C167FF27BD1}"/>
-                  </a:ext>
-                </a:extLst>
-              </p:cNvPr>
-              <p:cNvSpPr txBox="1">
-                <a:spLocks noRot="1" noChangeAspect="1" noMove="1" noResize="1" noEditPoints="1" noAdjustHandles="1" noChangeArrowheads="1" noChangeShapeType="1" noTextEdit="1"/>
-              </p:cNvSpPr>
-              <p:nvPr/>
-            </p:nvSpPr>
-            <p:spPr>
-              <a:xfrm>
-                <a:off x="5598300" y="4661302"/>
-                <a:ext cx="647933" cy="369332"/>
-              </a:xfrm>
-              <a:prstGeom prst="rect">
-                <a:avLst/>
-              </a:prstGeom>
-              <a:blipFill>
-                <a:blip r:embed="rId9"/>
-                <a:stretch>
-                  <a:fillRect/>
-                </a:stretch>
-              </a:blipFill>
-            </p:spPr>
-            <p:txBody>
-              <a:bodyPr/>
-              <a:lstStyle/>
-              <a:p>
-                <a:r>
-                  <a:rPr lang="en-US">
-                    <a:noFill/>
-                  </a:rPr>
-                  <a:t> </a:t>
-                </a:r>
-              </a:p>
-            </p:txBody>
-          </p:sp>
-        </mc:Fallback>
-      </mc:AlternateContent>
-      <mc:AlternateContent xmlns:mc="http://schemas.openxmlformats.org/markup-compatibility/2006" xmlns:a14="http://schemas.microsoft.com/office/drawing/2010/main">
-        <mc:Choice Requires="a14">
-          <p:sp>
-            <p:nvSpPr>
-              <p:cNvPr id="15" name="TextBox 14">
-                <a:extLst>
-                  <a:ext uri="{FF2B5EF4-FFF2-40B4-BE49-F238E27FC236}">
-                    <a16:creationId xmlns:a16="http://schemas.microsoft.com/office/drawing/2014/main" id="{21540664-58DD-C85E-EB0B-3CF84B97E40F}"/>
-                  </a:ext>
-                </a:extLst>
-              </p:cNvPr>
-              <p:cNvSpPr txBox="1"/>
-              <p:nvPr/>
-            </p:nvSpPr>
-            <p:spPr>
-              <a:xfrm>
-                <a:off x="9403340" y="4661302"/>
-                <a:ext cx="378630" cy="369332"/>
-              </a:xfrm>
-              <a:prstGeom prst="rect">
-                <a:avLst/>
-              </a:prstGeom>
-              <a:noFill/>
-            </p:spPr>
-            <p:txBody>
-              <a:bodyPr wrap="none" rtlCol="0">
-                <a:spAutoFit/>
-              </a:bodyPr>
-              <a:lstStyle/>
-              <a:p>
-                <a:pPr/>
-                <a14:m>
-                  <m:oMathPara xmlns:m="http://schemas.openxmlformats.org/officeDocument/2006/math">
-                    <m:oMathParaPr>
-                      <m:jc m:val="centerGroup"/>
-                    </m:oMathParaPr>
-                    <m:oMath xmlns:m="http://schemas.openxmlformats.org/officeDocument/2006/math">
-                      <m:r>
-                        <a:rPr lang="en-US" b="0" i="1" smtClean="0">
-                          <a:latin typeface="Cambria Math" panose="02040503050406030204" pitchFamily="18" charset="0"/>
-                          <a:ea typeface="Cambria Math" panose="02040503050406030204" pitchFamily="18" charset="0"/>
-                        </a:rPr>
-                        <m:t>𝔼</m:t>
-                      </m:r>
-                    </m:oMath>
-                  </m:oMathPara>
-                </a14:m>
-                <a:endParaRPr lang="en-US" dirty="0"/>
-              </a:p>
-            </p:txBody>
-          </p:sp>
-        </mc:Choice>
-        <mc:Fallback xmlns="">
-          <p:sp>
-            <p:nvSpPr>
-              <p:cNvPr id="15" name="TextBox 14">
-                <a:extLst>
-                  <a:ext uri="{FF2B5EF4-FFF2-40B4-BE49-F238E27FC236}">
-                    <a16:creationId xmlns:a16="http://schemas.microsoft.com/office/drawing/2014/main" id="{21540664-58DD-C85E-EB0B-3CF84B97E40F}"/>
-                  </a:ext>
-                </a:extLst>
-              </p:cNvPr>
-              <p:cNvSpPr txBox="1">
-                <a:spLocks noRot="1" noChangeAspect="1" noMove="1" noResize="1" noEditPoints="1" noAdjustHandles="1" noChangeArrowheads="1" noChangeShapeType="1" noTextEdit="1"/>
-              </p:cNvSpPr>
-              <p:nvPr/>
-            </p:nvSpPr>
-            <p:spPr>
-              <a:xfrm>
-                <a:off x="9403340" y="4661302"/>
-                <a:ext cx="378630" cy="369332"/>
-              </a:xfrm>
-              <a:prstGeom prst="rect">
-                <a:avLst/>
-              </a:prstGeom>
-              <a:blipFill>
-                <a:blip r:embed="rId10"/>
-                <a:stretch>
-                  <a:fillRect/>
-                </a:stretch>
-              </a:blipFill>
-            </p:spPr>
-            <p:txBody>
-              <a:bodyPr/>
-              <a:lstStyle/>
-              <a:p>
-                <a:r>
-                  <a:rPr lang="en-US">
-                    <a:noFill/>
-                  </a:rPr>
-                  <a:t> </a:t>
-                </a:r>
-              </a:p>
-            </p:txBody>
-          </p:sp>
-        </mc:Fallback>
-      </mc:AlternateContent>
-      <p:grpSp>
-        <p:nvGrpSpPr>
-          <p:cNvPr id="3" name="Group 2">
-            <a:extLst>
-              <a:ext uri="{FF2B5EF4-FFF2-40B4-BE49-F238E27FC236}">
-                <a16:creationId xmlns:a16="http://schemas.microsoft.com/office/drawing/2014/main" id="{DC8187D2-C651-211E-F36F-28F57A9AE11F}"/>
-              </a:ext>
-            </a:extLst>
-          </p:cNvPr>
-          <p:cNvGrpSpPr/>
-          <p:nvPr/>
-        </p:nvGrpSpPr>
-        <p:grpSpPr>
-          <a:xfrm>
-            <a:off x="2788567" y="1496579"/>
-            <a:ext cx="5965095" cy="1634099"/>
-            <a:chOff x="2637816" y="2832616"/>
-            <a:chExt cx="5965095" cy="1634099"/>
-          </a:xfrm>
-        </p:grpSpPr>
-        <p:grpSp>
-          <p:nvGrpSpPr>
-            <p:cNvPr id="4" name="Group 3">
-              <a:extLst>
-                <a:ext uri="{FF2B5EF4-FFF2-40B4-BE49-F238E27FC236}">
-                  <a16:creationId xmlns:a16="http://schemas.microsoft.com/office/drawing/2014/main" id="{E816A4BA-29C5-E498-E49B-2A5D1934C3AC}"/>
-                </a:ext>
-              </a:extLst>
-            </p:cNvPr>
-            <p:cNvGrpSpPr/>
-            <p:nvPr/>
-          </p:nvGrpSpPr>
-          <p:grpSpPr>
-            <a:xfrm>
-              <a:off x="2637816" y="2832616"/>
-              <a:ext cx="5965095" cy="1560336"/>
-              <a:chOff x="2373562" y="2568409"/>
-              <a:chExt cx="5965095" cy="1560336"/>
-            </a:xfrm>
-          </p:grpSpPr>
-          <p:pic>
-            <p:nvPicPr>
-              <p:cNvPr id="10" name="Picture 9">
-                <a:extLst>
-                  <a:ext uri="{FF2B5EF4-FFF2-40B4-BE49-F238E27FC236}">
-                    <a16:creationId xmlns:a16="http://schemas.microsoft.com/office/drawing/2014/main" id="{079CA762-1D81-E9C9-CDF2-B465A9EF93D5}"/>
-                  </a:ext>
-                </a:extLst>
-              </p:cNvPr>
-              <p:cNvPicPr>
-                <a:picLocks noChangeAspect="1"/>
-              </p:cNvPicPr>
-              <p:nvPr/>
-            </p:nvPicPr>
-            <p:blipFill>
-              <a:blip r:embed="rId11"/>
-              <a:stretch>
-                <a:fillRect/>
-              </a:stretch>
-            </p:blipFill>
-            <p:spPr>
-              <a:xfrm>
-                <a:off x="2373562" y="2955408"/>
-                <a:ext cx="5965095" cy="606381"/>
-              </a:xfrm>
-              <a:prstGeom prst="rect">
-                <a:avLst/>
-              </a:prstGeom>
-            </p:spPr>
-          </p:pic>
-          <p:sp>
-            <p:nvSpPr>
-              <p:cNvPr id="17" name="Arc 16">
-                <a:extLst>
-                  <a:ext uri="{FF2B5EF4-FFF2-40B4-BE49-F238E27FC236}">
-                    <a16:creationId xmlns:a16="http://schemas.microsoft.com/office/drawing/2014/main" id="{D8A8134D-2B73-F837-EAFB-A58F7D294338}"/>
-                  </a:ext>
-                </a:extLst>
-              </p:cNvPr>
-              <p:cNvSpPr/>
-              <p:nvPr/>
-            </p:nvSpPr>
-            <p:spPr>
-              <a:xfrm>
-                <a:off x="3510268" y="3109621"/>
-                <a:ext cx="1082180" cy="796292"/>
-              </a:xfrm>
-              <a:prstGeom prst="arc">
-                <a:avLst>
-                  <a:gd name="adj1" fmla="val 1428106"/>
-                  <a:gd name="adj2" fmla="val 9287936"/>
-                </a:avLst>
-              </a:prstGeom>
-              <a:ln>
-                <a:headEnd type="none" w="med" len="med"/>
-                <a:tailEnd type="triangle" w="med" len="med"/>
-              </a:ln>
-            </p:spPr>
-            <p:style>
-              <a:lnRef idx="2">
-                <a:schemeClr val="accent1"/>
-              </a:lnRef>
-              <a:fillRef idx="0">
-                <a:schemeClr val="accent1"/>
-              </a:fillRef>
-              <a:effectRef idx="1">
-                <a:schemeClr val="accent1"/>
-              </a:effectRef>
-              <a:fontRef idx="minor">
-                <a:schemeClr val="tx1"/>
-              </a:fontRef>
-            </p:style>
-            <p:txBody>
-              <a:bodyPr rtlCol="0" anchor="ctr"/>
-              <a:lstStyle/>
-              <a:p>
-                <a:pPr algn="ctr"/>
-                <a:endParaRPr lang="en-US"/>
-              </a:p>
-            </p:txBody>
-          </p:sp>
-          <mc:AlternateContent xmlns:mc="http://schemas.openxmlformats.org/markup-compatibility/2006" xmlns:a14="http://schemas.microsoft.com/office/drawing/2010/main">
-            <mc:Choice Requires="a14">
-              <p:sp>
-                <p:nvSpPr>
-                  <p:cNvPr id="18" name="TextBox 17">
-                    <a:extLst>
-                      <a:ext uri="{FF2B5EF4-FFF2-40B4-BE49-F238E27FC236}">
-                        <a16:creationId xmlns:a16="http://schemas.microsoft.com/office/drawing/2014/main" id="{DB63FB16-329F-D55F-9114-898178CEA391}"/>
-                      </a:ext>
-                    </a:extLst>
-                  </p:cNvPr>
-                  <p:cNvSpPr txBox="1"/>
-                  <p:nvPr/>
-                </p:nvSpPr>
-                <p:spPr>
-                  <a:xfrm>
-                    <a:off x="2981238" y="3429000"/>
-                    <a:ext cx="1049672" cy="276999"/>
-                  </a:xfrm>
-                  <a:prstGeom prst="rect">
-                    <a:avLst/>
-                  </a:prstGeom>
-                  <a:noFill/>
-                </p:spPr>
-                <p:txBody>
-                  <a:bodyPr wrap="square">
-                    <a:spAutoFit/>
-                  </a:bodyPr>
-                  <a:lstStyle/>
-                  <a:p>
-                    <a:pPr/>
-                    <a14:m>
-                      <m:oMathPara xmlns:m="http://schemas.openxmlformats.org/officeDocument/2006/math">
-                        <m:oMathParaPr>
-                          <m:jc m:val="centerGroup"/>
-                        </m:oMathParaPr>
-                        <m:oMath xmlns:m="http://schemas.openxmlformats.org/officeDocument/2006/math">
-                          <m:r>
-                            <a:rPr lang="en-US" sz="1200" i="1" smtClean="0">
-                              <a:latin typeface="Cambria Math" panose="02040503050406030204" pitchFamily="18" charset="0"/>
-                            </a:rPr>
-                            <m:t>𝑉</m:t>
-                          </m:r>
-                          <m:r>
-                            <a:rPr lang="en-US" sz="1200" i="1" smtClean="0">
-                              <a:latin typeface="Cambria Math" panose="02040503050406030204" pitchFamily="18" charset="0"/>
-                            </a:rPr>
-                            <m:t>(</m:t>
-                          </m:r>
-                          <m:sSub>
-                            <m:sSubPr>
-                              <m:ctrlPr>
-                                <a:rPr lang="en-US" sz="1200" i="1">
-                                  <a:latin typeface="Cambria Math" panose="02040503050406030204" pitchFamily="18" charset="0"/>
-                                </a:rPr>
-                              </m:ctrlPr>
-                            </m:sSubPr>
-                            <m:e>
-                              <m:r>
-                                <a:rPr lang="en-US" sz="1200" i="1">
-                                  <a:latin typeface="Cambria Math" panose="02040503050406030204" pitchFamily="18" charset="0"/>
-                                </a:rPr>
-                                <m:t>𝑆</m:t>
-                              </m:r>
-                            </m:e>
-                            <m:sub>
-                              <m:r>
-                                <a:rPr lang="en-US" sz="1200" i="1">
-                                  <a:latin typeface="Cambria Math" panose="02040503050406030204" pitchFamily="18" charset="0"/>
-                                </a:rPr>
-                                <m:t>𝑡</m:t>
-                              </m:r>
-                            </m:sub>
-                          </m:sSub>
-                          <m:r>
-                            <a:rPr lang="en-US" sz="1200" i="1">
-                              <a:latin typeface="Cambria Math" panose="02040503050406030204" pitchFamily="18" charset="0"/>
-                            </a:rPr>
-                            <m:t>)</m:t>
-                          </m:r>
-                        </m:oMath>
-                      </m:oMathPara>
-                    </a14:m>
-                    <a:endParaRPr lang="en-US" sz="1200" dirty="0"/>
-                  </a:p>
-                </p:txBody>
-              </p:sp>
-            </mc:Choice>
-            <mc:Fallback xmlns="">
-              <p:sp>
-                <p:nvSpPr>
-                  <p:cNvPr id="25" name="TextBox 24">
-                    <a:extLst>
-                      <a:ext uri="{FF2B5EF4-FFF2-40B4-BE49-F238E27FC236}">
-                        <a16:creationId xmlns:a16="http://schemas.microsoft.com/office/drawing/2014/main" id="{280AECF7-65CC-8754-EB3F-824EB281EDE8}"/>
-                      </a:ext>
-                    </a:extLst>
-                  </p:cNvPr>
-                  <p:cNvSpPr txBox="1">
-                    <a:spLocks noRot="1" noChangeAspect="1" noMove="1" noResize="1" noEditPoints="1" noAdjustHandles="1" noChangeArrowheads="1" noChangeShapeType="1" noTextEdit="1"/>
-                  </p:cNvSpPr>
-                  <p:nvPr/>
-                </p:nvSpPr>
-                <p:spPr>
-                  <a:xfrm>
-                    <a:off x="2981238" y="3429000"/>
-                    <a:ext cx="1049672" cy="276999"/>
-                  </a:xfrm>
-                  <a:prstGeom prst="rect">
-                    <a:avLst/>
-                  </a:prstGeom>
-                  <a:blipFill>
-                    <a:blip r:embed="rId12"/>
-                    <a:stretch>
-                      <a:fillRect b="-8889"/>
-                    </a:stretch>
-                  </a:blipFill>
-                </p:spPr>
-                <p:txBody>
-                  <a:bodyPr/>
-                  <a:lstStyle/>
-                  <a:p>
-                    <a:r>
-                      <a:rPr lang="en-US">
-                        <a:noFill/>
-                      </a:rPr>
-                      <a:t> </a:t>
-                    </a:r>
-                  </a:p>
-                </p:txBody>
-              </p:sp>
-            </mc:Fallback>
-          </mc:AlternateContent>
-          <mc:AlternateContent xmlns:mc="http://schemas.openxmlformats.org/markup-compatibility/2006" xmlns:a14="http://schemas.microsoft.com/office/drawing/2010/main">
-            <mc:Choice Requires="a14">
-              <p:sp>
-                <p:nvSpPr>
-                  <p:cNvPr id="19" name="TextBox 18">
-                    <a:extLst>
-                      <a:ext uri="{FF2B5EF4-FFF2-40B4-BE49-F238E27FC236}">
-                        <a16:creationId xmlns:a16="http://schemas.microsoft.com/office/drawing/2014/main" id="{CCC48D9B-D98F-0C33-B10A-3DC1477DEDA2}"/>
-                      </a:ext>
-                    </a:extLst>
-                  </p:cNvPr>
-                  <p:cNvSpPr txBox="1"/>
-                  <p:nvPr/>
-                </p:nvSpPr>
-                <p:spPr>
-                  <a:xfrm>
-                    <a:off x="4030910" y="3429000"/>
-                    <a:ext cx="1049672" cy="276999"/>
-                  </a:xfrm>
-                  <a:prstGeom prst="rect">
-                    <a:avLst/>
-                  </a:prstGeom>
-                  <a:noFill/>
-                </p:spPr>
-                <p:txBody>
-                  <a:bodyPr wrap="square">
-                    <a:spAutoFit/>
-                  </a:bodyPr>
-                  <a:lstStyle/>
-                  <a:p>
-                    <a:pPr/>
-                    <a14:m>
-                      <m:oMathPara xmlns:m="http://schemas.openxmlformats.org/officeDocument/2006/math">
-                        <m:oMathParaPr>
-                          <m:jc m:val="centerGroup"/>
-                        </m:oMathParaPr>
-                        <m:oMath xmlns:m="http://schemas.openxmlformats.org/officeDocument/2006/math">
-                          <m:r>
-                            <a:rPr lang="en-US" sz="1200" i="1" smtClean="0">
-                              <a:latin typeface="Cambria Math" panose="02040503050406030204" pitchFamily="18" charset="0"/>
-                            </a:rPr>
-                            <m:t>𝑉</m:t>
-                          </m:r>
-                          <m:r>
-                            <a:rPr lang="en-US" sz="1200" i="1" smtClean="0">
-                              <a:latin typeface="Cambria Math" panose="02040503050406030204" pitchFamily="18" charset="0"/>
-                            </a:rPr>
-                            <m:t>(</m:t>
-                          </m:r>
-                          <m:sSub>
-                            <m:sSubPr>
-                              <m:ctrlPr>
-                                <a:rPr lang="en-US" sz="1200" i="1">
-                                  <a:latin typeface="Cambria Math" panose="02040503050406030204" pitchFamily="18" charset="0"/>
-                                </a:rPr>
-                              </m:ctrlPr>
-                            </m:sSubPr>
-                            <m:e>
-                              <m:r>
-                                <a:rPr lang="en-US" sz="1200" i="1">
-                                  <a:latin typeface="Cambria Math" panose="02040503050406030204" pitchFamily="18" charset="0"/>
-                                </a:rPr>
-                                <m:t>𝑆</m:t>
-                              </m:r>
-                            </m:e>
-                            <m:sub>
-                              <m:r>
-                                <a:rPr lang="en-US" sz="1200" i="1">
-                                  <a:latin typeface="Cambria Math" panose="02040503050406030204" pitchFamily="18" charset="0"/>
-                                </a:rPr>
-                                <m:t>𝑡</m:t>
-                              </m:r>
-                              <m:r>
-                                <a:rPr lang="en-US" sz="1200" i="1">
-                                  <a:latin typeface="Cambria Math" panose="02040503050406030204" pitchFamily="18" charset="0"/>
-                                </a:rPr>
-                                <m:t>+1</m:t>
-                              </m:r>
-                            </m:sub>
-                          </m:sSub>
-                          <m:r>
-                            <a:rPr lang="en-US" sz="1200" i="1">
-                              <a:latin typeface="Cambria Math" panose="02040503050406030204" pitchFamily="18" charset="0"/>
-                            </a:rPr>
-                            <m:t>)</m:t>
-                          </m:r>
-                        </m:oMath>
-                      </m:oMathPara>
-                    </a14:m>
-                    <a:endParaRPr lang="en-US" sz="1200" dirty="0"/>
-                  </a:p>
-                </p:txBody>
-              </p:sp>
-            </mc:Choice>
-            <mc:Fallback xmlns="">
-              <p:sp>
-                <p:nvSpPr>
-                  <p:cNvPr id="26" name="TextBox 25">
-                    <a:extLst>
-                      <a:ext uri="{FF2B5EF4-FFF2-40B4-BE49-F238E27FC236}">
-                        <a16:creationId xmlns:a16="http://schemas.microsoft.com/office/drawing/2014/main" id="{BCB15AD7-1E19-57F6-65EB-1A4D65FF70E0}"/>
-                      </a:ext>
-                    </a:extLst>
-                  </p:cNvPr>
-                  <p:cNvSpPr txBox="1">
-                    <a:spLocks noRot="1" noChangeAspect="1" noMove="1" noResize="1" noEditPoints="1" noAdjustHandles="1" noChangeArrowheads="1" noChangeShapeType="1" noTextEdit="1"/>
-                  </p:cNvSpPr>
-                  <p:nvPr/>
-                </p:nvSpPr>
-                <p:spPr>
-                  <a:xfrm>
-                    <a:off x="4030910" y="3429000"/>
-                    <a:ext cx="1049672" cy="276999"/>
-                  </a:xfrm>
-                  <a:prstGeom prst="rect">
-                    <a:avLst/>
-                  </a:prstGeom>
-                  <a:blipFill>
-                    <a:blip r:embed="rId13"/>
-                    <a:stretch>
-                      <a:fillRect b="-8889"/>
-                    </a:stretch>
-                  </a:blipFill>
-                </p:spPr>
-                <p:txBody>
-                  <a:bodyPr/>
-                  <a:lstStyle/>
-                  <a:p>
-                    <a:r>
-                      <a:rPr lang="en-US">
-                        <a:noFill/>
-                      </a:rPr>
-                      <a:t> </a:t>
-                    </a:r>
-                  </a:p>
-                </p:txBody>
-              </p:sp>
-            </mc:Fallback>
-          </mc:AlternateContent>
-          <p:sp>
-            <p:nvSpPr>
-              <p:cNvPr id="20" name="Arc 19">
-                <a:extLst>
-                  <a:ext uri="{FF2B5EF4-FFF2-40B4-BE49-F238E27FC236}">
-                    <a16:creationId xmlns:a16="http://schemas.microsoft.com/office/drawing/2014/main" id="{EB6D555F-71D5-466F-AA26-1C0B46F3DF17}"/>
-                  </a:ext>
-                </a:extLst>
-              </p:cNvPr>
-              <p:cNvSpPr/>
-              <p:nvPr/>
-            </p:nvSpPr>
-            <p:spPr>
-              <a:xfrm>
-                <a:off x="3426902" y="2568409"/>
-                <a:ext cx="725648" cy="1208900"/>
-              </a:xfrm>
-              <a:prstGeom prst="arc">
-                <a:avLst>
-                  <a:gd name="adj1" fmla="val 535615"/>
-                  <a:gd name="adj2" fmla="val 6545153"/>
-                </a:avLst>
-              </a:prstGeom>
-              <a:ln>
-                <a:headEnd type="none" w="med" len="med"/>
-                <a:tailEnd type="triangle" w="med" len="med"/>
-              </a:ln>
-            </p:spPr>
-            <p:style>
-              <a:lnRef idx="2">
-                <a:schemeClr val="accent1"/>
-              </a:lnRef>
-              <a:fillRef idx="0">
-                <a:schemeClr val="accent1"/>
-              </a:fillRef>
-              <a:effectRef idx="1">
-                <a:schemeClr val="accent1"/>
-              </a:effectRef>
-              <a:fontRef idx="minor">
-                <a:schemeClr val="tx1"/>
-              </a:fontRef>
-            </p:style>
-            <p:txBody>
-              <a:bodyPr rtlCol="0" anchor="ctr"/>
-              <a:lstStyle/>
-              <a:p>
-                <a:pPr algn="ctr"/>
-                <a:endParaRPr lang="en-US"/>
-              </a:p>
-            </p:txBody>
-          </p:sp>
-          <p:sp>
-            <p:nvSpPr>
-              <p:cNvPr id="21" name="TextBox 20">
-                <a:extLst>
-                  <a:ext uri="{FF2B5EF4-FFF2-40B4-BE49-F238E27FC236}">
-                    <a16:creationId xmlns:a16="http://schemas.microsoft.com/office/drawing/2014/main" id="{DB447D22-5746-B9E6-4B7F-D58201646AB7}"/>
-                  </a:ext>
-                </a:extLst>
-              </p:cNvPr>
-              <p:cNvSpPr txBox="1"/>
-              <p:nvPr/>
-            </p:nvSpPr>
-            <p:spPr>
-              <a:xfrm>
-                <a:off x="3789726" y="3867135"/>
-                <a:ext cx="725648" cy="261610"/>
-              </a:xfrm>
-              <a:prstGeom prst="rect">
-                <a:avLst/>
-              </a:prstGeom>
-              <a:noFill/>
-            </p:spPr>
-            <p:txBody>
-              <a:bodyPr wrap="square" rtlCol="0">
-                <a:spAutoFit/>
-              </a:bodyPr>
-              <a:lstStyle/>
-              <a:p>
-                <a:pPr algn="ctr"/>
-                <a:r>
-                  <a:rPr lang="en-US" sz="1100" dirty="0">
-                    <a:solidFill>
-                      <a:schemeClr val="tx2">
-                        <a:lumMod val="90000"/>
-                        <a:lumOff val="10000"/>
-                      </a:schemeClr>
-                    </a:solidFill>
-                  </a:rPr>
-                  <a:t>update</a:t>
-                </a:r>
-              </a:p>
-            </p:txBody>
-          </p:sp>
-          <p:sp>
-            <p:nvSpPr>
-              <p:cNvPr id="22" name="Right Brace 21">
-                <a:extLst>
-                  <a:ext uri="{FF2B5EF4-FFF2-40B4-BE49-F238E27FC236}">
-                    <a16:creationId xmlns:a16="http://schemas.microsoft.com/office/drawing/2014/main" id="{E25CDC5A-37CC-002F-E578-D71B185F9446}"/>
-                  </a:ext>
-                </a:extLst>
-              </p:cNvPr>
-              <p:cNvSpPr/>
-              <p:nvPr/>
-            </p:nvSpPr>
-            <p:spPr>
-              <a:xfrm rot="16200000">
-                <a:off x="3901011" y="2344894"/>
-                <a:ext cx="164691" cy="1218182"/>
-              </a:xfrm>
-              <a:prstGeom prst="rightBrace">
-                <a:avLst/>
-              </a:prstGeom>
-            </p:spPr>
-            <p:style>
-              <a:lnRef idx="2">
-                <a:schemeClr val="accent1"/>
-              </a:lnRef>
-              <a:fillRef idx="0">
-                <a:schemeClr val="accent1"/>
-              </a:fillRef>
-              <a:effectRef idx="1">
-                <a:schemeClr val="accent1"/>
-              </a:effectRef>
-              <a:fontRef idx="minor">
-                <a:schemeClr val="tx1"/>
-              </a:fontRef>
-            </p:style>
-            <p:txBody>
-              <a:bodyPr rtlCol="0" anchor="ctr"/>
-              <a:lstStyle/>
-              <a:p>
-                <a:pPr algn="ctr"/>
-                <a:endParaRPr lang="en-US"/>
-              </a:p>
-            </p:txBody>
-          </p:sp>
-          <p:sp>
-            <p:nvSpPr>
-              <p:cNvPr id="23" name="TextBox 22">
-                <a:extLst>
-                  <a:ext uri="{FF2B5EF4-FFF2-40B4-BE49-F238E27FC236}">
-                    <a16:creationId xmlns:a16="http://schemas.microsoft.com/office/drawing/2014/main" id="{77225B51-8649-F146-DE31-A737A77E9A34}"/>
-                  </a:ext>
-                </a:extLst>
-              </p:cNvPr>
-              <p:cNvSpPr txBox="1"/>
-              <p:nvPr/>
-            </p:nvSpPr>
-            <p:spPr>
-              <a:xfrm>
-                <a:off x="3636948" y="2643914"/>
-                <a:ext cx="725648" cy="261610"/>
-              </a:xfrm>
-              <a:prstGeom prst="rect">
-                <a:avLst/>
-              </a:prstGeom>
-              <a:noFill/>
-            </p:spPr>
-            <p:txBody>
-              <a:bodyPr wrap="square" rtlCol="0">
-                <a:spAutoFit/>
-              </a:bodyPr>
-              <a:lstStyle/>
-              <a:p>
-                <a:pPr algn="ctr"/>
-                <a:r>
-                  <a:rPr lang="en-US" sz="1100" dirty="0">
-                    <a:solidFill>
-                      <a:schemeClr val="tx2">
-                        <a:lumMod val="90000"/>
-                        <a:lumOff val="10000"/>
-                      </a:schemeClr>
-                    </a:solidFill>
-                  </a:rPr>
-                  <a:t>1-step</a:t>
-                </a:r>
-              </a:p>
-            </p:txBody>
-          </p:sp>
-        </p:grpSp>
-        <mc:AlternateContent xmlns:mc="http://schemas.openxmlformats.org/markup-compatibility/2006" xmlns:a14="http://schemas.microsoft.com/office/drawing/2010/main">
-          <mc:Choice Requires="a14">
-            <p:sp>
-              <p:nvSpPr>
-                <p:cNvPr id="6" name="Speech Bubble: Rectangle with Corners Rounded 5">
-                  <a:extLst>
-                    <a:ext uri="{FF2B5EF4-FFF2-40B4-BE49-F238E27FC236}">
-                      <a16:creationId xmlns:a16="http://schemas.microsoft.com/office/drawing/2014/main" id="{AE3E163A-3FD0-7FFA-C2DB-4366ECEC4DFF}"/>
-                    </a:ext>
-                  </a:extLst>
-                </p:cNvPr>
-                <p:cNvSpPr/>
-                <p:nvPr/>
-              </p:nvSpPr>
-              <p:spPr>
-                <a:xfrm>
-                  <a:off x="5452586" y="4041516"/>
-                  <a:ext cx="1781788" cy="425199"/>
-                </a:xfrm>
-                <a:prstGeom prst="wedgeRoundRectCallout">
-                  <a:avLst>
-                    <a:gd name="adj1" fmla="val -75683"/>
-                    <a:gd name="adj2" fmla="val -67167"/>
-                    <a:gd name="adj3" fmla="val 16667"/>
-                  </a:avLst>
-                </a:prstGeom>
-              </p:spPr>
-              <p:style>
-                <a:lnRef idx="2">
-                  <a:schemeClr val="accent1">
-                    <a:shade val="15000"/>
-                  </a:schemeClr>
-                </a:lnRef>
-                <a:fillRef idx="1">
-                  <a:schemeClr val="accent1"/>
-                </a:fillRef>
-                <a:effectRef idx="0">
-                  <a:schemeClr val="accent1"/>
-                </a:effectRef>
-                <a:fontRef idx="minor">
-                  <a:schemeClr val="lt1"/>
-                </a:fontRef>
-              </p:style>
-              <p:txBody>
-                <a:bodyPr rtlCol="0" anchor="ctr"/>
-                <a:lstStyle/>
-                <a:p>
-                  <a:pPr algn="ctr"/>
-                  <a:r>
-                    <a:rPr lang="en-US" sz="1200" dirty="0"/>
-                    <a:t>Used to bootstrap the remaining return </a:t>
-                  </a:r>
-                  <a14:m>
-                    <m:oMath xmlns:m="http://schemas.openxmlformats.org/officeDocument/2006/math">
-                      <m:sSub>
-                        <m:sSubPr>
-                          <m:ctrlPr>
-                            <a:rPr lang="en-US" sz="1200" b="0" i="1" smtClean="0">
-                              <a:latin typeface="Cambria Math" panose="02040503050406030204" pitchFamily="18" charset="0"/>
-                            </a:rPr>
-                          </m:ctrlPr>
-                        </m:sSubPr>
-                        <m:e>
-                          <m:r>
-                            <a:rPr lang="en-US" sz="1200" b="0" i="1" smtClean="0">
-                              <a:latin typeface="Cambria Math" panose="02040503050406030204" pitchFamily="18" charset="0"/>
-                            </a:rPr>
-                            <m:t>𝐺</m:t>
-                          </m:r>
-                        </m:e>
-                        <m:sub>
-                          <m:r>
-                            <a:rPr lang="en-US" sz="1200" b="0" i="1" smtClean="0">
-                              <a:latin typeface="Cambria Math" panose="02040503050406030204" pitchFamily="18" charset="0"/>
-                            </a:rPr>
-                            <m:t>𝑡</m:t>
-                          </m:r>
-                          <m:r>
-                            <a:rPr lang="en-US" sz="1200" b="0" i="1" smtClean="0">
-                              <a:latin typeface="Cambria Math" panose="02040503050406030204" pitchFamily="18" charset="0"/>
-                            </a:rPr>
-                            <m:t>+1</m:t>
-                          </m:r>
-                        </m:sub>
-                      </m:sSub>
-                    </m:oMath>
-                  </a14:m>
-                  <a:endParaRPr lang="en-US" sz="1200" dirty="0"/>
-                </a:p>
-              </p:txBody>
-            </p:sp>
-          </mc:Choice>
-          <mc:Fallback xmlns="">
-            <p:sp>
-              <p:nvSpPr>
-                <p:cNvPr id="6" name="Speech Bubble: Rectangle with Corners Rounded 5">
-                  <a:extLst>
-                    <a:ext uri="{FF2B5EF4-FFF2-40B4-BE49-F238E27FC236}">
-                      <a16:creationId xmlns:a16="http://schemas.microsoft.com/office/drawing/2014/main" id="{AE3E163A-3FD0-7FFA-C2DB-4366ECEC4DFF}"/>
-                    </a:ext>
-                  </a:extLst>
-                </p:cNvPr>
-                <p:cNvSpPr>
-                  <a:spLocks noRot="1" noChangeAspect="1" noMove="1" noResize="1" noEditPoints="1" noAdjustHandles="1" noChangeArrowheads="1" noChangeShapeType="1" noTextEdit="1"/>
-                </p:cNvSpPr>
-                <p:nvPr/>
-              </p:nvSpPr>
-              <p:spPr>
-                <a:xfrm>
-                  <a:off x="5452586" y="4041516"/>
-                  <a:ext cx="1781788" cy="425199"/>
-                </a:xfrm>
-                <a:prstGeom prst="wedgeRoundRectCallout">
-                  <a:avLst>
-                    <a:gd name="adj1" fmla="val -75683"/>
-                    <a:gd name="adj2" fmla="val -67167"/>
-                    <a:gd name="adj3" fmla="val 16667"/>
-                  </a:avLst>
-                </a:prstGeom>
-                <a:blipFill>
-                  <a:blip r:embed="rId14"/>
-                  <a:stretch>
-                    <a:fillRect b="-8989"/>
-                  </a:stretch>
-                </a:blipFill>
-              </p:spPr>
-              <p:txBody>
-                <a:bodyPr/>
-                <a:lstStyle/>
-                <a:p>
-                  <a:r>
-                    <a:rPr lang="en-US">
-                      <a:noFill/>
-                    </a:rPr>
-                    <a:t> </a:t>
-                  </a:r>
-                </a:p>
-              </p:txBody>
-            </p:sp>
-          </mc:Fallback>
-        </mc:AlternateContent>
-      </p:grpSp>
-    </p:spTree>
-    <p:extLst>
-      <p:ext uri="{BB962C8B-B14F-4D97-AF65-F5344CB8AC3E}">
-        <p14:creationId xmlns:p14="http://schemas.microsoft.com/office/powerpoint/2010/main" val="2233404866"/>
-      </p:ext>
-    </p:extLst>
-  </p:cSld>
-  <p:clrMapOvr>
-    <a:masterClrMapping/>
-  </p:clrMapOvr>
-</p:sld>
-</file>
-
-<file path=ppt/slides/slide19.xml><?xml version="1.0" encoding="utf-8"?>
-<p:sld xmlns:a="http://schemas.openxmlformats.org/drawingml/2006/main" xmlns:r="http://schemas.openxmlformats.org/officeDocument/2006/relationships" xmlns:p="http://schemas.openxmlformats.org/presentationml/2006/main">
-  <p:cSld>
-    <p:spTree>
-      <p:nvGrpSpPr>
-        <p:cNvPr id="1" name=""/>
-        <p:cNvGrpSpPr/>
-        <p:nvPr/>
-      </p:nvGrpSpPr>
-      <p:grpSpPr>
-        <a:xfrm>
-          <a:off x="0" y="0"/>
-          <a:ext cx="0" cy="0"/>
-          <a:chOff x="0" y="0"/>
-          <a:chExt cx="0" cy="0"/>
-        </a:xfrm>
-      </p:grpSpPr>
-      <p:sp>
-        <p:nvSpPr>
-          <p:cNvPr id="2" name="Title 1">
-            <a:extLst>
-              <a:ext uri="{FF2B5EF4-FFF2-40B4-BE49-F238E27FC236}">
-                <a16:creationId xmlns:a16="http://schemas.microsoft.com/office/drawing/2014/main" id="{B838276F-7795-B966-030F-FCC3849991EC}"/>
-              </a:ext>
-            </a:extLst>
-          </p:cNvPr>
-          <p:cNvSpPr>
-            <a:spLocks noGrp="1"/>
-          </p:cNvSpPr>
-          <p:nvPr>
-            <p:ph type="title"/>
-          </p:nvPr>
-        </p:nvSpPr>
-        <p:spPr/>
-        <p:txBody>
-          <a:bodyPr/>
-          <a:lstStyle/>
-          <a:p>
-            <a:r>
-              <a:rPr lang="en-US" dirty="0"/>
-              <a:t>Sarsa vs. Q-Learning</a:t>
-            </a:r>
-          </a:p>
-        </p:txBody>
-      </p:sp>
-      <p:sp>
-        <p:nvSpPr>
-          <p:cNvPr id="3" name="Content Placeholder 2">
-            <a:extLst>
-              <a:ext uri="{FF2B5EF4-FFF2-40B4-BE49-F238E27FC236}">
-                <a16:creationId xmlns:a16="http://schemas.microsoft.com/office/drawing/2014/main" id="{E6C98B4E-B7CF-E345-6580-CEE34C1DC678}"/>
-              </a:ext>
-            </a:extLst>
-          </p:cNvPr>
-          <p:cNvSpPr>
-            <a:spLocks noGrp="1"/>
-          </p:cNvSpPr>
-          <p:nvPr>
-            <p:ph idx="1"/>
-          </p:nvPr>
-        </p:nvSpPr>
-        <p:spPr>
-          <a:xfrm>
-            <a:off x="838200" y="1397330"/>
-            <a:ext cx="4403895" cy="4779633"/>
-          </a:xfrm>
-        </p:spPr>
-        <p:txBody>
-          <a:bodyPr>
-            <a:normAutofit/>
-          </a:bodyPr>
-          <a:lstStyle/>
-          <a:p>
-            <a:r>
-              <a:rPr lang="en-US" sz="1800" b="1" dirty="0"/>
-              <a:t>Cliff Walking</a:t>
-            </a:r>
-            <a:r>
-              <a:rPr lang="en-US" sz="1800" dirty="0"/>
-              <a:t>: Consider the </a:t>
-            </a:r>
-            <a:r>
-              <a:rPr lang="en-US" sz="1800" dirty="0" err="1"/>
-              <a:t>gridworld</a:t>
-            </a:r>
-            <a:r>
-              <a:rPr lang="en-US" sz="1800" dirty="0"/>
-              <a:t> shown to the right. </a:t>
-            </a:r>
-          </a:p>
-          <a:p>
-            <a:r>
-              <a:rPr lang="en-US" sz="1800" dirty="0"/>
-              <a:t>This is a standard undiscounted, episodic task, with start and goal states.</a:t>
-            </a:r>
-          </a:p>
-          <a:p>
-            <a:r>
-              <a:rPr lang="en-US" sz="1800" dirty="0"/>
-              <a:t>Actions causing movement up, down, right, and left. </a:t>
-            </a:r>
-          </a:p>
-          <a:p>
-            <a:r>
-              <a:rPr lang="en-US" sz="1800" dirty="0"/>
-              <a:t>Reward is −1 on all transitions except those into the region marked “The Cliff.” Stepping into this region incurs a reward of −100 and sends the sends the agent instantly back to the start.</a:t>
-            </a:r>
-          </a:p>
-        </p:txBody>
-      </p:sp>
-      <p:pic>
-        <p:nvPicPr>
-          <p:cNvPr id="5" name="Picture 4">
-            <a:extLst>
-              <a:ext uri="{FF2B5EF4-FFF2-40B4-BE49-F238E27FC236}">
-                <a16:creationId xmlns:a16="http://schemas.microsoft.com/office/drawing/2014/main" id="{BF19A7B5-A9CC-EE24-F78E-F3E2FA24D35A}"/>
-              </a:ext>
-            </a:extLst>
-          </p:cNvPr>
-          <p:cNvPicPr>
-            <a:picLocks noChangeAspect="1"/>
-          </p:cNvPicPr>
-          <p:nvPr/>
-        </p:nvPicPr>
-        <p:blipFill>
-          <a:blip r:embed="rId2"/>
-          <a:stretch>
-            <a:fillRect/>
-          </a:stretch>
-        </p:blipFill>
-        <p:spPr>
-          <a:xfrm>
-            <a:off x="5798274" y="240397"/>
-            <a:ext cx="5979790" cy="3006931"/>
-          </a:xfrm>
-          <a:prstGeom prst="rect">
-            <a:avLst/>
-          </a:prstGeom>
-        </p:spPr>
-      </p:pic>
-      <p:pic>
-        <p:nvPicPr>
-          <p:cNvPr id="7" name="Picture 6">
-            <a:extLst>
-              <a:ext uri="{FF2B5EF4-FFF2-40B4-BE49-F238E27FC236}">
-                <a16:creationId xmlns:a16="http://schemas.microsoft.com/office/drawing/2014/main" id="{703F5773-6D0D-1D71-F1CD-C7746EF7FC07}"/>
-              </a:ext>
-            </a:extLst>
-          </p:cNvPr>
-          <p:cNvPicPr>
-            <a:picLocks noChangeAspect="1"/>
-          </p:cNvPicPr>
-          <p:nvPr/>
-        </p:nvPicPr>
-        <p:blipFill>
-          <a:blip r:embed="rId3"/>
-          <a:stretch>
-            <a:fillRect/>
-          </a:stretch>
-        </p:blipFill>
-        <p:spPr>
-          <a:xfrm>
-            <a:off x="6697576" y="3812721"/>
-            <a:ext cx="4399920" cy="2904072"/>
-          </a:xfrm>
-          <a:prstGeom prst="rect">
-            <a:avLst/>
-          </a:prstGeom>
-        </p:spPr>
-      </p:pic>
-      <mc:AlternateContent xmlns:mc="http://schemas.openxmlformats.org/markup-compatibility/2006" xmlns:a14="http://schemas.microsoft.com/office/drawing/2010/main">
-        <mc:Choice Requires="a14">
-          <p:sp>
-            <p:nvSpPr>
-              <p:cNvPr id="9" name="TextBox 8">
-                <a:extLst>
-                  <a:ext uri="{FF2B5EF4-FFF2-40B4-BE49-F238E27FC236}">
-                    <a16:creationId xmlns:a16="http://schemas.microsoft.com/office/drawing/2014/main" id="{586B79D4-4AA8-3E1C-81C7-278DEEA363AF}"/>
-                  </a:ext>
-                </a:extLst>
-              </p:cNvPr>
-              <p:cNvSpPr txBox="1"/>
-              <p:nvPr/>
-            </p:nvSpPr>
-            <p:spPr>
-              <a:xfrm>
-                <a:off x="6499781" y="3494758"/>
-                <a:ext cx="5362044" cy="584775"/>
-              </a:xfrm>
-              <a:prstGeom prst="rect">
-                <a:avLst/>
-              </a:prstGeom>
-              <a:noFill/>
-            </p:spPr>
-            <p:txBody>
-              <a:bodyPr wrap="square">
-                <a:spAutoFit/>
-              </a:bodyPr>
-              <a:lstStyle/>
-              <a:p>
-                <a:r>
-                  <a:rPr lang="en-US" sz="1600" dirty="0"/>
-                  <a:t>Performance of the Sarsa and Q-learning methods with </a:t>
-                </a:r>
-                <a14:m>
-                  <m:oMath xmlns:m="http://schemas.openxmlformats.org/officeDocument/2006/math">
-                    <m:r>
-                      <a:rPr lang="en-US" sz="1600" b="0" i="1" smtClean="0">
-                        <a:latin typeface="Cambria Math" panose="02040503050406030204" pitchFamily="18" charset="0"/>
-                      </a:rPr>
-                      <m:t>𝜖</m:t>
-                    </m:r>
-                  </m:oMath>
-                </a14:m>
-                <a:r>
-                  <a:rPr lang="en-US" sz="1600" dirty="0"/>
-                  <a:t>-greedy action selection, </a:t>
-                </a:r>
-                <a14:m>
-                  <m:oMath xmlns:m="http://schemas.openxmlformats.org/officeDocument/2006/math">
-                    <m:r>
-                      <a:rPr lang="en-US" sz="1600" i="1">
-                        <a:latin typeface="Cambria Math" panose="02040503050406030204" pitchFamily="18" charset="0"/>
-                      </a:rPr>
-                      <m:t>𝜖</m:t>
-                    </m:r>
-                    <m:r>
-                      <a:rPr lang="en-US" sz="1600" b="0" i="1" smtClean="0">
-                        <a:latin typeface="Cambria Math" panose="02040503050406030204" pitchFamily="18" charset="0"/>
-                      </a:rPr>
-                      <m:t>=0.1</m:t>
-                    </m:r>
-                  </m:oMath>
-                </a14:m>
-                <a:r>
-                  <a:rPr lang="en-US" sz="1600" dirty="0"/>
-                  <a:t>.</a:t>
-                </a:r>
-              </a:p>
-            </p:txBody>
-          </p:sp>
-        </mc:Choice>
-        <mc:Fallback xmlns="">
-          <p:sp>
-            <p:nvSpPr>
-              <p:cNvPr id="9" name="TextBox 8">
-                <a:extLst>
-                  <a:ext uri="{FF2B5EF4-FFF2-40B4-BE49-F238E27FC236}">
-                    <a16:creationId xmlns:a16="http://schemas.microsoft.com/office/drawing/2014/main" id="{586B79D4-4AA8-3E1C-81C7-278DEEA363AF}"/>
-                  </a:ext>
-                </a:extLst>
-              </p:cNvPr>
-              <p:cNvSpPr txBox="1">
-                <a:spLocks noRot="1" noChangeAspect="1" noMove="1" noResize="1" noEditPoints="1" noAdjustHandles="1" noChangeArrowheads="1" noChangeShapeType="1" noTextEdit="1"/>
-              </p:cNvSpPr>
-              <p:nvPr/>
-            </p:nvSpPr>
-            <p:spPr>
-              <a:xfrm>
-                <a:off x="6499781" y="3494758"/>
-                <a:ext cx="5362044" cy="584775"/>
-              </a:xfrm>
-              <a:prstGeom prst="rect">
-                <a:avLst/>
-              </a:prstGeom>
-              <a:blipFill>
-                <a:blip r:embed="rId4"/>
-                <a:stretch>
-                  <a:fillRect l="-568" t="-3125" b="-12500"/>
-                </a:stretch>
-              </a:blipFill>
-            </p:spPr>
-            <p:txBody>
-              <a:bodyPr/>
-              <a:lstStyle/>
-              <a:p>
-                <a:r>
-                  <a:rPr lang="en-US">
-                    <a:noFill/>
-                  </a:rPr>
-                  <a:t> </a:t>
-                </a:r>
-              </a:p>
-            </p:txBody>
-          </p:sp>
-        </mc:Fallback>
-      </mc:AlternateContent>
-      <p:sp>
-        <p:nvSpPr>
-          <p:cNvPr id="10" name="Speech Bubble: Rectangle with Corners Rounded 9">
-            <a:extLst>
-              <a:ext uri="{FF2B5EF4-FFF2-40B4-BE49-F238E27FC236}">
-                <a16:creationId xmlns:a16="http://schemas.microsoft.com/office/drawing/2014/main" id="{C3FCB8B5-813B-D263-F7C1-1BC210D5ED90}"/>
-              </a:ext>
-            </a:extLst>
-          </p:cNvPr>
-          <p:cNvSpPr/>
-          <p:nvPr/>
-        </p:nvSpPr>
-        <p:spPr>
-          <a:xfrm>
-            <a:off x="10016519" y="5264757"/>
-            <a:ext cx="1542614" cy="696293"/>
-          </a:xfrm>
-          <a:prstGeom prst="wedgeRoundRectCallout">
-            <a:avLst>
-              <a:gd name="adj1" fmla="val -79398"/>
-              <a:gd name="adj2" fmla="val -61806"/>
-              <a:gd name="adj3" fmla="val 16667"/>
-            </a:avLst>
-          </a:prstGeom>
-        </p:spPr>
-        <p:style>
-          <a:lnRef idx="2">
-            <a:schemeClr val="accent1">
-              <a:shade val="15000"/>
-            </a:schemeClr>
-          </a:lnRef>
-          <a:fillRef idx="1">
-            <a:schemeClr val="accent1"/>
-          </a:fillRef>
-          <a:effectRef idx="0">
-            <a:schemeClr val="accent1"/>
-          </a:effectRef>
-          <a:fontRef idx="minor">
-            <a:schemeClr val="lt1"/>
-          </a:fontRef>
-        </p:style>
-        <p:txBody>
-          <a:bodyPr rtlCol="0" anchor="ctr"/>
-          <a:lstStyle/>
-          <a:p>
-            <a:pPr algn="ctr"/>
-            <a:r>
-              <a:rPr lang="en-US" sz="1100" dirty="0"/>
-              <a:t>Why does the optimal path perform worse?</a:t>
-            </a:r>
-          </a:p>
-        </p:txBody>
-      </p:sp>
-    </p:spTree>
-    <p:extLst>
-      <p:ext uri="{BB962C8B-B14F-4D97-AF65-F5344CB8AC3E}">
-        <p14:creationId xmlns:p14="http://schemas.microsoft.com/office/powerpoint/2010/main" val="2000631573"/>
       </p:ext>
     </p:extLst>
   </p:cSld>
@@ -12319,6 +11457,2297 @@
           <a:chExt cx="0" cy="0"/>
         </a:xfrm>
       </p:grpSpPr>
+      <p:sp>
+        <p:nvSpPr>
+          <p:cNvPr id="2" name="Title 1">
+            <a:extLst>
+              <a:ext uri="{FF2B5EF4-FFF2-40B4-BE49-F238E27FC236}">
+                <a16:creationId xmlns:a16="http://schemas.microsoft.com/office/drawing/2014/main" id="{47EA2BBB-A726-1EF6-3427-57B33AC4A406}"/>
+              </a:ext>
+            </a:extLst>
+          </p:cNvPr>
+          <p:cNvSpPr>
+            <a:spLocks noGrp="1"/>
+          </p:cNvSpPr>
+          <p:nvPr>
+            <p:ph type="title"/>
+          </p:nvPr>
+        </p:nvSpPr>
+        <p:spPr/>
+        <p:txBody>
+          <a:bodyPr/>
+          <a:lstStyle/>
+          <a:p>
+            <a:r>
+              <a:rPr lang="en-US" dirty="0"/>
+              <a:t>Comparison: 1-step Backup Diagrams</a:t>
+            </a:r>
+          </a:p>
+        </p:txBody>
+      </p:sp>
+      <p:pic>
+        <p:nvPicPr>
+          <p:cNvPr id="5" name="Picture 4">
+            <a:extLst>
+              <a:ext uri="{FF2B5EF4-FFF2-40B4-BE49-F238E27FC236}">
+                <a16:creationId xmlns:a16="http://schemas.microsoft.com/office/drawing/2014/main" id="{F027D81A-F2A7-9C05-925E-39F3F345BA1A}"/>
+              </a:ext>
+            </a:extLst>
+          </p:cNvPr>
+          <p:cNvPicPr>
+            <a:picLocks noChangeAspect="1"/>
+          </p:cNvPicPr>
+          <p:nvPr/>
+        </p:nvPicPr>
+        <p:blipFill>
+          <a:blip r:embed="rId2"/>
+          <a:stretch>
+            <a:fillRect/>
+          </a:stretch>
+        </p:blipFill>
+        <p:spPr>
+          <a:xfrm>
+            <a:off x="4578940" y="3640886"/>
+            <a:ext cx="5734850" cy="2229161"/>
+          </a:xfrm>
+          <a:prstGeom prst="rect">
+            <a:avLst/>
+          </a:prstGeom>
+        </p:spPr>
+      </p:pic>
+      <p:pic>
+        <p:nvPicPr>
+          <p:cNvPr id="7" name="Picture 6">
+            <a:extLst>
+              <a:ext uri="{FF2B5EF4-FFF2-40B4-BE49-F238E27FC236}">
+                <a16:creationId xmlns:a16="http://schemas.microsoft.com/office/drawing/2014/main" id="{D1A8F4E1-AA11-EA65-8209-64A2D6CE0DBB}"/>
+              </a:ext>
+            </a:extLst>
+          </p:cNvPr>
+          <p:cNvPicPr>
+            <a:picLocks noChangeAspect="1"/>
+          </p:cNvPicPr>
+          <p:nvPr/>
+        </p:nvPicPr>
+        <p:blipFill>
+          <a:blip r:embed="rId3"/>
+          <a:stretch>
+            <a:fillRect/>
+          </a:stretch>
+        </p:blipFill>
+        <p:spPr>
+          <a:xfrm>
+            <a:off x="1674286" y="3731387"/>
+            <a:ext cx="1038370" cy="2048161"/>
+          </a:xfrm>
+          <a:prstGeom prst="rect">
+            <a:avLst/>
+          </a:prstGeom>
+        </p:spPr>
+      </p:pic>
+      <mc:AlternateContent xmlns:mc="http://schemas.openxmlformats.org/markup-compatibility/2006" xmlns:a14="http://schemas.microsoft.com/office/drawing/2010/main">
+        <mc:Choice Requires="a14">
+          <p:sp>
+            <p:nvSpPr>
+              <p:cNvPr id="9" name="TextBox 8">
+                <a:extLst>
+                  <a:ext uri="{FF2B5EF4-FFF2-40B4-BE49-F238E27FC236}">
+                    <a16:creationId xmlns:a16="http://schemas.microsoft.com/office/drawing/2014/main" id="{7CBB00F4-1A5A-D5B1-1923-30E7AB671293}"/>
+                  </a:ext>
+                </a:extLst>
+              </p:cNvPr>
+              <p:cNvSpPr txBox="1"/>
+              <p:nvPr/>
+            </p:nvSpPr>
+            <p:spPr>
+              <a:xfrm>
+                <a:off x="2298329" y="4446711"/>
+                <a:ext cx="650243" cy="369332"/>
+              </a:xfrm>
+              <a:prstGeom prst="rect">
+                <a:avLst/>
+              </a:prstGeom>
+              <a:noFill/>
+            </p:spPr>
+            <p:txBody>
+              <a:bodyPr wrap="none" rtlCol="0">
+                <a:spAutoFit/>
+              </a:bodyPr>
+              <a:lstStyle/>
+              <a:p>
+                <a:pPr/>
+                <a14:m>
+                  <m:oMathPara xmlns:m="http://schemas.openxmlformats.org/officeDocument/2006/math">
+                    <m:oMathParaPr>
+                      <m:jc m:val="centerGroup"/>
+                    </m:oMathParaPr>
+                    <m:oMath xmlns:m="http://schemas.openxmlformats.org/officeDocument/2006/math">
+                      <m:sSub>
+                        <m:sSubPr>
+                          <m:ctrlPr>
+                            <a:rPr lang="en-US" b="0" i="1" smtClean="0">
+                              <a:latin typeface="Cambria Math" panose="02040503050406030204" pitchFamily="18" charset="0"/>
+                            </a:rPr>
+                          </m:ctrlPr>
+                        </m:sSubPr>
+                        <m:e>
+                          <m:r>
+                            <a:rPr lang="en-US" b="0" i="1" smtClean="0">
+                              <a:latin typeface="Cambria Math" panose="02040503050406030204" pitchFamily="18" charset="0"/>
+                            </a:rPr>
+                            <m:t>𝑆</m:t>
+                          </m:r>
+                        </m:e>
+                        <m:sub>
+                          <m:r>
+                            <a:rPr lang="en-US" b="0" i="1" smtClean="0">
+                              <a:latin typeface="Cambria Math" panose="02040503050406030204" pitchFamily="18" charset="0"/>
+                            </a:rPr>
+                            <m:t>𝑡</m:t>
+                          </m:r>
+                          <m:r>
+                            <a:rPr lang="en-US" b="0" i="1" smtClean="0">
+                              <a:latin typeface="Cambria Math" panose="02040503050406030204" pitchFamily="18" charset="0"/>
+                            </a:rPr>
+                            <m:t>+1</m:t>
+                          </m:r>
+                        </m:sub>
+                      </m:sSub>
+                    </m:oMath>
+                  </m:oMathPara>
+                </a14:m>
+                <a:endParaRPr lang="en-US" dirty="0"/>
+              </a:p>
+            </p:txBody>
+          </p:sp>
+        </mc:Choice>
+        <mc:Fallback xmlns="">
+          <p:sp>
+            <p:nvSpPr>
+              <p:cNvPr id="9" name="TextBox 8">
+                <a:extLst>
+                  <a:ext uri="{FF2B5EF4-FFF2-40B4-BE49-F238E27FC236}">
+                    <a16:creationId xmlns:a16="http://schemas.microsoft.com/office/drawing/2014/main" id="{7CBB00F4-1A5A-D5B1-1923-30E7AB671293}"/>
+                  </a:ext>
+                </a:extLst>
+              </p:cNvPr>
+              <p:cNvSpPr txBox="1">
+                <a:spLocks noRot="1" noChangeAspect="1" noMove="1" noResize="1" noEditPoints="1" noAdjustHandles="1" noChangeArrowheads="1" noChangeShapeType="1" noTextEdit="1"/>
+              </p:cNvSpPr>
+              <p:nvPr/>
+            </p:nvSpPr>
+            <p:spPr>
+              <a:xfrm>
+                <a:off x="2298329" y="4446711"/>
+                <a:ext cx="650243" cy="369332"/>
+              </a:xfrm>
+              <a:prstGeom prst="rect">
+                <a:avLst/>
+              </a:prstGeom>
+              <a:blipFill>
+                <a:blip r:embed="rId5"/>
+                <a:stretch>
+                  <a:fillRect/>
+                </a:stretch>
+              </a:blipFill>
+            </p:spPr>
+            <p:txBody>
+              <a:bodyPr/>
+              <a:lstStyle/>
+              <a:p>
+                <a:r>
+                  <a:rPr lang="en-US">
+                    <a:noFill/>
+                  </a:rPr>
+                  <a:t> </a:t>
+                </a:r>
+              </a:p>
+            </p:txBody>
+          </p:sp>
+        </mc:Fallback>
+      </mc:AlternateContent>
+      <mc:AlternateContent xmlns:mc="http://schemas.openxmlformats.org/markup-compatibility/2006" xmlns:a14="http://schemas.microsoft.com/office/drawing/2010/main">
+        <mc:Choice Requires="a14">
+          <p:sp>
+            <p:nvSpPr>
+              <p:cNvPr id="11" name="TextBox 10">
+                <a:extLst>
+                  <a:ext uri="{FF2B5EF4-FFF2-40B4-BE49-F238E27FC236}">
+                    <a16:creationId xmlns:a16="http://schemas.microsoft.com/office/drawing/2014/main" id="{AAD4DCAB-8567-439C-FC82-BD0F72977E73}"/>
+                  </a:ext>
+                </a:extLst>
+              </p:cNvPr>
+              <p:cNvSpPr txBox="1"/>
+              <p:nvPr/>
+            </p:nvSpPr>
+            <p:spPr>
+              <a:xfrm>
+                <a:off x="2298330" y="5096376"/>
+                <a:ext cx="602038" cy="369332"/>
+              </a:xfrm>
+              <a:prstGeom prst="rect">
+                <a:avLst/>
+              </a:prstGeom>
+              <a:noFill/>
+            </p:spPr>
+            <p:txBody>
+              <a:bodyPr wrap="square">
+                <a:spAutoFit/>
+              </a:bodyPr>
+              <a:lstStyle/>
+              <a:p>
+                <a:pPr/>
+                <a14:m>
+                  <m:oMathPara xmlns:m="http://schemas.openxmlformats.org/officeDocument/2006/math">
+                    <m:oMathParaPr>
+                      <m:jc m:val="centerGroup"/>
+                    </m:oMathParaPr>
+                    <m:oMath xmlns:m="http://schemas.openxmlformats.org/officeDocument/2006/math">
+                      <m:sSub>
+                        <m:sSubPr>
+                          <m:ctrlPr>
+                            <a:rPr lang="en-US" b="0" i="1" smtClean="0">
+                              <a:latin typeface="Cambria Math" panose="02040503050406030204" pitchFamily="18" charset="0"/>
+                            </a:rPr>
+                          </m:ctrlPr>
+                        </m:sSubPr>
+                        <m:e>
+                          <m:r>
+                            <a:rPr lang="en-US" b="0" i="1" smtClean="0">
+                              <a:latin typeface="Cambria Math" panose="02040503050406030204" pitchFamily="18" charset="0"/>
+                            </a:rPr>
+                            <m:t>𝐴</m:t>
+                          </m:r>
+                        </m:e>
+                        <m:sub>
+                          <m:r>
+                            <a:rPr lang="en-US" b="0" i="1" smtClean="0">
+                              <a:latin typeface="Cambria Math" panose="02040503050406030204" pitchFamily="18" charset="0"/>
+                            </a:rPr>
+                            <m:t>𝑡</m:t>
+                          </m:r>
+                          <m:r>
+                            <a:rPr lang="en-US" b="0" i="1" smtClean="0">
+                              <a:latin typeface="Cambria Math" panose="02040503050406030204" pitchFamily="18" charset="0"/>
+                            </a:rPr>
+                            <m:t>+1</m:t>
+                          </m:r>
+                        </m:sub>
+                      </m:sSub>
+                    </m:oMath>
+                  </m:oMathPara>
+                </a14:m>
+                <a:endParaRPr lang="en-US" dirty="0"/>
+              </a:p>
+            </p:txBody>
+          </p:sp>
+        </mc:Choice>
+        <mc:Fallback xmlns="">
+          <p:sp>
+            <p:nvSpPr>
+              <p:cNvPr id="11" name="TextBox 10">
+                <a:extLst>
+                  <a:ext uri="{FF2B5EF4-FFF2-40B4-BE49-F238E27FC236}">
+                    <a16:creationId xmlns:a16="http://schemas.microsoft.com/office/drawing/2014/main" id="{AAD4DCAB-8567-439C-FC82-BD0F72977E73}"/>
+                  </a:ext>
+                </a:extLst>
+              </p:cNvPr>
+              <p:cNvSpPr txBox="1">
+                <a:spLocks noRot="1" noChangeAspect="1" noMove="1" noResize="1" noEditPoints="1" noAdjustHandles="1" noChangeArrowheads="1" noChangeShapeType="1" noTextEdit="1"/>
+              </p:cNvSpPr>
+              <p:nvPr/>
+            </p:nvSpPr>
+            <p:spPr>
+              <a:xfrm>
+                <a:off x="2298330" y="5096376"/>
+                <a:ext cx="602038" cy="369332"/>
+              </a:xfrm>
+              <a:prstGeom prst="rect">
+                <a:avLst/>
+              </a:prstGeom>
+              <a:blipFill>
+                <a:blip r:embed="rId6"/>
+                <a:stretch>
+                  <a:fillRect/>
+                </a:stretch>
+              </a:blipFill>
+            </p:spPr>
+            <p:txBody>
+              <a:bodyPr/>
+              <a:lstStyle/>
+              <a:p>
+                <a:r>
+                  <a:rPr lang="en-US">
+                    <a:noFill/>
+                  </a:rPr>
+                  <a:t> </a:t>
+                </a:r>
+              </a:p>
+            </p:txBody>
+          </p:sp>
+        </mc:Fallback>
+      </mc:AlternateContent>
+      <mc:AlternateContent xmlns:mc="http://schemas.openxmlformats.org/markup-compatibility/2006" xmlns:a14="http://schemas.microsoft.com/office/drawing/2010/main">
+        <mc:Choice Requires="a14">
+          <p:sp>
+            <p:nvSpPr>
+              <p:cNvPr id="12" name="TextBox 11">
+                <a:extLst>
+                  <a:ext uri="{FF2B5EF4-FFF2-40B4-BE49-F238E27FC236}">
+                    <a16:creationId xmlns:a16="http://schemas.microsoft.com/office/drawing/2014/main" id="{AE811601-E15B-A2EA-6A3C-8E69FECEDE50}"/>
+                  </a:ext>
+                </a:extLst>
+              </p:cNvPr>
+              <p:cNvSpPr txBox="1"/>
+              <p:nvPr/>
+            </p:nvSpPr>
+            <p:spPr>
+              <a:xfrm>
+                <a:off x="2186529" y="3775749"/>
+                <a:ext cx="602038" cy="369332"/>
+              </a:xfrm>
+              <a:prstGeom prst="rect">
+                <a:avLst/>
+              </a:prstGeom>
+              <a:noFill/>
+            </p:spPr>
+            <p:txBody>
+              <a:bodyPr wrap="square">
+                <a:spAutoFit/>
+              </a:bodyPr>
+              <a:lstStyle/>
+              <a:p>
+                <a:pPr/>
+                <a14:m>
+                  <m:oMathPara xmlns:m="http://schemas.openxmlformats.org/officeDocument/2006/math">
+                    <m:oMathParaPr>
+                      <m:jc m:val="centerGroup"/>
+                    </m:oMathParaPr>
+                    <m:oMath xmlns:m="http://schemas.openxmlformats.org/officeDocument/2006/math">
+                      <m:sSub>
+                        <m:sSubPr>
+                          <m:ctrlPr>
+                            <a:rPr lang="en-US" i="1">
+                              <a:latin typeface="Cambria Math" panose="02040503050406030204" pitchFamily="18" charset="0"/>
+                            </a:rPr>
+                          </m:ctrlPr>
+                        </m:sSubPr>
+                        <m:e>
+                          <m:r>
+                            <a:rPr lang="en-US" i="1">
+                              <a:latin typeface="Cambria Math" panose="02040503050406030204" pitchFamily="18" charset="0"/>
+                            </a:rPr>
+                            <m:t>𝐴</m:t>
+                          </m:r>
+                        </m:e>
+                        <m:sub>
+                          <m:r>
+                            <a:rPr lang="en-US" i="1">
+                              <a:latin typeface="Cambria Math" panose="02040503050406030204" pitchFamily="18" charset="0"/>
+                            </a:rPr>
+                            <m:t>𝑡</m:t>
+                          </m:r>
+                        </m:sub>
+                      </m:sSub>
+                    </m:oMath>
+                  </m:oMathPara>
+                </a14:m>
+                <a:endParaRPr lang="en-US" dirty="0"/>
+              </a:p>
+            </p:txBody>
+          </p:sp>
+        </mc:Choice>
+        <mc:Fallback xmlns="">
+          <p:sp>
+            <p:nvSpPr>
+              <p:cNvPr id="12" name="TextBox 11">
+                <a:extLst>
+                  <a:ext uri="{FF2B5EF4-FFF2-40B4-BE49-F238E27FC236}">
+                    <a16:creationId xmlns:a16="http://schemas.microsoft.com/office/drawing/2014/main" id="{AE811601-E15B-A2EA-6A3C-8E69FECEDE50}"/>
+                  </a:ext>
+                </a:extLst>
+              </p:cNvPr>
+              <p:cNvSpPr txBox="1">
+                <a:spLocks noRot="1" noChangeAspect="1" noMove="1" noResize="1" noEditPoints="1" noAdjustHandles="1" noChangeArrowheads="1" noChangeShapeType="1" noTextEdit="1"/>
+              </p:cNvSpPr>
+              <p:nvPr/>
+            </p:nvSpPr>
+            <p:spPr>
+              <a:xfrm>
+                <a:off x="2186529" y="3775749"/>
+                <a:ext cx="602038" cy="369332"/>
+              </a:xfrm>
+              <a:prstGeom prst="rect">
+                <a:avLst/>
+              </a:prstGeom>
+              <a:blipFill>
+                <a:blip r:embed="rId7"/>
+                <a:stretch>
+                  <a:fillRect/>
+                </a:stretch>
+              </a:blipFill>
+            </p:spPr>
+            <p:txBody>
+              <a:bodyPr/>
+              <a:lstStyle/>
+              <a:p>
+                <a:r>
+                  <a:rPr lang="en-US">
+                    <a:noFill/>
+                  </a:rPr>
+                  <a:t> </a:t>
+                </a:r>
+              </a:p>
+            </p:txBody>
+          </p:sp>
+        </mc:Fallback>
+      </mc:AlternateContent>
+      <mc:AlternateContent xmlns:mc="http://schemas.openxmlformats.org/markup-compatibility/2006" xmlns:a14="http://schemas.microsoft.com/office/drawing/2010/main">
+        <mc:Choice Requires="a14">
+          <p:sp>
+            <p:nvSpPr>
+              <p:cNvPr id="13" name="TextBox 12">
+                <a:extLst>
+                  <a:ext uri="{FF2B5EF4-FFF2-40B4-BE49-F238E27FC236}">
+                    <a16:creationId xmlns:a16="http://schemas.microsoft.com/office/drawing/2014/main" id="{AF84C7A8-3D3A-7BB1-3E84-0C6C6A718B86}"/>
+                  </a:ext>
+                </a:extLst>
+              </p:cNvPr>
+              <p:cNvSpPr txBox="1"/>
+              <p:nvPr/>
+            </p:nvSpPr>
+            <p:spPr>
+              <a:xfrm>
+                <a:off x="1698460" y="4013981"/>
+                <a:ext cx="602038" cy="369332"/>
+              </a:xfrm>
+              <a:prstGeom prst="rect">
+                <a:avLst/>
+              </a:prstGeom>
+              <a:noFill/>
+            </p:spPr>
+            <p:txBody>
+              <a:bodyPr wrap="square">
+                <a:spAutoFit/>
+              </a:bodyPr>
+              <a:lstStyle/>
+              <a:p>
+                <a:pPr/>
+                <a14:m>
+                  <m:oMathPara xmlns:m="http://schemas.openxmlformats.org/officeDocument/2006/math">
+                    <m:oMathParaPr>
+                      <m:jc m:val="centerGroup"/>
+                    </m:oMathParaPr>
+                    <m:oMath xmlns:m="http://schemas.openxmlformats.org/officeDocument/2006/math">
+                      <m:sSub>
+                        <m:sSubPr>
+                          <m:ctrlPr>
+                            <a:rPr lang="en-US" i="1" smtClean="0">
+                              <a:latin typeface="Cambria Math" panose="02040503050406030204" pitchFamily="18" charset="0"/>
+                            </a:rPr>
+                          </m:ctrlPr>
+                        </m:sSubPr>
+                        <m:e>
+                          <m:r>
+                            <a:rPr lang="en-US" b="0" i="1" smtClean="0">
+                              <a:latin typeface="Cambria Math" panose="02040503050406030204" pitchFamily="18" charset="0"/>
+                            </a:rPr>
+                            <m:t>𝑅</m:t>
+                          </m:r>
+                        </m:e>
+                        <m:sub>
+                          <m:r>
+                            <a:rPr lang="en-US" i="1">
+                              <a:latin typeface="Cambria Math" panose="02040503050406030204" pitchFamily="18" charset="0"/>
+                            </a:rPr>
+                            <m:t>𝑡</m:t>
+                          </m:r>
+                          <m:r>
+                            <a:rPr lang="en-US" b="0" i="1" smtClean="0">
+                              <a:latin typeface="Cambria Math" panose="02040503050406030204" pitchFamily="18" charset="0"/>
+                            </a:rPr>
+                            <m:t>+1</m:t>
+                          </m:r>
+                        </m:sub>
+                      </m:sSub>
+                    </m:oMath>
+                  </m:oMathPara>
+                </a14:m>
+                <a:endParaRPr lang="en-US" dirty="0"/>
+              </a:p>
+            </p:txBody>
+          </p:sp>
+        </mc:Choice>
+        <mc:Fallback xmlns="">
+          <p:sp>
+            <p:nvSpPr>
+              <p:cNvPr id="13" name="TextBox 12">
+                <a:extLst>
+                  <a:ext uri="{FF2B5EF4-FFF2-40B4-BE49-F238E27FC236}">
+                    <a16:creationId xmlns:a16="http://schemas.microsoft.com/office/drawing/2014/main" id="{AF84C7A8-3D3A-7BB1-3E84-0C6C6A718B86}"/>
+                  </a:ext>
+                </a:extLst>
+              </p:cNvPr>
+              <p:cNvSpPr txBox="1">
+                <a:spLocks noRot="1" noChangeAspect="1" noMove="1" noResize="1" noEditPoints="1" noAdjustHandles="1" noChangeArrowheads="1" noChangeShapeType="1" noTextEdit="1"/>
+              </p:cNvSpPr>
+              <p:nvPr/>
+            </p:nvSpPr>
+            <p:spPr>
+              <a:xfrm>
+                <a:off x="1698460" y="4013981"/>
+                <a:ext cx="602038" cy="369332"/>
+              </a:xfrm>
+              <a:prstGeom prst="rect">
+                <a:avLst/>
+              </a:prstGeom>
+              <a:blipFill>
+                <a:blip r:embed="rId8"/>
+                <a:stretch>
+                  <a:fillRect/>
+                </a:stretch>
+              </a:blipFill>
+            </p:spPr>
+            <p:txBody>
+              <a:bodyPr/>
+              <a:lstStyle/>
+              <a:p>
+                <a:r>
+                  <a:rPr lang="en-US">
+                    <a:noFill/>
+                  </a:rPr>
+                  <a:t> </a:t>
+                </a:r>
+              </a:p>
+            </p:txBody>
+          </p:sp>
+        </mc:Fallback>
+      </mc:AlternateContent>
+      <mc:AlternateContent xmlns:mc="http://schemas.openxmlformats.org/markup-compatibility/2006" xmlns:a14="http://schemas.microsoft.com/office/drawing/2010/main">
+        <mc:Choice Requires="a14">
+          <p:sp>
+            <p:nvSpPr>
+              <p:cNvPr id="14" name="TextBox 13">
+                <a:extLst>
+                  <a:ext uri="{FF2B5EF4-FFF2-40B4-BE49-F238E27FC236}">
+                    <a16:creationId xmlns:a16="http://schemas.microsoft.com/office/drawing/2014/main" id="{89506427-5DBB-46F6-7064-8C167FF27BD1}"/>
+                  </a:ext>
+                </a:extLst>
+              </p:cNvPr>
+              <p:cNvSpPr txBox="1"/>
+              <p:nvPr/>
+            </p:nvSpPr>
+            <p:spPr>
+              <a:xfrm>
+                <a:off x="5598300" y="4661302"/>
+                <a:ext cx="647933" cy="369332"/>
+              </a:xfrm>
+              <a:prstGeom prst="rect">
+                <a:avLst/>
+              </a:prstGeom>
+              <a:noFill/>
+            </p:spPr>
+            <p:txBody>
+              <a:bodyPr wrap="none" rtlCol="0">
+                <a:spAutoFit/>
+              </a:bodyPr>
+              <a:lstStyle/>
+              <a:p>
+                <a:pPr/>
+                <a14:m>
+                  <m:oMathPara xmlns:m="http://schemas.openxmlformats.org/officeDocument/2006/math">
+                    <m:oMathParaPr>
+                      <m:jc m:val="centerGroup"/>
+                    </m:oMathParaPr>
+                    <m:oMath xmlns:m="http://schemas.openxmlformats.org/officeDocument/2006/math">
+                      <m:r>
+                        <m:rPr>
+                          <m:nor/>
+                        </m:rPr>
+                        <a:rPr lang="en-US" b="0" i="0" smtClean="0">
+                          <a:latin typeface="Cambria Math" panose="02040503050406030204" pitchFamily="18" charset="0"/>
+                        </a:rPr>
+                        <m:t>max</m:t>
+                      </m:r>
+                    </m:oMath>
+                  </m:oMathPara>
+                </a14:m>
+                <a:endParaRPr lang="en-US" dirty="0"/>
+              </a:p>
+            </p:txBody>
+          </p:sp>
+        </mc:Choice>
+        <mc:Fallback xmlns="">
+          <p:sp>
+            <p:nvSpPr>
+              <p:cNvPr id="14" name="TextBox 13">
+                <a:extLst>
+                  <a:ext uri="{FF2B5EF4-FFF2-40B4-BE49-F238E27FC236}">
+                    <a16:creationId xmlns:a16="http://schemas.microsoft.com/office/drawing/2014/main" id="{89506427-5DBB-46F6-7064-8C167FF27BD1}"/>
+                  </a:ext>
+                </a:extLst>
+              </p:cNvPr>
+              <p:cNvSpPr txBox="1">
+                <a:spLocks noRot="1" noChangeAspect="1" noMove="1" noResize="1" noEditPoints="1" noAdjustHandles="1" noChangeArrowheads="1" noChangeShapeType="1" noTextEdit="1"/>
+              </p:cNvSpPr>
+              <p:nvPr/>
+            </p:nvSpPr>
+            <p:spPr>
+              <a:xfrm>
+                <a:off x="5598300" y="4661302"/>
+                <a:ext cx="647933" cy="369332"/>
+              </a:xfrm>
+              <a:prstGeom prst="rect">
+                <a:avLst/>
+              </a:prstGeom>
+              <a:blipFill>
+                <a:blip r:embed="rId9"/>
+                <a:stretch>
+                  <a:fillRect/>
+                </a:stretch>
+              </a:blipFill>
+            </p:spPr>
+            <p:txBody>
+              <a:bodyPr/>
+              <a:lstStyle/>
+              <a:p>
+                <a:r>
+                  <a:rPr lang="en-US">
+                    <a:noFill/>
+                  </a:rPr>
+                  <a:t> </a:t>
+                </a:r>
+              </a:p>
+            </p:txBody>
+          </p:sp>
+        </mc:Fallback>
+      </mc:AlternateContent>
+      <mc:AlternateContent xmlns:mc="http://schemas.openxmlformats.org/markup-compatibility/2006">
+        <mc:Choice xmlns:a14="http://schemas.microsoft.com/office/drawing/2010/main" Requires="a14">
+          <p:sp>
+            <p:nvSpPr>
+              <p:cNvPr id="15" name="TextBox 14">
+                <a:extLst>
+                  <a:ext uri="{FF2B5EF4-FFF2-40B4-BE49-F238E27FC236}">
+                    <a16:creationId xmlns:a16="http://schemas.microsoft.com/office/drawing/2014/main" id="{21540664-58DD-C85E-EB0B-3CF84B97E40F}"/>
+                  </a:ext>
+                </a:extLst>
+              </p:cNvPr>
+              <p:cNvSpPr txBox="1"/>
+              <p:nvPr/>
+            </p:nvSpPr>
+            <p:spPr>
+              <a:xfrm>
+                <a:off x="9403340" y="4661302"/>
+                <a:ext cx="502381" cy="369332"/>
+              </a:xfrm>
+              <a:prstGeom prst="rect">
+                <a:avLst/>
+              </a:prstGeom>
+              <a:noFill/>
+            </p:spPr>
+            <p:txBody>
+              <a:bodyPr wrap="none" rtlCol="0">
+                <a:spAutoFit/>
+              </a:bodyPr>
+              <a:lstStyle/>
+              <a:p>
+                <a:pPr/>
+                <a14:m>
+                  <m:oMathPara xmlns:m="http://schemas.openxmlformats.org/officeDocument/2006/math">
+                    <m:oMathParaPr>
+                      <m:jc m:val="centerGroup"/>
+                    </m:oMathParaPr>
+                    <m:oMath xmlns:m="http://schemas.openxmlformats.org/officeDocument/2006/math">
+                      <m:sSub>
+                        <m:sSubPr>
+                          <m:ctrlPr>
+                            <a:rPr lang="en-US" b="0" i="1" smtClean="0">
+                              <a:latin typeface="Cambria Math" panose="02040503050406030204" pitchFamily="18" charset="0"/>
+                              <a:ea typeface="Cambria Math" panose="02040503050406030204" pitchFamily="18" charset="0"/>
+                            </a:rPr>
+                          </m:ctrlPr>
+                        </m:sSubPr>
+                        <m:e>
+                          <m:r>
+                            <a:rPr lang="en-US" b="0" i="1" smtClean="0">
+                              <a:latin typeface="Cambria Math" panose="02040503050406030204" pitchFamily="18" charset="0"/>
+                              <a:ea typeface="Cambria Math" panose="02040503050406030204" pitchFamily="18" charset="0"/>
+                            </a:rPr>
+                            <m:t>𝔼</m:t>
+                          </m:r>
+                        </m:e>
+                        <m:sub>
+                          <m:r>
+                            <a:rPr lang="en-US" b="0" i="1" smtClean="0">
+                              <a:latin typeface="Cambria Math" panose="02040503050406030204" pitchFamily="18" charset="0"/>
+                              <a:ea typeface="Cambria Math" panose="02040503050406030204" pitchFamily="18" charset="0"/>
+                            </a:rPr>
+                            <m:t>𝜋</m:t>
+                          </m:r>
+                        </m:sub>
+                      </m:sSub>
+                    </m:oMath>
+                  </m:oMathPara>
+                </a14:m>
+                <a:endParaRPr lang="en-US" dirty="0"/>
+              </a:p>
+            </p:txBody>
+          </p:sp>
+        </mc:Choice>
+        <mc:Fallback>
+          <p:sp>
+            <p:nvSpPr>
+              <p:cNvPr id="15" name="TextBox 14">
+                <a:extLst>
+                  <a:ext uri="{FF2B5EF4-FFF2-40B4-BE49-F238E27FC236}">
+                    <a16:creationId xmlns:a16="http://schemas.microsoft.com/office/drawing/2014/main" id="{21540664-58DD-C85E-EB0B-3CF84B97E40F}"/>
+                  </a:ext>
+                </a:extLst>
+              </p:cNvPr>
+              <p:cNvSpPr txBox="1">
+                <a:spLocks noRot="1" noChangeAspect="1" noMove="1" noResize="1" noEditPoints="1" noAdjustHandles="1" noChangeArrowheads="1" noChangeShapeType="1" noTextEdit="1"/>
+              </p:cNvSpPr>
+              <p:nvPr/>
+            </p:nvSpPr>
+            <p:spPr>
+              <a:xfrm>
+                <a:off x="9403340" y="4661302"/>
+                <a:ext cx="502381" cy="369332"/>
+              </a:xfrm>
+              <a:prstGeom prst="rect">
+                <a:avLst/>
+              </a:prstGeom>
+              <a:blipFill>
+                <a:blip r:embed="rId10"/>
+                <a:stretch>
+                  <a:fillRect/>
+                </a:stretch>
+              </a:blipFill>
+            </p:spPr>
+            <p:txBody>
+              <a:bodyPr/>
+              <a:lstStyle/>
+              <a:p>
+                <a:r>
+                  <a:rPr lang="en-US">
+                    <a:noFill/>
+                  </a:rPr>
+                  <a:t> </a:t>
+                </a:r>
+              </a:p>
+            </p:txBody>
+          </p:sp>
+        </mc:Fallback>
+      </mc:AlternateContent>
+      <p:grpSp>
+        <p:nvGrpSpPr>
+          <p:cNvPr id="3" name="Group 2">
+            <a:extLst>
+              <a:ext uri="{FF2B5EF4-FFF2-40B4-BE49-F238E27FC236}">
+                <a16:creationId xmlns:a16="http://schemas.microsoft.com/office/drawing/2014/main" id="{DC8187D2-C651-211E-F36F-28F57A9AE11F}"/>
+              </a:ext>
+            </a:extLst>
+          </p:cNvPr>
+          <p:cNvGrpSpPr/>
+          <p:nvPr/>
+        </p:nvGrpSpPr>
+        <p:grpSpPr>
+          <a:xfrm>
+            <a:off x="2712656" y="1307163"/>
+            <a:ext cx="5965095" cy="1771647"/>
+            <a:chOff x="2637816" y="2846877"/>
+            <a:chExt cx="5965095" cy="1771647"/>
+          </a:xfrm>
+        </p:grpSpPr>
+        <p:grpSp>
+          <p:nvGrpSpPr>
+            <p:cNvPr id="4" name="Group 3">
+              <a:extLst>
+                <a:ext uri="{FF2B5EF4-FFF2-40B4-BE49-F238E27FC236}">
+                  <a16:creationId xmlns:a16="http://schemas.microsoft.com/office/drawing/2014/main" id="{E816A4BA-29C5-E498-E49B-2A5D1934C3AC}"/>
+                </a:ext>
+              </a:extLst>
+            </p:cNvPr>
+            <p:cNvGrpSpPr/>
+            <p:nvPr/>
+          </p:nvGrpSpPr>
+          <p:grpSpPr>
+            <a:xfrm>
+              <a:off x="2637816" y="2846877"/>
+              <a:ext cx="5965095" cy="1634769"/>
+              <a:chOff x="2373562" y="2582670"/>
+              <a:chExt cx="5965095" cy="1634769"/>
+            </a:xfrm>
+          </p:grpSpPr>
+          <p:pic>
+            <p:nvPicPr>
+              <p:cNvPr id="10" name="Picture 9">
+                <a:extLst>
+                  <a:ext uri="{FF2B5EF4-FFF2-40B4-BE49-F238E27FC236}">
+                    <a16:creationId xmlns:a16="http://schemas.microsoft.com/office/drawing/2014/main" id="{079CA762-1D81-E9C9-CDF2-B465A9EF93D5}"/>
+                  </a:ext>
+                </a:extLst>
+              </p:cNvPr>
+              <p:cNvPicPr>
+                <a:picLocks noChangeAspect="1"/>
+              </p:cNvPicPr>
+              <p:nvPr/>
+            </p:nvPicPr>
+            <p:blipFill>
+              <a:blip r:embed="rId11"/>
+              <a:stretch>
+                <a:fillRect/>
+              </a:stretch>
+            </p:blipFill>
+            <p:spPr>
+              <a:xfrm>
+                <a:off x="2373562" y="2955408"/>
+                <a:ext cx="5965095" cy="606381"/>
+              </a:xfrm>
+              <a:prstGeom prst="rect">
+                <a:avLst/>
+              </a:prstGeom>
+            </p:spPr>
+          </p:pic>
+          <p:sp>
+            <p:nvSpPr>
+              <p:cNvPr id="17" name="Arc 16">
+                <a:extLst>
+                  <a:ext uri="{FF2B5EF4-FFF2-40B4-BE49-F238E27FC236}">
+                    <a16:creationId xmlns:a16="http://schemas.microsoft.com/office/drawing/2014/main" id="{D8A8134D-2B73-F837-EAFB-A58F7D294338}"/>
+                  </a:ext>
+                </a:extLst>
+              </p:cNvPr>
+              <p:cNvSpPr/>
+              <p:nvPr/>
+            </p:nvSpPr>
+            <p:spPr>
+              <a:xfrm>
+                <a:off x="3744294" y="3074530"/>
+                <a:ext cx="1514911" cy="854643"/>
+              </a:xfrm>
+              <a:prstGeom prst="arc">
+                <a:avLst>
+                  <a:gd name="adj1" fmla="val 942545"/>
+                  <a:gd name="adj2" fmla="val 9972429"/>
+                </a:avLst>
+              </a:prstGeom>
+              <a:ln>
+                <a:headEnd type="none" w="med" len="med"/>
+                <a:tailEnd type="triangle" w="med" len="med"/>
+              </a:ln>
+            </p:spPr>
+            <p:style>
+              <a:lnRef idx="2">
+                <a:schemeClr val="accent1"/>
+              </a:lnRef>
+              <a:fillRef idx="0">
+                <a:schemeClr val="accent1"/>
+              </a:fillRef>
+              <a:effectRef idx="1">
+                <a:schemeClr val="accent1"/>
+              </a:effectRef>
+              <a:fontRef idx="minor">
+                <a:schemeClr val="tx1"/>
+              </a:fontRef>
+            </p:style>
+            <p:txBody>
+              <a:bodyPr rtlCol="0" anchor="ctr"/>
+              <a:lstStyle/>
+              <a:p>
+                <a:pPr algn="ctr"/>
+                <a:endParaRPr lang="en-US"/>
+              </a:p>
+            </p:txBody>
+          </p:sp>
+          <mc:AlternateContent xmlns:mc="http://schemas.openxmlformats.org/markup-compatibility/2006">
+            <mc:Choice xmlns:a14="http://schemas.microsoft.com/office/drawing/2010/main" Requires="a14">
+              <p:sp>
+                <p:nvSpPr>
+                  <p:cNvPr id="18" name="TextBox 17">
+                    <a:extLst>
+                      <a:ext uri="{FF2B5EF4-FFF2-40B4-BE49-F238E27FC236}">
+                        <a16:creationId xmlns:a16="http://schemas.microsoft.com/office/drawing/2014/main" id="{DB63FB16-329F-D55F-9114-898178CEA391}"/>
+                      </a:ext>
+                    </a:extLst>
+                  </p:cNvPr>
+                  <p:cNvSpPr txBox="1"/>
+                  <p:nvPr/>
+                </p:nvSpPr>
+                <p:spPr>
+                  <a:xfrm>
+                    <a:off x="3262007" y="3422428"/>
+                    <a:ext cx="1049672" cy="285206"/>
+                  </a:xfrm>
+                  <a:prstGeom prst="rect">
+                    <a:avLst/>
+                  </a:prstGeom>
+                  <a:noFill/>
+                </p:spPr>
+                <p:txBody>
+                  <a:bodyPr wrap="square">
+                    <a:spAutoFit/>
+                  </a:bodyPr>
+                  <a:lstStyle/>
+                  <a:p>
+                    <a:pPr/>
+                    <a14:m>
+                      <m:oMathPara xmlns:m="http://schemas.openxmlformats.org/officeDocument/2006/math">
+                        <m:oMathParaPr>
+                          <m:jc m:val="centerGroup"/>
+                        </m:oMathParaPr>
+                        <m:oMath xmlns:m="http://schemas.openxmlformats.org/officeDocument/2006/math">
+                          <m:r>
+                            <a:rPr lang="en-US" sz="1200" b="0" i="1" smtClean="0">
+                              <a:latin typeface="Cambria Math" panose="02040503050406030204" pitchFamily="18" charset="0"/>
+                            </a:rPr>
+                            <m:t>𝑄</m:t>
+                          </m:r>
+                          <m:r>
+                            <a:rPr lang="en-US" sz="1200" i="1" smtClean="0">
+                              <a:latin typeface="Cambria Math" panose="02040503050406030204" pitchFamily="18" charset="0"/>
+                            </a:rPr>
+                            <m:t>(</m:t>
+                          </m:r>
+                          <m:sSub>
+                            <m:sSubPr>
+                              <m:ctrlPr>
+                                <a:rPr lang="en-US" sz="1200" i="1">
+                                  <a:latin typeface="Cambria Math" panose="02040503050406030204" pitchFamily="18" charset="0"/>
+                                </a:rPr>
+                              </m:ctrlPr>
+                            </m:sSubPr>
+                            <m:e>
+                              <m:r>
+                                <a:rPr lang="en-US" sz="1200" i="1">
+                                  <a:latin typeface="Cambria Math" panose="02040503050406030204" pitchFamily="18" charset="0"/>
+                                </a:rPr>
+                                <m:t>𝑆</m:t>
+                              </m:r>
+                            </m:e>
+                            <m:sub>
+                              <m:r>
+                                <a:rPr lang="en-US" sz="1200" i="1">
+                                  <a:latin typeface="Cambria Math" panose="02040503050406030204" pitchFamily="18" charset="0"/>
+                                </a:rPr>
+                                <m:t>𝑡</m:t>
+                              </m:r>
+                            </m:sub>
+                          </m:sSub>
+                          <m:r>
+                            <a:rPr lang="en-US" sz="1200" b="0" i="1" smtClean="0">
+                              <a:latin typeface="Cambria Math" panose="02040503050406030204" pitchFamily="18" charset="0"/>
+                            </a:rPr>
+                            <m:t>,</m:t>
+                          </m:r>
+                          <m:sSub>
+                            <m:sSubPr>
+                              <m:ctrlPr>
+                                <a:rPr lang="en-US" sz="1200" b="0" i="1" smtClean="0">
+                                  <a:latin typeface="Cambria Math" panose="02040503050406030204" pitchFamily="18" charset="0"/>
+                                </a:rPr>
+                              </m:ctrlPr>
+                            </m:sSubPr>
+                            <m:e>
+                              <m:r>
+                                <a:rPr lang="en-US" sz="1200" b="0" i="1" smtClean="0">
+                                  <a:latin typeface="Cambria Math" panose="02040503050406030204" pitchFamily="18" charset="0"/>
+                                </a:rPr>
+                                <m:t>𝐴</m:t>
+                              </m:r>
+                            </m:e>
+                            <m:sub>
+                              <m:r>
+                                <a:rPr lang="en-US" sz="1200" b="0" i="1" smtClean="0">
+                                  <a:latin typeface="Cambria Math" panose="02040503050406030204" pitchFamily="18" charset="0"/>
+                                </a:rPr>
+                                <m:t>𝑡</m:t>
+                              </m:r>
+                            </m:sub>
+                          </m:sSub>
+                          <m:r>
+                            <a:rPr lang="en-US" sz="1200" i="1">
+                              <a:latin typeface="Cambria Math" panose="02040503050406030204" pitchFamily="18" charset="0"/>
+                            </a:rPr>
+                            <m:t>)</m:t>
+                          </m:r>
+                        </m:oMath>
+                      </m:oMathPara>
+                    </a14:m>
+                    <a:endParaRPr lang="en-US" sz="1200" dirty="0"/>
+                  </a:p>
+                </p:txBody>
+              </p:sp>
+            </mc:Choice>
+            <mc:Fallback>
+              <p:sp>
+                <p:nvSpPr>
+                  <p:cNvPr id="18" name="TextBox 17">
+                    <a:extLst>
+                      <a:ext uri="{FF2B5EF4-FFF2-40B4-BE49-F238E27FC236}">
+                        <a16:creationId xmlns:a16="http://schemas.microsoft.com/office/drawing/2014/main" id="{DB63FB16-329F-D55F-9114-898178CEA391}"/>
+                      </a:ext>
+                    </a:extLst>
+                  </p:cNvPr>
+                  <p:cNvSpPr txBox="1">
+                    <a:spLocks noRot="1" noChangeAspect="1" noMove="1" noResize="1" noEditPoints="1" noAdjustHandles="1" noChangeArrowheads="1" noChangeShapeType="1" noTextEdit="1"/>
+                  </p:cNvSpPr>
+                  <p:nvPr/>
+                </p:nvSpPr>
+                <p:spPr>
+                  <a:xfrm>
+                    <a:off x="3262007" y="3422428"/>
+                    <a:ext cx="1049672" cy="285206"/>
+                  </a:xfrm>
+                  <a:prstGeom prst="rect">
+                    <a:avLst/>
+                  </a:prstGeom>
+                  <a:blipFill>
+                    <a:blip r:embed="rId12"/>
+                    <a:stretch>
+                      <a:fillRect b="-4255"/>
+                    </a:stretch>
+                  </a:blipFill>
+                </p:spPr>
+                <p:txBody>
+                  <a:bodyPr/>
+                  <a:lstStyle/>
+                  <a:p>
+                    <a:r>
+                      <a:rPr lang="en-US">
+                        <a:noFill/>
+                      </a:rPr>
+                      <a:t> </a:t>
+                    </a:r>
+                  </a:p>
+                </p:txBody>
+              </p:sp>
+            </mc:Fallback>
+          </mc:AlternateContent>
+          <mc:AlternateContent xmlns:mc="http://schemas.openxmlformats.org/markup-compatibility/2006">
+            <mc:Choice xmlns:a14="http://schemas.microsoft.com/office/drawing/2010/main" Requires="a14">
+              <p:sp>
+                <p:nvSpPr>
+                  <p:cNvPr id="19" name="TextBox 18">
+                    <a:extLst>
+                      <a:ext uri="{FF2B5EF4-FFF2-40B4-BE49-F238E27FC236}">
+                        <a16:creationId xmlns:a16="http://schemas.microsoft.com/office/drawing/2014/main" id="{CCC48D9B-D98F-0C33-B10A-3DC1477DEDA2}"/>
+                      </a:ext>
+                    </a:extLst>
+                  </p:cNvPr>
+                  <p:cNvSpPr txBox="1"/>
+                  <p:nvPr/>
+                </p:nvSpPr>
+                <p:spPr>
+                  <a:xfrm>
+                    <a:off x="4614828" y="3421985"/>
+                    <a:ext cx="1049672" cy="276999"/>
+                  </a:xfrm>
+                  <a:prstGeom prst="rect">
+                    <a:avLst/>
+                  </a:prstGeom>
+                  <a:noFill/>
+                </p:spPr>
+                <p:txBody>
+                  <a:bodyPr wrap="square">
+                    <a:spAutoFit/>
+                  </a:bodyPr>
+                  <a:lstStyle/>
+                  <a:p>
+                    <a:pPr/>
+                    <a14:m>
+                      <m:oMathPara xmlns:m="http://schemas.openxmlformats.org/officeDocument/2006/math">
+                        <m:oMathParaPr>
+                          <m:jc m:val="centerGroup"/>
+                        </m:oMathParaPr>
+                        <m:oMath xmlns:m="http://schemas.openxmlformats.org/officeDocument/2006/math">
+                          <m:r>
+                            <a:rPr lang="en-US" sz="1200" b="0" i="1" smtClean="0">
+                              <a:latin typeface="Cambria Math" panose="02040503050406030204" pitchFamily="18" charset="0"/>
+                            </a:rPr>
+                            <m:t>𝑄</m:t>
+                          </m:r>
+                          <m:r>
+                            <a:rPr lang="en-US" sz="1200" i="1" smtClean="0">
+                              <a:latin typeface="Cambria Math" panose="02040503050406030204" pitchFamily="18" charset="0"/>
+                            </a:rPr>
+                            <m:t>(</m:t>
+                          </m:r>
+                          <m:sSub>
+                            <m:sSubPr>
+                              <m:ctrlPr>
+                                <a:rPr lang="en-US" sz="1200" i="1">
+                                  <a:latin typeface="Cambria Math" panose="02040503050406030204" pitchFamily="18" charset="0"/>
+                                </a:rPr>
+                              </m:ctrlPr>
+                            </m:sSubPr>
+                            <m:e>
+                              <m:r>
+                                <a:rPr lang="en-US" sz="1200" i="1">
+                                  <a:latin typeface="Cambria Math" panose="02040503050406030204" pitchFamily="18" charset="0"/>
+                                </a:rPr>
+                                <m:t>𝑆</m:t>
+                              </m:r>
+                            </m:e>
+                            <m:sub>
+                              <m:r>
+                                <a:rPr lang="en-US" sz="1200" i="1">
+                                  <a:latin typeface="Cambria Math" panose="02040503050406030204" pitchFamily="18" charset="0"/>
+                                </a:rPr>
+                                <m:t>𝑡</m:t>
+                              </m:r>
+                              <m:r>
+                                <a:rPr lang="en-US" sz="1200" i="1">
+                                  <a:latin typeface="Cambria Math" panose="02040503050406030204" pitchFamily="18" charset="0"/>
+                                </a:rPr>
+                                <m:t>+1</m:t>
+                              </m:r>
+                            </m:sub>
+                          </m:sSub>
+                          <m:r>
+                            <a:rPr lang="en-US" sz="1200" b="0" i="1" smtClean="0">
+                              <a:latin typeface="Cambria Math" panose="02040503050406030204" pitchFamily="18" charset="0"/>
+                            </a:rPr>
+                            <m:t>,</m:t>
+                          </m:r>
+                          <m:sSub>
+                            <m:sSubPr>
+                              <m:ctrlPr>
+                                <a:rPr lang="en-US" sz="1200" b="0" i="1" smtClean="0">
+                                  <a:latin typeface="Cambria Math" panose="02040503050406030204" pitchFamily="18" charset="0"/>
+                                </a:rPr>
+                              </m:ctrlPr>
+                            </m:sSubPr>
+                            <m:e>
+                              <m:r>
+                                <a:rPr lang="en-US" sz="1200" b="0" i="1" smtClean="0">
+                                  <a:latin typeface="Cambria Math" panose="02040503050406030204" pitchFamily="18" charset="0"/>
+                                </a:rPr>
+                                <m:t>𝐴</m:t>
+                              </m:r>
+                            </m:e>
+                            <m:sub>
+                              <m:r>
+                                <a:rPr lang="en-US" sz="1200" b="0" i="1" smtClean="0">
+                                  <a:latin typeface="Cambria Math" panose="02040503050406030204" pitchFamily="18" charset="0"/>
+                                </a:rPr>
+                                <m:t>𝑡</m:t>
+                              </m:r>
+                              <m:r>
+                                <a:rPr lang="en-US" sz="1200" b="0" i="1" smtClean="0">
+                                  <a:latin typeface="Cambria Math" panose="02040503050406030204" pitchFamily="18" charset="0"/>
+                                </a:rPr>
+                                <m:t>+1</m:t>
+                              </m:r>
+                            </m:sub>
+                          </m:sSub>
+                          <m:r>
+                            <a:rPr lang="en-US" sz="1200" i="1">
+                              <a:latin typeface="Cambria Math" panose="02040503050406030204" pitchFamily="18" charset="0"/>
+                            </a:rPr>
+                            <m:t>)</m:t>
+                          </m:r>
+                        </m:oMath>
+                      </m:oMathPara>
+                    </a14:m>
+                    <a:endParaRPr lang="en-US" sz="1200" dirty="0"/>
+                  </a:p>
+                </p:txBody>
+              </p:sp>
+            </mc:Choice>
+            <mc:Fallback>
+              <p:sp>
+                <p:nvSpPr>
+                  <p:cNvPr id="19" name="TextBox 18">
+                    <a:extLst>
+                      <a:ext uri="{FF2B5EF4-FFF2-40B4-BE49-F238E27FC236}">
+                        <a16:creationId xmlns:a16="http://schemas.microsoft.com/office/drawing/2014/main" id="{CCC48D9B-D98F-0C33-B10A-3DC1477DEDA2}"/>
+                      </a:ext>
+                    </a:extLst>
+                  </p:cNvPr>
+                  <p:cNvSpPr txBox="1">
+                    <a:spLocks noRot="1" noChangeAspect="1" noMove="1" noResize="1" noEditPoints="1" noAdjustHandles="1" noChangeArrowheads="1" noChangeShapeType="1" noTextEdit="1"/>
+                  </p:cNvSpPr>
+                  <p:nvPr/>
+                </p:nvSpPr>
+                <p:spPr>
+                  <a:xfrm>
+                    <a:off x="4614828" y="3421985"/>
+                    <a:ext cx="1049672" cy="276999"/>
+                  </a:xfrm>
+                  <a:prstGeom prst="rect">
+                    <a:avLst/>
+                  </a:prstGeom>
+                  <a:blipFill>
+                    <a:blip r:embed="rId13"/>
+                    <a:stretch>
+                      <a:fillRect b="-6522"/>
+                    </a:stretch>
+                  </a:blipFill>
+                </p:spPr>
+                <p:txBody>
+                  <a:bodyPr/>
+                  <a:lstStyle/>
+                  <a:p>
+                    <a:r>
+                      <a:rPr lang="en-US">
+                        <a:noFill/>
+                      </a:rPr>
+                      <a:t> </a:t>
+                    </a:r>
+                  </a:p>
+                </p:txBody>
+              </p:sp>
+            </mc:Fallback>
+          </mc:AlternateContent>
+          <p:sp>
+            <p:nvSpPr>
+              <p:cNvPr id="20" name="Arc 19">
+                <a:extLst>
+                  <a:ext uri="{FF2B5EF4-FFF2-40B4-BE49-F238E27FC236}">
+                    <a16:creationId xmlns:a16="http://schemas.microsoft.com/office/drawing/2014/main" id="{EB6D555F-71D5-466F-AA26-1C0B46F3DF17}"/>
+                  </a:ext>
+                </a:extLst>
+              </p:cNvPr>
+              <p:cNvSpPr/>
+              <p:nvPr/>
+            </p:nvSpPr>
+            <p:spPr>
+              <a:xfrm>
+                <a:off x="3797229" y="2582670"/>
+                <a:ext cx="464096" cy="1177771"/>
+              </a:xfrm>
+              <a:prstGeom prst="arc">
+                <a:avLst>
+                  <a:gd name="adj1" fmla="val 535615"/>
+                  <a:gd name="adj2" fmla="val 6095713"/>
+                </a:avLst>
+              </a:prstGeom>
+              <a:ln>
+                <a:headEnd type="none" w="med" len="med"/>
+                <a:tailEnd type="triangle" w="med" len="med"/>
+              </a:ln>
+            </p:spPr>
+            <p:style>
+              <a:lnRef idx="2">
+                <a:schemeClr val="accent1"/>
+              </a:lnRef>
+              <a:fillRef idx="0">
+                <a:schemeClr val="accent1"/>
+              </a:fillRef>
+              <a:effectRef idx="1">
+                <a:schemeClr val="accent1"/>
+              </a:effectRef>
+              <a:fontRef idx="minor">
+                <a:schemeClr val="tx1"/>
+              </a:fontRef>
+            </p:style>
+            <p:txBody>
+              <a:bodyPr rtlCol="0" anchor="ctr"/>
+              <a:lstStyle/>
+              <a:p>
+                <a:pPr algn="ctr"/>
+                <a:endParaRPr lang="en-US"/>
+              </a:p>
+            </p:txBody>
+          </p:sp>
+          <p:sp>
+            <p:nvSpPr>
+              <p:cNvPr id="21" name="TextBox 20">
+                <a:extLst>
+                  <a:ext uri="{FF2B5EF4-FFF2-40B4-BE49-F238E27FC236}">
+                    <a16:creationId xmlns:a16="http://schemas.microsoft.com/office/drawing/2014/main" id="{DB447D22-5746-B9E6-4B7F-D58201646AB7}"/>
+                  </a:ext>
+                </a:extLst>
+              </p:cNvPr>
+              <p:cNvSpPr txBox="1"/>
+              <p:nvPr/>
+            </p:nvSpPr>
+            <p:spPr>
+              <a:xfrm>
+                <a:off x="4229624" y="3955829"/>
+                <a:ext cx="725648" cy="261610"/>
+              </a:xfrm>
+              <a:prstGeom prst="rect">
+                <a:avLst/>
+              </a:prstGeom>
+              <a:noFill/>
+            </p:spPr>
+            <p:txBody>
+              <a:bodyPr wrap="square" rtlCol="0">
+                <a:spAutoFit/>
+              </a:bodyPr>
+              <a:lstStyle/>
+              <a:p>
+                <a:pPr algn="ctr"/>
+                <a:r>
+                  <a:rPr lang="en-US" sz="1100" dirty="0">
+                    <a:solidFill>
+                      <a:schemeClr val="tx2">
+                        <a:lumMod val="90000"/>
+                        <a:lumOff val="10000"/>
+                      </a:schemeClr>
+                    </a:solidFill>
+                  </a:rPr>
+                  <a:t>update</a:t>
+                </a:r>
+              </a:p>
+            </p:txBody>
+          </p:sp>
+          <p:sp>
+            <p:nvSpPr>
+              <p:cNvPr id="22" name="Right Brace 21">
+                <a:extLst>
+                  <a:ext uri="{FF2B5EF4-FFF2-40B4-BE49-F238E27FC236}">
+                    <a16:creationId xmlns:a16="http://schemas.microsoft.com/office/drawing/2014/main" id="{E25CDC5A-37CC-002F-E578-D71B185F9446}"/>
+                  </a:ext>
+                </a:extLst>
+              </p:cNvPr>
+              <p:cNvSpPr/>
+              <p:nvPr/>
+            </p:nvSpPr>
+            <p:spPr>
+              <a:xfrm rot="16200000">
+                <a:off x="4138402" y="2107503"/>
+                <a:ext cx="202889" cy="1731162"/>
+              </a:xfrm>
+              <a:prstGeom prst="rightBrace">
+                <a:avLst/>
+              </a:prstGeom>
+            </p:spPr>
+            <p:style>
+              <a:lnRef idx="2">
+                <a:schemeClr val="accent1"/>
+              </a:lnRef>
+              <a:fillRef idx="0">
+                <a:schemeClr val="accent1"/>
+              </a:fillRef>
+              <a:effectRef idx="1">
+                <a:schemeClr val="accent1"/>
+              </a:effectRef>
+              <a:fontRef idx="minor">
+                <a:schemeClr val="tx1"/>
+              </a:fontRef>
+            </p:style>
+            <p:txBody>
+              <a:bodyPr rtlCol="0" anchor="ctr"/>
+              <a:lstStyle/>
+              <a:p>
+                <a:pPr algn="ctr"/>
+                <a:endParaRPr lang="en-US"/>
+              </a:p>
+            </p:txBody>
+          </p:sp>
+          <p:sp>
+            <p:nvSpPr>
+              <p:cNvPr id="23" name="TextBox 22">
+                <a:extLst>
+                  <a:ext uri="{FF2B5EF4-FFF2-40B4-BE49-F238E27FC236}">
+                    <a16:creationId xmlns:a16="http://schemas.microsoft.com/office/drawing/2014/main" id="{77225B51-8649-F146-DE31-A737A77E9A34}"/>
+                  </a:ext>
+                </a:extLst>
+              </p:cNvPr>
+              <p:cNvSpPr txBox="1"/>
+              <p:nvPr/>
+            </p:nvSpPr>
+            <p:spPr>
+              <a:xfrm>
+                <a:off x="3877022" y="2638971"/>
+                <a:ext cx="725648" cy="261610"/>
+              </a:xfrm>
+              <a:prstGeom prst="rect">
+                <a:avLst/>
+              </a:prstGeom>
+              <a:noFill/>
+            </p:spPr>
+            <p:txBody>
+              <a:bodyPr wrap="square" rtlCol="0">
+                <a:spAutoFit/>
+              </a:bodyPr>
+              <a:lstStyle/>
+              <a:p>
+                <a:pPr algn="ctr"/>
+                <a:r>
+                  <a:rPr lang="en-US" sz="1100" dirty="0">
+                    <a:solidFill>
+                      <a:schemeClr val="tx2">
+                        <a:lumMod val="90000"/>
+                        <a:lumOff val="10000"/>
+                      </a:schemeClr>
+                    </a:solidFill>
+                  </a:rPr>
+                  <a:t>1-step</a:t>
+                </a:r>
+              </a:p>
+            </p:txBody>
+          </p:sp>
+        </p:grpSp>
+        <mc:AlternateContent xmlns:mc="http://schemas.openxmlformats.org/markup-compatibility/2006">
+          <mc:Choice xmlns:a14="http://schemas.microsoft.com/office/drawing/2010/main" Requires="a14">
+            <p:sp>
+              <p:nvSpPr>
+                <p:cNvPr id="6" name="Speech Bubble: Rectangle with Corners Rounded 5">
+                  <a:extLst>
+                    <a:ext uri="{FF2B5EF4-FFF2-40B4-BE49-F238E27FC236}">
+                      <a16:creationId xmlns:a16="http://schemas.microsoft.com/office/drawing/2014/main" id="{AE3E163A-3FD0-7FFA-C2DB-4366ECEC4DFF}"/>
+                    </a:ext>
+                  </a:extLst>
+                </p:cNvPr>
+                <p:cNvSpPr/>
+                <p:nvPr/>
+              </p:nvSpPr>
+              <p:spPr>
+                <a:xfrm>
+                  <a:off x="6021160" y="4193325"/>
+                  <a:ext cx="1781788" cy="425199"/>
+                </a:xfrm>
+                <a:prstGeom prst="wedgeRoundRectCallout">
+                  <a:avLst>
+                    <a:gd name="adj1" fmla="val -75291"/>
+                    <a:gd name="adj2" fmla="val -108207"/>
+                    <a:gd name="adj3" fmla="val 16667"/>
+                  </a:avLst>
+                </a:prstGeom>
+              </p:spPr>
+              <p:style>
+                <a:lnRef idx="2">
+                  <a:schemeClr val="accent1">
+                    <a:shade val="15000"/>
+                  </a:schemeClr>
+                </a:lnRef>
+                <a:fillRef idx="1">
+                  <a:schemeClr val="accent1"/>
+                </a:fillRef>
+                <a:effectRef idx="0">
+                  <a:schemeClr val="accent1"/>
+                </a:effectRef>
+                <a:fontRef idx="minor">
+                  <a:schemeClr val="lt1"/>
+                </a:fontRef>
+              </p:style>
+              <p:txBody>
+                <a:bodyPr rtlCol="0" anchor="ctr"/>
+                <a:lstStyle/>
+                <a:p>
+                  <a:pPr algn="ctr"/>
+                  <a:r>
+                    <a:rPr lang="en-US" sz="1200" dirty="0"/>
+                    <a:t>Used to bootstrap the remaining return </a:t>
+                  </a:r>
+                  <a14:m>
+                    <m:oMath xmlns:m="http://schemas.openxmlformats.org/officeDocument/2006/math">
+                      <m:sSub>
+                        <m:sSubPr>
+                          <m:ctrlPr>
+                            <a:rPr lang="en-US" sz="1200" b="0" i="1" smtClean="0">
+                              <a:latin typeface="Cambria Math" panose="02040503050406030204" pitchFamily="18" charset="0"/>
+                            </a:rPr>
+                          </m:ctrlPr>
+                        </m:sSubPr>
+                        <m:e>
+                          <m:r>
+                            <a:rPr lang="en-US" sz="1200" b="0" i="1" smtClean="0">
+                              <a:latin typeface="Cambria Math" panose="02040503050406030204" pitchFamily="18" charset="0"/>
+                            </a:rPr>
+                            <m:t>𝐺</m:t>
+                          </m:r>
+                        </m:e>
+                        <m:sub>
+                          <m:r>
+                            <a:rPr lang="en-US" sz="1200" b="0" i="1" smtClean="0">
+                              <a:latin typeface="Cambria Math" panose="02040503050406030204" pitchFamily="18" charset="0"/>
+                            </a:rPr>
+                            <m:t>𝑡</m:t>
+                          </m:r>
+                          <m:r>
+                            <a:rPr lang="en-US" sz="1200" b="0" i="1" smtClean="0">
+                              <a:latin typeface="Cambria Math" panose="02040503050406030204" pitchFamily="18" charset="0"/>
+                            </a:rPr>
+                            <m:t>+1</m:t>
+                          </m:r>
+                        </m:sub>
+                      </m:sSub>
+                    </m:oMath>
+                  </a14:m>
+                  <a:endParaRPr lang="en-US" sz="1200" dirty="0"/>
+                </a:p>
+              </p:txBody>
+            </p:sp>
+          </mc:Choice>
+          <mc:Fallback>
+            <p:sp>
+              <p:nvSpPr>
+                <p:cNvPr id="6" name="Speech Bubble: Rectangle with Corners Rounded 5">
+                  <a:extLst>
+                    <a:ext uri="{FF2B5EF4-FFF2-40B4-BE49-F238E27FC236}">
+                      <a16:creationId xmlns:a16="http://schemas.microsoft.com/office/drawing/2014/main" id="{AE3E163A-3FD0-7FFA-C2DB-4366ECEC4DFF}"/>
+                    </a:ext>
+                  </a:extLst>
+                </p:cNvPr>
+                <p:cNvSpPr>
+                  <a:spLocks noRot="1" noChangeAspect="1" noMove="1" noResize="1" noEditPoints="1" noAdjustHandles="1" noChangeArrowheads="1" noChangeShapeType="1" noTextEdit="1"/>
+                </p:cNvSpPr>
+                <p:nvPr/>
+              </p:nvSpPr>
+              <p:spPr>
+                <a:xfrm>
+                  <a:off x="6021160" y="4193325"/>
+                  <a:ext cx="1781788" cy="425199"/>
+                </a:xfrm>
+                <a:prstGeom prst="wedgeRoundRectCallout">
+                  <a:avLst>
+                    <a:gd name="adj1" fmla="val -75291"/>
+                    <a:gd name="adj2" fmla="val -108207"/>
+                    <a:gd name="adj3" fmla="val 16667"/>
+                  </a:avLst>
+                </a:prstGeom>
+                <a:blipFill>
+                  <a:blip r:embed="rId14"/>
+                  <a:stretch>
+                    <a:fillRect b="-7692"/>
+                  </a:stretch>
+                </a:blipFill>
+              </p:spPr>
+              <p:txBody>
+                <a:bodyPr/>
+                <a:lstStyle/>
+                <a:p>
+                  <a:r>
+                    <a:rPr lang="en-US">
+                      <a:noFill/>
+                    </a:rPr>
+                    <a:t> </a:t>
+                  </a:r>
+                </a:p>
+              </p:txBody>
+            </p:sp>
+          </mc:Fallback>
+        </mc:AlternateContent>
+      </p:grpSp>
+      <mc:AlternateContent xmlns:mc="http://schemas.openxmlformats.org/markup-compatibility/2006">
+        <mc:Choice xmlns:a14="http://schemas.microsoft.com/office/drawing/2010/main" Requires="a14">
+          <p:sp>
+            <p:nvSpPr>
+              <p:cNvPr id="24" name="TextBox 23">
+                <a:extLst>
+                  <a:ext uri="{FF2B5EF4-FFF2-40B4-BE49-F238E27FC236}">
+                    <a16:creationId xmlns:a16="http://schemas.microsoft.com/office/drawing/2014/main" id="{717A05C8-9D4E-0A8E-804D-7A3D0FA404D5}"/>
+                  </a:ext>
+                </a:extLst>
+              </p:cNvPr>
+              <p:cNvSpPr txBox="1"/>
+              <p:nvPr/>
+            </p:nvSpPr>
+            <p:spPr>
+              <a:xfrm>
+                <a:off x="1438370" y="3633146"/>
+                <a:ext cx="1049672" cy="285206"/>
+              </a:xfrm>
+              <a:prstGeom prst="rect">
+                <a:avLst/>
+              </a:prstGeom>
+              <a:noFill/>
+            </p:spPr>
+            <p:txBody>
+              <a:bodyPr wrap="square">
+                <a:spAutoFit/>
+              </a:bodyPr>
+              <a:lstStyle/>
+              <a:p>
+                <a:pPr/>
+                <a14:m>
+                  <m:oMathPara xmlns:m="http://schemas.openxmlformats.org/officeDocument/2006/math">
+                    <m:oMathParaPr>
+                      <m:jc m:val="centerGroup"/>
+                    </m:oMathParaPr>
+                    <m:oMath xmlns:m="http://schemas.openxmlformats.org/officeDocument/2006/math">
+                      <m:r>
+                        <a:rPr lang="en-US" sz="1200" b="0" i="1" smtClean="0">
+                          <a:latin typeface="Cambria Math" panose="02040503050406030204" pitchFamily="18" charset="0"/>
+                        </a:rPr>
+                        <m:t>𝑄</m:t>
+                      </m:r>
+                      <m:r>
+                        <a:rPr lang="en-US" sz="1200" i="1" smtClean="0">
+                          <a:latin typeface="Cambria Math" panose="02040503050406030204" pitchFamily="18" charset="0"/>
+                        </a:rPr>
+                        <m:t>(</m:t>
+                      </m:r>
+                      <m:sSub>
+                        <m:sSubPr>
+                          <m:ctrlPr>
+                            <a:rPr lang="en-US" sz="1200" i="1">
+                              <a:latin typeface="Cambria Math" panose="02040503050406030204" pitchFamily="18" charset="0"/>
+                            </a:rPr>
+                          </m:ctrlPr>
+                        </m:sSubPr>
+                        <m:e>
+                          <m:r>
+                            <a:rPr lang="en-US" sz="1200" i="1">
+                              <a:latin typeface="Cambria Math" panose="02040503050406030204" pitchFamily="18" charset="0"/>
+                            </a:rPr>
+                            <m:t>𝑆</m:t>
+                          </m:r>
+                        </m:e>
+                        <m:sub>
+                          <m:r>
+                            <a:rPr lang="en-US" sz="1200" i="1">
+                              <a:latin typeface="Cambria Math" panose="02040503050406030204" pitchFamily="18" charset="0"/>
+                            </a:rPr>
+                            <m:t>𝑡</m:t>
+                          </m:r>
+                        </m:sub>
+                      </m:sSub>
+                      <m:r>
+                        <a:rPr lang="en-US" sz="1200" b="0" i="1" smtClean="0">
+                          <a:latin typeface="Cambria Math" panose="02040503050406030204" pitchFamily="18" charset="0"/>
+                        </a:rPr>
+                        <m:t>,</m:t>
+                      </m:r>
+                      <m:sSub>
+                        <m:sSubPr>
+                          <m:ctrlPr>
+                            <a:rPr lang="en-US" sz="1200" b="0" i="1" smtClean="0">
+                              <a:latin typeface="Cambria Math" panose="02040503050406030204" pitchFamily="18" charset="0"/>
+                            </a:rPr>
+                          </m:ctrlPr>
+                        </m:sSubPr>
+                        <m:e>
+                          <m:r>
+                            <a:rPr lang="en-US" sz="1200" b="0" i="1" smtClean="0">
+                              <a:latin typeface="Cambria Math" panose="02040503050406030204" pitchFamily="18" charset="0"/>
+                            </a:rPr>
+                            <m:t>𝐴</m:t>
+                          </m:r>
+                        </m:e>
+                        <m:sub>
+                          <m:r>
+                            <a:rPr lang="en-US" sz="1200" b="0" i="1" smtClean="0">
+                              <a:latin typeface="Cambria Math" panose="02040503050406030204" pitchFamily="18" charset="0"/>
+                            </a:rPr>
+                            <m:t>𝑡</m:t>
+                          </m:r>
+                        </m:sub>
+                      </m:sSub>
+                      <m:r>
+                        <a:rPr lang="en-US" sz="1200" i="1">
+                          <a:latin typeface="Cambria Math" panose="02040503050406030204" pitchFamily="18" charset="0"/>
+                        </a:rPr>
+                        <m:t>)</m:t>
+                      </m:r>
+                    </m:oMath>
+                  </m:oMathPara>
+                </a14:m>
+                <a:endParaRPr lang="en-US" sz="1200" dirty="0"/>
+              </a:p>
+            </p:txBody>
+          </p:sp>
+        </mc:Choice>
+        <mc:Fallback>
+          <p:sp>
+            <p:nvSpPr>
+              <p:cNvPr id="24" name="TextBox 23">
+                <a:extLst>
+                  <a:ext uri="{FF2B5EF4-FFF2-40B4-BE49-F238E27FC236}">
+                    <a16:creationId xmlns:a16="http://schemas.microsoft.com/office/drawing/2014/main" id="{717A05C8-9D4E-0A8E-804D-7A3D0FA404D5}"/>
+                  </a:ext>
+                </a:extLst>
+              </p:cNvPr>
+              <p:cNvSpPr txBox="1">
+                <a:spLocks noRot="1" noChangeAspect="1" noMove="1" noResize="1" noEditPoints="1" noAdjustHandles="1" noChangeArrowheads="1" noChangeShapeType="1" noTextEdit="1"/>
+              </p:cNvSpPr>
+              <p:nvPr/>
+            </p:nvSpPr>
+            <p:spPr>
+              <a:xfrm>
+                <a:off x="1438370" y="3633146"/>
+                <a:ext cx="1049672" cy="285206"/>
+              </a:xfrm>
+              <a:prstGeom prst="rect">
+                <a:avLst/>
+              </a:prstGeom>
+              <a:blipFill>
+                <a:blip r:embed="rId12"/>
+                <a:stretch>
+                  <a:fillRect b="-4255"/>
+                </a:stretch>
+              </a:blipFill>
+            </p:spPr>
+            <p:txBody>
+              <a:bodyPr/>
+              <a:lstStyle/>
+              <a:p>
+                <a:r>
+                  <a:rPr lang="en-US">
+                    <a:noFill/>
+                  </a:rPr>
+                  <a:t> </a:t>
+                </a:r>
+              </a:p>
+            </p:txBody>
+          </p:sp>
+        </mc:Fallback>
+      </mc:AlternateContent>
+      <mc:AlternateContent xmlns:mc="http://schemas.openxmlformats.org/markup-compatibility/2006">
+        <mc:Choice xmlns:a14="http://schemas.microsoft.com/office/drawing/2010/main" Requires="a14">
+          <p:sp>
+            <p:nvSpPr>
+              <p:cNvPr id="25" name="TextBox 24">
+                <a:extLst>
+                  <a:ext uri="{FF2B5EF4-FFF2-40B4-BE49-F238E27FC236}">
+                    <a16:creationId xmlns:a16="http://schemas.microsoft.com/office/drawing/2014/main" id="{BEED65E4-42A0-CD95-0366-21CE381124C2}"/>
+                  </a:ext>
+                </a:extLst>
+              </p:cNvPr>
+              <p:cNvSpPr txBox="1"/>
+              <p:nvPr/>
+            </p:nvSpPr>
+            <p:spPr>
+              <a:xfrm>
+                <a:off x="1203764" y="5004043"/>
+                <a:ext cx="1049672" cy="276999"/>
+              </a:xfrm>
+              <a:prstGeom prst="rect">
+                <a:avLst/>
+              </a:prstGeom>
+              <a:noFill/>
+            </p:spPr>
+            <p:txBody>
+              <a:bodyPr wrap="square">
+                <a:spAutoFit/>
+              </a:bodyPr>
+              <a:lstStyle/>
+              <a:p>
+                <a:pPr/>
+                <a14:m>
+                  <m:oMathPara xmlns:m="http://schemas.openxmlformats.org/officeDocument/2006/math">
+                    <m:oMathParaPr>
+                      <m:jc m:val="centerGroup"/>
+                    </m:oMathParaPr>
+                    <m:oMath xmlns:m="http://schemas.openxmlformats.org/officeDocument/2006/math">
+                      <m:r>
+                        <a:rPr lang="en-US" sz="1200" b="0" i="1" smtClean="0">
+                          <a:latin typeface="Cambria Math" panose="02040503050406030204" pitchFamily="18" charset="0"/>
+                        </a:rPr>
+                        <m:t>𝑄</m:t>
+                      </m:r>
+                      <m:r>
+                        <a:rPr lang="en-US" sz="1200" i="1" smtClean="0">
+                          <a:latin typeface="Cambria Math" panose="02040503050406030204" pitchFamily="18" charset="0"/>
+                        </a:rPr>
+                        <m:t>(</m:t>
+                      </m:r>
+                      <m:sSub>
+                        <m:sSubPr>
+                          <m:ctrlPr>
+                            <a:rPr lang="en-US" sz="1200" i="1">
+                              <a:latin typeface="Cambria Math" panose="02040503050406030204" pitchFamily="18" charset="0"/>
+                            </a:rPr>
+                          </m:ctrlPr>
+                        </m:sSubPr>
+                        <m:e>
+                          <m:r>
+                            <a:rPr lang="en-US" sz="1200" i="1">
+                              <a:latin typeface="Cambria Math" panose="02040503050406030204" pitchFamily="18" charset="0"/>
+                            </a:rPr>
+                            <m:t>𝑆</m:t>
+                          </m:r>
+                        </m:e>
+                        <m:sub>
+                          <m:r>
+                            <a:rPr lang="en-US" sz="1200" i="1">
+                              <a:latin typeface="Cambria Math" panose="02040503050406030204" pitchFamily="18" charset="0"/>
+                            </a:rPr>
+                            <m:t>𝑡</m:t>
+                          </m:r>
+                          <m:r>
+                            <a:rPr lang="en-US" sz="1200" i="1">
+                              <a:latin typeface="Cambria Math" panose="02040503050406030204" pitchFamily="18" charset="0"/>
+                            </a:rPr>
+                            <m:t>+1</m:t>
+                          </m:r>
+                        </m:sub>
+                      </m:sSub>
+                      <m:r>
+                        <a:rPr lang="en-US" sz="1200" b="0" i="1" smtClean="0">
+                          <a:latin typeface="Cambria Math" panose="02040503050406030204" pitchFamily="18" charset="0"/>
+                        </a:rPr>
+                        <m:t>,</m:t>
+                      </m:r>
+                      <m:sSub>
+                        <m:sSubPr>
+                          <m:ctrlPr>
+                            <a:rPr lang="en-US" sz="1200" b="0" i="1" smtClean="0">
+                              <a:latin typeface="Cambria Math" panose="02040503050406030204" pitchFamily="18" charset="0"/>
+                            </a:rPr>
+                          </m:ctrlPr>
+                        </m:sSubPr>
+                        <m:e>
+                          <m:r>
+                            <a:rPr lang="en-US" sz="1200" b="0" i="1" smtClean="0">
+                              <a:latin typeface="Cambria Math" panose="02040503050406030204" pitchFamily="18" charset="0"/>
+                            </a:rPr>
+                            <m:t>𝐴</m:t>
+                          </m:r>
+                        </m:e>
+                        <m:sub>
+                          <m:r>
+                            <a:rPr lang="en-US" sz="1200" b="0" i="1" smtClean="0">
+                              <a:latin typeface="Cambria Math" panose="02040503050406030204" pitchFamily="18" charset="0"/>
+                            </a:rPr>
+                            <m:t>𝑡</m:t>
+                          </m:r>
+                          <m:r>
+                            <a:rPr lang="en-US" sz="1200" b="0" i="1" smtClean="0">
+                              <a:latin typeface="Cambria Math" panose="02040503050406030204" pitchFamily="18" charset="0"/>
+                            </a:rPr>
+                            <m:t>+1</m:t>
+                          </m:r>
+                        </m:sub>
+                      </m:sSub>
+                      <m:r>
+                        <a:rPr lang="en-US" sz="1200" i="1">
+                          <a:latin typeface="Cambria Math" panose="02040503050406030204" pitchFamily="18" charset="0"/>
+                        </a:rPr>
+                        <m:t>)</m:t>
+                      </m:r>
+                    </m:oMath>
+                  </m:oMathPara>
+                </a14:m>
+                <a:endParaRPr lang="en-US" sz="1200" dirty="0"/>
+              </a:p>
+            </p:txBody>
+          </p:sp>
+        </mc:Choice>
+        <mc:Fallback>
+          <p:sp>
+            <p:nvSpPr>
+              <p:cNvPr id="25" name="TextBox 24">
+                <a:extLst>
+                  <a:ext uri="{FF2B5EF4-FFF2-40B4-BE49-F238E27FC236}">
+                    <a16:creationId xmlns:a16="http://schemas.microsoft.com/office/drawing/2014/main" id="{BEED65E4-42A0-CD95-0366-21CE381124C2}"/>
+                  </a:ext>
+                </a:extLst>
+              </p:cNvPr>
+              <p:cNvSpPr txBox="1">
+                <a:spLocks noRot="1" noChangeAspect="1" noMove="1" noResize="1" noEditPoints="1" noAdjustHandles="1" noChangeArrowheads="1" noChangeShapeType="1" noTextEdit="1"/>
+              </p:cNvSpPr>
+              <p:nvPr/>
+            </p:nvSpPr>
+            <p:spPr>
+              <a:xfrm>
+                <a:off x="1203764" y="5004043"/>
+                <a:ext cx="1049672" cy="276999"/>
+              </a:xfrm>
+              <a:prstGeom prst="rect">
+                <a:avLst/>
+              </a:prstGeom>
+              <a:blipFill>
+                <a:blip r:embed="rId15"/>
+                <a:stretch>
+                  <a:fillRect b="-8889"/>
+                </a:stretch>
+              </a:blipFill>
+            </p:spPr>
+            <p:txBody>
+              <a:bodyPr/>
+              <a:lstStyle/>
+              <a:p>
+                <a:r>
+                  <a:rPr lang="en-US">
+                    <a:noFill/>
+                  </a:rPr>
+                  <a:t> </a:t>
+                </a:r>
+              </a:p>
+            </p:txBody>
+          </p:sp>
+        </mc:Fallback>
+      </mc:AlternateContent>
+    </p:spTree>
+    <p:extLst>
+      <p:ext uri="{BB962C8B-B14F-4D97-AF65-F5344CB8AC3E}">
+        <p14:creationId xmlns:p14="http://schemas.microsoft.com/office/powerpoint/2010/main" val="2233404866"/>
+      </p:ext>
+    </p:extLst>
+  </p:cSld>
+  <p:clrMapOvr>
+    <a:masterClrMapping/>
+  </p:clrMapOvr>
+</p:sld>
+</file>
+
+<file path=ppt/slides/slide21.xml><?xml version="1.0" encoding="utf-8"?>
+<p:sld xmlns:a="http://schemas.openxmlformats.org/drawingml/2006/main" xmlns:r="http://schemas.openxmlformats.org/officeDocument/2006/relationships" xmlns:p="http://schemas.openxmlformats.org/presentationml/2006/main">
+  <p:cSld>
+    <p:spTree>
+      <p:nvGrpSpPr>
+        <p:cNvPr id="1" name=""/>
+        <p:cNvGrpSpPr/>
+        <p:nvPr/>
+      </p:nvGrpSpPr>
+      <p:grpSpPr>
+        <a:xfrm>
+          <a:off x="0" y="0"/>
+          <a:ext cx="0" cy="0"/>
+          <a:chOff x="0" y="0"/>
+          <a:chExt cx="0" cy="0"/>
+        </a:xfrm>
+      </p:grpSpPr>
+      <p:sp>
+        <p:nvSpPr>
+          <p:cNvPr id="2" name="Title 1">
+            <a:extLst>
+              <a:ext uri="{FF2B5EF4-FFF2-40B4-BE49-F238E27FC236}">
+                <a16:creationId xmlns:a16="http://schemas.microsoft.com/office/drawing/2014/main" id="{B838276F-7795-B966-030F-FCC3849991EC}"/>
+              </a:ext>
+            </a:extLst>
+          </p:cNvPr>
+          <p:cNvSpPr>
+            <a:spLocks noGrp="1"/>
+          </p:cNvSpPr>
+          <p:nvPr>
+            <p:ph type="title"/>
+          </p:nvPr>
+        </p:nvSpPr>
+        <p:spPr/>
+        <p:txBody>
+          <a:bodyPr/>
+          <a:lstStyle/>
+          <a:p>
+            <a:r>
+              <a:rPr lang="en-US" dirty="0"/>
+              <a:t>Sarsa vs. Q-Learning</a:t>
+            </a:r>
+          </a:p>
+        </p:txBody>
+      </p:sp>
+      <p:sp>
+        <p:nvSpPr>
+          <p:cNvPr id="3" name="Content Placeholder 2">
+            <a:extLst>
+              <a:ext uri="{FF2B5EF4-FFF2-40B4-BE49-F238E27FC236}">
+                <a16:creationId xmlns:a16="http://schemas.microsoft.com/office/drawing/2014/main" id="{E6C98B4E-B7CF-E345-6580-CEE34C1DC678}"/>
+              </a:ext>
+            </a:extLst>
+          </p:cNvPr>
+          <p:cNvSpPr>
+            <a:spLocks noGrp="1"/>
+          </p:cNvSpPr>
+          <p:nvPr>
+            <p:ph idx="1"/>
+          </p:nvPr>
+        </p:nvSpPr>
+        <p:spPr>
+          <a:xfrm>
+            <a:off x="838200" y="1397330"/>
+            <a:ext cx="4403895" cy="4779633"/>
+          </a:xfrm>
+        </p:spPr>
+        <p:txBody>
+          <a:bodyPr>
+            <a:normAutofit/>
+          </a:bodyPr>
+          <a:lstStyle/>
+          <a:p>
+            <a:r>
+              <a:rPr lang="en-US" sz="1800" b="1" dirty="0"/>
+              <a:t>Cliff Walking</a:t>
+            </a:r>
+            <a:r>
+              <a:rPr lang="en-US" sz="1800" dirty="0"/>
+              <a:t>: Consider the </a:t>
+            </a:r>
+            <a:r>
+              <a:rPr lang="en-US" sz="1800" dirty="0" err="1"/>
+              <a:t>gridworld</a:t>
+            </a:r>
+            <a:r>
+              <a:rPr lang="en-US" sz="1800" dirty="0"/>
+              <a:t> shown to the right. </a:t>
+            </a:r>
+          </a:p>
+          <a:p>
+            <a:r>
+              <a:rPr lang="en-US" sz="1800" dirty="0"/>
+              <a:t>This is a standard undiscounted, episodic task, with start and goal states.</a:t>
+            </a:r>
+          </a:p>
+          <a:p>
+            <a:r>
+              <a:rPr lang="en-US" sz="1800" dirty="0"/>
+              <a:t>Actions causing movement up, down, right, and left. </a:t>
+            </a:r>
+          </a:p>
+          <a:p>
+            <a:r>
+              <a:rPr lang="en-US" sz="1800" dirty="0"/>
+              <a:t>Reward is −1 on all transitions except those into the region marked “The Cliff.” Stepping into this region incurs a reward of −100 and sends the sends the agent instantly back to the start.</a:t>
+            </a:r>
+          </a:p>
+        </p:txBody>
+      </p:sp>
+      <p:pic>
+        <p:nvPicPr>
+          <p:cNvPr id="5" name="Picture 4">
+            <a:extLst>
+              <a:ext uri="{FF2B5EF4-FFF2-40B4-BE49-F238E27FC236}">
+                <a16:creationId xmlns:a16="http://schemas.microsoft.com/office/drawing/2014/main" id="{BF19A7B5-A9CC-EE24-F78E-F3E2FA24D35A}"/>
+              </a:ext>
+            </a:extLst>
+          </p:cNvPr>
+          <p:cNvPicPr>
+            <a:picLocks noChangeAspect="1"/>
+          </p:cNvPicPr>
+          <p:nvPr/>
+        </p:nvPicPr>
+        <p:blipFill>
+          <a:blip r:embed="rId2"/>
+          <a:stretch>
+            <a:fillRect/>
+          </a:stretch>
+        </p:blipFill>
+        <p:spPr>
+          <a:xfrm>
+            <a:off x="5798274" y="240397"/>
+            <a:ext cx="5979790" cy="3006931"/>
+          </a:xfrm>
+          <a:prstGeom prst="rect">
+            <a:avLst/>
+          </a:prstGeom>
+        </p:spPr>
+      </p:pic>
+      <p:pic>
+        <p:nvPicPr>
+          <p:cNvPr id="7" name="Picture 6">
+            <a:extLst>
+              <a:ext uri="{FF2B5EF4-FFF2-40B4-BE49-F238E27FC236}">
+                <a16:creationId xmlns:a16="http://schemas.microsoft.com/office/drawing/2014/main" id="{703F5773-6D0D-1D71-F1CD-C7746EF7FC07}"/>
+              </a:ext>
+            </a:extLst>
+          </p:cNvPr>
+          <p:cNvPicPr>
+            <a:picLocks noChangeAspect="1"/>
+          </p:cNvPicPr>
+          <p:nvPr/>
+        </p:nvPicPr>
+        <p:blipFill>
+          <a:blip r:embed="rId3"/>
+          <a:stretch>
+            <a:fillRect/>
+          </a:stretch>
+        </p:blipFill>
+        <p:spPr>
+          <a:xfrm>
+            <a:off x="6697576" y="3812721"/>
+            <a:ext cx="4399920" cy="2904072"/>
+          </a:xfrm>
+          <a:prstGeom prst="rect">
+            <a:avLst/>
+          </a:prstGeom>
+        </p:spPr>
+      </p:pic>
+      <mc:AlternateContent xmlns:mc="http://schemas.openxmlformats.org/markup-compatibility/2006" xmlns:a14="http://schemas.microsoft.com/office/drawing/2010/main">
+        <mc:Choice Requires="a14">
+          <p:sp>
+            <p:nvSpPr>
+              <p:cNvPr id="9" name="TextBox 8">
+                <a:extLst>
+                  <a:ext uri="{FF2B5EF4-FFF2-40B4-BE49-F238E27FC236}">
+                    <a16:creationId xmlns:a16="http://schemas.microsoft.com/office/drawing/2014/main" id="{586B79D4-4AA8-3E1C-81C7-278DEEA363AF}"/>
+                  </a:ext>
+                </a:extLst>
+              </p:cNvPr>
+              <p:cNvSpPr txBox="1"/>
+              <p:nvPr/>
+            </p:nvSpPr>
+            <p:spPr>
+              <a:xfrm>
+                <a:off x="6499781" y="3494758"/>
+                <a:ext cx="5362044" cy="584775"/>
+              </a:xfrm>
+              <a:prstGeom prst="rect">
+                <a:avLst/>
+              </a:prstGeom>
+              <a:noFill/>
+            </p:spPr>
+            <p:txBody>
+              <a:bodyPr wrap="square">
+                <a:spAutoFit/>
+              </a:bodyPr>
+              <a:lstStyle/>
+              <a:p>
+                <a:r>
+                  <a:rPr lang="en-US" sz="1600" dirty="0"/>
+                  <a:t>Performance of the Sarsa and Q-learning methods with </a:t>
+                </a:r>
+                <a14:m>
+                  <m:oMath xmlns:m="http://schemas.openxmlformats.org/officeDocument/2006/math">
+                    <m:r>
+                      <a:rPr lang="en-US" sz="1600" b="0" i="1" smtClean="0">
+                        <a:latin typeface="Cambria Math" panose="02040503050406030204" pitchFamily="18" charset="0"/>
+                      </a:rPr>
+                      <m:t>𝜖</m:t>
+                    </m:r>
+                  </m:oMath>
+                </a14:m>
+                <a:r>
+                  <a:rPr lang="en-US" sz="1600" dirty="0"/>
+                  <a:t>-greedy action selection, </a:t>
+                </a:r>
+                <a14:m>
+                  <m:oMath xmlns:m="http://schemas.openxmlformats.org/officeDocument/2006/math">
+                    <m:r>
+                      <a:rPr lang="en-US" sz="1600" i="1">
+                        <a:latin typeface="Cambria Math" panose="02040503050406030204" pitchFamily="18" charset="0"/>
+                      </a:rPr>
+                      <m:t>𝜖</m:t>
+                    </m:r>
+                    <m:r>
+                      <a:rPr lang="en-US" sz="1600" b="0" i="1" smtClean="0">
+                        <a:latin typeface="Cambria Math" panose="02040503050406030204" pitchFamily="18" charset="0"/>
+                      </a:rPr>
+                      <m:t>=0.1</m:t>
+                    </m:r>
+                  </m:oMath>
+                </a14:m>
+                <a:r>
+                  <a:rPr lang="en-US" sz="1600" dirty="0"/>
+                  <a:t>.</a:t>
+                </a:r>
+              </a:p>
+            </p:txBody>
+          </p:sp>
+        </mc:Choice>
+        <mc:Fallback xmlns="">
+          <p:sp>
+            <p:nvSpPr>
+              <p:cNvPr id="9" name="TextBox 8">
+                <a:extLst>
+                  <a:ext uri="{FF2B5EF4-FFF2-40B4-BE49-F238E27FC236}">
+                    <a16:creationId xmlns:a16="http://schemas.microsoft.com/office/drawing/2014/main" id="{586B79D4-4AA8-3E1C-81C7-278DEEA363AF}"/>
+                  </a:ext>
+                </a:extLst>
+              </p:cNvPr>
+              <p:cNvSpPr txBox="1">
+                <a:spLocks noRot="1" noChangeAspect="1" noMove="1" noResize="1" noEditPoints="1" noAdjustHandles="1" noChangeArrowheads="1" noChangeShapeType="1" noTextEdit="1"/>
+              </p:cNvSpPr>
+              <p:nvPr/>
+            </p:nvSpPr>
+            <p:spPr>
+              <a:xfrm>
+                <a:off x="6499781" y="3494758"/>
+                <a:ext cx="5362044" cy="584775"/>
+              </a:xfrm>
+              <a:prstGeom prst="rect">
+                <a:avLst/>
+              </a:prstGeom>
+              <a:blipFill>
+                <a:blip r:embed="rId4"/>
+                <a:stretch>
+                  <a:fillRect l="-568" t="-3125" b="-12500"/>
+                </a:stretch>
+              </a:blipFill>
+            </p:spPr>
+            <p:txBody>
+              <a:bodyPr/>
+              <a:lstStyle/>
+              <a:p>
+                <a:r>
+                  <a:rPr lang="en-US">
+                    <a:noFill/>
+                  </a:rPr>
+                  <a:t> </a:t>
+                </a:r>
+              </a:p>
+            </p:txBody>
+          </p:sp>
+        </mc:Fallback>
+      </mc:AlternateContent>
+      <p:sp>
+        <p:nvSpPr>
+          <p:cNvPr id="10" name="Speech Bubble: Rectangle with Corners Rounded 9">
+            <a:extLst>
+              <a:ext uri="{FF2B5EF4-FFF2-40B4-BE49-F238E27FC236}">
+                <a16:creationId xmlns:a16="http://schemas.microsoft.com/office/drawing/2014/main" id="{C3FCB8B5-813B-D263-F7C1-1BC210D5ED90}"/>
+              </a:ext>
+            </a:extLst>
+          </p:cNvPr>
+          <p:cNvSpPr/>
+          <p:nvPr/>
+        </p:nvSpPr>
+        <p:spPr>
+          <a:xfrm>
+            <a:off x="10016519" y="5264757"/>
+            <a:ext cx="1542614" cy="696293"/>
+          </a:xfrm>
+          <a:prstGeom prst="wedgeRoundRectCallout">
+            <a:avLst>
+              <a:gd name="adj1" fmla="val -79398"/>
+              <a:gd name="adj2" fmla="val -61806"/>
+              <a:gd name="adj3" fmla="val 16667"/>
+            </a:avLst>
+          </a:prstGeom>
+        </p:spPr>
+        <p:style>
+          <a:lnRef idx="2">
+            <a:schemeClr val="accent1">
+              <a:shade val="15000"/>
+            </a:schemeClr>
+          </a:lnRef>
+          <a:fillRef idx="1">
+            <a:schemeClr val="accent1"/>
+          </a:fillRef>
+          <a:effectRef idx="0">
+            <a:schemeClr val="accent1"/>
+          </a:effectRef>
+          <a:fontRef idx="minor">
+            <a:schemeClr val="lt1"/>
+          </a:fontRef>
+        </p:style>
+        <p:txBody>
+          <a:bodyPr rtlCol="0" anchor="ctr"/>
+          <a:lstStyle/>
+          <a:p>
+            <a:pPr algn="ctr"/>
+            <a:r>
+              <a:rPr lang="en-US" sz="1100" dirty="0"/>
+              <a:t>Why does the optimal path perform worse?</a:t>
+            </a:r>
+          </a:p>
+        </p:txBody>
+      </p:sp>
+    </p:spTree>
+    <p:extLst>
+      <p:ext uri="{BB962C8B-B14F-4D97-AF65-F5344CB8AC3E}">
+        <p14:creationId xmlns:p14="http://schemas.microsoft.com/office/powerpoint/2010/main" val="2000631573"/>
+      </p:ext>
+    </p:extLst>
+  </p:cSld>
+  <p:clrMapOvr>
+    <a:masterClrMapping/>
+  </p:clrMapOvr>
+</p:sld>
+</file>
+
+<file path=ppt/slides/slide22.xml><?xml version="1.0" encoding="utf-8"?>
+<p:sld xmlns:a="http://schemas.openxmlformats.org/drawingml/2006/main" xmlns:r="http://schemas.openxmlformats.org/officeDocument/2006/relationships" xmlns:p="http://schemas.openxmlformats.org/presentationml/2006/main">
+  <p:cSld>
+    <p:spTree>
+      <p:nvGrpSpPr>
+        <p:cNvPr id="1" name=""/>
+        <p:cNvGrpSpPr/>
+        <p:nvPr/>
+      </p:nvGrpSpPr>
+      <p:grpSpPr>
+        <a:xfrm>
+          <a:off x="0" y="0"/>
+          <a:ext cx="0" cy="0"/>
+          <a:chOff x="0" y="0"/>
+          <a:chExt cx="0" cy="0"/>
+        </a:xfrm>
+      </p:grpSpPr>
       <p:pic>
         <p:nvPicPr>
           <p:cNvPr id="8" name="Picture 7">
@@ -12400,7 +13829,7 @@
 </p:sld>
 </file>
 
-<file path=ppt/slides/slide21.xml><?xml version="1.0" encoding="utf-8"?>
+<file path=ppt/slides/slide23.xml><?xml version="1.0" encoding="utf-8"?>
 <p:sld xmlns:a="http://schemas.openxmlformats.org/drawingml/2006/main" xmlns:r="http://schemas.openxmlformats.org/officeDocument/2006/relationships" xmlns:p="http://schemas.openxmlformats.org/presentationml/2006/main">
   <p:cSld>
     <p:spTree>
@@ -12439,14 +13868,14 @@
           <a:lstStyle/>
           <a:p>
             <a:r>
-              <a:rPr lang="en-US"/>
-              <a:t>Summary</a:t>
+              <a:rPr lang="en-US" dirty="0"/>
+              <a:t>What You Should Know</a:t>
             </a:r>
           </a:p>
         </p:txBody>
       </p:sp>
-      <mc:AlternateContent xmlns:mc="http://schemas.openxmlformats.org/markup-compatibility/2006" xmlns:a14="http://schemas.microsoft.com/office/drawing/2010/main">
-        <mc:Choice Requires="a14">
+      <mc:AlternateContent xmlns:mc="http://schemas.openxmlformats.org/markup-compatibility/2006">
+        <mc:Choice xmlns:a14="http://schemas.microsoft.com/office/drawing/2010/main" Requires="a14">
           <p:sp>
             <p:nvSpPr>
               <p:cNvPr id="3" name="Content Placeholder 2">
@@ -12463,23 +13892,27 @@
                 <p:ph idx="1"/>
               </p:nvPr>
             </p:nvSpPr>
-            <p:spPr/>
+            <p:spPr>
+              <a:xfrm>
+                <a:off x="838200" y="1397330"/>
+                <a:ext cx="10515600" cy="5095544"/>
+              </a:xfrm>
+            </p:spPr>
             <p:txBody>
               <a:bodyPr>
-                <a:normAutofit fontScale="85000" lnSpcReduction="20000"/>
+                <a:normAutofit fontScale="62500" lnSpcReduction="20000"/>
               </a:bodyPr>
               <a:lstStyle/>
               <a:p>
                 <a:r>
-                  <a:rPr lang="en-US"/>
-                  <a:t>Time differencing (TD) </a:t>
-                </a:r>
-                <a:r>
                   <a:rPr lang="en-US" dirty="0"/>
-                  <a:t>is an alternative to MC for the prediction (policy evaluation) problem.</a:t>
+                  <a:t>Time difference (TD) learning is an alternative to MC for the prediction (policy evaluation) problem.</a:t>
                 </a:r>
               </a:p>
               <a:p>
+                <a:pPr marL="0" indent="0">
+                  <a:buNone/>
+                </a:pPr>
                 <a:endParaRPr lang="en-US" dirty="0"/>
               </a:p>
               <a:p>
@@ -12493,13 +13926,15 @@
                 </a:r>
               </a:p>
               <a:p>
-                <a:r>
-                  <a:rPr lang="en-US" b="1" dirty="0"/>
-                  <a:t>Issue</a:t>
-                </a:r>
+                <a:pPr marL="0" indent="0">
+                  <a:buNone/>
+                </a:pPr>
+                <a:endParaRPr lang="en-US" dirty="0"/>
+              </a:p>
+              <a:p>
                 <a:r>
                   <a:rPr lang="en-US" dirty="0"/>
-                  <a:t>: Uses experience so it needs to maintain exploration</a:t>
+                  <a:t>Popular and most widely used RL methods:</a:t>
                 </a:r>
               </a:p>
               <a:p>
@@ -12517,36 +13952,69 @@
                 </a:r>
               </a:p>
               <a:p>
+                <a:r>
+                  <a:rPr lang="en-US" dirty="0"/>
+                  <a:t>Advantages:</a:t>
+                </a:r>
+              </a:p>
+              <a:p>
                 <a:pPr lvl="1"/>
+                <a:r>
+                  <a:rPr lang="en-US" dirty="0"/>
+                  <a:t>Model-free: Uses experience.</a:t>
+                </a:r>
+              </a:p>
+              <a:p>
+                <a:pPr lvl="1"/>
+                <a:r>
+                  <a:rPr lang="en-US" dirty="0"/>
+                  <a:t>Learn online (after each observation).</a:t>
+                </a:r>
+              </a:p>
+              <a:p>
+                <a:pPr lvl="1"/>
+                <a:r>
+                  <a:rPr lang="en-US" dirty="0"/>
+                  <a:t>Simple with minimal computation.</a:t>
+                </a:r>
+              </a:p>
+              <a:p>
+                <a:r>
+                  <a:rPr lang="en-US" dirty="0"/>
+                  <a:t>Challenges:</a:t>
+                </a:r>
+              </a:p>
+              <a:p>
+                <a:pPr lvl="1"/>
+                <a:r>
+                  <a:rPr lang="en-US" dirty="0"/>
+                  <a:t>Maximation bias.</a:t>
+                </a:r>
+              </a:p>
+              <a:p>
+                <a:pPr lvl="1"/>
+                <a:r>
+                  <a:rPr lang="en-US" dirty="0"/>
+                  <a:t>Behavior policy needs to keep exploring.</a:t>
+                </a:r>
+              </a:p>
+              <a:p>
+                <a:pPr lvl="1"/>
+                <a:r>
+                  <a:rPr lang="en-US" dirty="0"/>
+                  <a:t>Not very sample efficient.</a:t>
+                </a:r>
+              </a:p>
+              <a:p>
+                <a:pPr marL="0" indent="0">
+                  <a:buNone/>
+                </a:pPr>
                 <a:endParaRPr lang="en-US" dirty="0"/>
               </a:p>
               <a:p>
                 <a:r>
                   <a:rPr lang="en-US" dirty="0"/>
-                  <a:t>Q-learning and Sarsa are the most used RL methods.</a:t>
-                </a:r>
-              </a:p>
-              <a:p>
-                <a:pPr lvl="1"/>
-                <a:r>
-                  <a:rPr lang="en-US" dirty="0"/>
-                  <a:t>Learn online (after each observation)</a:t>
-                </a:r>
-              </a:p>
-              <a:p>
-                <a:pPr lvl="1"/>
-                <a:r>
-                  <a:rPr lang="en-US" dirty="0"/>
-                  <a:t>Simple with minimal computation</a:t>
-                </a:r>
-              </a:p>
-              <a:p>
-                <a:endParaRPr lang="en-US" dirty="0"/>
-              </a:p>
-              <a:p>
-                <a:r>
-                  <a:rPr lang="en-US" dirty="0"/>
-                  <a:t>We considered one-step, tabular, model-free TD. We will extend the TD ideas to </a:t>
+                  <a:t>We will extend the one-step tabular TD ideas from this chapter to </a:t>
                 </a:r>
                 <a14:m>
                   <m:oMath xmlns:m="http://schemas.openxmlformats.org/officeDocument/2006/math">
@@ -12568,37 +14036,17 @@
                 </a:r>
                 <a:r>
                   <a:rPr lang="en-US" b="1" dirty="0"/>
-                  <a:t>function approximation </a:t>
+                  <a:t>function approximation</a:t>
                 </a:r>
                 <a:r>
                   <a:rPr lang="en-US" dirty="0"/>
-                  <a:t>instead of tables.</a:t>
-                </a:r>
-              </a:p>
-              <a:p>
-                <a:endParaRPr lang="en-US" dirty="0"/>
-              </a:p>
-              <a:p>
-                <a:endParaRPr lang="en-US" dirty="0"/>
-              </a:p>
-              <a:p>
-                <a:pPr lvl="1"/>
-                <a:endParaRPr lang="en-US" dirty="0"/>
-              </a:p>
-              <a:p>
-                <a:endParaRPr lang="en-US" dirty="0"/>
-              </a:p>
-              <a:p>
-                <a:pPr lvl="1"/>
-                <a:endParaRPr lang="en-US" dirty="0"/>
-              </a:p>
-              <a:p>
-                <a:endParaRPr lang="en-US" dirty="0"/>
+                  <a:t>.</a:t>
+                </a:r>
               </a:p>
             </p:txBody>
           </p:sp>
         </mc:Choice>
-        <mc:Fallback xmlns="">
+        <mc:Fallback>
           <p:sp>
             <p:nvSpPr>
               <p:cNvPr id="3" name="Content Placeholder 2">
@@ -12616,10 +14064,14 @@
               </p:nvPr>
             </p:nvSpPr>
             <p:spPr>
+              <a:xfrm>
+                <a:off x="838200" y="1397330"/>
+                <a:ext cx="10515600" cy="5095544"/>
+              </a:xfrm>
               <a:blipFill>
                 <a:blip r:embed="rId2"/>
                 <a:stretch>
-                  <a:fillRect l="-812" t="-2806" r="-348"/>
+                  <a:fillRect l="-406" t="-1794"/>
                 </a:stretch>
               </a:blipFill>
             </p:spPr>
@@ -12696,8 +14148,8 @@
           </a:p>
         </p:txBody>
       </p:sp>
-      <mc:AlternateContent xmlns:mc="http://schemas.openxmlformats.org/markup-compatibility/2006" xmlns:a14="http://schemas.microsoft.com/office/drawing/2010/main">
-        <mc:Choice Requires="a14">
+      <mc:AlternateContent xmlns:mc="http://schemas.openxmlformats.org/markup-compatibility/2006">
+        <mc:Choice xmlns:a14="http://schemas.microsoft.com/office/drawing/2010/main" Requires="a14">
           <p:sp>
             <p:nvSpPr>
               <p:cNvPr id="3" name="Content Placeholder 2">
@@ -12714,10 +14166,15 @@
                 <p:ph idx="1"/>
               </p:nvPr>
             </p:nvSpPr>
-            <p:spPr/>
+            <p:spPr>
+              <a:xfrm>
+                <a:off x="838200" y="1397330"/>
+                <a:ext cx="7956792" cy="4779633"/>
+              </a:xfrm>
+            </p:spPr>
             <p:txBody>
               <a:bodyPr>
-                <a:normAutofit fontScale="62500" lnSpcReduction="20000"/>
+                <a:normAutofit fontScale="70000" lnSpcReduction="20000"/>
               </a:bodyPr>
               <a:lstStyle/>
               <a:p>
@@ -12758,7 +14215,7 @@
                 </a:r>
                 <a:r>
                   <a:rPr lang="en-US" dirty="0"/>
-                  <a:t>: incrementally make the state value estimate </a:t>
+                  <a:t>: Make the state value estimate </a:t>
                 </a:r>
                 <a14:m>
                   <m:oMath xmlns:m="http://schemas.openxmlformats.org/officeDocument/2006/math">
@@ -12814,7 +14271,64 @@
                 </a14:m>
                 <a:r>
                   <a:rPr lang="en-US" dirty="0"/>
-                  <a:t>a little more similar to the immediate reward and the discounted value of the next state </a:t>
+                  <a:t>more similar to the immediate reward plus the discounted, estimated value of the next state </a:t>
+                </a:r>
+                <a14:m>
+                  <m:oMath xmlns:m="http://schemas.openxmlformats.org/officeDocument/2006/math">
+                    <m:sSub>
+                      <m:sSubPr>
+                        <m:ctrlPr>
+                          <a:rPr lang="en-US" b="0" i="1" smtClean="0">
+                            <a:latin typeface="Cambria Math" panose="02040503050406030204" pitchFamily="18" charset="0"/>
+                          </a:rPr>
+                        </m:ctrlPr>
+                      </m:sSubPr>
+                      <m:e>
+                        <m:r>
+                          <a:rPr lang="en-US" b="0" i="1" smtClean="0">
+                            <a:latin typeface="Cambria Math" panose="02040503050406030204" pitchFamily="18" charset="0"/>
+                          </a:rPr>
+                          <m:t>𝑉</m:t>
+                        </m:r>
+                        <m:r>
+                          <a:rPr lang="en-US" b="0" i="1" smtClean="0">
+                            <a:latin typeface="Cambria Math" panose="02040503050406030204" pitchFamily="18" charset="0"/>
+                          </a:rPr>
+                          <m:t>(</m:t>
+                        </m:r>
+                        <m:r>
+                          <a:rPr lang="en-US" b="0" i="1" smtClean="0">
+                            <a:latin typeface="Cambria Math" panose="02040503050406030204" pitchFamily="18" charset="0"/>
+                          </a:rPr>
+                          <m:t>𝑆</m:t>
+                        </m:r>
+                      </m:e>
+                      <m:sub>
+                        <m:r>
+                          <a:rPr lang="en-US" b="0" i="1" smtClean="0">
+                            <a:latin typeface="Cambria Math" panose="02040503050406030204" pitchFamily="18" charset="0"/>
+                          </a:rPr>
+                          <m:t>𝑡</m:t>
+                        </m:r>
+                        <m:r>
+                          <a:rPr lang="en-US" b="0" i="1" smtClean="0">
+                            <a:latin typeface="Cambria Math" panose="02040503050406030204" pitchFamily="18" charset="0"/>
+                          </a:rPr>
+                          <m:t>+1</m:t>
+                        </m:r>
+                      </m:sub>
+                    </m:sSub>
+                    <m:r>
+                      <a:rPr lang="en-US" b="0" i="1" smtClean="0">
+                        <a:latin typeface="Cambria Math" panose="02040503050406030204" pitchFamily="18" charset="0"/>
+                      </a:rPr>
+                      <m:t>)</m:t>
+                    </m:r>
+                  </m:oMath>
+                </a14:m>
+                <a:r>
+                  <a:rPr lang="en-US" dirty="0"/>
+                  <a:t>:</a:t>
                 </a:r>
               </a:p>
               <a:p>
@@ -12827,6 +14341,54 @@
                       <m:jc m:val="centerGroup"/>
                     </m:oMathParaPr>
                     <m:oMath xmlns:m="http://schemas.openxmlformats.org/officeDocument/2006/math">
+                      <m:r>
+                        <a:rPr lang="en-US" i="1">
+                          <a:latin typeface="Cambria Math" panose="02040503050406030204" pitchFamily="18" charset="0"/>
+                        </a:rPr>
+                        <m:t>𝑉</m:t>
+                      </m:r>
+                      <m:d>
+                        <m:dPr>
+                          <m:ctrlPr>
+                            <a:rPr lang="en-US" i="1">
+                              <a:latin typeface="Cambria Math" panose="02040503050406030204" pitchFamily="18" charset="0"/>
+                            </a:rPr>
+                          </m:ctrlPr>
+                        </m:dPr>
+                        <m:e>
+                          <m:sSub>
+                            <m:sSubPr>
+                              <m:ctrlPr>
+                                <a:rPr lang="en-US" i="1">
+                                  <a:latin typeface="Cambria Math" panose="02040503050406030204" pitchFamily="18" charset="0"/>
+                                </a:rPr>
+                              </m:ctrlPr>
+                            </m:sSubPr>
+                            <m:e>
+                              <m:r>
+                                <a:rPr lang="en-US" i="1">
+                                  <a:latin typeface="Cambria Math" panose="02040503050406030204" pitchFamily="18" charset="0"/>
+                                </a:rPr>
+                                <m:t>𝑆</m:t>
+                              </m:r>
+                            </m:e>
+                            <m:sub>
+                              <m:r>
+                                <a:rPr lang="en-US" i="1">
+                                  <a:latin typeface="Cambria Math" panose="02040503050406030204" pitchFamily="18" charset="0"/>
+                                </a:rPr>
+                                <m:t>𝑡</m:t>
+                              </m:r>
+                            </m:sub>
+                          </m:sSub>
+                        </m:e>
+                      </m:d>
+                      <m:r>
+                        <a:rPr lang="en-US" b="0" i="1" smtClean="0">
+                          <a:latin typeface="Cambria Math" panose="02040503050406030204" pitchFamily="18" charset="0"/>
+                        </a:rPr>
+                        <m:t>←</m:t>
+                      </m:r>
                       <m:sSub>
                         <m:sSubPr>
                           <m:ctrlPr>
@@ -12924,6 +14486,9 @@
                 <a:endParaRPr lang="en-US" dirty="0"/>
               </a:p>
               <a:p>
+                <a:endParaRPr lang="en-US" dirty="0"/>
+              </a:p>
+              <a:p>
                 <a:r>
                   <a:rPr lang="en-US" dirty="0"/>
                   <a:t>The difference is called the </a:t>
@@ -12934,187 +14499,177 @@
                 </a:r>
                 <a:r>
                   <a:rPr lang="en-US" dirty="0"/>
-                  <a:t>:</a:t>
-                </a:r>
-              </a:p>
-              <a:p>
-                <a:pPr marL="0" indent="0">
-                  <a:buNone/>
-                </a:pPr>
+                  <a:t>:   </a:t>
+                </a:r>
                 <a14:m>
-                  <m:oMathPara xmlns:m="http://schemas.openxmlformats.org/officeDocument/2006/math">
-                    <m:oMathParaPr>
-                      <m:jc m:val="centerGroup"/>
-                    </m:oMathParaPr>
-                    <m:oMath xmlns:m="http://schemas.openxmlformats.org/officeDocument/2006/math">
-                      <m:sSub>
-                        <m:sSubPr>
-                          <m:ctrlPr>
-                            <a:rPr lang="en-US" i="1">
-                              <a:latin typeface="Cambria Math" panose="02040503050406030204" pitchFamily="18" charset="0"/>
-                            </a:rPr>
-                          </m:ctrlPr>
-                        </m:sSubPr>
-                        <m:e>
-                          <m:r>
-                            <a:rPr lang="en-US" i="1">
-                              <a:latin typeface="Cambria Math" panose="02040503050406030204" pitchFamily="18" charset="0"/>
-                            </a:rPr>
-                            <m:t>𝛿</m:t>
-                          </m:r>
-                        </m:e>
-                        <m:sub>
-                          <m:r>
-                            <a:rPr lang="en-US" i="1">
-                              <a:latin typeface="Cambria Math" panose="02040503050406030204" pitchFamily="18" charset="0"/>
-                            </a:rPr>
-                            <m:t>𝑡</m:t>
-                          </m:r>
-                        </m:sub>
-                      </m:sSub>
-                      <m:r>
-                        <a:rPr lang="en-US" i="1">
-                          <a:latin typeface="Cambria Math" panose="02040503050406030204" pitchFamily="18" charset="0"/>
-                        </a:rPr>
-                        <m:t>=</m:t>
-                      </m:r>
-                      <m:sSub>
-                        <m:sSubPr>
-                          <m:ctrlPr>
-                            <a:rPr lang="en-US" i="1">
-                              <a:latin typeface="Cambria Math" panose="02040503050406030204" pitchFamily="18" charset="0"/>
-                            </a:rPr>
-                          </m:ctrlPr>
-                        </m:sSubPr>
-                        <m:e>
-                          <m:r>
-                            <a:rPr lang="en-US" i="1">
-                              <a:latin typeface="Cambria Math" panose="02040503050406030204" pitchFamily="18" charset="0"/>
-                            </a:rPr>
-                            <m:t>𝑅</m:t>
-                          </m:r>
-                        </m:e>
-                        <m:sub>
-                          <m:r>
-                            <a:rPr lang="en-US" i="1">
-                              <a:latin typeface="Cambria Math" panose="02040503050406030204" pitchFamily="18" charset="0"/>
-                            </a:rPr>
-                            <m:t>𝑡</m:t>
-                          </m:r>
-                          <m:r>
-                            <a:rPr lang="en-US" i="1">
-                              <a:latin typeface="Cambria Math" panose="02040503050406030204" pitchFamily="18" charset="0"/>
-                            </a:rPr>
-                            <m:t>+1</m:t>
-                          </m:r>
-                        </m:sub>
-                      </m:sSub>
-                      <m:r>
-                        <a:rPr lang="en-US" i="1">
-                          <a:latin typeface="Cambria Math" panose="02040503050406030204" pitchFamily="18" charset="0"/>
-                        </a:rPr>
-                        <m:t>+</m:t>
-                      </m:r>
-                      <m:r>
-                        <a:rPr lang="en-US" i="1">
-                          <a:latin typeface="Cambria Math" panose="02040503050406030204" pitchFamily="18" charset="0"/>
-                        </a:rPr>
-                        <m:t>𝛾</m:t>
-                      </m:r>
-                      <m:r>
-                        <a:rPr lang="en-US" i="1">
-                          <a:latin typeface="Cambria Math" panose="02040503050406030204" pitchFamily="18" charset="0"/>
-                        </a:rPr>
-                        <m:t>𝑉</m:t>
-                      </m:r>
-                      <m:r>
-                        <a:rPr lang="en-US" i="1">
-                          <a:latin typeface="Cambria Math" panose="02040503050406030204" pitchFamily="18" charset="0"/>
-                        </a:rPr>
-                        <m:t>(</m:t>
-                      </m:r>
-                      <m:sSub>
-                        <m:sSubPr>
-                          <m:ctrlPr>
-                            <a:rPr lang="en-US" i="1">
-                              <a:latin typeface="Cambria Math" panose="02040503050406030204" pitchFamily="18" charset="0"/>
-                            </a:rPr>
-                          </m:ctrlPr>
-                        </m:sSubPr>
-                        <m:e>
-                          <m:r>
-                            <a:rPr lang="en-US" i="1">
-                              <a:latin typeface="Cambria Math" panose="02040503050406030204" pitchFamily="18" charset="0"/>
-                            </a:rPr>
-                            <m:t>𝑆</m:t>
-                          </m:r>
-                        </m:e>
-                        <m:sub>
-                          <m:r>
-                            <a:rPr lang="en-US" i="1">
-                              <a:latin typeface="Cambria Math" panose="02040503050406030204" pitchFamily="18" charset="0"/>
-                            </a:rPr>
-                            <m:t>𝑡</m:t>
-                          </m:r>
-                          <m:r>
-                            <a:rPr lang="en-US" i="1">
-                              <a:latin typeface="Cambria Math" panose="02040503050406030204" pitchFamily="18" charset="0"/>
-                            </a:rPr>
-                            <m:t>+1</m:t>
-                          </m:r>
-                        </m:sub>
-                      </m:sSub>
-                      <m:r>
-                        <a:rPr lang="en-US" i="1">
-                          <a:latin typeface="Cambria Math" panose="02040503050406030204" pitchFamily="18" charset="0"/>
-                        </a:rPr>
-                        <m:t>)−</m:t>
-                      </m:r>
-                      <m:r>
-                        <a:rPr lang="en-US" i="1">
-                          <a:latin typeface="Cambria Math" panose="02040503050406030204" pitchFamily="18" charset="0"/>
-                        </a:rPr>
-                        <m:t>𝑉</m:t>
-                      </m:r>
-                      <m:r>
-                        <a:rPr lang="en-US" i="1">
-                          <a:latin typeface="Cambria Math" panose="02040503050406030204" pitchFamily="18" charset="0"/>
-                        </a:rPr>
-                        <m:t>(</m:t>
-                      </m:r>
-                      <m:sSub>
-                        <m:sSubPr>
-                          <m:ctrlPr>
-                            <a:rPr lang="en-US" i="1">
-                              <a:latin typeface="Cambria Math" panose="02040503050406030204" pitchFamily="18" charset="0"/>
-                            </a:rPr>
-                          </m:ctrlPr>
-                        </m:sSubPr>
-                        <m:e>
-                          <m:r>
-                            <a:rPr lang="en-US" i="1">
-                              <a:latin typeface="Cambria Math" panose="02040503050406030204" pitchFamily="18" charset="0"/>
-                            </a:rPr>
-                            <m:t>𝑆</m:t>
-                          </m:r>
-                        </m:e>
-                        <m:sub>
-                          <m:r>
-                            <a:rPr lang="en-US" i="1">
-                              <a:latin typeface="Cambria Math" panose="02040503050406030204" pitchFamily="18" charset="0"/>
-                            </a:rPr>
-                            <m:t>𝑡</m:t>
-                          </m:r>
-                        </m:sub>
-                      </m:sSub>
-                      <m:r>
-                        <a:rPr lang="en-US" i="1">
-                          <a:latin typeface="Cambria Math" panose="02040503050406030204" pitchFamily="18" charset="0"/>
-                        </a:rPr>
-                        <m:t>)</m:t>
-                      </m:r>
-                    </m:oMath>
-                  </m:oMathPara>
+                  <m:oMath xmlns:m="http://schemas.openxmlformats.org/officeDocument/2006/math">
+                    <m:sSub>
+                      <m:sSubPr>
+                        <m:ctrlPr>
+                          <a:rPr lang="en-US" i="1">
+                            <a:latin typeface="Cambria Math" panose="02040503050406030204" pitchFamily="18" charset="0"/>
+                          </a:rPr>
+                        </m:ctrlPr>
+                      </m:sSubPr>
+                      <m:e>
+                        <m:r>
+                          <a:rPr lang="en-US" i="1">
+                            <a:latin typeface="Cambria Math" panose="02040503050406030204" pitchFamily="18" charset="0"/>
+                          </a:rPr>
+                          <m:t>𝛿</m:t>
+                        </m:r>
+                      </m:e>
+                      <m:sub>
+                        <m:r>
+                          <a:rPr lang="en-US" i="1">
+                            <a:latin typeface="Cambria Math" panose="02040503050406030204" pitchFamily="18" charset="0"/>
+                          </a:rPr>
+                          <m:t>𝑡</m:t>
+                        </m:r>
+                      </m:sub>
+                    </m:sSub>
+                    <m:r>
+                      <a:rPr lang="en-US" i="1">
+                        <a:latin typeface="Cambria Math" panose="02040503050406030204" pitchFamily="18" charset="0"/>
+                      </a:rPr>
+                      <m:t>=</m:t>
+                    </m:r>
+                    <m:sSub>
+                      <m:sSubPr>
+                        <m:ctrlPr>
+                          <a:rPr lang="en-US" i="1">
+                            <a:latin typeface="Cambria Math" panose="02040503050406030204" pitchFamily="18" charset="0"/>
+                          </a:rPr>
+                        </m:ctrlPr>
+                      </m:sSubPr>
+                      <m:e>
+                        <m:r>
+                          <a:rPr lang="en-US" i="1">
+                            <a:latin typeface="Cambria Math" panose="02040503050406030204" pitchFamily="18" charset="0"/>
+                          </a:rPr>
+                          <m:t>𝑅</m:t>
+                        </m:r>
+                      </m:e>
+                      <m:sub>
+                        <m:r>
+                          <a:rPr lang="en-US" i="1">
+                            <a:latin typeface="Cambria Math" panose="02040503050406030204" pitchFamily="18" charset="0"/>
+                          </a:rPr>
+                          <m:t>𝑡</m:t>
+                        </m:r>
+                        <m:r>
+                          <a:rPr lang="en-US" i="1">
+                            <a:latin typeface="Cambria Math" panose="02040503050406030204" pitchFamily="18" charset="0"/>
+                          </a:rPr>
+                          <m:t>+1</m:t>
+                        </m:r>
+                      </m:sub>
+                    </m:sSub>
+                    <m:r>
+                      <a:rPr lang="en-US" i="1">
+                        <a:latin typeface="Cambria Math" panose="02040503050406030204" pitchFamily="18" charset="0"/>
+                      </a:rPr>
+                      <m:t>+</m:t>
+                    </m:r>
+                    <m:r>
+                      <a:rPr lang="en-US" i="1">
+                        <a:latin typeface="Cambria Math" panose="02040503050406030204" pitchFamily="18" charset="0"/>
+                      </a:rPr>
+                      <m:t>𝛾</m:t>
+                    </m:r>
+                    <m:r>
+                      <a:rPr lang="en-US" i="1">
+                        <a:latin typeface="Cambria Math" panose="02040503050406030204" pitchFamily="18" charset="0"/>
+                      </a:rPr>
+                      <m:t>𝑉</m:t>
+                    </m:r>
+                    <m:r>
+                      <a:rPr lang="en-US" i="1">
+                        <a:latin typeface="Cambria Math" panose="02040503050406030204" pitchFamily="18" charset="0"/>
+                      </a:rPr>
+                      <m:t>(</m:t>
+                    </m:r>
+                    <m:sSub>
+                      <m:sSubPr>
+                        <m:ctrlPr>
+                          <a:rPr lang="en-US" i="1">
+                            <a:latin typeface="Cambria Math" panose="02040503050406030204" pitchFamily="18" charset="0"/>
+                          </a:rPr>
+                        </m:ctrlPr>
+                      </m:sSubPr>
+                      <m:e>
+                        <m:r>
+                          <a:rPr lang="en-US" i="1">
+                            <a:latin typeface="Cambria Math" panose="02040503050406030204" pitchFamily="18" charset="0"/>
+                          </a:rPr>
+                          <m:t>𝑆</m:t>
+                        </m:r>
+                      </m:e>
+                      <m:sub>
+                        <m:r>
+                          <a:rPr lang="en-US" i="1">
+                            <a:latin typeface="Cambria Math" panose="02040503050406030204" pitchFamily="18" charset="0"/>
+                          </a:rPr>
+                          <m:t>𝑡</m:t>
+                        </m:r>
+                        <m:r>
+                          <a:rPr lang="en-US" i="1">
+                            <a:latin typeface="Cambria Math" panose="02040503050406030204" pitchFamily="18" charset="0"/>
+                          </a:rPr>
+                          <m:t>+1</m:t>
+                        </m:r>
+                      </m:sub>
+                    </m:sSub>
+                    <m:r>
+                      <a:rPr lang="en-US" i="1">
+                        <a:latin typeface="Cambria Math" panose="02040503050406030204" pitchFamily="18" charset="0"/>
+                      </a:rPr>
+                      <m:t>)−</m:t>
+                    </m:r>
+                    <m:r>
+                      <a:rPr lang="en-US" i="1">
+                        <a:latin typeface="Cambria Math" panose="02040503050406030204" pitchFamily="18" charset="0"/>
+                      </a:rPr>
+                      <m:t>𝑉</m:t>
+                    </m:r>
+                    <m:r>
+                      <a:rPr lang="en-US" i="1">
+                        <a:latin typeface="Cambria Math" panose="02040503050406030204" pitchFamily="18" charset="0"/>
+                      </a:rPr>
+                      <m:t>(</m:t>
+                    </m:r>
+                    <m:sSub>
+                      <m:sSubPr>
+                        <m:ctrlPr>
+                          <a:rPr lang="en-US" i="1">
+                            <a:latin typeface="Cambria Math" panose="02040503050406030204" pitchFamily="18" charset="0"/>
+                          </a:rPr>
+                        </m:ctrlPr>
+                      </m:sSubPr>
+                      <m:e>
+                        <m:r>
+                          <a:rPr lang="en-US" i="1">
+                            <a:latin typeface="Cambria Math" panose="02040503050406030204" pitchFamily="18" charset="0"/>
+                          </a:rPr>
+                          <m:t>𝑆</m:t>
+                        </m:r>
+                      </m:e>
+                      <m:sub>
+                        <m:r>
+                          <a:rPr lang="en-US" i="1">
+                            <a:latin typeface="Cambria Math" panose="02040503050406030204" pitchFamily="18" charset="0"/>
+                          </a:rPr>
+                          <m:t>𝑡</m:t>
+                        </m:r>
+                      </m:sub>
+                    </m:sSub>
+                    <m:r>
+                      <a:rPr lang="en-US" i="1">
+                        <a:latin typeface="Cambria Math" panose="02040503050406030204" pitchFamily="18" charset="0"/>
+                      </a:rPr>
+                      <m:t>)</m:t>
+                    </m:r>
+                  </m:oMath>
                 </a14:m>
                 <a:endParaRPr lang="en-US" dirty="0"/>
               </a:p>
@@ -13127,49 +14682,6 @@
               <a:p>
                 <a:r>
                   <a:rPr lang="en-US" dirty="0"/>
-                  <a:t>Called temporal difference because it uses differences between successive predictions made over time at </a:t>
-                </a:r>
-                <a14:m>
-                  <m:oMath xmlns:m="http://schemas.openxmlformats.org/officeDocument/2006/math">
-                    <m:r>
-                      <a:rPr lang="en-US" b="0" i="1" smtClean="0">
-                        <a:latin typeface="Cambria Math" panose="02040503050406030204" pitchFamily="18" charset="0"/>
-                      </a:rPr>
-                      <m:t>𝑡</m:t>
-                    </m:r>
-                  </m:oMath>
-                </a14:m>
-                <a:r>
-                  <a:rPr lang="en-US" dirty="0"/>
-                  <a:t> and </a:t>
-                </a:r>
-                <a14:m>
-                  <m:oMath xmlns:m="http://schemas.openxmlformats.org/officeDocument/2006/math">
-                    <m:r>
-                      <a:rPr lang="en-US" b="0" i="1" smtClean="0">
-                        <a:latin typeface="Cambria Math" panose="02040503050406030204" pitchFamily="18" charset="0"/>
-                      </a:rPr>
-                      <m:t>𝑡</m:t>
-                    </m:r>
-                    <m:r>
-                      <a:rPr lang="en-US" b="0" i="1" smtClean="0">
-                        <a:latin typeface="Cambria Math" panose="02040503050406030204" pitchFamily="18" charset="0"/>
-                      </a:rPr>
-                      <m:t>+1</m:t>
-                    </m:r>
-                  </m:oMath>
-                </a14:m>
-                <a:r>
-                  <a:rPr lang="en-US" dirty="0"/>
-                  <a:t>.</a:t>
-                </a:r>
-              </a:p>
-              <a:p>
-                <a:endParaRPr lang="en-US" dirty="0"/>
-              </a:p>
-              <a:p>
-                <a:r>
-                  <a:rPr lang="en-US" dirty="0"/>
                   <a:t>Combines ideas from MC and DP</a:t>
                 </a:r>
               </a:p>
@@ -13177,20 +14689,158 @@
                 <a:pPr lvl="1"/>
                 <a:r>
                   <a:rPr lang="en-US" dirty="0"/>
-                  <a:t>From MC: learn from raw experience</a:t>
+                  <a:t>From MC: learn from raw experience (observed </a:t>
+                </a:r>
+                <a14:m>
+                  <m:oMath xmlns:m="http://schemas.openxmlformats.org/officeDocument/2006/math">
+                    <m:sSub>
+                      <m:sSubPr>
+                        <m:ctrlPr>
+                          <a:rPr lang="en-US" b="0" i="1" dirty="0" smtClean="0">
+                            <a:latin typeface="Cambria Math" panose="02040503050406030204" pitchFamily="18" charset="0"/>
+                          </a:rPr>
+                        </m:ctrlPr>
+                      </m:sSubPr>
+                      <m:e>
+                        <m:r>
+                          <a:rPr lang="en-US" i="1" dirty="0" smtClean="0">
+                            <a:latin typeface="Cambria Math" panose="02040503050406030204" pitchFamily="18" charset="0"/>
+                          </a:rPr>
+                          <m:t>𝑆</m:t>
+                        </m:r>
+                      </m:e>
+                      <m:sub>
+                        <m:r>
+                          <a:rPr lang="en-US" b="0" i="1" dirty="0" smtClean="0">
+                            <a:latin typeface="Cambria Math" panose="02040503050406030204" pitchFamily="18" charset="0"/>
+                          </a:rPr>
+                          <m:t>𝑡</m:t>
+                        </m:r>
+                      </m:sub>
+                    </m:sSub>
+                    <m:r>
+                      <a:rPr lang="en-US" i="1" dirty="0" smtClean="0">
+                        <a:latin typeface="Cambria Math" panose="02040503050406030204" pitchFamily="18" charset="0"/>
+                      </a:rPr>
+                      <m:t>,</m:t>
+                    </m:r>
+                    <m:sSub>
+                      <m:sSubPr>
+                        <m:ctrlPr>
+                          <a:rPr lang="en-US" b="0" i="1" dirty="0" smtClean="0">
+                            <a:latin typeface="Cambria Math" panose="02040503050406030204" pitchFamily="18" charset="0"/>
+                          </a:rPr>
+                        </m:ctrlPr>
+                      </m:sSubPr>
+                      <m:e>
+                        <m:r>
+                          <a:rPr lang="en-US" i="1" dirty="0" smtClean="0">
+                            <a:latin typeface="Cambria Math" panose="02040503050406030204" pitchFamily="18" charset="0"/>
+                          </a:rPr>
+                          <m:t>𝐴</m:t>
+                        </m:r>
+                      </m:e>
+                      <m:sub>
+                        <m:r>
+                          <a:rPr lang="en-US" b="0" i="1" dirty="0" smtClean="0">
+                            <a:latin typeface="Cambria Math" panose="02040503050406030204" pitchFamily="18" charset="0"/>
+                          </a:rPr>
+                          <m:t>𝑡</m:t>
+                        </m:r>
+                      </m:sub>
+                    </m:sSub>
+                    <m:r>
+                      <a:rPr lang="en-US" i="1" dirty="0" smtClean="0">
+                        <a:latin typeface="Cambria Math" panose="02040503050406030204" pitchFamily="18" charset="0"/>
+                      </a:rPr>
+                      <m:t>,</m:t>
+                    </m:r>
+                    <m:sSub>
+                      <m:sSubPr>
+                        <m:ctrlPr>
+                          <a:rPr lang="en-US" b="0" i="1" dirty="0" smtClean="0">
+                            <a:latin typeface="Cambria Math" panose="02040503050406030204" pitchFamily="18" charset="0"/>
+                          </a:rPr>
+                        </m:ctrlPr>
+                      </m:sSubPr>
+                      <m:e>
+                        <m:r>
+                          <a:rPr lang="en-US" i="1" dirty="0" smtClean="0">
+                            <a:latin typeface="Cambria Math" panose="02040503050406030204" pitchFamily="18" charset="0"/>
+                          </a:rPr>
+                          <m:t>𝑅</m:t>
+                        </m:r>
+                      </m:e>
+                      <m:sub>
+                        <m:r>
+                          <a:rPr lang="en-US" b="0" i="1" dirty="0" smtClean="0">
+                            <a:latin typeface="Cambria Math" panose="02040503050406030204" pitchFamily="18" charset="0"/>
+                          </a:rPr>
+                          <m:t>𝑡</m:t>
+                        </m:r>
+                        <m:r>
+                          <a:rPr lang="en-US" b="0" i="1" dirty="0" smtClean="0">
+                            <a:latin typeface="Cambria Math" panose="02040503050406030204" pitchFamily="18" charset="0"/>
+                          </a:rPr>
+                          <m:t>+1</m:t>
+                        </m:r>
+                      </m:sub>
+                    </m:sSub>
+                    <m:r>
+                      <a:rPr lang="en-US" i="1" dirty="0" smtClean="0">
+                        <a:latin typeface="Cambria Math" panose="02040503050406030204" pitchFamily="18" charset="0"/>
+                      </a:rPr>
+                      <m:t>,</m:t>
+                    </m:r>
+                    <m:sSub>
+                      <m:sSubPr>
+                        <m:ctrlPr>
+                          <a:rPr lang="en-US" b="0" i="1" dirty="0" smtClean="0">
+                            <a:latin typeface="Cambria Math" panose="02040503050406030204" pitchFamily="18" charset="0"/>
+                          </a:rPr>
+                        </m:ctrlPr>
+                      </m:sSubPr>
+                      <m:e>
+                        <m:r>
+                          <a:rPr lang="en-US" i="1" dirty="0" smtClean="0">
+                            <a:latin typeface="Cambria Math" panose="02040503050406030204" pitchFamily="18" charset="0"/>
+                          </a:rPr>
+                          <m:t>𝑆</m:t>
+                        </m:r>
+                      </m:e>
+                      <m:sub>
+                        <m:r>
+                          <a:rPr lang="en-US" b="0" i="1" dirty="0" smtClean="0">
+                            <a:latin typeface="Cambria Math" panose="02040503050406030204" pitchFamily="18" charset="0"/>
+                          </a:rPr>
+                          <m:t>𝑡</m:t>
+                        </m:r>
+                        <m:r>
+                          <a:rPr lang="en-US" b="0" i="1" dirty="0" smtClean="0">
+                            <a:latin typeface="Cambria Math" panose="02040503050406030204" pitchFamily="18" charset="0"/>
+                          </a:rPr>
+                          <m:t>+1</m:t>
+                        </m:r>
+                      </m:sub>
+                    </m:sSub>
+                  </m:oMath>
+                </a14:m>
+                <a:r>
+                  <a:rPr lang="en-US" dirty="0"/>
+                  <a:t>)</a:t>
                 </a:r>
               </a:p>
               <a:p>
                 <a:pPr lvl="1"/>
                 <a:r>
                   <a:rPr lang="en-US" dirty="0"/>
-                  <a:t>From DP: calculates the error between two value estimates without waiting for the end of the episode. </a:t>
+                  <a:t>From DP: calculates the error between two value estimates without waiting for the end of the episode via bootstrapping.</a:t>
                 </a:r>
               </a:p>
             </p:txBody>
           </p:sp>
         </mc:Choice>
-        <mc:Fallback xmlns="">
+        <mc:Fallback>
           <p:sp>
             <p:nvSpPr>
               <p:cNvPr id="3" name="Content Placeholder 2">
@@ -13208,10 +14858,14 @@
               </p:nvPr>
             </p:nvSpPr>
             <p:spPr>
+              <a:xfrm>
+                <a:off x="838200" y="1397330"/>
+                <a:ext cx="7956792" cy="4779633"/>
+              </a:xfrm>
               <a:blipFill>
                 <a:blip r:embed="rId2"/>
                 <a:stretch>
-                  <a:fillRect l="-406" t="-1913"/>
+                  <a:fillRect l="-690" t="-2168"/>
                 </a:stretch>
               </a:blipFill>
             </p:spPr>
@@ -13230,6 +14884,417 @@
           </p:sp>
         </mc:Fallback>
       </mc:AlternateContent>
+      <p:grpSp>
+        <p:nvGrpSpPr>
+          <p:cNvPr id="10" name="Group 9">
+            <a:extLst>
+              <a:ext uri="{FF2B5EF4-FFF2-40B4-BE49-F238E27FC236}">
+                <a16:creationId xmlns:a16="http://schemas.microsoft.com/office/drawing/2014/main" id="{EE77EFFD-0224-23E4-99EB-290564017C6F}"/>
+              </a:ext>
+            </a:extLst>
+          </p:cNvPr>
+          <p:cNvGrpSpPr/>
+          <p:nvPr/>
+        </p:nvGrpSpPr>
+        <p:grpSpPr>
+          <a:xfrm>
+            <a:off x="8630392" y="2398276"/>
+            <a:ext cx="2565570" cy="2061447"/>
+            <a:chOff x="8630392" y="2398276"/>
+            <a:chExt cx="2565570" cy="2061447"/>
+          </a:xfrm>
+        </p:grpSpPr>
+        <p:grpSp>
+          <p:nvGrpSpPr>
+            <p:cNvPr id="7" name="Group 6">
+              <a:extLst>
+                <a:ext uri="{FF2B5EF4-FFF2-40B4-BE49-F238E27FC236}">
+                  <a16:creationId xmlns:a16="http://schemas.microsoft.com/office/drawing/2014/main" id="{BD6B8A70-7CBB-B0CD-8422-D282F46101E2}"/>
+                </a:ext>
+              </a:extLst>
+            </p:cNvPr>
+            <p:cNvGrpSpPr/>
+            <p:nvPr/>
+          </p:nvGrpSpPr>
+          <p:grpSpPr>
+            <a:xfrm>
+              <a:off x="8850833" y="2398276"/>
+              <a:ext cx="2345129" cy="2061447"/>
+              <a:chOff x="9234742" y="369649"/>
+              <a:chExt cx="2345129" cy="2061447"/>
+            </a:xfrm>
+          </p:grpSpPr>
+          <p:pic>
+            <p:nvPicPr>
+              <p:cNvPr id="4" name="Picture 3">
+                <a:extLst>
+                  <a:ext uri="{FF2B5EF4-FFF2-40B4-BE49-F238E27FC236}">
+                    <a16:creationId xmlns:a16="http://schemas.microsoft.com/office/drawing/2014/main" id="{1723B89B-0891-8CC5-A64F-F496DF8A1A43}"/>
+                  </a:ext>
+                  <a:ext uri="{C183D7F6-B498-43B3-948B-1728B52AA6E4}">
+                    <adec:decorative xmlns:adec="http://schemas.microsoft.com/office/drawing/2017/decorative" val="1"/>
+                  </a:ext>
+                </a:extLst>
+              </p:cNvPr>
+              <p:cNvPicPr>
+                <a:picLocks noChangeAspect="1"/>
+              </p:cNvPicPr>
+              <p:nvPr/>
+            </p:nvPicPr>
+            <p:blipFill>
+              <a:blip r:embed="rId3"/>
+              <a:stretch>
+                <a:fillRect/>
+              </a:stretch>
+            </p:blipFill>
+            <p:spPr>
+              <a:xfrm>
+                <a:off x="9234742" y="738981"/>
+                <a:ext cx="2345129" cy="1692115"/>
+              </a:xfrm>
+              <a:prstGeom prst="rect">
+                <a:avLst/>
+              </a:prstGeom>
+            </p:spPr>
+          </p:pic>
+          <mc:AlternateContent xmlns:mc="http://schemas.openxmlformats.org/markup-compatibility/2006">
+            <mc:Choice xmlns:a14="http://schemas.microsoft.com/office/drawing/2010/main" Requires="a14">
+              <p:sp>
+                <p:nvSpPr>
+                  <p:cNvPr id="5" name="TextBox 4">
+                    <a:extLst>
+                      <a:ext uri="{FF2B5EF4-FFF2-40B4-BE49-F238E27FC236}">
+                        <a16:creationId xmlns:a16="http://schemas.microsoft.com/office/drawing/2014/main" id="{66BF1A66-F28D-7EBD-08FD-604FCA8335B9}"/>
+                      </a:ext>
+                    </a:extLst>
+                  </p:cNvPr>
+                  <p:cNvSpPr txBox="1"/>
+                  <p:nvPr/>
+                </p:nvSpPr>
+                <p:spPr>
+                  <a:xfrm>
+                    <a:off x="9482412" y="369649"/>
+                    <a:ext cx="1891672" cy="369332"/>
+                  </a:xfrm>
+                  <a:prstGeom prst="rect">
+                    <a:avLst/>
+                  </a:prstGeom>
+                  <a:noFill/>
+                </p:spPr>
+                <p:txBody>
+                  <a:bodyPr wrap="none" rtlCol="0">
+                    <a:spAutoFit/>
+                  </a:bodyPr>
+                  <a:lstStyle/>
+                  <a:p>
+                    <a14:m>
+                      <m:oMathPara xmlns:m="http://schemas.openxmlformats.org/officeDocument/2006/math">
+                        <m:oMathParaPr>
+                          <m:jc m:val="centerGroup"/>
+                        </m:oMathParaPr>
+                        <m:oMath xmlns:m="http://schemas.openxmlformats.org/officeDocument/2006/math">
+                          <m:r>
+                            <a:rPr lang="en-US" b="0" i="1" smtClean="0">
+                              <a:latin typeface="Cambria Math" panose="02040503050406030204" pitchFamily="18" charset="0"/>
+                            </a:rPr>
+                            <m:t>𝛾</m:t>
+                          </m:r>
+                          <m:r>
+                            <a:rPr lang="en-US" b="0" i="1" smtClean="0">
+                              <a:latin typeface="Cambria Math" panose="02040503050406030204" pitchFamily="18" charset="0"/>
+                            </a:rPr>
+                            <m:t>=1</m:t>
+                          </m:r>
+                          <m:r>
+                            <a:rPr lang="en-US" b="0" i="0" smtClean="0">
+                              <a:latin typeface="Cambria Math" panose="02040503050406030204" pitchFamily="18" charset="0"/>
+                            </a:rPr>
+                            <m:t>;</m:t>
+                          </m:r>
+                          <m:r>
+                            <m:rPr>
+                              <m:sty m:val="p"/>
+                            </m:rPr>
+                            <a:rPr lang="en-US" b="0" i="0" smtClean="0">
+                              <a:latin typeface="Cambria Math" panose="02040503050406030204" pitchFamily="18" charset="0"/>
+                            </a:rPr>
+                            <m:t>r</m:t>
+                          </m:r>
+                          <m:r>
+                            <a:rPr lang="en-US" b="0" i="0" smtClean="0">
+                              <a:latin typeface="Cambria Math" panose="02040503050406030204" pitchFamily="18" charset="0"/>
+                            </a:rPr>
+                            <m:t>=−0.04</m:t>
+                          </m:r>
+                        </m:oMath>
+                      </m:oMathPara>
+                    </a14:m>
+                    <a:endParaRPr lang="en-US" dirty="0"/>
+                  </a:p>
+                </p:txBody>
+              </p:sp>
+            </mc:Choice>
+            <mc:Fallback>
+              <p:sp>
+                <p:nvSpPr>
+                  <p:cNvPr id="5" name="TextBox 4">
+                    <a:extLst>
+                      <a:ext uri="{FF2B5EF4-FFF2-40B4-BE49-F238E27FC236}">
+                        <a16:creationId xmlns:a16="http://schemas.microsoft.com/office/drawing/2014/main" id="{66BF1A66-F28D-7EBD-08FD-604FCA8335B9}"/>
+                      </a:ext>
+                    </a:extLst>
+                  </p:cNvPr>
+                  <p:cNvSpPr txBox="1">
+                    <a:spLocks noRot="1" noChangeAspect="1" noMove="1" noResize="1" noEditPoints="1" noAdjustHandles="1" noChangeArrowheads="1" noChangeShapeType="1" noTextEdit="1"/>
+                  </p:cNvSpPr>
+                  <p:nvPr/>
+                </p:nvSpPr>
+                <p:spPr>
+                  <a:xfrm>
+                    <a:off x="9482412" y="369649"/>
+                    <a:ext cx="1891672" cy="369332"/>
+                  </a:xfrm>
+                  <a:prstGeom prst="rect">
+                    <a:avLst/>
+                  </a:prstGeom>
+                  <a:blipFill>
+                    <a:blip r:embed="rId4"/>
+                    <a:stretch>
+                      <a:fillRect b="-3279"/>
+                    </a:stretch>
+                  </a:blipFill>
+                </p:spPr>
+                <p:txBody>
+                  <a:bodyPr/>
+                  <a:lstStyle/>
+                  <a:p>
+                    <a:r>
+                      <a:rPr lang="en-US">
+                        <a:noFill/>
+                      </a:rPr>
+                      <a:t> </a:t>
+                    </a:r>
+                  </a:p>
+                </p:txBody>
+              </p:sp>
+            </mc:Fallback>
+          </mc:AlternateContent>
+          <p:sp>
+            <p:nvSpPr>
+              <p:cNvPr id="6" name="Freeform: Shape 5">
+                <a:extLst>
+                  <a:ext uri="{FF2B5EF4-FFF2-40B4-BE49-F238E27FC236}">
+                    <a16:creationId xmlns:a16="http://schemas.microsoft.com/office/drawing/2014/main" id="{FB9A9FCB-5B10-FBD9-6B0F-C0F07D29E7A8}"/>
+                  </a:ext>
+                </a:extLst>
+              </p:cNvPr>
+              <p:cNvSpPr/>
+              <p:nvPr/>
+            </p:nvSpPr>
+            <p:spPr>
+              <a:xfrm>
+                <a:off x="9321746" y="1495605"/>
+                <a:ext cx="321332" cy="474650"/>
+              </a:xfrm>
+              <a:custGeom>
+                <a:avLst/>
+                <a:gdLst>
+                  <a:gd name="csX0" fmla="*/ 279451 w 321332"/>
+                  <a:gd name="csY0" fmla="*/ 0 h 474650"/>
+                  <a:gd name="csX1" fmla="*/ 245 w 321332"/>
+                  <a:gd name="csY1" fmla="*/ 265246 h 474650"/>
+                  <a:gd name="csX2" fmla="*/ 321332 w 321332"/>
+                  <a:gd name="csY2" fmla="*/ 474650 h 474650"/>
+                </a:gdLst>
+                <a:ahLst/>
+                <a:cxnLst>
+                  <a:cxn ang="0">
+                    <a:pos x="csX0" y="csY0"/>
+                  </a:cxn>
+                  <a:cxn ang="0">
+                    <a:pos x="csX1" y="csY1"/>
+                  </a:cxn>
+                  <a:cxn ang="0">
+                    <a:pos x="csX2" y="csY2"/>
+                  </a:cxn>
+                </a:cxnLst>
+                <a:rect l="l" t="t" r="r" b="b"/>
+                <a:pathLst>
+                  <a:path w="321332" h="474650">
+                    <a:moveTo>
+                      <a:pt x="279451" y="0"/>
+                    </a:moveTo>
+                    <a:cubicBezTo>
+                      <a:pt x="136358" y="93069"/>
+                      <a:pt x="-6735" y="186138"/>
+                      <a:pt x="245" y="265246"/>
+                    </a:cubicBezTo>
+                    <a:cubicBezTo>
+                      <a:pt x="7225" y="344354"/>
+                      <a:pt x="164278" y="409502"/>
+                      <a:pt x="321332" y="474650"/>
+                    </a:cubicBezTo>
+                  </a:path>
+                </a:pathLst>
+              </a:custGeom>
+              <a:ln>
+                <a:headEnd type="none" w="med" len="med"/>
+                <a:tailEnd type="arrow" w="med" len="med"/>
+              </a:ln>
+            </p:spPr>
+            <p:style>
+              <a:lnRef idx="3">
+                <a:schemeClr val="accent2"/>
+              </a:lnRef>
+              <a:fillRef idx="0">
+                <a:schemeClr val="accent2"/>
+              </a:fillRef>
+              <a:effectRef idx="2">
+                <a:schemeClr val="accent2"/>
+              </a:effectRef>
+              <a:fontRef idx="minor">
+                <a:schemeClr val="tx1"/>
+              </a:fontRef>
+            </p:style>
+            <p:txBody>
+              <a:bodyPr rtlCol="0" anchor="ctr"/>
+              <a:lstStyle/>
+              <a:p>
+                <a:pPr algn="ctr"/>
+                <a:endParaRPr lang="en-US"/>
+              </a:p>
+            </p:txBody>
+          </p:sp>
+        </p:grpSp>
+        <p:sp>
+          <p:nvSpPr>
+            <p:cNvPr id="9" name="TextBox 8">
+              <a:extLst>
+                <a:ext uri="{FF2B5EF4-FFF2-40B4-BE49-F238E27FC236}">
+                  <a16:creationId xmlns:a16="http://schemas.microsoft.com/office/drawing/2014/main" id="{2A826EBA-9D60-97A3-970F-A18AF78219F1}"/>
+                </a:ext>
+              </a:extLst>
+            </p:cNvPr>
+            <p:cNvSpPr txBox="1"/>
+            <p:nvPr/>
+          </p:nvSpPr>
+          <p:spPr>
+            <a:xfrm>
+              <a:off x="8630392" y="3576891"/>
+              <a:ext cx="385042" cy="369332"/>
+            </a:xfrm>
+            <a:prstGeom prst="rect">
+              <a:avLst/>
+            </a:prstGeom>
+            <a:noFill/>
+          </p:spPr>
+          <p:txBody>
+            <a:bodyPr wrap="none" rtlCol="0">
+              <a:spAutoFit/>
+            </a:bodyPr>
+            <a:lstStyle/>
+            <a:p>
+              <a:r>
+                <a:rPr lang="en-US" dirty="0">
+                  <a:solidFill>
+                    <a:schemeClr val="accent2"/>
+                  </a:solidFill>
+                </a:rPr>
+                <a:t>+r</a:t>
+              </a:r>
+            </a:p>
+          </p:txBody>
+        </p:sp>
+      </p:grpSp>
+      <p:cxnSp>
+        <p:nvCxnSpPr>
+          <p:cNvPr id="12" name="Straight Connector 11">
+            <a:extLst>
+              <a:ext uri="{FF2B5EF4-FFF2-40B4-BE49-F238E27FC236}">
+                <a16:creationId xmlns:a16="http://schemas.microsoft.com/office/drawing/2014/main" id="{B7B5373B-567B-6DB6-134B-218624E26CFF}"/>
+              </a:ext>
+            </a:extLst>
+          </p:cNvPr>
+          <p:cNvCxnSpPr/>
+          <p:nvPr/>
+        </p:nvCxnSpPr>
+        <p:spPr>
+          <a:xfrm>
+            <a:off x="6724810" y="4438188"/>
+            <a:ext cx="1905582" cy="0"/>
+          </a:xfrm>
+          <a:prstGeom prst="line">
+            <a:avLst/>
+          </a:prstGeom>
+        </p:spPr>
+        <p:style>
+          <a:lnRef idx="2">
+            <a:schemeClr val="accent2"/>
+          </a:lnRef>
+          <a:fillRef idx="0">
+            <a:schemeClr val="accent2"/>
+          </a:fillRef>
+          <a:effectRef idx="1">
+            <a:schemeClr val="accent2"/>
+          </a:effectRef>
+          <a:fontRef idx="minor">
+            <a:schemeClr val="tx1"/>
+          </a:fontRef>
+        </p:style>
+      </p:cxnSp>
+      <p:sp>
+        <p:nvSpPr>
+          <p:cNvPr id="13" name="Speech Bubble: Rectangle with Corners Rounded 12">
+            <a:extLst>
+              <a:ext uri="{FF2B5EF4-FFF2-40B4-BE49-F238E27FC236}">
+                <a16:creationId xmlns:a16="http://schemas.microsoft.com/office/drawing/2014/main" id="{E7A2074D-7DF3-B2BC-A123-9B06DAFA337A}"/>
+              </a:ext>
+            </a:extLst>
+          </p:cNvPr>
+          <p:cNvSpPr/>
+          <p:nvPr/>
+        </p:nvSpPr>
+        <p:spPr>
+          <a:xfrm>
+            <a:off x="7627033" y="4650955"/>
+            <a:ext cx="1811274" cy="565392"/>
+          </a:xfrm>
+          <a:prstGeom prst="wedgeRoundRectCallout">
+            <a:avLst>
+              <a:gd name="adj1" fmla="val -39716"/>
+              <a:gd name="adj2" fmla="val -73302"/>
+              <a:gd name="adj3" fmla="val 16667"/>
+            </a:avLst>
+          </a:prstGeom>
+        </p:spPr>
+        <p:style>
+          <a:lnRef idx="2">
+            <a:schemeClr val="accent2">
+              <a:shade val="15000"/>
+            </a:schemeClr>
+          </a:lnRef>
+          <a:fillRef idx="1">
+            <a:schemeClr val="accent2"/>
+          </a:fillRef>
+          <a:effectRef idx="0">
+            <a:schemeClr val="accent2"/>
+          </a:effectRef>
+          <a:fontRef idx="minor">
+            <a:schemeClr val="lt1"/>
+          </a:fontRef>
+        </p:style>
+        <p:txBody>
+          <a:bodyPr rtlCol="0" anchor="ctr"/>
+          <a:lstStyle/>
+          <a:p>
+            <a:pPr algn="ctr"/>
+            <a:r>
+              <a:rPr lang="en-US" sz="1600" dirty="0"/>
+              <a:t>Value at different time steps</a:t>
+            </a:r>
+          </a:p>
+        </p:txBody>
+      </p:sp>
     </p:spTree>
     <p:extLst>
       <p:ext uri="{BB962C8B-B14F-4D97-AF65-F5344CB8AC3E}">
@@ -14065,13 +16130,13 @@
           </p:spPr>
           <p:style>
             <a:lnRef idx="2">
-              <a:schemeClr val="accent1"/>
+              <a:schemeClr val="accent2"/>
             </a:lnRef>
             <a:fillRef idx="0">
-              <a:schemeClr val="accent1"/>
+              <a:schemeClr val="accent2"/>
             </a:fillRef>
             <a:effectRef idx="1">
-              <a:schemeClr val="accent1"/>
+              <a:schemeClr val="accent2"/>
             </a:effectRef>
             <a:fontRef idx="minor">
               <a:schemeClr val="tx1"/>
@@ -14116,7 +16181,11 @@
             <a:p>
               <a:pPr algn="ctr"/>
               <a:r>
-                <a:rPr lang="en-US" dirty="0"/>
+                <a:rPr lang="en-US" dirty="0">
+                  <a:solidFill>
+                    <a:schemeClr val="accent2"/>
+                  </a:solidFill>
+                </a:rPr>
                 <a:t>MC Error over complete episode</a:t>
               </a:r>
             </a:p>
@@ -14166,13 +16235,13 @@
           </p:spPr>
           <p:style>
             <a:lnRef idx="2">
-              <a:schemeClr val="accent1"/>
+              <a:schemeClr val="accent2"/>
             </a:lnRef>
             <a:fillRef idx="0">
-              <a:schemeClr val="accent1"/>
+              <a:schemeClr val="accent2"/>
             </a:fillRef>
             <a:effectRef idx="1">
-              <a:schemeClr val="accent1"/>
+              <a:schemeClr val="accent2"/>
             </a:effectRef>
             <a:fontRef idx="minor">
               <a:schemeClr val="tx1"/>
@@ -14217,7 +16286,11 @@
             <a:p>
               <a:pPr algn="ctr"/>
               <a:r>
-                <a:rPr lang="en-US" dirty="0"/>
+                <a:rPr lang="en-US" dirty="0">
+                  <a:solidFill>
+                    <a:schemeClr val="accent2"/>
+                  </a:solidFill>
+                </a:rPr>
                 <a:t>TD Error for one step</a:t>
               </a:r>
             </a:p>
@@ -14288,8 +16361,8 @@
             </a:p>
           </p:txBody>
         </p:sp>
-        <mc:AlternateContent xmlns:mc="http://schemas.openxmlformats.org/markup-compatibility/2006" xmlns:a14="http://schemas.microsoft.com/office/drawing/2010/main">
-          <mc:Choice Requires="a14">
+        <mc:AlternateContent xmlns:mc="http://schemas.openxmlformats.org/markup-compatibility/2006">
+          <mc:Choice xmlns:a14="http://schemas.microsoft.com/office/drawing/2010/main" Requires="a14">
             <p:sp>
               <p:nvSpPr>
                 <p:cNvPr id="13" name="TextBox 12">
@@ -14320,7 +16393,11 @@
                 <a:p>
                   <a:pPr algn="ctr"/>
                   <a:r>
-                    <a:rPr lang="en-US" dirty="0"/>
+                    <a:rPr lang="en-US" dirty="0">
+                      <a:solidFill>
+                        <a:schemeClr val="tx2"/>
+                      </a:solidFill>
+                    </a:rPr>
                     <a:t>Uses reward + estimate for next state = target </a:t>
                   </a:r>
                   <a14:m>
@@ -14329,6 +16406,9 @@
                         <m:sSubPr>
                           <m:ctrlPr>
                             <a:rPr lang="en-US" b="0" i="1" smtClean="0">
+                              <a:solidFill>
+                                <a:schemeClr val="tx2"/>
+                              </a:solidFill>
                               <a:latin typeface="Cambria Math" panose="02040503050406030204" pitchFamily="18" charset="0"/>
                             </a:rPr>
                           </m:ctrlPr>
@@ -14336,6 +16416,9 @@
                         <m:e>
                           <m:r>
                             <a:rPr lang="en-US" b="0" i="1" smtClean="0">
+                              <a:solidFill>
+                                <a:schemeClr val="tx2"/>
+                              </a:solidFill>
                               <a:latin typeface="Cambria Math" panose="02040503050406030204" pitchFamily="18" charset="0"/>
                             </a:rPr>
                             <m:t>𝑈</m:t>
@@ -14344,6 +16427,9 @@
                         <m:sub>
                           <m:r>
                             <a:rPr lang="en-US" b="0" i="1" smtClean="0">
+                              <a:solidFill>
+                                <a:schemeClr val="tx2"/>
+                              </a:solidFill>
                               <a:latin typeface="Cambria Math" panose="02040503050406030204" pitchFamily="18" charset="0"/>
                             </a:rPr>
                             <m:t>𝑡</m:t>
@@ -14352,12 +16438,16 @@
                       </m:sSub>
                     </m:oMath>
                   </a14:m>
-                  <a:endParaRPr lang="en-US" dirty="0"/>
+                  <a:endParaRPr lang="en-US" dirty="0">
+                    <a:solidFill>
+                      <a:schemeClr val="tx2"/>
+                    </a:solidFill>
+                  </a:endParaRPr>
                 </a:p>
               </p:txBody>
             </p:sp>
           </mc:Choice>
-          <mc:Fallback xmlns="">
+          <mc:Fallback>
             <p:sp>
               <p:nvSpPr>
                 <p:cNvPr id="13" name="TextBox 12">
@@ -14451,7 +16541,7 @@
             <a:pPr algn="ctr"/>
             <a:r>
               <a:rPr lang="en-US" dirty="0"/>
-              <a:t>Compare with the incremental Implementation of MC methods.</a:t>
+              <a:t>Compare with the incremental update  Implementation of MC methods.</a:t>
             </a:r>
           </a:p>
         </p:txBody>
@@ -14546,8 +16636,8 @@
           </a:prstGeom>
         </p:spPr>
       </p:pic>
-      <mc:AlternateContent xmlns:mc="http://schemas.openxmlformats.org/markup-compatibility/2006" xmlns:a14="http://schemas.microsoft.com/office/drawing/2010/main">
-        <mc:Choice Requires="a14">
+      <mc:AlternateContent xmlns:mc="http://schemas.openxmlformats.org/markup-compatibility/2006">
+        <mc:Choice xmlns:a14="http://schemas.microsoft.com/office/drawing/2010/main" Requires="a14">
           <p:sp>
             <p:nvSpPr>
               <p:cNvPr id="8" name="TextBox 7">
@@ -14563,7 +16653,7 @@
             <p:spPr>
               <a:xfrm>
                 <a:off x="1081924" y="5151353"/>
-                <a:ext cx="10271876" cy="369332"/>
+                <a:ext cx="10271876" cy="646331"/>
               </a:xfrm>
               <a:prstGeom prst="rect">
                 <a:avLst/>
@@ -14616,7 +16706,7 @@
                 </a14:m>
                 <a:r>
                   <a:rPr lang="en-US" dirty="0"/>
-                  <a:t> since we need </a:t>
+                  <a:t> since we need to observe a complete </a:t>
                 </a:r>
                 <a14:m>
                   <m:oMath xmlns:m="http://schemas.openxmlformats.org/officeDocument/2006/math">
@@ -14630,58 +16720,95 @@
                       <a:rPr lang="en-US" b="0" i="1" smtClean="0">
                         <a:latin typeface="Cambria Math" panose="02040503050406030204" pitchFamily="18" charset="0"/>
                       </a:rPr>
+                      <m:t>,</m:t>
+                    </m:r>
+                    <m:r>
+                      <a:rPr lang="en-US" b="0" i="1" smtClean="0">
+                        <a:latin typeface="Cambria Math" panose="02040503050406030204" pitchFamily="18" charset="0"/>
+                      </a:rPr>
+                      <m:t>𝐴</m:t>
+                    </m:r>
+                    <m:r>
+                      <a:rPr lang="en-US" b="0" i="1" smtClean="0">
+                        <a:latin typeface="Cambria Math" panose="02040503050406030204" pitchFamily="18" charset="0"/>
+                      </a:rPr>
+                      <m:t>,</m:t>
+                    </m:r>
+                    <m:r>
+                      <a:rPr lang="en-US" b="0" i="1" smtClean="0">
+                        <a:latin typeface="Cambria Math" panose="02040503050406030204" pitchFamily="18" charset="0"/>
+                      </a:rPr>
+                      <m:t>𝑅</m:t>
+                    </m:r>
+                    <m:r>
+                      <a:rPr lang="en-US" b="0" i="1" smtClean="0">
+                        <a:latin typeface="Cambria Math" panose="02040503050406030204" pitchFamily="18" charset="0"/>
+                      </a:rPr>
+                      <m:t>,</m:t>
+                    </m:r>
+                    <m:r>
+                      <a:rPr lang="en-US" b="0" i="1" smtClean="0">
+                        <a:latin typeface="Cambria Math" panose="02040503050406030204" pitchFamily="18" charset="0"/>
+                      </a:rPr>
+                      <m:t>𝑆</m:t>
+                    </m:r>
+                    <m:r>
+                      <a:rPr lang="en-US" b="0" i="1" smtClean="0">
+                        <a:latin typeface="Cambria Math" panose="02040503050406030204" pitchFamily="18" charset="0"/>
+                      </a:rPr>
                       <m:t>′</m:t>
                     </m:r>
                   </m:oMath>
                 </a14:m>
                 <a:r>
                   <a:rPr lang="en-US" dirty="0"/>
-                  <a:t> and the reward </a:t>
+                  <a:t> interaction and </a:t>
                 </a:r>
                 <a14:m>
                   <m:oMath xmlns:m="http://schemas.openxmlformats.org/officeDocument/2006/math">
-                    <m:sSub>
-                      <m:sSubPr>
-                        <m:ctrlPr>
-                          <a:rPr lang="en-US" b="0" i="1" smtClean="0">
-                            <a:latin typeface="Cambria Math" panose="02040503050406030204" pitchFamily="18" charset="0"/>
-                          </a:rPr>
-                        </m:ctrlPr>
-                      </m:sSubPr>
-                      <m:e>
-                        <m:r>
-                          <a:rPr lang="en-US" b="0" i="1" smtClean="0">
-                            <a:latin typeface="Cambria Math" panose="02040503050406030204" pitchFamily="18" charset="0"/>
-                          </a:rPr>
-                          <m:t>𝑅</m:t>
-                        </m:r>
-                      </m:e>
-                      <m:sub>
-                        <m:r>
-                          <a:rPr lang="en-US" b="0" i="1" smtClean="0">
-                            <a:latin typeface="Cambria Math" panose="02040503050406030204" pitchFamily="18" charset="0"/>
-                          </a:rPr>
-                          <m:t>𝑡</m:t>
-                        </m:r>
-                        <m:r>
-                          <a:rPr lang="en-US" b="0" i="1" smtClean="0">
-                            <a:latin typeface="Cambria Math" panose="02040503050406030204" pitchFamily="18" charset="0"/>
-                          </a:rPr>
-                          <m:t>+1</m:t>
-                        </m:r>
-                      </m:sub>
-                    </m:sSub>
+                    <m:r>
+                      <a:rPr lang="en-US" b="0" i="1" smtClean="0">
+                        <a:latin typeface="Cambria Math" panose="02040503050406030204" pitchFamily="18" charset="0"/>
+                      </a:rPr>
+                      <m:t>𝑆</m:t>
+                    </m:r>
+                    <m:r>
+                      <a:rPr lang="en-US" b="0" i="1" smtClean="0">
+                        <a:latin typeface="Cambria Math" panose="02040503050406030204" pitchFamily="18" charset="0"/>
+                      </a:rPr>
+                      <m:t>′</m:t>
+                    </m:r>
                   </m:oMath>
                 </a14:m>
                 <a:r>
                   <a:rPr lang="en-US" dirty="0"/>
-                  <a:t>!</a:t>
+                  <a:t> is observed at </a:t>
+                </a:r>
+                <a14:m>
+                  <m:oMath xmlns:m="http://schemas.openxmlformats.org/officeDocument/2006/math">
+                    <m:r>
+                      <a:rPr lang="en-US" b="0" i="1" smtClean="0">
+                        <a:latin typeface="Cambria Math" panose="02040503050406030204" pitchFamily="18" charset="0"/>
+                      </a:rPr>
+                      <m:t>𝑡</m:t>
+                    </m:r>
+                    <m:r>
+                      <a:rPr lang="en-US" b="0" i="1" smtClean="0">
+                        <a:latin typeface="Cambria Math" panose="02040503050406030204" pitchFamily="18" charset="0"/>
+                      </a:rPr>
+                      <m:t>+1</m:t>
+                    </m:r>
+                  </m:oMath>
+                </a14:m>
+                <a:r>
+                  <a:rPr lang="en-US" dirty="0"/>
+                  <a:t>.</a:t>
                 </a:r>
               </a:p>
             </p:txBody>
           </p:sp>
         </mc:Choice>
-        <mc:Fallback xmlns="">
+        <mc:Fallback>
           <p:sp>
             <p:nvSpPr>
               <p:cNvPr id="8" name="TextBox 7">
@@ -14699,7 +16826,7 @@
             <p:spPr>
               <a:xfrm>
                 <a:off x="1081924" y="5151353"/>
-                <a:ext cx="10271876" cy="369332"/>
+                <a:ext cx="10271876" cy="646331"/>
               </a:xfrm>
               <a:prstGeom prst="rect">
                 <a:avLst/>
@@ -14707,7 +16834,7 @@
               <a:blipFill>
                 <a:blip r:embed="rId3"/>
                 <a:stretch>
-                  <a:fillRect l="-474" t="-6557" b="-26230"/>
+                  <a:fillRect l="-474" t="-3774" b="-15094"/>
                 </a:stretch>
               </a:blipFill>
             </p:spPr>
@@ -14784,8 +16911,8 @@
           </a:p>
         </p:txBody>
       </p:sp>
-      <mc:AlternateContent xmlns:mc="http://schemas.openxmlformats.org/markup-compatibility/2006" xmlns:a14="http://schemas.microsoft.com/office/drawing/2010/main">
-        <mc:Choice Requires="a14">
+      <mc:AlternateContent xmlns:mc="http://schemas.openxmlformats.org/markup-compatibility/2006">
+        <mc:Choice xmlns:a14="http://schemas.microsoft.com/office/drawing/2010/main" Requires="a14">
           <p:sp>
             <p:nvSpPr>
               <p:cNvPr id="3" name="Content Placeholder 2">
@@ -14885,11 +17012,11 @@
               <a:p>
                 <a:r>
                   <a:rPr lang="en-US" b="1" dirty="0"/>
-                  <a:t>Model-free</a:t>
+                  <a:t>Model-free:</a:t>
                 </a:r>
                 <a:r>
                   <a:rPr lang="en-US" dirty="0"/>
-                  <a:t>. Only needs samples.</a:t>
+                  <a:t> Only needs samples.</a:t>
                 </a:r>
                 <a:br>
                   <a:rPr lang="en-US" dirty="0"/>
@@ -14986,7 +17113,7 @@
             </p:txBody>
           </p:sp>
         </mc:Choice>
-        <mc:Fallback xmlns="">
+        <mc:Fallback>
           <p:sp>
             <p:nvSpPr>
               <p:cNvPr id="3" name="Content Placeholder 2">
@@ -15107,7 +17234,7 @@
           <a:p>
             <a:r>
               <a:rPr lang="en-US" dirty="0"/>
-              <a:t>Find a good policy.</a:t>
+              <a:t>Find a good policy online while you use it.</a:t>
             </a:r>
           </a:p>
         </p:txBody>
@@ -15170,8 +17297,8 @@
           </a:p>
         </p:txBody>
       </p:sp>
-      <mc:AlternateContent xmlns:mc="http://schemas.openxmlformats.org/markup-compatibility/2006" xmlns:a14="http://schemas.microsoft.com/office/drawing/2010/main">
-        <mc:Choice Requires="a14">
+      <mc:AlternateContent xmlns:mc="http://schemas.openxmlformats.org/markup-compatibility/2006">
+        <mc:Choice xmlns:a14="http://schemas.microsoft.com/office/drawing/2010/main" Requires="a14">
           <p:sp>
             <p:nvSpPr>
               <p:cNvPr id="3" name="Content Placeholder 2">
@@ -15188,7 +17315,12 @@
                 <p:ph idx="1"/>
               </p:nvPr>
             </p:nvSpPr>
-            <p:spPr/>
+            <p:spPr>
+              <a:xfrm>
+                <a:off x="838200" y="1397330"/>
+                <a:ext cx="8815351" cy="4779633"/>
+              </a:xfrm>
+            </p:spPr>
             <p:txBody>
               <a:bodyPr>
                 <a:normAutofit fontScale="92500" lnSpcReduction="10000"/>
@@ -15201,8 +17333,11 @@
                 </a:r>
                 <a:r>
                   <a:rPr lang="en-US" dirty="0"/>
-                  <a:t>: Use GPI with TD methods for policy evaluation (prediction).</a:t>
-                </a:r>
+                  <a:t>: Use GPI with TD methods for policy evaluation.</a:t>
+                </a:r>
+              </a:p>
+              <a:p>
+                <a:endParaRPr lang="en-US" b="1" dirty="0"/>
               </a:p>
               <a:p>
                 <a:r>
@@ -15274,7 +17409,7 @@
                 </a14:m>
                 <a:r>
                   <a:rPr lang="en-US" dirty="0"/>
-                  <a:t> using the </a:t>
+                  <a:t> using a </a:t>
                 </a:r>
                 <a14:m>
                   <m:oMath xmlns:m="http://schemas.openxmlformats.org/officeDocument/2006/math">
@@ -15288,41 +17423,7 @@
                 </a14:m>
                 <a:r>
                   <a:rPr lang="en-US" dirty="0"/>
-                  <a:t>-table for current behavior </a:t>
-                </a:r>
-                <a14:m>
-                  <m:oMath xmlns:m="http://schemas.openxmlformats.org/officeDocument/2006/math">
-                    <m:r>
-                      <a:rPr lang="en-US" b="0" i="1" smtClean="0">
-                        <a:latin typeface="Cambria Math" panose="02040503050406030204" pitchFamily="18" charset="0"/>
-                      </a:rPr>
-                      <m:t>𝜋</m:t>
-                    </m:r>
-                  </m:oMath>
-                </a14:m>
-                <a:r>
-                  <a:rPr lang="en-US" dirty="0"/>
-                  <a:t> like TD prediction for </a:t>
-                </a:r>
-                <a14:m>
-                  <m:oMath xmlns:m="http://schemas.openxmlformats.org/officeDocument/2006/math">
-                    <m:r>
-                      <a:rPr lang="en-US" i="1" dirty="0" smtClean="0">
-                        <a:latin typeface="Cambria Math" panose="02040503050406030204" pitchFamily="18" charset="0"/>
-                      </a:rPr>
-                      <m:t>𝑉</m:t>
-                    </m:r>
-                    <m:r>
-                      <a:rPr lang="en-US" b="0" i="1" smtClean="0">
-                        <a:latin typeface="Cambria Math" panose="02040503050406030204" pitchFamily="18" charset="0"/>
-                      </a:rPr>
-                      <m:t>.</m:t>
-                    </m:r>
-                  </m:oMath>
-                </a14:m>
-                <a:r>
-                  <a:rPr lang="en-US" dirty="0"/>
-                  <a:t> </a:t>
+                  <a:t>-table with updates:</a:t>
                 </a:r>
               </a:p>
               <a:p>
@@ -15858,7 +17959,7 @@
               <a:p>
                 <a:r>
                   <a:rPr lang="en-US" b="1" dirty="0"/>
-                  <a:t>Prediction</a:t>
+                  <a:t>Improvement</a:t>
                 </a:r>
                 <a:r>
                   <a:rPr lang="en-US" dirty="0"/>
@@ -15884,8 +17985,12 @@
               </a:p>
               <a:p>
                 <a:r>
+                  <a:rPr lang="en-US" b="1" dirty="0"/>
+                  <a:t>Note</a:t>
+                </a:r>
+                <a:r>
                   <a:rPr lang="en-US" dirty="0"/>
-                  <a:t>Note: Update uses </a:t>
+                  <a:t>: Update uses </a:t>
                 </a:r>
                 <a14:m>
                   <m:oMath xmlns:m="http://schemas.openxmlformats.org/officeDocument/2006/math">
@@ -16082,7 +18187,7 @@
             </p:txBody>
           </p:sp>
         </mc:Choice>
-        <mc:Fallback xmlns="">
+        <mc:Fallback>
           <p:sp>
             <p:nvSpPr>
               <p:cNvPr id="3" name="Content Placeholder 2">
@@ -16100,10 +18205,14 @@
               </p:nvPr>
             </p:nvSpPr>
             <p:spPr>
+              <a:xfrm>
+                <a:off x="838200" y="1397330"/>
+                <a:ext cx="8815351" cy="4779633"/>
+              </a:xfrm>
               <a:blipFill>
                 <a:blip r:embed="rId2"/>
                 <a:stretch>
-                  <a:fillRect l="-928" t="-2551" r="-522"/>
+                  <a:fillRect l="-1107" t="-2551" r="-968" b="-2423"/>
                 </a:stretch>
               </a:blipFill>
             </p:spPr>
@@ -16122,6 +18231,160 @@
           </p:sp>
         </mc:Fallback>
       </mc:AlternateContent>
+      <p:grpSp>
+        <p:nvGrpSpPr>
+          <p:cNvPr id="4" name="Group 3">
+            <a:extLst>
+              <a:ext uri="{FF2B5EF4-FFF2-40B4-BE49-F238E27FC236}">
+                <a16:creationId xmlns:a16="http://schemas.microsoft.com/office/drawing/2014/main" id="{834ACF09-360E-2E24-9C97-07D69E85A4F4}"/>
+              </a:ext>
+            </a:extLst>
+          </p:cNvPr>
+          <p:cNvGrpSpPr/>
+          <p:nvPr/>
+        </p:nvGrpSpPr>
+        <p:grpSpPr>
+          <a:xfrm>
+            <a:off x="9576769" y="204828"/>
+            <a:ext cx="2310430" cy="2111873"/>
+            <a:chOff x="8990601" y="218543"/>
+            <a:chExt cx="3001301" cy="2828670"/>
+          </a:xfrm>
+        </p:grpSpPr>
+        <p:pic>
+          <p:nvPicPr>
+            <p:cNvPr id="5" name="Content Placeholder 4">
+              <a:extLst>
+                <a:ext uri="{FF2B5EF4-FFF2-40B4-BE49-F238E27FC236}">
+                  <a16:creationId xmlns:a16="http://schemas.microsoft.com/office/drawing/2014/main" id="{14459B7C-6F39-0B15-A90A-5AC1F819BC03}"/>
+                </a:ext>
+              </a:extLst>
+            </p:cNvPr>
+            <p:cNvPicPr>
+              <a:picLocks noChangeAspect="1"/>
+            </p:cNvPicPr>
+            <p:nvPr/>
+          </p:nvPicPr>
+          <p:blipFill>
+            <a:blip r:embed="rId3"/>
+            <a:stretch>
+              <a:fillRect/>
+            </a:stretch>
+          </p:blipFill>
+          <p:spPr>
+            <a:xfrm>
+              <a:off x="8990601" y="218543"/>
+              <a:ext cx="2936007" cy="2828670"/>
+            </a:xfrm>
+            <a:prstGeom prst="rect">
+              <a:avLst/>
+            </a:prstGeom>
+          </p:spPr>
+        </p:pic>
+        <p:sp>
+          <p:nvSpPr>
+            <p:cNvPr id="6" name="TextBox 5">
+              <a:extLst>
+                <a:ext uri="{FF2B5EF4-FFF2-40B4-BE49-F238E27FC236}">
+                  <a16:creationId xmlns:a16="http://schemas.microsoft.com/office/drawing/2014/main" id="{915FDFB7-32DA-E7BC-97BA-735B16C98EB2}"/>
+                </a:ext>
+              </a:extLst>
+            </p:cNvPr>
+            <p:cNvSpPr txBox="1"/>
+            <p:nvPr/>
+          </p:nvSpPr>
+          <p:spPr>
+            <a:xfrm>
+              <a:off x="10107262" y="1309193"/>
+              <a:ext cx="687748" cy="453464"/>
+            </a:xfrm>
+            <a:prstGeom prst="rect">
+              <a:avLst/>
+            </a:prstGeom>
+          </p:spPr>
+          <p:style>
+            <a:lnRef idx="3">
+              <a:schemeClr val="lt1"/>
+            </a:lnRef>
+            <a:fillRef idx="1">
+              <a:schemeClr val="accent2"/>
+            </a:fillRef>
+            <a:effectRef idx="1">
+              <a:schemeClr val="accent2"/>
+            </a:effectRef>
+            <a:fontRef idx="minor">
+              <a:schemeClr val="lt1"/>
+            </a:fontRef>
+          </p:style>
+          <p:txBody>
+            <a:bodyPr wrap="square" rtlCol="0">
+              <a:spAutoFit/>
+            </a:bodyPr>
+            <a:lstStyle/>
+            <a:p>
+              <a:pPr algn="ctr"/>
+              <a:r>
+                <a:rPr lang="en-US" sz="1600" dirty="0"/>
+                <a:t>GPI</a:t>
+              </a:r>
+            </a:p>
+          </p:txBody>
+        </p:sp>
+        <p:sp>
+          <p:nvSpPr>
+            <p:cNvPr id="7" name="Rectangle 6">
+              <a:extLst>
+                <a:ext uri="{FF2B5EF4-FFF2-40B4-BE49-F238E27FC236}">
+                  <a16:creationId xmlns:a16="http://schemas.microsoft.com/office/drawing/2014/main" id="{54C9C71F-1C03-4588-F4B8-107859426DCC}"/>
+                </a:ext>
+              </a:extLst>
+            </p:cNvPr>
+            <p:cNvSpPr/>
+            <p:nvPr/>
+          </p:nvSpPr>
+          <p:spPr>
+            <a:xfrm>
+              <a:off x="8990601" y="218543"/>
+              <a:ext cx="3001301" cy="2727081"/>
+            </a:xfrm>
+            <a:prstGeom prst="rect">
+              <a:avLst/>
+            </a:prstGeom>
+            <a:noFill/>
+            <a:ln w="28575" cap="flat" cmpd="sng" algn="ctr">
+              <a:solidFill>
+                <a:schemeClr val="accent2"/>
+              </a:solidFill>
+              <a:prstDash val="solid"/>
+              <a:round/>
+              <a:headEnd type="none" w="med" len="med"/>
+              <a:tailEnd type="none" w="med" len="med"/>
+            </a:ln>
+          </p:spPr>
+          <p:style>
+            <a:lnRef idx="0">
+              <a:scrgbClr r="0" g="0" b="0"/>
+            </a:lnRef>
+            <a:fillRef idx="0">
+              <a:scrgbClr r="0" g="0" b="0"/>
+            </a:fillRef>
+            <a:effectRef idx="0">
+              <a:scrgbClr r="0" g="0" b="0"/>
+            </a:effectRef>
+            <a:fontRef idx="minor">
+              <a:schemeClr val="accent2"/>
+            </a:fontRef>
+          </p:style>
+          <p:txBody>
+            <a:bodyPr rtlCol="0" anchor="ctr"/>
+            <a:lstStyle/>
+            <a:p>
+              <a:pPr algn="ctr"/>
+              <a:endParaRPr lang="en-US"/>
+            </a:p>
+          </p:txBody>
+        </p:sp>
+      </p:grpSp>
     </p:spTree>
     <p:extLst>
       <p:ext uri="{BB962C8B-B14F-4D97-AF65-F5344CB8AC3E}">

--- a/slides/Lecture_Chapter06.pptx
+++ b/slides/Lecture_Chapter06.pptx
@@ -336,7 +336,7 @@
           <a:p>
             <a:fld id="{3E22BF2E-04DA-469E-97C5-BB68A0368813}" type="datetimeFigureOut">
               <a:rPr lang="en-US" smtClean="0"/>
-              <a:t>2/1/2026</a:t>
+              <a:t>2/3/2026</a:t>
             </a:fld>
             <a:endParaRPr lang="en-US"/>
           </a:p>
@@ -534,7 +534,7 @@
           <a:p>
             <a:fld id="{3E22BF2E-04DA-469E-97C5-BB68A0368813}" type="datetimeFigureOut">
               <a:rPr lang="en-US" smtClean="0"/>
-              <a:t>2/1/2026</a:t>
+              <a:t>2/3/2026</a:t>
             </a:fld>
             <a:endParaRPr lang="en-US"/>
           </a:p>
@@ -742,7 +742,7 @@
           <a:p>
             <a:fld id="{3E22BF2E-04DA-469E-97C5-BB68A0368813}" type="datetimeFigureOut">
               <a:rPr lang="en-US" smtClean="0"/>
-              <a:t>2/1/2026</a:t>
+              <a:t>2/3/2026</a:t>
             </a:fld>
             <a:endParaRPr lang="en-US"/>
           </a:p>
@@ -950,7 +950,7 @@
           <a:p>
             <a:fld id="{3E22BF2E-04DA-469E-97C5-BB68A0368813}" type="datetimeFigureOut">
               <a:rPr lang="en-US" smtClean="0"/>
-              <a:t>2/1/2026</a:t>
+              <a:t>2/3/2026</a:t>
             </a:fld>
             <a:endParaRPr lang="en-US"/>
           </a:p>
@@ -1225,7 +1225,7 @@
           <a:p>
             <a:fld id="{3E22BF2E-04DA-469E-97C5-BB68A0368813}" type="datetimeFigureOut">
               <a:rPr lang="en-US" smtClean="0"/>
-              <a:t>2/1/2026</a:t>
+              <a:t>2/3/2026</a:t>
             </a:fld>
             <a:endParaRPr lang="en-US"/>
           </a:p>
@@ -1490,7 +1490,7 @@
           <a:p>
             <a:fld id="{3E22BF2E-04DA-469E-97C5-BB68A0368813}" type="datetimeFigureOut">
               <a:rPr lang="en-US" smtClean="0"/>
-              <a:t>2/1/2026</a:t>
+              <a:t>2/3/2026</a:t>
             </a:fld>
             <a:endParaRPr lang="en-US"/>
           </a:p>
@@ -1902,7 +1902,7 @@
           <a:p>
             <a:fld id="{3E22BF2E-04DA-469E-97C5-BB68A0368813}" type="datetimeFigureOut">
               <a:rPr lang="en-US" smtClean="0"/>
-              <a:t>2/1/2026</a:t>
+              <a:t>2/3/2026</a:t>
             </a:fld>
             <a:endParaRPr lang="en-US"/>
           </a:p>
@@ -2043,7 +2043,7 @@
           <a:p>
             <a:fld id="{3E22BF2E-04DA-469E-97C5-BB68A0368813}" type="datetimeFigureOut">
               <a:rPr lang="en-US" smtClean="0"/>
-              <a:t>2/1/2026</a:t>
+              <a:t>2/3/2026</a:t>
             </a:fld>
             <a:endParaRPr lang="en-US"/>
           </a:p>
@@ -2156,7 +2156,7 @@
           <a:p>
             <a:fld id="{3E22BF2E-04DA-469E-97C5-BB68A0368813}" type="datetimeFigureOut">
               <a:rPr lang="en-US" smtClean="0"/>
-              <a:t>2/1/2026</a:t>
+              <a:t>2/3/2026</a:t>
             </a:fld>
             <a:endParaRPr lang="en-US"/>
           </a:p>
@@ -2467,7 +2467,7 @@
           <a:p>
             <a:fld id="{3E22BF2E-04DA-469E-97C5-BB68A0368813}" type="datetimeFigureOut">
               <a:rPr lang="en-US" smtClean="0"/>
-              <a:t>2/1/2026</a:t>
+              <a:t>2/3/2026</a:t>
             </a:fld>
             <a:endParaRPr lang="en-US"/>
           </a:p>
@@ -2755,7 +2755,7 @@
           <a:p>
             <a:fld id="{3E22BF2E-04DA-469E-97C5-BB68A0368813}" type="datetimeFigureOut">
               <a:rPr lang="en-US" smtClean="0"/>
-              <a:t>2/1/2026</a:t>
+              <a:t>2/3/2026</a:t>
             </a:fld>
             <a:endParaRPr lang="en-US"/>
           </a:p>
@@ -2996,7 +2996,7 @@
           <a:p>
             <a:fld id="{3E22BF2E-04DA-469E-97C5-BB68A0368813}" type="datetimeFigureOut">
               <a:rPr lang="en-US" smtClean="0"/>
-              <a:t>2/1/2026</a:t>
+              <a:t>2/3/2026</a:t>
             </a:fld>
             <a:endParaRPr lang="en-US"/>
           </a:p>
@@ -3513,7 +3513,7 @@
         </p:blipFill>
         <p:spPr bwMode="auto">
           <a:xfrm>
-            <a:off x="3523485" y="10"/>
+            <a:off x="3523488" y="10"/>
             <a:ext cx="8668512" cy="6857990"/>
           </a:xfrm>
           <a:prstGeom prst="rect">
@@ -4073,7 +4073,7 @@
           <a:p>
             <a:r>
               <a:rPr lang="en-US" dirty="0"/>
-              <a:t>Alg. Sarsa</a:t>
+              <a:t>Alg. Sarsa: On-Policy TD Control</a:t>
             </a:r>
           </a:p>
         </p:txBody>
@@ -4254,13 +4254,13 @@
         </p:nvSpPr>
         <p:spPr>
           <a:xfrm>
-            <a:off x="9520928" y="5646943"/>
-            <a:ext cx="2261570" cy="638683"/>
+            <a:off x="9520928" y="5182520"/>
+            <a:ext cx="2261570" cy="736650"/>
           </a:xfrm>
           <a:prstGeom prst="wedgeRoundRectCallout">
             <a:avLst>
-              <a:gd name="adj1" fmla="val -76886"/>
-              <a:gd name="adj2" fmla="val -115675"/>
+              <a:gd name="adj1" fmla="val -83676"/>
+              <a:gd name="adj2" fmla="val -32350"/>
               <a:gd name="adj3" fmla="val 16667"/>
             </a:avLst>
           </a:prstGeom>
@@ -4288,11 +4288,139 @@
             <a:pPr algn="ctr"/>
             <a:r>
               <a:rPr lang="en-US" sz="1400" dirty="0"/>
-              <a:t>Follow the policy derived from the Q-function + update the Q-function.</a:t>
+              <a:t>Update the Q-function with the observed next action.</a:t>
             </a:r>
           </a:p>
         </p:txBody>
       </p:sp>
+      <mc:AlternateContent xmlns:mc="http://schemas.openxmlformats.org/markup-compatibility/2006" xmlns:a14="http://schemas.microsoft.com/office/drawing/2010/main">
+        <mc:Choice Requires="a14">
+          <p:sp>
+            <p:nvSpPr>
+              <p:cNvPr id="8" name="Speech Bubble: Rectangle with Corners Rounded 7">
+                <a:extLst>
+                  <a:ext uri="{FF2B5EF4-FFF2-40B4-BE49-F238E27FC236}">
+                    <a16:creationId xmlns:a16="http://schemas.microsoft.com/office/drawing/2014/main" id="{B14DAA65-91EF-32D6-A741-8E2A5EF879AB}"/>
+                  </a:ext>
+                </a:extLst>
+              </p:cNvPr>
+              <p:cNvSpPr/>
+              <p:nvPr/>
+            </p:nvSpPr>
+            <p:spPr>
+              <a:xfrm>
+                <a:off x="9276040" y="3429000"/>
+                <a:ext cx="2624538" cy="488610"/>
+              </a:xfrm>
+              <a:prstGeom prst="wedgeRoundRectCallout">
+                <a:avLst>
+                  <a:gd name="adj1" fmla="val -49726"/>
+                  <a:gd name="adj2" fmla="val 74489"/>
+                  <a:gd name="adj3" fmla="val 16667"/>
+                </a:avLst>
+              </a:prstGeom>
+            </p:spPr>
+            <p:style>
+              <a:lnRef idx="2">
+                <a:schemeClr val="accent1">
+                  <a:shade val="15000"/>
+                </a:schemeClr>
+              </a:lnRef>
+              <a:fillRef idx="1">
+                <a:schemeClr val="accent1"/>
+              </a:fillRef>
+              <a:effectRef idx="0">
+                <a:schemeClr val="accent1"/>
+              </a:effectRef>
+              <a:fontRef idx="minor">
+                <a:schemeClr val="lt1"/>
+              </a:fontRef>
+            </p:style>
+            <p:txBody>
+              <a:bodyPr rtlCol="0" anchor="ctr"/>
+              <a:lstStyle/>
+              <a:p>
+                <a:pPr algn="ctr"/>
+                <a:r>
+                  <a:rPr lang="en-US" sz="1400" dirty="0"/>
+                  <a:t>Follow and learn a soft policy. On-policy means </a:t>
+                </a:r>
+                <a14:m>
+                  <m:oMath xmlns:m="http://schemas.openxmlformats.org/officeDocument/2006/math">
+                    <m:r>
+                      <a:rPr lang="en-US" sz="1400" b="0" i="1" smtClean="0">
+                        <a:latin typeface="Cambria Math" panose="02040503050406030204" pitchFamily="18" charset="0"/>
+                      </a:rPr>
+                      <m:t>𝜋</m:t>
+                    </m:r>
+                    <m:r>
+                      <a:rPr lang="en-US" sz="1400" b="0" i="1" smtClean="0">
+                        <a:latin typeface="Cambria Math" panose="02040503050406030204" pitchFamily="18" charset="0"/>
+                      </a:rPr>
+                      <m:t>=</m:t>
+                    </m:r>
+                    <m:r>
+                      <a:rPr lang="en-US" sz="1400" b="0" i="1" smtClean="0">
+                        <a:latin typeface="Cambria Math" panose="02040503050406030204" pitchFamily="18" charset="0"/>
+                      </a:rPr>
+                      <m:t>𝑏</m:t>
+                    </m:r>
+                  </m:oMath>
+                </a14:m>
+                <a:endParaRPr lang="en-US" sz="1400" dirty="0"/>
+              </a:p>
+            </p:txBody>
+          </p:sp>
+        </mc:Choice>
+        <mc:Fallback xmlns="">
+          <p:sp>
+            <p:nvSpPr>
+              <p:cNvPr id="8" name="Speech Bubble: Rectangle with Corners Rounded 7">
+                <a:extLst>
+                  <a:ext uri="{FF2B5EF4-FFF2-40B4-BE49-F238E27FC236}">
+                    <a16:creationId xmlns:a16="http://schemas.microsoft.com/office/drawing/2014/main" id="{B14DAA65-91EF-32D6-A741-8E2A5EF879AB}"/>
+                  </a:ext>
+                </a:extLst>
+              </p:cNvPr>
+              <p:cNvSpPr>
+                <a:spLocks noRot="1" noChangeAspect="1" noMove="1" noResize="1" noEditPoints="1" noAdjustHandles="1" noChangeArrowheads="1" noChangeShapeType="1" noTextEdit="1"/>
+              </p:cNvSpPr>
+              <p:nvPr/>
+            </p:nvSpPr>
+            <p:spPr>
+              <a:xfrm>
+                <a:off x="9276040" y="3429000"/>
+                <a:ext cx="2624538" cy="488610"/>
+              </a:xfrm>
+              <a:prstGeom prst="wedgeRoundRectCallout">
+                <a:avLst>
+                  <a:gd name="adj1" fmla="val -49726"/>
+                  <a:gd name="adj2" fmla="val 74489"/>
+                  <a:gd name="adj3" fmla="val 16667"/>
+                </a:avLst>
+              </a:prstGeom>
+              <a:blipFill>
+                <a:blip r:embed="rId4"/>
+                <a:stretch>
+                  <a:fillRect t="-3846"/>
+                </a:stretch>
+              </a:blipFill>
+            </p:spPr>
+            <p:txBody>
+              <a:bodyPr/>
+              <a:lstStyle/>
+              <a:p>
+                <a:r>
+                  <a:rPr lang="en-US">
+                    <a:noFill/>
+                  </a:rPr>
+                  <a:t> </a:t>
+                </a:r>
+              </a:p>
+            </p:txBody>
+          </p:sp>
+        </mc:Fallback>
+      </mc:AlternateContent>
     </p:spTree>
     <p:extLst>
       <p:ext uri="{BB962C8B-B14F-4D97-AF65-F5344CB8AC3E}">
@@ -4444,8 +4572,8 @@
           </a:p>
         </p:txBody>
       </p:sp>
-      <mc:AlternateContent xmlns:mc="http://schemas.openxmlformats.org/markup-compatibility/2006">
-        <mc:Choice xmlns:a14="http://schemas.microsoft.com/office/drawing/2010/main" Requires="a14">
+      <mc:AlternateContent xmlns:mc="http://schemas.openxmlformats.org/markup-compatibility/2006" xmlns:a14="http://schemas.microsoft.com/office/drawing/2010/main">
+        <mc:Choice Requires="a14">
           <p:sp>
             <p:nvSpPr>
               <p:cNvPr id="3" name="Content Placeholder 2">
@@ -4477,7 +4605,7 @@
               <a:p>
                 <a:r>
                   <a:rPr lang="en-US" dirty="0"/>
-                  <a:t>Update rule only uses observed Sars:</a:t>
+                  <a:t>Update rule only uses observed Sars from the behavior policy:</a:t>
                 </a:r>
               </a:p>
               <a:p>
@@ -4982,7 +5110,7 @@
                 </a14:m>
                 <a:r>
                   <a:rPr lang="en-US" dirty="0"/>
-                  <a:t> independent of the behavior policy being followed! </a:t>
+                  <a:t> independent of the behavior policy being followed because it chooses the next action greedy for the target policy.</a:t>
                 </a:r>
               </a:p>
               <a:p>
@@ -5018,7 +5146,7 @@
             </p:txBody>
           </p:sp>
         </mc:Choice>
-        <mc:Fallback>
+        <mc:Fallback xmlns="">
           <p:sp>
             <p:nvSpPr>
               <p:cNvPr id="3" name="Content Placeholder 2">
@@ -5039,7 +5167,7 @@
               <a:blipFill>
                 <a:blip r:embed="rId2"/>
                 <a:stretch>
-                  <a:fillRect l="-928" t="-3189"/>
+                  <a:fillRect l="-928" t="-3189" r="-638" b="-383"/>
                 </a:stretch>
               </a:blipFill>
             </p:spPr>
@@ -5072,13 +5200,13 @@
         </p:nvSpPr>
         <p:spPr>
           <a:xfrm>
-            <a:off x="7147676" y="3354377"/>
-            <a:ext cx="4143302" cy="432769"/>
+            <a:off x="6749808" y="3354377"/>
+            <a:ext cx="4541170" cy="432769"/>
           </a:xfrm>
           <a:prstGeom prst="wedgeRoundRectCallout">
             <a:avLst>
-              <a:gd name="adj1" fmla="val -17411"/>
-              <a:gd name="adj2" fmla="val -157547"/>
+              <a:gd name="adj1" fmla="val -17872"/>
+              <a:gd name="adj2" fmla="val -147870"/>
               <a:gd name="adj3" fmla="val 16667"/>
             </a:avLst>
           </a:prstGeom>
@@ -5106,7 +5234,7 @@
             <a:pPr algn="ctr"/>
             <a:r>
               <a:rPr lang="en-US" sz="1400" dirty="0"/>
-              <a:t>The next action has not yet been observed. It pretends the greedy/optimal action will be chosen!</a:t>
+              <a:t>The next action has not yet been observed. It updates with the greedy/optimal action for the target policy!</a:t>
             </a:r>
           </a:p>
         </p:txBody>
@@ -5410,8 +5538,8 @@
           </a:fontRef>
         </p:style>
       </p:cxnSp>
-      <mc:AlternateContent xmlns:mc="http://schemas.openxmlformats.org/markup-compatibility/2006">
-        <mc:Choice xmlns:a14="http://schemas.microsoft.com/office/drawing/2010/main" Requires="a14">
+      <mc:AlternateContent xmlns:mc="http://schemas.openxmlformats.org/markup-compatibility/2006" xmlns:a14="http://schemas.microsoft.com/office/drawing/2010/main">
+        <mc:Choice Requires="a14">
           <p:sp>
             <p:nvSpPr>
               <p:cNvPr id="14" name="Speech Bubble: Rectangle with Corners Rounded 13">
@@ -5566,7 +5694,7 @@
             </p:txBody>
           </p:sp>
         </mc:Choice>
-        <mc:Fallback>
+        <mc:Fallback xmlns="">
           <p:sp>
             <p:nvSpPr>
               <p:cNvPr id="14" name="Speech Bubble: Rectangle with Corners Rounded 13">
@@ -6760,16 +6888,32 @@
         </p:nvSpPr>
         <p:spPr>
           <a:xfrm>
-            <a:off x="838200" y="6035201"/>
-            <a:ext cx="10515600" cy="585939"/>
+            <a:off x="894041" y="6205804"/>
+            <a:ext cx="10515600" cy="383915"/>
           </a:xfrm>
           <a:prstGeom prst="rect">
             <a:avLst/>
           </a:prstGeom>
         </p:spPr>
+        <p:style>
+          <a:lnRef idx="2">
+            <a:schemeClr val="accent3">
+              <a:shade val="15000"/>
+            </a:schemeClr>
+          </a:lnRef>
+          <a:fillRef idx="1">
+            <a:schemeClr val="accent3"/>
+          </a:fillRef>
+          <a:effectRef idx="0">
+            <a:schemeClr val="accent3"/>
+          </a:effectRef>
+          <a:fontRef idx="minor">
+            <a:schemeClr val="lt1"/>
+          </a:fontRef>
+        </p:style>
         <p:txBody>
           <a:bodyPr vert="horz" lIns="91440" tIns="45720" rIns="91440" bIns="45720" rtlCol="0">
-            <a:normAutofit fontScale="77500" lnSpcReduction="20000"/>
+            <a:normAutofit/>
           </a:bodyPr>
           <a:lstStyle>
             <a:lvl1pPr marL="228600" indent="-228600" algn="l" defTabSz="914400" rtl="0" eaLnBrk="1" latinLnBrk="0" hangingPunct="1">
@@ -6936,9 +7080,24 @@
             </a:lvl9pPr>
           </a:lstStyle>
           <a:p>
+            <a:pPr marL="0" indent="0">
+              <a:buNone/>
+            </a:pPr>
             <a:r>
-              <a:rPr lang="en-US" dirty="0"/>
-              <a:t>Sarsa and Expected Sarsa have a similar bias and double learning extensions for these algorithms also exist.</a:t>
+              <a:rPr lang="en-US" sz="1800" b="1" dirty="0">
+                <a:solidFill>
+                  <a:schemeClr val="bg1"/>
+                </a:solidFill>
+              </a:rPr>
+              <a:t>Note</a:t>
+            </a:r>
+            <a:r>
+              <a:rPr lang="en-US" sz="1800" dirty="0">
+                <a:solidFill>
+                  <a:schemeClr val="bg1"/>
+                </a:solidFill>
+              </a:rPr>
+              <a:t>: All TD methods have a similar bias, and double learning extensions for these algorithms also exist.</a:t>
             </a:r>
           </a:p>
         </p:txBody>
@@ -7100,8 +7259,8 @@
           </a:p>
         </p:txBody>
       </p:sp>
-      <mc:AlternateContent xmlns:mc="http://schemas.openxmlformats.org/markup-compatibility/2006">
-        <mc:Choice xmlns:a14="http://schemas.microsoft.com/office/drawing/2010/main" Requires="a14">
+      <mc:AlternateContent xmlns:mc="http://schemas.openxmlformats.org/markup-compatibility/2006" xmlns:a14="http://schemas.microsoft.com/office/drawing/2010/main">
+        <mc:Choice Requires="a14">
           <p:sp>
             <p:nvSpPr>
               <p:cNvPr id="3" name="Content Placeholder 2">
@@ -8167,7 +8326,7 @@
             </p:txBody>
           </p:sp>
         </mc:Choice>
-        <mc:Fallback>
+        <mc:Fallback xmlns="">
           <p:sp>
             <p:nvSpPr>
               <p:cNvPr id="3" name="Content Placeholder 2">
@@ -8405,761 +8564,6 @@
           </a:p>
         </p:txBody>
       </p:sp>
-      <p:pic>
-        <p:nvPicPr>
-          <p:cNvPr id="5" name="Picture 4">
-            <a:extLst>
-              <a:ext uri="{FF2B5EF4-FFF2-40B4-BE49-F238E27FC236}">
-                <a16:creationId xmlns:a16="http://schemas.microsoft.com/office/drawing/2014/main" id="{F027D81A-F2A7-9C05-925E-39F3F345BA1A}"/>
-              </a:ext>
-            </a:extLst>
-          </p:cNvPr>
-          <p:cNvPicPr>
-            <a:picLocks noChangeAspect="1"/>
-          </p:cNvPicPr>
-          <p:nvPr/>
-        </p:nvPicPr>
-        <p:blipFill>
-          <a:blip r:embed="rId2"/>
-          <a:stretch>
-            <a:fillRect/>
-          </a:stretch>
-        </p:blipFill>
-        <p:spPr>
-          <a:xfrm>
-            <a:off x="4578940" y="3640886"/>
-            <a:ext cx="5734850" cy="2229161"/>
-          </a:xfrm>
-          <a:prstGeom prst="rect">
-            <a:avLst/>
-          </a:prstGeom>
-        </p:spPr>
-      </p:pic>
-      <p:pic>
-        <p:nvPicPr>
-          <p:cNvPr id="7" name="Picture 6">
-            <a:extLst>
-              <a:ext uri="{FF2B5EF4-FFF2-40B4-BE49-F238E27FC236}">
-                <a16:creationId xmlns:a16="http://schemas.microsoft.com/office/drawing/2014/main" id="{D1A8F4E1-AA11-EA65-8209-64A2D6CE0DBB}"/>
-              </a:ext>
-            </a:extLst>
-          </p:cNvPr>
-          <p:cNvPicPr>
-            <a:picLocks noChangeAspect="1"/>
-          </p:cNvPicPr>
-          <p:nvPr/>
-        </p:nvPicPr>
-        <p:blipFill>
-          <a:blip r:embed="rId3"/>
-          <a:stretch>
-            <a:fillRect/>
-          </a:stretch>
-        </p:blipFill>
-        <p:spPr>
-          <a:xfrm>
-            <a:off x="1674286" y="3731387"/>
-            <a:ext cx="1038370" cy="2048161"/>
-          </a:xfrm>
-          <a:prstGeom prst="rect">
-            <a:avLst/>
-          </a:prstGeom>
-        </p:spPr>
-      </p:pic>
-      <mc:AlternateContent xmlns:mc="http://schemas.openxmlformats.org/markup-compatibility/2006" xmlns:a14="http://schemas.microsoft.com/office/drawing/2010/main">
-        <mc:Choice Requires="a14">
-          <p:sp>
-            <p:nvSpPr>
-              <p:cNvPr id="9" name="TextBox 8">
-                <a:extLst>
-                  <a:ext uri="{FF2B5EF4-FFF2-40B4-BE49-F238E27FC236}">
-                    <a16:creationId xmlns:a16="http://schemas.microsoft.com/office/drawing/2014/main" id="{7CBB00F4-1A5A-D5B1-1923-30E7AB671293}"/>
-                  </a:ext>
-                </a:extLst>
-              </p:cNvPr>
-              <p:cNvSpPr txBox="1"/>
-              <p:nvPr/>
-            </p:nvSpPr>
-            <p:spPr>
-              <a:xfrm>
-                <a:off x="2298329" y="4446711"/>
-                <a:ext cx="650243" cy="369332"/>
-              </a:xfrm>
-              <a:prstGeom prst="rect">
-                <a:avLst/>
-              </a:prstGeom>
-              <a:noFill/>
-            </p:spPr>
-            <p:txBody>
-              <a:bodyPr wrap="none" rtlCol="0">
-                <a:spAutoFit/>
-              </a:bodyPr>
-              <a:lstStyle/>
-              <a:p>
-                <a:pPr/>
-                <a14:m>
-                  <m:oMathPara xmlns:m="http://schemas.openxmlformats.org/officeDocument/2006/math">
-                    <m:oMathParaPr>
-                      <m:jc m:val="centerGroup"/>
-                    </m:oMathParaPr>
-                    <m:oMath xmlns:m="http://schemas.openxmlformats.org/officeDocument/2006/math">
-                      <m:sSub>
-                        <m:sSubPr>
-                          <m:ctrlPr>
-                            <a:rPr lang="en-US" b="0" i="1" smtClean="0">
-                              <a:latin typeface="Cambria Math" panose="02040503050406030204" pitchFamily="18" charset="0"/>
-                            </a:rPr>
-                          </m:ctrlPr>
-                        </m:sSubPr>
-                        <m:e>
-                          <m:r>
-                            <a:rPr lang="en-US" b="0" i="1" smtClean="0">
-                              <a:latin typeface="Cambria Math" panose="02040503050406030204" pitchFamily="18" charset="0"/>
-                            </a:rPr>
-                            <m:t>𝑆</m:t>
-                          </m:r>
-                        </m:e>
-                        <m:sub>
-                          <m:r>
-                            <a:rPr lang="en-US" b="0" i="1" smtClean="0">
-                              <a:latin typeface="Cambria Math" panose="02040503050406030204" pitchFamily="18" charset="0"/>
-                            </a:rPr>
-                            <m:t>𝑡</m:t>
-                          </m:r>
-                          <m:r>
-                            <a:rPr lang="en-US" b="0" i="1" smtClean="0">
-                              <a:latin typeface="Cambria Math" panose="02040503050406030204" pitchFamily="18" charset="0"/>
-                            </a:rPr>
-                            <m:t>+1</m:t>
-                          </m:r>
-                        </m:sub>
-                      </m:sSub>
-                    </m:oMath>
-                  </m:oMathPara>
-                </a14:m>
-                <a:endParaRPr lang="en-US" dirty="0"/>
-              </a:p>
-            </p:txBody>
-          </p:sp>
-        </mc:Choice>
-        <mc:Fallback xmlns="">
-          <p:sp>
-            <p:nvSpPr>
-              <p:cNvPr id="9" name="TextBox 8">
-                <a:extLst>
-                  <a:ext uri="{FF2B5EF4-FFF2-40B4-BE49-F238E27FC236}">
-                    <a16:creationId xmlns:a16="http://schemas.microsoft.com/office/drawing/2014/main" id="{7CBB00F4-1A5A-D5B1-1923-30E7AB671293}"/>
-                  </a:ext>
-                </a:extLst>
-              </p:cNvPr>
-              <p:cNvSpPr txBox="1">
-                <a:spLocks noRot="1" noChangeAspect="1" noMove="1" noResize="1" noEditPoints="1" noAdjustHandles="1" noChangeArrowheads="1" noChangeShapeType="1" noTextEdit="1"/>
-              </p:cNvSpPr>
-              <p:nvPr/>
-            </p:nvSpPr>
-            <p:spPr>
-              <a:xfrm>
-                <a:off x="2298329" y="4446711"/>
-                <a:ext cx="650243" cy="369332"/>
-              </a:xfrm>
-              <a:prstGeom prst="rect">
-                <a:avLst/>
-              </a:prstGeom>
-              <a:blipFill>
-                <a:blip r:embed="rId5"/>
-                <a:stretch>
-                  <a:fillRect/>
-                </a:stretch>
-              </a:blipFill>
-            </p:spPr>
-            <p:txBody>
-              <a:bodyPr/>
-              <a:lstStyle/>
-              <a:p>
-                <a:r>
-                  <a:rPr lang="en-US">
-                    <a:noFill/>
-                  </a:rPr>
-                  <a:t> </a:t>
-                </a:r>
-              </a:p>
-            </p:txBody>
-          </p:sp>
-        </mc:Fallback>
-      </mc:AlternateContent>
-      <mc:AlternateContent xmlns:mc="http://schemas.openxmlformats.org/markup-compatibility/2006" xmlns:a14="http://schemas.microsoft.com/office/drawing/2010/main">
-        <mc:Choice Requires="a14">
-          <p:sp>
-            <p:nvSpPr>
-              <p:cNvPr id="11" name="TextBox 10">
-                <a:extLst>
-                  <a:ext uri="{FF2B5EF4-FFF2-40B4-BE49-F238E27FC236}">
-                    <a16:creationId xmlns:a16="http://schemas.microsoft.com/office/drawing/2014/main" id="{AAD4DCAB-8567-439C-FC82-BD0F72977E73}"/>
-                  </a:ext>
-                </a:extLst>
-              </p:cNvPr>
-              <p:cNvSpPr txBox="1"/>
-              <p:nvPr/>
-            </p:nvSpPr>
-            <p:spPr>
-              <a:xfrm>
-                <a:off x="2298330" y="5096376"/>
-                <a:ext cx="602038" cy="369332"/>
-              </a:xfrm>
-              <a:prstGeom prst="rect">
-                <a:avLst/>
-              </a:prstGeom>
-              <a:noFill/>
-            </p:spPr>
-            <p:txBody>
-              <a:bodyPr wrap="square">
-                <a:spAutoFit/>
-              </a:bodyPr>
-              <a:lstStyle/>
-              <a:p>
-                <a:pPr/>
-                <a14:m>
-                  <m:oMathPara xmlns:m="http://schemas.openxmlformats.org/officeDocument/2006/math">
-                    <m:oMathParaPr>
-                      <m:jc m:val="centerGroup"/>
-                    </m:oMathParaPr>
-                    <m:oMath xmlns:m="http://schemas.openxmlformats.org/officeDocument/2006/math">
-                      <m:sSub>
-                        <m:sSubPr>
-                          <m:ctrlPr>
-                            <a:rPr lang="en-US" b="0" i="1" smtClean="0">
-                              <a:latin typeface="Cambria Math" panose="02040503050406030204" pitchFamily="18" charset="0"/>
-                            </a:rPr>
-                          </m:ctrlPr>
-                        </m:sSubPr>
-                        <m:e>
-                          <m:r>
-                            <a:rPr lang="en-US" b="0" i="1" smtClean="0">
-                              <a:latin typeface="Cambria Math" panose="02040503050406030204" pitchFamily="18" charset="0"/>
-                            </a:rPr>
-                            <m:t>𝐴</m:t>
-                          </m:r>
-                        </m:e>
-                        <m:sub>
-                          <m:r>
-                            <a:rPr lang="en-US" b="0" i="1" smtClean="0">
-                              <a:latin typeface="Cambria Math" panose="02040503050406030204" pitchFamily="18" charset="0"/>
-                            </a:rPr>
-                            <m:t>𝑡</m:t>
-                          </m:r>
-                          <m:r>
-                            <a:rPr lang="en-US" b="0" i="1" smtClean="0">
-                              <a:latin typeface="Cambria Math" panose="02040503050406030204" pitchFamily="18" charset="0"/>
-                            </a:rPr>
-                            <m:t>+1</m:t>
-                          </m:r>
-                        </m:sub>
-                      </m:sSub>
-                    </m:oMath>
-                  </m:oMathPara>
-                </a14:m>
-                <a:endParaRPr lang="en-US" dirty="0"/>
-              </a:p>
-            </p:txBody>
-          </p:sp>
-        </mc:Choice>
-        <mc:Fallback xmlns="">
-          <p:sp>
-            <p:nvSpPr>
-              <p:cNvPr id="11" name="TextBox 10">
-                <a:extLst>
-                  <a:ext uri="{FF2B5EF4-FFF2-40B4-BE49-F238E27FC236}">
-                    <a16:creationId xmlns:a16="http://schemas.microsoft.com/office/drawing/2014/main" id="{AAD4DCAB-8567-439C-FC82-BD0F72977E73}"/>
-                  </a:ext>
-                </a:extLst>
-              </p:cNvPr>
-              <p:cNvSpPr txBox="1">
-                <a:spLocks noRot="1" noChangeAspect="1" noMove="1" noResize="1" noEditPoints="1" noAdjustHandles="1" noChangeArrowheads="1" noChangeShapeType="1" noTextEdit="1"/>
-              </p:cNvSpPr>
-              <p:nvPr/>
-            </p:nvSpPr>
-            <p:spPr>
-              <a:xfrm>
-                <a:off x="2298330" y="5096376"/>
-                <a:ext cx="602038" cy="369332"/>
-              </a:xfrm>
-              <a:prstGeom prst="rect">
-                <a:avLst/>
-              </a:prstGeom>
-              <a:blipFill>
-                <a:blip r:embed="rId6"/>
-                <a:stretch>
-                  <a:fillRect/>
-                </a:stretch>
-              </a:blipFill>
-            </p:spPr>
-            <p:txBody>
-              <a:bodyPr/>
-              <a:lstStyle/>
-              <a:p>
-                <a:r>
-                  <a:rPr lang="en-US">
-                    <a:noFill/>
-                  </a:rPr>
-                  <a:t> </a:t>
-                </a:r>
-              </a:p>
-            </p:txBody>
-          </p:sp>
-        </mc:Fallback>
-      </mc:AlternateContent>
-      <mc:AlternateContent xmlns:mc="http://schemas.openxmlformats.org/markup-compatibility/2006" xmlns:a14="http://schemas.microsoft.com/office/drawing/2010/main">
-        <mc:Choice Requires="a14">
-          <p:sp>
-            <p:nvSpPr>
-              <p:cNvPr id="12" name="TextBox 11">
-                <a:extLst>
-                  <a:ext uri="{FF2B5EF4-FFF2-40B4-BE49-F238E27FC236}">
-                    <a16:creationId xmlns:a16="http://schemas.microsoft.com/office/drawing/2014/main" id="{AE811601-E15B-A2EA-6A3C-8E69FECEDE50}"/>
-                  </a:ext>
-                </a:extLst>
-              </p:cNvPr>
-              <p:cNvSpPr txBox="1"/>
-              <p:nvPr/>
-            </p:nvSpPr>
-            <p:spPr>
-              <a:xfrm>
-                <a:off x="2186529" y="3775749"/>
-                <a:ext cx="602038" cy="369332"/>
-              </a:xfrm>
-              <a:prstGeom prst="rect">
-                <a:avLst/>
-              </a:prstGeom>
-              <a:noFill/>
-            </p:spPr>
-            <p:txBody>
-              <a:bodyPr wrap="square">
-                <a:spAutoFit/>
-              </a:bodyPr>
-              <a:lstStyle/>
-              <a:p>
-                <a:pPr/>
-                <a14:m>
-                  <m:oMathPara xmlns:m="http://schemas.openxmlformats.org/officeDocument/2006/math">
-                    <m:oMathParaPr>
-                      <m:jc m:val="centerGroup"/>
-                    </m:oMathParaPr>
-                    <m:oMath xmlns:m="http://schemas.openxmlformats.org/officeDocument/2006/math">
-                      <m:sSub>
-                        <m:sSubPr>
-                          <m:ctrlPr>
-                            <a:rPr lang="en-US" i="1">
-                              <a:latin typeface="Cambria Math" panose="02040503050406030204" pitchFamily="18" charset="0"/>
-                            </a:rPr>
-                          </m:ctrlPr>
-                        </m:sSubPr>
-                        <m:e>
-                          <m:r>
-                            <a:rPr lang="en-US" i="1">
-                              <a:latin typeface="Cambria Math" panose="02040503050406030204" pitchFamily="18" charset="0"/>
-                            </a:rPr>
-                            <m:t>𝐴</m:t>
-                          </m:r>
-                        </m:e>
-                        <m:sub>
-                          <m:r>
-                            <a:rPr lang="en-US" i="1">
-                              <a:latin typeface="Cambria Math" panose="02040503050406030204" pitchFamily="18" charset="0"/>
-                            </a:rPr>
-                            <m:t>𝑡</m:t>
-                          </m:r>
-                        </m:sub>
-                      </m:sSub>
-                    </m:oMath>
-                  </m:oMathPara>
-                </a14:m>
-                <a:endParaRPr lang="en-US" dirty="0"/>
-              </a:p>
-            </p:txBody>
-          </p:sp>
-        </mc:Choice>
-        <mc:Fallback xmlns="">
-          <p:sp>
-            <p:nvSpPr>
-              <p:cNvPr id="12" name="TextBox 11">
-                <a:extLst>
-                  <a:ext uri="{FF2B5EF4-FFF2-40B4-BE49-F238E27FC236}">
-                    <a16:creationId xmlns:a16="http://schemas.microsoft.com/office/drawing/2014/main" id="{AE811601-E15B-A2EA-6A3C-8E69FECEDE50}"/>
-                  </a:ext>
-                </a:extLst>
-              </p:cNvPr>
-              <p:cNvSpPr txBox="1">
-                <a:spLocks noRot="1" noChangeAspect="1" noMove="1" noResize="1" noEditPoints="1" noAdjustHandles="1" noChangeArrowheads="1" noChangeShapeType="1" noTextEdit="1"/>
-              </p:cNvSpPr>
-              <p:nvPr/>
-            </p:nvSpPr>
-            <p:spPr>
-              <a:xfrm>
-                <a:off x="2186529" y="3775749"/>
-                <a:ext cx="602038" cy="369332"/>
-              </a:xfrm>
-              <a:prstGeom prst="rect">
-                <a:avLst/>
-              </a:prstGeom>
-              <a:blipFill>
-                <a:blip r:embed="rId7"/>
-                <a:stretch>
-                  <a:fillRect/>
-                </a:stretch>
-              </a:blipFill>
-            </p:spPr>
-            <p:txBody>
-              <a:bodyPr/>
-              <a:lstStyle/>
-              <a:p>
-                <a:r>
-                  <a:rPr lang="en-US">
-                    <a:noFill/>
-                  </a:rPr>
-                  <a:t> </a:t>
-                </a:r>
-              </a:p>
-            </p:txBody>
-          </p:sp>
-        </mc:Fallback>
-      </mc:AlternateContent>
-      <mc:AlternateContent xmlns:mc="http://schemas.openxmlformats.org/markup-compatibility/2006" xmlns:a14="http://schemas.microsoft.com/office/drawing/2010/main">
-        <mc:Choice Requires="a14">
-          <p:sp>
-            <p:nvSpPr>
-              <p:cNvPr id="13" name="TextBox 12">
-                <a:extLst>
-                  <a:ext uri="{FF2B5EF4-FFF2-40B4-BE49-F238E27FC236}">
-                    <a16:creationId xmlns:a16="http://schemas.microsoft.com/office/drawing/2014/main" id="{AF84C7A8-3D3A-7BB1-3E84-0C6C6A718B86}"/>
-                  </a:ext>
-                </a:extLst>
-              </p:cNvPr>
-              <p:cNvSpPr txBox="1"/>
-              <p:nvPr/>
-            </p:nvSpPr>
-            <p:spPr>
-              <a:xfrm>
-                <a:off x="1698460" y="4013981"/>
-                <a:ext cx="602038" cy="369332"/>
-              </a:xfrm>
-              <a:prstGeom prst="rect">
-                <a:avLst/>
-              </a:prstGeom>
-              <a:noFill/>
-            </p:spPr>
-            <p:txBody>
-              <a:bodyPr wrap="square">
-                <a:spAutoFit/>
-              </a:bodyPr>
-              <a:lstStyle/>
-              <a:p>
-                <a:pPr/>
-                <a14:m>
-                  <m:oMathPara xmlns:m="http://schemas.openxmlformats.org/officeDocument/2006/math">
-                    <m:oMathParaPr>
-                      <m:jc m:val="centerGroup"/>
-                    </m:oMathParaPr>
-                    <m:oMath xmlns:m="http://schemas.openxmlformats.org/officeDocument/2006/math">
-                      <m:sSub>
-                        <m:sSubPr>
-                          <m:ctrlPr>
-                            <a:rPr lang="en-US" i="1" smtClean="0">
-                              <a:latin typeface="Cambria Math" panose="02040503050406030204" pitchFamily="18" charset="0"/>
-                            </a:rPr>
-                          </m:ctrlPr>
-                        </m:sSubPr>
-                        <m:e>
-                          <m:r>
-                            <a:rPr lang="en-US" b="0" i="1" smtClean="0">
-                              <a:latin typeface="Cambria Math" panose="02040503050406030204" pitchFamily="18" charset="0"/>
-                            </a:rPr>
-                            <m:t>𝑅</m:t>
-                          </m:r>
-                        </m:e>
-                        <m:sub>
-                          <m:r>
-                            <a:rPr lang="en-US" i="1">
-                              <a:latin typeface="Cambria Math" panose="02040503050406030204" pitchFamily="18" charset="0"/>
-                            </a:rPr>
-                            <m:t>𝑡</m:t>
-                          </m:r>
-                          <m:r>
-                            <a:rPr lang="en-US" b="0" i="1" smtClean="0">
-                              <a:latin typeface="Cambria Math" panose="02040503050406030204" pitchFamily="18" charset="0"/>
-                            </a:rPr>
-                            <m:t>+1</m:t>
-                          </m:r>
-                        </m:sub>
-                      </m:sSub>
-                    </m:oMath>
-                  </m:oMathPara>
-                </a14:m>
-                <a:endParaRPr lang="en-US" dirty="0"/>
-              </a:p>
-            </p:txBody>
-          </p:sp>
-        </mc:Choice>
-        <mc:Fallback xmlns="">
-          <p:sp>
-            <p:nvSpPr>
-              <p:cNvPr id="13" name="TextBox 12">
-                <a:extLst>
-                  <a:ext uri="{FF2B5EF4-FFF2-40B4-BE49-F238E27FC236}">
-                    <a16:creationId xmlns:a16="http://schemas.microsoft.com/office/drawing/2014/main" id="{AF84C7A8-3D3A-7BB1-3E84-0C6C6A718B86}"/>
-                  </a:ext>
-                </a:extLst>
-              </p:cNvPr>
-              <p:cNvSpPr txBox="1">
-                <a:spLocks noRot="1" noChangeAspect="1" noMove="1" noResize="1" noEditPoints="1" noAdjustHandles="1" noChangeArrowheads="1" noChangeShapeType="1" noTextEdit="1"/>
-              </p:cNvSpPr>
-              <p:nvPr/>
-            </p:nvSpPr>
-            <p:spPr>
-              <a:xfrm>
-                <a:off x="1698460" y="4013981"/>
-                <a:ext cx="602038" cy="369332"/>
-              </a:xfrm>
-              <a:prstGeom prst="rect">
-                <a:avLst/>
-              </a:prstGeom>
-              <a:blipFill>
-                <a:blip r:embed="rId8"/>
-                <a:stretch>
-                  <a:fillRect/>
-                </a:stretch>
-              </a:blipFill>
-            </p:spPr>
-            <p:txBody>
-              <a:bodyPr/>
-              <a:lstStyle/>
-              <a:p>
-                <a:r>
-                  <a:rPr lang="en-US">
-                    <a:noFill/>
-                  </a:rPr>
-                  <a:t> </a:t>
-                </a:r>
-              </a:p>
-            </p:txBody>
-          </p:sp>
-        </mc:Fallback>
-      </mc:AlternateContent>
-      <mc:AlternateContent xmlns:mc="http://schemas.openxmlformats.org/markup-compatibility/2006" xmlns:a14="http://schemas.microsoft.com/office/drawing/2010/main">
-        <mc:Choice Requires="a14">
-          <p:sp>
-            <p:nvSpPr>
-              <p:cNvPr id="14" name="TextBox 13">
-                <a:extLst>
-                  <a:ext uri="{FF2B5EF4-FFF2-40B4-BE49-F238E27FC236}">
-                    <a16:creationId xmlns:a16="http://schemas.microsoft.com/office/drawing/2014/main" id="{89506427-5DBB-46F6-7064-8C167FF27BD1}"/>
-                  </a:ext>
-                </a:extLst>
-              </p:cNvPr>
-              <p:cNvSpPr txBox="1"/>
-              <p:nvPr/>
-            </p:nvSpPr>
-            <p:spPr>
-              <a:xfrm>
-                <a:off x="5598300" y="4661302"/>
-                <a:ext cx="647933" cy="369332"/>
-              </a:xfrm>
-              <a:prstGeom prst="rect">
-                <a:avLst/>
-              </a:prstGeom>
-              <a:noFill/>
-            </p:spPr>
-            <p:txBody>
-              <a:bodyPr wrap="none" rtlCol="0">
-                <a:spAutoFit/>
-              </a:bodyPr>
-              <a:lstStyle/>
-              <a:p>
-                <a:pPr/>
-                <a14:m>
-                  <m:oMathPara xmlns:m="http://schemas.openxmlformats.org/officeDocument/2006/math">
-                    <m:oMathParaPr>
-                      <m:jc m:val="centerGroup"/>
-                    </m:oMathParaPr>
-                    <m:oMath xmlns:m="http://schemas.openxmlformats.org/officeDocument/2006/math">
-                      <m:r>
-                        <m:rPr>
-                          <m:nor/>
-                        </m:rPr>
-                        <a:rPr lang="en-US" b="0" i="0" smtClean="0">
-                          <a:latin typeface="Cambria Math" panose="02040503050406030204" pitchFamily="18" charset="0"/>
-                        </a:rPr>
-                        <m:t>max</m:t>
-                      </m:r>
-                    </m:oMath>
-                  </m:oMathPara>
-                </a14:m>
-                <a:endParaRPr lang="en-US" dirty="0"/>
-              </a:p>
-            </p:txBody>
-          </p:sp>
-        </mc:Choice>
-        <mc:Fallback xmlns="">
-          <p:sp>
-            <p:nvSpPr>
-              <p:cNvPr id="14" name="TextBox 13">
-                <a:extLst>
-                  <a:ext uri="{FF2B5EF4-FFF2-40B4-BE49-F238E27FC236}">
-                    <a16:creationId xmlns:a16="http://schemas.microsoft.com/office/drawing/2014/main" id="{89506427-5DBB-46F6-7064-8C167FF27BD1}"/>
-                  </a:ext>
-                </a:extLst>
-              </p:cNvPr>
-              <p:cNvSpPr txBox="1">
-                <a:spLocks noRot="1" noChangeAspect="1" noMove="1" noResize="1" noEditPoints="1" noAdjustHandles="1" noChangeArrowheads="1" noChangeShapeType="1" noTextEdit="1"/>
-              </p:cNvSpPr>
-              <p:nvPr/>
-            </p:nvSpPr>
-            <p:spPr>
-              <a:xfrm>
-                <a:off x="5598300" y="4661302"/>
-                <a:ext cx="647933" cy="369332"/>
-              </a:xfrm>
-              <a:prstGeom prst="rect">
-                <a:avLst/>
-              </a:prstGeom>
-              <a:blipFill>
-                <a:blip r:embed="rId9"/>
-                <a:stretch>
-                  <a:fillRect/>
-                </a:stretch>
-              </a:blipFill>
-            </p:spPr>
-            <p:txBody>
-              <a:bodyPr/>
-              <a:lstStyle/>
-              <a:p>
-                <a:r>
-                  <a:rPr lang="en-US">
-                    <a:noFill/>
-                  </a:rPr>
-                  <a:t> </a:t>
-                </a:r>
-              </a:p>
-            </p:txBody>
-          </p:sp>
-        </mc:Fallback>
-      </mc:AlternateContent>
-      <mc:AlternateContent xmlns:mc="http://schemas.openxmlformats.org/markup-compatibility/2006" xmlns:a14="http://schemas.microsoft.com/office/drawing/2010/main">
-        <mc:Choice Requires="a14">
-          <p:sp>
-            <p:nvSpPr>
-              <p:cNvPr id="15" name="TextBox 14">
-                <a:extLst>
-                  <a:ext uri="{FF2B5EF4-FFF2-40B4-BE49-F238E27FC236}">
-                    <a16:creationId xmlns:a16="http://schemas.microsoft.com/office/drawing/2014/main" id="{21540664-58DD-C85E-EB0B-3CF84B97E40F}"/>
-                  </a:ext>
-                </a:extLst>
-              </p:cNvPr>
-              <p:cNvSpPr txBox="1"/>
-              <p:nvPr/>
-            </p:nvSpPr>
-            <p:spPr>
-              <a:xfrm>
-                <a:off x="9403340" y="4661302"/>
-                <a:ext cx="502381" cy="369332"/>
-              </a:xfrm>
-              <a:prstGeom prst="rect">
-                <a:avLst/>
-              </a:prstGeom>
-              <a:noFill/>
-            </p:spPr>
-            <p:txBody>
-              <a:bodyPr wrap="none" rtlCol="0">
-                <a:spAutoFit/>
-              </a:bodyPr>
-              <a:lstStyle/>
-              <a:p>
-                <a:pPr/>
-                <a14:m>
-                  <m:oMathPara xmlns:m="http://schemas.openxmlformats.org/officeDocument/2006/math">
-                    <m:oMathParaPr>
-                      <m:jc m:val="centerGroup"/>
-                    </m:oMathParaPr>
-                    <m:oMath xmlns:m="http://schemas.openxmlformats.org/officeDocument/2006/math">
-                      <m:sSub>
-                        <m:sSubPr>
-                          <m:ctrlPr>
-                            <a:rPr lang="en-US" b="0" i="1" smtClean="0">
-                              <a:latin typeface="Cambria Math" panose="02040503050406030204" pitchFamily="18" charset="0"/>
-                              <a:ea typeface="Cambria Math" panose="02040503050406030204" pitchFamily="18" charset="0"/>
-                            </a:rPr>
-                          </m:ctrlPr>
-                        </m:sSubPr>
-                        <m:e>
-                          <m:r>
-                            <a:rPr lang="en-US" b="0" i="1" smtClean="0">
-                              <a:latin typeface="Cambria Math" panose="02040503050406030204" pitchFamily="18" charset="0"/>
-                              <a:ea typeface="Cambria Math" panose="02040503050406030204" pitchFamily="18" charset="0"/>
-                            </a:rPr>
-                            <m:t>𝔼</m:t>
-                          </m:r>
-                        </m:e>
-                        <m:sub>
-                          <m:r>
-                            <a:rPr lang="en-US" b="0" i="1" smtClean="0">
-                              <a:latin typeface="Cambria Math" panose="02040503050406030204" pitchFamily="18" charset="0"/>
-                              <a:ea typeface="Cambria Math" panose="02040503050406030204" pitchFamily="18" charset="0"/>
-                            </a:rPr>
-                            <m:t>𝜋</m:t>
-                          </m:r>
-                        </m:sub>
-                      </m:sSub>
-                    </m:oMath>
-                  </m:oMathPara>
-                </a14:m>
-                <a:endParaRPr lang="en-US" dirty="0"/>
-              </a:p>
-            </p:txBody>
-          </p:sp>
-        </mc:Choice>
-        <mc:Fallback xmlns="">
-          <p:sp>
-            <p:nvSpPr>
-              <p:cNvPr id="15" name="TextBox 14">
-                <a:extLst>
-                  <a:ext uri="{FF2B5EF4-FFF2-40B4-BE49-F238E27FC236}">
-                    <a16:creationId xmlns:a16="http://schemas.microsoft.com/office/drawing/2014/main" id="{21540664-58DD-C85E-EB0B-3CF84B97E40F}"/>
-                  </a:ext>
-                </a:extLst>
-              </p:cNvPr>
-              <p:cNvSpPr txBox="1">
-                <a:spLocks noRot="1" noChangeAspect="1" noMove="1" noResize="1" noEditPoints="1" noAdjustHandles="1" noChangeArrowheads="1" noChangeShapeType="1" noTextEdit="1"/>
-              </p:cNvSpPr>
-              <p:nvPr/>
-            </p:nvSpPr>
-            <p:spPr>
-              <a:xfrm>
-                <a:off x="9403340" y="4661302"/>
-                <a:ext cx="502381" cy="369332"/>
-              </a:xfrm>
-              <a:prstGeom prst="rect">
-                <a:avLst/>
-              </a:prstGeom>
-              <a:blipFill>
-                <a:blip r:embed="rId10"/>
-                <a:stretch>
-                  <a:fillRect/>
-                </a:stretch>
-              </a:blipFill>
-            </p:spPr>
-            <p:txBody>
-              <a:bodyPr/>
-              <a:lstStyle/>
-              <a:p>
-                <a:r>
-                  <a:rPr lang="en-US">
-                    <a:noFill/>
-                  </a:rPr>
-                  <a:t> </a:t>
-                </a:r>
-              </a:p>
-            </p:txBody>
-          </p:sp>
-        </mc:Fallback>
-      </mc:AlternateContent>
       <p:grpSp>
         <p:nvGrpSpPr>
           <p:cNvPr id="3" name="Group 2">
@@ -9215,7 +8619,7 @@
               <p:nvPr/>
             </p:nvPicPr>
             <p:blipFill>
-              <a:blip r:embed="rId11"/>
+              <a:blip r:embed="rId2"/>
               <a:stretch>
                 <a:fillRect/>
               </a:stretch>
@@ -9945,346 +9349,1272 @@
           </mc:Fallback>
         </mc:AlternateContent>
       </p:grpSp>
-      <mc:AlternateContent xmlns:mc="http://schemas.openxmlformats.org/markup-compatibility/2006" xmlns:a14="http://schemas.microsoft.com/office/drawing/2010/main">
-        <mc:Choice Requires="a14">
-          <p:sp>
-            <p:nvSpPr>
-              <p:cNvPr id="24" name="TextBox 23">
-                <a:extLst>
-                  <a:ext uri="{FF2B5EF4-FFF2-40B4-BE49-F238E27FC236}">
-                    <a16:creationId xmlns:a16="http://schemas.microsoft.com/office/drawing/2014/main" id="{717A05C8-9D4E-0A8E-804D-7A3D0FA404D5}"/>
-                  </a:ext>
-                </a:extLst>
-              </p:cNvPr>
-              <p:cNvSpPr txBox="1"/>
-              <p:nvPr/>
-            </p:nvSpPr>
-            <p:spPr>
-              <a:xfrm>
-                <a:off x="1438370" y="3633146"/>
-                <a:ext cx="1049672" cy="285206"/>
-              </a:xfrm>
-              <a:prstGeom prst="rect">
-                <a:avLst/>
-              </a:prstGeom>
-              <a:noFill/>
-            </p:spPr>
-            <p:txBody>
-              <a:bodyPr wrap="square">
-                <a:spAutoFit/>
-              </a:bodyPr>
-              <a:lstStyle/>
-              <a:p>
-                <a:pPr/>
-                <a14:m>
-                  <m:oMathPara xmlns:m="http://schemas.openxmlformats.org/officeDocument/2006/math">
-                    <m:oMathParaPr>
-                      <m:jc m:val="centerGroup"/>
-                    </m:oMathParaPr>
-                    <m:oMath xmlns:m="http://schemas.openxmlformats.org/officeDocument/2006/math">
-                      <m:r>
-                        <a:rPr lang="en-US" sz="1200" b="0" i="1" smtClean="0">
-                          <a:latin typeface="Cambria Math" panose="02040503050406030204" pitchFamily="18" charset="0"/>
-                        </a:rPr>
-                        <m:t>𝑄</m:t>
-                      </m:r>
-                      <m:r>
-                        <a:rPr lang="en-US" sz="1200" i="1" smtClean="0">
-                          <a:latin typeface="Cambria Math" panose="02040503050406030204" pitchFamily="18" charset="0"/>
-                        </a:rPr>
-                        <m:t>(</m:t>
-                      </m:r>
-                      <m:sSub>
-                        <m:sSubPr>
-                          <m:ctrlPr>
-                            <a:rPr lang="en-US" sz="1200" i="1">
-                              <a:latin typeface="Cambria Math" panose="02040503050406030204" pitchFamily="18" charset="0"/>
-                            </a:rPr>
-                          </m:ctrlPr>
-                        </m:sSubPr>
-                        <m:e>
-                          <m:r>
-                            <a:rPr lang="en-US" sz="1200" i="1">
-                              <a:latin typeface="Cambria Math" panose="02040503050406030204" pitchFamily="18" charset="0"/>
-                            </a:rPr>
-                            <m:t>𝑆</m:t>
-                          </m:r>
-                        </m:e>
-                        <m:sub>
-                          <m:r>
-                            <a:rPr lang="en-US" sz="1200" i="1">
-                              <a:latin typeface="Cambria Math" panose="02040503050406030204" pitchFamily="18" charset="0"/>
-                            </a:rPr>
-                            <m:t>𝑡</m:t>
-                          </m:r>
-                        </m:sub>
-                      </m:sSub>
-                      <m:r>
-                        <a:rPr lang="en-US" sz="1200" b="0" i="1" smtClean="0">
-                          <a:latin typeface="Cambria Math" panose="02040503050406030204" pitchFamily="18" charset="0"/>
-                        </a:rPr>
-                        <m:t>,</m:t>
-                      </m:r>
-                      <m:sSub>
-                        <m:sSubPr>
-                          <m:ctrlPr>
-                            <a:rPr lang="en-US" sz="1200" b="0" i="1" smtClean="0">
-                              <a:latin typeface="Cambria Math" panose="02040503050406030204" pitchFamily="18" charset="0"/>
-                            </a:rPr>
-                          </m:ctrlPr>
-                        </m:sSubPr>
-                        <m:e>
-                          <m:r>
-                            <a:rPr lang="en-US" sz="1200" b="0" i="1" smtClean="0">
-                              <a:latin typeface="Cambria Math" panose="02040503050406030204" pitchFamily="18" charset="0"/>
-                            </a:rPr>
-                            <m:t>𝐴</m:t>
-                          </m:r>
-                        </m:e>
-                        <m:sub>
-                          <m:r>
-                            <a:rPr lang="en-US" sz="1200" b="0" i="1" smtClean="0">
-                              <a:latin typeface="Cambria Math" panose="02040503050406030204" pitchFamily="18" charset="0"/>
-                            </a:rPr>
-                            <m:t>𝑡</m:t>
-                          </m:r>
-                        </m:sub>
-                      </m:sSub>
-                      <m:r>
-                        <a:rPr lang="en-US" sz="1200" i="1">
-                          <a:latin typeface="Cambria Math" panose="02040503050406030204" pitchFamily="18" charset="0"/>
-                        </a:rPr>
-                        <m:t>)</m:t>
-                      </m:r>
-                    </m:oMath>
-                  </m:oMathPara>
-                </a14:m>
-                <a:endParaRPr lang="en-US" sz="1200" dirty="0"/>
-              </a:p>
-            </p:txBody>
-          </p:sp>
-        </mc:Choice>
-        <mc:Fallback xmlns="">
-          <p:sp>
-            <p:nvSpPr>
-              <p:cNvPr id="24" name="TextBox 23">
-                <a:extLst>
-                  <a:ext uri="{FF2B5EF4-FFF2-40B4-BE49-F238E27FC236}">
-                    <a16:creationId xmlns:a16="http://schemas.microsoft.com/office/drawing/2014/main" id="{717A05C8-9D4E-0A8E-804D-7A3D0FA404D5}"/>
-                  </a:ext>
-                </a:extLst>
-              </p:cNvPr>
-              <p:cNvSpPr txBox="1">
-                <a:spLocks noRot="1" noChangeAspect="1" noMove="1" noResize="1" noEditPoints="1" noAdjustHandles="1" noChangeArrowheads="1" noChangeShapeType="1" noTextEdit="1"/>
-              </p:cNvSpPr>
-              <p:nvPr/>
-            </p:nvSpPr>
-            <p:spPr>
-              <a:xfrm>
-                <a:off x="1438370" y="3633146"/>
-                <a:ext cx="1049672" cy="285206"/>
-              </a:xfrm>
-              <a:prstGeom prst="rect">
-                <a:avLst/>
-              </a:prstGeom>
-              <a:blipFill>
-                <a:blip r:embed="rId12"/>
-                <a:stretch>
-                  <a:fillRect b="-4255"/>
-                </a:stretch>
-              </a:blipFill>
-            </p:spPr>
-            <p:txBody>
-              <a:bodyPr/>
-              <a:lstStyle/>
-              <a:p>
-                <a:r>
-                  <a:rPr lang="en-US">
-                    <a:noFill/>
-                  </a:rPr>
-                  <a:t> </a:t>
-                </a:r>
-              </a:p>
-            </p:txBody>
-          </p:sp>
-        </mc:Fallback>
-      </mc:AlternateContent>
-      <mc:AlternateContent xmlns:mc="http://schemas.openxmlformats.org/markup-compatibility/2006" xmlns:a14="http://schemas.microsoft.com/office/drawing/2010/main">
-        <mc:Choice Requires="a14">
-          <p:sp>
-            <p:nvSpPr>
-              <p:cNvPr id="25" name="TextBox 24">
-                <a:extLst>
-                  <a:ext uri="{FF2B5EF4-FFF2-40B4-BE49-F238E27FC236}">
-                    <a16:creationId xmlns:a16="http://schemas.microsoft.com/office/drawing/2014/main" id="{BEED65E4-42A0-CD95-0366-21CE381124C2}"/>
-                  </a:ext>
-                </a:extLst>
-              </p:cNvPr>
-              <p:cNvSpPr txBox="1"/>
-              <p:nvPr/>
-            </p:nvSpPr>
-            <p:spPr>
-              <a:xfrm>
-                <a:off x="1203764" y="5004043"/>
-                <a:ext cx="1049672" cy="276999"/>
-              </a:xfrm>
-              <a:prstGeom prst="rect">
-                <a:avLst/>
-              </a:prstGeom>
-              <a:noFill/>
-            </p:spPr>
-            <p:txBody>
-              <a:bodyPr wrap="square">
-                <a:spAutoFit/>
-              </a:bodyPr>
-              <a:lstStyle/>
-              <a:p>
-                <a:pPr/>
-                <a14:m>
-                  <m:oMathPara xmlns:m="http://schemas.openxmlformats.org/officeDocument/2006/math">
-                    <m:oMathParaPr>
-                      <m:jc m:val="centerGroup"/>
-                    </m:oMathParaPr>
-                    <m:oMath xmlns:m="http://schemas.openxmlformats.org/officeDocument/2006/math">
-                      <m:r>
-                        <a:rPr lang="en-US" sz="1200" b="0" i="1" smtClean="0">
-                          <a:latin typeface="Cambria Math" panose="02040503050406030204" pitchFamily="18" charset="0"/>
-                        </a:rPr>
-                        <m:t>𝑄</m:t>
-                      </m:r>
-                      <m:r>
-                        <a:rPr lang="en-US" sz="1200" i="1" smtClean="0">
-                          <a:latin typeface="Cambria Math" panose="02040503050406030204" pitchFamily="18" charset="0"/>
-                        </a:rPr>
-                        <m:t>(</m:t>
-                      </m:r>
-                      <m:sSub>
-                        <m:sSubPr>
-                          <m:ctrlPr>
-                            <a:rPr lang="en-US" sz="1200" i="1">
-                              <a:latin typeface="Cambria Math" panose="02040503050406030204" pitchFamily="18" charset="0"/>
-                            </a:rPr>
-                          </m:ctrlPr>
-                        </m:sSubPr>
-                        <m:e>
-                          <m:r>
-                            <a:rPr lang="en-US" sz="1200" i="1">
-                              <a:latin typeface="Cambria Math" panose="02040503050406030204" pitchFamily="18" charset="0"/>
-                            </a:rPr>
-                            <m:t>𝑆</m:t>
-                          </m:r>
-                        </m:e>
-                        <m:sub>
-                          <m:r>
-                            <a:rPr lang="en-US" sz="1200" i="1">
-                              <a:latin typeface="Cambria Math" panose="02040503050406030204" pitchFamily="18" charset="0"/>
-                            </a:rPr>
-                            <m:t>𝑡</m:t>
-                          </m:r>
-                          <m:r>
-                            <a:rPr lang="en-US" sz="1200" i="1">
-                              <a:latin typeface="Cambria Math" panose="02040503050406030204" pitchFamily="18" charset="0"/>
-                            </a:rPr>
-                            <m:t>+1</m:t>
-                          </m:r>
-                        </m:sub>
-                      </m:sSub>
-                      <m:r>
-                        <a:rPr lang="en-US" sz="1200" b="0" i="1" smtClean="0">
-                          <a:latin typeface="Cambria Math" panose="02040503050406030204" pitchFamily="18" charset="0"/>
-                        </a:rPr>
-                        <m:t>,</m:t>
-                      </m:r>
-                      <m:sSub>
-                        <m:sSubPr>
-                          <m:ctrlPr>
-                            <a:rPr lang="en-US" sz="1200" b="0" i="1" smtClean="0">
-                              <a:latin typeface="Cambria Math" panose="02040503050406030204" pitchFamily="18" charset="0"/>
-                            </a:rPr>
-                          </m:ctrlPr>
-                        </m:sSubPr>
-                        <m:e>
-                          <m:r>
-                            <a:rPr lang="en-US" sz="1200" b="0" i="1" smtClean="0">
-                              <a:latin typeface="Cambria Math" panose="02040503050406030204" pitchFamily="18" charset="0"/>
-                            </a:rPr>
-                            <m:t>𝐴</m:t>
-                          </m:r>
-                        </m:e>
-                        <m:sub>
-                          <m:r>
-                            <a:rPr lang="en-US" sz="1200" b="0" i="1" smtClean="0">
-                              <a:latin typeface="Cambria Math" panose="02040503050406030204" pitchFamily="18" charset="0"/>
-                            </a:rPr>
-                            <m:t>𝑡</m:t>
-                          </m:r>
-                          <m:r>
-                            <a:rPr lang="en-US" sz="1200" b="0" i="1" smtClean="0">
-                              <a:latin typeface="Cambria Math" panose="02040503050406030204" pitchFamily="18" charset="0"/>
-                            </a:rPr>
-                            <m:t>+1</m:t>
-                          </m:r>
-                        </m:sub>
-                      </m:sSub>
-                      <m:r>
-                        <a:rPr lang="en-US" sz="1200" i="1">
-                          <a:latin typeface="Cambria Math" panose="02040503050406030204" pitchFamily="18" charset="0"/>
-                        </a:rPr>
-                        <m:t>)</m:t>
-                      </m:r>
-                    </m:oMath>
-                  </m:oMathPara>
-                </a14:m>
-                <a:endParaRPr lang="en-US" sz="1200" dirty="0"/>
-              </a:p>
-            </p:txBody>
-          </p:sp>
-        </mc:Choice>
-        <mc:Fallback xmlns="">
-          <p:sp>
-            <p:nvSpPr>
-              <p:cNvPr id="25" name="TextBox 24">
-                <a:extLst>
-                  <a:ext uri="{FF2B5EF4-FFF2-40B4-BE49-F238E27FC236}">
-                    <a16:creationId xmlns:a16="http://schemas.microsoft.com/office/drawing/2014/main" id="{BEED65E4-42A0-CD95-0366-21CE381124C2}"/>
-                  </a:ext>
-                </a:extLst>
-              </p:cNvPr>
-              <p:cNvSpPr txBox="1">
-                <a:spLocks noRot="1" noChangeAspect="1" noMove="1" noResize="1" noEditPoints="1" noAdjustHandles="1" noChangeArrowheads="1" noChangeShapeType="1" noTextEdit="1"/>
-              </p:cNvSpPr>
-              <p:nvPr/>
-            </p:nvSpPr>
-            <p:spPr>
-              <a:xfrm>
-                <a:off x="1203764" y="5004043"/>
-                <a:ext cx="1049672" cy="276999"/>
-              </a:xfrm>
-              <a:prstGeom prst="rect">
-                <a:avLst/>
-              </a:prstGeom>
-              <a:blipFill>
-                <a:blip r:embed="rId15"/>
-                <a:stretch>
-                  <a:fillRect b="-8889"/>
-                </a:stretch>
-              </a:blipFill>
-            </p:spPr>
-            <p:txBody>
-              <a:bodyPr/>
-              <a:lstStyle/>
-              <a:p>
-                <a:r>
-                  <a:rPr lang="en-US">
-                    <a:noFill/>
-                  </a:rPr>
-                  <a:t> </a:t>
-                </a:r>
-              </a:p>
-            </p:txBody>
-          </p:sp>
-        </mc:Fallback>
-      </mc:AlternateContent>
+      <p:grpSp>
+        <p:nvGrpSpPr>
+          <p:cNvPr id="26" name="Group 25">
+            <a:extLst>
+              <a:ext uri="{FF2B5EF4-FFF2-40B4-BE49-F238E27FC236}">
+                <a16:creationId xmlns:a16="http://schemas.microsoft.com/office/drawing/2014/main" id="{09F3288D-F473-C2C7-1246-80B469AA5262}"/>
+              </a:ext>
+            </a:extLst>
+          </p:cNvPr>
+          <p:cNvGrpSpPr/>
+          <p:nvPr/>
+        </p:nvGrpSpPr>
+        <p:grpSpPr>
+          <a:xfrm>
+            <a:off x="1203764" y="3465626"/>
+            <a:ext cx="9110026" cy="2236901"/>
+            <a:chOff x="1203764" y="3465626"/>
+            <a:chExt cx="9110026" cy="2236901"/>
+          </a:xfrm>
+        </p:grpSpPr>
+        <p:pic>
+          <p:nvPicPr>
+            <p:cNvPr id="5" name="Picture 4">
+              <a:extLst>
+                <a:ext uri="{FF2B5EF4-FFF2-40B4-BE49-F238E27FC236}">
+                  <a16:creationId xmlns:a16="http://schemas.microsoft.com/office/drawing/2014/main" id="{F027D81A-F2A7-9C05-925E-39F3F345BA1A}"/>
+                </a:ext>
+              </a:extLst>
+            </p:cNvPr>
+            <p:cNvPicPr>
+              <a:picLocks noChangeAspect="1"/>
+            </p:cNvPicPr>
+            <p:nvPr/>
+          </p:nvPicPr>
+          <p:blipFill>
+            <a:blip r:embed="rId15"/>
+            <a:stretch>
+              <a:fillRect/>
+            </a:stretch>
+          </p:blipFill>
+          <p:spPr>
+            <a:xfrm>
+              <a:off x="4578940" y="3473366"/>
+              <a:ext cx="5734850" cy="2229161"/>
+            </a:xfrm>
+            <a:prstGeom prst="rect">
+              <a:avLst/>
+            </a:prstGeom>
+          </p:spPr>
+        </p:pic>
+        <p:pic>
+          <p:nvPicPr>
+            <p:cNvPr id="7" name="Picture 6">
+              <a:extLst>
+                <a:ext uri="{FF2B5EF4-FFF2-40B4-BE49-F238E27FC236}">
+                  <a16:creationId xmlns:a16="http://schemas.microsoft.com/office/drawing/2014/main" id="{D1A8F4E1-AA11-EA65-8209-64A2D6CE0DBB}"/>
+                </a:ext>
+              </a:extLst>
+            </p:cNvPr>
+            <p:cNvPicPr>
+              <a:picLocks noChangeAspect="1"/>
+            </p:cNvPicPr>
+            <p:nvPr/>
+          </p:nvPicPr>
+          <p:blipFill>
+            <a:blip r:embed="rId16"/>
+            <a:stretch>
+              <a:fillRect/>
+            </a:stretch>
+          </p:blipFill>
+          <p:spPr>
+            <a:xfrm>
+              <a:off x="1674286" y="3563867"/>
+              <a:ext cx="1038370" cy="2048161"/>
+            </a:xfrm>
+            <a:prstGeom prst="rect">
+              <a:avLst/>
+            </a:prstGeom>
+          </p:spPr>
+        </p:pic>
+        <mc:AlternateContent xmlns:mc="http://schemas.openxmlformats.org/markup-compatibility/2006" xmlns:a14="http://schemas.microsoft.com/office/drawing/2010/main">
+          <mc:Choice Requires="a14">
+            <p:sp>
+              <p:nvSpPr>
+                <p:cNvPr id="9" name="TextBox 8">
+                  <a:extLst>
+                    <a:ext uri="{FF2B5EF4-FFF2-40B4-BE49-F238E27FC236}">
+                      <a16:creationId xmlns:a16="http://schemas.microsoft.com/office/drawing/2014/main" id="{7CBB00F4-1A5A-D5B1-1923-30E7AB671293}"/>
+                    </a:ext>
+                  </a:extLst>
+                </p:cNvPr>
+                <p:cNvSpPr txBox="1"/>
+                <p:nvPr/>
+              </p:nvSpPr>
+              <p:spPr>
+                <a:xfrm>
+                  <a:off x="2298329" y="4279191"/>
+                  <a:ext cx="650243" cy="369332"/>
+                </a:xfrm>
+                <a:prstGeom prst="rect">
+                  <a:avLst/>
+                </a:prstGeom>
+                <a:noFill/>
+              </p:spPr>
+              <p:txBody>
+                <a:bodyPr wrap="none" rtlCol="0">
+                  <a:spAutoFit/>
+                </a:bodyPr>
+                <a:lstStyle/>
+                <a:p>
+                  <a:pPr/>
+                  <a14:m>
+                    <m:oMathPara xmlns:m="http://schemas.openxmlformats.org/officeDocument/2006/math">
+                      <m:oMathParaPr>
+                        <m:jc m:val="centerGroup"/>
+                      </m:oMathParaPr>
+                      <m:oMath xmlns:m="http://schemas.openxmlformats.org/officeDocument/2006/math">
+                        <m:sSub>
+                          <m:sSubPr>
+                            <m:ctrlPr>
+                              <a:rPr lang="en-US" b="0" i="1" smtClean="0">
+                                <a:latin typeface="Cambria Math" panose="02040503050406030204" pitchFamily="18" charset="0"/>
+                              </a:rPr>
+                            </m:ctrlPr>
+                          </m:sSubPr>
+                          <m:e>
+                            <m:r>
+                              <a:rPr lang="en-US" b="0" i="1" smtClean="0">
+                                <a:latin typeface="Cambria Math" panose="02040503050406030204" pitchFamily="18" charset="0"/>
+                              </a:rPr>
+                              <m:t>𝑆</m:t>
+                            </m:r>
+                          </m:e>
+                          <m:sub>
+                            <m:r>
+                              <a:rPr lang="en-US" b="0" i="1" smtClean="0">
+                                <a:latin typeface="Cambria Math" panose="02040503050406030204" pitchFamily="18" charset="0"/>
+                              </a:rPr>
+                              <m:t>𝑡</m:t>
+                            </m:r>
+                            <m:r>
+                              <a:rPr lang="en-US" b="0" i="1" smtClean="0">
+                                <a:latin typeface="Cambria Math" panose="02040503050406030204" pitchFamily="18" charset="0"/>
+                              </a:rPr>
+                              <m:t>+1</m:t>
+                            </m:r>
+                          </m:sub>
+                        </m:sSub>
+                      </m:oMath>
+                    </m:oMathPara>
+                  </a14:m>
+                  <a:endParaRPr lang="en-US" dirty="0"/>
+                </a:p>
+              </p:txBody>
+            </p:sp>
+          </mc:Choice>
+          <mc:Fallback xmlns="">
+            <p:sp>
+              <p:nvSpPr>
+                <p:cNvPr id="9" name="TextBox 8">
+                  <a:extLst>
+                    <a:ext uri="{FF2B5EF4-FFF2-40B4-BE49-F238E27FC236}">
+                      <a16:creationId xmlns:a16="http://schemas.microsoft.com/office/drawing/2014/main" id="{7CBB00F4-1A5A-D5B1-1923-30E7AB671293}"/>
+                    </a:ext>
+                  </a:extLst>
+                </p:cNvPr>
+                <p:cNvSpPr txBox="1">
+                  <a:spLocks noRot="1" noChangeAspect="1" noMove="1" noResize="1" noEditPoints="1" noAdjustHandles="1" noChangeArrowheads="1" noChangeShapeType="1" noTextEdit="1"/>
+                </p:cNvSpPr>
+                <p:nvPr/>
+              </p:nvSpPr>
+              <p:spPr>
+                <a:xfrm>
+                  <a:off x="2298329" y="4279191"/>
+                  <a:ext cx="650243" cy="369332"/>
+                </a:xfrm>
+                <a:prstGeom prst="rect">
+                  <a:avLst/>
+                </a:prstGeom>
+                <a:blipFill>
+                  <a:blip r:embed="rId17"/>
+                  <a:stretch>
+                    <a:fillRect/>
+                  </a:stretch>
+                </a:blipFill>
+              </p:spPr>
+              <p:txBody>
+                <a:bodyPr/>
+                <a:lstStyle/>
+                <a:p>
+                  <a:r>
+                    <a:rPr lang="en-US">
+                      <a:noFill/>
+                    </a:rPr>
+                    <a:t> </a:t>
+                  </a:r>
+                </a:p>
+              </p:txBody>
+            </p:sp>
+          </mc:Fallback>
+        </mc:AlternateContent>
+        <mc:AlternateContent xmlns:mc="http://schemas.openxmlformats.org/markup-compatibility/2006" xmlns:a14="http://schemas.microsoft.com/office/drawing/2010/main">
+          <mc:Choice Requires="a14">
+            <p:sp>
+              <p:nvSpPr>
+                <p:cNvPr id="11" name="TextBox 10">
+                  <a:extLst>
+                    <a:ext uri="{FF2B5EF4-FFF2-40B4-BE49-F238E27FC236}">
+                      <a16:creationId xmlns:a16="http://schemas.microsoft.com/office/drawing/2014/main" id="{AAD4DCAB-8567-439C-FC82-BD0F72977E73}"/>
+                    </a:ext>
+                  </a:extLst>
+                </p:cNvPr>
+                <p:cNvSpPr txBox="1"/>
+                <p:nvPr/>
+              </p:nvSpPr>
+              <p:spPr>
+                <a:xfrm>
+                  <a:off x="2298330" y="4928856"/>
+                  <a:ext cx="602038" cy="369332"/>
+                </a:xfrm>
+                <a:prstGeom prst="rect">
+                  <a:avLst/>
+                </a:prstGeom>
+                <a:noFill/>
+              </p:spPr>
+              <p:txBody>
+                <a:bodyPr wrap="square">
+                  <a:spAutoFit/>
+                </a:bodyPr>
+                <a:lstStyle/>
+                <a:p>
+                  <a:pPr/>
+                  <a14:m>
+                    <m:oMathPara xmlns:m="http://schemas.openxmlformats.org/officeDocument/2006/math">
+                      <m:oMathParaPr>
+                        <m:jc m:val="centerGroup"/>
+                      </m:oMathParaPr>
+                      <m:oMath xmlns:m="http://schemas.openxmlformats.org/officeDocument/2006/math">
+                        <m:sSub>
+                          <m:sSubPr>
+                            <m:ctrlPr>
+                              <a:rPr lang="en-US" b="0" i="1" smtClean="0">
+                                <a:latin typeface="Cambria Math" panose="02040503050406030204" pitchFamily="18" charset="0"/>
+                              </a:rPr>
+                            </m:ctrlPr>
+                          </m:sSubPr>
+                          <m:e>
+                            <m:r>
+                              <a:rPr lang="en-US" b="0" i="1" smtClean="0">
+                                <a:latin typeface="Cambria Math" panose="02040503050406030204" pitchFamily="18" charset="0"/>
+                              </a:rPr>
+                              <m:t>𝐴</m:t>
+                            </m:r>
+                          </m:e>
+                          <m:sub>
+                            <m:r>
+                              <a:rPr lang="en-US" b="0" i="1" smtClean="0">
+                                <a:latin typeface="Cambria Math" panose="02040503050406030204" pitchFamily="18" charset="0"/>
+                              </a:rPr>
+                              <m:t>𝑡</m:t>
+                            </m:r>
+                            <m:r>
+                              <a:rPr lang="en-US" b="0" i="1" smtClean="0">
+                                <a:latin typeface="Cambria Math" panose="02040503050406030204" pitchFamily="18" charset="0"/>
+                              </a:rPr>
+                              <m:t>+1</m:t>
+                            </m:r>
+                          </m:sub>
+                        </m:sSub>
+                      </m:oMath>
+                    </m:oMathPara>
+                  </a14:m>
+                  <a:endParaRPr lang="en-US" dirty="0"/>
+                </a:p>
+              </p:txBody>
+            </p:sp>
+          </mc:Choice>
+          <mc:Fallback xmlns="">
+            <p:sp>
+              <p:nvSpPr>
+                <p:cNvPr id="11" name="TextBox 10">
+                  <a:extLst>
+                    <a:ext uri="{FF2B5EF4-FFF2-40B4-BE49-F238E27FC236}">
+                      <a16:creationId xmlns:a16="http://schemas.microsoft.com/office/drawing/2014/main" id="{AAD4DCAB-8567-439C-FC82-BD0F72977E73}"/>
+                    </a:ext>
+                  </a:extLst>
+                </p:cNvPr>
+                <p:cNvSpPr txBox="1">
+                  <a:spLocks noRot="1" noChangeAspect="1" noMove="1" noResize="1" noEditPoints="1" noAdjustHandles="1" noChangeArrowheads="1" noChangeShapeType="1" noTextEdit="1"/>
+                </p:cNvSpPr>
+                <p:nvPr/>
+              </p:nvSpPr>
+              <p:spPr>
+                <a:xfrm>
+                  <a:off x="2298330" y="4928856"/>
+                  <a:ext cx="602038" cy="369332"/>
+                </a:xfrm>
+                <a:prstGeom prst="rect">
+                  <a:avLst/>
+                </a:prstGeom>
+                <a:blipFill>
+                  <a:blip r:embed="rId18"/>
+                  <a:stretch>
+                    <a:fillRect/>
+                  </a:stretch>
+                </a:blipFill>
+              </p:spPr>
+              <p:txBody>
+                <a:bodyPr/>
+                <a:lstStyle/>
+                <a:p>
+                  <a:r>
+                    <a:rPr lang="en-US">
+                      <a:noFill/>
+                    </a:rPr>
+                    <a:t> </a:t>
+                  </a:r>
+                </a:p>
+              </p:txBody>
+            </p:sp>
+          </mc:Fallback>
+        </mc:AlternateContent>
+        <mc:AlternateContent xmlns:mc="http://schemas.openxmlformats.org/markup-compatibility/2006" xmlns:a14="http://schemas.microsoft.com/office/drawing/2010/main">
+          <mc:Choice Requires="a14">
+            <p:sp>
+              <p:nvSpPr>
+                <p:cNvPr id="12" name="TextBox 11">
+                  <a:extLst>
+                    <a:ext uri="{FF2B5EF4-FFF2-40B4-BE49-F238E27FC236}">
+                      <a16:creationId xmlns:a16="http://schemas.microsoft.com/office/drawing/2014/main" id="{AE811601-E15B-A2EA-6A3C-8E69FECEDE50}"/>
+                    </a:ext>
+                  </a:extLst>
+                </p:cNvPr>
+                <p:cNvSpPr txBox="1"/>
+                <p:nvPr/>
+              </p:nvSpPr>
+              <p:spPr>
+                <a:xfrm>
+                  <a:off x="2186529" y="3608229"/>
+                  <a:ext cx="602038" cy="369332"/>
+                </a:xfrm>
+                <a:prstGeom prst="rect">
+                  <a:avLst/>
+                </a:prstGeom>
+                <a:noFill/>
+              </p:spPr>
+              <p:txBody>
+                <a:bodyPr wrap="square">
+                  <a:spAutoFit/>
+                </a:bodyPr>
+                <a:lstStyle/>
+                <a:p>
+                  <a:pPr/>
+                  <a14:m>
+                    <m:oMathPara xmlns:m="http://schemas.openxmlformats.org/officeDocument/2006/math">
+                      <m:oMathParaPr>
+                        <m:jc m:val="centerGroup"/>
+                      </m:oMathParaPr>
+                      <m:oMath xmlns:m="http://schemas.openxmlformats.org/officeDocument/2006/math">
+                        <m:sSub>
+                          <m:sSubPr>
+                            <m:ctrlPr>
+                              <a:rPr lang="en-US" i="1">
+                                <a:latin typeface="Cambria Math" panose="02040503050406030204" pitchFamily="18" charset="0"/>
+                              </a:rPr>
+                            </m:ctrlPr>
+                          </m:sSubPr>
+                          <m:e>
+                            <m:r>
+                              <a:rPr lang="en-US" i="1">
+                                <a:latin typeface="Cambria Math" panose="02040503050406030204" pitchFamily="18" charset="0"/>
+                              </a:rPr>
+                              <m:t>𝐴</m:t>
+                            </m:r>
+                          </m:e>
+                          <m:sub>
+                            <m:r>
+                              <a:rPr lang="en-US" i="1">
+                                <a:latin typeface="Cambria Math" panose="02040503050406030204" pitchFamily="18" charset="0"/>
+                              </a:rPr>
+                              <m:t>𝑡</m:t>
+                            </m:r>
+                          </m:sub>
+                        </m:sSub>
+                      </m:oMath>
+                    </m:oMathPara>
+                  </a14:m>
+                  <a:endParaRPr lang="en-US" dirty="0"/>
+                </a:p>
+              </p:txBody>
+            </p:sp>
+          </mc:Choice>
+          <mc:Fallback xmlns="">
+            <p:sp>
+              <p:nvSpPr>
+                <p:cNvPr id="12" name="TextBox 11">
+                  <a:extLst>
+                    <a:ext uri="{FF2B5EF4-FFF2-40B4-BE49-F238E27FC236}">
+                      <a16:creationId xmlns:a16="http://schemas.microsoft.com/office/drawing/2014/main" id="{AE811601-E15B-A2EA-6A3C-8E69FECEDE50}"/>
+                    </a:ext>
+                  </a:extLst>
+                </p:cNvPr>
+                <p:cNvSpPr txBox="1">
+                  <a:spLocks noRot="1" noChangeAspect="1" noMove="1" noResize="1" noEditPoints="1" noAdjustHandles="1" noChangeArrowheads="1" noChangeShapeType="1" noTextEdit="1"/>
+                </p:cNvSpPr>
+                <p:nvPr/>
+              </p:nvSpPr>
+              <p:spPr>
+                <a:xfrm>
+                  <a:off x="2186529" y="3608229"/>
+                  <a:ext cx="602038" cy="369332"/>
+                </a:xfrm>
+                <a:prstGeom prst="rect">
+                  <a:avLst/>
+                </a:prstGeom>
+                <a:blipFill>
+                  <a:blip r:embed="rId19"/>
+                  <a:stretch>
+                    <a:fillRect/>
+                  </a:stretch>
+                </a:blipFill>
+              </p:spPr>
+              <p:txBody>
+                <a:bodyPr/>
+                <a:lstStyle/>
+                <a:p>
+                  <a:r>
+                    <a:rPr lang="en-US">
+                      <a:noFill/>
+                    </a:rPr>
+                    <a:t> </a:t>
+                  </a:r>
+                </a:p>
+              </p:txBody>
+            </p:sp>
+          </mc:Fallback>
+        </mc:AlternateContent>
+        <mc:AlternateContent xmlns:mc="http://schemas.openxmlformats.org/markup-compatibility/2006" xmlns:a14="http://schemas.microsoft.com/office/drawing/2010/main">
+          <mc:Choice Requires="a14">
+            <p:sp>
+              <p:nvSpPr>
+                <p:cNvPr id="13" name="TextBox 12">
+                  <a:extLst>
+                    <a:ext uri="{FF2B5EF4-FFF2-40B4-BE49-F238E27FC236}">
+                      <a16:creationId xmlns:a16="http://schemas.microsoft.com/office/drawing/2014/main" id="{AF84C7A8-3D3A-7BB1-3E84-0C6C6A718B86}"/>
+                    </a:ext>
+                  </a:extLst>
+                </p:cNvPr>
+                <p:cNvSpPr txBox="1"/>
+                <p:nvPr/>
+              </p:nvSpPr>
+              <p:spPr>
+                <a:xfrm>
+                  <a:off x="1698460" y="3846461"/>
+                  <a:ext cx="602038" cy="369332"/>
+                </a:xfrm>
+                <a:prstGeom prst="rect">
+                  <a:avLst/>
+                </a:prstGeom>
+                <a:noFill/>
+              </p:spPr>
+              <p:txBody>
+                <a:bodyPr wrap="square">
+                  <a:spAutoFit/>
+                </a:bodyPr>
+                <a:lstStyle/>
+                <a:p>
+                  <a:pPr/>
+                  <a14:m>
+                    <m:oMathPara xmlns:m="http://schemas.openxmlformats.org/officeDocument/2006/math">
+                      <m:oMathParaPr>
+                        <m:jc m:val="centerGroup"/>
+                      </m:oMathParaPr>
+                      <m:oMath xmlns:m="http://schemas.openxmlformats.org/officeDocument/2006/math">
+                        <m:sSub>
+                          <m:sSubPr>
+                            <m:ctrlPr>
+                              <a:rPr lang="en-US" i="1" smtClean="0">
+                                <a:latin typeface="Cambria Math" panose="02040503050406030204" pitchFamily="18" charset="0"/>
+                              </a:rPr>
+                            </m:ctrlPr>
+                          </m:sSubPr>
+                          <m:e>
+                            <m:r>
+                              <a:rPr lang="en-US" b="0" i="1" smtClean="0">
+                                <a:latin typeface="Cambria Math" panose="02040503050406030204" pitchFamily="18" charset="0"/>
+                              </a:rPr>
+                              <m:t>𝑅</m:t>
+                            </m:r>
+                          </m:e>
+                          <m:sub>
+                            <m:r>
+                              <a:rPr lang="en-US" i="1">
+                                <a:latin typeface="Cambria Math" panose="02040503050406030204" pitchFamily="18" charset="0"/>
+                              </a:rPr>
+                              <m:t>𝑡</m:t>
+                            </m:r>
+                            <m:r>
+                              <a:rPr lang="en-US" b="0" i="1" smtClean="0">
+                                <a:latin typeface="Cambria Math" panose="02040503050406030204" pitchFamily="18" charset="0"/>
+                              </a:rPr>
+                              <m:t>+1</m:t>
+                            </m:r>
+                          </m:sub>
+                        </m:sSub>
+                      </m:oMath>
+                    </m:oMathPara>
+                  </a14:m>
+                  <a:endParaRPr lang="en-US" dirty="0"/>
+                </a:p>
+              </p:txBody>
+            </p:sp>
+          </mc:Choice>
+          <mc:Fallback xmlns="">
+            <p:sp>
+              <p:nvSpPr>
+                <p:cNvPr id="13" name="TextBox 12">
+                  <a:extLst>
+                    <a:ext uri="{FF2B5EF4-FFF2-40B4-BE49-F238E27FC236}">
+                      <a16:creationId xmlns:a16="http://schemas.microsoft.com/office/drawing/2014/main" id="{AF84C7A8-3D3A-7BB1-3E84-0C6C6A718B86}"/>
+                    </a:ext>
+                  </a:extLst>
+                </p:cNvPr>
+                <p:cNvSpPr txBox="1">
+                  <a:spLocks noRot="1" noChangeAspect="1" noMove="1" noResize="1" noEditPoints="1" noAdjustHandles="1" noChangeArrowheads="1" noChangeShapeType="1" noTextEdit="1"/>
+                </p:cNvSpPr>
+                <p:nvPr/>
+              </p:nvSpPr>
+              <p:spPr>
+                <a:xfrm>
+                  <a:off x="1698460" y="3846461"/>
+                  <a:ext cx="602038" cy="369332"/>
+                </a:xfrm>
+                <a:prstGeom prst="rect">
+                  <a:avLst/>
+                </a:prstGeom>
+                <a:blipFill>
+                  <a:blip r:embed="rId20"/>
+                  <a:stretch>
+                    <a:fillRect/>
+                  </a:stretch>
+                </a:blipFill>
+              </p:spPr>
+              <p:txBody>
+                <a:bodyPr/>
+                <a:lstStyle/>
+                <a:p>
+                  <a:r>
+                    <a:rPr lang="en-US">
+                      <a:noFill/>
+                    </a:rPr>
+                    <a:t> </a:t>
+                  </a:r>
+                </a:p>
+              </p:txBody>
+            </p:sp>
+          </mc:Fallback>
+        </mc:AlternateContent>
+        <mc:AlternateContent xmlns:mc="http://schemas.openxmlformats.org/markup-compatibility/2006" xmlns:a14="http://schemas.microsoft.com/office/drawing/2010/main">
+          <mc:Choice Requires="a14">
+            <p:sp>
+              <p:nvSpPr>
+                <p:cNvPr id="14" name="TextBox 13">
+                  <a:extLst>
+                    <a:ext uri="{FF2B5EF4-FFF2-40B4-BE49-F238E27FC236}">
+                      <a16:creationId xmlns:a16="http://schemas.microsoft.com/office/drawing/2014/main" id="{89506427-5DBB-46F6-7064-8C167FF27BD1}"/>
+                    </a:ext>
+                  </a:extLst>
+                </p:cNvPr>
+                <p:cNvSpPr txBox="1"/>
+                <p:nvPr/>
+              </p:nvSpPr>
+              <p:spPr>
+                <a:xfrm>
+                  <a:off x="5598300" y="4493782"/>
+                  <a:ext cx="647933" cy="369332"/>
+                </a:xfrm>
+                <a:prstGeom prst="rect">
+                  <a:avLst/>
+                </a:prstGeom>
+                <a:noFill/>
+              </p:spPr>
+              <p:txBody>
+                <a:bodyPr wrap="none" rtlCol="0">
+                  <a:spAutoFit/>
+                </a:bodyPr>
+                <a:lstStyle/>
+                <a:p>
+                  <a:pPr/>
+                  <a14:m>
+                    <m:oMathPara xmlns:m="http://schemas.openxmlformats.org/officeDocument/2006/math">
+                      <m:oMathParaPr>
+                        <m:jc m:val="centerGroup"/>
+                      </m:oMathParaPr>
+                      <m:oMath xmlns:m="http://schemas.openxmlformats.org/officeDocument/2006/math">
+                        <m:r>
+                          <m:rPr>
+                            <m:nor/>
+                          </m:rPr>
+                          <a:rPr lang="en-US" b="0" i="0" smtClean="0">
+                            <a:latin typeface="Cambria Math" panose="02040503050406030204" pitchFamily="18" charset="0"/>
+                          </a:rPr>
+                          <m:t>max</m:t>
+                        </m:r>
+                      </m:oMath>
+                    </m:oMathPara>
+                  </a14:m>
+                  <a:endParaRPr lang="en-US" dirty="0"/>
+                </a:p>
+              </p:txBody>
+            </p:sp>
+          </mc:Choice>
+          <mc:Fallback xmlns="">
+            <p:sp>
+              <p:nvSpPr>
+                <p:cNvPr id="14" name="TextBox 13">
+                  <a:extLst>
+                    <a:ext uri="{FF2B5EF4-FFF2-40B4-BE49-F238E27FC236}">
+                      <a16:creationId xmlns:a16="http://schemas.microsoft.com/office/drawing/2014/main" id="{89506427-5DBB-46F6-7064-8C167FF27BD1}"/>
+                    </a:ext>
+                  </a:extLst>
+                </p:cNvPr>
+                <p:cNvSpPr txBox="1">
+                  <a:spLocks noRot="1" noChangeAspect="1" noMove="1" noResize="1" noEditPoints="1" noAdjustHandles="1" noChangeArrowheads="1" noChangeShapeType="1" noTextEdit="1"/>
+                </p:cNvSpPr>
+                <p:nvPr/>
+              </p:nvSpPr>
+              <p:spPr>
+                <a:xfrm>
+                  <a:off x="5598300" y="4493782"/>
+                  <a:ext cx="647933" cy="369332"/>
+                </a:xfrm>
+                <a:prstGeom prst="rect">
+                  <a:avLst/>
+                </a:prstGeom>
+                <a:blipFill>
+                  <a:blip r:embed="rId21"/>
+                  <a:stretch>
+                    <a:fillRect/>
+                  </a:stretch>
+                </a:blipFill>
+              </p:spPr>
+              <p:txBody>
+                <a:bodyPr/>
+                <a:lstStyle/>
+                <a:p>
+                  <a:r>
+                    <a:rPr lang="en-US">
+                      <a:noFill/>
+                    </a:rPr>
+                    <a:t> </a:t>
+                  </a:r>
+                </a:p>
+              </p:txBody>
+            </p:sp>
+          </mc:Fallback>
+        </mc:AlternateContent>
+        <mc:AlternateContent xmlns:mc="http://schemas.openxmlformats.org/markup-compatibility/2006" xmlns:a14="http://schemas.microsoft.com/office/drawing/2010/main">
+          <mc:Choice Requires="a14">
+            <p:sp>
+              <p:nvSpPr>
+                <p:cNvPr id="15" name="TextBox 14">
+                  <a:extLst>
+                    <a:ext uri="{FF2B5EF4-FFF2-40B4-BE49-F238E27FC236}">
+                      <a16:creationId xmlns:a16="http://schemas.microsoft.com/office/drawing/2014/main" id="{21540664-58DD-C85E-EB0B-3CF84B97E40F}"/>
+                    </a:ext>
+                  </a:extLst>
+                </p:cNvPr>
+                <p:cNvSpPr txBox="1"/>
+                <p:nvPr/>
+              </p:nvSpPr>
+              <p:spPr>
+                <a:xfrm>
+                  <a:off x="9403340" y="4493782"/>
+                  <a:ext cx="502381" cy="369332"/>
+                </a:xfrm>
+                <a:prstGeom prst="rect">
+                  <a:avLst/>
+                </a:prstGeom>
+                <a:noFill/>
+              </p:spPr>
+              <p:txBody>
+                <a:bodyPr wrap="none" rtlCol="0">
+                  <a:spAutoFit/>
+                </a:bodyPr>
+                <a:lstStyle/>
+                <a:p>
+                  <a:pPr/>
+                  <a14:m>
+                    <m:oMathPara xmlns:m="http://schemas.openxmlformats.org/officeDocument/2006/math">
+                      <m:oMathParaPr>
+                        <m:jc m:val="centerGroup"/>
+                      </m:oMathParaPr>
+                      <m:oMath xmlns:m="http://schemas.openxmlformats.org/officeDocument/2006/math">
+                        <m:sSub>
+                          <m:sSubPr>
+                            <m:ctrlPr>
+                              <a:rPr lang="en-US" b="0" i="1" smtClean="0">
+                                <a:latin typeface="Cambria Math" panose="02040503050406030204" pitchFamily="18" charset="0"/>
+                                <a:ea typeface="Cambria Math" panose="02040503050406030204" pitchFamily="18" charset="0"/>
+                              </a:rPr>
+                            </m:ctrlPr>
+                          </m:sSubPr>
+                          <m:e>
+                            <m:r>
+                              <a:rPr lang="en-US" b="0" i="1" smtClean="0">
+                                <a:latin typeface="Cambria Math" panose="02040503050406030204" pitchFamily="18" charset="0"/>
+                                <a:ea typeface="Cambria Math" panose="02040503050406030204" pitchFamily="18" charset="0"/>
+                              </a:rPr>
+                              <m:t>𝔼</m:t>
+                            </m:r>
+                          </m:e>
+                          <m:sub>
+                            <m:r>
+                              <a:rPr lang="en-US" b="0" i="1" smtClean="0">
+                                <a:latin typeface="Cambria Math" panose="02040503050406030204" pitchFamily="18" charset="0"/>
+                                <a:ea typeface="Cambria Math" panose="02040503050406030204" pitchFamily="18" charset="0"/>
+                              </a:rPr>
+                              <m:t>𝜋</m:t>
+                            </m:r>
+                          </m:sub>
+                        </m:sSub>
+                      </m:oMath>
+                    </m:oMathPara>
+                  </a14:m>
+                  <a:endParaRPr lang="en-US" dirty="0"/>
+                </a:p>
+              </p:txBody>
+            </p:sp>
+          </mc:Choice>
+          <mc:Fallback xmlns="">
+            <p:sp>
+              <p:nvSpPr>
+                <p:cNvPr id="15" name="TextBox 14">
+                  <a:extLst>
+                    <a:ext uri="{FF2B5EF4-FFF2-40B4-BE49-F238E27FC236}">
+                      <a16:creationId xmlns:a16="http://schemas.microsoft.com/office/drawing/2014/main" id="{21540664-58DD-C85E-EB0B-3CF84B97E40F}"/>
+                    </a:ext>
+                  </a:extLst>
+                </p:cNvPr>
+                <p:cNvSpPr txBox="1">
+                  <a:spLocks noRot="1" noChangeAspect="1" noMove="1" noResize="1" noEditPoints="1" noAdjustHandles="1" noChangeArrowheads="1" noChangeShapeType="1" noTextEdit="1"/>
+                </p:cNvSpPr>
+                <p:nvPr/>
+              </p:nvSpPr>
+              <p:spPr>
+                <a:xfrm>
+                  <a:off x="9403340" y="4493782"/>
+                  <a:ext cx="502381" cy="369332"/>
+                </a:xfrm>
+                <a:prstGeom prst="rect">
+                  <a:avLst/>
+                </a:prstGeom>
+                <a:blipFill>
+                  <a:blip r:embed="rId22"/>
+                  <a:stretch>
+                    <a:fillRect/>
+                  </a:stretch>
+                </a:blipFill>
+              </p:spPr>
+              <p:txBody>
+                <a:bodyPr/>
+                <a:lstStyle/>
+                <a:p>
+                  <a:r>
+                    <a:rPr lang="en-US">
+                      <a:noFill/>
+                    </a:rPr>
+                    <a:t> </a:t>
+                  </a:r>
+                </a:p>
+              </p:txBody>
+            </p:sp>
+          </mc:Fallback>
+        </mc:AlternateContent>
+        <mc:AlternateContent xmlns:mc="http://schemas.openxmlformats.org/markup-compatibility/2006" xmlns:a14="http://schemas.microsoft.com/office/drawing/2010/main">
+          <mc:Choice Requires="a14">
+            <p:sp>
+              <p:nvSpPr>
+                <p:cNvPr id="24" name="TextBox 23">
+                  <a:extLst>
+                    <a:ext uri="{FF2B5EF4-FFF2-40B4-BE49-F238E27FC236}">
+                      <a16:creationId xmlns:a16="http://schemas.microsoft.com/office/drawing/2014/main" id="{717A05C8-9D4E-0A8E-804D-7A3D0FA404D5}"/>
+                    </a:ext>
+                  </a:extLst>
+                </p:cNvPr>
+                <p:cNvSpPr txBox="1"/>
+                <p:nvPr/>
+              </p:nvSpPr>
+              <p:spPr>
+                <a:xfrm>
+                  <a:off x="1438370" y="3465626"/>
+                  <a:ext cx="1049672" cy="285206"/>
+                </a:xfrm>
+                <a:prstGeom prst="rect">
+                  <a:avLst/>
+                </a:prstGeom>
+                <a:noFill/>
+              </p:spPr>
+              <p:txBody>
+                <a:bodyPr wrap="square">
+                  <a:spAutoFit/>
+                </a:bodyPr>
+                <a:lstStyle/>
+                <a:p>
+                  <a:pPr/>
+                  <a14:m>
+                    <m:oMathPara xmlns:m="http://schemas.openxmlformats.org/officeDocument/2006/math">
+                      <m:oMathParaPr>
+                        <m:jc m:val="centerGroup"/>
+                      </m:oMathParaPr>
+                      <m:oMath xmlns:m="http://schemas.openxmlformats.org/officeDocument/2006/math">
+                        <m:r>
+                          <a:rPr lang="en-US" sz="1200" b="0" i="1" smtClean="0">
+                            <a:latin typeface="Cambria Math" panose="02040503050406030204" pitchFamily="18" charset="0"/>
+                          </a:rPr>
+                          <m:t>𝑄</m:t>
+                        </m:r>
+                        <m:r>
+                          <a:rPr lang="en-US" sz="1200" i="1" smtClean="0">
+                            <a:latin typeface="Cambria Math" panose="02040503050406030204" pitchFamily="18" charset="0"/>
+                          </a:rPr>
+                          <m:t>(</m:t>
+                        </m:r>
+                        <m:sSub>
+                          <m:sSubPr>
+                            <m:ctrlPr>
+                              <a:rPr lang="en-US" sz="1200" i="1">
+                                <a:latin typeface="Cambria Math" panose="02040503050406030204" pitchFamily="18" charset="0"/>
+                              </a:rPr>
+                            </m:ctrlPr>
+                          </m:sSubPr>
+                          <m:e>
+                            <m:r>
+                              <a:rPr lang="en-US" sz="1200" i="1">
+                                <a:latin typeface="Cambria Math" panose="02040503050406030204" pitchFamily="18" charset="0"/>
+                              </a:rPr>
+                              <m:t>𝑆</m:t>
+                            </m:r>
+                          </m:e>
+                          <m:sub>
+                            <m:r>
+                              <a:rPr lang="en-US" sz="1200" i="1">
+                                <a:latin typeface="Cambria Math" panose="02040503050406030204" pitchFamily="18" charset="0"/>
+                              </a:rPr>
+                              <m:t>𝑡</m:t>
+                            </m:r>
+                          </m:sub>
+                        </m:sSub>
+                        <m:r>
+                          <a:rPr lang="en-US" sz="1200" b="0" i="1" smtClean="0">
+                            <a:latin typeface="Cambria Math" panose="02040503050406030204" pitchFamily="18" charset="0"/>
+                          </a:rPr>
+                          <m:t>,</m:t>
+                        </m:r>
+                        <m:sSub>
+                          <m:sSubPr>
+                            <m:ctrlPr>
+                              <a:rPr lang="en-US" sz="1200" b="0" i="1" smtClean="0">
+                                <a:latin typeface="Cambria Math" panose="02040503050406030204" pitchFamily="18" charset="0"/>
+                              </a:rPr>
+                            </m:ctrlPr>
+                          </m:sSubPr>
+                          <m:e>
+                            <m:r>
+                              <a:rPr lang="en-US" sz="1200" b="0" i="1" smtClean="0">
+                                <a:latin typeface="Cambria Math" panose="02040503050406030204" pitchFamily="18" charset="0"/>
+                              </a:rPr>
+                              <m:t>𝐴</m:t>
+                            </m:r>
+                          </m:e>
+                          <m:sub>
+                            <m:r>
+                              <a:rPr lang="en-US" sz="1200" b="0" i="1" smtClean="0">
+                                <a:latin typeface="Cambria Math" panose="02040503050406030204" pitchFamily="18" charset="0"/>
+                              </a:rPr>
+                              <m:t>𝑡</m:t>
+                            </m:r>
+                          </m:sub>
+                        </m:sSub>
+                        <m:r>
+                          <a:rPr lang="en-US" sz="1200" i="1">
+                            <a:latin typeface="Cambria Math" panose="02040503050406030204" pitchFamily="18" charset="0"/>
+                          </a:rPr>
+                          <m:t>)</m:t>
+                        </m:r>
+                      </m:oMath>
+                    </m:oMathPara>
+                  </a14:m>
+                  <a:endParaRPr lang="en-US" sz="1200" dirty="0"/>
+                </a:p>
+              </p:txBody>
+            </p:sp>
+          </mc:Choice>
+          <mc:Fallback xmlns="">
+            <p:sp>
+              <p:nvSpPr>
+                <p:cNvPr id="24" name="TextBox 23">
+                  <a:extLst>
+                    <a:ext uri="{FF2B5EF4-FFF2-40B4-BE49-F238E27FC236}">
+                      <a16:creationId xmlns:a16="http://schemas.microsoft.com/office/drawing/2014/main" id="{717A05C8-9D4E-0A8E-804D-7A3D0FA404D5}"/>
+                    </a:ext>
+                  </a:extLst>
+                </p:cNvPr>
+                <p:cNvSpPr txBox="1">
+                  <a:spLocks noRot="1" noChangeAspect="1" noMove="1" noResize="1" noEditPoints="1" noAdjustHandles="1" noChangeArrowheads="1" noChangeShapeType="1" noTextEdit="1"/>
+                </p:cNvSpPr>
+                <p:nvPr/>
+              </p:nvSpPr>
+              <p:spPr>
+                <a:xfrm>
+                  <a:off x="1438370" y="3465626"/>
+                  <a:ext cx="1049672" cy="285206"/>
+                </a:xfrm>
+                <a:prstGeom prst="rect">
+                  <a:avLst/>
+                </a:prstGeom>
+                <a:blipFill>
+                  <a:blip r:embed="rId23"/>
+                  <a:stretch>
+                    <a:fillRect b="-6522"/>
+                  </a:stretch>
+                </a:blipFill>
+              </p:spPr>
+              <p:txBody>
+                <a:bodyPr/>
+                <a:lstStyle/>
+                <a:p>
+                  <a:r>
+                    <a:rPr lang="en-US">
+                      <a:noFill/>
+                    </a:rPr>
+                    <a:t> </a:t>
+                  </a:r>
+                </a:p>
+              </p:txBody>
+            </p:sp>
+          </mc:Fallback>
+        </mc:AlternateContent>
+        <mc:AlternateContent xmlns:mc="http://schemas.openxmlformats.org/markup-compatibility/2006" xmlns:a14="http://schemas.microsoft.com/office/drawing/2010/main">
+          <mc:Choice Requires="a14">
+            <p:sp>
+              <p:nvSpPr>
+                <p:cNvPr id="25" name="TextBox 24">
+                  <a:extLst>
+                    <a:ext uri="{FF2B5EF4-FFF2-40B4-BE49-F238E27FC236}">
+                      <a16:creationId xmlns:a16="http://schemas.microsoft.com/office/drawing/2014/main" id="{BEED65E4-42A0-CD95-0366-21CE381124C2}"/>
+                    </a:ext>
+                  </a:extLst>
+                </p:cNvPr>
+                <p:cNvSpPr txBox="1"/>
+                <p:nvPr/>
+              </p:nvSpPr>
+              <p:spPr>
+                <a:xfrm>
+                  <a:off x="1203764" y="4836523"/>
+                  <a:ext cx="1049672" cy="276999"/>
+                </a:xfrm>
+                <a:prstGeom prst="rect">
+                  <a:avLst/>
+                </a:prstGeom>
+                <a:noFill/>
+              </p:spPr>
+              <p:txBody>
+                <a:bodyPr wrap="square">
+                  <a:spAutoFit/>
+                </a:bodyPr>
+                <a:lstStyle/>
+                <a:p>
+                  <a:pPr/>
+                  <a14:m>
+                    <m:oMathPara xmlns:m="http://schemas.openxmlformats.org/officeDocument/2006/math">
+                      <m:oMathParaPr>
+                        <m:jc m:val="centerGroup"/>
+                      </m:oMathParaPr>
+                      <m:oMath xmlns:m="http://schemas.openxmlformats.org/officeDocument/2006/math">
+                        <m:r>
+                          <a:rPr lang="en-US" sz="1200" b="0" i="1" smtClean="0">
+                            <a:latin typeface="Cambria Math" panose="02040503050406030204" pitchFamily="18" charset="0"/>
+                          </a:rPr>
+                          <m:t>𝑄</m:t>
+                        </m:r>
+                        <m:r>
+                          <a:rPr lang="en-US" sz="1200" i="1" smtClean="0">
+                            <a:latin typeface="Cambria Math" panose="02040503050406030204" pitchFamily="18" charset="0"/>
+                          </a:rPr>
+                          <m:t>(</m:t>
+                        </m:r>
+                        <m:sSub>
+                          <m:sSubPr>
+                            <m:ctrlPr>
+                              <a:rPr lang="en-US" sz="1200" i="1">
+                                <a:latin typeface="Cambria Math" panose="02040503050406030204" pitchFamily="18" charset="0"/>
+                              </a:rPr>
+                            </m:ctrlPr>
+                          </m:sSubPr>
+                          <m:e>
+                            <m:r>
+                              <a:rPr lang="en-US" sz="1200" i="1">
+                                <a:latin typeface="Cambria Math" panose="02040503050406030204" pitchFamily="18" charset="0"/>
+                              </a:rPr>
+                              <m:t>𝑆</m:t>
+                            </m:r>
+                          </m:e>
+                          <m:sub>
+                            <m:r>
+                              <a:rPr lang="en-US" sz="1200" i="1">
+                                <a:latin typeface="Cambria Math" panose="02040503050406030204" pitchFamily="18" charset="0"/>
+                              </a:rPr>
+                              <m:t>𝑡</m:t>
+                            </m:r>
+                            <m:r>
+                              <a:rPr lang="en-US" sz="1200" i="1">
+                                <a:latin typeface="Cambria Math" panose="02040503050406030204" pitchFamily="18" charset="0"/>
+                              </a:rPr>
+                              <m:t>+1</m:t>
+                            </m:r>
+                          </m:sub>
+                        </m:sSub>
+                        <m:r>
+                          <a:rPr lang="en-US" sz="1200" b="0" i="1" smtClean="0">
+                            <a:latin typeface="Cambria Math" panose="02040503050406030204" pitchFamily="18" charset="0"/>
+                          </a:rPr>
+                          <m:t>,</m:t>
+                        </m:r>
+                        <m:sSub>
+                          <m:sSubPr>
+                            <m:ctrlPr>
+                              <a:rPr lang="en-US" sz="1200" b="0" i="1" smtClean="0">
+                                <a:latin typeface="Cambria Math" panose="02040503050406030204" pitchFamily="18" charset="0"/>
+                              </a:rPr>
+                            </m:ctrlPr>
+                          </m:sSubPr>
+                          <m:e>
+                            <m:r>
+                              <a:rPr lang="en-US" sz="1200" b="0" i="1" smtClean="0">
+                                <a:latin typeface="Cambria Math" panose="02040503050406030204" pitchFamily="18" charset="0"/>
+                              </a:rPr>
+                              <m:t>𝐴</m:t>
+                            </m:r>
+                          </m:e>
+                          <m:sub>
+                            <m:r>
+                              <a:rPr lang="en-US" sz="1200" b="0" i="1" smtClean="0">
+                                <a:latin typeface="Cambria Math" panose="02040503050406030204" pitchFamily="18" charset="0"/>
+                              </a:rPr>
+                              <m:t>𝑡</m:t>
+                            </m:r>
+                            <m:r>
+                              <a:rPr lang="en-US" sz="1200" b="0" i="1" smtClean="0">
+                                <a:latin typeface="Cambria Math" panose="02040503050406030204" pitchFamily="18" charset="0"/>
+                              </a:rPr>
+                              <m:t>+1</m:t>
+                            </m:r>
+                          </m:sub>
+                        </m:sSub>
+                        <m:r>
+                          <a:rPr lang="en-US" sz="1200" i="1">
+                            <a:latin typeface="Cambria Math" panose="02040503050406030204" pitchFamily="18" charset="0"/>
+                          </a:rPr>
+                          <m:t>)</m:t>
+                        </m:r>
+                      </m:oMath>
+                    </m:oMathPara>
+                  </a14:m>
+                  <a:endParaRPr lang="en-US" sz="1200" dirty="0"/>
+                </a:p>
+              </p:txBody>
+            </p:sp>
+          </mc:Choice>
+          <mc:Fallback xmlns="">
+            <p:sp>
+              <p:nvSpPr>
+                <p:cNvPr id="25" name="TextBox 24">
+                  <a:extLst>
+                    <a:ext uri="{FF2B5EF4-FFF2-40B4-BE49-F238E27FC236}">
+                      <a16:creationId xmlns:a16="http://schemas.microsoft.com/office/drawing/2014/main" id="{BEED65E4-42A0-CD95-0366-21CE381124C2}"/>
+                    </a:ext>
+                  </a:extLst>
+                </p:cNvPr>
+                <p:cNvSpPr txBox="1">
+                  <a:spLocks noRot="1" noChangeAspect="1" noMove="1" noResize="1" noEditPoints="1" noAdjustHandles="1" noChangeArrowheads="1" noChangeShapeType="1" noTextEdit="1"/>
+                </p:cNvSpPr>
+                <p:nvPr/>
+              </p:nvSpPr>
+              <p:spPr>
+                <a:xfrm>
+                  <a:off x="1203764" y="4836523"/>
+                  <a:ext cx="1049672" cy="276999"/>
+                </a:xfrm>
+                <a:prstGeom prst="rect">
+                  <a:avLst/>
+                </a:prstGeom>
+                <a:blipFill>
+                  <a:blip r:embed="rId24"/>
+                  <a:stretch>
+                    <a:fillRect b="-6522"/>
+                  </a:stretch>
+                </a:blipFill>
+              </p:spPr>
+              <p:txBody>
+                <a:bodyPr/>
+                <a:lstStyle/>
+                <a:p>
+                  <a:r>
+                    <a:rPr lang="en-US">
+                      <a:noFill/>
+                    </a:rPr>
+                    <a:t> </a:t>
+                  </a:r>
+                </a:p>
+              </p:txBody>
+            </p:sp>
+          </mc:Fallback>
+        </mc:AlternateContent>
+      </p:grpSp>
+      <p:sp>
+        <p:nvSpPr>
+          <p:cNvPr id="8" name="TextBox 7">
+            <a:extLst>
+              <a:ext uri="{FF2B5EF4-FFF2-40B4-BE49-F238E27FC236}">
+                <a16:creationId xmlns:a16="http://schemas.microsoft.com/office/drawing/2014/main" id="{CF719737-7B4F-FA5F-52DC-A6E0F7264BD2}"/>
+              </a:ext>
+            </a:extLst>
+          </p:cNvPr>
+          <p:cNvSpPr txBox="1"/>
+          <p:nvPr/>
+        </p:nvSpPr>
+        <p:spPr>
+          <a:xfrm>
+            <a:off x="887061" y="5748746"/>
+            <a:ext cx="2986924" cy="923330"/>
+          </a:xfrm>
+          <a:prstGeom prst="rect">
+            <a:avLst/>
+          </a:prstGeom>
+        </p:spPr>
+        <p:style>
+          <a:lnRef idx="2">
+            <a:schemeClr val="accent1">
+              <a:shade val="15000"/>
+            </a:schemeClr>
+          </a:lnRef>
+          <a:fillRef idx="1">
+            <a:schemeClr val="accent1"/>
+          </a:fillRef>
+          <a:effectRef idx="0">
+            <a:schemeClr val="accent1"/>
+          </a:effectRef>
+          <a:fontRef idx="minor">
+            <a:schemeClr val="lt1"/>
+          </a:fontRef>
+        </p:style>
+        <p:txBody>
+          <a:bodyPr wrap="square" rtlCol="0">
+            <a:spAutoFit/>
+          </a:bodyPr>
+          <a:lstStyle/>
+          <a:p>
+            <a:r>
+              <a:rPr lang="en-US" dirty="0"/>
+              <a:t>On-policy: Updates with a next action following the behavior policy.</a:t>
+            </a:r>
+          </a:p>
+        </p:txBody>
+      </p:sp>
+      <p:sp>
+        <p:nvSpPr>
+          <p:cNvPr id="16" name="TextBox 15">
+            <a:extLst>
+              <a:ext uri="{FF2B5EF4-FFF2-40B4-BE49-F238E27FC236}">
+                <a16:creationId xmlns:a16="http://schemas.microsoft.com/office/drawing/2014/main" id="{A36F83D4-BFF1-A102-5C24-A229A3E27595}"/>
+              </a:ext>
+            </a:extLst>
+          </p:cNvPr>
+          <p:cNvSpPr txBox="1"/>
+          <p:nvPr/>
+        </p:nvSpPr>
+        <p:spPr>
+          <a:xfrm>
+            <a:off x="4374750" y="5748746"/>
+            <a:ext cx="2861646" cy="923330"/>
+          </a:xfrm>
+          <a:prstGeom prst="rect">
+            <a:avLst/>
+          </a:prstGeom>
+        </p:spPr>
+        <p:style>
+          <a:lnRef idx="2">
+            <a:schemeClr val="accent2">
+              <a:shade val="15000"/>
+            </a:schemeClr>
+          </a:lnRef>
+          <a:fillRef idx="1">
+            <a:schemeClr val="accent2"/>
+          </a:fillRef>
+          <a:effectRef idx="0">
+            <a:schemeClr val="accent2"/>
+          </a:effectRef>
+          <a:fontRef idx="minor">
+            <a:schemeClr val="lt1"/>
+          </a:fontRef>
+        </p:style>
+        <p:txBody>
+          <a:bodyPr wrap="square" rtlCol="0">
+            <a:spAutoFit/>
+          </a:bodyPr>
+          <a:lstStyle/>
+          <a:p>
+            <a:r>
+              <a:rPr lang="en-US" dirty="0"/>
+              <a:t>Off-policy: Updates with the best next action for the target policy.</a:t>
+            </a:r>
+          </a:p>
+        </p:txBody>
+      </p:sp>
+      <p:sp>
+        <p:nvSpPr>
+          <p:cNvPr id="27" name="TextBox 26">
+            <a:extLst>
+              <a:ext uri="{FF2B5EF4-FFF2-40B4-BE49-F238E27FC236}">
+                <a16:creationId xmlns:a16="http://schemas.microsoft.com/office/drawing/2014/main" id="{B3A6C9EB-1E75-1DA2-416B-203908B586D6}"/>
+              </a:ext>
+            </a:extLst>
+          </p:cNvPr>
+          <p:cNvSpPr txBox="1"/>
+          <p:nvPr/>
+        </p:nvSpPr>
+        <p:spPr>
+          <a:xfrm>
+            <a:off x="7654424" y="5748746"/>
+            <a:ext cx="2861646" cy="923330"/>
+          </a:xfrm>
+          <a:prstGeom prst="rect">
+            <a:avLst/>
+          </a:prstGeom>
+        </p:spPr>
+        <p:style>
+          <a:lnRef idx="2">
+            <a:schemeClr val="accent3">
+              <a:shade val="15000"/>
+            </a:schemeClr>
+          </a:lnRef>
+          <a:fillRef idx="1">
+            <a:schemeClr val="accent3"/>
+          </a:fillRef>
+          <a:effectRef idx="0">
+            <a:schemeClr val="accent3"/>
+          </a:effectRef>
+          <a:fontRef idx="minor">
+            <a:schemeClr val="lt1"/>
+          </a:fontRef>
+        </p:style>
+        <p:txBody>
+          <a:bodyPr wrap="square" rtlCol="0">
+            <a:spAutoFit/>
+          </a:bodyPr>
+          <a:lstStyle/>
+          <a:p>
+            <a:r>
+              <a:rPr lang="en-US" dirty="0"/>
+              <a:t>Off-policy: Updates with the expectation over the action for the target policy.</a:t>
+            </a:r>
+          </a:p>
+        </p:txBody>
+      </p:sp>
     </p:spTree>
     <p:extLst>
       <p:ext uri="{BB962C8B-B14F-4D97-AF65-F5344CB8AC3E}">
@@ -10343,8 +10673,8 @@
           </a:p>
         </p:txBody>
       </p:sp>
-      <mc:AlternateContent xmlns:mc="http://schemas.openxmlformats.org/markup-compatibility/2006">
-        <mc:Choice xmlns:a14="http://schemas.microsoft.com/office/drawing/2010/main" Requires="a14">
+      <mc:AlternateContent xmlns:mc="http://schemas.openxmlformats.org/markup-compatibility/2006" xmlns:a14="http://schemas.microsoft.com/office/drawing/2010/main">
+        <mc:Choice Requires="a14">
           <p:sp>
             <p:nvSpPr>
               <p:cNvPr id="3" name="Content Placeholder 2">
@@ -11328,7 +11658,7 @@
             </p:txBody>
           </p:sp>
         </mc:Choice>
-        <mc:Fallback>
+        <mc:Fallback xmlns="">
           <p:sp>
             <p:nvSpPr>
               <p:cNvPr id="3" name="Content Placeholder 2">
@@ -13429,8 +13759,8 @@
           </p:sp>
         </mc:Fallback>
       </mc:AlternateContent>
-      <mc:AlternateContent xmlns:mc="http://schemas.openxmlformats.org/markup-compatibility/2006">
-        <mc:Choice xmlns:a14="http://schemas.microsoft.com/office/drawing/2010/main" Requires="a14">
+      <mc:AlternateContent xmlns:mc="http://schemas.openxmlformats.org/markup-compatibility/2006" xmlns:a14="http://schemas.microsoft.com/office/drawing/2010/main">
+        <mc:Choice Requires="a14">
           <p:sp>
             <p:nvSpPr>
               <p:cNvPr id="4" name="Content Placeholder 2">
@@ -13799,7 +14129,7 @@
             </p:txBody>
           </p:sp>
         </mc:Choice>
-        <mc:Fallback>
+        <mc:Fallback xmlns="">
           <p:sp>
             <p:nvSpPr>
               <p:cNvPr id="4" name="Content Placeholder 2">
@@ -15231,8 +15561,8 @@
           </a:p>
         </p:txBody>
       </p:sp>
-      <mc:AlternateContent xmlns:mc="http://schemas.openxmlformats.org/markup-compatibility/2006">
-        <mc:Choice xmlns:a14="http://schemas.microsoft.com/office/drawing/2010/main" Requires="a14">
+      <mc:AlternateContent xmlns:mc="http://schemas.openxmlformats.org/markup-compatibility/2006" xmlns:a14="http://schemas.microsoft.com/office/drawing/2010/main">
+        <mc:Choice Requires="a14">
           <p:sp>
             <p:nvSpPr>
               <p:cNvPr id="3" name="Content Placeholder 2">
@@ -15954,7 +16284,7 @@
             </p:txBody>
           </p:sp>
         </mc:Choice>
-        <mc:Fallback>
+        <mc:Fallback xmlns="">
           <p:sp>
             <p:nvSpPr>
               <p:cNvPr id="3" name="Content Placeholder 2">
@@ -16071,8 +16401,8 @@
               </a:prstGeom>
             </p:spPr>
           </p:pic>
-          <mc:AlternateContent xmlns:mc="http://schemas.openxmlformats.org/markup-compatibility/2006">
-            <mc:Choice xmlns:a14="http://schemas.microsoft.com/office/drawing/2010/main" Requires="a14">
+          <mc:AlternateContent xmlns:mc="http://schemas.openxmlformats.org/markup-compatibility/2006" xmlns:a14="http://schemas.microsoft.com/office/drawing/2010/main">
+            <mc:Choice Requires="a14">
               <p:sp>
                 <p:nvSpPr>
                   <p:cNvPr id="5" name="TextBox 4">
@@ -16146,7 +16476,7 @@
                 </p:txBody>
               </p:sp>
             </mc:Choice>
-            <mc:Fallback>
+            <mc:Fallback xmlns="">
               <p:sp>
                 <p:nvSpPr>
                   <p:cNvPr id="5" name="TextBox 4">
@@ -16278,8 +16608,8 @@
             </p:txBody>
           </p:sp>
         </p:grpSp>
-        <mc:AlternateContent xmlns:mc="http://schemas.openxmlformats.org/markup-compatibility/2006">
-          <mc:Choice xmlns:a14="http://schemas.microsoft.com/office/drawing/2010/main" Requires="a14">
+        <mc:AlternateContent xmlns:mc="http://schemas.openxmlformats.org/markup-compatibility/2006" xmlns:a14="http://schemas.microsoft.com/office/drawing/2010/main">
+          <mc:Choice Requires="a14">
             <p:sp>
               <p:nvSpPr>
                 <p:cNvPr id="9" name="TextBox 8">
@@ -16308,6 +16638,7 @@
                 </a:bodyPr>
                 <a:lstStyle/>
                 <a:p>
+                  <a:pPr/>
                   <a14:m>
                     <m:oMathPara xmlns:m="http://schemas.openxmlformats.org/officeDocument/2006/math">
                       <m:oMathParaPr>
@@ -16344,7 +16675,7 @@
               </p:txBody>
             </p:sp>
           </mc:Choice>
-          <mc:Fallback>
+          <mc:Fallback xmlns="">
             <p:sp>
               <p:nvSpPr>
                 <p:cNvPr id="9" name="TextBox 8">
@@ -16390,8 +16721,8 @@
           </mc:Fallback>
         </mc:AlternateContent>
       </p:grpSp>
-      <mc:AlternateContent xmlns:mc="http://schemas.openxmlformats.org/markup-compatibility/2006">
-        <mc:Choice xmlns:a14="http://schemas.microsoft.com/office/drawing/2010/main" Requires="a14">
+      <mc:AlternateContent xmlns:mc="http://schemas.openxmlformats.org/markup-compatibility/2006" xmlns:a14="http://schemas.microsoft.com/office/drawing/2010/main">
+        <mc:Choice Requires="a14">
           <p:sp>
             <p:nvSpPr>
               <p:cNvPr id="11" name="TextBox 10">
@@ -16496,7 +16827,7 @@
             </p:txBody>
           </p:sp>
         </mc:Choice>
-        <mc:Fallback>
+        <mc:Fallback xmlns="">
           <p:sp>
             <p:nvSpPr>
               <p:cNvPr id="11" name="TextBox 10">
@@ -16541,8 +16872,8 @@
           </p:sp>
         </mc:Fallback>
       </mc:AlternateContent>
-      <mc:AlternateContent xmlns:mc="http://schemas.openxmlformats.org/markup-compatibility/2006">
-        <mc:Choice xmlns:a14="http://schemas.microsoft.com/office/drawing/2010/main" Requires="a14">
+      <mc:AlternateContent xmlns:mc="http://schemas.openxmlformats.org/markup-compatibility/2006" xmlns:a14="http://schemas.microsoft.com/office/drawing/2010/main">
+        <mc:Choice Requires="a14">
           <p:sp>
             <p:nvSpPr>
               <p:cNvPr id="14" name="TextBox 13">
@@ -16656,7 +16987,7 @@
             </p:txBody>
           </p:sp>
         </mc:Choice>
-        <mc:Fallback>
+        <mc:Fallback xmlns="">
           <p:sp>
             <p:nvSpPr>
               <p:cNvPr id="14" name="TextBox 13">
@@ -17216,8 +17547,8 @@
           </a:p>
         </p:txBody>
       </p:sp>
-      <mc:AlternateContent xmlns:mc="http://schemas.openxmlformats.org/markup-compatibility/2006">
-        <mc:Choice xmlns:a14="http://schemas.microsoft.com/office/drawing/2010/main" Requires="a14">
+      <mc:AlternateContent xmlns:mc="http://schemas.openxmlformats.org/markup-compatibility/2006" xmlns:a14="http://schemas.microsoft.com/office/drawing/2010/main">
+        <mc:Choice Requires="a14">
           <p:sp>
             <p:nvSpPr>
               <p:cNvPr id="3" name="Content Placeholder 2">
@@ -17802,7 +18133,7 @@
             </p:txBody>
           </p:sp>
         </mc:Choice>
-        <mc:Fallback>
+        <mc:Fallback xmlns="">
           <p:sp>
             <p:nvSpPr>
               <p:cNvPr id="3" name="Content Placeholder 2">
@@ -18252,8 +18583,8 @@
           </mc:Fallback>
         </mc:AlternateContent>
       </p:grpSp>
-      <mc:AlternateContent xmlns:mc="http://schemas.openxmlformats.org/markup-compatibility/2006">
-        <mc:Choice xmlns:a14="http://schemas.microsoft.com/office/drawing/2010/main" Requires="a14">
+      <mc:AlternateContent xmlns:mc="http://schemas.openxmlformats.org/markup-compatibility/2006" xmlns:a14="http://schemas.microsoft.com/office/drawing/2010/main">
+        <mc:Choice Requires="a14">
           <p:sp>
             <p:nvSpPr>
               <p:cNvPr id="5" name="Speech Bubble: Rectangle with Corners Rounded 4">
@@ -18362,7 +18693,7 @@
             </p:txBody>
           </p:sp>
         </mc:Choice>
-        <mc:Fallback>
+        <mc:Fallback xmlns="">
           <p:sp>
             <p:nvSpPr>
               <p:cNvPr id="5" name="Speech Bubble: Rectangle with Corners Rounded 4">
@@ -18411,8 +18742,8 @@
           </p:sp>
         </mc:Fallback>
       </mc:AlternateContent>
-      <mc:AlternateContent xmlns:mc="http://schemas.openxmlformats.org/markup-compatibility/2006">
-        <mc:Choice xmlns:a14="http://schemas.microsoft.com/office/drawing/2010/main" Requires="a14">
+      <mc:AlternateContent xmlns:mc="http://schemas.openxmlformats.org/markup-compatibility/2006" xmlns:a14="http://schemas.microsoft.com/office/drawing/2010/main">
+        <mc:Choice Requires="a14">
           <p:sp>
             <p:nvSpPr>
               <p:cNvPr id="14" name="TextBox 13">
@@ -18528,7 +18859,7 @@
             </p:txBody>
           </p:sp>
         </mc:Choice>
-        <mc:Fallback>
+        <mc:Fallback xmlns="">
           <p:sp>
             <p:nvSpPr>
               <p:cNvPr id="14" name="TextBox 13">
@@ -18663,8 +18994,8 @@
           </a:prstGeom>
         </p:spPr>
       </p:pic>
-      <mc:AlternateContent xmlns:mc="http://schemas.openxmlformats.org/markup-compatibility/2006">
-        <mc:Choice xmlns:a14="http://schemas.microsoft.com/office/drawing/2010/main" Requires="a14">
+      <mc:AlternateContent xmlns:mc="http://schemas.openxmlformats.org/markup-compatibility/2006" xmlns:a14="http://schemas.microsoft.com/office/drawing/2010/main">
+        <mc:Choice Requires="a14">
           <p:sp>
             <p:nvSpPr>
               <p:cNvPr id="3" name="Speech Bubble: Rectangle with Corners Rounded 2">
@@ -18853,7 +19184,7 @@
             </p:txBody>
           </p:sp>
         </mc:Choice>
-        <mc:Fallback>
+        <mc:Fallback xmlns="">
           <p:sp>
             <p:nvSpPr>
               <p:cNvPr id="3" name="Speech Bubble: Rectangle with Corners Rounded 2">
@@ -19353,8 +19684,8 @@
           </a:p>
         </p:txBody>
       </p:sp>
-      <mc:AlternateContent xmlns:mc="http://schemas.openxmlformats.org/markup-compatibility/2006">
-        <mc:Choice xmlns:a14="http://schemas.microsoft.com/office/drawing/2010/main" Requires="a14">
+      <mc:AlternateContent xmlns:mc="http://schemas.openxmlformats.org/markup-compatibility/2006" xmlns:a14="http://schemas.microsoft.com/office/drawing/2010/main">
+        <mc:Choice Requires="a14">
           <p:sp>
             <p:nvSpPr>
               <p:cNvPr id="3" name="Content Placeholder 2">
@@ -20276,7 +20607,7 @@
             </p:txBody>
           </p:sp>
         </mc:Choice>
-        <mc:Fallback>
+        <mc:Fallback xmlns="">
           <p:sp>
             <p:nvSpPr>
               <p:cNvPr id="3" name="Content Placeholder 2">
@@ -20534,8 +20865,8 @@
           </p:txBody>
         </p:sp>
       </p:grpSp>
-      <mc:AlternateContent xmlns:mc="http://schemas.openxmlformats.org/markup-compatibility/2006">
-        <mc:Choice xmlns:a14="http://schemas.microsoft.com/office/drawing/2010/main" Requires="a14">
+      <mc:AlternateContent xmlns:mc="http://schemas.openxmlformats.org/markup-compatibility/2006" xmlns:a14="http://schemas.microsoft.com/office/drawing/2010/main">
+        <mc:Choice Requires="a14">
           <p:sp>
             <p:nvSpPr>
               <p:cNvPr id="10" name="TextBox 9">
@@ -20564,6 +20895,7 @@
               </a:bodyPr>
               <a:lstStyle/>
               <a:p>
+                <a:pPr/>
                 <a14:m>
                   <m:oMathPara xmlns:m="http://schemas.openxmlformats.org/officeDocument/2006/math">
                     <m:oMathParaPr>
@@ -20639,7 +20971,7 @@
             </p:txBody>
           </p:sp>
         </mc:Choice>
-        <mc:Fallback>
+        <mc:Fallback xmlns="">
           <p:sp>
             <p:nvSpPr>
               <p:cNvPr id="10" name="TextBox 9">
@@ -20684,8 +21016,8 @@
           </p:sp>
         </mc:Fallback>
       </mc:AlternateContent>
-      <mc:AlternateContent xmlns:mc="http://schemas.openxmlformats.org/markup-compatibility/2006">
-        <mc:Choice xmlns:a14="http://schemas.microsoft.com/office/drawing/2010/main" Requires="a14">
+      <mc:AlternateContent xmlns:mc="http://schemas.openxmlformats.org/markup-compatibility/2006" xmlns:a14="http://schemas.microsoft.com/office/drawing/2010/main">
+        <mc:Choice Requires="a14">
           <p:sp>
             <p:nvSpPr>
               <p:cNvPr id="12" name="TextBox 11">
@@ -20792,13 +21124,12 @@
                 </a:endParaRPr>
               </a:p>
               <a:p>
-                <a:pPr/>
                 <a:endParaRPr lang="en-US" sz="1200" dirty="0"/>
               </a:p>
             </p:txBody>
           </p:sp>
         </mc:Choice>
-        <mc:Fallback>
+        <mc:Fallback xmlns="">
           <p:sp>
             <p:nvSpPr>
               <p:cNvPr id="12" name="TextBox 11">

--- a/slides/Lecture_Chapter06.pptx
+++ b/slides/Lecture_Chapter06.pptx
@@ -6,28 +6,29 @@
   </p:sldMasterIdLst>
   <p:sldIdLst>
     <p:sldId id="256" r:id="rId2"/>
-    <p:sldId id="478" r:id="rId3"/>
-    <p:sldId id="382" r:id="rId4"/>
-    <p:sldId id="389" r:id="rId5"/>
-    <p:sldId id="383" r:id="rId6"/>
-    <p:sldId id="385" r:id="rId7"/>
-    <p:sldId id="386" r:id="rId8"/>
-    <p:sldId id="388" r:id="rId9"/>
-    <p:sldId id="387" r:id="rId10"/>
-    <p:sldId id="390" r:id="rId11"/>
-    <p:sldId id="391" r:id="rId12"/>
-    <p:sldId id="402" r:id="rId13"/>
-    <p:sldId id="393" r:id="rId14"/>
-    <p:sldId id="398" r:id="rId15"/>
-    <p:sldId id="403" r:id="rId16"/>
-    <p:sldId id="404" r:id="rId17"/>
-    <p:sldId id="397" r:id="rId18"/>
-    <p:sldId id="399" r:id="rId19"/>
-    <p:sldId id="394" r:id="rId20"/>
-    <p:sldId id="396" r:id="rId21"/>
-    <p:sldId id="479" r:id="rId22"/>
-    <p:sldId id="401" r:id="rId23"/>
-    <p:sldId id="400" r:id="rId24"/>
+    <p:sldId id="313" r:id="rId3"/>
+    <p:sldId id="478" r:id="rId4"/>
+    <p:sldId id="382" r:id="rId5"/>
+    <p:sldId id="389" r:id="rId6"/>
+    <p:sldId id="383" r:id="rId7"/>
+    <p:sldId id="385" r:id="rId8"/>
+    <p:sldId id="386" r:id="rId9"/>
+    <p:sldId id="388" r:id="rId10"/>
+    <p:sldId id="387" r:id="rId11"/>
+    <p:sldId id="390" r:id="rId12"/>
+    <p:sldId id="391" r:id="rId13"/>
+    <p:sldId id="402" r:id="rId14"/>
+    <p:sldId id="393" r:id="rId15"/>
+    <p:sldId id="398" r:id="rId16"/>
+    <p:sldId id="403" r:id="rId17"/>
+    <p:sldId id="404" r:id="rId18"/>
+    <p:sldId id="397" r:id="rId19"/>
+    <p:sldId id="399" r:id="rId20"/>
+    <p:sldId id="394" r:id="rId21"/>
+    <p:sldId id="396" r:id="rId22"/>
+    <p:sldId id="479" r:id="rId23"/>
+    <p:sldId id="401" r:id="rId24"/>
+    <p:sldId id="400" r:id="rId25"/>
   </p:sldIdLst>
   <p:sldSz cx="12192000" cy="6858000"/>
   <p:notesSz cx="6858000" cy="9144000"/>
@@ -132,6 +133,7 @@
         <p14:section name="Default Section" id="{83286E67-F0F0-421C-8F74-7B93ABA17FBF}">
           <p14:sldIdLst>
             <p14:sldId id="256"/>
+            <p14:sldId id="313"/>
             <p14:sldId id="478"/>
           </p14:sldIdLst>
         </p14:section>
@@ -336,7 +338,7 @@
           <a:p>
             <a:fld id="{3E22BF2E-04DA-469E-97C5-BB68A0368813}" type="datetimeFigureOut">
               <a:rPr lang="en-US" smtClean="0"/>
-              <a:t>2/3/2026</a:t>
+              <a:t>2/6/2026</a:t>
             </a:fld>
             <a:endParaRPr lang="en-US"/>
           </a:p>
@@ -534,7 +536,7 @@
           <a:p>
             <a:fld id="{3E22BF2E-04DA-469E-97C5-BB68A0368813}" type="datetimeFigureOut">
               <a:rPr lang="en-US" smtClean="0"/>
-              <a:t>2/3/2026</a:t>
+              <a:t>2/6/2026</a:t>
             </a:fld>
             <a:endParaRPr lang="en-US"/>
           </a:p>
@@ -742,7 +744,7 @@
           <a:p>
             <a:fld id="{3E22BF2E-04DA-469E-97C5-BB68A0368813}" type="datetimeFigureOut">
               <a:rPr lang="en-US" smtClean="0"/>
-              <a:t>2/3/2026</a:t>
+              <a:t>2/6/2026</a:t>
             </a:fld>
             <a:endParaRPr lang="en-US"/>
           </a:p>
@@ -950,7 +952,7 @@
           <a:p>
             <a:fld id="{3E22BF2E-04DA-469E-97C5-BB68A0368813}" type="datetimeFigureOut">
               <a:rPr lang="en-US" smtClean="0"/>
-              <a:t>2/3/2026</a:t>
+              <a:t>2/6/2026</a:t>
             </a:fld>
             <a:endParaRPr lang="en-US"/>
           </a:p>
@@ -1225,7 +1227,7 @@
           <a:p>
             <a:fld id="{3E22BF2E-04DA-469E-97C5-BB68A0368813}" type="datetimeFigureOut">
               <a:rPr lang="en-US" smtClean="0"/>
-              <a:t>2/3/2026</a:t>
+              <a:t>2/6/2026</a:t>
             </a:fld>
             <a:endParaRPr lang="en-US"/>
           </a:p>
@@ -1490,7 +1492,7 @@
           <a:p>
             <a:fld id="{3E22BF2E-04DA-469E-97C5-BB68A0368813}" type="datetimeFigureOut">
               <a:rPr lang="en-US" smtClean="0"/>
-              <a:t>2/3/2026</a:t>
+              <a:t>2/6/2026</a:t>
             </a:fld>
             <a:endParaRPr lang="en-US"/>
           </a:p>
@@ -1902,7 +1904,7 @@
           <a:p>
             <a:fld id="{3E22BF2E-04DA-469E-97C5-BB68A0368813}" type="datetimeFigureOut">
               <a:rPr lang="en-US" smtClean="0"/>
-              <a:t>2/3/2026</a:t>
+              <a:t>2/6/2026</a:t>
             </a:fld>
             <a:endParaRPr lang="en-US"/>
           </a:p>
@@ -2043,7 +2045,7 @@
           <a:p>
             <a:fld id="{3E22BF2E-04DA-469E-97C5-BB68A0368813}" type="datetimeFigureOut">
               <a:rPr lang="en-US" smtClean="0"/>
-              <a:t>2/3/2026</a:t>
+              <a:t>2/6/2026</a:t>
             </a:fld>
             <a:endParaRPr lang="en-US"/>
           </a:p>
@@ -2156,7 +2158,7 @@
           <a:p>
             <a:fld id="{3E22BF2E-04DA-469E-97C5-BB68A0368813}" type="datetimeFigureOut">
               <a:rPr lang="en-US" smtClean="0"/>
-              <a:t>2/3/2026</a:t>
+              <a:t>2/6/2026</a:t>
             </a:fld>
             <a:endParaRPr lang="en-US"/>
           </a:p>
@@ -2467,7 +2469,7 @@
           <a:p>
             <a:fld id="{3E22BF2E-04DA-469E-97C5-BB68A0368813}" type="datetimeFigureOut">
               <a:rPr lang="en-US" smtClean="0"/>
-              <a:t>2/3/2026</a:t>
+              <a:t>2/6/2026</a:t>
             </a:fld>
             <a:endParaRPr lang="en-US"/>
           </a:p>
@@ -2755,7 +2757,7 @@
           <a:p>
             <a:fld id="{3E22BF2E-04DA-469E-97C5-BB68A0368813}" type="datetimeFigureOut">
               <a:rPr lang="en-US" smtClean="0"/>
-              <a:t>2/3/2026</a:t>
+              <a:t>2/6/2026</a:t>
             </a:fld>
             <a:endParaRPr lang="en-US"/>
           </a:p>
@@ -2996,7 +2998,7 @@
           <a:p>
             <a:fld id="{3E22BF2E-04DA-469E-97C5-BB68A0368813}" type="datetimeFigureOut">
               <a:rPr lang="en-US" smtClean="0"/>
-              <a:t>2/3/2026</a:t>
+              <a:t>2/6/2026</a:t>
             </a:fld>
             <a:endParaRPr lang="en-US"/>
           </a:p>
@@ -4055,6 +4057,1595 @@
           <p:cNvPr id="2" name="Title 1">
             <a:extLst>
               <a:ext uri="{FF2B5EF4-FFF2-40B4-BE49-F238E27FC236}">
+                <a16:creationId xmlns:a16="http://schemas.microsoft.com/office/drawing/2014/main" id="{67F17A85-AD27-D78C-6EE7-8EFC9C60F78B}"/>
+              </a:ext>
+            </a:extLst>
+          </p:cNvPr>
+          <p:cNvSpPr>
+            <a:spLocks noGrp="1"/>
+          </p:cNvSpPr>
+          <p:nvPr>
+            <p:ph type="title"/>
+          </p:nvPr>
+        </p:nvSpPr>
+        <p:spPr/>
+        <p:txBody>
+          <a:bodyPr/>
+          <a:lstStyle/>
+          <a:p>
+            <a:r>
+              <a:rPr lang="en-US" dirty="0"/>
+              <a:t>Sarsa</a:t>
+            </a:r>
+          </a:p>
+        </p:txBody>
+      </p:sp>
+      <mc:AlternateContent xmlns:mc="http://schemas.openxmlformats.org/markup-compatibility/2006" xmlns:a14="http://schemas.microsoft.com/office/drawing/2010/main">
+        <mc:Choice Requires="a14">
+          <p:sp>
+            <p:nvSpPr>
+              <p:cNvPr id="3" name="Content Placeholder 2">
+                <a:extLst>
+                  <a:ext uri="{FF2B5EF4-FFF2-40B4-BE49-F238E27FC236}">
+                    <a16:creationId xmlns:a16="http://schemas.microsoft.com/office/drawing/2014/main" id="{A1E76A2D-11FD-3349-6432-A6DAAA3C05B5}"/>
+                  </a:ext>
+                </a:extLst>
+              </p:cNvPr>
+              <p:cNvSpPr>
+                <a:spLocks noGrp="1"/>
+              </p:cNvSpPr>
+              <p:nvPr>
+                <p:ph idx="1"/>
+              </p:nvPr>
+            </p:nvSpPr>
+            <p:spPr>
+              <a:xfrm>
+                <a:off x="838200" y="1397330"/>
+                <a:ext cx="8888835" cy="4779633"/>
+              </a:xfrm>
+            </p:spPr>
+            <p:txBody>
+              <a:bodyPr>
+                <a:normAutofit fontScale="85000" lnSpcReduction="20000"/>
+              </a:bodyPr>
+              <a:lstStyle/>
+              <a:p>
+                <a:r>
+                  <a:rPr lang="en-US" b="1" dirty="0"/>
+                  <a:t>Idea</a:t>
+                </a:r>
+                <a:r>
+                  <a:rPr lang="en-US" dirty="0"/>
+                  <a:t>: Use GPI with TD prediction for policy evaluation.</a:t>
+                </a:r>
+              </a:p>
+              <a:p>
+                <a:endParaRPr lang="en-US" b="1" dirty="0"/>
+              </a:p>
+              <a:p>
+                <a:r>
+                  <a:rPr lang="en-US" b="1" dirty="0"/>
+                  <a:t>TD Evaluation</a:t>
+                </a:r>
+                <a:r>
+                  <a:rPr lang="en-US" dirty="0"/>
+                  <a:t>: Estimate </a:t>
+                </a:r>
+                <a14:m>
+                  <m:oMath xmlns:m="http://schemas.openxmlformats.org/officeDocument/2006/math">
+                    <m:sSub>
+                      <m:sSubPr>
+                        <m:ctrlPr>
+                          <a:rPr lang="en-US" b="0" i="1" smtClean="0">
+                            <a:latin typeface="Cambria Math" panose="02040503050406030204" pitchFamily="18" charset="0"/>
+                          </a:rPr>
+                        </m:ctrlPr>
+                      </m:sSubPr>
+                      <m:e>
+                        <m:r>
+                          <a:rPr lang="en-US" b="0" i="1" smtClean="0">
+                            <a:latin typeface="Cambria Math" panose="02040503050406030204" pitchFamily="18" charset="0"/>
+                          </a:rPr>
+                          <m:t>𝑞</m:t>
+                        </m:r>
+                      </m:e>
+                      <m:sub>
+                        <m:r>
+                          <a:rPr lang="en-US" b="0" i="1" smtClean="0">
+                            <a:latin typeface="Cambria Math" panose="02040503050406030204" pitchFamily="18" charset="0"/>
+                          </a:rPr>
+                          <m:t>𝜋</m:t>
+                        </m:r>
+                      </m:sub>
+                    </m:sSub>
+                    <m:r>
+                      <a:rPr lang="en-US" b="0" i="1" smtClean="0">
+                        <a:latin typeface="Cambria Math" panose="02040503050406030204" pitchFamily="18" charset="0"/>
+                      </a:rPr>
+                      <m:t>(</m:t>
+                    </m:r>
+                    <m:r>
+                      <a:rPr lang="en-US" b="0" i="1" smtClean="0">
+                        <a:latin typeface="Cambria Math" panose="02040503050406030204" pitchFamily="18" charset="0"/>
+                      </a:rPr>
+                      <m:t>𝑠</m:t>
+                    </m:r>
+                    <m:r>
+                      <a:rPr lang="en-US" b="0" i="1" smtClean="0">
+                        <a:latin typeface="Cambria Math" panose="02040503050406030204" pitchFamily="18" charset="0"/>
+                      </a:rPr>
+                      <m:t>,</m:t>
+                    </m:r>
+                    <m:r>
+                      <a:rPr lang="en-US" b="0" i="1" smtClean="0">
+                        <a:latin typeface="Cambria Math" panose="02040503050406030204" pitchFamily="18" charset="0"/>
+                      </a:rPr>
+                      <m:t>𝑎</m:t>
+                    </m:r>
+                    <m:r>
+                      <a:rPr lang="en-US" b="0" i="1" smtClean="0">
+                        <a:latin typeface="Cambria Math" panose="02040503050406030204" pitchFamily="18" charset="0"/>
+                      </a:rPr>
+                      <m:t>)</m:t>
+                    </m:r>
+                  </m:oMath>
+                </a14:m>
+                <a:r>
+                  <a:rPr lang="en-US" dirty="0"/>
+                  <a:t> using a </a:t>
+                </a:r>
+                <a14:m>
+                  <m:oMath xmlns:m="http://schemas.openxmlformats.org/officeDocument/2006/math">
+                    <m:r>
+                      <a:rPr lang="en-US" b="0" i="1" smtClean="0">
+                        <a:latin typeface="Cambria Math" panose="02040503050406030204" pitchFamily="18" charset="0"/>
+                      </a:rPr>
+                      <m:t>𝑄</m:t>
+                    </m:r>
+                  </m:oMath>
+                </a14:m>
+                <a:r>
+                  <a:rPr lang="en-US" dirty="0"/>
+                  <a:t>-table with updates:</a:t>
+                </a:r>
+              </a:p>
+              <a:p>
+                <a:endParaRPr lang="en-US" dirty="0"/>
+              </a:p>
+              <a:p>
+                <a:pPr marL="0" indent="0" algn="ctr">
+                  <a:buNone/>
+                </a:pPr>
+                <a14:m>
+                  <m:oMath xmlns:m="http://schemas.openxmlformats.org/officeDocument/2006/math">
+                    <m:r>
+                      <a:rPr lang="en-US" b="0" i="1" smtClean="0">
+                        <a:latin typeface="Cambria Math" panose="02040503050406030204" pitchFamily="18" charset="0"/>
+                      </a:rPr>
+                      <m:t>𝑄</m:t>
+                    </m:r>
+                    <m:d>
+                      <m:dPr>
+                        <m:ctrlPr>
+                          <a:rPr lang="en-US" b="0" i="1" smtClean="0">
+                            <a:latin typeface="Cambria Math" panose="02040503050406030204" pitchFamily="18" charset="0"/>
+                          </a:rPr>
+                        </m:ctrlPr>
+                      </m:dPr>
+                      <m:e>
+                        <m:sSub>
+                          <m:sSubPr>
+                            <m:ctrlPr>
+                              <a:rPr lang="en-US" b="0" i="1" smtClean="0">
+                                <a:latin typeface="Cambria Math" panose="02040503050406030204" pitchFamily="18" charset="0"/>
+                              </a:rPr>
+                            </m:ctrlPr>
+                          </m:sSubPr>
+                          <m:e>
+                            <m:r>
+                              <a:rPr lang="en-US" b="0" i="1" smtClean="0">
+                                <a:latin typeface="Cambria Math" panose="02040503050406030204" pitchFamily="18" charset="0"/>
+                              </a:rPr>
+                              <m:t>𝑆</m:t>
+                            </m:r>
+                          </m:e>
+                          <m:sub>
+                            <m:r>
+                              <a:rPr lang="en-US" b="0" i="1" smtClean="0">
+                                <a:latin typeface="Cambria Math" panose="02040503050406030204" pitchFamily="18" charset="0"/>
+                              </a:rPr>
+                              <m:t>𝑡</m:t>
+                            </m:r>
+                          </m:sub>
+                        </m:sSub>
+                        <m:r>
+                          <a:rPr lang="en-US" b="0" i="1" smtClean="0">
+                            <a:latin typeface="Cambria Math" panose="02040503050406030204" pitchFamily="18" charset="0"/>
+                          </a:rPr>
+                          <m:t>,</m:t>
+                        </m:r>
+                        <m:sSub>
+                          <m:sSubPr>
+                            <m:ctrlPr>
+                              <a:rPr lang="en-US" b="0" i="1" smtClean="0">
+                                <a:latin typeface="Cambria Math" panose="02040503050406030204" pitchFamily="18" charset="0"/>
+                              </a:rPr>
+                            </m:ctrlPr>
+                          </m:sSubPr>
+                          <m:e>
+                            <m:r>
+                              <a:rPr lang="en-US" b="0" i="1" smtClean="0">
+                                <a:latin typeface="Cambria Math" panose="02040503050406030204" pitchFamily="18" charset="0"/>
+                              </a:rPr>
+                              <m:t>𝐴</m:t>
+                            </m:r>
+                          </m:e>
+                          <m:sub>
+                            <m:r>
+                              <a:rPr lang="en-US" b="0" i="1" smtClean="0">
+                                <a:latin typeface="Cambria Math" panose="02040503050406030204" pitchFamily="18" charset="0"/>
+                              </a:rPr>
+                              <m:t>𝑡</m:t>
+                            </m:r>
+                          </m:sub>
+                        </m:sSub>
+                      </m:e>
+                    </m:d>
+                    <m:groupChr>
+                      <m:groupChrPr>
+                        <m:chr m:val="←"/>
+                        <m:pos m:val="top"/>
+                        <m:ctrlPr>
+                          <a:rPr lang="en-US" b="0" i="1" smtClean="0">
+                            <a:latin typeface="Cambria Math" panose="02040503050406030204" pitchFamily="18" charset="0"/>
+                          </a:rPr>
+                        </m:ctrlPr>
+                      </m:groupChrPr>
+                      <m:e/>
+                    </m:groupChr>
+                  </m:oMath>
+                </a14:m>
+                <a:r>
+                  <a:rPr lang="en-US" dirty="0"/>
+                  <a:t> </a:t>
+                </a:r>
+                <a14:m>
+                  <m:oMath xmlns:m="http://schemas.openxmlformats.org/officeDocument/2006/math">
+                    <m:r>
+                      <a:rPr lang="en-US" i="1">
+                        <a:latin typeface="Cambria Math" panose="02040503050406030204" pitchFamily="18" charset="0"/>
+                      </a:rPr>
+                      <m:t>𝑄</m:t>
+                    </m:r>
+                    <m:d>
+                      <m:dPr>
+                        <m:ctrlPr>
+                          <a:rPr lang="en-US" i="1">
+                            <a:latin typeface="Cambria Math" panose="02040503050406030204" pitchFamily="18" charset="0"/>
+                          </a:rPr>
+                        </m:ctrlPr>
+                      </m:dPr>
+                      <m:e>
+                        <m:sSub>
+                          <m:sSubPr>
+                            <m:ctrlPr>
+                              <a:rPr lang="en-US" i="1">
+                                <a:latin typeface="Cambria Math" panose="02040503050406030204" pitchFamily="18" charset="0"/>
+                              </a:rPr>
+                            </m:ctrlPr>
+                          </m:sSubPr>
+                          <m:e>
+                            <m:r>
+                              <a:rPr lang="en-US" i="1">
+                                <a:latin typeface="Cambria Math" panose="02040503050406030204" pitchFamily="18" charset="0"/>
+                              </a:rPr>
+                              <m:t>𝑆</m:t>
+                            </m:r>
+                          </m:e>
+                          <m:sub>
+                            <m:r>
+                              <a:rPr lang="en-US" i="1">
+                                <a:latin typeface="Cambria Math" panose="02040503050406030204" pitchFamily="18" charset="0"/>
+                              </a:rPr>
+                              <m:t>𝑡</m:t>
+                            </m:r>
+                          </m:sub>
+                        </m:sSub>
+                        <m:r>
+                          <a:rPr lang="en-US" i="1">
+                            <a:latin typeface="Cambria Math" panose="02040503050406030204" pitchFamily="18" charset="0"/>
+                          </a:rPr>
+                          <m:t>,</m:t>
+                        </m:r>
+                        <m:sSub>
+                          <m:sSubPr>
+                            <m:ctrlPr>
+                              <a:rPr lang="en-US" i="1">
+                                <a:latin typeface="Cambria Math" panose="02040503050406030204" pitchFamily="18" charset="0"/>
+                              </a:rPr>
+                            </m:ctrlPr>
+                          </m:sSubPr>
+                          <m:e>
+                            <m:r>
+                              <a:rPr lang="en-US" i="1">
+                                <a:latin typeface="Cambria Math" panose="02040503050406030204" pitchFamily="18" charset="0"/>
+                              </a:rPr>
+                              <m:t>𝐴</m:t>
+                            </m:r>
+                          </m:e>
+                          <m:sub>
+                            <m:r>
+                              <a:rPr lang="en-US" i="1">
+                                <a:latin typeface="Cambria Math" panose="02040503050406030204" pitchFamily="18" charset="0"/>
+                              </a:rPr>
+                              <m:t>𝑡</m:t>
+                            </m:r>
+                          </m:sub>
+                        </m:sSub>
+                      </m:e>
+                    </m:d>
+                    <m:r>
+                      <a:rPr lang="en-US" b="0" i="1" smtClean="0">
+                        <a:latin typeface="Cambria Math" panose="02040503050406030204" pitchFamily="18" charset="0"/>
+                      </a:rPr>
+                      <m:t>+</m:t>
+                    </m:r>
+                    <m:r>
+                      <a:rPr lang="en-US" b="0" i="1" smtClean="0">
+                        <a:latin typeface="Cambria Math" panose="02040503050406030204" pitchFamily="18" charset="0"/>
+                      </a:rPr>
+                      <m:t>𝛼</m:t>
+                    </m:r>
+                    <m:r>
+                      <a:rPr lang="en-US" b="0" i="1" smtClean="0">
+                        <a:latin typeface="Cambria Math" panose="02040503050406030204" pitchFamily="18" charset="0"/>
+                      </a:rPr>
+                      <m:t>[</m:t>
+                    </m:r>
+                    <m:sSub>
+                      <m:sSubPr>
+                        <m:ctrlPr>
+                          <a:rPr lang="en-US" b="0" i="1" smtClean="0">
+                            <a:latin typeface="Cambria Math" panose="02040503050406030204" pitchFamily="18" charset="0"/>
+                          </a:rPr>
+                        </m:ctrlPr>
+                      </m:sSubPr>
+                      <m:e>
+                        <m:r>
+                          <a:rPr lang="en-US" b="0" i="1" smtClean="0">
+                            <a:latin typeface="Cambria Math" panose="02040503050406030204" pitchFamily="18" charset="0"/>
+                          </a:rPr>
+                          <m:t>𝑅</m:t>
+                        </m:r>
+                      </m:e>
+                      <m:sub>
+                        <m:r>
+                          <a:rPr lang="en-US" b="0" i="1" smtClean="0">
+                            <a:latin typeface="Cambria Math" panose="02040503050406030204" pitchFamily="18" charset="0"/>
+                          </a:rPr>
+                          <m:t>𝑡</m:t>
+                        </m:r>
+                        <m:r>
+                          <a:rPr lang="en-US" b="0" i="1" smtClean="0">
+                            <a:latin typeface="Cambria Math" panose="02040503050406030204" pitchFamily="18" charset="0"/>
+                          </a:rPr>
+                          <m:t>+1</m:t>
+                        </m:r>
+                      </m:sub>
+                    </m:sSub>
+                    <m:r>
+                      <a:rPr lang="en-US" b="0" i="1" smtClean="0">
+                        <a:latin typeface="Cambria Math" panose="02040503050406030204" pitchFamily="18" charset="0"/>
+                      </a:rPr>
+                      <m:t>+</m:t>
+                    </m:r>
+                    <m:r>
+                      <a:rPr lang="en-US" b="0" i="1" smtClean="0">
+                        <a:latin typeface="Cambria Math" panose="02040503050406030204" pitchFamily="18" charset="0"/>
+                      </a:rPr>
+                      <m:t>𝛾</m:t>
+                    </m:r>
+                    <m:r>
+                      <a:rPr lang="en-US" i="1">
+                        <a:latin typeface="Cambria Math" panose="02040503050406030204" pitchFamily="18" charset="0"/>
+                      </a:rPr>
+                      <m:t>𝑄</m:t>
+                    </m:r>
+                    <m:d>
+                      <m:dPr>
+                        <m:ctrlPr>
+                          <a:rPr lang="en-US" i="1">
+                            <a:latin typeface="Cambria Math" panose="02040503050406030204" pitchFamily="18" charset="0"/>
+                          </a:rPr>
+                        </m:ctrlPr>
+                      </m:dPr>
+                      <m:e>
+                        <m:sSub>
+                          <m:sSubPr>
+                            <m:ctrlPr>
+                              <a:rPr lang="en-US" i="1">
+                                <a:latin typeface="Cambria Math" panose="02040503050406030204" pitchFamily="18" charset="0"/>
+                              </a:rPr>
+                            </m:ctrlPr>
+                          </m:sSubPr>
+                          <m:e>
+                            <m:r>
+                              <a:rPr lang="en-US" i="1">
+                                <a:latin typeface="Cambria Math" panose="02040503050406030204" pitchFamily="18" charset="0"/>
+                              </a:rPr>
+                              <m:t>𝑆</m:t>
+                            </m:r>
+                          </m:e>
+                          <m:sub>
+                            <m:r>
+                              <a:rPr lang="en-US" i="1">
+                                <a:latin typeface="Cambria Math" panose="02040503050406030204" pitchFamily="18" charset="0"/>
+                              </a:rPr>
+                              <m:t>𝑡</m:t>
+                            </m:r>
+                            <m:r>
+                              <a:rPr lang="en-US" b="0" i="1" smtClean="0">
+                                <a:latin typeface="Cambria Math" panose="02040503050406030204" pitchFamily="18" charset="0"/>
+                              </a:rPr>
+                              <m:t>+1</m:t>
+                            </m:r>
+                          </m:sub>
+                        </m:sSub>
+                        <m:r>
+                          <a:rPr lang="en-US" i="1">
+                            <a:latin typeface="Cambria Math" panose="02040503050406030204" pitchFamily="18" charset="0"/>
+                          </a:rPr>
+                          <m:t>,</m:t>
+                        </m:r>
+                        <m:sSub>
+                          <m:sSubPr>
+                            <m:ctrlPr>
+                              <a:rPr lang="en-US" i="1">
+                                <a:latin typeface="Cambria Math" panose="02040503050406030204" pitchFamily="18" charset="0"/>
+                              </a:rPr>
+                            </m:ctrlPr>
+                          </m:sSubPr>
+                          <m:e>
+                            <m:r>
+                              <a:rPr lang="en-US" i="1">
+                                <a:latin typeface="Cambria Math" panose="02040503050406030204" pitchFamily="18" charset="0"/>
+                              </a:rPr>
+                              <m:t>𝐴</m:t>
+                            </m:r>
+                          </m:e>
+                          <m:sub>
+                            <m:r>
+                              <a:rPr lang="en-US" i="1">
+                                <a:latin typeface="Cambria Math" panose="02040503050406030204" pitchFamily="18" charset="0"/>
+                              </a:rPr>
+                              <m:t>𝑡</m:t>
+                            </m:r>
+                            <m:r>
+                              <a:rPr lang="en-US" b="0" i="1" smtClean="0">
+                                <a:latin typeface="Cambria Math" panose="02040503050406030204" pitchFamily="18" charset="0"/>
+                              </a:rPr>
+                              <m:t>+1</m:t>
+                            </m:r>
+                          </m:sub>
+                        </m:sSub>
+                      </m:e>
+                    </m:d>
+                    <m:r>
+                      <a:rPr lang="en-US" b="0" i="1" smtClean="0">
+                        <a:latin typeface="Cambria Math" panose="02040503050406030204" pitchFamily="18" charset="0"/>
+                      </a:rPr>
+                      <m:t>−</m:t>
+                    </m:r>
+                    <m:r>
+                      <a:rPr lang="en-US" i="1">
+                        <a:latin typeface="Cambria Math" panose="02040503050406030204" pitchFamily="18" charset="0"/>
+                      </a:rPr>
+                      <m:t>𝑄</m:t>
+                    </m:r>
+                    <m:d>
+                      <m:dPr>
+                        <m:ctrlPr>
+                          <a:rPr lang="en-US" i="1">
+                            <a:latin typeface="Cambria Math" panose="02040503050406030204" pitchFamily="18" charset="0"/>
+                          </a:rPr>
+                        </m:ctrlPr>
+                      </m:dPr>
+                      <m:e>
+                        <m:sSub>
+                          <m:sSubPr>
+                            <m:ctrlPr>
+                              <a:rPr lang="en-US" i="1">
+                                <a:latin typeface="Cambria Math" panose="02040503050406030204" pitchFamily="18" charset="0"/>
+                              </a:rPr>
+                            </m:ctrlPr>
+                          </m:sSubPr>
+                          <m:e>
+                            <m:r>
+                              <a:rPr lang="en-US" i="1">
+                                <a:latin typeface="Cambria Math" panose="02040503050406030204" pitchFamily="18" charset="0"/>
+                              </a:rPr>
+                              <m:t>𝑆</m:t>
+                            </m:r>
+                          </m:e>
+                          <m:sub>
+                            <m:r>
+                              <a:rPr lang="en-US" i="1">
+                                <a:latin typeface="Cambria Math" panose="02040503050406030204" pitchFamily="18" charset="0"/>
+                              </a:rPr>
+                              <m:t>𝑡</m:t>
+                            </m:r>
+                          </m:sub>
+                        </m:sSub>
+                        <m:r>
+                          <a:rPr lang="en-US" i="1">
+                            <a:latin typeface="Cambria Math" panose="02040503050406030204" pitchFamily="18" charset="0"/>
+                          </a:rPr>
+                          <m:t>,</m:t>
+                        </m:r>
+                        <m:sSub>
+                          <m:sSubPr>
+                            <m:ctrlPr>
+                              <a:rPr lang="en-US" i="1">
+                                <a:latin typeface="Cambria Math" panose="02040503050406030204" pitchFamily="18" charset="0"/>
+                              </a:rPr>
+                            </m:ctrlPr>
+                          </m:sSubPr>
+                          <m:e>
+                            <m:r>
+                              <a:rPr lang="en-US" i="1">
+                                <a:latin typeface="Cambria Math" panose="02040503050406030204" pitchFamily="18" charset="0"/>
+                              </a:rPr>
+                              <m:t>𝐴</m:t>
+                            </m:r>
+                          </m:e>
+                          <m:sub>
+                            <m:r>
+                              <a:rPr lang="en-US" i="1">
+                                <a:latin typeface="Cambria Math" panose="02040503050406030204" pitchFamily="18" charset="0"/>
+                              </a:rPr>
+                              <m:t>𝑡</m:t>
+                            </m:r>
+                          </m:sub>
+                        </m:sSub>
+                      </m:e>
+                    </m:d>
+                    <m:r>
+                      <a:rPr lang="en-US" b="0" i="1" smtClean="0">
+                        <a:latin typeface="Cambria Math" panose="02040503050406030204" pitchFamily="18" charset="0"/>
+                      </a:rPr>
+                      <m:t>]</m:t>
+                    </m:r>
+                  </m:oMath>
+                </a14:m>
+                <a:endParaRPr lang="en-US" i="1" dirty="0">
+                  <a:latin typeface="Cambria Math" panose="02040503050406030204" pitchFamily="18" charset="0"/>
+                </a:endParaRPr>
+              </a:p>
+              <a:p>
+                <a:pPr marL="0" indent="0" algn="r">
+                  <a:buNone/>
+                </a:pPr>
+                <a14:m>
+                  <m:oMath xmlns:m="http://schemas.openxmlformats.org/officeDocument/2006/math">
+                    <m:r>
+                      <a:rPr lang="en-US" sz="2000" i="1">
+                        <a:latin typeface="Cambria Math" panose="02040503050406030204" pitchFamily="18" charset="0"/>
+                      </a:rPr>
+                      <m:t>𝑄</m:t>
+                    </m:r>
+                    <m:d>
+                      <m:dPr>
+                        <m:ctrlPr>
+                          <a:rPr lang="en-US" sz="2000" i="1">
+                            <a:latin typeface="Cambria Math" panose="02040503050406030204" pitchFamily="18" charset="0"/>
+                          </a:rPr>
+                        </m:ctrlPr>
+                      </m:dPr>
+                      <m:e>
+                        <m:sSub>
+                          <m:sSubPr>
+                            <m:ctrlPr>
+                              <a:rPr lang="en-US" sz="2000" i="1">
+                                <a:latin typeface="Cambria Math" panose="02040503050406030204" pitchFamily="18" charset="0"/>
+                              </a:rPr>
+                            </m:ctrlPr>
+                          </m:sSubPr>
+                          <m:e>
+                            <m:r>
+                              <a:rPr lang="en-US" sz="2000" i="1">
+                                <a:latin typeface="Cambria Math" panose="02040503050406030204" pitchFamily="18" charset="0"/>
+                              </a:rPr>
+                              <m:t>𝑆</m:t>
+                            </m:r>
+                          </m:e>
+                          <m:sub>
+                            <m:r>
+                              <a:rPr lang="en-US" sz="2000" i="1">
+                                <a:latin typeface="Cambria Math" panose="02040503050406030204" pitchFamily="18" charset="0"/>
+                              </a:rPr>
+                              <m:t>𝑡</m:t>
+                            </m:r>
+                            <m:r>
+                              <a:rPr lang="en-US" sz="2000" i="1">
+                                <a:latin typeface="Cambria Math" panose="02040503050406030204" pitchFamily="18" charset="0"/>
+                              </a:rPr>
+                              <m:t>+1</m:t>
+                            </m:r>
+                          </m:sub>
+                        </m:sSub>
+                        <m:r>
+                          <a:rPr lang="en-US" sz="2000" i="1">
+                            <a:latin typeface="Cambria Math" panose="02040503050406030204" pitchFamily="18" charset="0"/>
+                          </a:rPr>
+                          <m:t>,</m:t>
+                        </m:r>
+                        <m:sSub>
+                          <m:sSubPr>
+                            <m:ctrlPr>
+                              <a:rPr lang="en-US" sz="2000" i="1">
+                                <a:latin typeface="Cambria Math" panose="02040503050406030204" pitchFamily="18" charset="0"/>
+                              </a:rPr>
+                            </m:ctrlPr>
+                          </m:sSubPr>
+                          <m:e>
+                            <m:r>
+                              <a:rPr lang="en-US" sz="2000" i="1">
+                                <a:latin typeface="Cambria Math" panose="02040503050406030204" pitchFamily="18" charset="0"/>
+                              </a:rPr>
+                              <m:t>𝐴</m:t>
+                            </m:r>
+                          </m:e>
+                          <m:sub>
+                            <m:r>
+                              <a:rPr lang="en-US" sz="2000" i="1">
+                                <a:latin typeface="Cambria Math" panose="02040503050406030204" pitchFamily="18" charset="0"/>
+                              </a:rPr>
+                              <m:t>𝑡</m:t>
+                            </m:r>
+                            <m:r>
+                              <a:rPr lang="en-US" sz="2000" i="1">
+                                <a:latin typeface="Cambria Math" panose="02040503050406030204" pitchFamily="18" charset="0"/>
+                              </a:rPr>
+                              <m:t>+1</m:t>
+                            </m:r>
+                          </m:sub>
+                        </m:sSub>
+                      </m:e>
+                    </m:d>
+                  </m:oMath>
+                </a14:m>
+                <a:r>
+                  <a:rPr lang="en-US" sz="2000" dirty="0"/>
+                  <a:t> for a terminal state is defined as </a:t>
+                </a:r>
+                <a14:m>
+                  <m:oMath xmlns:m="http://schemas.openxmlformats.org/officeDocument/2006/math">
+                    <m:r>
+                      <a:rPr lang="en-US" sz="2000" i="1" dirty="0" smtClean="0">
+                        <a:latin typeface="Cambria Math" panose="02040503050406030204" pitchFamily="18" charset="0"/>
+                      </a:rPr>
+                      <m:t>0</m:t>
+                    </m:r>
+                  </m:oMath>
+                </a14:m>
+                <a:r>
+                  <a:rPr lang="en-US" sz="2000" dirty="0"/>
+                  <a:t>.</a:t>
+                </a:r>
+              </a:p>
+              <a:p>
+                <a:pPr marL="0" indent="0">
+                  <a:buNone/>
+                </a:pPr>
+                <a:endParaRPr lang="en-US" dirty="0"/>
+              </a:p>
+              <a:p>
+                <a:r>
+                  <a:rPr lang="en-US" b="1" dirty="0"/>
+                  <a:t>Improvement</a:t>
+                </a:r>
+                <a:r>
+                  <a:rPr lang="en-US" dirty="0"/>
+                  <a:t>: Leans a greedy policy based on </a:t>
+                </a:r>
+                <a14:m>
+                  <m:oMath xmlns:m="http://schemas.openxmlformats.org/officeDocument/2006/math">
+                    <m:r>
+                      <a:rPr lang="en-US" i="1" dirty="0">
+                        <a:latin typeface="Cambria Math" panose="02040503050406030204" pitchFamily="18" charset="0"/>
+                      </a:rPr>
+                      <m:t>𝑄</m:t>
+                    </m:r>
+                  </m:oMath>
+                </a14:m>
+                <a:r>
+                  <a:rPr lang="en-US" dirty="0"/>
+                  <a:t>. To keep exploring, but actions are chosen from a soft policy based on </a:t>
+                </a:r>
+                <a14:m>
+                  <m:oMath xmlns:m="http://schemas.openxmlformats.org/officeDocument/2006/math">
+                    <m:r>
+                      <a:rPr lang="en-US" i="1" dirty="0" smtClean="0">
+                        <a:latin typeface="Cambria Math" panose="02040503050406030204" pitchFamily="18" charset="0"/>
+                      </a:rPr>
+                      <m:t>𝑄</m:t>
+                    </m:r>
+                  </m:oMath>
+                </a14:m>
+                <a:r>
+                  <a:rPr lang="en-US" dirty="0"/>
+                  <a:t>.</a:t>
+                </a:r>
+                <a:br>
+                  <a:rPr lang="en-US" dirty="0"/>
+                </a:br>
+                <a:endParaRPr lang="en-US" dirty="0"/>
+              </a:p>
+              <a:p>
+                <a:r>
+                  <a:rPr lang="en-US" b="1" dirty="0"/>
+                  <a:t>Issues</a:t>
+                </a:r>
+                <a:r>
+                  <a:rPr lang="en-US" dirty="0"/>
+                  <a:t>: </a:t>
+                </a:r>
+              </a:p>
+              <a:p>
+                <a:pPr lvl="1"/>
+                <a:r>
+                  <a:rPr lang="en-US" b="1" dirty="0"/>
+                  <a:t>On-policy</a:t>
+                </a:r>
+                <a:r>
+                  <a:rPr lang="en-US" dirty="0"/>
+                  <a:t> means that it learns a soft policy and not the optimal deterministic policy!</a:t>
+                </a:r>
+              </a:p>
+              <a:p>
+                <a:pPr lvl="1"/>
+                <a:r>
+                  <a:rPr lang="en-US" dirty="0"/>
+                  <a:t>Update uses </a:t>
+                </a:r>
+                <a14:m>
+                  <m:oMath xmlns:m="http://schemas.openxmlformats.org/officeDocument/2006/math">
+                    <m:r>
+                      <a:rPr lang="en-US" b="0" i="1" smtClean="0">
+                        <a:latin typeface="Cambria Math" panose="02040503050406030204" pitchFamily="18" charset="0"/>
+                      </a:rPr>
+                      <m:t>(</m:t>
+                    </m:r>
+                    <m:sSub>
+                      <m:sSubPr>
+                        <m:ctrlPr>
+                          <a:rPr lang="en-US" b="0" i="1" smtClean="0">
+                            <a:latin typeface="Cambria Math" panose="02040503050406030204" pitchFamily="18" charset="0"/>
+                          </a:rPr>
+                        </m:ctrlPr>
+                      </m:sSubPr>
+                      <m:e>
+                        <m:r>
+                          <a:rPr lang="en-US" b="0" i="1" smtClean="0">
+                            <a:latin typeface="Cambria Math" panose="02040503050406030204" pitchFamily="18" charset="0"/>
+                          </a:rPr>
+                          <m:t>𝑆</m:t>
+                        </m:r>
+                      </m:e>
+                      <m:sub>
+                        <m:r>
+                          <a:rPr lang="en-US" b="0" i="1" smtClean="0">
+                            <a:latin typeface="Cambria Math" panose="02040503050406030204" pitchFamily="18" charset="0"/>
+                          </a:rPr>
+                          <m:t>𝑡</m:t>
+                        </m:r>
+                      </m:sub>
+                    </m:sSub>
+                    <m:r>
+                      <a:rPr lang="en-US" b="0" i="1" smtClean="0">
+                        <a:latin typeface="Cambria Math" panose="02040503050406030204" pitchFamily="18" charset="0"/>
+                      </a:rPr>
+                      <m:t>,</m:t>
+                    </m:r>
+                    <m:sSub>
+                      <m:sSubPr>
+                        <m:ctrlPr>
+                          <a:rPr lang="en-US" b="0" i="1" smtClean="0">
+                            <a:latin typeface="Cambria Math" panose="02040503050406030204" pitchFamily="18" charset="0"/>
+                          </a:rPr>
+                        </m:ctrlPr>
+                      </m:sSubPr>
+                      <m:e>
+                        <m:r>
+                          <a:rPr lang="en-US" b="0" i="1" smtClean="0">
+                            <a:latin typeface="Cambria Math" panose="02040503050406030204" pitchFamily="18" charset="0"/>
+                          </a:rPr>
+                          <m:t>𝐴</m:t>
+                        </m:r>
+                      </m:e>
+                      <m:sub>
+                        <m:r>
+                          <a:rPr lang="en-US" b="0" i="1" smtClean="0">
+                            <a:latin typeface="Cambria Math" panose="02040503050406030204" pitchFamily="18" charset="0"/>
+                          </a:rPr>
+                          <m:t>𝑡</m:t>
+                        </m:r>
+                      </m:sub>
+                    </m:sSub>
+                    <m:r>
+                      <a:rPr lang="en-US" b="0" i="1" smtClean="0">
+                        <a:latin typeface="Cambria Math" panose="02040503050406030204" pitchFamily="18" charset="0"/>
+                      </a:rPr>
+                      <m:t>,</m:t>
+                    </m:r>
+                    <m:sSub>
+                      <m:sSubPr>
+                        <m:ctrlPr>
+                          <a:rPr lang="en-US" b="0" i="1" smtClean="0">
+                            <a:latin typeface="Cambria Math" panose="02040503050406030204" pitchFamily="18" charset="0"/>
+                          </a:rPr>
+                        </m:ctrlPr>
+                      </m:sSubPr>
+                      <m:e>
+                        <m:r>
+                          <a:rPr lang="en-US" b="0" i="1" smtClean="0">
+                            <a:latin typeface="Cambria Math" panose="02040503050406030204" pitchFamily="18" charset="0"/>
+                          </a:rPr>
+                          <m:t>𝑅</m:t>
+                        </m:r>
+                      </m:e>
+                      <m:sub>
+                        <m:r>
+                          <a:rPr lang="en-US" b="0" i="1" smtClean="0">
+                            <a:latin typeface="Cambria Math" panose="02040503050406030204" pitchFamily="18" charset="0"/>
+                          </a:rPr>
+                          <m:t>𝑡</m:t>
+                        </m:r>
+                        <m:r>
+                          <a:rPr lang="en-US" b="0" i="1" smtClean="0">
+                            <a:latin typeface="Cambria Math" panose="02040503050406030204" pitchFamily="18" charset="0"/>
+                          </a:rPr>
+                          <m:t>+1</m:t>
+                        </m:r>
+                      </m:sub>
+                    </m:sSub>
+                    <m:r>
+                      <a:rPr lang="en-US" b="0" i="1" smtClean="0">
+                        <a:latin typeface="Cambria Math" panose="02040503050406030204" pitchFamily="18" charset="0"/>
+                      </a:rPr>
+                      <m:t>,</m:t>
+                    </m:r>
+                    <m:sSub>
+                      <m:sSubPr>
+                        <m:ctrlPr>
+                          <a:rPr lang="en-US" b="0" i="1" smtClean="0">
+                            <a:latin typeface="Cambria Math" panose="02040503050406030204" pitchFamily="18" charset="0"/>
+                          </a:rPr>
+                        </m:ctrlPr>
+                      </m:sSubPr>
+                      <m:e>
+                        <m:r>
+                          <a:rPr lang="en-US" b="0" i="1" smtClean="0">
+                            <a:latin typeface="Cambria Math" panose="02040503050406030204" pitchFamily="18" charset="0"/>
+                          </a:rPr>
+                          <m:t>𝑆</m:t>
+                        </m:r>
+                      </m:e>
+                      <m:sub>
+                        <m:r>
+                          <a:rPr lang="en-US" b="0" i="1" smtClean="0">
+                            <a:latin typeface="Cambria Math" panose="02040503050406030204" pitchFamily="18" charset="0"/>
+                          </a:rPr>
+                          <m:t>𝑡</m:t>
+                        </m:r>
+                        <m:r>
+                          <a:rPr lang="en-US" b="0" i="1" smtClean="0">
+                            <a:latin typeface="Cambria Math" panose="02040503050406030204" pitchFamily="18" charset="0"/>
+                          </a:rPr>
+                          <m:t>+1</m:t>
+                        </m:r>
+                      </m:sub>
+                    </m:sSub>
+                    <m:r>
+                      <a:rPr lang="en-US" b="0" i="1" smtClean="0">
+                        <a:latin typeface="Cambria Math" panose="02040503050406030204" pitchFamily="18" charset="0"/>
+                      </a:rPr>
+                      <m:t>, </m:t>
+                    </m:r>
+                    <m:sSub>
+                      <m:sSubPr>
+                        <m:ctrlPr>
+                          <a:rPr lang="en-US" b="0" i="1" smtClean="0">
+                            <a:latin typeface="Cambria Math" panose="02040503050406030204" pitchFamily="18" charset="0"/>
+                          </a:rPr>
+                        </m:ctrlPr>
+                      </m:sSubPr>
+                      <m:e>
+                        <m:r>
+                          <a:rPr lang="en-US" b="0" i="1" smtClean="0">
+                            <a:latin typeface="Cambria Math" panose="02040503050406030204" pitchFamily="18" charset="0"/>
+                          </a:rPr>
+                          <m:t>𝐴</m:t>
+                        </m:r>
+                      </m:e>
+                      <m:sub>
+                        <m:r>
+                          <a:rPr lang="en-US" b="0" i="1" smtClean="0">
+                            <a:latin typeface="Cambria Math" panose="02040503050406030204" pitchFamily="18" charset="0"/>
+                          </a:rPr>
+                          <m:t>𝑡</m:t>
+                        </m:r>
+                        <m:r>
+                          <a:rPr lang="en-US" b="0" i="1" smtClean="0">
+                            <a:latin typeface="Cambria Math" panose="02040503050406030204" pitchFamily="18" charset="0"/>
+                          </a:rPr>
+                          <m:t>+1</m:t>
+                        </m:r>
+                      </m:sub>
+                    </m:sSub>
+                    <m:r>
+                      <a:rPr lang="en-US" b="0" i="1" smtClean="0">
+                        <a:latin typeface="Cambria Math" panose="02040503050406030204" pitchFamily="18" charset="0"/>
+                      </a:rPr>
+                      <m:t>)</m:t>
+                    </m:r>
+                  </m:oMath>
+                </a14:m>
+                <a:r>
+                  <a:rPr lang="en-US" dirty="0"/>
+                  <a:t> which leads to the name </a:t>
+                </a:r>
+                <a:r>
+                  <a:rPr lang="en-US" b="1" dirty="0"/>
+                  <a:t>Sarsa.</a:t>
+                </a:r>
+              </a:p>
+            </p:txBody>
+          </p:sp>
+        </mc:Choice>
+        <mc:Fallback xmlns="">
+          <p:sp>
+            <p:nvSpPr>
+              <p:cNvPr id="3" name="Content Placeholder 2">
+                <a:extLst>
+                  <a:ext uri="{FF2B5EF4-FFF2-40B4-BE49-F238E27FC236}">
+                    <a16:creationId xmlns:a16="http://schemas.microsoft.com/office/drawing/2014/main" id="{A1E76A2D-11FD-3349-6432-A6DAAA3C05B5}"/>
+                  </a:ext>
+                </a:extLst>
+              </p:cNvPr>
+              <p:cNvSpPr>
+                <a:spLocks noGrp="1" noRot="1" noChangeAspect="1" noMove="1" noResize="1" noEditPoints="1" noAdjustHandles="1" noChangeArrowheads="1" noChangeShapeType="1" noTextEdit="1"/>
+              </p:cNvSpPr>
+              <p:nvPr>
+                <p:ph idx="1"/>
+              </p:nvPr>
+            </p:nvSpPr>
+            <p:spPr>
+              <a:xfrm>
+                <a:off x="838200" y="1397330"/>
+                <a:ext cx="8888835" cy="4779633"/>
+              </a:xfrm>
+              <a:blipFill>
+                <a:blip r:embed="rId2"/>
+                <a:stretch>
+                  <a:fillRect l="-960" t="-2806" r="-412" b="-765"/>
+                </a:stretch>
+              </a:blipFill>
+            </p:spPr>
+            <p:txBody>
+              <a:bodyPr/>
+              <a:lstStyle/>
+              <a:p>
+                <a:r>
+                  <a:rPr lang="en-US">
+                    <a:noFill/>
+                  </a:rPr>
+                  <a:t> </a:t>
+                </a:r>
+              </a:p>
+            </p:txBody>
+          </p:sp>
+        </mc:Fallback>
+      </mc:AlternateContent>
+      <p:grpSp>
+        <p:nvGrpSpPr>
+          <p:cNvPr id="9" name="Group 8">
+            <a:extLst>
+              <a:ext uri="{FF2B5EF4-FFF2-40B4-BE49-F238E27FC236}">
+                <a16:creationId xmlns:a16="http://schemas.microsoft.com/office/drawing/2014/main" id="{81F00B50-A0E2-9E3B-7B98-93FC2A8B8005}"/>
+              </a:ext>
+            </a:extLst>
+          </p:cNvPr>
+          <p:cNvGrpSpPr/>
+          <p:nvPr/>
+        </p:nvGrpSpPr>
+        <p:grpSpPr>
+          <a:xfrm>
+            <a:off x="9576769" y="166945"/>
+            <a:ext cx="2310430" cy="2149756"/>
+            <a:chOff x="9576769" y="166945"/>
+            <a:chExt cx="2310430" cy="2149756"/>
+          </a:xfrm>
+        </p:grpSpPr>
+        <p:grpSp>
+          <p:nvGrpSpPr>
+            <p:cNvPr id="4" name="Group 3">
+              <a:extLst>
+                <a:ext uri="{FF2B5EF4-FFF2-40B4-BE49-F238E27FC236}">
+                  <a16:creationId xmlns:a16="http://schemas.microsoft.com/office/drawing/2014/main" id="{834ACF09-360E-2E24-9C97-07D69E85A4F4}"/>
+                </a:ext>
+              </a:extLst>
+            </p:cNvPr>
+            <p:cNvGrpSpPr/>
+            <p:nvPr/>
+          </p:nvGrpSpPr>
+          <p:grpSpPr>
+            <a:xfrm>
+              <a:off x="9576769" y="204828"/>
+              <a:ext cx="2310430" cy="2111873"/>
+              <a:chOff x="8990601" y="218543"/>
+              <a:chExt cx="3001301" cy="2828670"/>
+            </a:xfrm>
+          </p:grpSpPr>
+          <p:pic>
+            <p:nvPicPr>
+              <p:cNvPr id="5" name="Content Placeholder 4">
+                <a:extLst>
+                  <a:ext uri="{FF2B5EF4-FFF2-40B4-BE49-F238E27FC236}">
+                    <a16:creationId xmlns:a16="http://schemas.microsoft.com/office/drawing/2014/main" id="{14459B7C-6F39-0B15-A90A-5AC1F819BC03}"/>
+                  </a:ext>
+                </a:extLst>
+              </p:cNvPr>
+              <p:cNvPicPr>
+                <a:picLocks noChangeAspect="1"/>
+              </p:cNvPicPr>
+              <p:nvPr/>
+            </p:nvPicPr>
+            <p:blipFill>
+              <a:blip r:embed="rId3"/>
+              <a:stretch>
+                <a:fillRect/>
+              </a:stretch>
+            </p:blipFill>
+            <p:spPr>
+              <a:xfrm>
+                <a:off x="8990601" y="218543"/>
+                <a:ext cx="2936007" cy="2828670"/>
+              </a:xfrm>
+              <a:prstGeom prst="rect">
+                <a:avLst/>
+              </a:prstGeom>
+            </p:spPr>
+          </p:pic>
+          <p:sp>
+            <p:nvSpPr>
+              <p:cNvPr id="6" name="TextBox 5">
+                <a:extLst>
+                  <a:ext uri="{FF2B5EF4-FFF2-40B4-BE49-F238E27FC236}">
+                    <a16:creationId xmlns:a16="http://schemas.microsoft.com/office/drawing/2014/main" id="{915FDFB7-32DA-E7BC-97BA-735B16C98EB2}"/>
+                  </a:ext>
+                </a:extLst>
+              </p:cNvPr>
+              <p:cNvSpPr txBox="1"/>
+              <p:nvPr/>
+            </p:nvSpPr>
+            <p:spPr>
+              <a:xfrm>
+                <a:off x="10107262" y="1309193"/>
+                <a:ext cx="687748" cy="453464"/>
+              </a:xfrm>
+              <a:prstGeom prst="rect">
+                <a:avLst/>
+              </a:prstGeom>
+            </p:spPr>
+            <p:style>
+              <a:lnRef idx="3">
+                <a:schemeClr val="lt1"/>
+              </a:lnRef>
+              <a:fillRef idx="1">
+                <a:schemeClr val="accent2"/>
+              </a:fillRef>
+              <a:effectRef idx="1">
+                <a:schemeClr val="accent2"/>
+              </a:effectRef>
+              <a:fontRef idx="minor">
+                <a:schemeClr val="lt1"/>
+              </a:fontRef>
+            </p:style>
+            <p:txBody>
+              <a:bodyPr wrap="square" rtlCol="0">
+                <a:spAutoFit/>
+              </a:bodyPr>
+              <a:lstStyle/>
+              <a:p>
+                <a:pPr algn="ctr"/>
+                <a:r>
+                  <a:rPr lang="en-US" sz="1600" dirty="0"/>
+                  <a:t>GPI</a:t>
+                </a:r>
+              </a:p>
+            </p:txBody>
+          </p:sp>
+          <p:sp>
+            <p:nvSpPr>
+              <p:cNvPr id="7" name="Rectangle 6">
+                <a:extLst>
+                  <a:ext uri="{FF2B5EF4-FFF2-40B4-BE49-F238E27FC236}">
+                    <a16:creationId xmlns:a16="http://schemas.microsoft.com/office/drawing/2014/main" id="{54C9C71F-1C03-4588-F4B8-107859426DCC}"/>
+                  </a:ext>
+                </a:extLst>
+              </p:cNvPr>
+              <p:cNvSpPr/>
+              <p:nvPr/>
+            </p:nvSpPr>
+            <p:spPr>
+              <a:xfrm>
+                <a:off x="8990601" y="218543"/>
+                <a:ext cx="3001301" cy="2727081"/>
+              </a:xfrm>
+              <a:prstGeom prst="rect">
+                <a:avLst/>
+              </a:prstGeom>
+              <a:noFill/>
+              <a:ln w="28575" cap="flat" cmpd="sng" algn="ctr">
+                <a:solidFill>
+                  <a:schemeClr val="accent2"/>
+                </a:solidFill>
+                <a:prstDash val="solid"/>
+                <a:round/>
+                <a:headEnd type="none" w="med" len="med"/>
+                <a:tailEnd type="none" w="med" len="med"/>
+              </a:ln>
+            </p:spPr>
+            <p:style>
+              <a:lnRef idx="0">
+                <a:scrgbClr r="0" g="0" b="0"/>
+              </a:lnRef>
+              <a:fillRef idx="0">
+                <a:scrgbClr r="0" g="0" b="0"/>
+              </a:fillRef>
+              <a:effectRef idx="0">
+                <a:scrgbClr r="0" g="0" b="0"/>
+              </a:effectRef>
+              <a:fontRef idx="minor">
+                <a:schemeClr val="accent2"/>
+              </a:fontRef>
+            </p:style>
+            <p:txBody>
+              <a:bodyPr rtlCol="0" anchor="ctr"/>
+              <a:lstStyle/>
+              <a:p>
+                <a:pPr algn="ctr"/>
+                <a:endParaRPr lang="en-US"/>
+              </a:p>
+            </p:txBody>
+          </p:sp>
+        </p:grpSp>
+        <p:sp>
+          <p:nvSpPr>
+            <p:cNvPr id="8" name="TextBox 7">
+              <a:extLst>
+                <a:ext uri="{FF2B5EF4-FFF2-40B4-BE49-F238E27FC236}">
+                  <a16:creationId xmlns:a16="http://schemas.microsoft.com/office/drawing/2014/main" id="{2BC74A6F-1E51-0870-42BE-148CFD641243}"/>
+                </a:ext>
+              </a:extLst>
+            </p:cNvPr>
+            <p:cNvSpPr txBox="1"/>
+            <p:nvPr/>
+          </p:nvSpPr>
+          <p:spPr>
+            <a:xfrm>
+              <a:off x="9777369" y="166945"/>
+              <a:ext cx="494950" cy="369332"/>
+            </a:xfrm>
+            <a:prstGeom prst="rect">
+              <a:avLst/>
+            </a:prstGeom>
+            <a:noFill/>
+          </p:spPr>
+          <p:txBody>
+            <a:bodyPr wrap="square" rtlCol="0">
+              <a:spAutoFit/>
+            </a:bodyPr>
+            <a:lstStyle/>
+            <a:p>
+              <a:r>
+                <a:rPr lang="en-US" b="1" dirty="0">
+                  <a:solidFill>
+                    <a:schemeClr val="accent3"/>
+                  </a:solidFill>
+                </a:rPr>
+                <a:t>TD</a:t>
+              </a:r>
+            </a:p>
+          </p:txBody>
+        </p:sp>
+      </p:grpSp>
+      <mc:AlternateContent xmlns:mc="http://schemas.openxmlformats.org/markup-compatibility/2006" xmlns:a14="http://schemas.microsoft.com/office/drawing/2010/main">
+        <mc:Choice Requires="a14">
+          <p:sp>
+            <p:nvSpPr>
+              <p:cNvPr id="10" name="TextBox 9">
+                <a:extLst>
+                  <a:ext uri="{FF2B5EF4-FFF2-40B4-BE49-F238E27FC236}">
+                    <a16:creationId xmlns:a16="http://schemas.microsoft.com/office/drawing/2014/main" id="{A11396C4-8FFA-4AAF-B2FC-EF4174161DA8}"/>
+                  </a:ext>
+                </a:extLst>
+              </p:cNvPr>
+              <p:cNvSpPr txBox="1"/>
+              <p:nvPr/>
+            </p:nvSpPr>
+            <p:spPr>
+              <a:xfrm>
+                <a:off x="9758861" y="804757"/>
+                <a:ext cx="973123" cy="276999"/>
+              </a:xfrm>
+              <a:prstGeom prst="rect">
+                <a:avLst/>
+              </a:prstGeom>
+              <a:noFill/>
+            </p:spPr>
+            <p:txBody>
+              <a:bodyPr wrap="square" rtlCol="0">
+                <a:spAutoFit/>
+              </a:bodyPr>
+              <a:lstStyle/>
+              <a:p>
+                <a:pPr/>
+                <a14:m>
+                  <m:oMathPara xmlns:m="http://schemas.openxmlformats.org/officeDocument/2006/math">
+                    <m:oMathParaPr>
+                      <m:jc m:val="centerGroup"/>
+                    </m:oMathParaPr>
+                    <m:oMath xmlns:m="http://schemas.openxmlformats.org/officeDocument/2006/math">
+                      <m:r>
+                        <a:rPr lang="en-US" sz="1200" b="0" i="1" smtClean="0">
+                          <a:solidFill>
+                            <a:schemeClr val="accent3"/>
+                          </a:solidFill>
+                          <a:latin typeface="Cambria Math" panose="02040503050406030204" pitchFamily="18" charset="0"/>
+                        </a:rPr>
+                        <m:t>𝑎</m:t>
+                      </m:r>
+                      <m:r>
+                        <a:rPr lang="en-US" sz="1200" b="0" i="1" smtClean="0">
+                          <a:solidFill>
+                            <a:schemeClr val="accent3"/>
+                          </a:solidFill>
+                          <a:latin typeface="Cambria Math" panose="02040503050406030204" pitchFamily="18" charset="0"/>
+                        </a:rPr>
+                        <m:t>~</m:t>
+                      </m:r>
+                      <m:r>
+                        <m:rPr>
+                          <m:nor/>
+                        </m:rPr>
+                        <a:rPr lang="en-US" sz="1200" b="0" i="0" smtClean="0">
+                          <a:solidFill>
+                            <a:schemeClr val="accent3"/>
+                          </a:solidFill>
+                          <a:latin typeface="Cambria Math" panose="02040503050406030204" pitchFamily="18" charset="0"/>
+                        </a:rPr>
+                        <m:t>soft</m:t>
+                      </m:r>
+                      <m:r>
+                        <a:rPr lang="en-US" sz="1200" b="0" i="1" smtClean="0">
+                          <a:solidFill>
+                            <a:schemeClr val="accent3"/>
+                          </a:solidFill>
+                          <a:latin typeface="Cambria Math" panose="02040503050406030204" pitchFamily="18" charset="0"/>
+                        </a:rPr>
+                        <m:t>(</m:t>
+                      </m:r>
+                      <m:r>
+                        <a:rPr lang="en-US" sz="1200" b="0" i="1" smtClean="0">
+                          <a:solidFill>
+                            <a:schemeClr val="accent3"/>
+                          </a:solidFill>
+                          <a:latin typeface="Cambria Math" panose="02040503050406030204" pitchFamily="18" charset="0"/>
+                        </a:rPr>
+                        <m:t>𝜋</m:t>
+                      </m:r>
+                      <m:r>
+                        <a:rPr lang="en-US" sz="1200" b="0" i="1" smtClean="0">
+                          <a:solidFill>
+                            <a:schemeClr val="accent3"/>
+                          </a:solidFill>
+                          <a:latin typeface="Cambria Math" panose="02040503050406030204" pitchFamily="18" charset="0"/>
+                        </a:rPr>
+                        <m:t>)</m:t>
+                      </m:r>
+                    </m:oMath>
+                  </m:oMathPara>
+                </a14:m>
+                <a:endParaRPr lang="en-US" sz="1200" dirty="0">
+                  <a:solidFill>
+                    <a:schemeClr val="accent3"/>
+                  </a:solidFill>
+                </a:endParaRPr>
+              </a:p>
+            </p:txBody>
+          </p:sp>
+        </mc:Choice>
+        <mc:Fallback xmlns="">
+          <p:sp>
+            <p:nvSpPr>
+              <p:cNvPr id="10" name="TextBox 9">
+                <a:extLst>
+                  <a:ext uri="{FF2B5EF4-FFF2-40B4-BE49-F238E27FC236}">
+                    <a16:creationId xmlns:a16="http://schemas.microsoft.com/office/drawing/2014/main" id="{A11396C4-8FFA-4AAF-B2FC-EF4174161DA8}"/>
+                  </a:ext>
+                </a:extLst>
+              </p:cNvPr>
+              <p:cNvSpPr txBox="1">
+                <a:spLocks noRot="1" noChangeAspect="1" noMove="1" noResize="1" noEditPoints="1" noAdjustHandles="1" noChangeArrowheads="1" noChangeShapeType="1" noTextEdit="1"/>
+              </p:cNvSpPr>
+              <p:nvPr/>
+            </p:nvSpPr>
+            <p:spPr>
+              <a:xfrm>
+                <a:off x="9758861" y="804757"/>
+                <a:ext cx="973123" cy="276999"/>
+              </a:xfrm>
+              <a:prstGeom prst="rect">
+                <a:avLst/>
+              </a:prstGeom>
+              <a:blipFill>
+                <a:blip r:embed="rId4"/>
+                <a:stretch>
+                  <a:fillRect b="-8889"/>
+                </a:stretch>
+              </a:blipFill>
+            </p:spPr>
+            <p:txBody>
+              <a:bodyPr/>
+              <a:lstStyle/>
+              <a:p>
+                <a:r>
+                  <a:rPr lang="en-US">
+                    <a:noFill/>
+                  </a:rPr>
+                  <a:t> </a:t>
+                </a:r>
+              </a:p>
+            </p:txBody>
+          </p:sp>
+        </mc:Fallback>
+      </mc:AlternateContent>
+      <mc:AlternateContent xmlns:mc="http://schemas.openxmlformats.org/markup-compatibility/2006" xmlns:a14="http://schemas.microsoft.com/office/drawing/2010/main">
+        <mc:Choice Requires="a14">
+          <p:sp>
+            <p:nvSpPr>
+              <p:cNvPr id="12" name="TextBox 11">
+                <a:extLst>
+                  <a:ext uri="{FF2B5EF4-FFF2-40B4-BE49-F238E27FC236}">
+                    <a16:creationId xmlns:a16="http://schemas.microsoft.com/office/drawing/2014/main" id="{5B04E290-C7A8-249A-84EF-A94577E33ECB}"/>
+                  </a:ext>
+                </a:extLst>
+              </p:cNvPr>
+              <p:cNvSpPr txBox="1"/>
+              <p:nvPr/>
+            </p:nvSpPr>
+            <p:spPr>
+              <a:xfrm>
+                <a:off x="10566073" y="602266"/>
+                <a:ext cx="601468" cy="479490"/>
+              </a:xfrm>
+              <a:prstGeom prst="rect">
+                <a:avLst/>
+              </a:prstGeom>
+              <a:noFill/>
+            </p:spPr>
+            <p:txBody>
+              <a:bodyPr wrap="square">
+                <a:spAutoFit/>
+              </a:bodyPr>
+              <a:lstStyle/>
+              <a:p>
+                <a:pPr/>
+                <a14:m>
+                  <m:oMathPara xmlns:m="http://schemas.openxmlformats.org/officeDocument/2006/math">
+                    <m:oMathParaPr>
+                      <m:jc m:val="centerGroup"/>
+                    </m:oMathParaPr>
+                    <m:oMath xmlns:m="http://schemas.openxmlformats.org/officeDocument/2006/math">
+                      <m:sSub>
+                        <m:sSubPr>
+                          <m:ctrlPr>
+                            <a:rPr lang="en-US" sz="1200" b="0" i="1" smtClean="0">
+                              <a:solidFill>
+                                <a:schemeClr val="accent3"/>
+                              </a:solidFill>
+                              <a:latin typeface="Cambria Math" panose="02040503050406030204" pitchFamily="18" charset="0"/>
+                            </a:rPr>
+                          </m:ctrlPr>
+                        </m:sSubPr>
+                        <m:e>
+                          <m:r>
+                            <a:rPr lang="en-US" sz="1200" b="0" i="1" smtClean="0">
+                              <a:solidFill>
+                                <a:schemeClr val="accent3"/>
+                              </a:solidFill>
+                              <a:latin typeface="Cambria Math" panose="02040503050406030204" pitchFamily="18" charset="0"/>
+                            </a:rPr>
+                            <m:t>𝑞</m:t>
+                          </m:r>
+                        </m:e>
+                        <m:sub>
+                          <m:r>
+                            <a:rPr lang="en-US" sz="1200" b="0" i="1" smtClean="0">
+                              <a:solidFill>
+                                <a:schemeClr val="accent3"/>
+                              </a:solidFill>
+                              <a:latin typeface="Cambria Math" panose="02040503050406030204" pitchFamily="18" charset="0"/>
+                            </a:rPr>
+                            <m:t>𝑠𝑜𝑓𝑡</m:t>
+                          </m:r>
+                          <m:r>
+                            <a:rPr lang="en-US" sz="1200" b="0" i="1" smtClean="0">
+                              <a:solidFill>
+                                <a:schemeClr val="accent3"/>
+                              </a:solidFill>
+                              <a:latin typeface="Cambria Math" panose="02040503050406030204" pitchFamily="18" charset="0"/>
+                            </a:rPr>
+                            <m:t>(</m:t>
+                          </m:r>
+                          <m:r>
+                            <a:rPr lang="en-US" sz="1200" b="0" i="1" smtClean="0">
+                              <a:solidFill>
+                                <a:schemeClr val="accent3"/>
+                              </a:solidFill>
+                              <a:latin typeface="Cambria Math" panose="02040503050406030204" pitchFamily="18" charset="0"/>
+                            </a:rPr>
+                            <m:t>𝜋</m:t>
+                          </m:r>
+                          <m:r>
+                            <a:rPr lang="en-US" sz="1200" b="0" i="1" smtClean="0">
+                              <a:solidFill>
+                                <a:schemeClr val="accent3"/>
+                              </a:solidFill>
+                              <a:latin typeface="Cambria Math" panose="02040503050406030204" pitchFamily="18" charset="0"/>
+                            </a:rPr>
+                            <m:t>)</m:t>
+                          </m:r>
+                        </m:sub>
+                      </m:sSub>
+                    </m:oMath>
+                  </m:oMathPara>
+                </a14:m>
+                <a:endParaRPr lang="en-US" sz="1200" b="0" dirty="0">
+                  <a:solidFill>
+                    <a:schemeClr val="accent3"/>
+                  </a:solidFill>
+                </a:endParaRPr>
+              </a:p>
+              <a:p>
+                <a:endParaRPr lang="en-US" sz="1200" dirty="0"/>
+              </a:p>
+            </p:txBody>
+          </p:sp>
+        </mc:Choice>
+        <mc:Fallback xmlns="">
+          <p:sp>
+            <p:nvSpPr>
+              <p:cNvPr id="12" name="TextBox 11">
+                <a:extLst>
+                  <a:ext uri="{FF2B5EF4-FFF2-40B4-BE49-F238E27FC236}">
+                    <a16:creationId xmlns:a16="http://schemas.microsoft.com/office/drawing/2014/main" id="{5B04E290-C7A8-249A-84EF-A94577E33ECB}"/>
+                  </a:ext>
+                </a:extLst>
+              </p:cNvPr>
+              <p:cNvSpPr txBox="1">
+                <a:spLocks noRot="1" noChangeAspect="1" noMove="1" noResize="1" noEditPoints="1" noAdjustHandles="1" noChangeArrowheads="1" noChangeShapeType="1" noTextEdit="1"/>
+              </p:cNvSpPr>
+              <p:nvPr/>
+            </p:nvSpPr>
+            <p:spPr>
+              <a:xfrm>
+                <a:off x="10566073" y="602266"/>
+                <a:ext cx="601468" cy="479490"/>
+              </a:xfrm>
+              <a:prstGeom prst="rect">
+                <a:avLst/>
+              </a:prstGeom>
+              <a:blipFill>
+                <a:blip r:embed="rId5"/>
+                <a:stretch>
+                  <a:fillRect r="-4040"/>
+                </a:stretch>
+              </a:blipFill>
+            </p:spPr>
+            <p:txBody>
+              <a:bodyPr/>
+              <a:lstStyle/>
+              <a:p>
+                <a:r>
+                  <a:rPr lang="en-US">
+                    <a:noFill/>
+                  </a:rPr>
+                  <a:t> </a:t>
+                </a:r>
+              </a:p>
+            </p:txBody>
+          </p:sp>
+        </mc:Fallback>
+      </mc:AlternateContent>
+      <p:cxnSp>
+        <p:nvCxnSpPr>
+          <p:cNvPr id="14" name="Straight Connector 13">
+            <a:extLst>
+              <a:ext uri="{FF2B5EF4-FFF2-40B4-BE49-F238E27FC236}">
+                <a16:creationId xmlns:a16="http://schemas.microsoft.com/office/drawing/2014/main" id="{84A226A4-3DFB-FDA8-464F-70254B5B0100}"/>
+              </a:ext>
+            </a:extLst>
+          </p:cNvPr>
+          <p:cNvCxnSpPr/>
+          <p:nvPr/>
+        </p:nvCxnSpPr>
+        <p:spPr>
+          <a:xfrm flipH="1">
+            <a:off x="10763079" y="619042"/>
+            <a:ext cx="173383" cy="106604"/>
+          </a:xfrm>
+          <a:prstGeom prst="line">
+            <a:avLst/>
+          </a:prstGeom>
+          <a:ln>
+            <a:solidFill>
+              <a:schemeClr val="accent3"/>
+            </a:solidFill>
+          </a:ln>
+        </p:spPr>
+        <p:style>
+          <a:lnRef idx="2">
+            <a:schemeClr val="dk1"/>
+          </a:lnRef>
+          <a:fillRef idx="0">
+            <a:schemeClr val="dk1"/>
+          </a:fillRef>
+          <a:effectRef idx="1">
+            <a:schemeClr val="dk1"/>
+          </a:effectRef>
+          <a:fontRef idx="minor">
+            <a:schemeClr val="tx1"/>
+          </a:fontRef>
+        </p:style>
+      </p:cxnSp>
+    </p:spTree>
+    <p:extLst>
+      <p:ext uri="{BB962C8B-B14F-4D97-AF65-F5344CB8AC3E}">
+        <p14:creationId xmlns:p14="http://schemas.microsoft.com/office/powerpoint/2010/main" val="3556903273"/>
+      </p:ext>
+    </p:extLst>
+  </p:cSld>
+  <p:clrMapOvr>
+    <a:masterClrMapping/>
+  </p:clrMapOvr>
+</p:sld>
+</file>
+
+<file path=ppt/slides/slide11.xml><?xml version="1.0" encoding="utf-8"?>
+<p:sld xmlns:a="http://schemas.openxmlformats.org/drawingml/2006/main" xmlns:r="http://schemas.openxmlformats.org/officeDocument/2006/relationships" xmlns:p="http://schemas.openxmlformats.org/presentationml/2006/main">
+  <p:cSld>
+    <p:spTree>
+      <p:nvGrpSpPr>
+        <p:cNvPr id="1" name=""/>
+        <p:cNvGrpSpPr/>
+        <p:nvPr/>
+      </p:nvGrpSpPr>
+      <p:grpSpPr>
+        <a:xfrm>
+          <a:off x="0" y="0"/>
+          <a:ext cx="0" cy="0"/>
+          <a:chOff x="0" y="0"/>
+          <a:chExt cx="0" cy="0"/>
+        </a:xfrm>
+      </p:grpSpPr>
+      <p:sp>
+        <p:nvSpPr>
+          <p:cNvPr id="2" name="Title 1">
+            <a:extLst>
+              <a:ext uri="{FF2B5EF4-FFF2-40B4-BE49-F238E27FC236}">
                 <a16:creationId xmlns:a16="http://schemas.microsoft.com/office/drawing/2014/main" id="{EE665D83-AF66-468C-2BD2-B60F40C3D5C9}"/>
               </a:ext>
             </a:extLst>
@@ -4434,7 +6025,7 @@
 </p:sld>
 </file>
 
-<file path=ppt/slides/slide11.xml><?xml version="1.0" encoding="utf-8"?>
+<file path=ppt/slides/slide12.xml><?xml version="1.0" encoding="utf-8"?>
 <p:sld xmlns:a="http://schemas.openxmlformats.org/drawingml/2006/main" xmlns:r="http://schemas.openxmlformats.org/officeDocument/2006/relationships" xmlns:p="http://schemas.openxmlformats.org/presentationml/2006/main">
   <p:cSld>
     <p:spTree>
@@ -4527,7 +6118,7 @@
 </p:sld>
 </file>
 
-<file path=ppt/slides/slide12.xml><?xml version="1.0" encoding="utf-8"?>
+<file path=ppt/slides/slide13.xml><?xml version="1.0" encoding="utf-8"?>
 <p:sld xmlns:a="http://schemas.openxmlformats.org/drawingml/2006/main" xmlns:r="http://schemas.openxmlformats.org/officeDocument/2006/relationships" xmlns:p="http://schemas.openxmlformats.org/presentationml/2006/main">
   <p:cSld>
     <p:spTree>
@@ -5252,7 +6843,7 @@
 </p:sld>
 </file>
 
-<file path=ppt/slides/slide13.xml><?xml version="1.0" encoding="utf-8"?>
+<file path=ppt/slides/slide14.xml><?xml version="1.0" encoding="utf-8"?>
 <p:sld xmlns:a="http://schemas.openxmlformats.org/drawingml/2006/main" xmlns:r="http://schemas.openxmlformats.org/officeDocument/2006/relationships" xmlns:p="http://schemas.openxmlformats.org/presentationml/2006/main">
   <p:cSld>
     <p:spTree>
@@ -5904,7 +7495,7 @@
 </p:sld>
 </file>
 
-<file path=ppt/slides/slide14.xml><?xml version="1.0" encoding="utf-8"?>
+<file path=ppt/slides/slide15.xml><?xml version="1.0" encoding="utf-8"?>
 <p:sld xmlns:a="http://schemas.openxmlformats.org/drawingml/2006/main" xmlns:r="http://schemas.openxmlformats.org/officeDocument/2006/relationships" xmlns:p="http://schemas.openxmlformats.org/presentationml/2006/main">
   <p:cSld>
     <p:spTree>
@@ -6560,7 +8151,7 @@
 </p:sld>
 </file>
 
-<file path=ppt/slides/slide15.xml><?xml version="1.0" encoding="utf-8"?>
+<file path=ppt/slides/slide16.xml><?xml version="1.0" encoding="utf-8"?>
 <p:sld xmlns:a="http://schemas.openxmlformats.org/drawingml/2006/main" xmlns:r="http://schemas.openxmlformats.org/officeDocument/2006/relationships" xmlns:p="http://schemas.openxmlformats.org/presentationml/2006/main">
   <p:cSld>
     <p:spTree>
@@ -7115,7 +8706,7 @@
 </p:sld>
 </file>
 
-<file path=ppt/slides/slide16.xml><?xml version="1.0" encoding="utf-8"?>
+<file path=ppt/slides/slide17.xml><?xml version="1.0" encoding="utf-8"?>
 <p:sld xmlns:a="http://schemas.openxmlformats.org/drawingml/2006/main" xmlns:r="http://schemas.openxmlformats.org/officeDocument/2006/relationships" xmlns:p="http://schemas.openxmlformats.org/presentationml/2006/main">
   <p:cSld>
     <p:spTree>
@@ -7214,7 +8805,7 @@
 </p:sld>
 </file>
 
-<file path=ppt/slides/slide17.xml><?xml version="1.0" encoding="utf-8"?>
+<file path=ppt/slides/slide18.xml><?xml version="1.0" encoding="utf-8"?>
 <p:sld xmlns:a="http://schemas.openxmlformats.org/drawingml/2006/main" xmlns:r="http://schemas.openxmlformats.org/officeDocument/2006/relationships" xmlns:p="http://schemas.openxmlformats.org/presentationml/2006/main">
   <p:cSld>
     <p:spTree>
@@ -8433,7 +10024,7 @@
 </p:sld>
 </file>
 
-<file path=ppt/slides/slide18.xml><?xml version="1.0" encoding="utf-8"?>
+<file path=ppt/slides/slide19.xml><?xml version="1.0" encoding="utf-8"?>
 <p:sld xmlns:a="http://schemas.openxmlformats.org/drawingml/2006/main" xmlns:r="http://schemas.openxmlformats.org/officeDocument/2006/relationships" xmlns:p="http://schemas.openxmlformats.org/presentationml/2006/main">
   <p:cSld>
     <p:spTree>
@@ -8519,7 +10110,189 @@
 </p:sld>
 </file>
 
-<file path=ppt/slides/slide19.xml><?xml version="1.0" encoding="utf-8"?>
+<file path=ppt/slides/slide2.xml><?xml version="1.0" encoding="utf-8"?>
+<p:sld xmlns:a="http://schemas.openxmlformats.org/drawingml/2006/main" xmlns:r="http://schemas.openxmlformats.org/officeDocument/2006/relationships" xmlns:p="http://schemas.openxmlformats.org/presentationml/2006/main">
+  <p:cSld>
+    <p:spTree>
+      <p:nvGrpSpPr>
+        <p:cNvPr id="1" name=""/>
+        <p:cNvGrpSpPr/>
+        <p:nvPr/>
+      </p:nvGrpSpPr>
+      <p:grpSpPr>
+        <a:xfrm>
+          <a:off x="0" y="0"/>
+          <a:ext cx="0" cy="0"/>
+          <a:chOff x="0" y="0"/>
+          <a:chExt cx="0" cy="0"/>
+        </a:xfrm>
+      </p:grpSpPr>
+      <p:sp>
+        <p:nvSpPr>
+          <p:cNvPr id="2" name="Title 1">
+            <a:extLst>
+              <a:ext uri="{FF2B5EF4-FFF2-40B4-BE49-F238E27FC236}">
+                <a16:creationId xmlns:a16="http://schemas.microsoft.com/office/drawing/2014/main" id="{9E7A3493-2ED6-DF09-F569-7F3DCA81AB18}"/>
+              </a:ext>
+            </a:extLst>
+          </p:cNvPr>
+          <p:cNvSpPr>
+            <a:spLocks noGrp="1"/>
+          </p:cNvSpPr>
+          <p:nvPr>
+            <p:ph type="title"/>
+          </p:nvPr>
+        </p:nvSpPr>
+        <p:spPr/>
+        <p:txBody>
+          <a:bodyPr/>
+          <a:lstStyle/>
+          <a:p>
+            <a:r>
+              <a:rPr lang="en-US" dirty="0"/>
+              <a:t>Topics of this Course</a:t>
+            </a:r>
+          </a:p>
+        </p:txBody>
+      </p:sp>
+      <p:sp>
+        <p:nvSpPr>
+          <p:cNvPr id="3" name="Content Placeholder 2">
+            <a:extLst>
+              <a:ext uri="{FF2B5EF4-FFF2-40B4-BE49-F238E27FC236}">
+                <a16:creationId xmlns:a16="http://schemas.microsoft.com/office/drawing/2014/main" id="{8F95E019-92A5-79AC-D777-59B4926F61AA}"/>
+              </a:ext>
+            </a:extLst>
+          </p:cNvPr>
+          <p:cNvSpPr>
+            <a:spLocks noGrp="1"/>
+          </p:cNvSpPr>
+          <p:nvPr>
+            <p:ph idx="1"/>
+          </p:nvPr>
+        </p:nvSpPr>
+        <p:spPr/>
+        <p:txBody>
+          <a:bodyPr>
+            <a:normAutofit fontScale="85000" lnSpcReduction="20000"/>
+          </a:bodyPr>
+          <a:lstStyle/>
+          <a:p>
+            <a:r>
+              <a:rPr lang="en-US" dirty="0"/>
+              <a:t>Introduction to reinforcement learning</a:t>
+            </a:r>
+          </a:p>
+          <a:p>
+            <a:r>
+              <a:rPr lang="en-US" dirty="0"/>
+              <a:t>Markov decision processes</a:t>
+            </a:r>
+          </a:p>
+          <a:p>
+            <a:r>
+              <a:rPr lang="en-US" b="1" dirty="0"/>
+              <a:t>Part I: Tabular Methods</a:t>
+            </a:r>
+          </a:p>
+          <a:p>
+            <a:pPr lvl="1"/>
+            <a:r>
+              <a:rPr lang="en-US" dirty="0"/>
+              <a:t>Dynamic programming</a:t>
+            </a:r>
+          </a:p>
+          <a:p>
+            <a:pPr lvl="1"/>
+            <a:r>
+              <a:rPr lang="en-US" dirty="0"/>
+              <a:t>Monte Carlo methods</a:t>
+            </a:r>
+          </a:p>
+          <a:p>
+            <a:pPr lvl="1"/>
+            <a:r>
+              <a:rPr lang="en-US" b="1" dirty="0"/>
+              <a:t>Temporal-difference learning</a:t>
+            </a:r>
+          </a:p>
+          <a:p>
+            <a:pPr lvl="1"/>
+            <a:r>
+              <a:rPr lang="en-US" dirty="0"/>
+              <a:t>Multi-step bootstrapping</a:t>
+            </a:r>
+          </a:p>
+          <a:p>
+            <a:pPr lvl="1"/>
+            <a:r>
+              <a:rPr lang="en-US" dirty="0"/>
+              <a:t>Planning and learning with tabular methods</a:t>
+            </a:r>
+          </a:p>
+          <a:p>
+            <a:r>
+              <a:rPr lang="en-US" dirty="0"/>
+              <a:t>Part II: Approximate Solution Methods</a:t>
+            </a:r>
+          </a:p>
+          <a:p>
+            <a:pPr lvl="1"/>
+            <a:r>
+              <a:rPr lang="en-US" dirty="0"/>
+              <a:t>Prediction and Control using Approximation</a:t>
+            </a:r>
+          </a:p>
+          <a:p>
+            <a:pPr lvl="1"/>
+            <a:r>
+              <a:rPr lang="en-US" dirty="0"/>
+              <a:t>Eligibility Traces</a:t>
+            </a:r>
+          </a:p>
+          <a:p>
+            <a:pPr lvl="1"/>
+            <a:r>
+              <a:rPr lang="en-US" dirty="0"/>
+              <a:t>Policy Gradient Methods</a:t>
+            </a:r>
+          </a:p>
+          <a:p>
+            <a:r>
+              <a:rPr lang="en-US" dirty="0"/>
+              <a:t>Part III: Modern RL Methods</a:t>
+            </a:r>
+          </a:p>
+          <a:p>
+            <a:pPr lvl="1"/>
+            <a:r>
+              <a:rPr lang="en-US" dirty="0"/>
+              <a:t>Deep Reinforcement Learning</a:t>
+            </a:r>
+          </a:p>
+          <a:p>
+            <a:pPr lvl="1"/>
+            <a:r>
+              <a:rPr lang="en-US" dirty="0"/>
+              <a:t>Current Applications</a:t>
+            </a:r>
+          </a:p>
+        </p:txBody>
+      </p:sp>
+    </p:spTree>
+    <p:extLst>
+      <p:ext uri="{BB962C8B-B14F-4D97-AF65-F5344CB8AC3E}">
+        <p14:creationId xmlns:p14="http://schemas.microsoft.com/office/powerpoint/2010/main" val="3653367536"/>
+      </p:ext>
+    </p:extLst>
+  </p:cSld>
+  <p:clrMapOvr>
+    <a:masterClrMapping/>
+  </p:clrMapOvr>
+</p:sld>
+</file>
+
+<file path=ppt/slides/slide20.xml><?xml version="1.0" encoding="utf-8"?>
 <p:sld xmlns:a="http://schemas.openxmlformats.org/drawingml/2006/main" xmlns:r="http://schemas.openxmlformats.org/officeDocument/2006/relationships" xmlns:p="http://schemas.openxmlformats.org/presentationml/2006/main">
   <p:cSld>
     <p:spTree>
@@ -10628,7 +12401,1336 @@
 </p:sld>
 </file>
 
-<file path=ppt/slides/slide2.xml><?xml version="1.0" encoding="utf-8"?>
+<file path=ppt/slides/slide21.xml><?xml version="1.0" encoding="utf-8"?>
+<p:sld xmlns:a="http://schemas.openxmlformats.org/drawingml/2006/main" xmlns:r="http://schemas.openxmlformats.org/officeDocument/2006/relationships" xmlns:p="http://schemas.openxmlformats.org/presentationml/2006/main">
+  <p:cSld>
+    <p:spTree>
+      <p:nvGrpSpPr>
+        <p:cNvPr id="1" name=""/>
+        <p:cNvGrpSpPr/>
+        <p:nvPr/>
+      </p:nvGrpSpPr>
+      <p:grpSpPr>
+        <a:xfrm>
+          <a:off x="0" y="0"/>
+          <a:ext cx="0" cy="0"/>
+          <a:chOff x="0" y="0"/>
+          <a:chExt cx="0" cy="0"/>
+        </a:xfrm>
+      </p:grpSpPr>
+      <p:sp>
+        <p:nvSpPr>
+          <p:cNvPr id="2" name="Title 1">
+            <a:extLst>
+              <a:ext uri="{FF2B5EF4-FFF2-40B4-BE49-F238E27FC236}">
+                <a16:creationId xmlns:a16="http://schemas.microsoft.com/office/drawing/2014/main" id="{B838276F-7795-B966-030F-FCC3849991EC}"/>
+              </a:ext>
+            </a:extLst>
+          </p:cNvPr>
+          <p:cNvSpPr>
+            <a:spLocks noGrp="1"/>
+          </p:cNvSpPr>
+          <p:nvPr>
+            <p:ph type="title"/>
+          </p:nvPr>
+        </p:nvSpPr>
+        <p:spPr/>
+        <p:txBody>
+          <a:bodyPr/>
+          <a:lstStyle/>
+          <a:p>
+            <a:r>
+              <a:rPr lang="en-US" dirty="0"/>
+              <a:t>Sarsa vs. Q-Learning</a:t>
+            </a:r>
+          </a:p>
+        </p:txBody>
+      </p:sp>
+      <p:sp>
+        <p:nvSpPr>
+          <p:cNvPr id="3" name="Content Placeholder 2">
+            <a:extLst>
+              <a:ext uri="{FF2B5EF4-FFF2-40B4-BE49-F238E27FC236}">
+                <a16:creationId xmlns:a16="http://schemas.microsoft.com/office/drawing/2014/main" id="{E6C98B4E-B7CF-E345-6580-CEE34C1DC678}"/>
+              </a:ext>
+            </a:extLst>
+          </p:cNvPr>
+          <p:cNvSpPr>
+            <a:spLocks noGrp="1"/>
+          </p:cNvSpPr>
+          <p:nvPr>
+            <p:ph idx="1"/>
+          </p:nvPr>
+        </p:nvSpPr>
+        <p:spPr>
+          <a:xfrm>
+            <a:off x="838200" y="1397330"/>
+            <a:ext cx="4403895" cy="4779633"/>
+          </a:xfrm>
+        </p:spPr>
+        <p:txBody>
+          <a:bodyPr>
+            <a:normAutofit/>
+          </a:bodyPr>
+          <a:lstStyle/>
+          <a:p>
+            <a:r>
+              <a:rPr lang="en-US" sz="1800" b="1" dirty="0"/>
+              <a:t>Cliff Walking</a:t>
+            </a:r>
+            <a:r>
+              <a:rPr lang="en-US" sz="1800" dirty="0"/>
+              <a:t>: Consider the </a:t>
+            </a:r>
+            <a:r>
+              <a:rPr lang="en-US" sz="1800" dirty="0" err="1"/>
+              <a:t>gridworld</a:t>
+            </a:r>
+            <a:r>
+              <a:rPr lang="en-US" sz="1800" dirty="0"/>
+              <a:t> shown to the right. </a:t>
+            </a:r>
+          </a:p>
+          <a:p>
+            <a:r>
+              <a:rPr lang="en-US" sz="1800" dirty="0"/>
+              <a:t>This is a standard undiscounted, episodic task, with start and goal states.</a:t>
+            </a:r>
+          </a:p>
+          <a:p>
+            <a:r>
+              <a:rPr lang="en-US" sz="1800" dirty="0"/>
+              <a:t>Actions causing movement up, down, right, and left. </a:t>
+            </a:r>
+          </a:p>
+          <a:p>
+            <a:r>
+              <a:rPr lang="en-US" sz="1800" dirty="0"/>
+              <a:t>Reward is −1 on all transitions except those into the region marked “The Cliff.” Stepping into this region incurs a reward of −100 and sends the sends the agent instantly back to the start.</a:t>
+            </a:r>
+          </a:p>
+        </p:txBody>
+      </p:sp>
+      <p:pic>
+        <p:nvPicPr>
+          <p:cNvPr id="5" name="Picture 4">
+            <a:extLst>
+              <a:ext uri="{FF2B5EF4-FFF2-40B4-BE49-F238E27FC236}">
+                <a16:creationId xmlns:a16="http://schemas.microsoft.com/office/drawing/2014/main" id="{BF19A7B5-A9CC-EE24-F78E-F3E2FA24D35A}"/>
+              </a:ext>
+            </a:extLst>
+          </p:cNvPr>
+          <p:cNvPicPr>
+            <a:picLocks noChangeAspect="1"/>
+          </p:cNvPicPr>
+          <p:nvPr/>
+        </p:nvPicPr>
+        <p:blipFill>
+          <a:blip r:embed="rId2"/>
+          <a:stretch>
+            <a:fillRect/>
+          </a:stretch>
+        </p:blipFill>
+        <p:spPr>
+          <a:xfrm>
+            <a:off x="5798274" y="240397"/>
+            <a:ext cx="5979790" cy="3006931"/>
+          </a:xfrm>
+          <a:prstGeom prst="rect">
+            <a:avLst/>
+          </a:prstGeom>
+        </p:spPr>
+      </p:pic>
+      <p:pic>
+        <p:nvPicPr>
+          <p:cNvPr id="7" name="Picture 6">
+            <a:extLst>
+              <a:ext uri="{FF2B5EF4-FFF2-40B4-BE49-F238E27FC236}">
+                <a16:creationId xmlns:a16="http://schemas.microsoft.com/office/drawing/2014/main" id="{703F5773-6D0D-1D71-F1CD-C7746EF7FC07}"/>
+              </a:ext>
+            </a:extLst>
+          </p:cNvPr>
+          <p:cNvPicPr>
+            <a:picLocks noChangeAspect="1"/>
+          </p:cNvPicPr>
+          <p:nvPr/>
+        </p:nvPicPr>
+        <p:blipFill>
+          <a:blip r:embed="rId3"/>
+          <a:stretch>
+            <a:fillRect/>
+          </a:stretch>
+        </p:blipFill>
+        <p:spPr>
+          <a:xfrm>
+            <a:off x="6697576" y="3812721"/>
+            <a:ext cx="4399920" cy="2904072"/>
+          </a:xfrm>
+          <a:prstGeom prst="rect">
+            <a:avLst/>
+          </a:prstGeom>
+        </p:spPr>
+      </p:pic>
+      <mc:AlternateContent xmlns:mc="http://schemas.openxmlformats.org/markup-compatibility/2006" xmlns:a14="http://schemas.microsoft.com/office/drawing/2010/main">
+        <mc:Choice Requires="a14">
+          <p:sp>
+            <p:nvSpPr>
+              <p:cNvPr id="9" name="TextBox 8">
+                <a:extLst>
+                  <a:ext uri="{FF2B5EF4-FFF2-40B4-BE49-F238E27FC236}">
+                    <a16:creationId xmlns:a16="http://schemas.microsoft.com/office/drawing/2014/main" id="{586B79D4-4AA8-3E1C-81C7-278DEEA363AF}"/>
+                  </a:ext>
+                </a:extLst>
+              </p:cNvPr>
+              <p:cNvSpPr txBox="1"/>
+              <p:nvPr/>
+            </p:nvSpPr>
+            <p:spPr>
+              <a:xfrm>
+                <a:off x="6499781" y="3494758"/>
+                <a:ext cx="5362044" cy="584775"/>
+              </a:xfrm>
+              <a:prstGeom prst="rect">
+                <a:avLst/>
+              </a:prstGeom>
+              <a:noFill/>
+            </p:spPr>
+            <p:txBody>
+              <a:bodyPr wrap="square">
+                <a:spAutoFit/>
+              </a:bodyPr>
+              <a:lstStyle/>
+              <a:p>
+                <a:r>
+                  <a:rPr lang="en-US" sz="1600" dirty="0"/>
+                  <a:t>Performance of the Sarsa and Q-learning methods with </a:t>
+                </a:r>
+                <a14:m>
+                  <m:oMath xmlns:m="http://schemas.openxmlformats.org/officeDocument/2006/math">
+                    <m:r>
+                      <a:rPr lang="en-US" sz="1600" b="0" i="1" smtClean="0">
+                        <a:latin typeface="Cambria Math" panose="02040503050406030204" pitchFamily="18" charset="0"/>
+                      </a:rPr>
+                      <m:t>𝜖</m:t>
+                    </m:r>
+                  </m:oMath>
+                </a14:m>
+                <a:r>
+                  <a:rPr lang="en-US" sz="1600" dirty="0"/>
+                  <a:t>-greedy action selection, </a:t>
+                </a:r>
+                <a14:m>
+                  <m:oMath xmlns:m="http://schemas.openxmlformats.org/officeDocument/2006/math">
+                    <m:r>
+                      <a:rPr lang="en-US" sz="1600" i="1">
+                        <a:latin typeface="Cambria Math" panose="02040503050406030204" pitchFamily="18" charset="0"/>
+                      </a:rPr>
+                      <m:t>𝜖</m:t>
+                    </m:r>
+                    <m:r>
+                      <a:rPr lang="en-US" sz="1600" b="0" i="1" smtClean="0">
+                        <a:latin typeface="Cambria Math" panose="02040503050406030204" pitchFamily="18" charset="0"/>
+                      </a:rPr>
+                      <m:t>=0.1</m:t>
+                    </m:r>
+                  </m:oMath>
+                </a14:m>
+                <a:r>
+                  <a:rPr lang="en-US" sz="1600" dirty="0"/>
+                  <a:t>.</a:t>
+                </a:r>
+              </a:p>
+            </p:txBody>
+          </p:sp>
+        </mc:Choice>
+        <mc:Fallback xmlns="">
+          <p:sp>
+            <p:nvSpPr>
+              <p:cNvPr id="9" name="TextBox 8">
+                <a:extLst>
+                  <a:ext uri="{FF2B5EF4-FFF2-40B4-BE49-F238E27FC236}">
+                    <a16:creationId xmlns:a16="http://schemas.microsoft.com/office/drawing/2014/main" id="{586B79D4-4AA8-3E1C-81C7-278DEEA363AF}"/>
+                  </a:ext>
+                </a:extLst>
+              </p:cNvPr>
+              <p:cNvSpPr txBox="1">
+                <a:spLocks noRot="1" noChangeAspect="1" noMove="1" noResize="1" noEditPoints="1" noAdjustHandles="1" noChangeArrowheads="1" noChangeShapeType="1" noTextEdit="1"/>
+              </p:cNvSpPr>
+              <p:nvPr/>
+            </p:nvSpPr>
+            <p:spPr>
+              <a:xfrm>
+                <a:off x="6499781" y="3494758"/>
+                <a:ext cx="5362044" cy="584775"/>
+              </a:xfrm>
+              <a:prstGeom prst="rect">
+                <a:avLst/>
+              </a:prstGeom>
+              <a:blipFill>
+                <a:blip r:embed="rId4"/>
+                <a:stretch>
+                  <a:fillRect l="-568" t="-3125" b="-12500"/>
+                </a:stretch>
+              </a:blipFill>
+            </p:spPr>
+            <p:txBody>
+              <a:bodyPr/>
+              <a:lstStyle/>
+              <a:p>
+                <a:r>
+                  <a:rPr lang="en-US">
+                    <a:noFill/>
+                  </a:rPr>
+                  <a:t> </a:t>
+                </a:r>
+              </a:p>
+            </p:txBody>
+          </p:sp>
+        </mc:Fallback>
+      </mc:AlternateContent>
+      <p:sp>
+        <p:nvSpPr>
+          <p:cNvPr id="10" name="Speech Bubble: Rectangle with Corners Rounded 9">
+            <a:extLst>
+              <a:ext uri="{FF2B5EF4-FFF2-40B4-BE49-F238E27FC236}">
+                <a16:creationId xmlns:a16="http://schemas.microsoft.com/office/drawing/2014/main" id="{C3FCB8B5-813B-D263-F7C1-1BC210D5ED90}"/>
+              </a:ext>
+            </a:extLst>
+          </p:cNvPr>
+          <p:cNvSpPr/>
+          <p:nvPr/>
+        </p:nvSpPr>
+        <p:spPr>
+          <a:xfrm>
+            <a:off x="10016519" y="5264757"/>
+            <a:ext cx="1542614" cy="696293"/>
+          </a:xfrm>
+          <a:prstGeom prst="wedgeRoundRectCallout">
+            <a:avLst>
+              <a:gd name="adj1" fmla="val -79398"/>
+              <a:gd name="adj2" fmla="val -61806"/>
+              <a:gd name="adj3" fmla="val 16667"/>
+            </a:avLst>
+          </a:prstGeom>
+        </p:spPr>
+        <p:style>
+          <a:lnRef idx="2">
+            <a:schemeClr val="accent2">
+              <a:shade val="15000"/>
+            </a:schemeClr>
+          </a:lnRef>
+          <a:fillRef idx="1">
+            <a:schemeClr val="accent2"/>
+          </a:fillRef>
+          <a:effectRef idx="0">
+            <a:schemeClr val="accent2"/>
+          </a:effectRef>
+          <a:fontRef idx="minor">
+            <a:schemeClr val="lt1"/>
+          </a:fontRef>
+        </p:style>
+        <p:txBody>
+          <a:bodyPr rtlCol="0" anchor="ctr"/>
+          <a:lstStyle/>
+          <a:p>
+            <a:pPr algn="ctr"/>
+            <a:r>
+              <a:rPr lang="en-US" sz="1100" dirty="0"/>
+              <a:t>Why does the optimal path perform worse?</a:t>
+            </a:r>
+          </a:p>
+        </p:txBody>
+      </p:sp>
+      <p:sp>
+        <p:nvSpPr>
+          <p:cNvPr id="4" name="Speech Bubble: Rectangle with Corners Rounded 3">
+            <a:extLst>
+              <a:ext uri="{FF2B5EF4-FFF2-40B4-BE49-F238E27FC236}">
+                <a16:creationId xmlns:a16="http://schemas.microsoft.com/office/drawing/2014/main" id="{ED148F4B-5A91-1BFA-41CC-F38800350D33}"/>
+              </a:ext>
+            </a:extLst>
+          </p:cNvPr>
+          <p:cNvSpPr/>
+          <p:nvPr/>
+        </p:nvSpPr>
+        <p:spPr>
+          <a:xfrm>
+            <a:off x="10016519" y="2443259"/>
+            <a:ext cx="1542614" cy="696293"/>
+          </a:xfrm>
+          <a:prstGeom prst="wedgeRoundRectCallout">
+            <a:avLst>
+              <a:gd name="adj1" fmla="val -36980"/>
+              <a:gd name="adj2" fmla="val -269033"/>
+              <a:gd name="adj3" fmla="val 16667"/>
+            </a:avLst>
+          </a:prstGeom>
+        </p:spPr>
+        <p:style>
+          <a:lnRef idx="2">
+            <a:schemeClr val="accent1">
+              <a:shade val="15000"/>
+            </a:schemeClr>
+          </a:lnRef>
+          <a:fillRef idx="1">
+            <a:schemeClr val="accent1"/>
+          </a:fillRef>
+          <a:effectRef idx="0">
+            <a:schemeClr val="accent1"/>
+          </a:effectRef>
+          <a:fontRef idx="minor">
+            <a:schemeClr val="lt1"/>
+          </a:fontRef>
+        </p:style>
+        <p:txBody>
+          <a:bodyPr rtlCol="0" anchor="ctr"/>
+          <a:lstStyle/>
+          <a:p>
+            <a:pPr algn="ctr"/>
+            <a:r>
+              <a:rPr lang="en-US" sz="1100" dirty="0"/>
+              <a:t>Why does Sarsa pick the longer path?</a:t>
+            </a:r>
+          </a:p>
+        </p:txBody>
+      </p:sp>
+    </p:spTree>
+    <p:extLst>
+      <p:ext uri="{BB962C8B-B14F-4D97-AF65-F5344CB8AC3E}">
+        <p14:creationId xmlns:p14="http://schemas.microsoft.com/office/powerpoint/2010/main" val="2000631573"/>
+      </p:ext>
+    </p:extLst>
+  </p:cSld>
+  <p:clrMapOvr>
+    <a:masterClrMapping/>
+  </p:clrMapOvr>
+</p:sld>
+</file>
+
+<file path=ppt/slides/slide22.xml><?xml version="1.0" encoding="utf-8"?>
+<p:sld xmlns:a="http://schemas.openxmlformats.org/drawingml/2006/main" xmlns:r="http://schemas.openxmlformats.org/officeDocument/2006/relationships" xmlns:p="http://schemas.openxmlformats.org/presentationml/2006/main">
+  <p:cSld>
+    <p:spTree>
+      <p:nvGrpSpPr>
+        <p:cNvPr id="1" name="">
+          <a:extLst>
+            <a:ext uri="{FF2B5EF4-FFF2-40B4-BE49-F238E27FC236}">
+              <a16:creationId xmlns:a16="http://schemas.microsoft.com/office/drawing/2014/main" id="{A33AA1F0-940C-EE3F-D15D-72C7A6538C10}"/>
+            </a:ext>
+          </a:extLst>
+        </p:cNvPr>
+        <p:cNvGrpSpPr/>
+        <p:nvPr/>
+      </p:nvGrpSpPr>
+      <p:grpSpPr>
+        <a:xfrm>
+          <a:off x="0" y="0"/>
+          <a:ext cx="0" cy="0"/>
+          <a:chOff x="0" y="0"/>
+          <a:chExt cx="0" cy="0"/>
+        </a:xfrm>
+      </p:grpSpPr>
+      <p:sp>
+        <p:nvSpPr>
+          <p:cNvPr id="2" name="Title 1">
+            <a:extLst>
+              <a:ext uri="{FF2B5EF4-FFF2-40B4-BE49-F238E27FC236}">
+                <a16:creationId xmlns:a16="http://schemas.microsoft.com/office/drawing/2014/main" id="{BA79EA57-3578-362D-B879-FA8EDF16DDB6}"/>
+              </a:ext>
+            </a:extLst>
+          </p:cNvPr>
+          <p:cNvSpPr>
+            <a:spLocks noGrp="1"/>
+          </p:cNvSpPr>
+          <p:nvPr>
+            <p:ph type="title"/>
+          </p:nvPr>
+        </p:nvSpPr>
+        <p:spPr/>
+        <p:txBody>
+          <a:bodyPr/>
+          <a:lstStyle/>
+          <a:p>
+            <a:r>
+              <a:rPr lang="en-US" dirty="0"/>
+              <a:t>Sarsa vs. Q-Learning</a:t>
+            </a:r>
+          </a:p>
+        </p:txBody>
+      </p:sp>
+      <p:sp>
+        <p:nvSpPr>
+          <p:cNvPr id="3" name="Content Placeholder 2">
+            <a:extLst>
+              <a:ext uri="{FF2B5EF4-FFF2-40B4-BE49-F238E27FC236}">
+                <a16:creationId xmlns:a16="http://schemas.microsoft.com/office/drawing/2014/main" id="{79AD4FE8-3C4E-DC95-0476-B5C6788850F3}"/>
+              </a:ext>
+            </a:extLst>
+          </p:cNvPr>
+          <p:cNvSpPr>
+            <a:spLocks noGrp="1"/>
+          </p:cNvSpPr>
+          <p:nvPr>
+            <p:ph idx="1"/>
+          </p:nvPr>
+        </p:nvSpPr>
+        <p:spPr>
+          <a:xfrm>
+            <a:off x="838200" y="1397330"/>
+            <a:ext cx="4403895" cy="4779633"/>
+          </a:xfrm>
+        </p:spPr>
+        <p:txBody>
+          <a:bodyPr>
+            <a:normAutofit/>
+          </a:bodyPr>
+          <a:lstStyle/>
+          <a:p>
+            <a:r>
+              <a:rPr lang="en-US" sz="1800" b="1" dirty="0"/>
+              <a:t>Cliff Walking</a:t>
+            </a:r>
+            <a:r>
+              <a:rPr lang="en-US" sz="1800" dirty="0"/>
+              <a:t>: Consider the </a:t>
+            </a:r>
+            <a:r>
+              <a:rPr lang="en-US" sz="1800" dirty="0" err="1"/>
+              <a:t>gridworld</a:t>
+            </a:r>
+            <a:r>
+              <a:rPr lang="en-US" sz="1800" dirty="0"/>
+              <a:t> shown to the right. </a:t>
+            </a:r>
+          </a:p>
+          <a:p>
+            <a:r>
+              <a:rPr lang="en-US" sz="1800" dirty="0"/>
+              <a:t>This is a standard undiscounted, episodic task, with start and goal states.</a:t>
+            </a:r>
+          </a:p>
+          <a:p>
+            <a:r>
+              <a:rPr lang="en-US" sz="1800" dirty="0"/>
+              <a:t>Actions causing movement up, down, right, and left. </a:t>
+            </a:r>
+          </a:p>
+          <a:p>
+            <a:r>
+              <a:rPr lang="en-US" sz="1800" dirty="0"/>
+              <a:t>Reward is −1 on all transitions except those into the region marked “The Cliff.” Stepping into this region incurs a reward of −100 and sends the sends the agent instantly back to the start.</a:t>
+            </a:r>
+          </a:p>
+        </p:txBody>
+      </p:sp>
+      <p:pic>
+        <p:nvPicPr>
+          <p:cNvPr id="5" name="Picture 4">
+            <a:extLst>
+              <a:ext uri="{FF2B5EF4-FFF2-40B4-BE49-F238E27FC236}">
+                <a16:creationId xmlns:a16="http://schemas.microsoft.com/office/drawing/2014/main" id="{CF5B5508-DD84-0561-E4B7-B0A2B44DB81F}"/>
+              </a:ext>
+            </a:extLst>
+          </p:cNvPr>
+          <p:cNvPicPr>
+            <a:picLocks noChangeAspect="1"/>
+          </p:cNvPicPr>
+          <p:nvPr/>
+        </p:nvPicPr>
+        <p:blipFill>
+          <a:blip r:embed="rId2"/>
+          <a:stretch>
+            <a:fillRect/>
+          </a:stretch>
+        </p:blipFill>
+        <p:spPr>
+          <a:xfrm>
+            <a:off x="5798274" y="240397"/>
+            <a:ext cx="5979790" cy="3006931"/>
+          </a:xfrm>
+          <a:prstGeom prst="rect">
+            <a:avLst/>
+          </a:prstGeom>
+        </p:spPr>
+      </p:pic>
+      <p:pic>
+        <p:nvPicPr>
+          <p:cNvPr id="7" name="Picture 6">
+            <a:extLst>
+              <a:ext uri="{FF2B5EF4-FFF2-40B4-BE49-F238E27FC236}">
+                <a16:creationId xmlns:a16="http://schemas.microsoft.com/office/drawing/2014/main" id="{4C080FFF-E983-662A-907E-6B5CCFAB97B1}"/>
+              </a:ext>
+            </a:extLst>
+          </p:cNvPr>
+          <p:cNvPicPr>
+            <a:picLocks noChangeAspect="1"/>
+          </p:cNvPicPr>
+          <p:nvPr/>
+        </p:nvPicPr>
+        <p:blipFill>
+          <a:blip r:embed="rId3"/>
+          <a:stretch>
+            <a:fillRect/>
+          </a:stretch>
+        </p:blipFill>
+        <p:spPr>
+          <a:xfrm>
+            <a:off x="6697576" y="3812721"/>
+            <a:ext cx="4399920" cy="2904072"/>
+          </a:xfrm>
+          <a:prstGeom prst="rect">
+            <a:avLst/>
+          </a:prstGeom>
+        </p:spPr>
+      </p:pic>
+      <mc:AlternateContent xmlns:mc="http://schemas.openxmlformats.org/markup-compatibility/2006" xmlns:a14="http://schemas.microsoft.com/office/drawing/2010/main">
+        <mc:Choice Requires="a14">
+          <p:sp>
+            <p:nvSpPr>
+              <p:cNvPr id="9" name="TextBox 8">
+                <a:extLst>
+                  <a:ext uri="{FF2B5EF4-FFF2-40B4-BE49-F238E27FC236}">
+                    <a16:creationId xmlns:a16="http://schemas.microsoft.com/office/drawing/2014/main" id="{41419248-E32C-E1A5-DA88-F07267441E80}"/>
+                  </a:ext>
+                </a:extLst>
+              </p:cNvPr>
+              <p:cNvSpPr txBox="1"/>
+              <p:nvPr/>
+            </p:nvSpPr>
+            <p:spPr>
+              <a:xfrm>
+                <a:off x="6499781" y="3494758"/>
+                <a:ext cx="5362044" cy="584775"/>
+              </a:xfrm>
+              <a:prstGeom prst="rect">
+                <a:avLst/>
+              </a:prstGeom>
+              <a:noFill/>
+            </p:spPr>
+            <p:txBody>
+              <a:bodyPr wrap="square">
+                <a:spAutoFit/>
+              </a:bodyPr>
+              <a:lstStyle/>
+              <a:p>
+                <a:r>
+                  <a:rPr lang="en-US" sz="1600" dirty="0"/>
+                  <a:t>Performance of the Sarsa and Q-learning methods with </a:t>
+                </a:r>
+                <a14:m>
+                  <m:oMath xmlns:m="http://schemas.openxmlformats.org/officeDocument/2006/math">
+                    <m:r>
+                      <a:rPr lang="en-US" sz="1600" b="0" i="1" smtClean="0">
+                        <a:latin typeface="Cambria Math" panose="02040503050406030204" pitchFamily="18" charset="0"/>
+                      </a:rPr>
+                      <m:t>𝜖</m:t>
+                    </m:r>
+                  </m:oMath>
+                </a14:m>
+                <a:r>
+                  <a:rPr lang="en-US" sz="1600" dirty="0"/>
+                  <a:t>-greedy action selection, </a:t>
+                </a:r>
+                <a14:m>
+                  <m:oMath xmlns:m="http://schemas.openxmlformats.org/officeDocument/2006/math">
+                    <m:r>
+                      <a:rPr lang="en-US" sz="1600" i="1">
+                        <a:latin typeface="Cambria Math" panose="02040503050406030204" pitchFamily="18" charset="0"/>
+                      </a:rPr>
+                      <m:t>𝜖</m:t>
+                    </m:r>
+                    <m:r>
+                      <a:rPr lang="en-US" sz="1600" b="0" i="1" smtClean="0">
+                        <a:latin typeface="Cambria Math" panose="02040503050406030204" pitchFamily="18" charset="0"/>
+                      </a:rPr>
+                      <m:t>=0.1</m:t>
+                    </m:r>
+                  </m:oMath>
+                </a14:m>
+                <a:r>
+                  <a:rPr lang="en-US" sz="1600" dirty="0"/>
+                  <a:t>.</a:t>
+                </a:r>
+              </a:p>
+            </p:txBody>
+          </p:sp>
+        </mc:Choice>
+        <mc:Fallback xmlns="">
+          <p:sp>
+            <p:nvSpPr>
+              <p:cNvPr id="9" name="TextBox 8">
+                <a:extLst>
+                  <a:ext uri="{FF2B5EF4-FFF2-40B4-BE49-F238E27FC236}">
+                    <a16:creationId xmlns:a16="http://schemas.microsoft.com/office/drawing/2014/main" id="{586B79D4-4AA8-3E1C-81C7-278DEEA363AF}"/>
+                  </a:ext>
+                </a:extLst>
+              </p:cNvPr>
+              <p:cNvSpPr txBox="1">
+                <a:spLocks noRot="1" noChangeAspect="1" noMove="1" noResize="1" noEditPoints="1" noAdjustHandles="1" noChangeArrowheads="1" noChangeShapeType="1" noTextEdit="1"/>
+              </p:cNvSpPr>
+              <p:nvPr/>
+            </p:nvSpPr>
+            <p:spPr>
+              <a:xfrm>
+                <a:off x="6499781" y="3494758"/>
+                <a:ext cx="5362044" cy="584775"/>
+              </a:xfrm>
+              <a:prstGeom prst="rect">
+                <a:avLst/>
+              </a:prstGeom>
+              <a:blipFill>
+                <a:blip r:embed="rId4"/>
+                <a:stretch>
+                  <a:fillRect l="-568" t="-3125" b="-12500"/>
+                </a:stretch>
+              </a:blipFill>
+            </p:spPr>
+            <p:txBody>
+              <a:bodyPr/>
+              <a:lstStyle/>
+              <a:p>
+                <a:r>
+                  <a:rPr lang="en-US">
+                    <a:noFill/>
+                  </a:rPr>
+                  <a:t> </a:t>
+                </a:r>
+              </a:p>
+            </p:txBody>
+          </p:sp>
+        </mc:Fallback>
+      </mc:AlternateContent>
+      <p:sp>
+        <p:nvSpPr>
+          <p:cNvPr id="10" name="Speech Bubble: Rectangle with Corners Rounded 9">
+            <a:extLst>
+              <a:ext uri="{FF2B5EF4-FFF2-40B4-BE49-F238E27FC236}">
+                <a16:creationId xmlns:a16="http://schemas.microsoft.com/office/drawing/2014/main" id="{861BC875-C5BF-4D99-E066-2E9E901055E1}"/>
+              </a:ext>
+            </a:extLst>
+          </p:cNvPr>
+          <p:cNvSpPr/>
+          <p:nvPr/>
+        </p:nvSpPr>
+        <p:spPr>
+          <a:xfrm>
+            <a:off x="10174843" y="4685251"/>
+            <a:ext cx="1845306" cy="2031542"/>
+          </a:xfrm>
+          <a:prstGeom prst="wedgeRoundRectCallout">
+            <a:avLst>
+              <a:gd name="adj1" fmla="val -84969"/>
+              <a:gd name="adj2" fmla="val -31455"/>
+              <a:gd name="adj3" fmla="val 16667"/>
+            </a:avLst>
+          </a:prstGeom>
+        </p:spPr>
+        <p:style>
+          <a:lnRef idx="2">
+            <a:schemeClr val="accent2">
+              <a:shade val="15000"/>
+            </a:schemeClr>
+          </a:lnRef>
+          <a:fillRef idx="1">
+            <a:schemeClr val="accent2"/>
+          </a:fillRef>
+          <a:effectRef idx="0">
+            <a:schemeClr val="accent2"/>
+          </a:effectRef>
+          <a:fontRef idx="minor">
+            <a:schemeClr val="lt1"/>
+          </a:fontRef>
+        </p:style>
+        <p:txBody>
+          <a:bodyPr rtlCol="0" anchor="ctr"/>
+          <a:lstStyle/>
+          <a:p>
+            <a:pPr algn="ctr"/>
+            <a:r>
+              <a:rPr lang="en-US" sz="1100" dirty="0"/>
+              <a:t>Q-learning learns the optimal policy, but uses a soft behavior policy to explore. Walking along the cliff with a soft policy is dangerous.</a:t>
+            </a:r>
+          </a:p>
+          <a:p>
+            <a:pPr algn="ctr"/>
+            <a:r>
+              <a:rPr lang="en-US" sz="1100" dirty="0"/>
+              <a:t>Once we only follow the learned deterministic  policy, the sum of rewards will be optimal.</a:t>
+            </a:r>
+          </a:p>
+        </p:txBody>
+      </p:sp>
+      <p:sp>
+        <p:nvSpPr>
+          <p:cNvPr id="4" name="Speech Bubble: Rectangle with Corners Rounded 3">
+            <a:extLst>
+              <a:ext uri="{FF2B5EF4-FFF2-40B4-BE49-F238E27FC236}">
+                <a16:creationId xmlns:a16="http://schemas.microsoft.com/office/drawing/2014/main" id="{A7881373-FF43-8F96-C27F-EE64A3DDB838}"/>
+              </a:ext>
+            </a:extLst>
+          </p:cNvPr>
+          <p:cNvSpPr/>
+          <p:nvPr/>
+        </p:nvSpPr>
+        <p:spPr>
+          <a:xfrm>
+            <a:off x="9584422" y="2485204"/>
+            <a:ext cx="2528384" cy="696293"/>
+          </a:xfrm>
+          <a:prstGeom prst="wedgeRoundRectCallout">
+            <a:avLst>
+              <a:gd name="adj1" fmla="val -31027"/>
+              <a:gd name="adj2" fmla="val -270840"/>
+              <a:gd name="adj3" fmla="val 16667"/>
+            </a:avLst>
+          </a:prstGeom>
+        </p:spPr>
+        <p:style>
+          <a:lnRef idx="2">
+            <a:schemeClr val="accent1">
+              <a:shade val="15000"/>
+            </a:schemeClr>
+          </a:lnRef>
+          <a:fillRef idx="1">
+            <a:schemeClr val="accent1"/>
+          </a:fillRef>
+          <a:effectRef idx="0">
+            <a:schemeClr val="accent1"/>
+          </a:effectRef>
+          <a:fontRef idx="minor">
+            <a:schemeClr val="lt1"/>
+          </a:fontRef>
+        </p:style>
+        <p:txBody>
+          <a:bodyPr rtlCol="0" anchor="ctr"/>
+          <a:lstStyle/>
+          <a:p>
+            <a:pPr algn="ctr"/>
+            <a:r>
+              <a:rPr lang="en-US" sz="1100" dirty="0"/>
+              <a:t>Sarsa is on-policy and learns a soft policy. Walking along the cliff would be dangerous!</a:t>
+            </a:r>
+          </a:p>
+        </p:txBody>
+      </p:sp>
+    </p:spTree>
+    <p:extLst>
+      <p:ext uri="{BB962C8B-B14F-4D97-AF65-F5344CB8AC3E}">
+        <p14:creationId xmlns:p14="http://schemas.microsoft.com/office/powerpoint/2010/main" val="3138592298"/>
+      </p:ext>
+    </p:extLst>
+  </p:cSld>
+  <p:clrMapOvr>
+    <a:masterClrMapping/>
+  </p:clrMapOvr>
+</p:sld>
+</file>
+
+<file path=ppt/slides/slide23.xml><?xml version="1.0" encoding="utf-8"?>
+<p:sld xmlns:a="http://schemas.openxmlformats.org/drawingml/2006/main" xmlns:r="http://schemas.openxmlformats.org/officeDocument/2006/relationships" xmlns:p="http://schemas.openxmlformats.org/presentationml/2006/main">
+  <p:cSld>
+    <p:spTree>
+      <p:nvGrpSpPr>
+        <p:cNvPr id="1" name=""/>
+        <p:cNvGrpSpPr/>
+        <p:nvPr/>
+      </p:nvGrpSpPr>
+      <p:grpSpPr>
+        <a:xfrm>
+          <a:off x="0" y="0"/>
+          <a:ext cx="0" cy="0"/>
+          <a:chOff x="0" y="0"/>
+          <a:chExt cx="0" cy="0"/>
+        </a:xfrm>
+      </p:grpSpPr>
+      <p:pic>
+        <p:nvPicPr>
+          <p:cNvPr id="8" name="Picture 7">
+            <a:extLst>
+              <a:ext uri="{FF2B5EF4-FFF2-40B4-BE49-F238E27FC236}">
+                <a16:creationId xmlns:a16="http://schemas.microsoft.com/office/drawing/2014/main" id="{4E47B388-9EDE-BEEF-286A-0670BB57C281}"/>
+              </a:ext>
+            </a:extLst>
+          </p:cNvPr>
+          <p:cNvPicPr>
+            <a:picLocks noChangeAspect="1"/>
+          </p:cNvPicPr>
+          <p:nvPr/>
+        </p:nvPicPr>
+        <p:blipFill>
+          <a:blip r:embed="rId2"/>
+          <a:stretch>
+            <a:fillRect/>
+          </a:stretch>
+        </p:blipFill>
+        <p:spPr>
+          <a:xfrm>
+            <a:off x="3273879" y="593726"/>
+            <a:ext cx="8556776" cy="5995665"/>
+          </a:xfrm>
+          <a:prstGeom prst="rect">
+            <a:avLst/>
+          </a:prstGeom>
+        </p:spPr>
+      </p:pic>
+      <p:sp>
+        <p:nvSpPr>
+          <p:cNvPr id="2" name="Title 1">
+            <a:extLst>
+              <a:ext uri="{FF2B5EF4-FFF2-40B4-BE49-F238E27FC236}">
+                <a16:creationId xmlns:a16="http://schemas.microsoft.com/office/drawing/2014/main" id="{DE6EC57F-A3C1-ECE0-DBDD-E93D09AB1002}"/>
+              </a:ext>
+            </a:extLst>
+          </p:cNvPr>
+          <p:cNvSpPr>
+            <a:spLocks noGrp="1"/>
+          </p:cNvSpPr>
+          <p:nvPr>
+            <p:ph type="title"/>
+          </p:nvPr>
+        </p:nvSpPr>
+        <p:spPr>
+          <a:xfrm>
+            <a:off x="838200" y="365126"/>
+            <a:ext cx="4446864" cy="1551758"/>
+          </a:xfrm>
+        </p:spPr>
+        <p:txBody>
+          <a:bodyPr>
+            <a:normAutofit fontScale="90000"/>
+          </a:bodyPr>
+          <a:lstStyle/>
+          <a:p>
+            <a:br>
+              <a:rPr lang="en-US" dirty="0"/>
+            </a:br>
+            <a:r>
+              <a:rPr lang="en-US" dirty="0"/>
+              <a:t>Experimental Comparison</a:t>
+            </a:r>
+          </a:p>
+        </p:txBody>
+      </p:sp>
+    </p:spTree>
+    <p:extLst>
+      <p:ext uri="{BB962C8B-B14F-4D97-AF65-F5344CB8AC3E}">
+        <p14:creationId xmlns:p14="http://schemas.microsoft.com/office/powerpoint/2010/main" val="3892503222"/>
+      </p:ext>
+    </p:extLst>
+  </p:cSld>
+  <p:clrMapOvr>
+    <a:masterClrMapping/>
+  </p:clrMapOvr>
+</p:sld>
+</file>
+
+<file path=ppt/slides/slide24.xml><?xml version="1.0" encoding="utf-8"?>
+<p:sld xmlns:a="http://schemas.openxmlformats.org/drawingml/2006/main" xmlns:r="http://schemas.openxmlformats.org/officeDocument/2006/relationships" xmlns:p="http://schemas.openxmlformats.org/presentationml/2006/main">
+  <p:cSld>
+    <p:bg>
+      <p:bgPr>
+        <a:solidFill>
+          <a:schemeClr val="bg1"/>
+        </a:solidFill>
+        <a:effectLst/>
+      </p:bgPr>
+    </p:bg>
+    <p:spTree>
+      <p:nvGrpSpPr>
+        <p:cNvPr id="1" name=""/>
+        <p:cNvGrpSpPr/>
+        <p:nvPr/>
+      </p:nvGrpSpPr>
+      <p:grpSpPr>
+        <a:xfrm>
+          <a:off x="0" y="0"/>
+          <a:ext cx="0" cy="0"/>
+          <a:chOff x="0" y="0"/>
+          <a:chExt cx="0" cy="0"/>
+        </a:xfrm>
+      </p:grpSpPr>
+      <p:sp useBgFill="1">
+        <p:nvSpPr>
+          <p:cNvPr id="9" name="Rectangle 8">
+            <a:extLst>
+              <a:ext uri="{FF2B5EF4-FFF2-40B4-BE49-F238E27FC236}">
+                <a16:creationId xmlns:a16="http://schemas.microsoft.com/office/drawing/2014/main" id="{E81BF4F6-F2CF-4984-9D14-D6966D92F99F}"/>
+              </a:ext>
+              <a:ext uri="{C183D7F6-B498-43B3-948B-1728B52AA6E4}">
+                <adec:decorative xmlns:adec="http://schemas.microsoft.com/office/drawing/2017/decorative" val="1"/>
+              </a:ext>
+            </a:extLst>
+          </p:cNvPr>
+          <p:cNvSpPr>
+            <a:spLocks noGrp="1" noRot="1" noChangeAspect="1" noMove="1" noResize="1" noEditPoints="1" noAdjustHandles="1" noChangeArrowheads="1" noChangeShapeType="1" noTextEdit="1"/>
+          </p:cNvSpPr>
+          <p:nvPr>
+            <p:extLst>
+              <p:ext uri="{386F3935-93C4-4BCD-93E2-E3B085C9AB24}">
+                <p16:designElem xmlns:p16="http://schemas.microsoft.com/office/powerpoint/2015/main" val="1"/>
+              </p:ext>
+            </p:extLst>
+          </p:nvPr>
+        </p:nvSpPr>
+        <p:spPr>
+          <a:xfrm rot="16200000">
+            <a:off x="-718276" y="729523"/>
+            <a:ext cx="6858000" cy="5398953"/>
+          </a:xfrm>
+          <a:prstGeom prst="rect">
+            <a:avLst/>
+          </a:prstGeom>
+          <a:ln>
+            <a:noFill/>
+          </a:ln>
+          <a:effectLst>
+            <a:outerShdw blurRad="419100" dist="152400" sx="94000" sy="94000" algn="l" rotWithShape="0">
+              <a:prstClr val="black">
+                <a:alpha val="32000"/>
+              </a:prstClr>
+            </a:outerShdw>
+          </a:effectLst>
+        </p:spPr>
+        <p:style>
+          <a:lnRef idx="2">
+            <a:schemeClr val="accent1">
+              <a:shade val="50000"/>
+            </a:schemeClr>
+          </a:lnRef>
+          <a:fillRef idx="1">
+            <a:schemeClr val="accent1"/>
+          </a:fillRef>
+          <a:effectRef idx="0">
+            <a:schemeClr val="accent1"/>
+          </a:effectRef>
+          <a:fontRef idx="minor">
+            <a:schemeClr val="lt1"/>
+          </a:fontRef>
+        </p:style>
+        <p:txBody>
+          <a:bodyPr rtlCol="0" anchor="ctr"/>
+          <a:lstStyle/>
+          <a:p>
+            <a:pPr algn="ctr"/>
+            <a:endParaRPr lang="en-US"/>
+          </a:p>
+        </p:txBody>
+      </p:sp>
+      <p:sp>
+        <p:nvSpPr>
+          <p:cNvPr id="2" name="Title 1">
+            <a:extLst>
+              <a:ext uri="{FF2B5EF4-FFF2-40B4-BE49-F238E27FC236}">
+                <a16:creationId xmlns:a16="http://schemas.microsoft.com/office/drawing/2014/main" id="{CD915B90-DA12-5311-A694-71F1513664CE}"/>
+              </a:ext>
+            </a:extLst>
+          </p:cNvPr>
+          <p:cNvSpPr>
+            <a:spLocks noGrp="1"/>
+          </p:cNvSpPr>
+          <p:nvPr>
+            <p:ph type="title"/>
+          </p:nvPr>
+        </p:nvSpPr>
+        <p:spPr>
+          <a:xfrm>
+            <a:off x="758952" y="785366"/>
+            <a:ext cx="4069055" cy="2072853"/>
+          </a:xfrm>
+        </p:spPr>
+        <p:txBody>
+          <a:bodyPr anchor="t">
+            <a:normAutofit/>
+          </a:bodyPr>
+          <a:lstStyle/>
+          <a:p>
+            <a:r>
+              <a:rPr lang="en-US" sz="4000" dirty="0"/>
+              <a:t>What You Should Know</a:t>
+            </a:r>
+          </a:p>
+        </p:txBody>
+      </p:sp>
+      <p:pic>
+        <p:nvPicPr>
+          <p:cNvPr id="4" name="Picture 3">
+            <a:extLst>
+              <a:ext uri="{FF2B5EF4-FFF2-40B4-BE49-F238E27FC236}">
+                <a16:creationId xmlns:a16="http://schemas.microsoft.com/office/drawing/2014/main" id="{C0016F98-4E8E-CBB1-A610-58AFEB8B6E7F}"/>
+              </a:ext>
+              <a:ext uri="{C183D7F6-B498-43B3-948B-1728B52AA6E4}">
+                <adec:decorative xmlns:adec="http://schemas.microsoft.com/office/drawing/2017/decorative" val="1"/>
+              </a:ext>
+            </a:extLst>
+          </p:cNvPr>
+          <p:cNvPicPr>
+            <a:picLocks noChangeAspect="1" noChangeArrowheads="1"/>
+          </p:cNvPicPr>
+          <p:nvPr/>
+        </p:nvPicPr>
+        <p:blipFill rotWithShape="1">
+          <a:blip r:embed="rId2">
+            <a:extLst>
+              <a:ext uri="{28A0092B-C50C-407E-A947-70E740481C1C}">
+                <a14:useLocalDpi xmlns:a14="http://schemas.microsoft.com/office/drawing/2010/main" val="0"/>
+              </a:ext>
+            </a:extLst>
+          </a:blip>
+          <a:srcRect r="1110" b="-1"/>
+          <a:stretch>
+            <a:fillRect/>
+          </a:stretch>
+        </p:blipFill>
+        <p:spPr bwMode="auto">
+          <a:xfrm>
+            <a:off x="724708" y="3429000"/>
+            <a:ext cx="3951110" cy="2666998"/>
+          </a:xfrm>
+          <a:prstGeom prst="rect">
+            <a:avLst/>
+          </a:prstGeom>
+          <a:noFill/>
+          <a:extLst>
+            <a:ext uri="{909E8E84-426E-40DD-AFC4-6F175D3DCCD1}">
+              <a14:hiddenFill xmlns:a14="http://schemas.microsoft.com/office/drawing/2010/main">
+                <a:solidFill>
+                  <a:srgbClr val="FFFFFF"/>
+                </a:solidFill>
+              </a14:hiddenFill>
+            </a:ext>
+          </a:extLst>
+        </p:spPr>
+      </p:pic>
+      <mc:AlternateContent xmlns:mc="http://schemas.openxmlformats.org/markup-compatibility/2006" xmlns:a14="http://schemas.microsoft.com/office/drawing/2010/main">
+        <mc:Choice Requires="a14">
+          <p:sp>
+            <p:nvSpPr>
+              <p:cNvPr id="3" name="Content Placeholder 2">
+                <a:extLst>
+                  <a:ext uri="{FF2B5EF4-FFF2-40B4-BE49-F238E27FC236}">
+                    <a16:creationId xmlns:a16="http://schemas.microsoft.com/office/drawing/2014/main" id="{76BBA507-BEF2-070A-4241-AF2BA1803534}"/>
+                  </a:ext>
+                </a:extLst>
+              </p:cNvPr>
+              <p:cNvSpPr>
+                <a:spLocks noGrp="1"/>
+              </p:cNvSpPr>
+              <p:nvPr>
+                <p:ph idx="1"/>
+              </p:nvPr>
+            </p:nvSpPr>
+            <p:spPr>
+              <a:xfrm>
+                <a:off x="5788479" y="432707"/>
+                <a:ext cx="6074228" cy="5916384"/>
+              </a:xfrm>
+            </p:spPr>
+            <p:txBody>
+              <a:bodyPr anchor="ctr">
+                <a:normAutofit/>
+              </a:bodyPr>
+              <a:lstStyle/>
+              <a:p>
+                <a:r>
+                  <a:rPr lang="en-US" sz="1600" dirty="0"/>
+                  <a:t>Time difference (TD) learning is an alternative to MC for the prediction (policy evaluation) problem.</a:t>
+                </a:r>
+              </a:p>
+              <a:p>
+                <a:pPr marL="0" indent="0">
+                  <a:buNone/>
+                </a:pPr>
+                <a:endParaRPr lang="en-US" sz="1600" dirty="0"/>
+              </a:p>
+              <a:p>
+                <a:r>
+                  <a:rPr lang="en-US" sz="1600" b="1" dirty="0"/>
+                  <a:t>Method</a:t>
+                </a:r>
+                <a:r>
+                  <a:rPr lang="en-US" sz="1600" dirty="0"/>
+                  <a:t>: Stepwise reduces the TD error for the next step.</a:t>
+                </a:r>
+              </a:p>
+              <a:p>
+                <a:pPr marL="0" indent="0">
+                  <a:buNone/>
+                </a:pPr>
+                <a:endParaRPr lang="en-US" sz="1600" dirty="0"/>
+              </a:p>
+              <a:p>
+                <a:r>
+                  <a:rPr lang="en-US" sz="1600" dirty="0"/>
+                  <a:t>Popular and most widely used RL methods:</a:t>
+                </a:r>
+              </a:p>
+              <a:p>
+                <a:pPr lvl="1"/>
+                <a:r>
+                  <a:rPr lang="en-US" sz="1600" dirty="0"/>
+                  <a:t>On-policy: Sarsa</a:t>
+                </a:r>
+              </a:p>
+              <a:p>
+                <a:pPr lvl="1"/>
+                <a:r>
+                  <a:rPr lang="en-US" sz="1600" dirty="0"/>
+                  <a:t>Off-policy: Q-learning</a:t>
+                </a:r>
+              </a:p>
+              <a:p>
+                <a:r>
+                  <a:rPr lang="en-US" sz="1600" dirty="0"/>
+                  <a:t>Advantages:</a:t>
+                </a:r>
+              </a:p>
+              <a:p>
+                <a:pPr lvl="1"/>
+                <a:r>
+                  <a:rPr lang="en-US" sz="1600" dirty="0"/>
+                  <a:t>Model-free: Uses experience.</a:t>
+                </a:r>
+              </a:p>
+              <a:p>
+                <a:pPr lvl="1"/>
+                <a:r>
+                  <a:rPr lang="en-US" sz="1600" dirty="0"/>
+                  <a:t>Learn online (after each observation).</a:t>
+                </a:r>
+              </a:p>
+              <a:p>
+                <a:pPr lvl="1"/>
+                <a:r>
+                  <a:rPr lang="en-US" sz="1600" dirty="0"/>
+                  <a:t>Simple with minimal computation.</a:t>
+                </a:r>
+              </a:p>
+              <a:p>
+                <a:r>
+                  <a:rPr lang="en-US" sz="1600" dirty="0"/>
+                  <a:t>Challenges:</a:t>
+                </a:r>
+              </a:p>
+              <a:p>
+                <a:pPr lvl="1"/>
+                <a:r>
+                  <a:rPr lang="en-US" sz="1600" dirty="0"/>
+                  <a:t>Maximation bias.</a:t>
+                </a:r>
+              </a:p>
+              <a:p>
+                <a:pPr lvl="1"/>
+                <a:r>
+                  <a:rPr lang="en-US" sz="1600" dirty="0"/>
+                  <a:t>Behavior policy needs to keep exploring.</a:t>
+                </a:r>
+              </a:p>
+              <a:p>
+                <a:pPr lvl="1"/>
+                <a:r>
+                  <a:rPr lang="en-US" sz="1600" dirty="0"/>
+                  <a:t>Not very sample efficient.</a:t>
+                </a:r>
+              </a:p>
+              <a:p>
+                <a:pPr marL="0" indent="0">
+                  <a:buNone/>
+                </a:pPr>
+                <a:endParaRPr lang="en-US" sz="1600" dirty="0"/>
+              </a:p>
+              <a:p>
+                <a:r>
+                  <a:rPr lang="en-US" sz="1600" dirty="0"/>
+                  <a:t>We will extend the one-step tabular TD ideas from this chapter to </a:t>
+                </a:r>
+                <a14:m>
+                  <m:oMath xmlns:m="http://schemas.openxmlformats.org/officeDocument/2006/math">
+                    <m:r>
+                      <a:rPr lang="en-US" sz="1600" b="1" i="1">
+                        <a:latin typeface="Cambria Math" panose="02040503050406030204" pitchFamily="18" charset="0"/>
+                      </a:rPr>
+                      <m:t>𝒏</m:t>
+                    </m:r>
+                  </m:oMath>
+                </a14:m>
+                <a:r>
+                  <a:rPr lang="en-US" sz="1600" b="1" dirty="0"/>
+                  <a:t>-steps </a:t>
+                </a:r>
+                <a:r>
+                  <a:rPr lang="en-US" sz="1600" dirty="0"/>
+                  <a:t>and </a:t>
+                </a:r>
+                <a:r>
+                  <a:rPr lang="en-US" sz="1600" b="1" dirty="0"/>
+                  <a:t>function approximation</a:t>
+                </a:r>
+                <a:r>
+                  <a:rPr lang="en-US" sz="1600" dirty="0"/>
+                  <a:t>.</a:t>
+                </a:r>
+              </a:p>
+            </p:txBody>
+          </p:sp>
+        </mc:Choice>
+        <mc:Fallback xmlns="">
+          <p:sp>
+            <p:nvSpPr>
+              <p:cNvPr id="3" name="Content Placeholder 2">
+                <a:extLst>
+                  <a:ext uri="{FF2B5EF4-FFF2-40B4-BE49-F238E27FC236}">
+                    <a16:creationId xmlns:a16="http://schemas.microsoft.com/office/drawing/2014/main" id="{76BBA507-BEF2-070A-4241-AF2BA1803534}"/>
+                  </a:ext>
+                </a:extLst>
+              </p:cNvPr>
+              <p:cNvSpPr>
+                <a:spLocks noGrp="1" noRot="1" noChangeAspect="1" noMove="1" noResize="1" noEditPoints="1" noAdjustHandles="1" noChangeArrowheads="1" noChangeShapeType="1" noTextEdit="1"/>
+              </p:cNvSpPr>
+              <p:nvPr>
+                <p:ph idx="1"/>
+              </p:nvPr>
+            </p:nvSpPr>
+            <p:spPr>
+              <a:xfrm>
+                <a:off x="5788479" y="432707"/>
+                <a:ext cx="6074228" cy="5916384"/>
+              </a:xfrm>
+              <a:blipFill>
+                <a:blip r:embed="rId3"/>
+                <a:stretch>
+                  <a:fillRect l="-402" r="-803" b="-206"/>
+                </a:stretch>
+              </a:blipFill>
+            </p:spPr>
+            <p:txBody>
+              <a:bodyPr/>
+              <a:lstStyle/>
+              <a:p>
+                <a:r>
+                  <a:rPr lang="en-US">
+                    <a:noFill/>
+                  </a:rPr>
+                  <a:t> </a:t>
+                </a:r>
+              </a:p>
+            </p:txBody>
+          </p:sp>
+        </mc:Fallback>
+      </mc:AlternateContent>
+    </p:spTree>
+    <p:extLst>
+      <p:ext uri="{BB962C8B-B14F-4D97-AF65-F5344CB8AC3E}">
+        <p14:creationId xmlns:p14="http://schemas.microsoft.com/office/powerpoint/2010/main" val="954880218"/>
+      </p:ext>
+    </p:extLst>
+  </p:cSld>
+  <p:clrMapOvr>
+    <a:masterClrMapping/>
+  </p:clrMapOvr>
+</p:sld>
+</file>
+
+<file path=ppt/slides/slide3.xml><?xml version="1.0" encoding="utf-8"?>
 <p:sld xmlns:a="http://schemas.openxmlformats.org/drawingml/2006/main" xmlns:r="http://schemas.openxmlformats.org/officeDocument/2006/relationships" xmlns:p="http://schemas.openxmlformats.org/presentationml/2006/main">
   <p:cSld>
     <p:spTree>
@@ -14187,1336 +17289,7 @@
 </p:sld>
 </file>
 
-<file path=ppt/slides/slide20.xml><?xml version="1.0" encoding="utf-8"?>
-<p:sld xmlns:a="http://schemas.openxmlformats.org/drawingml/2006/main" xmlns:r="http://schemas.openxmlformats.org/officeDocument/2006/relationships" xmlns:p="http://schemas.openxmlformats.org/presentationml/2006/main">
-  <p:cSld>
-    <p:spTree>
-      <p:nvGrpSpPr>
-        <p:cNvPr id="1" name=""/>
-        <p:cNvGrpSpPr/>
-        <p:nvPr/>
-      </p:nvGrpSpPr>
-      <p:grpSpPr>
-        <a:xfrm>
-          <a:off x="0" y="0"/>
-          <a:ext cx="0" cy="0"/>
-          <a:chOff x="0" y="0"/>
-          <a:chExt cx="0" cy="0"/>
-        </a:xfrm>
-      </p:grpSpPr>
-      <p:sp>
-        <p:nvSpPr>
-          <p:cNvPr id="2" name="Title 1">
-            <a:extLst>
-              <a:ext uri="{FF2B5EF4-FFF2-40B4-BE49-F238E27FC236}">
-                <a16:creationId xmlns:a16="http://schemas.microsoft.com/office/drawing/2014/main" id="{B838276F-7795-B966-030F-FCC3849991EC}"/>
-              </a:ext>
-            </a:extLst>
-          </p:cNvPr>
-          <p:cNvSpPr>
-            <a:spLocks noGrp="1"/>
-          </p:cNvSpPr>
-          <p:nvPr>
-            <p:ph type="title"/>
-          </p:nvPr>
-        </p:nvSpPr>
-        <p:spPr/>
-        <p:txBody>
-          <a:bodyPr/>
-          <a:lstStyle/>
-          <a:p>
-            <a:r>
-              <a:rPr lang="en-US" dirty="0"/>
-              <a:t>Sarsa vs. Q-Learning</a:t>
-            </a:r>
-          </a:p>
-        </p:txBody>
-      </p:sp>
-      <p:sp>
-        <p:nvSpPr>
-          <p:cNvPr id="3" name="Content Placeholder 2">
-            <a:extLst>
-              <a:ext uri="{FF2B5EF4-FFF2-40B4-BE49-F238E27FC236}">
-                <a16:creationId xmlns:a16="http://schemas.microsoft.com/office/drawing/2014/main" id="{E6C98B4E-B7CF-E345-6580-CEE34C1DC678}"/>
-              </a:ext>
-            </a:extLst>
-          </p:cNvPr>
-          <p:cNvSpPr>
-            <a:spLocks noGrp="1"/>
-          </p:cNvSpPr>
-          <p:nvPr>
-            <p:ph idx="1"/>
-          </p:nvPr>
-        </p:nvSpPr>
-        <p:spPr>
-          <a:xfrm>
-            <a:off x="838200" y="1397330"/>
-            <a:ext cx="4403895" cy="4779633"/>
-          </a:xfrm>
-        </p:spPr>
-        <p:txBody>
-          <a:bodyPr>
-            <a:normAutofit/>
-          </a:bodyPr>
-          <a:lstStyle/>
-          <a:p>
-            <a:r>
-              <a:rPr lang="en-US" sz="1800" b="1" dirty="0"/>
-              <a:t>Cliff Walking</a:t>
-            </a:r>
-            <a:r>
-              <a:rPr lang="en-US" sz="1800" dirty="0"/>
-              <a:t>: Consider the </a:t>
-            </a:r>
-            <a:r>
-              <a:rPr lang="en-US" sz="1800" dirty="0" err="1"/>
-              <a:t>gridworld</a:t>
-            </a:r>
-            <a:r>
-              <a:rPr lang="en-US" sz="1800" dirty="0"/>
-              <a:t> shown to the right. </a:t>
-            </a:r>
-          </a:p>
-          <a:p>
-            <a:r>
-              <a:rPr lang="en-US" sz="1800" dirty="0"/>
-              <a:t>This is a standard undiscounted, episodic task, with start and goal states.</a:t>
-            </a:r>
-          </a:p>
-          <a:p>
-            <a:r>
-              <a:rPr lang="en-US" sz="1800" dirty="0"/>
-              <a:t>Actions causing movement up, down, right, and left. </a:t>
-            </a:r>
-          </a:p>
-          <a:p>
-            <a:r>
-              <a:rPr lang="en-US" sz="1800" dirty="0"/>
-              <a:t>Reward is −1 on all transitions except those into the region marked “The Cliff.” Stepping into this region incurs a reward of −100 and sends the sends the agent instantly back to the start.</a:t>
-            </a:r>
-          </a:p>
-        </p:txBody>
-      </p:sp>
-      <p:pic>
-        <p:nvPicPr>
-          <p:cNvPr id="5" name="Picture 4">
-            <a:extLst>
-              <a:ext uri="{FF2B5EF4-FFF2-40B4-BE49-F238E27FC236}">
-                <a16:creationId xmlns:a16="http://schemas.microsoft.com/office/drawing/2014/main" id="{BF19A7B5-A9CC-EE24-F78E-F3E2FA24D35A}"/>
-              </a:ext>
-            </a:extLst>
-          </p:cNvPr>
-          <p:cNvPicPr>
-            <a:picLocks noChangeAspect="1"/>
-          </p:cNvPicPr>
-          <p:nvPr/>
-        </p:nvPicPr>
-        <p:blipFill>
-          <a:blip r:embed="rId2"/>
-          <a:stretch>
-            <a:fillRect/>
-          </a:stretch>
-        </p:blipFill>
-        <p:spPr>
-          <a:xfrm>
-            <a:off x="5798274" y="240397"/>
-            <a:ext cx="5979790" cy="3006931"/>
-          </a:xfrm>
-          <a:prstGeom prst="rect">
-            <a:avLst/>
-          </a:prstGeom>
-        </p:spPr>
-      </p:pic>
-      <p:pic>
-        <p:nvPicPr>
-          <p:cNvPr id="7" name="Picture 6">
-            <a:extLst>
-              <a:ext uri="{FF2B5EF4-FFF2-40B4-BE49-F238E27FC236}">
-                <a16:creationId xmlns:a16="http://schemas.microsoft.com/office/drawing/2014/main" id="{703F5773-6D0D-1D71-F1CD-C7746EF7FC07}"/>
-              </a:ext>
-            </a:extLst>
-          </p:cNvPr>
-          <p:cNvPicPr>
-            <a:picLocks noChangeAspect="1"/>
-          </p:cNvPicPr>
-          <p:nvPr/>
-        </p:nvPicPr>
-        <p:blipFill>
-          <a:blip r:embed="rId3"/>
-          <a:stretch>
-            <a:fillRect/>
-          </a:stretch>
-        </p:blipFill>
-        <p:spPr>
-          <a:xfrm>
-            <a:off x="6697576" y="3812721"/>
-            <a:ext cx="4399920" cy="2904072"/>
-          </a:xfrm>
-          <a:prstGeom prst="rect">
-            <a:avLst/>
-          </a:prstGeom>
-        </p:spPr>
-      </p:pic>
-      <mc:AlternateContent xmlns:mc="http://schemas.openxmlformats.org/markup-compatibility/2006" xmlns:a14="http://schemas.microsoft.com/office/drawing/2010/main">
-        <mc:Choice Requires="a14">
-          <p:sp>
-            <p:nvSpPr>
-              <p:cNvPr id="9" name="TextBox 8">
-                <a:extLst>
-                  <a:ext uri="{FF2B5EF4-FFF2-40B4-BE49-F238E27FC236}">
-                    <a16:creationId xmlns:a16="http://schemas.microsoft.com/office/drawing/2014/main" id="{586B79D4-4AA8-3E1C-81C7-278DEEA363AF}"/>
-                  </a:ext>
-                </a:extLst>
-              </p:cNvPr>
-              <p:cNvSpPr txBox="1"/>
-              <p:nvPr/>
-            </p:nvSpPr>
-            <p:spPr>
-              <a:xfrm>
-                <a:off x="6499781" y="3494758"/>
-                <a:ext cx="5362044" cy="584775"/>
-              </a:xfrm>
-              <a:prstGeom prst="rect">
-                <a:avLst/>
-              </a:prstGeom>
-              <a:noFill/>
-            </p:spPr>
-            <p:txBody>
-              <a:bodyPr wrap="square">
-                <a:spAutoFit/>
-              </a:bodyPr>
-              <a:lstStyle/>
-              <a:p>
-                <a:r>
-                  <a:rPr lang="en-US" sz="1600" dirty="0"/>
-                  <a:t>Performance of the Sarsa and Q-learning methods with </a:t>
-                </a:r>
-                <a14:m>
-                  <m:oMath xmlns:m="http://schemas.openxmlformats.org/officeDocument/2006/math">
-                    <m:r>
-                      <a:rPr lang="en-US" sz="1600" b="0" i="1" smtClean="0">
-                        <a:latin typeface="Cambria Math" panose="02040503050406030204" pitchFamily="18" charset="0"/>
-                      </a:rPr>
-                      <m:t>𝜖</m:t>
-                    </m:r>
-                  </m:oMath>
-                </a14:m>
-                <a:r>
-                  <a:rPr lang="en-US" sz="1600" dirty="0"/>
-                  <a:t>-greedy action selection, </a:t>
-                </a:r>
-                <a14:m>
-                  <m:oMath xmlns:m="http://schemas.openxmlformats.org/officeDocument/2006/math">
-                    <m:r>
-                      <a:rPr lang="en-US" sz="1600" i="1">
-                        <a:latin typeface="Cambria Math" panose="02040503050406030204" pitchFamily="18" charset="0"/>
-                      </a:rPr>
-                      <m:t>𝜖</m:t>
-                    </m:r>
-                    <m:r>
-                      <a:rPr lang="en-US" sz="1600" b="0" i="1" smtClean="0">
-                        <a:latin typeface="Cambria Math" panose="02040503050406030204" pitchFamily="18" charset="0"/>
-                      </a:rPr>
-                      <m:t>=0.1</m:t>
-                    </m:r>
-                  </m:oMath>
-                </a14:m>
-                <a:r>
-                  <a:rPr lang="en-US" sz="1600" dirty="0"/>
-                  <a:t>.</a:t>
-                </a:r>
-              </a:p>
-            </p:txBody>
-          </p:sp>
-        </mc:Choice>
-        <mc:Fallback xmlns="">
-          <p:sp>
-            <p:nvSpPr>
-              <p:cNvPr id="9" name="TextBox 8">
-                <a:extLst>
-                  <a:ext uri="{FF2B5EF4-FFF2-40B4-BE49-F238E27FC236}">
-                    <a16:creationId xmlns:a16="http://schemas.microsoft.com/office/drawing/2014/main" id="{586B79D4-4AA8-3E1C-81C7-278DEEA363AF}"/>
-                  </a:ext>
-                </a:extLst>
-              </p:cNvPr>
-              <p:cNvSpPr txBox="1">
-                <a:spLocks noRot="1" noChangeAspect="1" noMove="1" noResize="1" noEditPoints="1" noAdjustHandles="1" noChangeArrowheads="1" noChangeShapeType="1" noTextEdit="1"/>
-              </p:cNvSpPr>
-              <p:nvPr/>
-            </p:nvSpPr>
-            <p:spPr>
-              <a:xfrm>
-                <a:off x="6499781" y="3494758"/>
-                <a:ext cx="5362044" cy="584775"/>
-              </a:xfrm>
-              <a:prstGeom prst="rect">
-                <a:avLst/>
-              </a:prstGeom>
-              <a:blipFill>
-                <a:blip r:embed="rId4"/>
-                <a:stretch>
-                  <a:fillRect l="-568" t="-3125" b="-12500"/>
-                </a:stretch>
-              </a:blipFill>
-            </p:spPr>
-            <p:txBody>
-              <a:bodyPr/>
-              <a:lstStyle/>
-              <a:p>
-                <a:r>
-                  <a:rPr lang="en-US">
-                    <a:noFill/>
-                  </a:rPr>
-                  <a:t> </a:t>
-                </a:r>
-              </a:p>
-            </p:txBody>
-          </p:sp>
-        </mc:Fallback>
-      </mc:AlternateContent>
-      <p:sp>
-        <p:nvSpPr>
-          <p:cNvPr id="10" name="Speech Bubble: Rectangle with Corners Rounded 9">
-            <a:extLst>
-              <a:ext uri="{FF2B5EF4-FFF2-40B4-BE49-F238E27FC236}">
-                <a16:creationId xmlns:a16="http://schemas.microsoft.com/office/drawing/2014/main" id="{C3FCB8B5-813B-D263-F7C1-1BC210D5ED90}"/>
-              </a:ext>
-            </a:extLst>
-          </p:cNvPr>
-          <p:cNvSpPr/>
-          <p:nvPr/>
-        </p:nvSpPr>
-        <p:spPr>
-          <a:xfrm>
-            <a:off x="10016519" y="5264757"/>
-            <a:ext cx="1542614" cy="696293"/>
-          </a:xfrm>
-          <a:prstGeom prst="wedgeRoundRectCallout">
-            <a:avLst>
-              <a:gd name="adj1" fmla="val -79398"/>
-              <a:gd name="adj2" fmla="val -61806"/>
-              <a:gd name="adj3" fmla="val 16667"/>
-            </a:avLst>
-          </a:prstGeom>
-        </p:spPr>
-        <p:style>
-          <a:lnRef idx="2">
-            <a:schemeClr val="accent2">
-              <a:shade val="15000"/>
-            </a:schemeClr>
-          </a:lnRef>
-          <a:fillRef idx="1">
-            <a:schemeClr val="accent2"/>
-          </a:fillRef>
-          <a:effectRef idx="0">
-            <a:schemeClr val="accent2"/>
-          </a:effectRef>
-          <a:fontRef idx="minor">
-            <a:schemeClr val="lt1"/>
-          </a:fontRef>
-        </p:style>
-        <p:txBody>
-          <a:bodyPr rtlCol="0" anchor="ctr"/>
-          <a:lstStyle/>
-          <a:p>
-            <a:pPr algn="ctr"/>
-            <a:r>
-              <a:rPr lang="en-US" sz="1100" dirty="0"/>
-              <a:t>Why does the optimal path perform worse?</a:t>
-            </a:r>
-          </a:p>
-        </p:txBody>
-      </p:sp>
-      <p:sp>
-        <p:nvSpPr>
-          <p:cNvPr id="4" name="Speech Bubble: Rectangle with Corners Rounded 3">
-            <a:extLst>
-              <a:ext uri="{FF2B5EF4-FFF2-40B4-BE49-F238E27FC236}">
-                <a16:creationId xmlns:a16="http://schemas.microsoft.com/office/drawing/2014/main" id="{ED148F4B-5A91-1BFA-41CC-F38800350D33}"/>
-              </a:ext>
-            </a:extLst>
-          </p:cNvPr>
-          <p:cNvSpPr/>
-          <p:nvPr/>
-        </p:nvSpPr>
-        <p:spPr>
-          <a:xfrm>
-            <a:off x="10016519" y="2443259"/>
-            <a:ext cx="1542614" cy="696293"/>
-          </a:xfrm>
-          <a:prstGeom prst="wedgeRoundRectCallout">
-            <a:avLst>
-              <a:gd name="adj1" fmla="val -36980"/>
-              <a:gd name="adj2" fmla="val -269033"/>
-              <a:gd name="adj3" fmla="val 16667"/>
-            </a:avLst>
-          </a:prstGeom>
-        </p:spPr>
-        <p:style>
-          <a:lnRef idx="2">
-            <a:schemeClr val="accent1">
-              <a:shade val="15000"/>
-            </a:schemeClr>
-          </a:lnRef>
-          <a:fillRef idx="1">
-            <a:schemeClr val="accent1"/>
-          </a:fillRef>
-          <a:effectRef idx="0">
-            <a:schemeClr val="accent1"/>
-          </a:effectRef>
-          <a:fontRef idx="minor">
-            <a:schemeClr val="lt1"/>
-          </a:fontRef>
-        </p:style>
-        <p:txBody>
-          <a:bodyPr rtlCol="0" anchor="ctr"/>
-          <a:lstStyle/>
-          <a:p>
-            <a:pPr algn="ctr"/>
-            <a:r>
-              <a:rPr lang="en-US" sz="1100" dirty="0"/>
-              <a:t>Why does Sarsa pick the longer path?</a:t>
-            </a:r>
-          </a:p>
-        </p:txBody>
-      </p:sp>
-    </p:spTree>
-    <p:extLst>
-      <p:ext uri="{BB962C8B-B14F-4D97-AF65-F5344CB8AC3E}">
-        <p14:creationId xmlns:p14="http://schemas.microsoft.com/office/powerpoint/2010/main" val="2000631573"/>
-      </p:ext>
-    </p:extLst>
-  </p:cSld>
-  <p:clrMapOvr>
-    <a:masterClrMapping/>
-  </p:clrMapOvr>
-</p:sld>
-</file>
-
-<file path=ppt/slides/slide21.xml><?xml version="1.0" encoding="utf-8"?>
-<p:sld xmlns:a="http://schemas.openxmlformats.org/drawingml/2006/main" xmlns:r="http://schemas.openxmlformats.org/officeDocument/2006/relationships" xmlns:p="http://schemas.openxmlformats.org/presentationml/2006/main">
-  <p:cSld>
-    <p:spTree>
-      <p:nvGrpSpPr>
-        <p:cNvPr id="1" name="">
-          <a:extLst>
-            <a:ext uri="{FF2B5EF4-FFF2-40B4-BE49-F238E27FC236}">
-              <a16:creationId xmlns:a16="http://schemas.microsoft.com/office/drawing/2014/main" id="{A33AA1F0-940C-EE3F-D15D-72C7A6538C10}"/>
-            </a:ext>
-          </a:extLst>
-        </p:cNvPr>
-        <p:cNvGrpSpPr/>
-        <p:nvPr/>
-      </p:nvGrpSpPr>
-      <p:grpSpPr>
-        <a:xfrm>
-          <a:off x="0" y="0"/>
-          <a:ext cx="0" cy="0"/>
-          <a:chOff x="0" y="0"/>
-          <a:chExt cx="0" cy="0"/>
-        </a:xfrm>
-      </p:grpSpPr>
-      <p:sp>
-        <p:nvSpPr>
-          <p:cNvPr id="2" name="Title 1">
-            <a:extLst>
-              <a:ext uri="{FF2B5EF4-FFF2-40B4-BE49-F238E27FC236}">
-                <a16:creationId xmlns:a16="http://schemas.microsoft.com/office/drawing/2014/main" id="{BA79EA57-3578-362D-B879-FA8EDF16DDB6}"/>
-              </a:ext>
-            </a:extLst>
-          </p:cNvPr>
-          <p:cNvSpPr>
-            <a:spLocks noGrp="1"/>
-          </p:cNvSpPr>
-          <p:nvPr>
-            <p:ph type="title"/>
-          </p:nvPr>
-        </p:nvSpPr>
-        <p:spPr/>
-        <p:txBody>
-          <a:bodyPr/>
-          <a:lstStyle/>
-          <a:p>
-            <a:r>
-              <a:rPr lang="en-US" dirty="0"/>
-              <a:t>Sarsa vs. Q-Learning</a:t>
-            </a:r>
-          </a:p>
-        </p:txBody>
-      </p:sp>
-      <p:sp>
-        <p:nvSpPr>
-          <p:cNvPr id="3" name="Content Placeholder 2">
-            <a:extLst>
-              <a:ext uri="{FF2B5EF4-FFF2-40B4-BE49-F238E27FC236}">
-                <a16:creationId xmlns:a16="http://schemas.microsoft.com/office/drawing/2014/main" id="{79AD4FE8-3C4E-DC95-0476-B5C6788850F3}"/>
-              </a:ext>
-            </a:extLst>
-          </p:cNvPr>
-          <p:cNvSpPr>
-            <a:spLocks noGrp="1"/>
-          </p:cNvSpPr>
-          <p:nvPr>
-            <p:ph idx="1"/>
-          </p:nvPr>
-        </p:nvSpPr>
-        <p:spPr>
-          <a:xfrm>
-            <a:off x="838200" y="1397330"/>
-            <a:ext cx="4403895" cy="4779633"/>
-          </a:xfrm>
-        </p:spPr>
-        <p:txBody>
-          <a:bodyPr>
-            <a:normAutofit/>
-          </a:bodyPr>
-          <a:lstStyle/>
-          <a:p>
-            <a:r>
-              <a:rPr lang="en-US" sz="1800" b="1" dirty="0"/>
-              <a:t>Cliff Walking</a:t>
-            </a:r>
-            <a:r>
-              <a:rPr lang="en-US" sz="1800" dirty="0"/>
-              <a:t>: Consider the </a:t>
-            </a:r>
-            <a:r>
-              <a:rPr lang="en-US" sz="1800" dirty="0" err="1"/>
-              <a:t>gridworld</a:t>
-            </a:r>
-            <a:r>
-              <a:rPr lang="en-US" sz="1800" dirty="0"/>
-              <a:t> shown to the right. </a:t>
-            </a:r>
-          </a:p>
-          <a:p>
-            <a:r>
-              <a:rPr lang="en-US" sz="1800" dirty="0"/>
-              <a:t>This is a standard undiscounted, episodic task, with start and goal states.</a:t>
-            </a:r>
-          </a:p>
-          <a:p>
-            <a:r>
-              <a:rPr lang="en-US" sz="1800" dirty="0"/>
-              <a:t>Actions causing movement up, down, right, and left. </a:t>
-            </a:r>
-          </a:p>
-          <a:p>
-            <a:r>
-              <a:rPr lang="en-US" sz="1800" dirty="0"/>
-              <a:t>Reward is −1 on all transitions except those into the region marked “The Cliff.” Stepping into this region incurs a reward of −100 and sends the sends the agent instantly back to the start.</a:t>
-            </a:r>
-          </a:p>
-        </p:txBody>
-      </p:sp>
-      <p:pic>
-        <p:nvPicPr>
-          <p:cNvPr id="5" name="Picture 4">
-            <a:extLst>
-              <a:ext uri="{FF2B5EF4-FFF2-40B4-BE49-F238E27FC236}">
-                <a16:creationId xmlns:a16="http://schemas.microsoft.com/office/drawing/2014/main" id="{CF5B5508-DD84-0561-E4B7-B0A2B44DB81F}"/>
-              </a:ext>
-            </a:extLst>
-          </p:cNvPr>
-          <p:cNvPicPr>
-            <a:picLocks noChangeAspect="1"/>
-          </p:cNvPicPr>
-          <p:nvPr/>
-        </p:nvPicPr>
-        <p:blipFill>
-          <a:blip r:embed="rId2"/>
-          <a:stretch>
-            <a:fillRect/>
-          </a:stretch>
-        </p:blipFill>
-        <p:spPr>
-          <a:xfrm>
-            <a:off x="5798274" y="240397"/>
-            <a:ext cx="5979790" cy="3006931"/>
-          </a:xfrm>
-          <a:prstGeom prst="rect">
-            <a:avLst/>
-          </a:prstGeom>
-        </p:spPr>
-      </p:pic>
-      <p:pic>
-        <p:nvPicPr>
-          <p:cNvPr id="7" name="Picture 6">
-            <a:extLst>
-              <a:ext uri="{FF2B5EF4-FFF2-40B4-BE49-F238E27FC236}">
-                <a16:creationId xmlns:a16="http://schemas.microsoft.com/office/drawing/2014/main" id="{4C080FFF-E983-662A-907E-6B5CCFAB97B1}"/>
-              </a:ext>
-            </a:extLst>
-          </p:cNvPr>
-          <p:cNvPicPr>
-            <a:picLocks noChangeAspect="1"/>
-          </p:cNvPicPr>
-          <p:nvPr/>
-        </p:nvPicPr>
-        <p:blipFill>
-          <a:blip r:embed="rId3"/>
-          <a:stretch>
-            <a:fillRect/>
-          </a:stretch>
-        </p:blipFill>
-        <p:spPr>
-          <a:xfrm>
-            <a:off x="6697576" y="3812721"/>
-            <a:ext cx="4399920" cy="2904072"/>
-          </a:xfrm>
-          <a:prstGeom prst="rect">
-            <a:avLst/>
-          </a:prstGeom>
-        </p:spPr>
-      </p:pic>
-      <mc:AlternateContent xmlns:mc="http://schemas.openxmlformats.org/markup-compatibility/2006" xmlns:a14="http://schemas.microsoft.com/office/drawing/2010/main">
-        <mc:Choice Requires="a14">
-          <p:sp>
-            <p:nvSpPr>
-              <p:cNvPr id="9" name="TextBox 8">
-                <a:extLst>
-                  <a:ext uri="{FF2B5EF4-FFF2-40B4-BE49-F238E27FC236}">
-                    <a16:creationId xmlns:a16="http://schemas.microsoft.com/office/drawing/2014/main" id="{41419248-E32C-E1A5-DA88-F07267441E80}"/>
-                  </a:ext>
-                </a:extLst>
-              </p:cNvPr>
-              <p:cNvSpPr txBox="1"/>
-              <p:nvPr/>
-            </p:nvSpPr>
-            <p:spPr>
-              <a:xfrm>
-                <a:off x="6499781" y="3494758"/>
-                <a:ext cx="5362044" cy="584775"/>
-              </a:xfrm>
-              <a:prstGeom prst="rect">
-                <a:avLst/>
-              </a:prstGeom>
-              <a:noFill/>
-            </p:spPr>
-            <p:txBody>
-              <a:bodyPr wrap="square">
-                <a:spAutoFit/>
-              </a:bodyPr>
-              <a:lstStyle/>
-              <a:p>
-                <a:r>
-                  <a:rPr lang="en-US" sz="1600" dirty="0"/>
-                  <a:t>Performance of the Sarsa and Q-learning methods with </a:t>
-                </a:r>
-                <a14:m>
-                  <m:oMath xmlns:m="http://schemas.openxmlformats.org/officeDocument/2006/math">
-                    <m:r>
-                      <a:rPr lang="en-US" sz="1600" b="0" i="1" smtClean="0">
-                        <a:latin typeface="Cambria Math" panose="02040503050406030204" pitchFamily="18" charset="0"/>
-                      </a:rPr>
-                      <m:t>𝜖</m:t>
-                    </m:r>
-                  </m:oMath>
-                </a14:m>
-                <a:r>
-                  <a:rPr lang="en-US" sz="1600" dirty="0"/>
-                  <a:t>-greedy action selection, </a:t>
-                </a:r>
-                <a14:m>
-                  <m:oMath xmlns:m="http://schemas.openxmlformats.org/officeDocument/2006/math">
-                    <m:r>
-                      <a:rPr lang="en-US" sz="1600" i="1">
-                        <a:latin typeface="Cambria Math" panose="02040503050406030204" pitchFamily="18" charset="0"/>
-                      </a:rPr>
-                      <m:t>𝜖</m:t>
-                    </m:r>
-                    <m:r>
-                      <a:rPr lang="en-US" sz="1600" b="0" i="1" smtClean="0">
-                        <a:latin typeface="Cambria Math" panose="02040503050406030204" pitchFamily="18" charset="0"/>
-                      </a:rPr>
-                      <m:t>=0.1</m:t>
-                    </m:r>
-                  </m:oMath>
-                </a14:m>
-                <a:r>
-                  <a:rPr lang="en-US" sz="1600" dirty="0"/>
-                  <a:t>.</a:t>
-                </a:r>
-              </a:p>
-            </p:txBody>
-          </p:sp>
-        </mc:Choice>
-        <mc:Fallback xmlns="">
-          <p:sp>
-            <p:nvSpPr>
-              <p:cNvPr id="9" name="TextBox 8">
-                <a:extLst>
-                  <a:ext uri="{FF2B5EF4-FFF2-40B4-BE49-F238E27FC236}">
-                    <a16:creationId xmlns:a16="http://schemas.microsoft.com/office/drawing/2014/main" id="{586B79D4-4AA8-3E1C-81C7-278DEEA363AF}"/>
-                  </a:ext>
-                </a:extLst>
-              </p:cNvPr>
-              <p:cNvSpPr txBox="1">
-                <a:spLocks noRot="1" noChangeAspect="1" noMove="1" noResize="1" noEditPoints="1" noAdjustHandles="1" noChangeArrowheads="1" noChangeShapeType="1" noTextEdit="1"/>
-              </p:cNvSpPr>
-              <p:nvPr/>
-            </p:nvSpPr>
-            <p:spPr>
-              <a:xfrm>
-                <a:off x="6499781" y="3494758"/>
-                <a:ext cx="5362044" cy="584775"/>
-              </a:xfrm>
-              <a:prstGeom prst="rect">
-                <a:avLst/>
-              </a:prstGeom>
-              <a:blipFill>
-                <a:blip r:embed="rId4"/>
-                <a:stretch>
-                  <a:fillRect l="-568" t="-3125" b="-12500"/>
-                </a:stretch>
-              </a:blipFill>
-            </p:spPr>
-            <p:txBody>
-              <a:bodyPr/>
-              <a:lstStyle/>
-              <a:p>
-                <a:r>
-                  <a:rPr lang="en-US">
-                    <a:noFill/>
-                  </a:rPr>
-                  <a:t> </a:t>
-                </a:r>
-              </a:p>
-            </p:txBody>
-          </p:sp>
-        </mc:Fallback>
-      </mc:AlternateContent>
-      <p:sp>
-        <p:nvSpPr>
-          <p:cNvPr id="10" name="Speech Bubble: Rectangle with Corners Rounded 9">
-            <a:extLst>
-              <a:ext uri="{FF2B5EF4-FFF2-40B4-BE49-F238E27FC236}">
-                <a16:creationId xmlns:a16="http://schemas.microsoft.com/office/drawing/2014/main" id="{861BC875-C5BF-4D99-E066-2E9E901055E1}"/>
-              </a:ext>
-            </a:extLst>
-          </p:cNvPr>
-          <p:cNvSpPr/>
-          <p:nvPr/>
-        </p:nvSpPr>
-        <p:spPr>
-          <a:xfrm>
-            <a:off x="10174843" y="4685251"/>
-            <a:ext cx="1845306" cy="2031542"/>
-          </a:xfrm>
-          <a:prstGeom prst="wedgeRoundRectCallout">
-            <a:avLst>
-              <a:gd name="adj1" fmla="val -84969"/>
-              <a:gd name="adj2" fmla="val -31455"/>
-              <a:gd name="adj3" fmla="val 16667"/>
-            </a:avLst>
-          </a:prstGeom>
-        </p:spPr>
-        <p:style>
-          <a:lnRef idx="2">
-            <a:schemeClr val="accent2">
-              <a:shade val="15000"/>
-            </a:schemeClr>
-          </a:lnRef>
-          <a:fillRef idx="1">
-            <a:schemeClr val="accent2"/>
-          </a:fillRef>
-          <a:effectRef idx="0">
-            <a:schemeClr val="accent2"/>
-          </a:effectRef>
-          <a:fontRef idx="minor">
-            <a:schemeClr val="lt1"/>
-          </a:fontRef>
-        </p:style>
-        <p:txBody>
-          <a:bodyPr rtlCol="0" anchor="ctr"/>
-          <a:lstStyle/>
-          <a:p>
-            <a:pPr algn="ctr"/>
-            <a:r>
-              <a:rPr lang="en-US" sz="1100" dirty="0"/>
-              <a:t>Q-learning learns the optimal policy, but uses a soft behavior policy to explore. Walking along the cliff with a soft policy is dangerous.</a:t>
-            </a:r>
-          </a:p>
-          <a:p>
-            <a:pPr algn="ctr"/>
-            <a:r>
-              <a:rPr lang="en-US" sz="1100" dirty="0"/>
-              <a:t>Once we only follow the learned deterministic  policy, the sum of rewards will be optimal.</a:t>
-            </a:r>
-          </a:p>
-        </p:txBody>
-      </p:sp>
-      <p:sp>
-        <p:nvSpPr>
-          <p:cNvPr id="4" name="Speech Bubble: Rectangle with Corners Rounded 3">
-            <a:extLst>
-              <a:ext uri="{FF2B5EF4-FFF2-40B4-BE49-F238E27FC236}">
-                <a16:creationId xmlns:a16="http://schemas.microsoft.com/office/drawing/2014/main" id="{A7881373-FF43-8F96-C27F-EE64A3DDB838}"/>
-              </a:ext>
-            </a:extLst>
-          </p:cNvPr>
-          <p:cNvSpPr/>
-          <p:nvPr/>
-        </p:nvSpPr>
-        <p:spPr>
-          <a:xfrm>
-            <a:off x="9584422" y="2485204"/>
-            <a:ext cx="2528384" cy="696293"/>
-          </a:xfrm>
-          <a:prstGeom prst="wedgeRoundRectCallout">
-            <a:avLst>
-              <a:gd name="adj1" fmla="val -31027"/>
-              <a:gd name="adj2" fmla="val -270840"/>
-              <a:gd name="adj3" fmla="val 16667"/>
-            </a:avLst>
-          </a:prstGeom>
-        </p:spPr>
-        <p:style>
-          <a:lnRef idx="2">
-            <a:schemeClr val="accent1">
-              <a:shade val="15000"/>
-            </a:schemeClr>
-          </a:lnRef>
-          <a:fillRef idx="1">
-            <a:schemeClr val="accent1"/>
-          </a:fillRef>
-          <a:effectRef idx="0">
-            <a:schemeClr val="accent1"/>
-          </a:effectRef>
-          <a:fontRef idx="minor">
-            <a:schemeClr val="lt1"/>
-          </a:fontRef>
-        </p:style>
-        <p:txBody>
-          <a:bodyPr rtlCol="0" anchor="ctr"/>
-          <a:lstStyle/>
-          <a:p>
-            <a:pPr algn="ctr"/>
-            <a:r>
-              <a:rPr lang="en-US" sz="1100" dirty="0"/>
-              <a:t>Sarsa is on-policy and learns a soft policy. Walking along the cliff would be dangerous!</a:t>
-            </a:r>
-          </a:p>
-        </p:txBody>
-      </p:sp>
-    </p:spTree>
-    <p:extLst>
-      <p:ext uri="{BB962C8B-B14F-4D97-AF65-F5344CB8AC3E}">
-        <p14:creationId xmlns:p14="http://schemas.microsoft.com/office/powerpoint/2010/main" val="3138592298"/>
-      </p:ext>
-    </p:extLst>
-  </p:cSld>
-  <p:clrMapOvr>
-    <a:masterClrMapping/>
-  </p:clrMapOvr>
-</p:sld>
-</file>
-
-<file path=ppt/slides/slide22.xml><?xml version="1.0" encoding="utf-8"?>
-<p:sld xmlns:a="http://schemas.openxmlformats.org/drawingml/2006/main" xmlns:r="http://schemas.openxmlformats.org/officeDocument/2006/relationships" xmlns:p="http://schemas.openxmlformats.org/presentationml/2006/main">
-  <p:cSld>
-    <p:spTree>
-      <p:nvGrpSpPr>
-        <p:cNvPr id="1" name=""/>
-        <p:cNvGrpSpPr/>
-        <p:nvPr/>
-      </p:nvGrpSpPr>
-      <p:grpSpPr>
-        <a:xfrm>
-          <a:off x="0" y="0"/>
-          <a:ext cx="0" cy="0"/>
-          <a:chOff x="0" y="0"/>
-          <a:chExt cx="0" cy="0"/>
-        </a:xfrm>
-      </p:grpSpPr>
-      <p:pic>
-        <p:nvPicPr>
-          <p:cNvPr id="8" name="Picture 7">
-            <a:extLst>
-              <a:ext uri="{FF2B5EF4-FFF2-40B4-BE49-F238E27FC236}">
-                <a16:creationId xmlns:a16="http://schemas.microsoft.com/office/drawing/2014/main" id="{4E47B388-9EDE-BEEF-286A-0670BB57C281}"/>
-              </a:ext>
-            </a:extLst>
-          </p:cNvPr>
-          <p:cNvPicPr>
-            <a:picLocks noChangeAspect="1"/>
-          </p:cNvPicPr>
-          <p:nvPr/>
-        </p:nvPicPr>
-        <p:blipFill>
-          <a:blip r:embed="rId2"/>
-          <a:stretch>
-            <a:fillRect/>
-          </a:stretch>
-        </p:blipFill>
-        <p:spPr>
-          <a:xfrm>
-            <a:off x="3273879" y="593726"/>
-            <a:ext cx="8556776" cy="5995665"/>
-          </a:xfrm>
-          <a:prstGeom prst="rect">
-            <a:avLst/>
-          </a:prstGeom>
-        </p:spPr>
-      </p:pic>
-      <p:sp>
-        <p:nvSpPr>
-          <p:cNvPr id="2" name="Title 1">
-            <a:extLst>
-              <a:ext uri="{FF2B5EF4-FFF2-40B4-BE49-F238E27FC236}">
-                <a16:creationId xmlns:a16="http://schemas.microsoft.com/office/drawing/2014/main" id="{DE6EC57F-A3C1-ECE0-DBDD-E93D09AB1002}"/>
-              </a:ext>
-            </a:extLst>
-          </p:cNvPr>
-          <p:cNvSpPr>
-            <a:spLocks noGrp="1"/>
-          </p:cNvSpPr>
-          <p:nvPr>
-            <p:ph type="title"/>
-          </p:nvPr>
-        </p:nvSpPr>
-        <p:spPr>
-          <a:xfrm>
-            <a:off x="838200" y="365126"/>
-            <a:ext cx="4446864" cy="1551758"/>
-          </a:xfrm>
-        </p:spPr>
-        <p:txBody>
-          <a:bodyPr>
-            <a:normAutofit fontScale="90000"/>
-          </a:bodyPr>
-          <a:lstStyle/>
-          <a:p>
-            <a:br>
-              <a:rPr lang="en-US" dirty="0"/>
-            </a:br>
-            <a:r>
-              <a:rPr lang="en-US" dirty="0"/>
-              <a:t>Experimental Comparison</a:t>
-            </a:r>
-          </a:p>
-        </p:txBody>
-      </p:sp>
-    </p:spTree>
-    <p:extLst>
-      <p:ext uri="{BB962C8B-B14F-4D97-AF65-F5344CB8AC3E}">
-        <p14:creationId xmlns:p14="http://schemas.microsoft.com/office/powerpoint/2010/main" val="3892503222"/>
-      </p:ext>
-    </p:extLst>
-  </p:cSld>
-  <p:clrMapOvr>
-    <a:masterClrMapping/>
-  </p:clrMapOvr>
-</p:sld>
-</file>
-
-<file path=ppt/slides/slide23.xml><?xml version="1.0" encoding="utf-8"?>
-<p:sld xmlns:a="http://schemas.openxmlformats.org/drawingml/2006/main" xmlns:r="http://schemas.openxmlformats.org/officeDocument/2006/relationships" xmlns:p="http://schemas.openxmlformats.org/presentationml/2006/main">
-  <p:cSld>
-    <p:bg>
-      <p:bgPr>
-        <a:solidFill>
-          <a:schemeClr val="bg1"/>
-        </a:solidFill>
-        <a:effectLst/>
-      </p:bgPr>
-    </p:bg>
-    <p:spTree>
-      <p:nvGrpSpPr>
-        <p:cNvPr id="1" name=""/>
-        <p:cNvGrpSpPr/>
-        <p:nvPr/>
-      </p:nvGrpSpPr>
-      <p:grpSpPr>
-        <a:xfrm>
-          <a:off x="0" y="0"/>
-          <a:ext cx="0" cy="0"/>
-          <a:chOff x="0" y="0"/>
-          <a:chExt cx="0" cy="0"/>
-        </a:xfrm>
-      </p:grpSpPr>
-      <p:sp useBgFill="1">
-        <p:nvSpPr>
-          <p:cNvPr id="9" name="Rectangle 8">
-            <a:extLst>
-              <a:ext uri="{FF2B5EF4-FFF2-40B4-BE49-F238E27FC236}">
-                <a16:creationId xmlns:a16="http://schemas.microsoft.com/office/drawing/2014/main" id="{E81BF4F6-F2CF-4984-9D14-D6966D92F99F}"/>
-              </a:ext>
-              <a:ext uri="{C183D7F6-B498-43B3-948B-1728B52AA6E4}">
-                <adec:decorative xmlns:adec="http://schemas.microsoft.com/office/drawing/2017/decorative" val="1"/>
-              </a:ext>
-            </a:extLst>
-          </p:cNvPr>
-          <p:cNvSpPr>
-            <a:spLocks noGrp="1" noRot="1" noChangeAspect="1" noMove="1" noResize="1" noEditPoints="1" noAdjustHandles="1" noChangeArrowheads="1" noChangeShapeType="1" noTextEdit="1"/>
-          </p:cNvSpPr>
-          <p:nvPr>
-            <p:extLst>
-              <p:ext uri="{386F3935-93C4-4BCD-93E2-E3B085C9AB24}">
-                <p16:designElem xmlns:p16="http://schemas.microsoft.com/office/powerpoint/2015/main" val="1"/>
-              </p:ext>
-            </p:extLst>
-          </p:nvPr>
-        </p:nvSpPr>
-        <p:spPr>
-          <a:xfrm rot="16200000">
-            <a:off x="-718276" y="729523"/>
-            <a:ext cx="6858000" cy="5398953"/>
-          </a:xfrm>
-          <a:prstGeom prst="rect">
-            <a:avLst/>
-          </a:prstGeom>
-          <a:ln>
-            <a:noFill/>
-          </a:ln>
-          <a:effectLst>
-            <a:outerShdw blurRad="419100" dist="152400" sx="94000" sy="94000" algn="l" rotWithShape="0">
-              <a:prstClr val="black">
-                <a:alpha val="32000"/>
-              </a:prstClr>
-            </a:outerShdw>
-          </a:effectLst>
-        </p:spPr>
-        <p:style>
-          <a:lnRef idx="2">
-            <a:schemeClr val="accent1">
-              <a:shade val="50000"/>
-            </a:schemeClr>
-          </a:lnRef>
-          <a:fillRef idx="1">
-            <a:schemeClr val="accent1"/>
-          </a:fillRef>
-          <a:effectRef idx="0">
-            <a:schemeClr val="accent1"/>
-          </a:effectRef>
-          <a:fontRef idx="minor">
-            <a:schemeClr val="lt1"/>
-          </a:fontRef>
-        </p:style>
-        <p:txBody>
-          <a:bodyPr rtlCol="0" anchor="ctr"/>
-          <a:lstStyle/>
-          <a:p>
-            <a:pPr algn="ctr"/>
-            <a:endParaRPr lang="en-US"/>
-          </a:p>
-        </p:txBody>
-      </p:sp>
-      <p:sp>
-        <p:nvSpPr>
-          <p:cNvPr id="2" name="Title 1">
-            <a:extLst>
-              <a:ext uri="{FF2B5EF4-FFF2-40B4-BE49-F238E27FC236}">
-                <a16:creationId xmlns:a16="http://schemas.microsoft.com/office/drawing/2014/main" id="{CD915B90-DA12-5311-A694-71F1513664CE}"/>
-              </a:ext>
-            </a:extLst>
-          </p:cNvPr>
-          <p:cNvSpPr>
-            <a:spLocks noGrp="1"/>
-          </p:cNvSpPr>
-          <p:nvPr>
-            <p:ph type="title"/>
-          </p:nvPr>
-        </p:nvSpPr>
-        <p:spPr>
-          <a:xfrm>
-            <a:off x="758952" y="785366"/>
-            <a:ext cx="4069055" cy="2072853"/>
-          </a:xfrm>
-        </p:spPr>
-        <p:txBody>
-          <a:bodyPr anchor="t">
-            <a:normAutofit/>
-          </a:bodyPr>
-          <a:lstStyle/>
-          <a:p>
-            <a:r>
-              <a:rPr lang="en-US" sz="4000" dirty="0"/>
-              <a:t>What You Should Know</a:t>
-            </a:r>
-          </a:p>
-        </p:txBody>
-      </p:sp>
-      <p:pic>
-        <p:nvPicPr>
-          <p:cNvPr id="4" name="Picture 3">
-            <a:extLst>
-              <a:ext uri="{FF2B5EF4-FFF2-40B4-BE49-F238E27FC236}">
-                <a16:creationId xmlns:a16="http://schemas.microsoft.com/office/drawing/2014/main" id="{C0016F98-4E8E-CBB1-A610-58AFEB8B6E7F}"/>
-              </a:ext>
-              <a:ext uri="{C183D7F6-B498-43B3-948B-1728B52AA6E4}">
-                <adec:decorative xmlns:adec="http://schemas.microsoft.com/office/drawing/2017/decorative" val="1"/>
-              </a:ext>
-            </a:extLst>
-          </p:cNvPr>
-          <p:cNvPicPr>
-            <a:picLocks noChangeAspect="1" noChangeArrowheads="1"/>
-          </p:cNvPicPr>
-          <p:nvPr/>
-        </p:nvPicPr>
-        <p:blipFill rotWithShape="1">
-          <a:blip r:embed="rId2">
-            <a:extLst>
-              <a:ext uri="{28A0092B-C50C-407E-A947-70E740481C1C}">
-                <a14:useLocalDpi xmlns:a14="http://schemas.microsoft.com/office/drawing/2010/main" val="0"/>
-              </a:ext>
-            </a:extLst>
-          </a:blip>
-          <a:srcRect r="1110" b="-1"/>
-          <a:stretch>
-            <a:fillRect/>
-          </a:stretch>
-        </p:blipFill>
-        <p:spPr bwMode="auto">
-          <a:xfrm>
-            <a:off x="724708" y="3429000"/>
-            <a:ext cx="3951110" cy="2666998"/>
-          </a:xfrm>
-          <a:prstGeom prst="rect">
-            <a:avLst/>
-          </a:prstGeom>
-          <a:noFill/>
-          <a:extLst>
-            <a:ext uri="{909E8E84-426E-40DD-AFC4-6F175D3DCCD1}">
-              <a14:hiddenFill xmlns:a14="http://schemas.microsoft.com/office/drawing/2010/main">
-                <a:solidFill>
-                  <a:srgbClr val="FFFFFF"/>
-                </a:solidFill>
-              </a14:hiddenFill>
-            </a:ext>
-          </a:extLst>
-        </p:spPr>
-      </p:pic>
-      <mc:AlternateContent xmlns:mc="http://schemas.openxmlformats.org/markup-compatibility/2006" xmlns:a14="http://schemas.microsoft.com/office/drawing/2010/main">
-        <mc:Choice Requires="a14">
-          <p:sp>
-            <p:nvSpPr>
-              <p:cNvPr id="3" name="Content Placeholder 2">
-                <a:extLst>
-                  <a:ext uri="{FF2B5EF4-FFF2-40B4-BE49-F238E27FC236}">
-                    <a16:creationId xmlns:a16="http://schemas.microsoft.com/office/drawing/2014/main" id="{76BBA507-BEF2-070A-4241-AF2BA1803534}"/>
-                  </a:ext>
-                </a:extLst>
-              </p:cNvPr>
-              <p:cNvSpPr>
-                <a:spLocks noGrp="1"/>
-              </p:cNvSpPr>
-              <p:nvPr>
-                <p:ph idx="1"/>
-              </p:nvPr>
-            </p:nvSpPr>
-            <p:spPr>
-              <a:xfrm>
-                <a:off x="5788479" y="432707"/>
-                <a:ext cx="6074228" cy="5916384"/>
-              </a:xfrm>
-            </p:spPr>
-            <p:txBody>
-              <a:bodyPr anchor="ctr">
-                <a:normAutofit/>
-              </a:bodyPr>
-              <a:lstStyle/>
-              <a:p>
-                <a:r>
-                  <a:rPr lang="en-US" sz="1600" dirty="0"/>
-                  <a:t>Time difference (TD) learning is an alternative to MC for the prediction (policy evaluation) problem.</a:t>
-                </a:r>
-              </a:p>
-              <a:p>
-                <a:pPr marL="0" indent="0">
-                  <a:buNone/>
-                </a:pPr>
-                <a:endParaRPr lang="en-US" sz="1600" dirty="0"/>
-              </a:p>
-              <a:p>
-                <a:r>
-                  <a:rPr lang="en-US" sz="1600" b="1" dirty="0"/>
-                  <a:t>Method</a:t>
-                </a:r>
-                <a:r>
-                  <a:rPr lang="en-US" sz="1600" dirty="0"/>
-                  <a:t>: Stepwise reduces the TD error for the next step.</a:t>
-                </a:r>
-              </a:p>
-              <a:p>
-                <a:pPr marL="0" indent="0">
-                  <a:buNone/>
-                </a:pPr>
-                <a:endParaRPr lang="en-US" sz="1600" dirty="0"/>
-              </a:p>
-              <a:p>
-                <a:r>
-                  <a:rPr lang="en-US" sz="1600" dirty="0"/>
-                  <a:t>Popular and most widely used RL methods:</a:t>
-                </a:r>
-              </a:p>
-              <a:p>
-                <a:pPr lvl="1"/>
-                <a:r>
-                  <a:rPr lang="en-US" sz="1600" dirty="0"/>
-                  <a:t>On-policy: Sarsa</a:t>
-                </a:r>
-              </a:p>
-              <a:p>
-                <a:pPr lvl="1"/>
-                <a:r>
-                  <a:rPr lang="en-US" sz="1600" dirty="0"/>
-                  <a:t>Off-policy: Q-learning</a:t>
-                </a:r>
-              </a:p>
-              <a:p>
-                <a:r>
-                  <a:rPr lang="en-US" sz="1600" dirty="0"/>
-                  <a:t>Advantages:</a:t>
-                </a:r>
-              </a:p>
-              <a:p>
-                <a:pPr lvl="1"/>
-                <a:r>
-                  <a:rPr lang="en-US" sz="1600" dirty="0"/>
-                  <a:t>Model-free: Uses experience.</a:t>
-                </a:r>
-              </a:p>
-              <a:p>
-                <a:pPr lvl="1"/>
-                <a:r>
-                  <a:rPr lang="en-US" sz="1600" dirty="0"/>
-                  <a:t>Learn online (after each observation).</a:t>
-                </a:r>
-              </a:p>
-              <a:p>
-                <a:pPr lvl="1"/>
-                <a:r>
-                  <a:rPr lang="en-US" sz="1600" dirty="0"/>
-                  <a:t>Simple with minimal computation.</a:t>
-                </a:r>
-              </a:p>
-              <a:p>
-                <a:r>
-                  <a:rPr lang="en-US" sz="1600" dirty="0"/>
-                  <a:t>Challenges:</a:t>
-                </a:r>
-              </a:p>
-              <a:p>
-                <a:pPr lvl="1"/>
-                <a:r>
-                  <a:rPr lang="en-US" sz="1600" dirty="0"/>
-                  <a:t>Maximation bias.</a:t>
-                </a:r>
-              </a:p>
-              <a:p>
-                <a:pPr lvl="1"/>
-                <a:r>
-                  <a:rPr lang="en-US" sz="1600" dirty="0"/>
-                  <a:t>Behavior policy needs to keep exploring.</a:t>
-                </a:r>
-              </a:p>
-              <a:p>
-                <a:pPr lvl="1"/>
-                <a:r>
-                  <a:rPr lang="en-US" sz="1600" dirty="0"/>
-                  <a:t>Not very sample efficient.</a:t>
-                </a:r>
-              </a:p>
-              <a:p>
-                <a:pPr marL="0" indent="0">
-                  <a:buNone/>
-                </a:pPr>
-                <a:endParaRPr lang="en-US" sz="1600" dirty="0"/>
-              </a:p>
-              <a:p>
-                <a:r>
-                  <a:rPr lang="en-US" sz="1600" dirty="0"/>
-                  <a:t>We will extend the one-step tabular TD ideas from this chapter to </a:t>
-                </a:r>
-                <a14:m>
-                  <m:oMath xmlns:m="http://schemas.openxmlformats.org/officeDocument/2006/math">
-                    <m:r>
-                      <a:rPr lang="en-US" sz="1600" b="1" i="1">
-                        <a:latin typeface="Cambria Math" panose="02040503050406030204" pitchFamily="18" charset="0"/>
-                      </a:rPr>
-                      <m:t>𝒏</m:t>
-                    </m:r>
-                  </m:oMath>
-                </a14:m>
-                <a:r>
-                  <a:rPr lang="en-US" sz="1600" b="1" dirty="0"/>
-                  <a:t>-steps </a:t>
-                </a:r>
-                <a:r>
-                  <a:rPr lang="en-US" sz="1600" dirty="0"/>
-                  <a:t>and </a:t>
-                </a:r>
-                <a:r>
-                  <a:rPr lang="en-US" sz="1600" b="1" dirty="0"/>
-                  <a:t>function approximation</a:t>
-                </a:r>
-                <a:r>
-                  <a:rPr lang="en-US" sz="1600" dirty="0"/>
-                  <a:t>.</a:t>
-                </a:r>
-              </a:p>
-            </p:txBody>
-          </p:sp>
-        </mc:Choice>
-        <mc:Fallback xmlns="">
-          <p:sp>
-            <p:nvSpPr>
-              <p:cNvPr id="3" name="Content Placeholder 2">
-                <a:extLst>
-                  <a:ext uri="{FF2B5EF4-FFF2-40B4-BE49-F238E27FC236}">
-                    <a16:creationId xmlns:a16="http://schemas.microsoft.com/office/drawing/2014/main" id="{76BBA507-BEF2-070A-4241-AF2BA1803534}"/>
-                  </a:ext>
-                </a:extLst>
-              </p:cNvPr>
-              <p:cNvSpPr>
-                <a:spLocks noGrp="1" noRot="1" noChangeAspect="1" noMove="1" noResize="1" noEditPoints="1" noAdjustHandles="1" noChangeArrowheads="1" noChangeShapeType="1" noTextEdit="1"/>
-              </p:cNvSpPr>
-              <p:nvPr>
-                <p:ph idx="1"/>
-              </p:nvPr>
-            </p:nvSpPr>
-            <p:spPr>
-              <a:xfrm>
-                <a:off x="5788479" y="432707"/>
-                <a:ext cx="6074228" cy="5916384"/>
-              </a:xfrm>
-              <a:blipFill>
-                <a:blip r:embed="rId3"/>
-                <a:stretch>
-                  <a:fillRect l="-402" r="-803" b="-206"/>
-                </a:stretch>
-              </a:blipFill>
-            </p:spPr>
-            <p:txBody>
-              <a:bodyPr/>
-              <a:lstStyle/>
-              <a:p>
-                <a:r>
-                  <a:rPr lang="en-US">
-                    <a:noFill/>
-                  </a:rPr>
-                  <a:t> </a:t>
-                </a:r>
-              </a:p>
-            </p:txBody>
-          </p:sp>
-        </mc:Fallback>
-      </mc:AlternateContent>
-    </p:spTree>
-    <p:extLst>
-      <p:ext uri="{BB962C8B-B14F-4D97-AF65-F5344CB8AC3E}">
-        <p14:creationId xmlns:p14="http://schemas.microsoft.com/office/powerpoint/2010/main" val="954880218"/>
-      </p:ext>
-    </p:extLst>
-  </p:cSld>
-  <p:clrMapOvr>
-    <a:masterClrMapping/>
-  </p:clrMapOvr>
-</p:sld>
-</file>
-
-<file path=ppt/slides/slide3.xml><?xml version="1.0" encoding="utf-8"?>
+<file path=ppt/slides/slide4.xml><?xml version="1.0" encoding="utf-8"?>
 <p:sld xmlns:a="http://schemas.openxmlformats.org/drawingml/2006/main" xmlns:r="http://schemas.openxmlformats.org/officeDocument/2006/relationships" xmlns:p="http://schemas.openxmlformats.org/presentationml/2006/main">
   <p:cSld>
     <p:spTree>
@@ -17416,7 +19189,7 @@
 </p:sld>
 </file>
 
-<file path=ppt/slides/slide4.xml><?xml version="1.0" encoding="utf-8"?>
+<file path=ppt/slides/slide5.xml><?xml version="1.0" encoding="utf-8"?>
 <p:sld xmlns:a="http://schemas.openxmlformats.org/drawingml/2006/main" xmlns:r="http://schemas.openxmlformats.org/officeDocument/2006/relationships" xmlns:p="http://schemas.openxmlformats.org/presentationml/2006/main">
   <p:cSld>
     <p:spTree>
@@ -17502,7 +19275,7 @@
 </p:sld>
 </file>
 
-<file path=ppt/slides/slide5.xml><?xml version="1.0" encoding="utf-8"?>
+<file path=ppt/slides/slide6.xml><?xml version="1.0" encoding="utf-8"?>
 <p:sld xmlns:a="http://schemas.openxmlformats.org/drawingml/2006/main" xmlns:r="http://schemas.openxmlformats.org/officeDocument/2006/relationships" xmlns:p="http://schemas.openxmlformats.org/presentationml/2006/main">
   <p:cSld>
     <p:spTree>
@@ -18917,7 +20690,7 @@
 </p:sld>
 </file>
 
-<file path=ppt/slides/slide6.xml><?xml version="1.0" encoding="utf-8"?>
+<file path=ppt/slides/slide7.xml><?xml version="1.0" encoding="utf-8"?>
 <p:sld xmlns:a="http://schemas.openxmlformats.org/drawingml/2006/main" xmlns:r="http://schemas.openxmlformats.org/officeDocument/2006/relationships" xmlns:p="http://schemas.openxmlformats.org/presentationml/2006/main">
   <p:cSld>
     <p:spTree>
@@ -19246,7 +21019,7 @@
 </p:sld>
 </file>
 
-<file path=ppt/slides/slide7.xml><?xml version="1.0" encoding="utf-8"?>
+<file path=ppt/slides/slide8.xml><?xml version="1.0" encoding="utf-8"?>
 <p:sld xmlns:a="http://schemas.openxmlformats.org/drawingml/2006/main" xmlns:r="http://schemas.openxmlformats.org/officeDocument/2006/relationships" xmlns:p="http://schemas.openxmlformats.org/presentationml/2006/main">
   <p:cSld>
     <p:spTree>
@@ -19546,7 +21319,7 @@
 </p:sld>
 </file>
 
-<file path=ppt/slides/slide8.xml><?xml version="1.0" encoding="utf-8"?>
+<file path=ppt/slides/slide9.xml><?xml version="1.0" encoding="utf-8"?>
 <p:sld xmlns:a="http://schemas.openxmlformats.org/drawingml/2006/main" xmlns:r="http://schemas.openxmlformats.org/officeDocument/2006/relationships" xmlns:p="http://schemas.openxmlformats.org/presentationml/2006/main">
   <p:cSld>
     <p:spTree>
@@ -19630,1595 +21403,6 @@
     <p:extLst>
       <p:ext uri="{BB962C8B-B14F-4D97-AF65-F5344CB8AC3E}">
         <p14:creationId xmlns:p14="http://schemas.microsoft.com/office/powerpoint/2010/main" val="1896183527"/>
-      </p:ext>
-    </p:extLst>
-  </p:cSld>
-  <p:clrMapOvr>
-    <a:masterClrMapping/>
-  </p:clrMapOvr>
-</p:sld>
-</file>
-
-<file path=ppt/slides/slide9.xml><?xml version="1.0" encoding="utf-8"?>
-<p:sld xmlns:a="http://schemas.openxmlformats.org/drawingml/2006/main" xmlns:r="http://schemas.openxmlformats.org/officeDocument/2006/relationships" xmlns:p="http://schemas.openxmlformats.org/presentationml/2006/main">
-  <p:cSld>
-    <p:spTree>
-      <p:nvGrpSpPr>
-        <p:cNvPr id="1" name=""/>
-        <p:cNvGrpSpPr/>
-        <p:nvPr/>
-      </p:nvGrpSpPr>
-      <p:grpSpPr>
-        <a:xfrm>
-          <a:off x="0" y="0"/>
-          <a:ext cx="0" cy="0"/>
-          <a:chOff x="0" y="0"/>
-          <a:chExt cx="0" cy="0"/>
-        </a:xfrm>
-      </p:grpSpPr>
-      <p:sp>
-        <p:nvSpPr>
-          <p:cNvPr id="2" name="Title 1">
-            <a:extLst>
-              <a:ext uri="{FF2B5EF4-FFF2-40B4-BE49-F238E27FC236}">
-                <a16:creationId xmlns:a16="http://schemas.microsoft.com/office/drawing/2014/main" id="{67F17A85-AD27-D78C-6EE7-8EFC9C60F78B}"/>
-              </a:ext>
-            </a:extLst>
-          </p:cNvPr>
-          <p:cNvSpPr>
-            <a:spLocks noGrp="1"/>
-          </p:cNvSpPr>
-          <p:nvPr>
-            <p:ph type="title"/>
-          </p:nvPr>
-        </p:nvSpPr>
-        <p:spPr/>
-        <p:txBody>
-          <a:bodyPr/>
-          <a:lstStyle/>
-          <a:p>
-            <a:r>
-              <a:rPr lang="en-US" dirty="0"/>
-              <a:t>Sarsa</a:t>
-            </a:r>
-          </a:p>
-        </p:txBody>
-      </p:sp>
-      <mc:AlternateContent xmlns:mc="http://schemas.openxmlformats.org/markup-compatibility/2006" xmlns:a14="http://schemas.microsoft.com/office/drawing/2010/main">
-        <mc:Choice Requires="a14">
-          <p:sp>
-            <p:nvSpPr>
-              <p:cNvPr id="3" name="Content Placeholder 2">
-                <a:extLst>
-                  <a:ext uri="{FF2B5EF4-FFF2-40B4-BE49-F238E27FC236}">
-                    <a16:creationId xmlns:a16="http://schemas.microsoft.com/office/drawing/2014/main" id="{A1E76A2D-11FD-3349-6432-A6DAAA3C05B5}"/>
-                  </a:ext>
-                </a:extLst>
-              </p:cNvPr>
-              <p:cNvSpPr>
-                <a:spLocks noGrp="1"/>
-              </p:cNvSpPr>
-              <p:nvPr>
-                <p:ph idx="1"/>
-              </p:nvPr>
-            </p:nvSpPr>
-            <p:spPr>
-              <a:xfrm>
-                <a:off x="838200" y="1397330"/>
-                <a:ext cx="8888835" cy="4779633"/>
-              </a:xfrm>
-            </p:spPr>
-            <p:txBody>
-              <a:bodyPr>
-                <a:normAutofit fontScale="85000" lnSpcReduction="20000"/>
-              </a:bodyPr>
-              <a:lstStyle/>
-              <a:p>
-                <a:r>
-                  <a:rPr lang="en-US" b="1" dirty="0"/>
-                  <a:t>Idea</a:t>
-                </a:r>
-                <a:r>
-                  <a:rPr lang="en-US" dirty="0"/>
-                  <a:t>: Use GPI with TD prediction for policy evaluation.</a:t>
-                </a:r>
-              </a:p>
-              <a:p>
-                <a:endParaRPr lang="en-US" b="1" dirty="0"/>
-              </a:p>
-              <a:p>
-                <a:r>
-                  <a:rPr lang="en-US" b="1" dirty="0"/>
-                  <a:t>TD Evaluation</a:t>
-                </a:r>
-                <a:r>
-                  <a:rPr lang="en-US" dirty="0"/>
-                  <a:t>: Estimate </a:t>
-                </a:r>
-                <a14:m>
-                  <m:oMath xmlns:m="http://schemas.openxmlformats.org/officeDocument/2006/math">
-                    <m:sSub>
-                      <m:sSubPr>
-                        <m:ctrlPr>
-                          <a:rPr lang="en-US" b="0" i="1" smtClean="0">
-                            <a:latin typeface="Cambria Math" panose="02040503050406030204" pitchFamily="18" charset="0"/>
-                          </a:rPr>
-                        </m:ctrlPr>
-                      </m:sSubPr>
-                      <m:e>
-                        <m:r>
-                          <a:rPr lang="en-US" b="0" i="1" smtClean="0">
-                            <a:latin typeface="Cambria Math" panose="02040503050406030204" pitchFamily="18" charset="0"/>
-                          </a:rPr>
-                          <m:t>𝑞</m:t>
-                        </m:r>
-                      </m:e>
-                      <m:sub>
-                        <m:r>
-                          <a:rPr lang="en-US" b="0" i="1" smtClean="0">
-                            <a:latin typeface="Cambria Math" panose="02040503050406030204" pitchFamily="18" charset="0"/>
-                          </a:rPr>
-                          <m:t>𝜋</m:t>
-                        </m:r>
-                      </m:sub>
-                    </m:sSub>
-                    <m:r>
-                      <a:rPr lang="en-US" b="0" i="1" smtClean="0">
-                        <a:latin typeface="Cambria Math" panose="02040503050406030204" pitchFamily="18" charset="0"/>
-                      </a:rPr>
-                      <m:t>(</m:t>
-                    </m:r>
-                    <m:r>
-                      <a:rPr lang="en-US" b="0" i="1" smtClean="0">
-                        <a:latin typeface="Cambria Math" panose="02040503050406030204" pitchFamily="18" charset="0"/>
-                      </a:rPr>
-                      <m:t>𝑠</m:t>
-                    </m:r>
-                    <m:r>
-                      <a:rPr lang="en-US" b="0" i="1" smtClean="0">
-                        <a:latin typeface="Cambria Math" panose="02040503050406030204" pitchFamily="18" charset="0"/>
-                      </a:rPr>
-                      <m:t>,</m:t>
-                    </m:r>
-                    <m:r>
-                      <a:rPr lang="en-US" b="0" i="1" smtClean="0">
-                        <a:latin typeface="Cambria Math" panose="02040503050406030204" pitchFamily="18" charset="0"/>
-                      </a:rPr>
-                      <m:t>𝑎</m:t>
-                    </m:r>
-                    <m:r>
-                      <a:rPr lang="en-US" b="0" i="1" smtClean="0">
-                        <a:latin typeface="Cambria Math" panose="02040503050406030204" pitchFamily="18" charset="0"/>
-                      </a:rPr>
-                      <m:t>)</m:t>
-                    </m:r>
-                  </m:oMath>
-                </a14:m>
-                <a:r>
-                  <a:rPr lang="en-US" dirty="0"/>
-                  <a:t> using a </a:t>
-                </a:r>
-                <a14:m>
-                  <m:oMath xmlns:m="http://schemas.openxmlformats.org/officeDocument/2006/math">
-                    <m:r>
-                      <a:rPr lang="en-US" b="0" i="1" smtClean="0">
-                        <a:latin typeface="Cambria Math" panose="02040503050406030204" pitchFamily="18" charset="0"/>
-                      </a:rPr>
-                      <m:t>𝑄</m:t>
-                    </m:r>
-                  </m:oMath>
-                </a14:m>
-                <a:r>
-                  <a:rPr lang="en-US" dirty="0"/>
-                  <a:t>-table with updates:</a:t>
-                </a:r>
-              </a:p>
-              <a:p>
-                <a:endParaRPr lang="en-US" dirty="0"/>
-              </a:p>
-              <a:p>
-                <a:pPr marL="0" indent="0" algn="ctr">
-                  <a:buNone/>
-                </a:pPr>
-                <a14:m>
-                  <m:oMath xmlns:m="http://schemas.openxmlformats.org/officeDocument/2006/math">
-                    <m:r>
-                      <a:rPr lang="en-US" b="0" i="1" smtClean="0">
-                        <a:latin typeface="Cambria Math" panose="02040503050406030204" pitchFamily="18" charset="0"/>
-                      </a:rPr>
-                      <m:t>𝑄</m:t>
-                    </m:r>
-                    <m:d>
-                      <m:dPr>
-                        <m:ctrlPr>
-                          <a:rPr lang="en-US" b="0" i="1" smtClean="0">
-                            <a:latin typeface="Cambria Math" panose="02040503050406030204" pitchFamily="18" charset="0"/>
-                          </a:rPr>
-                        </m:ctrlPr>
-                      </m:dPr>
-                      <m:e>
-                        <m:sSub>
-                          <m:sSubPr>
-                            <m:ctrlPr>
-                              <a:rPr lang="en-US" b="0" i="1" smtClean="0">
-                                <a:latin typeface="Cambria Math" panose="02040503050406030204" pitchFamily="18" charset="0"/>
-                              </a:rPr>
-                            </m:ctrlPr>
-                          </m:sSubPr>
-                          <m:e>
-                            <m:r>
-                              <a:rPr lang="en-US" b="0" i="1" smtClean="0">
-                                <a:latin typeface="Cambria Math" panose="02040503050406030204" pitchFamily="18" charset="0"/>
-                              </a:rPr>
-                              <m:t>𝑆</m:t>
-                            </m:r>
-                          </m:e>
-                          <m:sub>
-                            <m:r>
-                              <a:rPr lang="en-US" b="0" i="1" smtClean="0">
-                                <a:latin typeface="Cambria Math" panose="02040503050406030204" pitchFamily="18" charset="0"/>
-                              </a:rPr>
-                              <m:t>𝑡</m:t>
-                            </m:r>
-                          </m:sub>
-                        </m:sSub>
-                        <m:r>
-                          <a:rPr lang="en-US" b="0" i="1" smtClean="0">
-                            <a:latin typeface="Cambria Math" panose="02040503050406030204" pitchFamily="18" charset="0"/>
-                          </a:rPr>
-                          <m:t>,</m:t>
-                        </m:r>
-                        <m:sSub>
-                          <m:sSubPr>
-                            <m:ctrlPr>
-                              <a:rPr lang="en-US" b="0" i="1" smtClean="0">
-                                <a:latin typeface="Cambria Math" panose="02040503050406030204" pitchFamily="18" charset="0"/>
-                              </a:rPr>
-                            </m:ctrlPr>
-                          </m:sSubPr>
-                          <m:e>
-                            <m:r>
-                              <a:rPr lang="en-US" b="0" i="1" smtClean="0">
-                                <a:latin typeface="Cambria Math" panose="02040503050406030204" pitchFamily="18" charset="0"/>
-                              </a:rPr>
-                              <m:t>𝐴</m:t>
-                            </m:r>
-                          </m:e>
-                          <m:sub>
-                            <m:r>
-                              <a:rPr lang="en-US" b="0" i="1" smtClean="0">
-                                <a:latin typeface="Cambria Math" panose="02040503050406030204" pitchFamily="18" charset="0"/>
-                              </a:rPr>
-                              <m:t>𝑡</m:t>
-                            </m:r>
-                          </m:sub>
-                        </m:sSub>
-                      </m:e>
-                    </m:d>
-                    <m:groupChr>
-                      <m:groupChrPr>
-                        <m:chr m:val="←"/>
-                        <m:pos m:val="top"/>
-                        <m:ctrlPr>
-                          <a:rPr lang="en-US" b="0" i="1" smtClean="0">
-                            <a:latin typeface="Cambria Math" panose="02040503050406030204" pitchFamily="18" charset="0"/>
-                          </a:rPr>
-                        </m:ctrlPr>
-                      </m:groupChrPr>
-                      <m:e/>
-                    </m:groupChr>
-                  </m:oMath>
-                </a14:m>
-                <a:r>
-                  <a:rPr lang="en-US" dirty="0"/>
-                  <a:t> </a:t>
-                </a:r>
-                <a14:m>
-                  <m:oMath xmlns:m="http://schemas.openxmlformats.org/officeDocument/2006/math">
-                    <m:r>
-                      <a:rPr lang="en-US" i="1">
-                        <a:latin typeface="Cambria Math" panose="02040503050406030204" pitchFamily="18" charset="0"/>
-                      </a:rPr>
-                      <m:t>𝑄</m:t>
-                    </m:r>
-                    <m:d>
-                      <m:dPr>
-                        <m:ctrlPr>
-                          <a:rPr lang="en-US" i="1">
-                            <a:latin typeface="Cambria Math" panose="02040503050406030204" pitchFamily="18" charset="0"/>
-                          </a:rPr>
-                        </m:ctrlPr>
-                      </m:dPr>
-                      <m:e>
-                        <m:sSub>
-                          <m:sSubPr>
-                            <m:ctrlPr>
-                              <a:rPr lang="en-US" i="1">
-                                <a:latin typeface="Cambria Math" panose="02040503050406030204" pitchFamily="18" charset="0"/>
-                              </a:rPr>
-                            </m:ctrlPr>
-                          </m:sSubPr>
-                          <m:e>
-                            <m:r>
-                              <a:rPr lang="en-US" i="1">
-                                <a:latin typeface="Cambria Math" panose="02040503050406030204" pitchFamily="18" charset="0"/>
-                              </a:rPr>
-                              <m:t>𝑆</m:t>
-                            </m:r>
-                          </m:e>
-                          <m:sub>
-                            <m:r>
-                              <a:rPr lang="en-US" i="1">
-                                <a:latin typeface="Cambria Math" panose="02040503050406030204" pitchFamily="18" charset="0"/>
-                              </a:rPr>
-                              <m:t>𝑡</m:t>
-                            </m:r>
-                          </m:sub>
-                        </m:sSub>
-                        <m:r>
-                          <a:rPr lang="en-US" i="1">
-                            <a:latin typeface="Cambria Math" panose="02040503050406030204" pitchFamily="18" charset="0"/>
-                          </a:rPr>
-                          <m:t>,</m:t>
-                        </m:r>
-                        <m:sSub>
-                          <m:sSubPr>
-                            <m:ctrlPr>
-                              <a:rPr lang="en-US" i="1">
-                                <a:latin typeface="Cambria Math" panose="02040503050406030204" pitchFamily="18" charset="0"/>
-                              </a:rPr>
-                            </m:ctrlPr>
-                          </m:sSubPr>
-                          <m:e>
-                            <m:r>
-                              <a:rPr lang="en-US" i="1">
-                                <a:latin typeface="Cambria Math" panose="02040503050406030204" pitchFamily="18" charset="0"/>
-                              </a:rPr>
-                              <m:t>𝐴</m:t>
-                            </m:r>
-                          </m:e>
-                          <m:sub>
-                            <m:r>
-                              <a:rPr lang="en-US" i="1">
-                                <a:latin typeface="Cambria Math" panose="02040503050406030204" pitchFamily="18" charset="0"/>
-                              </a:rPr>
-                              <m:t>𝑡</m:t>
-                            </m:r>
-                          </m:sub>
-                        </m:sSub>
-                      </m:e>
-                    </m:d>
-                    <m:r>
-                      <a:rPr lang="en-US" b="0" i="1" smtClean="0">
-                        <a:latin typeface="Cambria Math" panose="02040503050406030204" pitchFamily="18" charset="0"/>
-                      </a:rPr>
-                      <m:t>+</m:t>
-                    </m:r>
-                    <m:r>
-                      <a:rPr lang="en-US" b="0" i="1" smtClean="0">
-                        <a:latin typeface="Cambria Math" panose="02040503050406030204" pitchFamily="18" charset="0"/>
-                      </a:rPr>
-                      <m:t>𝛼</m:t>
-                    </m:r>
-                    <m:r>
-                      <a:rPr lang="en-US" b="0" i="1" smtClean="0">
-                        <a:latin typeface="Cambria Math" panose="02040503050406030204" pitchFamily="18" charset="0"/>
-                      </a:rPr>
-                      <m:t>[</m:t>
-                    </m:r>
-                    <m:sSub>
-                      <m:sSubPr>
-                        <m:ctrlPr>
-                          <a:rPr lang="en-US" b="0" i="1" smtClean="0">
-                            <a:latin typeface="Cambria Math" panose="02040503050406030204" pitchFamily="18" charset="0"/>
-                          </a:rPr>
-                        </m:ctrlPr>
-                      </m:sSubPr>
-                      <m:e>
-                        <m:r>
-                          <a:rPr lang="en-US" b="0" i="1" smtClean="0">
-                            <a:latin typeface="Cambria Math" panose="02040503050406030204" pitchFamily="18" charset="0"/>
-                          </a:rPr>
-                          <m:t>𝑅</m:t>
-                        </m:r>
-                      </m:e>
-                      <m:sub>
-                        <m:r>
-                          <a:rPr lang="en-US" b="0" i="1" smtClean="0">
-                            <a:latin typeface="Cambria Math" panose="02040503050406030204" pitchFamily="18" charset="0"/>
-                          </a:rPr>
-                          <m:t>𝑡</m:t>
-                        </m:r>
-                        <m:r>
-                          <a:rPr lang="en-US" b="0" i="1" smtClean="0">
-                            <a:latin typeface="Cambria Math" panose="02040503050406030204" pitchFamily="18" charset="0"/>
-                          </a:rPr>
-                          <m:t>+1</m:t>
-                        </m:r>
-                      </m:sub>
-                    </m:sSub>
-                    <m:r>
-                      <a:rPr lang="en-US" b="0" i="1" smtClean="0">
-                        <a:latin typeface="Cambria Math" panose="02040503050406030204" pitchFamily="18" charset="0"/>
-                      </a:rPr>
-                      <m:t>+</m:t>
-                    </m:r>
-                    <m:r>
-                      <a:rPr lang="en-US" b="0" i="1" smtClean="0">
-                        <a:latin typeface="Cambria Math" panose="02040503050406030204" pitchFamily="18" charset="0"/>
-                      </a:rPr>
-                      <m:t>𝛾</m:t>
-                    </m:r>
-                    <m:r>
-                      <a:rPr lang="en-US" i="1">
-                        <a:latin typeface="Cambria Math" panose="02040503050406030204" pitchFamily="18" charset="0"/>
-                      </a:rPr>
-                      <m:t>𝑄</m:t>
-                    </m:r>
-                    <m:d>
-                      <m:dPr>
-                        <m:ctrlPr>
-                          <a:rPr lang="en-US" i="1">
-                            <a:latin typeface="Cambria Math" panose="02040503050406030204" pitchFamily="18" charset="0"/>
-                          </a:rPr>
-                        </m:ctrlPr>
-                      </m:dPr>
-                      <m:e>
-                        <m:sSub>
-                          <m:sSubPr>
-                            <m:ctrlPr>
-                              <a:rPr lang="en-US" i="1">
-                                <a:latin typeface="Cambria Math" panose="02040503050406030204" pitchFamily="18" charset="0"/>
-                              </a:rPr>
-                            </m:ctrlPr>
-                          </m:sSubPr>
-                          <m:e>
-                            <m:r>
-                              <a:rPr lang="en-US" i="1">
-                                <a:latin typeface="Cambria Math" panose="02040503050406030204" pitchFamily="18" charset="0"/>
-                              </a:rPr>
-                              <m:t>𝑆</m:t>
-                            </m:r>
-                          </m:e>
-                          <m:sub>
-                            <m:r>
-                              <a:rPr lang="en-US" i="1">
-                                <a:latin typeface="Cambria Math" panose="02040503050406030204" pitchFamily="18" charset="0"/>
-                              </a:rPr>
-                              <m:t>𝑡</m:t>
-                            </m:r>
-                            <m:r>
-                              <a:rPr lang="en-US" b="0" i="1" smtClean="0">
-                                <a:latin typeface="Cambria Math" panose="02040503050406030204" pitchFamily="18" charset="0"/>
-                              </a:rPr>
-                              <m:t>+1</m:t>
-                            </m:r>
-                          </m:sub>
-                        </m:sSub>
-                        <m:r>
-                          <a:rPr lang="en-US" i="1">
-                            <a:latin typeface="Cambria Math" panose="02040503050406030204" pitchFamily="18" charset="0"/>
-                          </a:rPr>
-                          <m:t>,</m:t>
-                        </m:r>
-                        <m:sSub>
-                          <m:sSubPr>
-                            <m:ctrlPr>
-                              <a:rPr lang="en-US" i="1">
-                                <a:latin typeface="Cambria Math" panose="02040503050406030204" pitchFamily="18" charset="0"/>
-                              </a:rPr>
-                            </m:ctrlPr>
-                          </m:sSubPr>
-                          <m:e>
-                            <m:r>
-                              <a:rPr lang="en-US" i="1">
-                                <a:latin typeface="Cambria Math" panose="02040503050406030204" pitchFamily="18" charset="0"/>
-                              </a:rPr>
-                              <m:t>𝐴</m:t>
-                            </m:r>
-                          </m:e>
-                          <m:sub>
-                            <m:r>
-                              <a:rPr lang="en-US" i="1">
-                                <a:latin typeface="Cambria Math" panose="02040503050406030204" pitchFamily="18" charset="0"/>
-                              </a:rPr>
-                              <m:t>𝑡</m:t>
-                            </m:r>
-                            <m:r>
-                              <a:rPr lang="en-US" b="0" i="1" smtClean="0">
-                                <a:latin typeface="Cambria Math" panose="02040503050406030204" pitchFamily="18" charset="0"/>
-                              </a:rPr>
-                              <m:t>+1</m:t>
-                            </m:r>
-                          </m:sub>
-                        </m:sSub>
-                      </m:e>
-                    </m:d>
-                    <m:r>
-                      <a:rPr lang="en-US" b="0" i="1" smtClean="0">
-                        <a:latin typeface="Cambria Math" panose="02040503050406030204" pitchFamily="18" charset="0"/>
-                      </a:rPr>
-                      <m:t>−</m:t>
-                    </m:r>
-                    <m:r>
-                      <a:rPr lang="en-US" i="1">
-                        <a:latin typeface="Cambria Math" panose="02040503050406030204" pitchFamily="18" charset="0"/>
-                      </a:rPr>
-                      <m:t>𝑄</m:t>
-                    </m:r>
-                    <m:d>
-                      <m:dPr>
-                        <m:ctrlPr>
-                          <a:rPr lang="en-US" i="1">
-                            <a:latin typeface="Cambria Math" panose="02040503050406030204" pitchFamily="18" charset="0"/>
-                          </a:rPr>
-                        </m:ctrlPr>
-                      </m:dPr>
-                      <m:e>
-                        <m:sSub>
-                          <m:sSubPr>
-                            <m:ctrlPr>
-                              <a:rPr lang="en-US" i="1">
-                                <a:latin typeface="Cambria Math" panose="02040503050406030204" pitchFamily="18" charset="0"/>
-                              </a:rPr>
-                            </m:ctrlPr>
-                          </m:sSubPr>
-                          <m:e>
-                            <m:r>
-                              <a:rPr lang="en-US" i="1">
-                                <a:latin typeface="Cambria Math" panose="02040503050406030204" pitchFamily="18" charset="0"/>
-                              </a:rPr>
-                              <m:t>𝑆</m:t>
-                            </m:r>
-                          </m:e>
-                          <m:sub>
-                            <m:r>
-                              <a:rPr lang="en-US" i="1">
-                                <a:latin typeface="Cambria Math" panose="02040503050406030204" pitchFamily="18" charset="0"/>
-                              </a:rPr>
-                              <m:t>𝑡</m:t>
-                            </m:r>
-                          </m:sub>
-                        </m:sSub>
-                        <m:r>
-                          <a:rPr lang="en-US" i="1">
-                            <a:latin typeface="Cambria Math" panose="02040503050406030204" pitchFamily="18" charset="0"/>
-                          </a:rPr>
-                          <m:t>,</m:t>
-                        </m:r>
-                        <m:sSub>
-                          <m:sSubPr>
-                            <m:ctrlPr>
-                              <a:rPr lang="en-US" i="1">
-                                <a:latin typeface="Cambria Math" panose="02040503050406030204" pitchFamily="18" charset="0"/>
-                              </a:rPr>
-                            </m:ctrlPr>
-                          </m:sSubPr>
-                          <m:e>
-                            <m:r>
-                              <a:rPr lang="en-US" i="1">
-                                <a:latin typeface="Cambria Math" panose="02040503050406030204" pitchFamily="18" charset="0"/>
-                              </a:rPr>
-                              <m:t>𝐴</m:t>
-                            </m:r>
-                          </m:e>
-                          <m:sub>
-                            <m:r>
-                              <a:rPr lang="en-US" i="1">
-                                <a:latin typeface="Cambria Math" panose="02040503050406030204" pitchFamily="18" charset="0"/>
-                              </a:rPr>
-                              <m:t>𝑡</m:t>
-                            </m:r>
-                          </m:sub>
-                        </m:sSub>
-                      </m:e>
-                    </m:d>
-                    <m:r>
-                      <a:rPr lang="en-US" b="0" i="1" smtClean="0">
-                        <a:latin typeface="Cambria Math" panose="02040503050406030204" pitchFamily="18" charset="0"/>
-                      </a:rPr>
-                      <m:t>]</m:t>
-                    </m:r>
-                  </m:oMath>
-                </a14:m>
-                <a:endParaRPr lang="en-US" i="1" dirty="0">
-                  <a:latin typeface="Cambria Math" panose="02040503050406030204" pitchFamily="18" charset="0"/>
-                </a:endParaRPr>
-              </a:p>
-              <a:p>
-                <a:pPr marL="0" indent="0" algn="r">
-                  <a:buNone/>
-                </a:pPr>
-                <a14:m>
-                  <m:oMath xmlns:m="http://schemas.openxmlformats.org/officeDocument/2006/math">
-                    <m:r>
-                      <a:rPr lang="en-US" sz="2000" i="1">
-                        <a:latin typeface="Cambria Math" panose="02040503050406030204" pitchFamily="18" charset="0"/>
-                      </a:rPr>
-                      <m:t>𝑄</m:t>
-                    </m:r>
-                    <m:d>
-                      <m:dPr>
-                        <m:ctrlPr>
-                          <a:rPr lang="en-US" sz="2000" i="1">
-                            <a:latin typeface="Cambria Math" panose="02040503050406030204" pitchFamily="18" charset="0"/>
-                          </a:rPr>
-                        </m:ctrlPr>
-                      </m:dPr>
-                      <m:e>
-                        <m:sSub>
-                          <m:sSubPr>
-                            <m:ctrlPr>
-                              <a:rPr lang="en-US" sz="2000" i="1">
-                                <a:latin typeface="Cambria Math" panose="02040503050406030204" pitchFamily="18" charset="0"/>
-                              </a:rPr>
-                            </m:ctrlPr>
-                          </m:sSubPr>
-                          <m:e>
-                            <m:r>
-                              <a:rPr lang="en-US" sz="2000" i="1">
-                                <a:latin typeface="Cambria Math" panose="02040503050406030204" pitchFamily="18" charset="0"/>
-                              </a:rPr>
-                              <m:t>𝑆</m:t>
-                            </m:r>
-                          </m:e>
-                          <m:sub>
-                            <m:r>
-                              <a:rPr lang="en-US" sz="2000" i="1">
-                                <a:latin typeface="Cambria Math" panose="02040503050406030204" pitchFamily="18" charset="0"/>
-                              </a:rPr>
-                              <m:t>𝑡</m:t>
-                            </m:r>
-                            <m:r>
-                              <a:rPr lang="en-US" sz="2000" i="1">
-                                <a:latin typeface="Cambria Math" panose="02040503050406030204" pitchFamily="18" charset="0"/>
-                              </a:rPr>
-                              <m:t>+1</m:t>
-                            </m:r>
-                          </m:sub>
-                        </m:sSub>
-                        <m:r>
-                          <a:rPr lang="en-US" sz="2000" i="1">
-                            <a:latin typeface="Cambria Math" panose="02040503050406030204" pitchFamily="18" charset="0"/>
-                          </a:rPr>
-                          <m:t>,</m:t>
-                        </m:r>
-                        <m:sSub>
-                          <m:sSubPr>
-                            <m:ctrlPr>
-                              <a:rPr lang="en-US" sz="2000" i="1">
-                                <a:latin typeface="Cambria Math" panose="02040503050406030204" pitchFamily="18" charset="0"/>
-                              </a:rPr>
-                            </m:ctrlPr>
-                          </m:sSubPr>
-                          <m:e>
-                            <m:r>
-                              <a:rPr lang="en-US" sz="2000" i="1">
-                                <a:latin typeface="Cambria Math" panose="02040503050406030204" pitchFamily="18" charset="0"/>
-                              </a:rPr>
-                              <m:t>𝐴</m:t>
-                            </m:r>
-                          </m:e>
-                          <m:sub>
-                            <m:r>
-                              <a:rPr lang="en-US" sz="2000" i="1">
-                                <a:latin typeface="Cambria Math" panose="02040503050406030204" pitchFamily="18" charset="0"/>
-                              </a:rPr>
-                              <m:t>𝑡</m:t>
-                            </m:r>
-                            <m:r>
-                              <a:rPr lang="en-US" sz="2000" i="1">
-                                <a:latin typeface="Cambria Math" panose="02040503050406030204" pitchFamily="18" charset="0"/>
-                              </a:rPr>
-                              <m:t>+1</m:t>
-                            </m:r>
-                          </m:sub>
-                        </m:sSub>
-                      </m:e>
-                    </m:d>
-                  </m:oMath>
-                </a14:m>
-                <a:r>
-                  <a:rPr lang="en-US" sz="2000" dirty="0"/>
-                  <a:t> for a terminal state is defined as </a:t>
-                </a:r>
-                <a14:m>
-                  <m:oMath xmlns:m="http://schemas.openxmlformats.org/officeDocument/2006/math">
-                    <m:r>
-                      <a:rPr lang="en-US" sz="2000" i="1" dirty="0" smtClean="0">
-                        <a:latin typeface="Cambria Math" panose="02040503050406030204" pitchFamily="18" charset="0"/>
-                      </a:rPr>
-                      <m:t>0</m:t>
-                    </m:r>
-                  </m:oMath>
-                </a14:m>
-                <a:r>
-                  <a:rPr lang="en-US" sz="2000" dirty="0"/>
-                  <a:t>.</a:t>
-                </a:r>
-              </a:p>
-              <a:p>
-                <a:pPr marL="0" indent="0">
-                  <a:buNone/>
-                </a:pPr>
-                <a:endParaRPr lang="en-US" dirty="0"/>
-              </a:p>
-              <a:p>
-                <a:r>
-                  <a:rPr lang="en-US" b="1" dirty="0"/>
-                  <a:t>Improvement</a:t>
-                </a:r>
-                <a:r>
-                  <a:rPr lang="en-US" dirty="0"/>
-                  <a:t>: Leans a greedy policy based on </a:t>
-                </a:r>
-                <a14:m>
-                  <m:oMath xmlns:m="http://schemas.openxmlformats.org/officeDocument/2006/math">
-                    <m:r>
-                      <a:rPr lang="en-US" i="1" dirty="0">
-                        <a:latin typeface="Cambria Math" panose="02040503050406030204" pitchFamily="18" charset="0"/>
-                      </a:rPr>
-                      <m:t>𝑄</m:t>
-                    </m:r>
-                  </m:oMath>
-                </a14:m>
-                <a:r>
-                  <a:rPr lang="en-US" dirty="0"/>
-                  <a:t>. To keep exploring, but actions are chosen from a soft policy based on </a:t>
-                </a:r>
-                <a14:m>
-                  <m:oMath xmlns:m="http://schemas.openxmlformats.org/officeDocument/2006/math">
-                    <m:r>
-                      <a:rPr lang="en-US" i="1" dirty="0" smtClean="0">
-                        <a:latin typeface="Cambria Math" panose="02040503050406030204" pitchFamily="18" charset="0"/>
-                      </a:rPr>
-                      <m:t>𝑄</m:t>
-                    </m:r>
-                  </m:oMath>
-                </a14:m>
-                <a:r>
-                  <a:rPr lang="en-US" dirty="0"/>
-                  <a:t>.</a:t>
-                </a:r>
-                <a:br>
-                  <a:rPr lang="en-US" dirty="0"/>
-                </a:br>
-                <a:endParaRPr lang="en-US" dirty="0"/>
-              </a:p>
-              <a:p>
-                <a:r>
-                  <a:rPr lang="en-US" b="1" dirty="0"/>
-                  <a:t>Issues</a:t>
-                </a:r>
-                <a:r>
-                  <a:rPr lang="en-US" dirty="0"/>
-                  <a:t>: </a:t>
-                </a:r>
-              </a:p>
-              <a:p>
-                <a:pPr lvl="1"/>
-                <a:r>
-                  <a:rPr lang="en-US" b="1" dirty="0"/>
-                  <a:t>On-policy</a:t>
-                </a:r>
-                <a:r>
-                  <a:rPr lang="en-US" dirty="0"/>
-                  <a:t> means that it learns a soft policy and not the optimal deterministic policy!</a:t>
-                </a:r>
-              </a:p>
-              <a:p>
-                <a:pPr lvl="1"/>
-                <a:r>
-                  <a:rPr lang="en-US" dirty="0"/>
-                  <a:t>Update uses </a:t>
-                </a:r>
-                <a14:m>
-                  <m:oMath xmlns:m="http://schemas.openxmlformats.org/officeDocument/2006/math">
-                    <m:r>
-                      <a:rPr lang="en-US" b="0" i="1" smtClean="0">
-                        <a:latin typeface="Cambria Math" panose="02040503050406030204" pitchFamily="18" charset="0"/>
-                      </a:rPr>
-                      <m:t>(</m:t>
-                    </m:r>
-                    <m:sSub>
-                      <m:sSubPr>
-                        <m:ctrlPr>
-                          <a:rPr lang="en-US" b="0" i="1" smtClean="0">
-                            <a:latin typeface="Cambria Math" panose="02040503050406030204" pitchFamily="18" charset="0"/>
-                          </a:rPr>
-                        </m:ctrlPr>
-                      </m:sSubPr>
-                      <m:e>
-                        <m:r>
-                          <a:rPr lang="en-US" b="0" i="1" smtClean="0">
-                            <a:latin typeface="Cambria Math" panose="02040503050406030204" pitchFamily="18" charset="0"/>
-                          </a:rPr>
-                          <m:t>𝑆</m:t>
-                        </m:r>
-                      </m:e>
-                      <m:sub>
-                        <m:r>
-                          <a:rPr lang="en-US" b="0" i="1" smtClean="0">
-                            <a:latin typeface="Cambria Math" panose="02040503050406030204" pitchFamily="18" charset="0"/>
-                          </a:rPr>
-                          <m:t>𝑡</m:t>
-                        </m:r>
-                      </m:sub>
-                    </m:sSub>
-                    <m:r>
-                      <a:rPr lang="en-US" b="0" i="1" smtClean="0">
-                        <a:latin typeface="Cambria Math" panose="02040503050406030204" pitchFamily="18" charset="0"/>
-                      </a:rPr>
-                      <m:t>,</m:t>
-                    </m:r>
-                    <m:sSub>
-                      <m:sSubPr>
-                        <m:ctrlPr>
-                          <a:rPr lang="en-US" b="0" i="1" smtClean="0">
-                            <a:latin typeface="Cambria Math" panose="02040503050406030204" pitchFamily="18" charset="0"/>
-                          </a:rPr>
-                        </m:ctrlPr>
-                      </m:sSubPr>
-                      <m:e>
-                        <m:r>
-                          <a:rPr lang="en-US" b="0" i="1" smtClean="0">
-                            <a:latin typeface="Cambria Math" panose="02040503050406030204" pitchFamily="18" charset="0"/>
-                          </a:rPr>
-                          <m:t>𝐴</m:t>
-                        </m:r>
-                      </m:e>
-                      <m:sub>
-                        <m:r>
-                          <a:rPr lang="en-US" b="0" i="1" smtClean="0">
-                            <a:latin typeface="Cambria Math" panose="02040503050406030204" pitchFamily="18" charset="0"/>
-                          </a:rPr>
-                          <m:t>𝑡</m:t>
-                        </m:r>
-                      </m:sub>
-                    </m:sSub>
-                    <m:r>
-                      <a:rPr lang="en-US" b="0" i="1" smtClean="0">
-                        <a:latin typeface="Cambria Math" panose="02040503050406030204" pitchFamily="18" charset="0"/>
-                      </a:rPr>
-                      <m:t>,</m:t>
-                    </m:r>
-                    <m:sSub>
-                      <m:sSubPr>
-                        <m:ctrlPr>
-                          <a:rPr lang="en-US" b="0" i="1" smtClean="0">
-                            <a:latin typeface="Cambria Math" panose="02040503050406030204" pitchFamily="18" charset="0"/>
-                          </a:rPr>
-                        </m:ctrlPr>
-                      </m:sSubPr>
-                      <m:e>
-                        <m:r>
-                          <a:rPr lang="en-US" b="0" i="1" smtClean="0">
-                            <a:latin typeface="Cambria Math" panose="02040503050406030204" pitchFamily="18" charset="0"/>
-                          </a:rPr>
-                          <m:t>𝑅</m:t>
-                        </m:r>
-                      </m:e>
-                      <m:sub>
-                        <m:r>
-                          <a:rPr lang="en-US" b="0" i="1" smtClean="0">
-                            <a:latin typeface="Cambria Math" panose="02040503050406030204" pitchFamily="18" charset="0"/>
-                          </a:rPr>
-                          <m:t>𝑡</m:t>
-                        </m:r>
-                        <m:r>
-                          <a:rPr lang="en-US" b="0" i="1" smtClean="0">
-                            <a:latin typeface="Cambria Math" panose="02040503050406030204" pitchFamily="18" charset="0"/>
-                          </a:rPr>
-                          <m:t>+1</m:t>
-                        </m:r>
-                      </m:sub>
-                    </m:sSub>
-                    <m:r>
-                      <a:rPr lang="en-US" b="0" i="1" smtClean="0">
-                        <a:latin typeface="Cambria Math" panose="02040503050406030204" pitchFamily="18" charset="0"/>
-                      </a:rPr>
-                      <m:t>,</m:t>
-                    </m:r>
-                    <m:sSub>
-                      <m:sSubPr>
-                        <m:ctrlPr>
-                          <a:rPr lang="en-US" b="0" i="1" smtClean="0">
-                            <a:latin typeface="Cambria Math" panose="02040503050406030204" pitchFamily="18" charset="0"/>
-                          </a:rPr>
-                        </m:ctrlPr>
-                      </m:sSubPr>
-                      <m:e>
-                        <m:r>
-                          <a:rPr lang="en-US" b="0" i="1" smtClean="0">
-                            <a:latin typeface="Cambria Math" panose="02040503050406030204" pitchFamily="18" charset="0"/>
-                          </a:rPr>
-                          <m:t>𝑆</m:t>
-                        </m:r>
-                      </m:e>
-                      <m:sub>
-                        <m:r>
-                          <a:rPr lang="en-US" b="0" i="1" smtClean="0">
-                            <a:latin typeface="Cambria Math" panose="02040503050406030204" pitchFamily="18" charset="0"/>
-                          </a:rPr>
-                          <m:t>𝑡</m:t>
-                        </m:r>
-                        <m:r>
-                          <a:rPr lang="en-US" b="0" i="1" smtClean="0">
-                            <a:latin typeface="Cambria Math" panose="02040503050406030204" pitchFamily="18" charset="0"/>
-                          </a:rPr>
-                          <m:t>+1</m:t>
-                        </m:r>
-                      </m:sub>
-                    </m:sSub>
-                    <m:r>
-                      <a:rPr lang="en-US" b="0" i="1" smtClean="0">
-                        <a:latin typeface="Cambria Math" panose="02040503050406030204" pitchFamily="18" charset="0"/>
-                      </a:rPr>
-                      <m:t>, </m:t>
-                    </m:r>
-                    <m:sSub>
-                      <m:sSubPr>
-                        <m:ctrlPr>
-                          <a:rPr lang="en-US" b="0" i="1" smtClean="0">
-                            <a:latin typeface="Cambria Math" panose="02040503050406030204" pitchFamily="18" charset="0"/>
-                          </a:rPr>
-                        </m:ctrlPr>
-                      </m:sSubPr>
-                      <m:e>
-                        <m:r>
-                          <a:rPr lang="en-US" b="0" i="1" smtClean="0">
-                            <a:latin typeface="Cambria Math" panose="02040503050406030204" pitchFamily="18" charset="0"/>
-                          </a:rPr>
-                          <m:t>𝐴</m:t>
-                        </m:r>
-                      </m:e>
-                      <m:sub>
-                        <m:r>
-                          <a:rPr lang="en-US" b="0" i="1" smtClean="0">
-                            <a:latin typeface="Cambria Math" panose="02040503050406030204" pitchFamily="18" charset="0"/>
-                          </a:rPr>
-                          <m:t>𝑡</m:t>
-                        </m:r>
-                        <m:r>
-                          <a:rPr lang="en-US" b="0" i="1" smtClean="0">
-                            <a:latin typeface="Cambria Math" panose="02040503050406030204" pitchFamily="18" charset="0"/>
-                          </a:rPr>
-                          <m:t>+1</m:t>
-                        </m:r>
-                      </m:sub>
-                    </m:sSub>
-                    <m:r>
-                      <a:rPr lang="en-US" b="0" i="1" smtClean="0">
-                        <a:latin typeface="Cambria Math" panose="02040503050406030204" pitchFamily="18" charset="0"/>
-                      </a:rPr>
-                      <m:t>)</m:t>
-                    </m:r>
-                  </m:oMath>
-                </a14:m>
-                <a:r>
-                  <a:rPr lang="en-US" dirty="0"/>
-                  <a:t> which leads to the name </a:t>
-                </a:r>
-                <a:r>
-                  <a:rPr lang="en-US" b="1" dirty="0"/>
-                  <a:t>Sarsa.</a:t>
-                </a:r>
-              </a:p>
-            </p:txBody>
-          </p:sp>
-        </mc:Choice>
-        <mc:Fallback xmlns="">
-          <p:sp>
-            <p:nvSpPr>
-              <p:cNvPr id="3" name="Content Placeholder 2">
-                <a:extLst>
-                  <a:ext uri="{FF2B5EF4-FFF2-40B4-BE49-F238E27FC236}">
-                    <a16:creationId xmlns:a16="http://schemas.microsoft.com/office/drawing/2014/main" id="{A1E76A2D-11FD-3349-6432-A6DAAA3C05B5}"/>
-                  </a:ext>
-                </a:extLst>
-              </p:cNvPr>
-              <p:cNvSpPr>
-                <a:spLocks noGrp="1" noRot="1" noChangeAspect="1" noMove="1" noResize="1" noEditPoints="1" noAdjustHandles="1" noChangeArrowheads="1" noChangeShapeType="1" noTextEdit="1"/>
-              </p:cNvSpPr>
-              <p:nvPr>
-                <p:ph idx="1"/>
-              </p:nvPr>
-            </p:nvSpPr>
-            <p:spPr>
-              <a:xfrm>
-                <a:off x="838200" y="1397330"/>
-                <a:ext cx="8888835" cy="4779633"/>
-              </a:xfrm>
-              <a:blipFill>
-                <a:blip r:embed="rId2"/>
-                <a:stretch>
-                  <a:fillRect l="-960" t="-2806" r="-412" b="-765"/>
-                </a:stretch>
-              </a:blipFill>
-            </p:spPr>
-            <p:txBody>
-              <a:bodyPr/>
-              <a:lstStyle/>
-              <a:p>
-                <a:r>
-                  <a:rPr lang="en-US">
-                    <a:noFill/>
-                  </a:rPr>
-                  <a:t> </a:t>
-                </a:r>
-              </a:p>
-            </p:txBody>
-          </p:sp>
-        </mc:Fallback>
-      </mc:AlternateContent>
-      <p:grpSp>
-        <p:nvGrpSpPr>
-          <p:cNvPr id="9" name="Group 8">
-            <a:extLst>
-              <a:ext uri="{FF2B5EF4-FFF2-40B4-BE49-F238E27FC236}">
-                <a16:creationId xmlns:a16="http://schemas.microsoft.com/office/drawing/2014/main" id="{81F00B50-A0E2-9E3B-7B98-93FC2A8B8005}"/>
-              </a:ext>
-            </a:extLst>
-          </p:cNvPr>
-          <p:cNvGrpSpPr/>
-          <p:nvPr/>
-        </p:nvGrpSpPr>
-        <p:grpSpPr>
-          <a:xfrm>
-            <a:off x="9576769" y="166945"/>
-            <a:ext cx="2310430" cy="2149756"/>
-            <a:chOff x="9576769" y="166945"/>
-            <a:chExt cx="2310430" cy="2149756"/>
-          </a:xfrm>
-        </p:grpSpPr>
-        <p:grpSp>
-          <p:nvGrpSpPr>
-            <p:cNvPr id="4" name="Group 3">
-              <a:extLst>
-                <a:ext uri="{FF2B5EF4-FFF2-40B4-BE49-F238E27FC236}">
-                  <a16:creationId xmlns:a16="http://schemas.microsoft.com/office/drawing/2014/main" id="{834ACF09-360E-2E24-9C97-07D69E85A4F4}"/>
-                </a:ext>
-              </a:extLst>
-            </p:cNvPr>
-            <p:cNvGrpSpPr/>
-            <p:nvPr/>
-          </p:nvGrpSpPr>
-          <p:grpSpPr>
-            <a:xfrm>
-              <a:off x="9576769" y="204828"/>
-              <a:ext cx="2310430" cy="2111873"/>
-              <a:chOff x="8990601" y="218543"/>
-              <a:chExt cx="3001301" cy="2828670"/>
-            </a:xfrm>
-          </p:grpSpPr>
-          <p:pic>
-            <p:nvPicPr>
-              <p:cNvPr id="5" name="Content Placeholder 4">
-                <a:extLst>
-                  <a:ext uri="{FF2B5EF4-FFF2-40B4-BE49-F238E27FC236}">
-                    <a16:creationId xmlns:a16="http://schemas.microsoft.com/office/drawing/2014/main" id="{14459B7C-6F39-0B15-A90A-5AC1F819BC03}"/>
-                  </a:ext>
-                </a:extLst>
-              </p:cNvPr>
-              <p:cNvPicPr>
-                <a:picLocks noChangeAspect="1"/>
-              </p:cNvPicPr>
-              <p:nvPr/>
-            </p:nvPicPr>
-            <p:blipFill>
-              <a:blip r:embed="rId3"/>
-              <a:stretch>
-                <a:fillRect/>
-              </a:stretch>
-            </p:blipFill>
-            <p:spPr>
-              <a:xfrm>
-                <a:off x="8990601" y="218543"/>
-                <a:ext cx="2936007" cy="2828670"/>
-              </a:xfrm>
-              <a:prstGeom prst="rect">
-                <a:avLst/>
-              </a:prstGeom>
-            </p:spPr>
-          </p:pic>
-          <p:sp>
-            <p:nvSpPr>
-              <p:cNvPr id="6" name="TextBox 5">
-                <a:extLst>
-                  <a:ext uri="{FF2B5EF4-FFF2-40B4-BE49-F238E27FC236}">
-                    <a16:creationId xmlns:a16="http://schemas.microsoft.com/office/drawing/2014/main" id="{915FDFB7-32DA-E7BC-97BA-735B16C98EB2}"/>
-                  </a:ext>
-                </a:extLst>
-              </p:cNvPr>
-              <p:cNvSpPr txBox="1"/>
-              <p:nvPr/>
-            </p:nvSpPr>
-            <p:spPr>
-              <a:xfrm>
-                <a:off x="10107262" y="1309193"/>
-                <a:ext cx="687748" cy="453464"/>
-              </a:xfrm>
-              <a:prstGeom prst="rect">
-                <a:avLst/>
-              </a:prstGeom>
-            </p:spPr>
-            <p:style>
-              <a:lnRef idx="3">
-                <a:schemeClr val="lt1"/>
-              </a:lnRef>
-              <a:fillRef idx="1">
-                <a:schemeClr val="accent2"/>
-              </a:fillRef>
-              <a:effectRef idx="1">
-                <a:schemeClr val="accent2"/>
-              </a:effectRef>
-              <a:fontRef idx="minor">
-                <a:schemeClr val="lt1"/>
-              </a:fontRef>
-            </p:style>
-            <p:txBody>
-              <a:bodyPr wrap="square" rtlCol="0">
-                <a:spAutoFit/>
-              </a:bodyPr>
-              <a:lstStyle/>
-              <a:p>
-                <a:pPr algn="ctr"/>
-                <a:r>
-                  <a:rPr lang="en-US" sz="1600" dirty="0"/>
-                  <a:t>GPI</a:t>
-                </a:r>
-              </a:p>
-            </p:txBody>
-          </p:sp>
-          <p:sp>
-            <p:nvSpPr>
-              <p:cNvPr id="7" name="Rectangle 6">
-                <a:extLst>
-                  <a:ext uri="{FF2B5EF4-FFF2-40B4-BE49-F238E27FC236}">
-                    <a16:creationId xmlns:a16="http://schemas.microsoft.com/office/drawing/2014/main" id="{54C9C71F-1C03-4588-F4B8-107859426DCC}"/>
-                  </a:ext>
-                </a:extLst>
-              </p:cNvPr>
-              <p:cNvSpPr/>
-              <p:nvPr/>
-            </p:nvSpPr>
-            <p:spPr>
-              <a:xfrm>
-                <a:off x="8990601" y="218543"/>
-                <a:ext cx="3001301" cy="2727081"/>
-              </a:xfrm>
-              <a:prstGeom prst="rect">
-                <a:avLst/>
-              </a:prstGeom>
-              <a:noFill/>
-              <a:ln w="28575" cap="flat" cmpd="sng" algn="ctr">
-                <a:solidFill>
-                  <a:schemeClr val="accent2"/>
-                </a:solidFill>
-                <a:prstDash val="solid"/>
-                <a:round/>
-                <a:headEnd type="none" w="med" len="med"/>
-                <a:tailEnd type="none" w="med" len="med"/>
-              </a:ln>
-            </p:spPr>
-            <p:style>
-              <a:lnRef idx="0">
-                <a:scrgbClr r="0" g="0" b="0"/>
-              </a:lnRef>
-              <a:fillRef idx="0">
-                <a:scrgbClr r="0" g="0" b="0"/>
-              </a:fillRef>
-              <a:effectRef idx="0">
-                <a:scrgbClr r="0" g="0" b="0"/>
-              </a:effectRef>
-              <a:fontRef idx="minor">
-                <a:schemeClr val="accent2"/>
-              </a:fontRef>
-            </p:style>
-            <p:txBody>
-              <a:bodyPr rtlCol="0" anchor="ctr"/>
-              <a:lstStyle/>
-              <a:p>
-                <a:pPr algn="ctr"/>
-                <a:endParaRPr lang="en-US"/>
-              </a:p>
-            </p:txBody>
-          </p:sp>
-        </p:grpSp>
-        <p:sp>
-          <p:nvSpPr>
-            <p:cNvPr id="8" name="TextBox 7">
-              <a:extLst>
-                <a:ext uri="{FF2B5EF4-FFF2-40B4-BE49-F238E27FC236}">
-                  <a16:creationId xmlns:a16="http://schemas.microsoft.com/office/drawing/2014/main" id="{2BC74A6F-1E51-0870-42BE-148CFD641243}"/>
-                </a:ext>
-              </a:extLst>
-            </p:cNvPr>
-            <p:cNvSpPr txBox="1"/>
-            <p:nvPr/>
-          </p:nvSpPr>
-          <p:spPr>
-            <a:xfrm>
-              <a:off x="9777369" y="166945"/>
-              <a:ext cx="494950" cy="369332"/>
-            </a:xfrm>
-            <a:prstGeom prst="rect">
-              <a:avLst/>
-            </a:prstGeom>
-            <a:noFill/>
-          </p:spPr>
-          <p:txBody>
-            <a:bodyPr wrap="square" rtlCol="0">
-              <a:spAutoFit/>
-            </a:bodyPr>
-            <a:lstStyle/>
-            <a:p>
-              <a:r>
-                <a:rPr lang="en-US" b="1" dirty="0">
-                  <a:solidFill>
-                    <a:schemeClr val="accent3"/>
-                  </a:solidFill>
-                </a:rPr>
-                <a:t>TD</a:t>
-              </a:r>
-            </a:p>
-          </p:txBody>
-        </p:sp>
-      </p:grpSp>
-      <mc:AlternateContent xmlns:mc="http://schemas.openxmlformats.org/markup-compatibility/2006" xmlns:a14="http://schemas.microsoft.com/office/drawing/2010/main">
-        <mc:Choice Requires="a14">
-          <p:sp>
-            <p:nvSpPr>
-              <p:cNvPr id="10" name="TextBox 9">
-                <a:extLst>
-                  <a:ext uri="{FF2B5EF4-FFF2-40B4-BE49-F238E27FC236}">
-                    <a16:creationId xmlns:a16="http://schemas.microsoft.com/office/drawing/2014/main" id="{A11396C4-8FFA-4AAF-B2FC-EF4174161DA8}"/>
-                  </a:ext>
-                </a:extLst>
-              </p:cNvPr>
-              <p:cNvSpPr txBox="1"/>
-              <p:nvPr/>
-            </p:nvSpPr>
-            <p:spPr>
-              <a:xfrm>
-                <a:off x="9758861" y="804757"/>
-                <a:ext cx="973123" cy="276999"/>
-              </a:xfrm>
-              <a:prstGeom prst="rect">
-                <a:avLst/>
-              </a:prstGeom>
-              <a:noFill/>
-            </p:spPr>
-            <p:txBody>
-              <a:bodyPr wrap="square" rtlCol="0">
-                <a:spAutoFit/>
-              </a:bodyPr>
-              <a:lstStyle/>
-              <a:p>
-                <a:pPr/>
-                <a14:m>
-                  <m:oMathPara xmlns:m="http://schemas.openxmlformats.org/officeDocument/2006/math">
-                    <m:oMathParaPr>
-                      <m:jc m:val="centerGroup"/>
-                    </m:oMathParaPr>
-                    <m:oMath xmlns:m="http://schemas.openxmlformats.org/officeDocument/2006/math">
-                      <m:r>
-                        <a:rPr lang="en-US" sz="1200" b="0" i="1" smtClean="0">
-                          <a:solidFill>
-                            <a:schemeClr val="accent3"/>
-                          </a:solidFill>
-                          <a:latin typeface="Cambria Math" panose="02040503050406030204" pitchFamily="18" charset="0"/>
-                        </a:rPr>
-                        <m:t>𝑎</m:t>
-                      </m:r>
-                      <m:r>
-                        <a:rPr lang="en-US" sz="1200" b="0" i="1" smtClean="0">
-                          <a:solidFill>
-                            <a:schemeClr val="accent3"/>
-                          </a:solidFill>
-                          <a:latin typeface="Cambria Math" panose="02040503050406030204" pitchFamily="18" charset="0"/>
-                        </a:rPr>
-                        <m:t>~</m:t>
-                      </m:r>
-                      <m:r>
-                        <m:rPr>
-                          <m:nor/>
-                        </m:rPr>
-                        <a:rPr lang="en-US" sz="1200" b="0" i="0" smtClean="0">
-                          <a:solidFill>
-                            <a:schemeClr val="accent3"/>
-                          </a:solidFill>
-                          <a:latin typeface="Cambria Math" panose="02040503050406030204" pitchFamily="18" charset="0"/>
-                        </a:rPr>
-                        <m:t>soft</m:t>
-                      </m:r>
-                      <m:r>
-                        <a:rPr lang="en-US" sz="1200" b="0" i="1" smtClean="0">
-                          <a:solidFill>
-                            <a:schemeClr val="accent3"/>
-                          </a:solidFill>
-                          <a:latin typeface="Cambria Math" panose="02040503050406030204" pitchFamily="18" charset="0"/>
-                        </a:rPr>
-                        <m:t>(</m:t>
-                      </m:r>
-                      <m:r>
-                        <a:rPr lang="en-US" sz="1200" b="0" i="1" smtClean="0">
-                          <a:solidFill>
-                            <a:schemeClr val="accent3"/>
-                          </a:solidFill>
-                          <a:latin typeface="Cambria Math" panose="02040503050406030204" pitchFamily="18" charset="0"/>
-                        </a:rPr>
-                        <m:t>𝜋</m:t>
-                      </m:r>
-                      <m:r>
-                        <a:rPr lang="en-US" sz="1200" b="0" i="1" smtClean="0">
-                          <a:solidFill>
-                            <a:schemeClr val="accent3"/>
-                          </a:solidFill>
-                          <a:latin typeface="Cambria Math" panose="02040503050406030204" pitchFamily="18" charset="0"/>
-                        </a:rPr>
-                        <m:t>)</m:t>
-                      </m:r>
-                    </m:oMath>
-                  </m:oMathPara>
-                </a14:m>
-                <a:endParaRPr lang="en-US" sz="1200" dirty="0">
-                  <a:solidFill>
-                    <a:schemeClr val="accent3"/>
-                  </a:solidFill>
-                </a:endParaRPr>
-              </a:p>
-            </p:txBody>
-          </p:sp>
-        </mc:Choice>
-        <mc:Fallback xmlns="">
-          <p:sp>
-            <p:nvSpPr>
-              <p:cNvPr id="10" name="TextBox 9">
-                <a:extLst>
-                  <a:ext uri="{FF2B5EF4-FFF2-40B4-BE49-F238E27FC236}">
-                    <a16:creationId xmlns:a16="http://schemas.microsoft.com/office/drawing/2014/main" id="{A11396C4-8FFA-4AAF-B2FC-EF4174161DA8}"/>
-                  </a:ext>
-                </a:extLst>
-              </p:cNvPr>
-              <p:cNvSpPr txBox="1">
-                <a:spLocks noRot="1" noChangeAspect="1" noMove="1" noResize="1" noEditPoints="1" noAdjustHandles="1" noChangeArrowheads="1" noChangeShapeType="1" noTextEdit="1"/>
-              </p:cNvSpPr>
-              <p:nvPr/>
-            </p:nvSpPr>
-            <p:spPr>
-              <a:xfrm>
-                <a:off x="9758861" y="804757"/>
-                <a:ext cx="973123" cy="276999"/>
-              </a:xfrm>
-              <a:prstGeom prst="rect">
-                <a:avLst/>
-              </a:prstGeom>
-              <a:blipFill>
-                <a:blip r:embed="rId4"/>
-                <a:stretch>
-                  <a:fillRect b="-8889"/>
-                </a:stretch>
-              </a:blipFill>
-            </p:spPr>
-            <p:txBody>
-              <a:bodyPr/>
-              <a:lstStyle/>
-              <a:p>
-                <a:r>
-                  <a:rPr lang="en-US">
-                    <a:noFill/>
-                  </a:rPr>
-                  <a:t> </a:t>
-                </a:r>
-              </a:p>
-            </p:txBody>
-          </p:sp>
-        </mc:Fallback>
-      </mc:AlternateContent>
-      <mc:AlternateContent xmlns:mc="http://schemas.openxmlformats.org/markup-compatibility/2006" xmlns:a14="http://schemas.microsoft.com/office/drawing/2010/main">
-        <mc:Choice Requires="a14">
-          <p:sp>
-            <p:nvSpPr>
-              <p:cNvPr id="12" name="TextBox 11">
-                <a:extLst>
-                  <a:ext uri="{FF2B5EF4-FFF2-40B4-BE49-F238E27FC236}">
-                    <a16:creationId xmlns:a16="http://schemas.microsoft.com/office/drawing/2014/main" id="{5B04E290-C7A8-249A-84EF-A94577E33ECB}"/>
-                  </a:ext>
-                </a:extLst>
-              </p:cNvPr>
-              <p:cNvSpPr txBox="1"/>
-              <p:nvPr/>
-            </p:nvSpPr>
-            <p:spPr>
-              <a:xfrm>
-                <a:off x="10566073" y="602266"/>
-                <a:ext cx="601468" cy="479490"/>
-              </a:xfrm>
-              <a:prstGeom prst="rect">
-                <a:avLst/>
-              </a:prstGeom>
-              <a:noFill/>
-            </p:spPr>
-            <p:txBody>
-              <a:bodyPr wrap="square">
-                <a:spAutoFit/>
-              </a:bodyPr>
-              <a:lstStyle/>
-              <a:p>
-                <a:pPr/>
-                <a14:m>
-                  <m:oMathPara xmlns:m="http://schemas.openxmlformats.org/officeDocument/2006/math">
-                    <m:oMathParaPr>
-                      <m:jc m:val="centerGroup"/>
-                    </m:oMathParaPr>
-                    <m:oMath xmlns:m="http://schemas.openxmlformats.org/officeDocument/2006/math">
-                      <m:sSub>
-                        <m:sSubPr>
-                          <m:ctrlPr>
-                            <a:rPr lang="en-US" sz="1200" b="0" i="1" smtClean="0">
-                              <a:solidFill>
-                                <a:schemeClr val="accent3"/>
-                              </a:solidFill>
-                              <a:latin typeface="Cambria Math" panose="02040503050406030204" pitchFamily="18" charset="0"/>
-                            </a:rPr>
-                          </m:ctrlPr>
-                        </m:sSubPr>
-                        <m:e>
-                          <m:r>
-                            <a:rPr lang="en-US" sz="1200" b="0" i="1" smtClean="0">
-                              <a:solidFill>
-                                <a:schemeClr val="accent3"/>
-                              </a:solidFill>
-                              <a:latin typeface="Cambria Math" panose="02040503050406030204" pitchFamily="18" charset="0"/>
-                            </a:rPr>
-                            <m:t>𝑞</m:t>
-                          </m:r>
-                        </m:e>
-                        <m:sub>
-                          <m:r>
-                            <a:rPr lang="en-US" sz="1200" b="0" i="1" smtClean="0">
-                              <a:solidFill>
-                                <a:schemeClr val="accent3"/>
-                              </a:solidFill>
-                              <a:latin typeface="Cambria Math" panose="02040503050406030204" pitchFamily="18" charset="0"/>
-                            </a:rPr>
-                            <m:t>𝑠𝑜𝑓𝑡</m:t>
-                          </m:r>
-                          <m:r>
-                            <a:rPr lang="en-US" sz="1200" b="0" i="1" smtClean="0">
-                              <a:solidFill>
-                                <a:schemeClr val="accent3"/>
-                              </a:solidFill>
-                              <a:latin typeface="Cambria Math" panose="02040503050406030204" pitchFamily="18" charset="0"/>
-                            </a:rPr>
-                            <m:t>(</m:t>
-                          </m:r>
-                          <m:r>
-                            <a:rPr lang="en-US" sz="1200" b="0" i="1" smtClean="0">
-                              <a:solidFill>
-                                <a:schemeClr val="accent3"/>
-                              </a:solidFill>
-                              <a:latin typeface="Cambria Math" panose="02040503050406030204" pitchFamily="18" charset="0"/>
-                            </a:rPr>
-                            <m:t>𝜋</m:t>
-                          </m:r>
-                          <m:r>
-                            <a:rPr lang="en-US" sz="1200" b="0" i="1" smtClean="0">
-                              <a:solidFill>
-                                <a:schemeClr val="accent3"/>
-                              </a:solidFill>
-                              <a:latin typeface="Cambria Math" panose="02040503050406030204" pitchFamily="18" charset="0"/>
-                            </a:rPr>
-                            <m:t>)</m:t>
-                          </m:r>
-                        </m:sub>
-                      </m:sSub>
-                    </m:oMath>
-                  </m:oMathPara>
-                </a14:m>
-                <a:endParaRPr lang="en-US" sz="1200" b="0" dirty="0">
-                  <a:solidFill>
-                    <a:schemeClr val="accent3"/>
-                  </a:solidFill>
-                </a:endParaRPr>
-              </a:p>
-              <a:p>
-                <a:endParaRPr lang="en-US" sz="1200" dirty="0"/>
-              </a:p>
-            </p:txBody>
-          </p:sp>
-        </mc:Choice>
-        <mc:Fallback xmlns="">
-          <p:sp>
-            <p:nvSpPr>
-              <p:cNvPr id="12" name="TextBox 11">
-                <a:extLst>
-                  <a:ext uri="{FF2B5EF4-FFF2-40B4-BE49-F238E27FC236}">
-                    <a16:creationId xmlns:a16="http://schemas.microsoft.com/office/drawing/2014/main" id="{5B04E290-C7A8-249A-84EF-A94577E33ECB}"/>
-                  </a:ext>
-                </a:extLst>
-              </p:cNvPr>
-              <p:cNvSpPr txBox="1">
-                <a:spLocks noRot="1" noChangeAspect="1" noMove="1" noResize="1" noEditPoints="1" noAdjustHandles="1" noChangeArrowheads="1" noChangeShapeType="1" noTextEdit="1"/>
-              </p:cNvSpPr>
-              <p:nvPr/>
-            </p:nvSpPr>
-            <p:spPr>
-              <a:xfrm>
-                <a:off x="10566073" y="602266"/>
-                <a:ext cx="601468" cy="479490"/>
-              </a:xfrm>
-              <a:prstGeom prst="rect">
-                <a:avLst/>
-              </a:prstGeom>
-              <a:blipFill>
-                <a:blip r:embed="rId5"/>
-                <a:stretch>
-                  <a:fillRect r="-4040"/>
-                </a:stretch>
-              </a:blipFill>
-            </p:spPr>
-            <p:txBody>
-              <a:bodyPr/>
-              <a:lstStyle/>
-              <a:p>
-                <a:r>
-                  <a:rPr lang="en-US">
-                    <a:noFill/>
-                  </a:rPr>
-                  <a:t> </a:t>
-                </a:r>
-              </a:p>
-            </p:txBody>
-          </p:sp>
-        </mc:Fallback>
-      </mc:AlternateContent>
-      <p:cxnSp>
-        <p:nvCxnSpPr>
-          <p:cNvPr id="14" name="Straight Connector 13">
-            <a:extLst>
-              <a:ext uri="{FF2B5EF4-FFF2-40B4-BE49-F238E27FC236}">
-                <a16:creationId xmlns:a16="http://schemas.microsoft.com/office/drawing/2014/main" id="{84A226A4-3DFB-FDA8-464F-70254B5B0100}"/>
-              </a:ext>
-            </a:extLst>
-          </p:cNvPr>
-          <p:cNvCxnSpPr/>
-          <p:nvPr/>
-        </p:nvCxnSpPr>
-        <p:spPr>
-          <a:xfrm flipH="1">
-            <a:off x="10763079" y="619042"/>
-            <a:ext cx="173383" cy="106604"/>
-          </a:xfrm>
-          <a:prstGeom prst="line">
-            <a:avLst/>
-          </a:prstGeom>
-          <a:ln>
-            <a:solidFill>
-              <a:schemeClr val="accent3"/>
-            </a:solidFill>
-          </a:ln>
-        </p:spPr>
-        <p:style>
-          <a:lnRef idx="2">
-            <a:schemeClr val="dk1"/>
-          </a:lnRef>
-          <a:fillRef idx="0">
-            <a:schemeClr val="dk1"/>
-          </a:fillRef>
-          <a:effectRef idx="1">
-            <a:schemeClr val="dk1"/>
-          </a:effectRef>
-          <a:fontRef idx="minor">
-            <a:schemeClr val="tx1"/>
-          </a:fontRef>
-        </p:style>
-      </p:cxnSp>
-    </p:spTree>
-    <p:extLst>
-      <p:ext uri="{BB962C8B-B14F-4D97-AF65-F5344CB8AC3E}">
-        <p14:creationId xmlns:p14="http://schemas.microsoft.com/office/powerpoint/2010/main" val="3556903273"/>
       </p:ext>
     </p:extLst>
   </p:cSld>

--- a/slides/Lecture_Chapter06.pptx
+++ b/slides/Lecture_Chapter06.pptx
@@ -4,6 +4,9 @@
   <p:sldMasterIdLst>
     <p:sldMasterId id="2147483648" r:id="rId1"/>
   </p:sldMasterIdLst>
+  <p:notesMasterIdLst>
+    <p:notesMasterId r:id="rId28"/>
+  </p:notesMasterIdLst>
   <p:sldIdLst>
     <p:sldId id="256" r:id="rId2"/>
     <p:sldId id="313" r:id="rId3"/>
@@ -193,6 +196,439 @@
     </p:ext>
   </p:extLst>
 </p:presentation>
+</file>
+
+<file path=ppt/notesMasters/notesMaster1.xml><?xml version="1.0" encoding="utf-8"?>
+<p:notesMaster xmlns:a="http://schemas.openxmlformats.org/drawingml/2006/main" xmlns:r="http://schemas.openxmlformats.org/officeDocument/2006/relationships" xmlns:p="http://schemas.openxmlformats.org/presentationml/2006/main">
+  <p:cSld>
+    <p:bg>
+      <p:bgRef idx="1001">
+        <a:schemeClr val="bg1"/>
+      </p:bgRef>
+    </p:bg>
+    <p:spTree>
+      <p:nvGrpSpPr>
+        <p:cNvPr id="1" name=""/>
+        <p:cNvGrpSpPr/>
+        <p:nvPr/>
+      </p:nvGrpSpPr>
+      <p:grpSpPr>
+        <a:xfrm>
+          <a:off x="0" y="0"/>
+          <a:ext cx="0" cy="0"/>
+          <a:chOff x="0" y="0"/>
+          <a:chExt cx="0" cy="0"/>
+        </a:xfrm>
+      </p:grpSpPr>
+      <p:sp>
+        <p:nvSpPr>
+          <p:cNvPr id="2" name="Header Placeholder 1"/>
+          <p:cNvSpPr>
+            <a:spLocks noGrp="1"/>
+          </p:cNvSpPr>
+          <p:nvPr>
+            <p:ph type="hdr" sz="quarter"/>
+          </p:nvPr>
+        </p:nvSpPr>
+        <p:spPr>
+          <a:xfrm>
+            <a:off x="0" y="0"/>
+            <a:ext cx="2971800" cy="458788"/>
+          </a:xfrm>
+          <a:prstGeom prst="rect">
+            <a:avLst/>
+          </a:prstGeom>
+        </p:spPr>
+        <p:txBody>
+          <a:bodyPr vert="horz" lIns="91440" tIns="45720" rIns="91440" bIns="45720" rtlCol="0"/>
+          <a:lstStyle>
+            <a:lvl1pPr algn="l">
+              <a:defRPr sz="1200"/>
+            </a:lvl1pPr>
+          </a:lstStyle>
+          <a:p>
+            <a:endParaRPr lang="en-US"/>
+          </a:p>
+        </p:txBody>
+      </p:sp>
+      <p:sp>
+        <p:nvSpPr>
+          <p:cNvPr id="3" name="Date Placeholder 2"/>
+          <p:cNvSpPr>
+            <a:spLocks noGrp="1"/>
+          </p:cNvSpPr>
+          <p:nvPr>
+            <p:ph type="dt" idx="1"/>
+          </p:nvPr>
+        </p:nvSpPr>
+        <p:spPr>
+          <a:xfrm>
+            <a:off x="3884613" y="0"/>
+            <a:ext cx="2971800" cy="458788"/>
+          </a:xfrm>
+          <a:prstGeom prst="rect">
+            <a:avLst/>
+          </a:prstGeom>
+        </p:spPr>
+        <p:txBody>
+          <a:bodyPr vert="horz" lIns="91440" tIns="45720" rIns="91440" bIns="45720" rtlCol="0"/>
+          <a:lstStyle>
+            <a:lvl1pPr algn="r">
+              <a:defRPr sz="1200"/>
+            </a:lvl1pPr>
+          </a:lstStyle>
+          <a:p>
+            <a:fld id="{2A92B22A-BE2A-43CB-B312-FF3A0A14567B}" type="datetimeFigureOut">
+              <a:rPr lang="en-US" smtClean="0"/>
+              <a:t>2/12/2026</a:t>
+            </a:fld>
+            <a:endParaRPr lang="en-US"/>
+          </a:p>
+        </p:txBody>
+      </p:sp>
+      <p:sp>
+        <p:nvSpPr>
+          <p:cNvPr id="4" name="Slide Image Placeholder 3"/>
+          <p:cNvSpPr>
+            <a:spLocks noGrp="1" noRot="1" noChangeAspect="1"/>
+          </p:cNvSpPr>
+          <p:nvPr>
+            <p:ph type="sldImg" idx="2"/>
+          </p:nvPr>
+        </p:nvSpPr>
+        <p:spPr>
+          <a:xfrm>
+            <a:off x="685800" y="1143000"/>
+            <a:ext cx="5486400" cy="3086100"/>
+          </a:xfrm>
+          <a:prstGeom prst="rect">
+            <a:avLst/>
+          </a:prstGeom>
+          <a:noFill/>
+          <a:ln w="12700">
+            <a:solidFill>
+              <a:prstClr val="black"/>
+            </a:solidFill>
+          </a:ln>
+        </p:spPr>
+        <p:txBody>
+          <a:bodyPr vert="horz" lIns="91440" tIns="45720" rIns="91440" bIns="45720" rtlCol="0" anchor="ctr"/>
+          <a:lstStyle/>
+          <a:p>
+            <a:endParaRPr lang="en-US"/>
+          </a:p>
+        </p:txBody>
+      </p:sp>
+      <p:sp>
+        <p:nvSpPr>
+          <p:cNvPr id="5" name="Notes Placeholder 4"/>
+          <p:cNvSpPr>
+            <a:spLocks noGrp="1"/>
+          </p:cNvSpPr>
+          <p:nvPr>
+            <p:ph type="body" sz="quarter" idx="3"/>
+          </p:nvPr>
+        </p:nvSpPr>
+        <p:spPr>
+          <a:xfrm>
+            <a:off x="685800" y="4400550"/>
+            <a:ext cx="5486400" cy="3600450"/>
+          </a:xfrm>
+          <a:prstGeom prst="rect">
+            <a:avLst/>
+          </a:prstGeom>
+        </p:spPr>
+        <p:txBody>
+          <a:bodyPr vert="horz" lIns="91440" tIns="45720" rIns="91440" bIns="45720" rtlCol="0"/>
+          <a:lstStyle/>
+          <a:p>
+            <a:pPr lvl="0"/>
+            <a:r>
+              <a:rPr lang="en-US"/>
+              <a:t>Click to edit Master text styles</a:t>
+            </a:r>
+          </a:p>
+          <a:p>
+            <a:pPr lvl="1"/>
+            <a:r>
+              <a:rPr lang="en-US"/>
+              <a:t>Second level</a:t>
+            </a:r>
+          </a:p>
+          <a:p>
+            <a:pPr lvl="2"/>
+            <a:r>
+              <a:rPr lang="en-US"/>
+              <a:t>Third level</a:t>
+            </a:r>
+          </a:p>
+          <a:p>
+            <a:pPr lvl="3"/>
+            <a:r>
+              <a:rPr lang="en-US"/>
+              <a:t>Fourth level</a:t>
+            </a:r>
+          </a:p>
+          <a:p>
+            <a:pPr lvl="4"/>
+            <a:r>
+              <a:rPr lang="en-US"/>
+              <a:t>Fifth level</a:t>
+            </a:r>
+          </a:p>
+        </p:txBody>
+      </p:sp>
+      <p:sp>
+        <p:nvSpPr>
+          <p:cNvPr id="6" name="Footer Placeholder 5"/>
+          <p:cNvSpPr>
+            <a:spLocks noGrp="1"/>
+          </p:cNvSpPr>
+          <p:nvPr>
+            <p:ph type="ftr" sz="quarter" idx="4"/>
+          </p:nvPr>
+        </p:nvSpPr>
+        <p:spPr>
+          <a:xfrm>
+            <a:off x="0" y="8685213"/>
+            <a:ext cx="2971800" cy="458787"/>
+          </a:xfrm>
+          <a:prstGeom prst="rect">
+            <a:avLst/>
+          </a:prstGeom>
+        </p:spPr>
+        <p:txBody>
+          <a:bodyPr vert="horz" lIns="91440" tIns="45720" rIns="91440" bIns="45720" rtlCol="0" anchor="b"/>
+          <a:lstStyle>
+            <a:lvl1pPr algn="l">
+              <a:defRPr sz="1200"/>
+            </a:lvl1pPr>
+          </a:lstStyle>
+          <a:p>
+            <a:endParaRPr lang="en-US"/>
+          </a:p>
+        </p:txBody>
+      </p:sp>
+      <p:sp>
+        <p:nvSpPr>
+          <p:cNvPr id="7" name="Slide Number Placeholder 6"/>
+          <p:cNvSpPr>
+            <a:spLocks noGrp="1"/>
+          </p:cNvSpPr>
+          <p:nvPr>
+            <p:ph type="sldNum" sz="quarter" idx="5"/>
+          </p:nvPr>
+        </p:nvSpPr>
+        <p:spPr>
+          <a:xfrm>
+            <a:off x="3884613" y="8685213"/>
+            <a:ext cx="2971800" cy="458787"/>
+          </a:xfrm>
+          <a:prstGeom prst="rect">
+            <a:avLst/>
+          </a:prstGeom>
+        </p:spPr>
+        <p:txBody>
+          <a:bodyPr vert="horz" lIns="91440" tIns="45720" rIns="91440" bIns="45720" rtlCol="0" anchor="b"/>
+          <a:lstStyle>
+            <a:lvl1pPr algn="r">
+              <a:defRPr sz="1200"/>
+            </a:lvl1pPr>
+          </a:lstStyle>
+          <a:p>
+            <a:fld id="{16C5DAAA-78E2-4201-AA65-174BB50391A6}" type="slidenum">
+              <a:rPr lang="en-US" smtClean="0"/>
+              <a:t>‹#›</a:t>
+            </a:fld>
+            <a:endParaRPr lang="en-US"/>
+          </a:p>
+        </p:txBody>
+      </p:sp>
+    </p:spTree>
+    <p:extLst>
+      <p:ext uri="{BB962C8B-B14F-4D97-AF65-F5344CB8AC3E}">
+        <p14:creationId xmlns:p14="http://schemas.microsoft.com/office/powerpoint/2010/main" val="3324056817"/>
+      </p:ext>
+    </p:extLst>
+  </p:cSld>
+  <p:clrMap bg1="lt1" tx1="dk1" bg2="lt2" tx2="dk2" accent1="accent1" accent2="accent2" accent3="accent3" accent4="accent4" accent5="accent5" accent6="accent6" hlink="hlink" folHlink="folHlink"/>
+  <p:notesStyle>
+    <a:lvl1pPr marL="0" algn="l" defTabSz="914400" rtl="0" eaLnBrk="1" latinLnBrk="0" hangingPunct="1">
+      <a:defRPr sz="1200" kern="1200">
+        <a:solidFill>
+          <a:schemeClr val="tx1"/>
+        </a:solidFill>
+        <a:latin typeface="+mn-lt"/>
+        <a:ea typeface="+mn-ea"/>
+        <a:cs typeface="+mn-cs"/>
+      </a:defRPr>
+    </a:lvl1pPr>
+    <a:lvl2pPr marL="457200" algn="l" defTabSz="914400" rtl="0" eaLnBrk="1" latinLnBrk="0" hangingPunct="1">
+      <a:defRPr sz="1200" kern="1200">
+        <a:solidFill>
+          <a:schemeClr val="tx1"/>
+        </a:solidFill>
+        <a:latin typeface="+mn-lt"/>
+        <a:ea typeface="+mn-ea"/>
+        <a:cs typeface="+mn-cs"/>
+      </a:defRPr>
+    </a:lvl2pPr>
+    <a:lvl3pPr marL="914400" algn="l" defTabSz="914400" rtl="0" eaLnBrk="1" latinLnBrk="0" hangingPunct="1">
+      <a:defRPr sz="1200" kern="1200">
+        <a:solidFill>
+          <a:schemeClr val="tx1"/>
+        </a:solidFill>
+        <a:latin typeface="+mn-lt"/>
+        <a:ea typeface="+mn-ea"/>
+        <a:cs typeface="+mn-cs"/>
+      </a:defRPr>
+    </a:lvl3pPr>
+    <a:lvl4pPr marL="1371600" algn="l" defTabSz="914400" rtl="0" eaLnBrk="1" latinLnBrk="0" hangingPunct="1">
+      <a:defRPr sz="1200" kern="1200">
+        <a:solidFill>
+          <a:schemeClr val="tx1"/>
+        </a:solidFill>
+        <a:latin typeface="+mn-lt"/>
+        <a:ea typeface="+mn-ea"/>
+        <a:cs typeface="+mn-cs"/>
+      </a:defRPr>
+    </a:lvl4pPr>
+    <a:lvl5pPr marL="1828800" algn="l" defTabSz="914400" rtl="0" eaLnBrk="1" latinLnBrk="0" hangingPunct="1">
+      <a:defRPr sz="1200" kern="1200">
+        <a:solidFill>
+          <a:schemeClr val="tx1"/>
+        </a:solidFill>
+        <a:latin typeface="+mn-lt"/>
+        <a:ea typeface="+mn-ea"/>
+        <a:cs typeface="+mn-cs"/>
+      </a:defRPr>
+    </a:lvl5pPr>
+    <a:lvl6pPr marL="2286000" algn="l" defTabSz="914400" rtl="0" eaLnBrk="1" latinLnBrk="0" hangingPunct="1">
+      <a:defRPr sz="1200" kern="1200">
+        <a:solidFill>
+          <a:schemeClr val="tx1"/>
+        </a:solidFill>
+        <a:latin typeface="+mn-lt"/>
+        <a:ea typeface="+mn-ea"/>
+        <a:cs typeface="+mn-cs"/>
+      </a:defRPr>
+    </a:lvl6pPr>
+    <a:lvl7pPr marL="2743200" algn="l" defTabSz="914400" rtl="0" eaLnBrk="1" latinLnBrk="0" hangingPunct="1">
+      <a:defRPr sz="1200" kern="1200">
+        <a:solidFill>
+          <a:schemeClr val="tx1"/>
+        </a:solidFill>
+        <a:latin typeface="+mn-lt"/>
+        <a:ea typeface="+mn-ea"/>
+        <a:cs typeface="+mn-cs"/>
+      </a:defRPr>
+    </a:lvl7pPr>
+    <a:lvl8pPr marL="3200400" algn="l" defTabSz="914400" rtl="0" eaLnBrk="1" latinLnBrk="0" hangingPunct="1">
+      <a:defRPr sz="1200" kern="1200">
+        <a:solidFill>
+          <a:schemeClr val="tx1"/>
+        </a:solidFill>
+        <a:latin typeface="+mn-lt"/>
+        <a:ea typeface="+mn-ea"/>
+        <a:cs typeface="+mn-cs"/>
+      </a:defRPr>
+    </a:lvl8pPr>
+    <a:lvl9pPr marL="3657600" algn="l" defTabSz="914400" rtl="0" eaLnBrk="1" latinLnBrk="0" hangingPunct="1">
+      <a:defRPr sz="1200" kern="1200">
+        <a:solidFill>
+          <a:schemeClr val="tx1"/>
+        </a:solidFill>
+        <a:latin typeface="+mn-lt"/>
+        <a:ea typeface="+mn-ea"/>
+        <a:cs typeface="+mn-cs"/>
+      </a:defRPr>
+    </a:lvl9pPr>
+  </p:notesStyle>
+</p:notesMaster>
+</file>
+
+<file path=ppt/notesSlides/notesSlide1.xml><?xml version="1.0" encoding="utf-8"?>
+<p:notes xmlns:a="http://schemas.openxmlformats.org/drawingml/2006/main" xmlns:r="http://schemas.openxmlformats.org/officeDocument/2006/relationships" xmlns:p="http://schemas.openxmlformats.org/presentationml/2006/main">
+  <p:cSld>
+    <p:spTree>
+      <p:nvGrpSpPr>
+        <p:cNvPr id="1" name=""/>
+        <p:cNvGrpSpPr/>
+        <p:nvPr/>
+      </p:nvGrpSpPr>
+      <p:grpSpPr>
+        <a:xfrm>
+          <a:off x="0" y="0"/>
+          <a:ext cx="0" cy="0"/>
+          <a:chOff x="0" y="0"/>
+          <a:chExt cx="0" cy="0"/>
+        </a:xfrm>
+      </p:grpSpPr>
+      <p:sp>
+        <p:nvSpPr>
+          <p:cNvPr id="2" name="Slide Image Placeholder 1"/>
+          <p:cNvSpPr>
+            <a:spLocks noGrp="1" noRot="1" noChangeAspect="1"/>
+          </p:cNvSpPr>
+          <p:nvPr>
+            <p:ph type="sldImg"/>
+          </p:nvPr>
+        </p:nvSpPr>
+        <p:spPr/>
+      </p:sp>
+      <p:sp>
+        <p:nvSpPr>
+          <p:cNvPr id="3" name="Notes Placeholder 2"/>
+          <p:cNvSpPr>
+            <a:spLocks noGrp="1"/>
+          </p:cNvSpPr>
+          <p:nvPr>
+            <p:ph type="body" idx="1"/>
+          </p:nvPr>
+        </p:nvSpPr>
+        <p:spPr/>
+        <p:txBody>
+          <a:bodyPr/>
+          <a:lstStyle/>
+          <a:p>
+            <a:endParaRPr lang="en-US" dirty="0"/>
+          </a:p>
+        </p:txBody>
+      </p:sp>
+      <p:sp>
+        <p:nvSpPr>
+          <p:cNvPr id="4" name="Slide Number Placeholder 3"/>
+          <p:cNvSpPr>
+            <a:spLocks noGrp="1"/>
+          </p:cNvSpPr>
+          <p:nvPr>
+            <p:ph type="sldNum" sz="quarter" idx="5"/>
+          </p:nvPr>
+        </p:nvSpPr>
+        <p:spPr/>
+        <p:txBody>
+          <a:bodyPr/>
+          <a:lstStyle/>
+          <a:p>
+            <a:fld id="{16C5DAAA-78E2-4201-AA65-174BB50391A6}" type="slidenum">
+              <a:rPr lang="en-US" smtClean="0"/>
+              <a:t>5</a:t>
+            </a:fld>
+            <a:endParaRPr lang="en-US"/>
+          </a:p>
+        </p:txBody>
+      </p:sp>
+    </p:spTree>
+    <p:extLst>
+      <p:ext uri="{BB962C8B-B14F-4D97-AF65-F5344CB8AC3E}">
+        <p14:creationId xmlns:p14="http://schemas.microsoft.com/office/powerpoint/2010/main" val="1824017649"/>
+      </p:ext>
+    </p:extLst>
+  </p:cSld>
+  <p:clrMapOvr>
+    <a:masterClrMapping/>
+  </p:clrMapOvr>
+</p:notes>
 </file>
 
 <file path=ppt/slideLayouts/slideLayout1.xml><?xml version="1.0" encoding="utf-8"?>
@@ -4084,8 +4520,8 @@
           </a:p>
         </p:txBody>
       </p:sp>
-      <mc:AlternateContent xmlns:mc="http://schemas.openxmlformats.org/markup-compatibility/2006">
-        <mc:Choice xmlns:a14="http://schemas.microsoft.com/office/drawing/2010/main" Requires="a14">
+      <mc:AlternateContent xmlns:mc="http://schemas.openxmlformats.org/markup-compatibility/2006" xmlns:a14="http://schemas.microsoft.com/office/drawing/2010/main">
+        <mc:Choice Requires="a14">
           <p:sp>
             <p:nvSpPr>
               <p:cNvPr id="3" name="Content Placeholder 2">
@@ -4214,7 +4650,7 @@
             </p:txBody>
           </p:sp>
         </mc:Choice>
-        <mc:Fallback>
+        <mc:Fallback xmlns="">
           <p:sp>
             <p:nvSpPr>
               <p:cNvPr id="3" name="Content Placeholder 2">
@@ -4663,8 +5099,8 @@
           </a:p>
         </p:txBody>
       </p:sp>
-      <mc:AlternateContent xmlns:mc="http://schemas.openxmlformats.org/markup-compatibility/2006">
-        <mc:Choice xmlns:a14="http://schemas.microsoft.com/office/drawing/2010/main" Requires="a14">
+      <mc:AlternateContent xmlns:mc="http://schemas.openxmlformats.org/markup-compatibility/2006" xmlns:a14="http://schemas.microsoft.com/office/drawing/2010/main">
+        <mc:Choice Requires="a14">
           <p:sp>
             <p:nvSpPr>
               <p:cNvPr id="3" name="Content Placeholder 2">
@@ -5676,7 +6112,7 @@
             </p:txBody>
           </p:sp>
         </mc:Choice>
-        <mc:Fallback>
+        <mc:Fallback xmlns="">
           <p:sp>
             <p:nvSpPr>
               <p:cNvPr id="3" name="Content Placeholder 2">
@@ -5989,8 +6425,8 @@
             </a:fontRef>
           </p:style>
         </p:cxnSp>
-        <mc:AlternateContent xmlns:mc="http://schemas.openxmlformats.org/markup-compatibility/2006">
-          <mc:Choice xmlns:a14="http://schemas.microsoft.com/office/drawing/2010/main" Requires="a14">
+        <mc:AlternateContent xmlns:mc="http://schemas.openxmlformats.org/markup-compatibility/2006" xmlns:a14="http://schemas.microsoft.com/office/drawing/2010/main">
+          <mc:Choice Requires="a14">
             <p:sp>
               <p:nvSpPr>
                 <p:cNvPr id="11" name="TextBox 10">
@@ -6070,7 +6506,7 @@
                             </a:solidFill>
                             <a:latin typeface="Cambria Math" panose="02040503050406030204" pitchFamily="18" charset="0"/>
                           </a:rPr>
-                          <m:t>-</m:t>
+                          <m:t>−</m:t>
                         </m:r>
                         <m:r>
                           <m:rPr>
@@ -6123,7 +6559,7 @@
               </p:txBody>
             </p:sp>
           </mc:Choice>
-          <mc:Fallback>
+          <mc:Fallback xmlns="">
             <p:sp>
               <p:nvSpPr>
                 <p:cNvPr id="11" name="TextBox 10">
@@ -6622,8 +7058,8 @@
           </a:p>
         </p:txBody>
       </p:sp>
-      <mc:AlternateContent xmlns:mc="http://schemas.openxmlformats.org/markup-compatibility/2006">
-        <mc:Choice xmlns:a14="http://schemas.microsoft.com/office/drawing/2010/main" Requires="a14">
+      <mc:AlternateContent xmlns:mc="http://schemas.openxmlformats.org/markup-compatibility/2006" xmlns:a14="http://schemas.microsoft.com/office/drawing/2010/main">
+        <mc:Choice Requires="a14">
           <p:sp>
             <p:nvSpPr>
               <p:cNvPr id="8" name="Speech Bubble: Rectangle with Corners Rounded 7">
@@ -6704,7 +7140,7 @@
             </p:txBody>
           </p:sp>
         </mc:Choice>
-        <mc:Fallback>
+        <mc:Fallback xmlns="">
           <p:sp>
             <p:nvSpPr>
               <p:cNvPr id="8" name="Speech Bubble: Rectangle with Corners Rounded 7">
@@ -6753,8 +7189,8 @@
           </p:sp>
         </mc:Fallback>
       </mc:AlternateContent>
-      <mc:AlternateContent xmlns:mc="http://schemas.openxmlformats.org/markup-compatibility/2006">
-        <mc:Choice xmlns:a14="http://schemas.microsoft.com/office/drawing/2010/main" Requires="a14">
+      <mc:AlternateContent xmlns:mc="http://schemas.openxmlformats.org/markup-compatibility/2006" xmlns:a14="http://schemas.microsoft.com/office/drawing/2010/main">
+        <mc:Choice Requires="a14">
           <p:sp>
             <p:nvSpPr>
               <p:cNvPr id="9" name="Speech Bubble: Rectangle with Corners Rounded 8">
@@ -6839,7 +7275,7 @@
             </p:txBody>
           </p:sp>
         </mc:Choice>
-        <mc:Fallback>
+        <mc:Fallback xmlns="">
           <p:sp>
             <p:nvSpPr>
               <p:cNvPr id="9" name="Speech Bubble: Rectangle with Corners Rounded 8">
@@ -7039,8 +7475,8 @@
           </a:p>
         </p:txBody>
       </p:sp>
-      <mc:AlternateContent xmlns:mc="http://schemas.openxmlformats.org/markup-compatibility/2006">
-        <mc:Choice xmlns:a14="http://schemas.microsoft.com/office/drawing/2010/main" Requires="a14">
+      <mc:AlternateContent xmlns:mc="http://schemas.openxmlformats.org/markup-compatibility/2006" xmlns:a14="http://schemas.microsoft.com/office/drawing/2010/main">
+        <mc:Choice Requires="a14">
           <p:sp>
             <p:nvSpPr>
               <p:cNvPr id="3" name="Content Placeholder 2">
@@ -7616,7 +8052,7 @@
             </p:txBody>
           </p:sp>
         </mc:Choice>
-        <mc:Fallback>
+        <mc:Fallback xmlns="">
           <p:sp>
             <p:nvSpPr>
               <p:cNvPr id="3" name="Content Placeholder 2">
@@ -8198,8 +8634,8 @@
           </a:fontRef>
         </p:style>
       </p:cxnSp>
-      <mc:AlternateContent xmlns:mc="http://schemas.openxmlformats.org/markup-compatibility/2006">
-        <mc:Choice xmlns:a14="http://schemas.microsoft.com/office/drawing/2010/main" Requires="a14">
+      <mc:AlternateContent xmlns:mc="http://schemas.openxmlformats.org/markup-compatibility/2006" xmlns:a14="http://schemas.microsoft.com/office/drawing/2010/main">
+        <mc:Choice Requires="a14">
           <p:sp>
             <p:nvSpPr>
               <p:cNvPr id="14" name="Speech Bubble: Rectangle with Corners Rounded 13">
@@ -8354,7 +8790,7 @@
             </p:txBody>
           </p:sp>
         </mc:Choice>
-        <mc:Fallback>
+        <mc:Fallback xmlns="">
           <p:sp>
             <p:nvSpPr>
               <p:cNvPr id="14" name="Speech Bubble: Rectangle with Corners Rounded 13">
@@ -8609,8 +9045,8 @@
           </a:p>
         </p:txBody>
       </p:sp>
-      <mc:AlternateContent xmlns:mc="http://schemas.openxmlformats.org/markup-compatibility/2006">
-        <mc:Choice xmlns:a14="http://schemas.microsoft.com/office/drawing/2010/main" Requires="a14">
+      <mc:AlternateContent xmlns:mc="http://schemas.openxmlformats.org/markup-compatibility/2006" xmlns:a14="http://schemas.microsoft.com/office/drawing/2010/main">
+        <mc:Choice Requires="a14">
           <p:sp>
             <p:nvSpPr>
               <p:cNvPr id="3" name="Content Placeholder 2">
@@ -9166,7 +9602,7 @@
             </p:txBody>
           </p:sp>
         </mc:Choice>
-        <mc:Fallback>
+        <mc:Fallback xmlns="">
           <p:sp>
             <p:nvSpPr>
               <p:cNvPr id="3" name="Content Placeholder 2">
@@ -9809,8 +10245,8 @@
           </a:p>
         </p:txBody>
       </p:sp>
-      <mc:AlternateContent xmlns:mc="http://schemas.openxmlformats.org/markup-compatibility/2006">
-        <mc:Choice xmlns:a14="http://schemas.microsoft.com/office/drawing/2010/main" Requires="a14">
+      <mc:AlternateContent xmlns:mc="http://schemas.openxmlformats.org/markup-compatibility/2006" xmlns:a14="http://schemas.microsoft.com/office/drawing/2010/main">
+        <mc:Choice Requires="a14">
           <p:sp>
             <p:nvSpPr>
               <p:cNvPr id="8" name="TextBox 7">
@@ -9928,7 +10364,7 @@
             </p:txBody>
           </p:sp>
         </mc:Choice>
-        <mc:Fallback>
+        <mc:Fallback xmlns="">
           <p:sp>
             <p:nvSpPr>
               <p:cNvPr id="8" name="TextBox 7">
@@ -10312,8 +10748,8 @@
           </a:p>
         </p:txBody>
       </p:sp>
-      <mc:AlternateContent xmlns:mc="http://schemas.openxmlformats.org/markup-compatibility/2006">
-        <mc:Choice xmlns:a14="http://schemas.microsoft.com/office/drawing/2010/main" Requires="a14">
+      <mc:AlternateContent xmlns:mc="http://schemas.openxmlformats.org/markup-compatibility/2006" xmlns:a14="http://schemas.microsoft.com/office/drawing/2010/main">
+        <mc:Choice Requires="a14">
           <p:sp>
             <p:nvSpPr>
               <p:cNvPr id="3" name="Content Placeholder 2">
@@ -11338,7 +11774,7 @@
             </p:txBody>
           </p:sp>
         </mc:Choice>
-        <mc:Fallback>
+        <mc:Fallback xmlns="">
           <p:sp>
             <p:nvSpPr>
               <p:cNvPr id="3" name="Content Placeholder 2">
@@ -11697,8 +12133,8 @@
               </a:p>
             </p:txBody>
           </p:sp>
-          <mc:AlternateContent xmlns:mc="http://schemas.openxmlformats.org/markup-compatibility/2006">
-            <mc:Choice xmlns:a14="http://schemas.microsoft.com/office/drawing/2010/main" Requires="a14">
+          <mc:AlternateContent xmlns:mc="http://schemas.openxmlformats.org/markup-compatibility/2006" xmlns:a14="http://schemas.microsoft.com/office/drawing/2010/main">
+            <mc:Choice Requires="a14">
               <p:sp>
                 <p:nvSpPr>
                   <p:cNvPr id="18" name="TextBox 17">
@@ -11816,7 +12252,7 @@
                 </p:txBody>
               </p:sp>
             </mc:Choice>
-            <mc:Fallback>
+            <mc:Fallback xmlns="">
               <p:sp>
                 <p:nvSpPr>
                   <p:cNvPr id="18" name="TextBox 17">
@@ -12219,8 +12655,8 @@
             </p:txBody>
           </p:sp>
         </p:grpSp>
-        <mc:AlternateContent xmlns:mc="http://schemas.openxmlformats.org/markup-compatibility/2006">
-          <mc:Choice xmlns:a14="http://schemas.microsoft.com/office/drawing/2010/main" Requires="a14">
+        <mc:AlternateContent xmlns:mc="http://schemas.openxmlformats.org/markup-compatibility/2006" xmlns:a14="http://schemas.microsoft.com/office/drawing/2010/main">
+          <mc:Choice Requires="a14">
             <p:sp>
               <p:nvSpPr>
                 <p:cNvPr id="6" name="Speech Bubble: Rectangle with Corners Rounded 5">
@@ -12311,7 +12747,7 @@
               </p:txBody>
             </p:sp>
           </mc:Choice>
-          <mc:Fallback>
+          <mc:Fallback xmlns="">
             <p:sp>
               <p:nvSpPr>
                 <p:cNvPr id="6" name="Speech Bubble: Rectangle with Corners Rounded 5">
@@ -12919,8 +13355,8 @@
             </p:sp>
           </mc:Fallback>
         </mc:AlternateContent>
-        <mc:AlternateContent xmlns:mc="http://schemas.openxmlformats.org/markup-compatibility/2006">
-          <mc:Choice xmlns:a14="http://schemas.microsoft.com/office/drawing/2010/main" Requires="a14">
+        <mc:AlternateContent xmlns:mc="http://schemas.openxmlformats.org/markup-compatibility/2006" xmlns:a14="http://schemas.microsoft.com/office/drawing/2010/main">
+          <mc:Choice Requires="a14">
             <p:sp>
               <p:nvSpPr>
                 <p:cNvPr id="14" name="TextBox 13">
@@ -12949,7 +13385,6 @@
                 </a:bodyPr>
                 <a:lstStyle/>
                 <a:p>
-                  <a:pPr/>
                   <a14:m>
                     <m:oMath xmlns:m="http://schemas.openxmlformats.org/officeDocument/2006/math">
                       <m:r>
@@ -12959,16 +13394,7 @@
                         <a:rPr lang="en-US" b="0" i="0" smtClean="0">
                           <a:latin typeface="Cambria Math" panose="02040503050406030204" pitchFamily="18" charset="0"/>
                         </a:rPr>
-                        <m:t>ma</m:t>
-                      </m:r>
-                      <m:r>
-                        <m:rPr>
-                          <m:nor/>
-                        </m:rPr>
-                        <a:rPr lang="en-US" b="0" i="0" smtClean="0">
-                          <a:latin typeface="Cambria Math" panose="02040503050406030204" pitchFamily="18" charset="0"/>
-                        </a:rPr>
-                        <m:t>x</m:t>
+                        <m:t>max</m:t>
                       </m:r>
                     </m:oMath>
                   </a14:m>
@@ -12980,7 +13406,7 @@
               </p:txBody>
             </p:sp>
           </mc:Choice>
-          <mc:Fallback>
+          <mc:Fallback xmlns="">
             <p:sp>
               <p:nvSpPr>
                 <p:cNvPr id="14" name="TextBox 13">
@@ -13814,8 +14240,8 @@
           </a:prstGeom>
         </p:spPr>
       </p:pic>
-      <mc:AlternateContent xmlns:mc="http://schemas.openxmlformats.org/markup-compatibility/2006">
-        <mc:Choice xmlns:a14="http://schemas.microsoft.com/office/drawing/2010/main" Requires="a14">
+      <mc:AlternateContent xmlns:mc="http://schemas.openxmlformats.org/markup-compatibility/2006" xmlns:a14="http://schemas.microsoft.com/office/drawing/2010/main">
+        <mc:Choice Requires="a14">
           <p:sp>
             <p:nvSpPr>
               <p:cNvPr id="9" name="TextBox 8">
@@ -13886,7 +14312,7 @@
             </p:txBody>
           </p:sp>
         </mc:Choice>
-        <mc:Fallback>
+        <mc:Fallback xmlns="">
           <p:sp>
             <p:nvSpPr>
               <p:cNvPr id="9" name="TextBox 8">
@@ -14750,8 +15176,8 @@
           </a:p>
         </p:txBody>
       </p:sp>
-      <mc:AlternateContent xmlns:mc="http://schemas.openxmlformats.org/markup-compatibility/2006">
-        <mc:Choice xmlns:a14="http://schemas.microsoft.com/office/drawing/2010/main" Requires="a14">
+      <mc:AlternateContent xmlns:mc="http://schemas.openxmlformats.org/markup-compatibility/2006" xmlns:a14="http://schemas.microsoft.com/office/drawing/2010/main">
+        <mc:Choice Requires="a14">
           <p:sp>
             <p:nvSpPr>
               <p:cNvPr id="3" name="TextBox 2">
@@ -14885,7 +15311,7 @@
             </p:txBody>
           </p:sp>
         </mc:Choice>
-        <mc:Fallback>
+        <mc:Fallback xmlns="">
           <p:sp>
             <p:nvSpPr>
               <p:cNvPr id="3" name="TextBox 2">
@@ -15120,8 +15546,8 @@
           </a:extLst>
         </p:spPr>
       </p:pic>
-      <mc:AlternateContent xmlns:mc="http://schemas.openxmlformats.org/markup-compatibility/2006">
-        <mc:Choice xmlns:a14="http://schemas.microsoft.com/office/drawing/2010/main" Requires="a14">
+      <mc:AlternateContent xmlns:mc="http://schemas.openxmlformats.org/markup-compatibility/2006" xmlns:a14="http://schemas.microsoft.com/office/drawing/2010/main">
+        <mc:Choice Requires="a14">
           <p:sp>
             <p:nvSpPr>
               <p:cNvPr id="3" name="Content Placeholder 2">
@@ -15306,7 +15732,7 @@
             </p:txBody>
           </p:sp>
         </mc:Choice>
-        <mc:Fallback>
+        <mc:Fallback xmlns="">
           <p:sp>
             <p:nvSpPr>
               <p:cNvPr id="3" name="Content Placeholder 2">
@@ -20145,19 +20571,53 @@
                 </a:r>
                 <a:r>
                   <a:rPr lang="en-US" b="1" dirty="0"/>
-                  <a:t>estimated</a:t>
+                  <a:t>sampled</a:t>
                 </a:r>
                 <a:r>
                   <a:rPr lang="en-US" dirty="0"/>
-                  <a:t> using an observed immediate reward and next state. This is called the </a:t>
+                  <a:t> using the value of the state at time </a:t>
+                </a:r>
+                <a14:m>
+                  <m:oMath xmlns:m="http://schemas.openxmlformats.org/officeDocument/2006/math">
+                    <m:r>
+                      <a:rPr lang="en-US" b="0" i="1" smtClean="0">
+                        <a:latin typeface="Cambria Math" panose="02040503050406030204" pitchFamily="18" charset="0"/>
+                      </a:rPr>
+                      <m:t>𝑡</m:t>
+                    </m:r>
+                  </m:oMath>
+                </a14:m>
+                <a:r>
+                  <a:rPr lang="en-US" dirty="0"/>
+                  <a:t>, the observed immediate reward and next state at time </a:t>
+                </a:r>
+                <a14:m>
+                  <m:oMath xmlns:m="http://schemas.openxmlformats.org/officeDocument/2006/math">
+                    <m:r>
+                      <a:rPr lang="en-US" b="0" i="1" smtClean="0">
+                        <a:latin typeface="Cambria Math" panose="02040503050406030204" pitchFamily="18" charset="0"/>
+                      </a:rPr>
+                      <m:t>𝑡</m:t>
+                    </m:r>
+                    <m:r>
+                      <a:rPr lang="en-US" b="0" i="1" smtClean="0">
+                        <a:latin typeface="Cambria Math" panose="02040503050406030204" pitchFamily="18" charset="0"/>
+                      </a:rPr>
+                      <m:t>+1</m:t>
+                    </m:r>
+                  </m:oMath>
+                </a14:m>
+                <a:r>
+                  <a:rPr lang="en-US" dirty="0"/>
+                  <a:t>. The </a:t>
                 </a:r>
                 <a:r>
                   <a:rPr lang="en-US" b="1" dirty="0"/>
-                  <a:t>TD error</a:t>
+                  <a:t>TD error </a:t>
                 </a:r>
                 <a:r>
                   <a:rPr lang="en-US" dirty="0"/>
-                  <a:t>:   </a:t>
+                  <a:t>is defined between two time steps as:   </a:t>
                 </a:r>
                 <a:br>
                   <a:rPr lang="en-US" i="1" dirty="0">
@@ -20345,6 +20805,9 @@
                 <a:endParaRPr lang="en-US" dirty="0"/>
               </a:p>
               <a:p>
+                <a:endParaRPr lang="en-US" b="1" dirty="0"/>
+              </a:p>
+              <a:p>
                 <a:r>
                   <a:rPr lang="en-US" b="1" dirty="0"/>
                   <a:t>Idea</a:t>
@@ -20407,70 +20870,8 @@
                 </a14:m>
                 <a:r>
                   <a:rPr lang="en-US" dirty="0"/>
-                  <a:t>more similar to the observed immediate reward plus the discounted, estimated value of the next observed state </a:t>
+                  <a:t>more similar to the TD target:</a:t>
                 </a:r>
-                <a14:m>
-                  <m:oMath xmlns:m="http://schemas.openxmlformats.org/officeDocument/2006/math">
-                    <m:sSub>
-                      <m:sSubPr>
-                        <m:ctrlPr>
-                          <a:rPr lang="en-US" b="0" i="1" smtClean="0">
-                            <a:latin typeface="Cambria Math" panose="02040503050406030204" pitchFamily="18" charset="0"/>
-                          </a:rPr>
-                        </m:ctrlPr>
-                      </m:sSubPr>
-                      <m:e>
-                        <m:r>
-                          <a:rPr lang="en-US" b="0" i="1" smtClean="0">
-                            <a:latin typeface="Cambria Math" panose="02040503050406030204" pitchFamily="18" charset="0"/>
-                          </a:rPr>
-                          <m:t>𝑉</m:t>
-                        </m:r>
-                        <m:r>
-                          <a:rPr lang="en-US" b="0" i="1" smtClean="0">
-                            <a:latin typeface="Cambria Math" panose="02040503050406030204" pitchFamily="18" charset="0"/>
-                          </a:rPr>
-                          <m:t>(</m:t>
-                        </m:r>
-                        <m:r>
-                          <a:rPr lang="en-US" b="0" i="1" smtClean="0">
-                            <a:latin typeface="Cambria Math" panose="02040503050406030204" pitchFamily="18" charset="0"/>
-                          </a:rPr>
-                          <m:t>𝑆</m:t>
-                        </m:r>
-                      </m:e>
-                      <m:sub>
-                        <m:r>
-                          <a:rPr lang="en-US" b="0" i="1" smtClean="0">
-                            <a:latin typeface="Cambria Math" panose="02040503050406030204" pitchFamily="18" charset="0"/>
-                          </a:rPr>
-                          <m:t>𝑡</m:t>
-                        </m:r>
-                        <m:r>
-                          <a:rPr lang="en-US" b="0" i="1" smtClean="0">
-                            <a:latin typeface="Cambria Math" panose="02040503050406030204" pitchFamily="18" charset="0"/>
-                          </a:rPr>
-                          <m:t>+1</m:t>
-                        </m:r>
-                      </m:sub>
-                    </m:sSub>
-                    <m:r>
-                      <a:rPr lang="en-US" b="0" i="1" smtClean="0">
-                        <a:latin typeface="Cambria Math" panose="02040503050406030204" pitchFamily="18" charset="0"/>
-                      </a:rPr>
-                      <m:t>)</m:t>
-                    </m:r>
-                  </m:oMath>
-                </a14:m>
-                <a:r>
-                  <a:rPr lang="en-US" dirty="0"/>
-                  <a:t>:</a:t>
-                </a:r>
-              </a:p>
-              <a:p>
-                <a:pPr marL="0" indent="0">
-                  <a:buNone/>
-                </a:pPr>
                 <a:endParaRPr lang="en-US" i="1" dirty="0">
                   <a:latin typeface="Cambria Math" panose="02040503050406030204" pitchFamily="18" charset="0"/>
                 </a:endParaRPr>
@@ -20532,7 +20933,42 @@
                           <a:latin typeface="Cambria Math" panose="02040503050406030204" pitchFamily="18" charset="0"/>
                           <a:ea typeface="Cambria Math" panose="02040503050406030204" pitchFamily="18" charset="0"/>
                         </a:rPr>
-                        <m:t>↜</m:t>
+                        <m:t>⇜</m:t>
+                      </m:r>
+                      <m:sSub>
+                        <m:sSubPr>
+                          <m:ctrlPr>
+                            <a:rPr lang="en-US" b="0" i="1" smtClean="0">
+                              <a:latin typeface="Cambria Math" panose="02040503050406030204" pitchFamily="18" charset="0"/>
+                              <a:ea typeface="Cambria Math" panose="02040503050406030204" pitchFamily="18" charset="0"/>
+                            </a:rPr>
+                          </m:ctrlPr>
+                        </m:sSubPr>
+                        <m:e>
+                          <m:r>
+                            <a:rPr lang="en-US" b="0" i="1" smtClean="0">
+                              <a:latin typeface="Cambria Math" panose="02040503050406030204" pitchFamily="18" charset="0"/>
+                              <a:ea typeface="Cambria Math" panose="02040503050406030204" pitchFamily="18" charset="0"/>
+                            </a:rPr>
+                            <m:t>𝑈</m:t>
+                          </m:r>
+                        </m:e>
+                        <m:sub>
+                          <m:r>
+                            <a:rPr lang="en-US" b="0" i="1" smtClean="0">
+                              <a:latin typeface="Cambria Math" panose="02040503050406030204" pitchFamily="18" charset="0"/>
+                              <a:ea typeface="Cambria Math" panose="02040503050406030204" pitchFamily="18" charset="0"/>
+                            </a:rPr>
+                            <m:t>𝑡</m:t>
+                          </m:r>
+                        </m:sub>
+                      </m:sSub>
+                      <m:r>
+                        <a:rPr lang="en-US" b="0" i="1" smtClean="0">
+                          <a:latin typeface="Cambria Math" panose="02040503050406030204" pitchFamily="18" charset="0"/>
+                          <a:ea typeface="Cambria Math" panose="02040503050406030204" pitchFamily="18" charset="0"/>
+                        </a:rPr>
+                        <m:t>=</m:t>
                       </m:r>
                       <m:sSub>
                         <m:sSubPr>
@@ -20833,7 +21269,7 @@
                 <a:ext cx="7956792" cy="4779633"/>
               </a:xfrm>
               <a:blipFill>
-                <a:blip r:embed="rId2"/>
+                <a:blip r:embed="rId3"/>
                 <a:stretch>
                   <a:fillRect l="-77" t="-1020"/>
                 </a:stretch>
@@ -20868,10 +21304,10 @@
         </p:nvGrpSpPr>
         <p:grpSpPr>
           <a:xfrm>
-            <a:off x="8868127" y="988815"/>
-            <a:ext cx="2595610" cy="2584667"/>
-            <a:chOff x="8758190" y="1397329"/>
-            <a:chExt cx="2595610" cy="2584667"/>
+            <a:off x="8832361" y="988815"/>
+            <a:ext cx="2631376" cy="2584667"/>
+            <a:chOff x="8722424" y="1397329"/>
+            <a:chExt cx="2631376" cy="2584667"/>
           </a:xfrm>
         </p:grpSpPr>
         <p:grpSp>
@@ -20888,10 +21324,10 @@
           </p:nvGrpSpPr>
           <p:grpSpPr>
             <a:xfrm>
-              <a:off x="8758190" y="1397329"/>
-              <a:ext cx="2595610" cy="2061447"/>
-              <a:chOff x="8600352" y="2398276"/>
-              <a:chExt cx="2595610" cy="2061447"/>
+              <a:off x="8722424" y="1397329"/>
+              <a:ext cx="2631376" cy="2061447"/>
+              <a:chOff x="8564586" y="2398276"/>
+              <a:chExt cx="2631376" cy="2061447"/>
             </a:xfrm>
           </p:grpSpPr>
           <p:grpSp>
@@ -20932,7 +21368,7 @@
                 <p:nvPr/>
               </p:nvPicPr>
               <p:blipFill>
-                <a:blip r:embed="rId3"/>
+                <a:blip r:embed="rId4"/>
                 <a:stretch>
                   <a:fillRect/>
                 </a:stretch>
@@ -21046,7 +21482,7 @@
                       <a:avLst/>
                     </a:prstGeom>
                     <a:blipFill>
-                      <a:blip r:embed="rId4"/>
+                      <a:blip r:embed="rId5"/>
                       <a:stretch>
                         <a:fillRect b="-3279"/>
                       </a:stretch>
@@ -21154,8 +21590,8 @@
               </p:txBody>
             </p:sp>
           </p:grpSp>
-          <mc:AlternateContent xmlns:mc="http://schemas.openxmlformats.org/markup-compatibility/2006">
-            <mc:Choice xmlns:a14="http://schemas.microsoft.com/office/drawing/2010/main" Requires="a14">
+          <mc:AlternateContent xmlns:mc="http://schemas.openxmlformats.org/markup-compatibility/2006" xmlns:a14="http://schemas.microsoft.com/office/drawing/2010/main">
+            <mc:Choice Requires="a14">
               <p:sp>
                 <p:nvSpPr>
                   <p:cNvPr id="9" name="TextBox 8">
@@ -21170,8 +21606,8 @@
                 </p:nvSpPr>
                 <p:spPr>
                   <a:xfrm>
-                    <a:off x="8600352" y="3479369"/>
-                    <a:ext cx="445122" cy="307777"/>
+                    <a:off x="8564586" y="3460906"/>
+                    <a:ext cx="488980" cy="261610"/>
                   </a:xfrm>
                   <a:prstGeom prst="rect">
                     <a:avLst/>
@@ -21191,28 +21627,53 @@
                           <m:jc m:val="centerGroup"/>
                         </m:oMathParaPr>
                         <m:oMath xmlns:m="http://schemas.openxmlformats.org/officeDocument/2006/math">
-                          <m:r>
-                            <a:rPr lang="en-US" sz="1400" i="1" dirty="0" smtClean="0">
-                              <a:solidFill>
-                                <a:schemeClr val="accent2"/>
-                              </a:solidFill>
-                              <a:latin typeface="Cambria Math" panose="02040503050406030204" pitchFamily="18" charset="0"/>
-                            </a:rPr>
-                            <m:t>+</m:t>
-                          </m:r>
-                          <m:r>
-                            <a:rPr lang="en-US" sz="1400" b="0" i="1" dirty="0" smtClean="0">
-                              <a:solidFill>
-                                <a:schemeClr val="accent2"/>
-                              </a:solidFill>
-                              <a:latin typeface="Cambria Math" panose="02040503050406030204" pitchFamily="18" charset="0"/>
-                            </a:rPr>
-                            <m:t>𝑟</m:t>
-                          </m:r>
+                          <m:sSub>
+                            <m:sSubPr>
+                              <m:ctrlPr>
+                                <a:rPr lang="en-US" sz="1100" b="0" i="1" dirty="0" smtClean="0">
+                                  <a:solidFill>
+                                    <a:schemeClr val="accent2"/>
+                                  </a:solidFill>
+                                  <a:latin typeface="Cambria Math" panose="02040503050406030204" pitchFamily="18" charset="0"/>
+                                </a:rPr>
+                              </m:ctrlPr>
+                            </m:sSubPr>
+                            <m:e>
+                              <m:r>
+                                <a:rPr lang="en-US" sz="1100" b="0" i="1" dirty="0" smtClean="0">
+                                  <a:solidFill>
+                                    <a:schemeClr val="accent2"/>
+                                  </a:solidFill>
+                                  <a:latin typeface="Cambria Math" panose="02040503050406030204" pitchFamily="18" charset="0"/>
+                                </a:rPr>
+                                <m:t>𝑅</m:t>
+                              </m:r>
+                            </m:e>
+                            <m:sub>
+                              <m:r>
+                                <a:rPr lang="en-US" sz="1100" b="0" i="1" dirty="0" smtClean="0">
+                                  <a:solidFill>
+                                    <a:schemeClr val="accent2"/>
+                                  </a:solidFill>
+                                  <a:latin typeface="Cambria Math" panose="02040503050406030204" pitchFamily="18" charset="0"/>
+                                </a:rPr>
+                                <m:t>𝑡</m:t>
+                              </m:r>
+                              <m:r>
+                                <a:rPr lang="en-US" sz="1100" b="0" i="1" dirty="0" smtClean="0">
+                                  <a:solidFill>
+                                    <a:schemeClr val="accent2"/>
+                                  </a:solidFill>
+                                  <a:latin typeface="Cambria Math" panose="02040503050406030204" pitchFamily="18" charset="0"/>
+                                </a:rPr>
+                                <m:t>+1</m:t>
+                              </m:r>
+                            </m:sub>
+                          </m:sSub>
                         </m:oMath>
                       </m:oMathPara>
                     </a14:m>
-                    <a:endParaRPr lang="en-US" sz="1400" dirty="0">
+                    <a:endParaRPr lang="en-US" sz="1100" dirty="0">
                       <a:solidFill>
                         <a:schemeClr val="accent2"/>
                       </a:solidFill>
@@ -21221,7 +21682,7 @@
                 </p:txBody>
               </p:sp>
             </mc:Choice>
-            <mc:Fallback>
+            <mc:Fallback xmlns="">
               <p:sp>
                 <p:nvSpPr>
                   <p:cNvPr id="9" name="TextBox 8">
@@ -21238,14 +21699,14 @@
                 </p:nvSpPr>
                 <p:spPr>
                   <a:xfrm>
-                    <a:off x="8600352" y="3479369"/>
-                    <a:ext cx="445122" cy="307777"/>
+                    <a:off x="8564586" y="3460906"/>
+                    <a:ext cx="488980" cy="261610"/>
                   </a:xfrm>
                   <a:prstGeom prst="rect">
                     <a:avLst/>
                   </a:prstGeom>
                   <a:blipFill>
-                    <a:blip r:embed="rId5"/>
+                    <a:blip r:embed="rId6"/>
                     <a:stretch>
                       <a:fillRect/>
                     </a:stretch>
@@ -21267,8 +21728,8 @@
             </mc:Fallback>
           </mc:AlternateContent>
         </p:grpSp>
-        <mc:AlternateContent xmlns:mc="http://schemas.openxmlformats.org/markup-compatibility/2006">
-          <mc:Choice xmlns:a14="http://schemas.microsoft.com/office/drawing/2010/main" Requires="a14">
+        <mc:AlternateContent xmlns:mc="http://schemas.openxmlformats.org/markup-compatibility/2006" xmlns:a14="http://schemas.microsoft.com/office/drawing/2010/main">
+          <mc:Choice Requires="a14">
             <p:sp>
               <p:nvSpPr>
                 <p:cNvPr id="11" name="TextBox 10">
@@ -21373,7 +21834,7 @@
               </p:txBody>
             </p:sp>
           </mc:Choice>
-          <mc:Fallback>
+          <mc:Fallback xmlns="">
             <p:sp>
               <p:nvSpPr>
                 <p:cNvPr id="11" name="TextBox 10">
@@ -21397,7 +21858,7 @@
                   <a:avLst/>
                 </a:prstGeom>
                 <a:blipFill>
-                  <a:blip r:embed="rId6"/>
+                  <a:blip r:embed="rId7"/>
                   <a:stretch>
                     <a:fillRect/>
                   </a:stretch>
@@ -21418,8 +21879,8 @@
             </p:sp>
           </mc:Fallback>
         </mc:AlternateContent>
-        <mc:AlternateContent xmlns:mc="http://schemas.openxmlformats.org/markup-compatibility/2006">
-          <mc:Choice xmlns:a14="http://schemas.microsoft.com/office/drawing/2010/main" Requires="a14">
+        <mc:AlternateContent xmlns:mc="http://schemas.openxmlformats.org/markup-compatibility/2006" xmlns:a14="http://schemas.microsoft.com/office/drawing/2010/main">
+          <mc:Choice Requires="a14">
             <p:sp>
               <p:nvSpPr>
                 <p:cNvPr id="14" name="TextBox 13">
@@ -21533,7 +21994,7 @@
               </p:txBody>
             </p:sp>
           </mc:Choice>
-          <mc:Fallback>
+          <mc:Fallback xmlns="">
             <p:sp>
               <p:nvSpPr>
                 <p:cNvPr id="14" name="TextBox 13">
@@ -21557,7 +22018,7 @@
                   <a:avLst/>
                 </a:prstGeom>
                 <a:blipFill>
-                  <a:blip r:embed="rId7"/>
+                  <a:blip r:embed="rId8"/>
                   <a:stretch>
                     <a:fillRect/>
                   </a:stretch>
@@ -21767,11 +22228,194 @@
             </a:r>
             <a:r>
               <a:rPr lang="en-US" sz="1200" dirty="0"/>
-              <a:t>: This is only an estimate because we ignore the expectation!</a:t>
+              <a:t>: The TD error is only a sample from the error distribution because we ignore the expectation!</a:t>
             </a:r>
           </a:p>
         </p:txBody>
       </p:sp>
+      <p:grpSp>
+        <p:nvGrpSpPr>
+          <p:cNvPr id="21" name="Group 20">
+            <a:extLst>
+              <a:ext uri="{FF2B5EF4-FFF2-40B4-BE49-F238E27FC236}">
+                <a16:creationId xmlns:a16="http://schemas.microsoft.com/office/drawing/2014/main" id="{CC3867AD-AC52-1175-B857-24B68835BCC1}"/>
+              </a:ext>
+            </a:extLst>
+          </p:cNvPr>
+          <p:cNvGrpSpPr/>
+          <p:nvPr/>
+        </p:nvGrpSpPr>
+        <p:grpSpPr>
+          <a:xfrm>
+            <a:off x="3727857" y="3944679"/>
+            <a:ext cx="1829849" cy="341088"/>
+            <a:chOff x="3727857" y="3944679"/>
+            <a:chExt cx="1829849" cy="341088"/>
+          </a:xfrm>
+        </p:grpSpPr>
+        <p:sp>
+          <p:nvSpPr>
+            <p:cNvPr id="8" name="Right Brace 7">
+              <a:extLst>
+                <a:ext uri="{FF2B5EF4-FFF2-40B4-BE49-F238E27FC236}">
+                  <a16:creationId xmlns:a16="http://schemas.microsoft.com/office/drawing/2014/main" id="{BE2F8909-BE52-3E91-5540-6AF57FC3B934}"/>
+                </a:ext>
+              </a:extLst>
+            </p:cNvPr>
+            <p:cNvSpPr/>
+            <p:nvPr/>
+          </p:nvSpPr>
+          <p:spPr>
+            <a:xfrm rot="5400000">
+              <a:off x="4535174" y="3461387"/>
+              <a:ext cx="128179" cy="1094763"/>
+            </a:xfrm>
+            <a:prstGeom prst="rightBrace">
+              <a:avLst/>
+            </a:prstGeom>
+          </p:spPr>
+          <p:style>
+            <a:lnRef idx="2">
+              <a:schemeClr val="accent1"/>
+            </a:lnRef>
+            <a:fillRef idx="0">
+              <a:schemeClr val="accent1"/>
+            </a:fillRef>
+            <a:effectRef idx="1">
+              <a:schemeClr val="accent1"/>
+            </a:effectRef>
+            <a:fontRef idx="minor">
+              <a:schemeClr val="tx1"/>
+            </a:fontRef>
+          </p:style>
+          <p:txBody>
+            <a:bodyPr rtlCol="0" anchor="ctr"/>
+            <a:lstStyle/>
+            <a:p>
+              <a:pPr algn="ctr"/>
+              <a:endParaRPr lang="en-US"/>
+            </a:p>
+          </p:txBody>
+        </p:sp>
+        <mc:AlternateContent xmlns:mc="http://schemas.openxmlformats.org/markup-compatibility/2006" xmlns:a14="http://schemas.microsoft.com/office/drawing/2010/main">
+          <mc:Choice Requires="a14">
+            <p:sp>
+              <p:nvSpPr>
+                <p:cNvPr id="20" name="TextBox 19">
+                  <a:extLst>
+                    <a:ext uri="{FF2B5EF4-FFF2-40B4-BE49-F238E27FC236}">
+                      <a16:creationId xmlns:a16="http://schemas.microsoft.com/office/drawing/2014/main" id="{2B213CCD-AA29-540B-5B54-FEF9C0A6061A}"/>
+                    </a:ext>
+                  </a:extLst>
+                </p:cNvPr>
+                <p:cNvSpPr txBox="1"/>
+                <p:nvPr/>
+              </p:nvSpPr>
+              <p:spPr>
+                <a:xfrm>
+                  <a:off x="3727857" y="4008768"/>
+                  <a:ext cx="1829849" cy="276999"/>
+                </a:xfrm>
+                <a:prstGeom prst="rect">
+                  <a:avLst/>
+                </a:prstGeom>
+                <a:noFill/>
+              </p:spPr>
+              <p:txBody>
+                <a:bodyPr wrap="square">
+                  <a:spAutoFit/>
+                </a:bodyPr>
+                <a:lstStyle/>
+                <a:p>
+                  <a:r>
+                    <a:rPr lang="en-US" sz="1200" dirty="0">
+                      <a:ea typeface="Cambria Math" panose="02040503050406030204" pitchFamily="18" charset="0"/>
+                    </a:rPr>
+                    <a:t>We call this the target </a:t>
+                  </a:r>
+                  <a14:m>
+                    <m:oMath xmlns:m="http://schemas.openxmlformats.org/officeDocument/2006/math">
+                      <m:sSub>
+                        <m:sSubPr>
+                          <m:ctrlPr>
+                            <a:rPr lang="en-US" sz="1200" b="0" i="1" smtClean="0">
+                              <a:latin typeface="Cambria Math" panose="02040503050406030204" pitchFamily="18" charset="0"/>
+                              <a:ea typeface="Cambria Math" panose="02040503050406030204" pitchFamily="18" charset="0"/>
+                            </a:rPr>
+                          </m:ctrlPr>
+                        </m:sSubPr>
+                        <m:e>
+                          <m:r>
+                            <a:rPr lang="en-US" sz="1200" b="0" i="1" smtClean="0">
+                              <a:latin typeface="Cambria Math" panose="02040503050406030204" pitchFamily="18" charset="0"/>
+                              <a:ea typeface="Cambria Math" panose="02040503050406030204" pitchFamily="18" charset="0"/>
+                            </a:rPr>
+                            <m:t>𝑈</m:t>
+                          </m:r>
+                        </m:e>
+                        <m:sub>
+                          <m:r>
+                            <a:rPr lang="en-US" sz="1200" b="0" i="1" smtClean="0">
+                              <a:latin typeface="Cambria Math" panose="02040503050406030204" pitchFamily="18" charset="0"/>
+                              <a:ea typeface="Cambria Math" panose="02040503050406030204" pitchFamily="18" charset="0"/>
+                            </a:rPr>
+                            <m:t>𝑡</m:t>
+                          </m:r>
+                        </m:sub>
+                      </m:sSub>
+                    </m:oMath>
+                  </a14:m>
+                  <a:endParaRPr lang="en-US" sz="1600" dirty="0"/>
+                </a:p>
+              </p:txBody>
+            </p:sp>
+          </mc:Choice>
+          <mc:Fallback xmlns="">
+            <p:sp>
+              <p:nvSpPr>
+                <p:cNvPr id="20" name="TextBox 19">
+                  <a:extLst>
+                    <a:ext uri="{FF2B5EF4-FFF2-40B4-BE49-F238E27FC236}">
+                      <a16:creationId xmlns:a16="http://schemas.microsoft.com/office/drawing/2014/main" id="{2B213CCD-AA29-540B-5B54-FEF9C0A6061A}"/>
+                    </a:ext>
+                  </a:extLst>
+                </p:cNvPr>
+                <p:cNvSpPr txBox="1">
+                  <a:spLocks noRot="1" noChangeAspect="1" noMove="1" noResize="1" noEditPoints="1" noAdjustHandles="1" noChangeArrowheads="1" noChangeShapeType="1" noTextEdit="1"/>
+                </p:cNvSpPr>
+                <p:nvPr/>
+              </p:nvSpPr>
+              <p:spPr>
+                <a:xfrm>
+                  <a:off x="3727857" y="4008768"/>
+                  <a:ext cx="1829849" cy="276999"/>
+                </a:xfrm>
+                <a:prstGeom prst="rect">
+                  <a:avLst/>
+                </a:prstGeom>
+                <a:blipFill>
+                  <a:blip r:embed="rId9"/>
+                  <a:stretch>
+                    <a:fillRect l="-333" t="-2222" b="-17778"/>
+                  </a:stretch>
+                </a:blipFill>
+              </p:spPr>
+              <p:txBody>
+                <a:bodyPr/>
+                <a:lstStyle/>
+                <a:p>
+                  <a:r>
+                    <a:rPr lang="en-US">
+                      <a:noFill/>
+                    </a:rPr>
+                    <a:t> </a:t>
+                  </a:r>
+                </a:p>
+              </p:txBody>
+            </p:sp>
+          </mc:Fallback>
+        </mc:AlternateContent>
+      </p:grpSp>
     </p:spTree>
     <p:extLst>
       <p:ext uri="{BB962C8B-B14F-4D97-AF65-F5344CB8AC3E}">
@@ -21910,9 +22554,54 @@
                                           </p:stCondLst>
                                         </p:cTn>
                                         <p:tgtEl>
+                                          <p:spTgt spid="21"/>
+                                        </p:tgtEl>
+                                        <p:attrNameLst>
+                                          <p:attrName>style.visibility</p:attrName>
+                                        </p:attrNameLst>
+                                      </p:cBhvr>
+                                      <p:to>
+                                        <p:strVal val="visible"/>
+                                      </p:to>
+                                    </p:set>
+                                  </p:childTnLst>
+                                </p:cTn>
+                              </p:par>
+                            </p:childTnLst>
+                          </p:cTn>
+                        </p:par>
+                      </p:childTnLst>
+                    </p:cTn>
+                  </p:par>
+                  <p:par>
+                    <p:cTn id="15" fill="hold">
+                      <p:stCondLst>
+                        <p:cond delay="indefinite"/>
+                      </p:stCondLst>
+                      <p:childTnLst>
+                        <p:par>
+                          <p:cTn id="16" fill="hold">
+                            <p:stCondLst>
+                              <p:cond delay="0"/>
+                            </p:stCondLst>
+                            <p:childTnLst>
+                              <p:par>
+                                <p:cTn id="17" presetID="1" presetClass="entr" presetSubtype="0" fill="hold" nodeType="clickEffect">
+                                  <p:stCondLst>
+                                    <p:cond delay="0"/>
+                                  </p:stCondLst>
+                                  <p:childTnLst>
+                                    <p:set>
+                                      <p:cBhvr>
+                                        <p:cTn id="18" dur="1" fill="hold">
+                                          <p:stCondLst>
+                                            <p:cond delay="0"/>
+                                          </p:stCondLst>
+                                        </p:cTn>
+                                        <p:tgtEl>
                                           <p:spTgt spid="3">
                                             <p:txEl>
-                                              <p:pRg st="9" end="9"/>
+                                              <p:pRg st="10" end="10"/>
                                             </p:txEl>
                                           </p:spTgt>
                                         </p:tgtEl>
@@ -21928,14 +22617,14 @@
                                 </p:cTn>
                               </p:par>
                               <p:par>
-                                <p:cTn id="15" presetID="1" presetClass="entr" presetSubtype="0" fill="hold" nodeType="withEffect">
+                                <p:cTn id="19" presetID="1" presetClass="entr" presetSubtype="0" fill="hold" nodeType="withEffect">
                                   <p:stCondLst>
                                     <p:cond delay="0"/>
                                   </p:stCondLst>
                                   <p:childTnLst>
                                     <p:set>
                                       <p:cBhvr>
-                                        <p:cTn id="16" dur="1" fill="hold">
+                                        <p:cTn id="20" dur="1" fill="hold">
                                           <p:stCondLst>
                                             <p:cond delay="0"/>
                                           </p:stCondLst>
@@ -21965,26 +22654,26 @@
                     </p:cTn>
                   </p:par>
                   <p:par>
-                    <p:cTn id="17" fill="hold">
+                    <p:cTn id="21" fill="hold">
                       <p:stCondLst>
                         <p:cond delay="indefinite"/>
                       </p:stCondLst>
                       <p:childTnLst>
                         <p:par>
-                          <p:cTn id="18" fill="hold">
+                          <p:cTn id="22" fill="hold">
                             <p:stCondLst>
                               <p:cond delay="0"/>
                             </p:stCondLst>
                             <p:childTnLst>
                               <p:par>
-                                <p:cTn id="19" presetID="1" presetClass="entr" presetSubtype="0" fill="hold" nodeType="clickEffect">
+                                <p:cTn id="23" presetID="1" presetClass="entr" presetSubtype="0" fill="hold" nodeType="clickEffect">
                                   <p:stCondLst>
                                     <p:cond delay="0"/>
                                   </p:stCondLst>
                                   <p:childTnLst>
                                     <p:set>
                                       <p:cBhvr>
-                                        <p:cTn id="20" dur="1" fill="hold">
+                                        <p:cTn id="24" dur="1" fill="hold">
                                           <p:stCondLst>
                                             <p:cond delay="0"/>
                                           </p:stCondLst>
@@ -22008,14 +22697,14 @@
                                 </p:cTn>
                               </p:par>
                               <p:par>
-                                <p:cTn id="21" presetID="1" presetClass="entr" presetSubtype="0" fill="hold" nodeType="withEffect">
+                                <p:cTn id="25" presetID="1" presetClass="entr" presetSubtype="0" fill="hold" nodeType="withEffect">
                                   <p:stCondLst>
                                     <p:cond delay="0"/>
                                   </p:stCondLst>
                                   <p:childTnLst>
                                     <p:set>
                                       <p:cBhvr>
-                                        <p:cTn id="22" dur="1" fill="hold">
+                                        <p:cTn id="26" dur="1" fill="hold">
                                           <p:stCondLst>
                                             <p:cond delay="0"/>
                                           </p:stCondLst>
@@ -22039,14 +22728,14 @@
                                 </p:cTn>
                               </p:par>
                               <p:par>
-                                <p:cTn id="23" presetID="1" presetClass="entr" presetSubtype="0" fill="hold" nodeType="withEffect">
+                                <p:cTn id="27" presetID="1" presetClass="entr" presetSubtype="0" fill="hold" nodeType="withEffect">
                                   <p:stCondLst>
                                     <p:cond delay="0"/>
                                   </p:stCondLst>
                                   <p:childTnLst>
                                     <p:set>
                                       <p:cBhvr>
-                                        <p:cTn id="24" dur="1" fill="hold">
+                                        <p:cTn id="28" dur="1" fill="hold">
                                           <p:stCondLst>
                                             <p:cond delay="0"/>
                                           </p:stCondLst>
@@ -22069,33 +22758,15 @@
                                   </p:childTnLst>
                                 </p:cTn>
                               </p:par>
-                            </p:childTnLst>
-                          </p:cTn>
-                        </p:par>
-                      </p:childTnLst>
-                    </p:cTn>
-                  </p:par>
-                  <p:par>
-                    <p:cTn id="25" fill="hold">
-                      <p:stCondLst>
-                        <p:cond delay="indefinite"/>
-                      </p:stCondLst>
-                      <p:childTnLst>
-                        <p:par>
-                          <p:cTn id="26" fill="hold">
-                            <p:stCondLst>
-                              <p:cond delay="0"/>
-                            </p:stCondLst>
-                            <p:childTnLst>
                               <p:par>
-                                <p:cTn id="27" presetID="1" presetClass="entr" presetSubtype="0" fill="hold" nodeType="clickEffect">
+                                <p:cTn id="29" presetID="1" presetClass="entr" presetSubtype="0" fill="hold" nodeType="withEffect">
                                   <p:stCondLst>
                                     <p:cond delay="0"/>
                                   </p:stCondLst>
                                   <p:childTnLst>
                                     <p:set>
                                       <p:cBhvr>
-                                        <p:cTn id="28" dur="1" fill="hold">
+                                        <p:cTn id="30" dur="1" fill="hold">
                                           <p:stCondLst>
                                             <p:cond delay="0"/>
                                           </p:stCondLst>
@@ -22279,8 +22950,8 @@
           </a:p>
         </p:txBody>
       </p:sp>
-      <mc:AlternateContent xmlns:mc="http://schemas.openxmlformats.org/markup-compatibility/2006">
-        <mc:Choice xmlns:a14="http://schemas.microsoft.com/office/drawing/2010/main" Requires="a14">
+      <mc:AlternateContent xmlns:mc="http://schemas.openxmlformats.org/markup-compatibility/2006" xmlns:a14="http://schemas.microsoft.com/office/drawing/2010/main">
+        <mc:Choice Requires="a14">
           <p:sp>
             <p:nvSpPr>
               <p:cNvPr id="3" name="Content Placeholder 2">
@@ -22882,7 +23553,7 @@
             </p:txBody>
           </p:sp>
         </mc:Choice>
-        <mc:Fallback>
+        <mc:Fallback xmlns="">
           <p:sp>
             <p:nvSpPr>
               <p:cNvPr id="3" name="Content Placeholder 2">
@@ -23332,8 +24003,8 @@
           </mc:Fallback>
         </mc:AlternateContent>
       </p:grpSp>
-      <mc:AlternateContent xmlns:mc="http://schemas.openxmlformats.org/markup-compatibility/2006">
-        <mc:Choice xmlns:a14="http://schemas.microsoft.com/office/drawing/2010/main" Requires="a14">
+      <mc:AlternateContent xmlns:mc="http://schemas.openxmlformats.org/markup-compatibility/2006" xmlns:a14="http://schemas.microsoft.com/office/drawing/2010/main">
+        <mc:Choice Requires="a14">
           <p:sp>
             <p:nvSpPr>
               <p:cNvPr id="5" name="Speech Bubble: Rectangle with Corners Rounded 4">
@@ -23449,7 +24120,7 @@
             </p:txBody>
           </p:sp>
         </mc:Choice>
-        <mc:Fallback>
+        <mc:Fallback xmlns="">
           <p:sp>
             <p:nvSpPr>
               <p:cNvPr id="5" name="Speech Bubble: Rectangle with Corners Rounded 4">
@@ -23498,8 +24169,8 @@
           </p:sp>
         </mc:Fallback>
       </mc:AlternateContent>
-      <mc:AlternateContent xmlns:mc="http://schemas.openxmlformats.org/markup-compatibility/2006">
-        <mc:Choice xmlns:a14="http://schemas.microsoft.com/office/drawing/2010/main" Requires="a14">
+      <mc:AlternateContent xmlns:mc="http://schemas.openxmlformats.org/markup-compatibility/2006" xmlns:a14="http://schemas.microsoft.com/office/drawing/2010/main">
+        <mc:Choice Requires="a14">
           <p:sp>
             <p:nvSpPr>
               <p:cNvPr id="14" name="TextBox 13">
@@ -23565,7 +24236,7 @@
             </p:txBody>
           </p:sp>
         </mc:Choice>
-        <mc:Fallback>
+        <mc:Fallback xmlns="">
           <p:sp>
             <p:nvSpPr>
               <p:cNvPr id="14" name="TextBox 13">
@@ -23805,8 +24476,8 @@
           </a:prstGeom>
         </p:spPr>
       </p:pic>
-      <mc:AlternateContent xmlns:mc="http://schemas.openxmlformats.org/markup-compatibility/2006">
-        <mc:Choice xmlns:a14="http://schemas.microsoft.com/office/drawing/2010/main" Requires="a14">
+      <mc:AlternateContent xmlns:mc="http://schemas.openxmlformats.org/markup-compatibility/2006" xmlns:a14="http://schemas.microsoft.com/office/drawing/2010/main">
+        <mc:Choice Requires="a14">
           <p:sp>
             <p:nvSpPr>
               <p:cNvPr id="3" name="Speech Bubble: Rectangle with Corners Rounded 2">
@@ -23995,7 +24666,7 @@
             </p:txBody>
           </p:sp>
         </mc:Choice>
-        <mc:Fallback>
+        <mc:Fallback xmlns="">
           <p:sp>
             <p:nvSpPr>
               <p:cNvPr id="3" name="Speech Bubble: Rectangle with Corners Rounded 2">
@@ -24354,7 +25025,7 @@
             <p:spPr/>
             <p:txBody>
               <a:bodyPr>
-                <a:normAutofit fontScale="70000" lnSpcReduction="20000"/>
+                <a:normAutofit fontScale="55000" lnSpcReduction="20000"/>
               </a:bodyPr>
               <a:lstStyle/>
               <a:p>
@@ -24384,30 +25055,13 @@
                 </a:r>
               </a:p>
               <a:p>
-                <a:r>
-                  <a:rPr lang="en-US" dirty="0"/>
-                  <a:t>Minimizing the TD error is a </a:t>
-                </a:r>
-                <a:r>
-                  <a:rPr lang="en-US" b="1" dirty="0"/>
-                  <a:t>stochastic approximation of Bellman updates </a:t>
-                </a:r>
-                <a:r>
-                  <a:rPr lang="en-US" dirty="0"/>
-                  <a:t>(which we know converge).</a:t>
-                </a:r>
+                <a:endParaRPr lang="en-US" dirty="0"/>
               </a:p>
               <a:p>
                 <a:r>
                   <a:rPr lang="en-US" dirty="0"/>
-                  <a:t>The observed TD error is a noisy stochastic and unbiased sample of the true difference:</a:t>
+                  <a:t>The observed TD error </a:t>
                 </a:r>
-                <a:br>
-                  <a:rPr lang="en-US" dirty="0"/>
-                </a:br>
-                <a:br>
-                  <a:rPr lang="en-US" dirty="0"/>
-                </a:br>
                 <a14:m>
                   <m:oMath xmlns:m="http://schemas.openxmlformats.org/officeDocument/2006/math">
                     <m:sSub>
@@ -24490,48 +25144,53 @@
                       </a:rPr>
                       <m:t>𝑉</m:t>
                     </m:r>
-                    <m:r>
-                      <a:rPr lang="en-US" i="1">
-                        <a:latin typeface="Cambria Math" panose="02040503050406030204" pitchFamily="18" charset="0"/>
-                      </a:rPr>
-                      <m:t>(</m:t>
-                    </m:r>
-                    <m:sSub>
-                      <m:sSubPr>
+                    <m:d>
+                      <m:dPr>
                         <m:ctrlPr>
                           <a:rPr lang="en-US" i="1">
                             <a:latin typeface="Cambria Math" panose="02040503050406030204" pitchFamily="18" charset="0"/>
                           </a:rPr>
                         </m:ctrlPr>
-                      </m:sSubPr>
+                      </m:dPr>
                       <m:e>
-                        <m:r>
-                          <a:rPr lang="en-US" i="1">
-                            <a:latin typeface="Cambria Math" panose="02040503050406030204" pitchFamily="18" charset="0"/>
-                          </a:rPr>
-                          <m:t>𝑆</m:t>
-                        </m:r>
+                        <m:sSub>
+                          <m:sSubPr>
+                            <m:ctrlPr>
+                              <a:rPr lang="en-US" i="1">
+                                <a:latin typeface="Cambria Math" panose="02040503050406030204" pitchFamily="18" charset="0"/>
+                              </a:rPr>
+                            </m:ctrlPr>
+                          </m:sSubPr>
+                          <m:e>
+                            <m:r>
+                              <a:rPr lang="en-US" i="1">
+                                <a:latin typeface="Cambria Math" panose="02040503050406030204" pitchFamily="18" charset="0"/>
+                              </a:rPr>
+                              <m:t>𝑆</m:t>
+                            </m:r>
+                          </m:e>
+                          <m:sub>
+                            <m:r>
+                              <a:rPr lang="en-US" i="1">
+                                <a:latin typeface="Cambria Math" panose="02040503050406030204" pitchFamily="18" charset="0"/>
+                              </a:rPr>
+                              <m:t>𝑡</m:t>
+                            </m:r>
+                            <m:r>
+                              <a:rPr lang="en-US" i="1">
+                                <a:latin typeface="Cambria Math" panose="02040503050406030204" pitchFamily="18" charset="0"/>
+                              </a:rPr>
+                              <m:t>+1</m:t>
+                            </m:r>
+                          </m:sub>
+                        </m:sSub>
                       </m:e>
-                      <m:sub>
-                        <m:r>
-                          <a:rPr lang="en-US" i="1">
-                            <a:latin typeface="Cambria Math" panose="02040503050406030204" pitchFamily="18" charset="0"/>
-                          </a:rPr>
-                          <m:t>𝑡</m:t>
-                        </m:r>
-                        <m:r>
-                          <a:rPr lang="en-US" i="1">
-                            <a:latin typeface="Cambria Math" panose="02040503050406030204" pitchFamily="18" charset="0"/>
-                          </a:rPr>
-                          <m:t>+1</m:t>
-                        </m:r>
-                      </m:sub>
-                    </m:sSub>
+                    </m:d>
                     <m:r>
                       <a:rPr lang="en-US" i="1">
                         <a:latin typeface="Cambria Math" panose="02040503050406030204" pitchFamily="18" charset="0"/>
                       </a:rPr>
-                      <m:t>)−</m:t>
+                      <m:t>−</m:t>
                     </m:r>
                     <m:r>
                       <a:rPr lang="en-US" i="1">
@@ -24539,51 +25198,54 @@
                       </a:rPr>
                       <m:t>𝑉</m:t>
                     </m:r>
-                    <m:r>
-                      <a:rPr lang="en-US" i="1">
-                        <a:latin typeface="Cambria Math" panose="02040503050406030204" pitchFamily="18" charset="0"/>
-                      </a:rPr>
-                      <m:t>(</m:t>
-                    </m:r>
-                    <m:sSub>
-                      <m:sSubPr>
+                    <m:d>
+                      <m:dPr>
                         <m:ctrlPr>
                           <a:rPr lang="en-US" i="1">
                             <a:latin typeface="Cambria Math" panose="02040503050406030204" pitchFamily="18" charset="0"/>
                           </a:rPr>
                         </m:ctrlPr>
-                      </m:sSubPr>
+                      </m:dPr>
                       <m:e>
-                        <m:r>
-                          <a:rPr lang="en-US" i="1">
-                            <a:latin typeface="Cambria Math" panose="02040503050406030204" pitchFamily="18" charset="0"/>
-                          </a:rPr>
-                          <m:t>𝑆</m:t>
-                        </m:r>
+                        <m:sSub>
+                          <m:sSubPr>
+                            <m:ctrlPr>
+                              <a:rPr lang="en-US" i="1">
+                                <a:latin typeface="Cambria Math" panose="02040503050406030204" pitchFamily="18" charset="0"/>
+                              </a:rPr>
+                            </m:ctrlPr>
+                          </m:sSubPr>
+                          <m:e>
+                            <m:r>
+                              <a:rPr lang="en-US" i="1">
+                                <a:latin typeface="Cambria Math" panose="02040503050406030204" pitchFamily="18" charset="0"/>
+                              </a:rPr>
+                              <m:t>𝑆</m:t>
+                            </m:r>
+                          </m:e>
+                          <m:sub>
+                            <m:r>
+                              <a:rPr lang="en-US" i="1">
+                                <a:latin typeface="Cambria Math" panose="02040503050406030204" pitchFamily="18" charset="0"/>
+                              </a:rPr>
+                              <m:t>𝑡</m:t>
+                            </m:r>
+                          </m:sub>
+                        </m:sSub>
                       </m:e>
-                      <m:sub>
-                        <m:r>
-                          <a:rPr lang="en-US" i="1">
-                            <a:latin typeface="Cambria Math" panose="02040503050406030204" pitchFamily="18" charset="0"/>
-                          </a:rPr>
-                          <m:t>𝑡</m:t>
-                        </m:r>
-                      </m:sub>
-                    </m:sSub>
-                    <m:r>
-                      <a:rPr lang="en-US" i="1">
-                        <a:latin typeface="Cambria Math" panose="02040503050406030204" pitchFamily="18" charset="0"/>
-                      </a:rPr>
-                      <m:t>)</m:t>
-                    </m:r>
+                    </m:d>
                   </m:oMath>
                 </a14:m>
-                <a:endParaRPr lang="en-US" dirty="0"/>
-              </a:p>
-              <a:p>
-                <a:endParaRPr lang="en-US" dirty="0"/>
-              </a:p>
-              <a:p>
+                <a:r>
+                  <a:rPr lang="en-US" dirty="0"/>
+                  <a:t> is a noisy sample of the true difference.</a:t>
+                </a:r>
+                <a:br>
+                  <a:rPr lang="en-US" dirty="0"/>
+                </a:br>
+                <a:br>
+                  <a:rPr lang="en-US" dirty="0"/>
+                </a:br>
                 <a:r>
                   <a:rPr lang="en-US" dirty="0"/>
                   <a:t>Stochastic approximation theory guarantees convergence if the </a:t>
@@ -24605,6 +25267,299 @@
                 <a:r>
                   <a:rPr lang="en-US" b="1" dirty="0"/>
                   <a:t> decreases slowly enough. </a:t>
+                </a:r>
+                <a:r>
+                  <a:rPr lang="en-US" dirty="0"/>
+                  <a:t>Then the updates</a:t>
+                </a:r>
+                <a:br>
+                  <a:rPr lang="en-US" dirty="0"/>
+                </a:br>
+                <a:br>
+                  <a:rPr lang="en-US" dirty="0"/>
+                </a:br>
+                <a14:m>
+                  <m:oMath xmlns:m="http://schemas.openxmlformats.org/officeDocument/2006/math">
+                    <m:r>
+                      <a:rPr lang="en-US" i="1">
+                        <a:latin typeface="Cambria Math" panose="02040503050406030204" pitchFamily="18" charset="0"/>
+                      </a:rPr>
+                      <m:t>𝑉</m:t>
+                    </m:r>
+                    <m:d>
+                      <m:dPr>
+                        <m:ctrlPr>
+                          <a:rPr lang="en-US" i="1">
+                            <a:latin typeface="Cambria Math" panose="02040503050406030204" pitchFamily="18" charset="0"/>
+                          </a:rPr>
+                        </m:ctrlPr>
+                      </m:dPr>
+                      <m:e>
+                        <m:sSub>
+                          <m:sSubPr>
+                            <m:ctrlPr>
+                              <a:rPr lang="en-US" i="1">
+                                <a:latin typeface="Cambria Math" panose="02040503050406030204" pitchFamily="18" charset="0"/>
+                              </a:rPr>
+                            </m:ctrlPr>
+                          </m:sSubPr>
+                          <m:e>
+                            <m:r>
+                              <a:rPr lang="en-US" i="1">
+                                <a:latin typeface="Cambria Math" panose="02040503050406030204" pitchFamily="18" charset="0"/>
+                              </a:rPr>
+                              <m:t>𝑆</m:t>
+                            </m:r>
+                          </m:e>
+                          <m:sub>
+                            <m:r>
+                              <a:rPr lang="en-US" i="1">
+                                <a:latin typeface="Cambria Math" panose="02040503050406030204" pitchFamily="18" charset="0"/>
+                              </a:rPr>
+                              <m:t>𝑡</m:t>
+                            </m:r>
+                          </m:sub>
+                        </m:sSub>
+                      </m:e>
+                    </m:d>
+                    <m:groupChr>
+                      <m:groupChrPr>
+                        <m:chr m:val="←"/>
+                        <m:pos m:val="top"/>
+                        <m:ctrlPr>
+                          <a:rPr lang="en-US" i="1">
+                            <a:latin typeface="Cambria Math" panose="02040503050406030204" pitchFamily="18" charset="0"/>
+                          </a:rPr>
+                        </m:ctrlPr>
+                      </m:groupChrPr>
+                      <m:e/>
+                    </m:groupChr>
+                    <m:r>
+                      <a:rPr lang="en-US" i="1">
+                        <a:latin typeface="Cambria Math" panose="02040503050406030204" pitchFamily="18" charset="0"/>
+                      </a:rPr>
+                      <m:t>𝑉</m:t>
+                    </m:r>
+                    <m:d>
+                      <m:dPr>
+                        <m:ctrlPr>
+                          <a:rPr lang="en-US" i="1">
+                            <a:latin typeface="Cambria Math" panose="02040503050406030204" pitchFamily="18" charset="0"/>
+                          </a:rPr>
+                        </m:ctrlPr>
+                      </m:dPr>
+                      <m:e>
+                        <m:sSub>
+                          <m:sSubPr>
+                            <m:ctrlPr>
+                              <a:rPr lang="en-US" i="1">
+                                <a:latin typeface="Cambria Math" panose="02040503050406030204" pitchFamily="18" charset="0"/>
+                              </a:rPr>
+                            </m:ctrlPr>
+                          </m:sSubPr>
+                          <m:e>
+                            <m:r>
+                              <a:rPr lang="en-US" i="1">
+                                <a:latin typeface="Cambria Math" panose="02040503050406030204" pitchFamily="18" charset="0"/>
+                              </a:rPr>
+                              <m:t>𝑆</m:t>
+                            </m:r>
+                          </m:e>
+                          <m:sub>
+                            <m:r>
+                              <a:rPr lang="en-US" i="1">
+                                <a:latin typeface="Cambria Math" panose="02040503050406030204" pitchFamily="18" charset="0"/>
+                              </a:rPr>
+                              <m:t>𝑡</m:t>
+                            </m:r>
+                          </m:sub>
+                        </m:sSub>
+                      </m:e>
+                    </m:d>
+                    <m:r>
+                      <a:rPr lang="en-US">
+                        <a:latin typeface="Cambria Math" panose="02040503050406030204" pitchFamily="18" charset="0"/>
+                      </a:rPr>
+                      <m:t>+</m:t>
+                    </m:r>
+                    <m:r>
+                      <a:rPr lang="en-US" i="1">
+                        <a:latin typeface="Cambria Math" panose="02040503050406030204" pitchFamily="18" charset="0"/>
+                      </a:rPr>
+                      <m:t>𝛼</m:t>
+                    </m:r>
+                    <m:d>
+                      <m:dPr>
+                        <m:begChr m:val="["/>
+                        <m:endChr m:val="]"/>
+                        <m:ctrlPr>
+                          <a:rPr lang="en-US" i="1">
+                            <a:latin typeface="Cambria Math" panose="02040503050406030204" pitchFamily="18" charset="0"/>
+                          </a:rPr>
+                        </m:ctrlPr>
+                      </m:dPr>
+                      <m:e>
+                        <m:sSub>
+                          <m:sSubPr>
+                            <m:ctrlPr>
+                              <a:rPr lang="en-US" i="1">
+                                <a:latin typeface="Cambria Math" panose="02040503050406030204" pitchFamily="18" charset="0"/>
+                              </a:rPr>
+                            </m:ctrlPr>
+                          </m:sSubPr>
+                          <m:e>
+                            <m:r>
+                              <a:rPr lang="en-US" i="1">
+                                <a:latin typeface="Cambria Math" panose="02040503050406030204" pitchFamily="18" charset="0"/>
+                              </a:rPr>
+                              <m:t>𝑅</m:t>
+                            </m:r>
+                          </m:e>
+                          <m:sub>
+                            <m:r>
+                              <a:rPr lang="en-US" i="1">
+                                <a:latin typeface="Cambria Math" panose="02040503050406030204" pitchFamily="18" charset="0"/>
+                              </a:rPr>
+                              <m:t>𝑡</m:t>
+                            </m:r>
+                            <m:r>
+                              <a:rPr lang="en-US" i="1">
+                                <a:latin typeface="Cambria Math" panose="02040503050406030204" pitchFamily="18" charset="0"/>
+                              </a:rPr>
+                              <m:t>+1</m:t>
+                            </m:r>
+                          </m:sub>
+                        </m:sSub>
+                        <m:r>
+                          <a:rPr lang="en-US" i="1">
+                            <a:latin typeface="Cambria Math" panose="02040503050406030204" pitchFamily="18" charset="0"/>
+                          </a:rPr>
+                          <m:t>+</m:t>
+                        </m:r>
+                        <m:r>
+                          <a:rPr lang="en-US" i="1">
+                            <a:latin typeface="Cambria Math" panose="02040503050406030204" pitchFamily="18" charset="0"/>
+                          </a:rPr>
+                          <m:t>𝛾</m:t>
+                        </m:r>
+                        <m:r>
+                          <a:rPr lang="en-US" i="1">
+                            <a:latin typeface="Cambria Math" panose="02040503050406030204" pitchFamily="18" charset="0"/>
+                          </a:rPr>
+                          <m:t>𝑉</m:t>
+                        </m:r>
+                        <m:d>
+                          <m:dPr>
+                            <m:ctrlPr>
+                              <a:rPr lang="en-US" i="1">
+                                <a:latin typeface="Cambria Math" panose="02040503050406030204" pitchFamily="18" charset="0"/>
+                              </a:rPr>
+                            </m:ctrlPr>
+                          </m:dPr>
+                          <m:e>
+                            <m:sSub>
+                              <m:sSubPr>
+                                <m:ctrlPr>
+                                  <a:rPr lang="en-US" i="1">
+                                    <a:latin typeface="Cambria Math" panose="02040503050406030204" pitchFamily="18" charset="0"/>
+                                  </a:rPr>
+                                </m:ctrlPr>
+                              </m:sSubPr>
+                              <m:e>
+                                <m:r>
+                                  <a:rPr lang="en-US" i="1">
+                                    <a:latin typeface="Cambria Math" panose="02040503050406030204" pitchFamily="18" charset="0"/>
+                                  </a:rPr>
+                                  <m:t>𝑆</m:t>
+                                </m:r>
+                              </m:e>
+                              <m:sub>
+                                <m:r>
+                                  <a:rPr lang="en-US" i="1">
+                                    <a:latin typeface="Cambria Math" panose="02040503050406030204" pitchFamily="18" charset="0"/>
+                                  </a:rPr>
+                                  <m:t>𝑡</m:t>
+                                </m:r>
+                                <m:r>
+                                  <a:rPr lang="en-US" i="1">
+                                    <a:latin typeface="Cambria Math" panose="02040503050406030204" pitchFamily="18" charset="0"/>
+                                  </a:rPr>
+                                  <m:t>+1</m:t>
+                                </m:r>
+                              </m:sub>
+                            </m:sSub>
+                          </m:e>
+                        </m:d>
+                        <m:r>
+                          <a:rPr lang="en-US" i="1">
+                            <a:latin typeface="Cambria Math" panose="02040503050406030204" pitchFamily="18" charset="0"/>
+                          </a:rPr>
+                          <m:t>−</m:t>
+                        </m:r>
+                        <m:r>
+                          <a:rPr lang="en-US" i="1">
+                            <a:latin typeface="Cambria Math" panose="02040503050406030204" pitchFamily="18" charset="0"/>
+                          </a:rPr>
+                          <m:t>𝑉</m:t>
+                        </m:r>
+                        <m:d>
+                          <m:dPr>
+                            <m:ctrlPr>
+                              <a:rPr lang="en-US" i="1">
+                                <a:latin typeface="Cambria Math" panose="02040503050406030204" pitchFamily="18" charset="0"/>
+                              </a:rPr>
+                            </m:ctrlPr>
+                          </m:dPr>
+                          <m:e>
+                            <m:sSub>
+                              <m:sSubPr>
+                                <m:ctrlPr>
+                                  <a:rPr lang="en-US" i="1">
+                                    <a:latin typeface="Cambria Math" panose="02040503050406030204" pitchFamily="18" charset="0"/>
+                                  </a:rPr>
+                                </m:ctrlPr>
+                              </m:sSubPr>
+                              <m:e>
+                                <m:r>
+                                  <a:rPr lang="en-US" i="1">
+                                    <a:latin typeface="Cambria Math" panose="02040503050406030204" pitchFamily="18" charset="0"/>
+                                  </a:rPr>
+                                  <m:t>𝑆</m:t>
+                                </m:r>
+                              </m:e>
+                              <m:sub>
+                                <m:r>
+                                  <a:rPr lang="en-US" i="1">
+                                    <a:latin typeface="Cambria Math" panose="02040503050406030204" pitchFamily="18" charset="0"/>
+                                  </a:rPr>
+                                  <m:t>𝑡</m:t>
+                                </m:r>
+                              </m:sub>
+                            </m:sSub>
+                          </m:e>
+                        </m:d>
+                      </m:e>
+                    </m:d>
+                  </m:oMath>
+                </a14:m>
+                <a:br>
+                  <a:rPr lang="en-US" dirty="0"/>
+                </a:br>
+                <a:br>
+                  <a:rPr lang="en-US" dirty="0"/>
+                </a:br>
+                <a:r>
+                  <a:rPr lang="en-US" dirty="0"/>
+                  <a:t>lead to an expected TD error of 0, i.e., the Bellman consistency conditions are met which means convergence.</a:t>
+                </a:r>
+              </a:p>
+              <a:p>
+                <a:endParaRPr lang="en-US" dirty="0"/>
+              </a:p>
+              <a:p>
+                <a:r>
+                  <a:rPr lang="en-US" dirty="0"/>
+                  <a:t>What is slow enough?</a:t>
                 </a:r>
               </a:p>
               <a:p>
@@ -24617,6 +25572,9 @@
                 <a:pPr marL="0" indent="0">
                   <a:buNone/>
                 </a:pPr>
+                <a:endParaRPr lang="en-US" dirty="0"/>
+              </a:p>
+              <a:p>
                 <a:endParaRPr lang="en-US" dirty="0"/>
               </a:p>
               <a:p>
@@ -24687,7 +25645,10 @@
                     </m:f>
                   </m:oMath>
                 </a14:m>
-                <a:endParaRPr lang="en-US" dirty="0"/>
+                <a:r>
+                  <a:rPr lang="en-US" dirty="0"/>
+                  <a:t>     (equivalent to incremental averaging)</a:t>
+                </a:r>
               </a:p>
               <a:p>
                 <a:endParaRPr lang="en-US" dirty="0"/>
@@ -24719,7 +25680,7 @@
               <a:blipFill>
                 <a:blip r:embed="rId2"/>
                 <a:stretch>
-                  <a:fillRect l="-522" t="-2168" r="-290"/>
+                  <a:fillRect l="-174" t="-1276"/>
                 </a:stretch>
               </a:blipFill>
             </p:spPr>
@@ -24754,7 +25715,7 @@
             </p:nvSpPr>
             <p:spPr>
               <a:xfrm>
-                <a:off x="4246900" y="3965055"/>
+                <a:off x="4234316" y="3989253"/>
                 <a:ext cx="3983011" cy="1124603"/>
               </a:xfrm>
               <a:prstGeom prst="rect">
@@ -24793,6 +25754,7 @@
                 </a:r>
               </a:p>
               <a:p>
+                <a:pPr/>
                 <a14:m>
                   <m:oMathPara xmlns:m="http://schemas.openxmlformats.org/officeDocument/2006/math">
                     <m:oMathParaPr>
@@ -24989,7 +25951,7 @@
             </p:nvSpPr>
             <p:spPr>
               <a:xfrm>
-                <a:off x="4246900" y="3965055"/>
+                <a:off x="4234316" y="3989253"/>
                 <a:ext cx="3983011" cy="1124603"/>
               </a:xfrm>
               <a:prstGeom prst="rect">
@@ -25031,13 +25993,13 @@
         </p:nvSpPr>
         <p:spPr>
           <a:xfrm>
-            <a:off x="3917117" y="5460670"/>
+            <a:off x="1824064" y="4630166"/>
             <a:ext cx="2048969" cy="337279"/>
           </a:xfrm>
           <a:prstGeom prst="wedgeRoundRectCallout">
             <a:avLst>
-              <a:gd name="adj1" fmla="val 15577"/>
-              <a:gd name="adj2" fmla="val -228611"/>
+              <a:gd name="adj1" fmla="val 81904"/>
+              <a:gd name="adj2" fmla="val -28387"/>
               <a:gd name="adj3" fmla="val 16667"/>
             </a:avLst>
           </a:prstGeom>
@@ -25084,13 +26046,13 @@
         </p:nvSpPr>
         <p:spPr>
           <a:xfrm>
-            <a:off x="6445458" y="5460670"/>
+            <a:off x="8622401" y="4342108"/>
             <a:ext cx="2599545" cy="625337"/>
           </a:xfrm>
           <a:prstGeom prst="wedgeRoundRectCallout">
             <a:avLst>
-              <a:gd name="adj1" fmla="val -14156"/>
-              <a:gd name="adj2" fmla="val -139218"/>
+              <a:gd name="adj1" fmla="val -73535"/>
+              <a:gd name="adj2" fmla="val 12373"/>
               <a:gd name="adj3" fmla="val 16667"/>
             </a:avLst>
           </a:prstGeom>
@@ -25169,6 +26131,55 @@
                                         <p:tgtEl>
                                           <p:spTgt spid="3">
                                             <p:txEl>
+                                              <p:pRg st="2" end="2"/>
+                                            </p:txEl>
+                                          </p:spTgt>
+                                        </p:tgtEl>
+                                        <p:attrNameLst>
+                                          <p:attrName>style.visibility</p:attrName>
+                                        </p:attrNameLst>
+                                      </p:cBhvr>
+                                      <p:to>
+                                        <p:strVal val="visible"/>
+                                      </p:to>
+                                    </p:set>
+                                  </p:childTnLst>
+                                </p:cTn>
+                              </p:par>
+                            </p:childTnLst>
+                          </p:cTn>
+                        </p:par>
+                      </p:childTnLst>
+                    </p:cTn>
+                  </p:par>
+                  <p:par>
+                    <p:cTn id="7" fill="hold">
+                      <p:stCondLst>
+                        <p:cond delay="indefinite"/>
+                      </p:stCondLst>
+                      <p:childTnLst>
+                        <p:par>
+                          <p:cTn id="8" fill="hold">
+                            <p:stCondLst>
+                              <p:cond delay="0"/>
+                            </p:stCondLst>
+                            <p:childTnLst>
+                              <p:par>
+                                <p:cTn id="9" presetID="1" presetClass="entr" presetSubtype="0" fill="hold" nodeType="clickEffect">
+                                  <p:stCondLst>
+                                    <p:cond delay="0"/>
+                                  </p:stCondLst>
+                                  <p:childTnLst>
+                                    <p:set>
+                                      <p:cBhvr>
+                                        <p:cTn id="10" dur="1" fill="hold">
+                                          <p:stCondLst>
+                                            <p:cond delay="0"/>
+                                          </p:stCondLst>
+                                        </p:cTn>
+                                        <p:tgtEl>
+                                          <p:spTgt spid="3">
+                                            <p:txEl>
                                               <p:pRg st="4" end="4"/>
                                             </p:txEl>
                                           </p:spTgt>
@@ -25184,15 +26195,33 @@
                                   </p:childTnLst>
                                 </p:cTn>
                               </p:par>
+                            </p:childTnLst>
+                          </p:cTn>
+                        </p:par>
+                      </p:childTnLst>
+                    </p:cTn>
+                  </p:par>
+                  <p:par>
+                    <p:cTn id="11" fill="hold">
+                      <p:stCondLst>
+                        <p:cond delay="indefinite"/>
+                      </p:stCondLst>
+                      <p:childTnLst>
+                        <p:par>
+                          <p:cTn id="12" fill="hold">
+                            <p:stCondLst>
+                              <p:cond delay="0"/>
+                            </p:stCondLst>
+                            <p:childTnLst>
                               <p:par>
-                                <p:cTn id="7" presetID="1" presetClass="entr" presetSubtype="0" fill="hold" grpId="0" nodeType="withEffect">
+                                <p:cTn id="13" presetID="1" presetClass="entr" presetSubtype="0" fill="hold" grpId="0" nodeType="clickEffect">
                                   <p:stCondLst>
                                     <p:cond delay="0"/>
                                   </p:stCondLst>
                                   <p:childTnLst>
                                     <p:set>
                                       <p:cBhvr>
-                                        <p:cTn id="8" dur="1" fill="hold">
+                                        <p:cTn id="14" dur="1" fill="hold">
                                           <p:stCondLst>
                                             <p:cond delay="0"/>
                                           </p:stCondLst>
@@ -25218,26 +26247,26 @@
                     </p:cTn>
                   </p:par>
                   <p:par>
-                    <p:cTn id="9" fill="hold">
+                    <p:cTn id="15" fill="hold">
                       <p:stCondLst>
                         <p:cond delay="indefinite"/>
                       </p:stCondLst>
                       <p:childTnLst>
                         <p:par>
-                          <p:cTn id="10" fill="hold">
+                          <p:cTn id="16" fill="hold">
                             <p:stCondLst>
                               <p:cond delay="0"/>
                             </p:stCondLst>
                             <p:childTnLst>
                               <p:par>
-                                <p:cTn id="11" presetID="1" presetClass="entr" presetSubtype="0" fill="hold" grpId="0" nodeType="clickEffect">
+                                <p:cTn id="17" presetID="1" presetClass="entr" presetSubtype="0" fill="hold" grpId="0" nodeType="clickEffect">
                                   <p:stCondLst>
                                     <p:cond delay="0"/>
                                   </p:stCondLst>
                                   <p:childTnLst>
                                     <p:set>
                                       <p:cBhvr>
-                                        <p:cTn id="12" dur="1" fill="hold">
+                                        <p:cTn id="18" dur="1" fill="hold">
                                           <p:stCondLst>
                                             <p:cond delay="0"/>
                                           </p:stCondLst>
@@ -25263,26 +26292,26 @@
                     </p:cTn>
                   </p:par>
                   <p:par>
-                    <p:cTn id="13" fill="hold">
+                    <p:cTn id="19" fill="hold">
                       <p:stCondLst>
                         <p:cond delay="indefinite"/>
                       </p:stCondLst>
                       <p:childTnLst>
                         <p:par>
-                          <p:cTn id="14" fill="hold">
+                          <p:cTn id="20" fill="hold">
                             <p:stCondLst>
                               <p:cond delay="0"/>
                             </p:stCondLst>
                             <p:childTnLst>
                               <p:par>
-                                <p:cTn id="15" presetID="1" presetClass="entr" presetSubtype="0" fill="hold" grpId="0" nodeType="clickEffect">
+                                <p:cTn id="21" presetID="1" presetClass="entr" presetSubtype="0" fill="hold" grpId="0" nodeType="clickEffect">
                                   <p:stCondLst>
                                     <p:cond delay="0"/>
                                   </p:stCondLst>
                                   <p:childTnLst>
                                     <p:set>
                                       <p:cBhvr>
-                                        <p:cTn id="16" dur="1" fill="hold">
+                                        <p:cTn id="22" dur="1" fill="hold">
                                           <p:stCondLst>
                                             <p:cond delay="0"/>
                                           </p:stCondLst>
@@ -25308,26 +26337,26 @@
                     </p:cTn>
                   </p:par>
                   <p:par>
-                    <p:cTn id="17" fill="hold">
+                    <p:cTn id="23" fill="hold">
                       <p:stCondLst>
                         <p:cond delay="indefinite"/>
                       </p:stCondLst>
                       <p:childTnLst>
                         <p:par>
-                          <p:cTn id="18" fill="hold">
+                          <p:cTn id="24" fill="hold">
                             <p:stCondLst>
                               <p:cond delay="0"/>
                             </p:stCondLst>
                             <p:childTnLst>
                               <p:par>
-                                <p:cTn id="19" presetID="1" presetClass="entr" presetSubtype="0" fill="hold" nodeType="clickEffect">
+                                <p:cTn id="25" presetID="1" presetClass="entr" presetSubtype="0" fill="hold" nodeType="clickEffect">
                                   <p:stCondLst>
                                     <p:cond delay="0"/>
                                   </p:stCondLst>
                                   <p:childTnLst>
                                     <p:set>
                                       <p:cBhvr>
-                                        <p:cTn id="20" dur="1" fill="hold">
+                                        <p:cTn id="26" dur="1" fill="hold">
                                           <p:stCondLst>
                                             <p:cond delay="0"/>
                                           </p:stCondLst>
@@ -25335,7 +26364,7 @@
                                         <p:tgtEl>
                                           <p:spTgt spid="3">
                                             <p:txEl>
-                                              <p:pRg st="9" end="9"/>
+                                              <p:pRg st="10" end="10"/>
                                             </p:txEl>
                                           </p:spTgt>
                                         </p:tgtEl>
@@ -25699,4 +26728,319 @@
     </a:ext>
   </a:extLst>
 </a:theme>
+</file>
+
+<file path=ppt/theme/theme2.xml><?xml version="1.0" encoding="utf-8"?>
+<a:theme xmlns:a="http://schemas.openxmlformats.org/drawingml/2006/main" name="Office Theme">
+  <a:themeElements>
+    <a:clrScheme name="Office">
+      <a:dk1>
+        <a:sysClr val="windowText" lastClr="000000"/>
+      </a:dk1>
+      <a:lt1>
+        <a:sysClr val="window" lastClr="FFFFFF"/>
+      </a:lt1>
+      <a:dk2>
+        <a:srgbClr val="0E2841"/>
+      </a:dk2>
+      <a:lt2>
+        <a:srgbClr val="E8E8E8"/>
+      </a:lt2>
+      <a:accent1>
+        <a:srgbClr val="156082"/>
+      </a:accent1>
+      <a:accent2>
+        <a:srgbClr val="E97132"/>
+      </a:accent2>
+      <a:accent3>
+        <a:srgbClr val="196B24"/>
+      </a:accent3>
+      <a:accent4>
+        <a:srgbClr val="0F9ED5"/>
+      </a:accent4>
+      <a:accent5>
+        <a:srgbClr val="A02B93"/>
+      </a:accent5>
+      <a:accent6>
+        <a:srgbClr val="4EA72E"/>
+      </a:accent6>
+      <a:hlink>
+        <a:srgbClr val="467886"/>
+      </a:hlink>
+      <a:folHlink>
+        <a:srgbClr val="96607D"/>
+      </a:folHlink>
+    </a:clrScheme>
+    <a:fontScheme name="Office">
+      <a:majorFont>
+        <a:latin typeface="Aptos Display" panose="02110004020202020204"/>
+        <a:ea typeface=""/>
+        <a:cs typeface=""/>
+        <a:font script="Jpan" typeface="游ゴシック Light"/>
+        <a:font script="Hang" typeface="맑은 고딕"/>
+        <a:font script="Hans" typeface="等线 Light"/>
+        <a:font script="Hant" typeface="新細明體"/>
+        <a:font script="Arab" typeface="Times New Roman"/>
+        <a:font script="Hebr" typeface="Times New Roman"/>
+        <a:font script="Thai" typeface="Angsana New"/>
+        <a:font script="Ethi" typeface="Nyala"/>
+        <a:font script="Beng" typeface="Vrinda"/>
+        <a:font script="Gujr" typeface="Shruti"/>
+        <a:font script="Khmr" typeface="MoolBoran"/>
+        <a:font script="Knda" typeface="Tunga"/>
+        <a:font script="Guru" typeface="Raavi"/>
+        <a:font script="Cans" typeface="Euphemia"/>
+        <a:font script="Cher" typeface="Plantagenet Cherokee"/>
+        <a:font script="Yiii" typeface="Microsoft Yi Baiti"/>
+        <a:font script="Tibt" typeface="Microsoft Himalaya"/>
+        <a:font script="Thaa" typeface="MV Boli"/>
+        <a:font script="Deva" typeface="Mangal"/>
+        <a:font script="Telu" typeface="Gautami"/>
+        <a:font script="Taml" typeface="Latha"/>
+        <a:font script="Syrc" typeface="Estrangelo Edessa"/>
+        <a:font script="Orya" typeface="Kalinga"/>
+        <a:font script="Mlym" typeface="Kartika"/>
+        <a:font script="Laoo" typeface="DokChampa"/>
+        <a:font script="Sinh" typeface="Iskoola Pota"/>
+        <a:font script="Mong" typeface="Mongolian Baiti"/>
+        <a:font script="Viet" typeface="Times New Roman"/>
+        <a:font script="Uigh" typeface="Microsoft Uighur"/>
+        <a:font script="Geor" typeface="Sylfaen"/>
+        <a:font script="Armn" typeface="Arial"/>
+        <a:font script="Bugi" typeface="Leelawadee UI"/>
+        <a:font script="Bopo" typeface="Microsoft JhengHei"/>
+        <a:font script="Java" typeface="Javanese Text"/>
+        <a:font script="Lisu" typeface="Segoe UI"/>
+        <a:font script="Mymr" typeface="Myanmar Text"/>
+        <a:font script="Nkoo" typeface="Ebrima"/>
+        <a:font script="Olck" typeface="Nirmala UI"/>
+        <a:font script="Osma" typeface="Ebrima"/>
+        <a:font script="Phag" typeface="Phagspa"/>
+        <a:font script="Syrn" typeface="Estrangelo Edessa"/>
+        <a:font script="Syrj" typeface="Estrangelo Edessa"/>
+        <a:font script="Syre" typeface="Estrangelo Edessa"/>
+        <a:font script="Sora" typeface="Nirmala UI"/>
+        <a:font script="Tale" typeface="Microsoft Tai Le"/>
+        <a:font script="Talu" typeface="Microsoft New Tai Lue"/>
+        <a:font script="Tfng" typeface="Ebrima"/>
+      </a:majorFont>
+      <a:minorFont>
+        <a:latin typeface="Aptos" panose="02110004020202020204"/>
+        <a:ea typeface=""/>
+        <a:cs typeface=""/>
+        <a:font script="Jpan" typeface="游ゴシック"/>
+        <a:font script="Hang" typeface="맑은 고딕"/>
+        <a:font script="Hans" typeface="等线"/>
+        <a:font script="Hant" typeface="新細明體"/>
+        <a:font script="Arab" typeface="Arial"/>
+        <a:font script="Hebr" typeface="Arial"/>
+        <a:font script="Thai" typeface="Cordia New"/>
+        <a:font script="Ethi" typeface="Nyala"/>
+        <a:font script="Beng" typeface="Vrinda"/>
+        <a:font script="Gujr" typeface="Shruti"/>
+        <a:font script="Khmr" typeface="DaunPenh"/>
+        <a:font script="Knda" typeface="Tunga"/>
+        <a:font script="Guru" typeface="Raavi"/>
+        <a:font script="Cans" typeface="Euphemia"/>
+        <a:font script="Cher" typeface="Plantagenet Cherokee"/>
+        <a:font script="Yiii" typeface="Microsoft Yi Baiti"/>
+        <a:font script="Tibt" typeface="Microsoft Himalaya"/>
+        <a:font script="Thaa" typeface="MV Boli"/>
+        <a:font script="Deva" typeface="Mangal"/>
+        <a:font script="Telu" typeface="Gautami"/>
+        <a:font script="Taml" typeface="Latha"/>
+        <a:font script="Syrc" typeface="Estrangelo Edessa"/>
+        <a:font script="Orya" typeface="Kalinga"/>
+        <a:font script="Mlym" typeface="Kartika"/>
+        <a:font script="Laoo" typeface="DokChampa"/>
+        <a:font script="Sinh" typeface="Iskoola Pota"/>
+        <a:font script="Mong" typeface="Mongolian Baiti"/>
+        <a:font script="Viet" typeface="Arial"/>
+        <a:font script="Uigh" typeface="Microsoft Uighur"/>
+        <a:font script="Geor" typeface="Sylfaen"/>
+        <a:font script="Armn" typeface="Arial"/>
+        <a:font script="Bugi" typeface="Leelawadee UI"/>
+        <a:font script="Bopo" typeface="Microsoft JhengHei"/>
+        <a:font script="Java" typeface="Javanese Text"/>
+        <a:font script="Lisu" typeface="Segoe UI"/>
+        <a:font script="Mymr" typeface="Myanmar Text"/>
+        <a:font script="Nkoo" typeface="Ebrima"/>
+        <a:font script="Olck" typeface="Nirmala UI"/>
+        <a:font script="Osma" typeface="Ebrima"/>
+        <a:font script="Phag" typeface="Phagspa"/>
+        <a:font script="Syrn" typeface="Estrangelo Edessa"/>
+        <a:font script="Syrj" typeface="Estrangelo Edessa"/>
+        <a:font script="Syre" typeface="Estrangelo Edessa"/>
+        <a:font script="Sora" typeface="Nirmala UI"/>
+        <a:font script="Tale" typeface="Microsoft Tai Le"/>
+        <a:font script="Talu" typeface="Microsoft New Tai Lue"/>
+        <a:font script="Tfng" typeface="Ebrima"/>
+      </a:minorFont>
+    </a:fontScheme>
+    <a:fmtScheme name="Office">
+      <a:fillStyleLst>
+        <a:solidFill>
+          <a:schemeClr val="phClr"/>
+        </a:solidFill>
+        <a:gradFill rotWithShape="1">
+          <a:gsLst>
+            <a:gs pos="0">
+              <a:schemeClr val="phClr">
+                <a:lumMod val="110000"/>
+                <a:satMod val="105000"/>
+                <a:tint val="67000"/>
+              </a:schemeClr>
+            </a:gs>
+            <a:gs pos="50000">
+              <a:schemeClr val="phClr">
+                <a:lumMod val="105000"/>
+                <a:satMod val="103000"/>
+                <a:tint val="73000"/>
+              </a:schemeClr>
+            </a:gs>
+            <a:gs pos="100000">
+              <a:schemeClr val="phClr">
+                <a:lumMod val="105000"/>
+                <a:satMod val="109000"/>
+                <a:tint val="81000"/>
+              </a:schemeClr>
+            </a:gs>
+          </a:gsLst>
+          <a:lin ang="5400000" scaled="0"/>
+        </a:gradFill>
+        <a:gradFill rotWithShape="1">
+          <a:gsLst>
+            <a:gs pos="0">
+              <a:schemeClr val="phClr">
+                <a:satMod val="103000"/>
+                <a:lumMod val="102000"/>
+                <a:tint val="94000"/>
+              </a:schemeClr>
+            </a:gs>
+            <a:gs pos="50000">
+              <a:schemeClr val="phClr">
+                <a:satMod val="110000"/>
+                <a:lumMod val="100000"/>
+                <a:shade val="100000"/>
+              </a:schemeClr>
+            </a:gs>
+            <a:gs pos="100000">
+              <a:schemeClr val="phClr">
+                <a:lumMod val="99000"/>
+                <a:satMod val="120000"/>
+                <a:shade val="78000"/>
+              </a:schemeClr>
+            </a:gs>
+          </a:gsLst>
+          <a:lin ang="5400000" scaled="0"/>
+        </a:gradFill>
+      </a:fillStyleLst>
+      <a:lnStyleLst>
+        <a:ln w="12700" cap="flat" cmpd="sng" algn="ctr">
+          <a:solidFill>
+            <a:schemeClr val="phClr"/>
+          </a:solidFill>
+          <a:prstDash val="solid"/>
+          <a:miter lim="800000"/>
+        </a:ln>
+        <a:ln w="19050" cap="flat" cmpd="sng" algn="ctr">
+          <a:solidFill>
+            <a:schemeClr val="phClr"/>
+          </a:solidFill>
+          <a:prstDash val="solid"/>
+          <a:miter lim="800000"/>
+        </a:ln>
+        <a:ln w="25400" cap="flat" cmpd="sng" algn="ctr">
+          <a:solidFill>
+            <a:schemeClr val="phClr"/>
+          </a:solidFill>
+          <a:prstDash val="solid"/>
+          <a:miter lim="800000"/>
+        </a:ln>
+      </a:lnStyleLst>
+      <a:effectStyleLst>
+        <a:effectStyle>
+          <a:effectLst/>
+        </a:effectStyle>
+        <a:effectStyle>
+          <a:effectLst/>
+        </a:effectStyle>
+        <a:effectStyle>
+          <a:effectLst>
+            <a:outerShdw blurRad="57150" dist="19050" dir="5400000" algn="ctr" rotWithShape="0">
+              <a:srgbClr val="000000">
+                <a:alpha val="63000"/>
+              </a:srgbClr>
+            </a:outerShdw>
+          </a:effectLst>
+        </a:effectStyle>
+      </a:effectStyleLst>
+      <a:bgFillStyleLst>
+        <a:solidFill>
+          <a:schemeClr val="phClr"/>
+        </a:solidFill>
+        <a:solidFill>
+          <a:schemeClr val="phClr">
+            <a:tint val="95000"/>
+            <a:satMod val="170000"/>
+          </a:schemeClr>
+        </a:solidFill>
+        <a:gradFill rotWithShape="1">
+          <a:gsLst>
+            <a:gs pos="0">
+              <a:schemeClr val="phClr">
+                <a:tint val="93000"/>
+                <a:satMod val="150000"/>
+                <a:shade val="98000"/>
+                <a:lumMod val="102000"/>
+              </a:schemeClr>
+            </a:gs>
+            <a:gs pos="50000">
+              <a:schemeClr val="phClr">
+                <a:tint val="98000"/>
+                <a:satMod val="130000"/>
+                <a:shade val="90000"/>
+                <a:lumMod val="103000"/>
+              </a:schemeClr>
+            </a:gs>
+            <a:gs pos="100000">
+              <a:schemeClr val="phClr">
+                <a:shade val="63000"/>
+                <a:satMod val="120000"/>
+              </a:schemeClr>
+            </a:gs>
+          </a:gsLst>
+          <a:lin ang="5400000" scaled="0"/>
+        </a:gradFill>
+      </a:bgFillStyleLst>
+    </a:fmtScheme>
+  </a:themeElements>
+  <a:objectDefaults>
+    <a:lnDef>
+      <a:spPr/>
+      <a:bodyPr/>
+      <a:lstStyle/>
+      <a:style>
+        <a:lnRef idx="2">
+          <a:schemeClr val="accent1"/>
+        </a:lnRef>
+        <a:fillRef idx="0">
+          <a:schemeClr val="accent1"/>
+        </a:fillRef>
+        <a:effectRef idx="1">
+          <a:schemeClr val="accent1"/>
+        </a:effectRef>
+        <a:fontRef idx="minor">
+          <a:schemeClr val="tx1"/>
+        </a:fontRef>
+      </a:style>
+    </a:lnDef>
+  </a:objectDefaults>
+  <a:extraClrSchemeLst/>
+  <a:extLst>
+    <a:ext uri="{05A4C25C-085E-4340-85A3-A5531E510DB2}">
+      <thm15:themeFamily xmlns:thm15="http://schemas.microsoft.com/office/thememl/2012/main" name="Office Theme" id="{2E142A2C-CD16-42D6-873A-C26D2A0506FA}" vid="{1BDDFF52-6CD6-40A5-AB3C-68EB2F1E4D0A}"/>
+    </a:ext>
+  </a:extLst>
+</a:theme>
 </file>
--- a/slides/Lecture_Chapter06.pptx
+++ b/slides/Lecture_Chapter06.pptx
@@ -280,7 +280,7 @@
           <a:p>
             <a:fld id="{2A92B22A-BE2A-43CB-B312-FF3A0A14567B}" type="datetimeFigureOut">
               <a:rPr lang="en-US" smtClean="0"/>
-              <a:t>2/12/2026</a:t>
+              <a:t>2/18/2026</a:t>
             </a:fld>
             <a:endParaRPr lang="en-US"/>
           </a:p>
@@ -778,7 +778,7 @@
           <a:p>
             <a:fld id="{3E22BF2E-04DA-469E-97C5-BB68A0368813}" type="datetimeFigureOut">
               <a:rPr lang="en-US" smtClean="0"/>
-              <a:t>2/12/2026</a:t>
+              <a:t>2/18/2026</a:t>
             </a:fld>
             <a:endParaRPr lang="en-US"/>
           </a:p>
@@ -976,7 +976,7 @@
           <a:p>
             <a:fld id="{3E22BF2E-04DA-469E-97C5-BB68A0368813}" type="datetimeFigureOut">
               <a:rPr lang="en-US" smtClean="0"/>
-              <a:t>2/12/2026</a:t>
+              <a:t>2/18/2026</a:t>
             </a:fld>
             <a:endParaRPr lang="en-US"/>
           </a:p>
@@ -1184,7 +1184,7 @@
           <a:p>
             <a:fld id="{3E22BF2E-04DA-469E-97C5-BB68A0368813}" type="datetimeFigureOut">
               <a:rPr lang="en-US" smtClean="0"/>
-              <a:t>2/12/2026</a:t>
+              <a:t>2/18/2026</a:t>
             </a:fld>
             <a:endParaRPr lang="en-US"/>
           </a:p>
@@ -1392,7 +1392,7 @@
           <a:p>
             <a:fld id="{3E22BF2E-04DA-469E-97C5-BB68A0368813}" type="datetimeFigureOut">
               <a:rPr lang="en-US" smtClean="0"/>
-              <a:t>2/12/2026</a:t>
+              <a:t>2/18/2026</a:t>
             </a:fld>
             <a:endParaRPr lang="en-US"/>
           </a:p>
@@ -1667,7 +1667,7 @@
           <a:p>
             <a:fld id="{3E22BF2E-04DA-469E-97C5-BB68A0368813}" type="datetimeFigureOut">
               <a:rPr lang="en-US" smtClean="0"/>
-              <a:t>2/12/2026</a:t>
+              <a:t>2/18/2026</a:t>
             </a:fld>
             <a:endParaRPr lang="en-US"/>
           </a:p>
@@ -1932,7 +1932,7 @@
           <a:p>
             <a:fld id="{3E22BF2E-04DA-469E-97C5-BB68A0368813}" type="datetimeFigureOut">
               <a:rPr lang="en-US" smtClean="0"/>
-              <a:t>2/12/2026</a:t>
+              <a:t>2/18/2026</a:t>
             </a:fld>
             <a:endParaRPr lang="en-US"/>
           </a:p>
@@ -2344,7 +2344,7 @@
           <a:p>
             <a:fld id="{3E22BF2E-04DA-469E-97C5-BB68A0368813}" type="datetimeFigureOut">
               <a:rPr lang="en-US" smtClean="0"/>
-              <a:t>2/12/2026</a:t>
+              <a:t>2/18/2026</a:t>
             </a:fld>
             <a:endParaRPr lang="en-US"/>
           </a:p>
@@ -2485,7 +2485,7 @@
           <a:p>
             <a:fld id="{3E22BF2E-04DA-469E-97C5-BB68A0368813}" type="datetimeFigureOut">
               <a:rPr lang="en-US" smtClean="0"/>
-              <a:t>2/12/2026</a:t>
+              <a:t>2/18/2026</a:t>
             </a:fld>
             <a:endParaRPr lang="en-US"/>
           </a:p>
@@ -2598,7 +2598,7 @@
           <a:p>
             <a:fld id="{3E22BF2E-04DA-469E-97C5-BB68A0368813}" type="datetimeFigureOut">
               <a:rPr lang="en-US" smtClean="0"/>
-              <a:t>2/12/2026</a:t>
+              <a:t>2/18/2026</a:t>
             </a:fld>
             <a:endParaRPr lang="en-US"/>
           </a:p>
@@ -2909,7 +2909,7 @@
           <a:p>
             <a:fld id="{3E22BF2E-04DA-469E-97C5-BB68A0368813}" type="datetimeFigureOut">
               <a:rPr lang="en-US" smtClean="0"/>
-              <a:t>2/12/2026</a:t>
+              <a:t>2/18/2026</a:t>
             </a:fld>
             <a:endParaRPr lang="en-US"/>
           </a:p>
@@ -3197,7 +3197,7 @@
           <a:p>
             <a:fld id="{3E22BF2E-04DA-469E-97C5-BB68A0368813}" type="datetimeFigureOut">
               <a:rPr lang="en-US" smtClean="0"/>
-              <a:t>2/12/2026</a:t>
+              <a:t>2/18/2026</a:t>
             </a:fld>
             <a:endParaRPr lang="en-US"/>
           </a:p>
@@ -3438,7 +3438,7 @@
           <a:p>
             <a:fld id="{3E22BF2E-04DA-469E-97C5-BB68A0368813}" type="datetimeFigureOut">
               <a:rPr lang="en-US" smtClean="0"/>
-              <a:t>2/12/2026</a:t>
+              <a:t>2/18/2026</a:t>
             </a:fld>
             <a:endParaRPr lang="en-US"/>
           </a:p>
@@ -11984,819 +11984,6 @@
           <a:chExt cx="0" cy="0"/>
         </a:xfrm>
       </p:grpSpPr>
-      <p:sp>
-        <p:nvSpPr>
-          <p:cNvPr id="2" name="Title 1">
-            <a:extLst>
-              <a:ext uri="{FF2B5EF4-FFF2-40B4-BE49-F238E27FC236}">
-                <a16:creationId xmlns:a16="http://schemas.microsoft.com/office/drawing/2014/main" id="{47EA2BBB-A726-1EF6-3427-57B33AC4A406}"/>
-              </a:ext>
-            </a:extLst>
-          </p:cNvPr>
-          <p:cNvSpPr>
-            <a:spLocks noGrp="1"/>
-          </p:cNvSpPr>
-          <p:nvPr>
-            <p:ph type="title"/>
-          </p:nvPr>
-        </p:nvSpPr>
-        <p:spPr/>
-        <p:txBody>
-          <a:bodyPr/>
-          <a:lstStyle/>
-          <a:p>
-            <a:r>
-              <a:rPr lang="en-US" dirty="0"/>
-              <a:t>Comparison: 1-step Backup Diagrams</a:t>
-            </a:r>
-          </a:p>
-        </p:txBody>
-      </p:sp>
-      <p:grpSp>
-        <p:nvGrpSpPr>
-          <p:cNvPr id="3" name="Group 2">
-            <a:extLst>
-              <a:ext uri="{FF2B5EF4-FFF2-40B4-BE49-F238E27FC236}">
-                <a16:creationId xmlns:a16="http://schemas.microsoft.com/office/drawing/2014/main" id="{DC8187D2-C651-211E-F36F-28F57A9AE11F}"/>
-              </a:ext>
-            </a:extLst>
-          </p:cNvPr>
-          <p:cNvGrpSpPr/>
-          <p:nvPr/>
-        </p:nvGrpSpPr>
-        <p:grpSpPr>
-          <a:xfrm>
-            <a:off x="2712656" y="1307163"/>
-            <a:ext cx="5965095" cy="2111669"/>
-            <a:chOff x="2637816" y="2846877"/>
-            <a:chExt cx="5965095" cy="2111669"/>
-          </a:xfrm>
-        </p:grpSpPr>
-        <p:grpSp>
-          <p:nvGrpSpPr>
-            <p:cNvPr id="4" name="Group 3">
-              <a:extLst>
-                <a:ext uri="{FF2B5EF4-FFF2-40B4-BE49-F238E27FC236}">
-                  <a16:creationId xmlns:a16="http://schemas.microsoft.com/office/drawing/2014/main" id="{E816A4BA-29C5-E498-E49B-2A5D1934C3AC}"/>
-                </a:ext>
-              </a:extLst>
-            </p:cNvPr>
-            <p:cNvGrpSpPr/>
-            <p:nvPr/>
-          </p:nvGrpSpPr>
-          <p:grpSpPr>
-            <a:xfrm>
-              <a:off x="2637816" y="2846877"/>
-              <a:ext cx="5965095" cy="2111669"/>
-              <a:chOff x="2373562" y="2582670"/>
-              <a:chExt cx="5965095" cy="2111669"/>
-            </a:xfrm>
-          </p:grpSpPr>
-          <p:pic>
-            <p:nvPicPr>
-              <p:cNvPr id="10" name="Picture 9">
-                <a:extLst>
-                  <a:ext uri="{FF2B5EF4-FFF2-40B4-BE49-F238E27FC236}">
-                    <a16:creationId xmlns:a16="http://schemas.microsoft.com/office/drawing/2014/main" id="{079CA762-1D81-E9C9-CDF2-B465A9EF93D5}"/>
-                  </a:ext>
-                </a:extLst>
-              </p:cNvPr>
-              <p:cNvPicPr>
-                <a:picLocks noChangeAspect="1"/>
-              </p:cNvPicPr>
-              <p:nvPr/>
-            </p:nvPicPr>
-            <p:blipFill>
-              <a:blip r:embed="rId2"/>
-              <a:stretch>
-                <a:fillRect/>
-              </a:stretch>
-            </p:blipFill>
-            <p:spPr>
-              <a:xfrm>
-                <a:off x="2373562" y="2955408"/>
-                <a:ext cx="5965095" cy="606381"/>
-              </a:xfrm>
-              <a:prstGeom prst="rect">
-                <a:avLst/>
-              </a:prstGeom>
-            </p:spPr>
-          </p:pic>
-          <p:sp>
-            <p:nvSpPr>
-              <p:cNvPr id="17" name="Arc 16">
-                <a:extLst>
-                  <a:ext uri="{FF2B5EF4-FFF2-40B4-BE49-F238E27FC236}">
-                    <a16:creationId xmlns:a16="http://schemas.microsoft.com/office/drawing/2014/main" id="{D8A8134D-2B73-F837-EAFB-A58F7D294338}"/>
-                  </a:ext>
-                </a:extLst>
-              </p:cNvPr>
-              <p:cNvSpPr/>
-              <p:nvPr/>
-            </p:nvSpPr>
-            <p:spPr>
-              <a:xfrm>
-                <a:off x="3744294" y="3074530"/>
-                <a:ext cx="1514911" cy="854643"/>
-              </a:xfrm>
-              <a:prstGeom prst="arc">
-                <a:avLst>
-                  <a:gd name="adj1" fmla="val 942545"/>
-                  <a:gd name="adj2" fmla="val 9972429"/>
-                </a:avLst>
-              </a:prstGeom>
-              <a:ln>
-                <a:headEnd type="none" w="med" len="med"/>
-                <a:tailEnd type="triangle" w="med" len="med"/>
-              </a:ln>
-            </p:spPr>
-            <p:style>
-              <a:lnRef idx="2">
-                <a:schemeClr val="accent1"/>
-              </a:lnRef>
-              <a:fillRef idx="0">
-                <a:schemeClr val="accent1"/>
-              </a:fillRef>
-              <a:effectRef idx="1">
-                <a:schemeClr val="accent1"/>
-              </a:effectRef>
-              <a:fontRef idx="minor">
-                <a:schemeClr val="tx1"/>
-              </a:fontRef>
-            </p:style>
-            <p:txBody>
-              <a:bodyPr rtlCol="0" anchor="ctr"/>
-              <a:lstStyle/>
-              <a:p>
-                <a:pPr algn="ctr"/>
-                <a:endParaRPr lang="en-US"/>
-              </a:p>
-            </p:txBody>
-          </p:sp>
-          <mc:AlternateContent xmlns:mc="http://schemas.openxmlformats.org/markup-compatibility/2006" xmlns:a14="http://schemas.microsoft.com/office/drawing/2010/main">
-            <mc:Choice Requires="a14">
-              <p:sp>
-                <p:nvSpPr>
-                  <p:cNvPr id="18" name="TextBox 17">
-                    <a:extLst>
-                      <a:ext uri="{FF2B5EF4-FFF2-40B4-BE49-F238E27FC236}">
-                        <a16:creationId xmlns:a16="http://schemas.microsoft.com/office/drawing/2014/main" id="{DB63FB16-329F-D55F-9114-898178CEA391}"/>
-                      </a:ext>
-                    </a:extLst>
-                  </p:cNvPr>
-                  <p:cNvSpPr txBox="1"/>
-                  <p:nvPr/>
-                </p:nvSpPr>
-                <p:spPr>
-                  <a:xfrm>
-                    <a:off x="3380142" y="3423317"/>
-                    <a:ext cx="1049672" cy="285206"/>
-                  </a:xfrm>
-                  <a:prstGeom prst="rect">
-                    <a:avLst/>
-                  </a:prstGeom>
-                  <a:noFill/>
-                </p:spPr>
-                <p:txBody>
-                  <a:bodyPr wrap="square">
-                    <a:spAutoFit/>
-                  </a:bodyPr>
-                  <a:lstStyle/>
-                  <a:p>
-                    <a:pPr/>
-                    <a14:m>
-                      <m:oMathPara xmlns:m="http://schemas.openxmlformats.org/officeDocument/2006/math">
-                        <m:oMathParaPr>
-                          <m:jc m:val="centerGroup"/>
-                        </m:oMathParaPr>
-                        <m:oMath xmlns:m="http://schemas.openxmlformats.org/officeDocument/2006/math">
-                          <m:r>
-                            <a:rPr lang="en-US" sz="1200" b="0" i="1" smtClean="0">
-                              <a:latin typeface="Cambria Math" panose="02040503050406030204" pitchFamily="18" charset="0"/>
-                            </a:rPr>
-                            <m:t>𝑄</m:t>
-                          </m:r>
-                          <m:r>
-                            <a:rPr lang="en-US" sz="1200" i="1" smtClean="0">
-                              <a:latin typeface="Cambria Math" panose="02040503050406030204" pitchFamily="18" charset="0"/>
-                            </a:rPr>
-                            <m:t>(</m:t>
-                          </m:r>
-                          <m:sSub>
-                            <m:sSubPr>
-                              <m:ctrlPr>
-                                <a:rPr lang="en-US" sz="1200" i="1">
-                                  <a:latin typeface="Cambria Math" panose="02040503050406030204" pitchFamily="18" charset="0"/>
-                                </a:rPr>
-                              </m:ctrlPr>
-                            </m:sSubPr>
-                            <m:e>
-                              <m:r>
-                                <a:rPr lang="en-US" sz="1200" i="1">
-                                  <a:latin typeface="Cambria Math" panose="02040503050406030204" pitchFamily="18" charset="0"/>
-                                </a:rPr>
-                                <m:t>𝑆</m:t>
-                              </m:r>
-                            </m:e>
-                            <m:sub>
-                              <m:r>
-                                <a:rPr lang="en-US" sz="1200" i="1">
-                                  <a:latin typeface="Cambria Math" panose="02040503050406030204" pitchFamily="18" charset="0"/>
-                                </a:rPr>
-                                <m:t>𝑡</m:t>
-                              </m:r>
-                            </m:sub>
-                          </m:sSub>
-                          <m:r>
-                            <a:rPr lang="en-US" sz="1200" b="0" i="1" smtClean="0">
-                              <a:latin typeface="Cambria Math" panose="02040503050406030204" pitchFamily="18" charset="0"/>
-                            </a:rPr>
-                            <m:t>,</m:t>
-                          </m:r>
-                          <m:sSub>
-                            <m:sSubPr>
-                              <m:ctrlPr>
-                                <a:rPr lang="en-US" sz="1200" b="0" i="1" smtClean="0">
-                                  <a:latin typeface="Cambria Math" panose="02040503050406030204" pitchFamily="18" charset="0"/>
-                                </a:rPr>
-                              </m:ctrlPr>
-                            </m:sSubPr>
-                            <m:e>
-                              <m:r>
-                                <a:rPr lang="en-US" sz="1200" b="0" i="1" smtClean="0">
-                                  <a:latin typeface="Cambria Math" panose="02040503050406030204" pitchFamily="18" charset="0"/>
-                                </a:rPr>
-                                <m:t>𝐴</m:t>
-                              </m:r>
-                            </m:e>
-                            <m:sub>
-                              <m:r>
-                                <a:rPr lang="en-US" sz="1200" b="0" i="1" smtClean="0">
-                                  <a:latin typeface="Cambria Math" panose="02040503050406030204" pitchFamily="18" charset="0"/>
-                                </a:rPr>
-                                <m:t>𝑡</m:t>
-                              </m:r>
-                            </m:sub>
-                          </m:sSub>
-                          <m:r>
-                            <a:rPr lang="en-US" sz="1200" i="1">
-                              <a:latin typeface="Cambria Math" panose="02040503050406030204" pitchFamily="18" charset="0"/>
-                            </a:rPr>
-                            <m:t>)</m:t>
-                          </m:r>
-                        </m:oMath>
-                      </m:oMathPara>
-                    </a14:m>
-                    <a:endParaRPr lang="en-US" sz="1200" dirty="0"/>
-                  </a:p>
-                </p:txBody>
-              </p:sp>
-            </mc:Choice>
-            <mc:Fallback xmlns="">
-              <p:sp>
-                <p:nvSpPr>
-                  <p:cNvPr id="18" name="TextBox 17">
-                    <a:extLst>
-                      <a:ext uri="{FF2B5EF4-FFF2-40B4-BE49-F238E27FC236}">
-                        <a16:creationId xmlns:a16="http://schemas.microsoft.com/office/drawing/2014/main" id="{DB63FB16-329F-D55F-9114-898178CEA391}"/>
-                      </a:ext>
-                    </a:extLst>
-                  </p:cNvPr>
-                  <p:cNvSpPr txBox="1">
-                    <a:spLocks noRot="1" noChangeAspect="1" noMove="1" noResize="1" noEditPoints="1" noAdjustHandles="1" noChangeArrowheads="1" noChangeShapeType="1" noTextEdit="1"/>
-                  </p:cNvSpPr>
-                  <p:nvPr/>
-                </p:nvSpPr>
-                <p:spPr>
-                  <a:xfrm>
-                    <a:off x="3380142" y="3423317"/>
-                    <a:ext cx="1049672" cy="285206"/>
-                  </a:xfrm>
-                  <a:prstGeom prst="rect">
-                    <a:avLst/>
-                  </a:prstGeom>
-                  <a:blipFill>
-                    <a:blip r:embed="rId3"/>
-                    <a:stretch>
-                      <a:fillRect b="-4255"/>
-                    </a:stretch>
-                  </a:blipFill>
-                </p:spPr>
-                <p:txBody>
-                  <a:bodyPr/>
-                  <a:lstStyle/>
-                  <a:p>
-                    <a:r>
-                      <a:rPr lang="en-US">
-                        <a:noFill/>
-                      </a:rPr>
-                      <a:t> </a:t>
-                    </a:r>
-                  </a:p>
-                </p:txBody>
-              </p:sp>
-            </mc:Fallback>
-          </mc:AlternateContent>
-          <mc:AlternateContent xmlns:mc="http://schemas.openxmlformats.org/markup-compatibility/2006" xmlns:a14="http://schemas.microsoft.com/office/drawing/2010/main">
-            <mc:Choice Requires="a14">
-              <p:sp>
-                <p:nvSpPr>
-                  <p:cNvPr id="19" name="TextBox 18">
-                    <a:extLst>
-                      <a:ext uri="{FF2B5EF4-FFF2-40B4-BE49-F238E27FC236}">
-                        <a16:creationId xmlns:a16="http://schemas.microsoft.com/office/drawing/2014/main" id="{CCC48D9B-D98F-0C33-B10A-3DC1477DEDA2}"/>
-                      </a:ext>
-                    </a:extLst>
-                  </p:cNvPr>
-                  <p:cNvSpPr txBox="1"/>
-                  <p:nvPr/>
-                </p:nvSpPr>
-                <p:spPr>
-                  <a:xfrm>
-                    <a:off x="4614828" y="3421985"/>
-                    <a:ext cx="1049672" cy="276999"/>
-                  </a:xfrm>
-                  <a:prstGeom prst="rect">
-                    <a:avLst/>
-                  </a:prstGeom>
-                  <a:noFill/>
-                </p:spPr>
-                <p:txBody>
-                  <a:bodyPr wrap="square">
-                    <a:spAutoFit/>
-                  </a:bodyPr>
-                  <a:lstStyle/>
-                  <a:p>
-                    <a:pPr/>
-                    <a14:m>
-                      <m:oMathPara xmlns:m="http://schemas.openxmlformats.org/officeDocument/2006/math">
-                        <m:oMathParaPr>
-                          <m:jc m:val="centerGroup"/>
-                        </m:oMathParaPr>
-                        <m:oMath xmlns:m="http://schemas.openxmlformats.org/officeDocument/2006/math">
-                          <m:r>
-                            <a:rPr lang="en-US" sz="1200" b="0" i="1" smtClean="0">
-                              <a:latin typeface="Cambria Math" panose="02040503050406030204" pitchFamily="18" charset="0"/>
-                            </a:rPr>
-                            <m:t>𝑄</m:t>
-                          </m:r>
-                          <m:r>
-                            <a:rPr lang="en-US" sz="1200" i="1" smtClean="0">
-                              <a:latin typeface="Cambria Math" panose="02040503050406030204" pitchFamily="18" charset="0"/>
-                            </a:rPr>
-                            <m:t>(</m:t>
-                          </m:r>
-                          <m:sSub>
-                            <m:sSubPr>
-                              <m:ctrlPr>
-                                <a:rPr lang="en-US" sz="1200" i="1">
-                                  <a:latin typeface="Cambria Math" panose="02040503050406030204" pitchFamily="18" charset="0"/>
-                                </a:rPr>
-                              </m:ctrlPr>
-                            </m:sSubPr>
-                            <m:e>
-                              <m:r>
-                                <a:rPr lang="en-US" sz="1200" i="1">
-                                  <a:latin typeface="Cambria Math" panose="02040503050406030204" pitchFamily="18" charset="0"/>
-                                </a:rPr>
-                                <m:t>𝑆</m:t>
-                              </m:r>
-                            </m:e>
-                            <m:sub>
-                              <m:r>
-                                <a:rPr lang="en-US" sz="1200" i="1">
-                                  <a:latin typeface="Cambria Math" panose="02040503050406030204" pitchFamily="18" charset="0"/>
-                                </a:rPr>
-                                <m:t>𝑡</m:t>
-                              </m:r>
-                              <m:r>
-                                <a:rPr lang="en-US" sz="1200" i="1">
-                                  <a:latin typeface="Cambria Math" panose="02040503050406030204" pitchFamily="18" charset="0"/>
-                                </a:rPr>
-                                <m:t>+1</m:t>
-                              </m:r>
-                            </m:sub>
-                          </m:sSub>
-                          <m:r>
-                            <a:rPr lang="en-US" sz="1200" b="0" i="1" smtClean="0">
-                              <a:latin typeface="Cambria Math" panose="02040503050406030204" pitchFamily="18" charset="0"/>
-                            </a:rPr>
-                            <m:t>,</m:t>
-                          </m:r>
-                          <m:sSub>
-                            <m:sSubPr>
-                              <m:ctrlPr>
-                                <a:rPr lang="en-US" sz="1200" b="0" i="1" smtClean="0">
-                                  <a:latin typeface="Cambria Math" panose="02040503050406030204" pitchFamily="18" charset="0"/>
-                                </a:rPr>
-                              </m:ctrlPr>
-                            </m:sSubPr>
-                            <m:e>
-                              <m:r>
-                                <a:rPr lang="en-US" sz="1200" b="0" i="1" smtClean="0">
-                                  <a:latin typeface="Cambria Math" panose="02040503050406030204" pitchFamily="18" charset="0"/>
-                                </a:rPr>
-                                <m:t>𝐴</m:t>
-                              </m:r>
-                            </m:e>
-                            <m:sub>
-                              <m:r>
-                                <a:rPr lang="en-US" sz="1200" b="0" i="1" smtClean="0">
-                                  <a:latin typeface="Cambria Math" panose="02040503050406030204" pitchFamily="18" charset="0"/>
-                                </a:rPr>
-                                <m:t>𝑡</m:t>
-                              </m:r>
-                              <m:r>
-                                <a:rPr lang="en-US" sz="1200" b="0" i="1" smtClean="0">
-                                  <a:latin typeface="Cambria Math" panose="02040503050406030204" pitchFamily="18" charset="0"/>
-                                </a:rPr>
-                                <m:t>+1</m:t>
-                              </m:r>
-                            </m:sub>
-                          </m:sSub>
-                          <m:r>
-                            <a:rPr lang="en-US" sz="1200" i="1">
-                              <a:latin typeface="Cambria Math" panose="02040503050406030204" pitchFamily="18" charset="0"/>
-                            </a:rPr>
-                            <m:t>)</m:t>
-                          </m:r>
-                        </m:oMath>
-                      </m:oMathPara>
-                    </a14:m>
-                    <a:endParaRPr lang="en-US" sz="1200" dirty="0"/>
-                  </a:p>
-                </p:txBody>
-              </p:sp>
-            </mc:Choice>
-            <mc:Fallback xmlns="">
-              <p:sp>
-                <p:nvSpPr>
-                  <p:cNvPr id="19" name="TextBox 18">
-                    <a:extLst>
-                      <a:ext uri="{FF2B5EF4-FFF2-40B4-BE49-F238E27FC236}">
-                        <a16:creationId xmlns:a16="http://schemas.microsoft.com/office/drawing/2014/main" id="{CCC48D9B-D98F-0C33-B10A-3DC1477DEDA2}"/>
-                      </a:ext>
-                    </a:extLst>
-                  </p:cNvPr>
-                  <p:cNvSpPr txBox="1">
-                    <a:spLocks noRot="1" noChangeAspect="1" noMove="1" noResize="1" noEditPoints="1" noAdjustHandles="1" noChangeArrowheads="1" noChangeShapeType="1" noTextEdit="1"/>
-                  </p:cNvSpPr>
-                  <p:nvPr/>
-                </p:nvSpPr>
-                <p:spPr>
-                  <a:xfrm>
-                    <a:off x="4614828" y="3421985"/>
-                    <a:ext cx="1049672" cy="276999"/>
-                  </a:xfrm>
-                  <a:prstGeom prst="rect">
-                    <a:avLst/>
-                  </a:prstGeom>
-                  <a:blipFill>
-                    <a:blip r:embed="rId13"/>
-                    <a:stretch>
-                      <a:fillRect b="-6522"/>
-                    </a:stretch>
-                  </a:blipFill>
-                </p:spPr>
-                <p:txBody>
-                  <a:bodyPr/>
-                  <a:lstStyle/>
-                  <a:p>
-                    <a:r>
-                      <a:rPr lang="en-US">
-                        <a:noFill/>
-                      </a:rPr>
-                      <a:t> </a:t>
-                    </a:r>
-                  </a:p>
-                </p:txBody>
-              </p:sp>
-            </mc:Fallback>
-          </mc:AlternateContent>
-          <p:sp>
-            <p:nvSpPr>
-              <p:cNvPr id="20" name="Arc 19">
-                <a:extLst>
-                  <a:ext uri="{FF2B5EF4-FFF2-40B4-BE49-F238E27FC236}">
-                    <a16:creationId xmlns:a16="http://schemas.microsoft.com/office/drawing/2014/main" id="{EB6D555F-71D5-466F-AA26-1C0B46F3DF17}"/>
-                  </a:ext>
-                </a:extLst>
-              </p:cNvPr>
-              <p:cNvSpPr/>
-              <p:nvPr/>
-            </p:nvSpPr>
-            <p:spPr>
-              <a:xfrm>
-                <a:off x="3797229" y="2582670"/>
-                <a:ext cx="464096" cy="1177771"/>
-              </a:xfrm>
-              <a:prstGeom prst="arc">
-                <a:avLst>
-                  <a:gd name="adj1" fmla="val 535615"/>
-                  <a:gd name="adj2" fmla="val 6095713"/>
-                </a:avLst>
-              </a:prstGeom>
-              <a:ln>
-                <a:headEnd type="none" w="med" len="med"/>
-                <a:tailEnd type="triangle" w="med" len="med"/>
-              </a:ln>
-            </p:spPr>
-            <p:style>
-              <a:lnRef idx="2">
-                <a:schemeClr val="accent1"/>
-              </a:lnRef>
-              <a:fillRef idx="0">
-                <a:schemeClr val="accent1"/>
-              </a:fillRef>
-              <a:effectRef idx="1">
-                <a:schemeClr val="accent1"/>
-              </a:effectRef>
-              <a:fontRef idx="minor">
-                <a:schemeClr val="tx1"/>
-              </a:fontRef>
-            </p:style>
-            <p:txBody>
-              <a:bodyPr rtlCol="0" anchor="ctr"/>
-              <a:lstStyle/>
-              <a:p>
-                <a:pPr algn="ctr"/>
-                <a:endParaRPr lang="en-US"/>
-              </a:p>
-            </p:txBody>
-          </p:sp>
-          <p:sp>
-            <p:nvSpPr>
-              <p:cNvPr id="21" name="TextBox 20">
-                <a:extLst>
-                  <a:ext uri="{FF2B5EF4-FFF2-40B4-BE49-F238E27FC236}">
-                    <a16:creationId xmlns:a16="http://schemas.microsoft.com/office/drawing/2014/main" id="{DB447D22-5746-B9E6-4B7F-D58201646AB7}"/>
-                  </a:ext>
-                </a:extLst>
-              </p:cNvPr>
-              <p:cNvSpPr txBox="1"/>
-              <p:nvPr/>
-            </p:nvSpPr>
-            <p:spPr>
-              <a:xfrm>
-                <a:off x="3963708" y="3955675"/>
-                <a:ext cx="1175956" cy="738664"/>
-              </a:xfrm>
-              <a:prstGeom prst="rect">
-                <a:avLst/>
-              </a:prstGeom>
-              <a:noFill/>
-            </p:spPr>
-            <p:txBody>
-              <a:bodyPr wrap="square" rtlCol="0">
-                <a:spAutoFit/>
-              </a:bodyPr>
-              <a:lstStyle/>
-              <a:p>
-                <a:pPr algn="ctr"/>
-                <a:r>
-                  <a:rPr lang="en-US" sz="1400" dirty="0">
-                    <a:solidFill>
-                      <a:schemeClr val="tx2">
-                        <a:lumMod val="90000"/>
-                        <a:lumOff val="10000"/>
-                      </a:schemeClr>
-                    </a:solidFill>
-                  </a:rPr>
-                  <a:t>Update to reduce the TD error</a:t>
-                </a:r>
-              </a:p>
-            </p:txBody>
-          </p:sp>
-          <p:sp>
-            <p:nvSpPr>
-              <p:cNvPr id="22" name="Right Brace 21">
-                <a:extLst>
-                  <a:ext uri="{FF2B5EF4-FFF2-40B4-BE49-F238E27FC236}">
-                    <a16:creationId xmlns:a16="http://schemas.microsoft.com/office/drawing/2014/main" id="{E25CDC5A-37CC-002F-E578-D71B185F9446}"/>
-                  </a:ext>
-                </a:extLst>
-              </p:cNvPr>
-              <p:cNvSpPr/>
-              <p:nvPr/>
-            </p:nvSpPr>
-            <p:spPr>
-              <a:xfrm rot="16200000">
-                <a:off x="4138402" y="2045388"/>
-                <a:ext cx="202889" cy="1731162"/>
-              </a:xfrm>
-              <a:prstGeom prst="rightBrace">
-                <a:avLst/>
-              </a:prstGeom>
-            </p:spPr>
-            <p:style>
-              <a:lnRef idx="2">
-                <a:schemeClr val="accent1"/>
-              </a:lnRef>
-              <a:fillRef idx="0">
-                <a:schemeClr val="accent1"/>
-              </a:fillRef>
-              <a:effectRef idx="1">
-                <a:schemeClr val="accent1"/>
-              </a:effectRef>
-              <a:fontRef idx="minor">
-                <a:schemeClr val="tx1"/>
-              </a:fontRef>
-            </p:style>
-            <p:txBody>
-              <a:bodyPr rtlCol="0" anchor="ctr"/>
-              <a:lstStyle/>
-              <a:p>
-                <a:pPr algn="ctr"/>
-                <a:endParaRPr lang="en-US"/>
-              </a:p>
-            </p:txBody>
-          </p:sp>
-          <p:sp>
-            <p:nvSpPr>
-              <p:cNvPr id="23" name="TextBox 22">
-                <a:extLst>
-                  <a:ext uri="{FF2B5EF4-FFF2-40B4-BE49-F238E27FC236}">
-                    <a16:creationId xmlns:a16="http://schemas.microsoft.com/office/drawing/2014/main" id="{77225B51-8649-F146-DE31-A737A77E9A34}"/>
-                  </a:ext>
-                </a:extLst>
-              </p:cNvPr>
-              <p:cNvSpPr txBox="1"/>
-              <p:nvPr/>
-            </p:nvSpPr>
-            <p:spPr>
-              <a:xfrm>
-                <a:off x="3877022" y="2587111"/>
-                <a:ext cx="725648" cy="261610"/>
-              </a:xfrm>
-              <a:prstGeom prst="rect">
-                <a:avLst/>
-              </a:prstGeom>
-              <a:noFill/>
-            </p:spPr>
-            <p:txBody>
-              <a:bodyPr wrap="square" rtlCol="0">
-                <a:spAutoFit/>
-              </a:bodyPr>
-              <a:lstStyle/>
-              <a:p>
-                <a:pPr algn="ctr"/>
-                <a:r>
-                  <a:rPr lang="en-US" sz="1100" dirty="0">
-                    <a:solidFill>
-                      <a:schemeClr val="tx2">
-                        <a:lumMod val="90000"/>
-                        <a:lumOff val="10000"/>
-                      </a:schemeClr>
-                    </a:solidFill>
-                  </a:rPr>
-                  <a:t>1-step</a:t>
-                </a:r>
-              </a:p>
-            </p:txBody>
-          </p:sp>
-        </p:grpSp>
-        <mc:AlternateContent xmlns:mc="http://schemas.openxmlformats.org/markup-compatibility/2006" xmlns:a14="http://schemas.microsoft.com/office/drawing/2010/main">
-          <mc:Choice Requires="a14">
-            <p:sp>
-              <p:nvSpPr>
-                <p:cNvPr id="6" name="Speech Bubble: Rectangle with Corners Rounded 5">
-                  <a:extLst>
-                    <a:ext uri="{FF2B5EF4-FFF2-40B4-BE49-F238E27FC236}">
-                      <a16:creationId xmlns:a16="http://schemas.microsoft.com/office/drawing/2014/main" id="{AE3E163A-3FD0-7FFA-C2DB-4366ECEC4DFF}"/>
-                    </a:ext>
-                  </a:extLst>
-                </p:cNvPr>
-                <p:cNvSpPr/>
-                <p:nvPr/>
-              </p:nvSpPr>
-              <p:spPr>
-                <a:xfrm>
-                  <a:off x="6021159" y="4193325"/>
-                  <a:ext cx="2320978" cy="606381"/>
-                </a:xfrm>
-                <a:prstGeom prst="wedgeRoundRectCallout">
-                  <a:avLst>
-                    <a:gd name="adj1" fmla="val -72489"/>
-                    <a:gd name="adj2" fmla="val -87969"/>
-                    <a:gd name="adj3" fmla="val 16667"/>
-                  </a:avLst>
-                </a:prstGeom>
-              </p:spPr>
-              <p:style>
-                <a:lnRef idx="2">
-                  <a:schemeClr val="accent1">
-                    <a:shade val="15000"/>
-                  </a:schemeClr>
-                </a:lnRef>
-                <a:fillRef idx="1">
-                  <a:schemeClr val="accent1"/>
-                </a:fillRef>
-                <a:effectRef idx="0">
-                  <a:schemeClr val="accent1"/>
-                </a:effectRef>
-                <a:fontRef idx="minor">
-                  <a:schemeClr val="lt1"/>
-                </a:fontRef>
-              </p:style>
-              <p:txBody>
-                <a:bodyPr rtlCol="0" anchor="ctr"/>
-                <a:lstStyle/>
-                <a:p>
-                  <a:pPr algn="ctr"/>
-                  <a:r>
-                    <a:rPr lang="en-US" sz="1400" dirty="0"/>
-                    <a:t>Bootstrap estimate of the remaining return </a:t>
-                  </a:r>
-                  <a14:m>
-                    <m:oMath xmlns:m="http://schemas.openxmlformats.org/officeDocument/2006/math">
-                      <m:sSub>
-                        <m:sSubPr>
-                          <m:ctrlPr>
-                            <a:rPr lang="en-US" sz="1400" b="0" i="1" smtClean="0">
-                              <a:latin typeface="Cambria Math" panose="02040503050406030204" pitchFamily="18" charset="0"/>
-                            </a:rPr>
-                          </m:ctrlPr>
-                        </m:sSubPr>
-                        <m:e>
-                          <m:r>
-                            <a:rPr lang="en-US" sz="1400" b="0" i="1" smtClean="0">
-                              <a:latin typeface="Cambria Math" panose="02040503050406030204" pitchFamily="18" charset="0"/>
-                            </a:rPr>
-                            <m:t>𝐺</m:t>
-                          </m:r>
-                        </m:e>
-                        <m:sub>
-                          <m:r>
-                            <a:rPr lang="en-US" sz="1400" b="0" i="1" smtClean="0">
-                              <a:latin typeface="Cambria Math" panose="02040503050406030204" pitchFamily="18" charset="0"/>
-                            </a:rPr>
-                            <m:t>𝑡</m:t>
-                          </m:r>
-                          <m:r>
-                            <a:rPr lang="en-US" sz="1400" b="0" i="1" smtClean="0">
-                              <a:latin typeface="Cambria Math" panose="02040503050406030204" pitchFamily="18" charset="0"/>
-                            </a:rPr>
-                            <m:t>+1</m:t>
-                          </m:r>
-                        </m:sub>
-                      </m:sSub>
-                    </m:oMath>
-                  </a14:m>
-                  <a:endParaRPr lang="en-US" sz="1400" dirty="0"/>
-                </a:p>
-              </p:txBody>
-            </p:sp>
-          </mc:Choice>
-          <mc:Fallback xmlns="">
-            <p:sp>
-              <p:nvSpPr>
-                <p:cNvPr id="6" name="Speech Bubble: Rectangle with Corners Rounded 5">
-                  <a:extLst>
-                    <a:ext uri="{FF2B5EF4-FFF2-40B4-BE49-F238E27FC236}">
-                      <a16:creationId xmlns:a16="http://schemas.microsoft.com/office/drawing/2014/main" id="{AE3E163A-3FD0-7FFA-C2DB-4366ECEC4DFF}"/>
-                    </a:ext>
-                  </a:extLst>
-                </p:cNvPr>
-                <p:cNvSpPr>
-                  <a:spLocks noRot="1" noChangeAspect="1" noMove="1" noResize="1" noEditPoints="1" noAdjustHandles="1" noChangeArrowheads="1" noChangeShapeType="1" noTextEdit="1"/>
-                </p:cNvSpPr>
-                <p:nvPr/>
-              </p:nvSpPr>
-              <p:spPr>
-                <a:xfrm>
-                  <a:off x="6021159" y="4193325"/>
-                  <a:ext cx="2320978" cy="606381"/>
-                </a:xfrm>
-                <a:prstGeom prst="wedgeRoundRectCallout">
-                  <a:avLst>
-                    <a:gd name="adj1" fmla="val -72489"/>
-                    <a:gd name="adj2" fmla="val -87969"/>
-                    <a:gd name="adj3" fmla="val 16667"/>
-                  </a:avLst>
-                </a:prstGeom>
-                <a:blipFill>
-                  <a:blip r:embed="rId14"/>
-                  <a:stretch>
-                    <a:fillRect b="-699"/>
-                  </a:stretch>
-                </a:blipFill>
-              </p:spPr>
-              <p:txBody>
-                <a:bodyPr/>
-                <a:lstStyle/>
-                <a:p>
-                  <a:r>
-                    <a:rPr lang="en-US">
-                      <a:noFill/>
-                    </a:rPr>
-                    <a:t> </a:t>
-                  </a:r>
-                </a:p>
-              </p:txBody>
-            </p:sp>
-          </mc:Fallback>
-        </mc:AlternateContent>
-      </p:grpSp>
       <p:grpSp>
         <p:nvGrpSpPr>
           <p:cNvPr id="26" name="Group 25">
@@ -12811,10 +11998,10 @@
         </p:nvGrpSpPr>
         <p:grpSpPr>
           <a:xfrm>
-            <a:off x="1203764" y="3465626"/>
-            <a:ext cx="9110026" cy="2236901"/>
-            <a:chOff x="1203764" y="3465626"/>
-            <a:chExt cx="9110026" cy="2236901"/>
+            <a:off x="1982784" y="3903929"/>
+            <a:ext cx="8738335" cy="1844817"/>
+            <a:chOff x="1060946" y="3465626"/>
+            <a:chExt cx="9513121" cy="2236901"/>
           </a:xfrm>
         </p:grpSpPr>
         <p:pic>
@@ -12832,15 +12019,15 @@
             <p:nvPr/>
           </p:nvPicPr>
           <p:blipFill>
-            <a:blip r:embed="rId15"/>
+            <a:blip r:embed="rId2"/>
             <a:stretch>
               <a:fillRect/>
             </a:stretch>
           </p:blipFill>
           <p:spPr>
             <a:xfrm>
-              <a:off x="4578940" y="3473366"/>
-              <a:ext cx="5734850" cy="2229161"/>
+              <a:off x="4839216" y="3473366"/>
+              <a:ext cx="5734851" cy="2229161"/>
             </a:xfrm>
             <a:prstGeom prst="rect">
               <a:avLst/>
@@ -12862,14 +12049,14 @@
             <p:nvPr/>
           </p:nvPicPr>
           <p:blipFill>
-            <a:blip r:embed="rId16"/>
+            <a:blip r:embed="rId3"/>
             <a:stretch>
               <a:fillRect/>
             </a:stretch>
           </p:blipFill>
           <p:spPr>
             <a:xfrm>
-              <a:off x="1674286" y="3563867"/>
+              <a:off x="1674287" y="3563867"/>
               <a:ext cx="1038370" cy="2048161"/>
             </a:xfrm>
             <a:prstGeom prst="rect">
@@ -13234,8 +12421,8 @@
             </p:sp>
           </mc:Fallback>
         </mc:AlternateContent>
-        <mc:AlternateContent xmlns:mc="http://schemas.openxmlformats.org/markup-compatibility/2006" xmlns:a14="http://schemas.microsoft.com/office/drawing/2010/main">
-          <mc:Choice Requires="a14">
+        <mc:AlternateContent xmlns:mc="http://schemas.openxmlformats.org/markup-compatibility/2006">
+          <mc:Choice xmlns:a14="http://schemas.microsoft.com/office/drawing/2010/main" Requires="a14">
             <p:sp>
               <p:nvSpPr>
                 <p:cNvPr id="13" name="TextBox 12">
@@ -13250,8 +12437,8 @@
               </p:nvSpPr>
               <p:spPr>
                 <a:xfrm>
-                  <a:off x="1698460" y="3846461"/>
-                  <a:ext cx="602038" cy="369332"/>
+                  <a:off x="1565065" y="3840991"/>
+                  <a:ext cx="602038" cy="369331"/>
                 </a:xfrm>
                 <a:prstGeom prst="rect">
                   <a:avLst/>
@@ -13310,7 +12497,7 @@
               </p:txBody>
             </p:sp>
           </mc:Choice>
-          <mc:Fallback xmlns="">
+          <mc:Fallback>
             <p:sp>
               <p:nvSpPr>
                 <p:cNvPr id="13" name="TextBox 12">
@@ -13327,8 +12514,8 @@
               </p:nvSpPr>
               <p:spPr>
                 <a:xfrm>
-                  <a:off x="1698460" y="3846461"/>
-                  <a:ext cx="602038" cy="369332"/>
+                  <a:off x="1565065" y="3840991"/>
+                  <a:ext cx="602038" cy="369331"/>
                 </a:xfrm>
                 <a:prstGeom prst="rect">
                   <a:avLst/>
@@ -13336,7 +12523,7 @@
                 <a:blipFill>
                   <a:blip r:embed="rId20"/>
                   <a:stretch>
-                    <a:fillRect/>
+                    <a:fillRect r="-5495" b="-20000"/>
                   </a:stretch>
                 </a:blipFill>
               </p:spPr>
@@ -13355,8 +12542,8 @@
             </p:sp>
           </mc:Fallback>
         </mc:AlternateContent>
-        <mc:AlternateContent xmlns:mc="http://schemas.openxmlformats.org/markup-compatibility/2006" xmlns:a14="http://schemas.microsoft.com/office/drawing/2010/main">
-          <mc:Choice Requires="a14">
+        <mc:AlternateContent xmlns:mc="http://schemas.openxmlformats.org/markup-compatibility/2006">
+          <mc:Choice xmlns:a14="http://schemas.microsoft.com/office/drawing/2010/main" Requires="a14">
             <p:sp>
               <p:nvSpPr>
                 <p:cNvPr id="14" name="TextBox 13">
@@ -13371,8 +12558,8 @@
               </p:nvSpPr>
               <p:spPr>
                 <a:xfrm>
-                  <a:off x="5695203" y="4493782"/>
-                  <a:ext cx="2184701" cy="369332"/>
+                  <a:off x="5855865" y="4536817"/>
+                  <a:ext cx="1656131" cy="335870"/>
                 </a:xfrm>
                 <a:prstGeom prst="rect">
                   <a:avLst/>
@@ -13391,7 +12578,7 @@
                         <m:rPr>
                           <m:nor/>
                         </m:rPr>
-                        <a:rPr lang="en-US" b="0" i="0" smtClean="0">
+                        <a:rPr lang="en-US" sz="1200" b="0" i="0" smtClean="0">
                           <a:latin typeface="Cambria Math" panose="02040503050406030204" pitchFamily="18" charset="0"/>
                         </a:rPr>
                         <m:t>max</m:t>
@@ -13399,14 +12586,14 @@
                     </m:oMath>
                   </a14:m>
                   <a:r>
-                    <a:rPr lang="en-US" dirty="0"/>
+                    <a:rPr lang="en-US" sz="1200" dirty="0"/>
                     <a:t> for target policy</a:t>
                   </a:r>
                 </a:p>
               </p:txBody>
             </p:sp>
           </mc:Choice>
-          <mc:Fallback xmlns="">
+          <mc:Fallback>
             <p:sp>
               <p:nvSpPr>
                 <p:cNvPr id="14" name="TextBox 13">
@@ -13423,8 +12610,8 @@
               </p:nvSpPr>
               <p:spPr>
                 <a:xfrm>
-                  <a:off x="5695203" y="4493782"/>
-                  <a:ext cx="2184701" cy="369332"/>
+                  <a:off x="5855865" y="4536817"/>
+                  <a:ext cx="1656131" cy="335870"/>
                 </a:xfrm>
                 <a:prstGeom prst="rect">
                   <a:avLst/>
@@ -13432,7 +12619,7 @@
                 <a:blipFill>
                   <a:blip r:embed="rId21"/>
                   <a:stretch>
-                    <a:fillRect t="-6557" r="-1671" b="-26230"/>
+                    <a:fillRect b="-15217"/>
                   </a:stretch>
                 </a:blipFill>
               </p:spPr>
@@ -13451,8 +12638,8 @@
             </p:sp>
           </mc:Fallback>
         </mc:AlternateContent>
-        <mc:AlternateContent xmlns:mc="http://schemas.openxmlformats.org/markup-compatibility/2006" xmlns:a14="http://schemas.microsoft.com/office/drawing/2010/main">
-          <mc:Choice Requires="a14">
+        <mc:AlternateContent xmlns:mc="http://schemas.openxmlformats.org/markup-compatibility/2006">
+          <mc:Choice xmlns:a14="http://schemas.microsoft.com/office/drawing/2010/main" Requires="a14">
             <p:sp>
               <p:nvSpPr>
                 <p:cNvPr id="15" name="TextBox 14">
@@ -13467,8 +12654,8 @@
               </p:nvSpPr>
               <p:spPr>
                 <a:xfrm>
-                  <a:off x="9403340" y="4493782"/>
-                  <a:ext cx="502381" cy="369332"/>
+                  <a:off x="9638555" y="4403280"/>
+                  <a:ext cx="502381" cy="369331"/>
                 </a:xfrm>
                 <a:prstGeom prst="rect">
                   <a:avLst/>
@@ -13524,7 +12711,7 @@
               </p:txBody>
             </p:sp>
           </mc:Choice>
-          <mc:Fallback xmlns="">
+          <mc:Fallback>
             <p:sp>
               <p:nvSpPr>
                 <p:cNvPr id="15" name="TextBox 14">
@@ -13541,8 +12728,8 @@
               </p:nvSpPr>
               <p:spPr>
                 <a:xfrm>
-                  <a:off x="9403340" y="4493782"/>
-                  <a:ext cx="502381" cy="369332"/>
+                  <a:off x="9638555" y="4403280"/>
+                  <a:ext cx="502381" cy="369331"/>
                 </a:xfrm>
                 <a:prstGeom prst="rect">
                   <a:avLst/>
@@ -13550,7 +12737,7 @@
                 <a:blipFill>
                   <a:blip r:embed="rId22"/>
                   <a:stretch>
-                    <a:fillRect/>
+                    <a:fillRect b="-16000"/>
                   </a:stretch>
                 </a:blipFill>
               </p:spPr>
@@ -13733,8 +12920,8 @@
             </p:sp>
           </mc:Fallback>
         </mc:AlternateContent>
-        <mc:AlternateContent xmlns:mc="http://schemas.openxmlformats.org/markup-compatibility/2006" xmlns:a14="http://schemas.microsoft.com/office/drawing/2010/main">
-          <mc:Choice Requires="a14">
+        <mc:AlternateContent xmlns:mc="http://schemas.openxmlformats.org/markup-compatibility/2006">
+          <mc:Choice xmlns:a14="http://schemas.microsoft.com/office/drawing/2010/main" Requires="a14">
             <p:sp>
               <p:nvSpPr>
                 <p:cNvPr id="25" name="TextBox 24">
@@ -13749,7 +12936,7 @@
               </p:nvSpPr>
               <p:spPr>
                 <a:xfrm>
-                  <a:off x="1203764" y="4836523"/>
+                  <a:off x="1060946" y="4925512"/>
                   <a:ext cx="1049672" cy="276999"/>
                 </a:xfrm>
                 <a:prstGeom prst="rect">
@@ -13864,7 +13051,7 @@
               </p:txBody>
             </p:sp>
           </mc:Choice>
-          <mc:Fallback xmlns="">
+          <mc:Fallback>
             <p:sp>
               <p:nvSpPr>
                 <p:cNvPr id="25" name="TextBox 24">
@@ -13881,7 +13068,7 @@
               </p:nvSpPr>
               <p:spPr>
                 <a:xfrm>
-                  <a:off x="1203764" y="4836523"/>
+                  <a:off x="1060946" y="4925512"/>
                   <a:ext cx="1049672" cy="276999"/>
                 </a:xfrm>
                 <a:prstGeom prst="rect">
@@ -13890,7 +13077,820 @@
                 <a:blipFill>
                   <a:blip r:embed="rId24"/>
                   <a:stretch>
-                    <a:fillRect b="-6522"/>
+                    <a:fillRect r="-8228" b="-32432"/>
+                  </a:stretch>
+                </a:blipFill>
+              </p:spPr>
+              <p:txBody>
+                <a:bodyPr/>
+                <a:lstStyle/>
+                <a:p>
+                  <a:r>
+                    <a:rPr lang="en-US">
+                      <a:noFill/>
+                    </a:rPr>
+                    <a:t> </a:t>
+                  </a:r>
+                </a:p>
+              </p:txBody>
+            </p:sp>
+          </mc:Fallback>
+        </mc:AlternateContent>
+      </p:grpSp>
+      <p:sp>
+        <p:nvSpPr>
+          <p:cNvPr id="2" name="Title 1">
+            <a:extLst>
+              <a:ext uri="{FF2B5EF4-FFF2-40B4-BE49-F238E27FC236}">
+                <a16:creationId xmlns:a16="http://schemas.microsoft.com/office/drawing/2014/main" id="{47EA2BBB-A726-1EF6-3427-57B33AC4A406}"/>
+              </a:ext>
+            </a:extLst>
+          </p:cNvPr>
+          <p:cNvSpPr>
+            <a:spLocks noGrp="1"/>
+          </p:cNvSpPr>
+          <p:nvPr>
+            <p:ph type="title"/>
+          </p:nvPr>
+        </p:nvSpPr>
+        <p:spPr/>
+        <p:txBody>
+          <a:bodyPr/>
+          <a:lstStyle/>
+          <a:p>
+            <a:r>
+              <a:rPr lang="en-US" dirty="0"/>
+              <a:t>Comparison: 1-step Backup Diagrams</a:t>
+            </a:r>
+          </a:p>
+        </p:txBody>
+      </p:sp>
+      <p:grpSp>
+        <p:nvGrpSpPr>
+          <p:cNvPr id="3" name="Group 2">
+            <a:extLst>
+              <a:ext uri="{FF2B5EF4-FFF2-40B4-BE49-F238E27FC236}">
+                <a16:creationId xmlns:a16="http://schemas.microsoft.com/office/drawing/2014/main" id="{DC8187D2-C651-211E-F36F-28F57A9AE11F}"/>
+              </a:ext>
+            </a:extLst>
+          </p:cNvPr>
+          <p:cNvGrpSpPr/>
+          <p:nvPr/>
+        </p:nvGrpSpPr>
+        <p:grpSpPr>
+          <a:xfrm>
+            <a:off x="2712656" y="1307163"/>
+            <a:ext cx="5965095" cy="1952829"/>
+            <a:chOff x="2637816" y="2846877"/>
+            <a:chExt cx="5965095" cy="1952829"/>
+          </a:xfrm>
+        </p:grpSpPr>
+        <p:grpSp>
+          <p:nvGrpSpPr>
+            <p:cNvPr id="4" name="Group 3">
+              <a:extLst>
+                <a:ext uri="{FF2B5EF4-FFF2-40B4-BE49-F238E27FC236}">
+                  <a16:creationId xmlns:a16="http://schemas.microsoft.com/office/drawing/2014/main" id="{E816A4BA-29C5-E498-E49B-2A5D1934C3AC}"/>
+                </a:ext>
+              </a:extLst>
+            </p:cNvPr>
+            <p:cNvGrpSpPr/>
+            <p:nvPr/>
+          </p:nvGrpSpPr>
+          <p:grpSpPr>
+            <a:xfrm>
+              <a:off x="2637816" y="2846877"/>
+              <a:ext cx="5965095" cy="1870236"/>
+              <a:chOff x="2373562" y="2582670"/>
+              <a:chExt cx="5965095" cy="1870236"/>
+            </a:xfrm>
+          </p:grpSpPr>
+          <p:pic>
+            <p:nvPicPr>
+              <p:cNvPr id="10" name="Picture 9">
+                <a:extLst>
+                  <a:ext uri="{FF2B5EF4-FFF2-40B4-BE49-F238E27FC236}">
+                    <a16:creationId xmlns:a16="http://schemas.microsoft.com/office/drawing/2014/main" id="{079CA762-1D81-E9C9-CDF2-B465A9EF93D5}"/>
+                  </a:ext>
+                </a:extLst>
+              </p:cNvPr>
+              <p:cNvPicPr>
+                <a:picLocks noChangeAspect="1"/>
+              </p:cNvPicPr>
+              <p:nvPr/>
+            </p:nvPicPr>
+            <p:blipFill>
+              <a:blip r:embed="rId25"/>
+              <a:stretch>
+                <a:fillRect/>
+              </a:stretch>
+            </p:blipFill>
+            <p:spPr>
+              <a:xfrm>
+                <a:off x="2373562" y="2955408"/>
+                <a:ext cx="5965095" cy="606381"/>
+              </a:xfrm>
+              <a:prstGeom prst="rect">
+                <a:avLst/>
+              </a:prstGeom>
+            </p:spPr>
+          </p:pic>
+          <p:sp>
+            <p:nvSpPr>
+              <p:cNvPr id="17" name="Arc 16">
+                <a:extLst>
+                  <a:ext uri="{FF2B5EF4-FFF2-40B4-BE49-F238E27FC236}">
+                    <a16:creationId xmlns:a16="http://schemas.microsoft.com/office/drawing/2014/main" id="{D8A8134D-2B73-F837-EAFB-A58F7D294338}"/>
+                  </a:ext>
+                </a:extLst>
+              </p:cNvPr>
+              <p:cNvSpPr/>
+              <p:nvPr/>
+            </p:nvSpPr>
+            <p:spPr>
+              <a:xfrm>
+                <a:off x="3744294" y="3074530"/>
+                <a:ext cx="1514911" cy="854643"/>
+              </a:xfrm>
+              <a:prstGeom prst="arc">
+                <a:avLst>
+                  <a:gd name="adj1" fmla="val 942545"/>
+                  <a:gd name="adj2" fmla="val 9972429"/>
+                </a:avLst>
+              </a:prstGeom>
+              <a:ln>
+                <a:headEnd type="none" w="med" len="med"/>
+                <a:tailEnd type="triangle" w="med" len="med"/>
+              </a:ln>
+            </p:spPr>
+            <p:style>
+              <a:lnRef idx="2">
+                <a:schemeClr val="accent1"/>
+              </a:lnRef>
+              <a:fillRef idx="0">
+                <a:schemeClr val="accent1"/>
+              </a:fillRef>
+              <a:effectRef idx="1">
+                <a:schemeClr val="accent1"/>
+              </a:effectRef>
+              <a:fontRef idx="minor">
+                <a:schemeClr val="tx1"/>
+              </a:fontRef>
+            </p:style>
+            <p:txBody>
+              <a:bodyPr rtlCol="0" anchor="ctr"/>
+              <a:lstStyle/>
+              <a:p>
+                <a:pPr algn="ctr"/>
+                <a:endParaRPr lang="en-US"/>
+              </a:p>
+            </p:txBody>
+          </p:sp>
+          <mc:AlternateContent xmlns:mc="http://schemas.openxmlformats.org/markup-compatibility/2006" xmlns:a14="http://schemas.microsoft.com/office/drawing/2010/main">
+            <mc:Choice Requires="a14">
+              <p:sp>
+                <p:nvSpPr>
+                  <p:cNvPr id="18" name="TextBox 17">
+                    <a:extLst>
+                      <a:ext uri="{FF2B5EF4-FFF2-40B4-BE49-F238E27FC236}">
+                        <a16:creationId xmlns:a16="http://schemas.microsoft.com/office/drawing/2014/main" id="{DB63FB16-329F-D55F-9114-898178CEA391}"/>
+                      </a:ext>
+                    </a:extLst>
+                  </p:cNvPr>
+                  <p:cNvSpPr txBox="1"/>
+                  <p:nvPr/>
+                </p:nvSpPr>
+                <p:spPr>
+                  <a:xfrm>
+                    <a:off x="3380142" y="3423317"/>
+                    <a:ext cx="1049672" cy="285206"/>
+                  </a:xfrm>
+                  <a:prstGeom prst="rect">
+                    <a:avLst/>
+                  </a:prstGeom>
+                  <a:noFill/>
+                </p:spPr>
+                <p:txBody>
+                  <a:bodyPr wrap="square">
+                    <a:spAutoFit/>
+                  </a:bodyPr>
+                  <a:lstStyle/>
+                  <a:p>
+                    <a:pPr/>
+                    <a14:m>
+                      <m:oMathPara xmlns:m="http://schemas.openxmlformats.org/officeDocument/2006/math">
+                        <m:oMathParaPr>
+                          <m:jc m:val="centerGroup"/>
+                        </m:oMathParaPr>
+                        <m:oMath xmlns:m="http://schemas.openxmlformats.org/officeDocument/2006/math">
+                          <m:r>
+                            <a:rPr lang="en-US" sz="1200" b="0" i="1" smtClean="0">
+                              <a:latin typeface="Cambria Math" panose="02040503050406030204" pitchFamily="18" charset="0"/>
+                            </a:rPr>
+                            <m:t>𝑄</m:t>
+                          </m:r>
+                          <m:r>
+                            <a:rPr lang="en-US" sz="1200" i="1" smtClean="0">
+                              <a:latin typeface="Cambria Math" panose="02040503050406030204" pitchFamily="18" charset="0"/>
+                            </a:rPr>
+                            <m:t>(</m:t>
+                          </m:r>
+                          <m:sSub>
+                            <m:sSubPr>
+                              <m:ctrlPr>
+                                <a:rPr lang="en-US" sz="1200" i="1">
+                                  <a:latin typeface="Cambria Math" panose="02040503050406030204" pitchFamily="18" charset="0"/>
+                                </a:rPr>
+                              </m:ctrlPr>
+                            </m:sSubPr>
+                            <m:e>
+                              <m:r>
+                                <a:rPr lang="en-US" sz="1200" i="1">
+                                  <a:latin typeface="Cambria Math" panose="02040503050406030204" pitchFamily="18" charset="0"/>
+                                </a:rPr>
+                                <m:t>𝑆</m:t>
+                              </m:r>
+                            </m:e>
+                            <m:sub>
+                              <m:r>
+                                <a:rPr lang="en-US" sz="1200" i="1">
+                                  <a:latin typeface="Cambria Math" panose="02040503050406030204" pitchFamily="18" charset="0"/>
+                                </a:rPr>
+                                <m:t>𝑡</m:t>
+                              </m:r>
+                            </m:sub>
+                          </m:sSub>
+                          <m:r>
+                            <a:rPr lang="en-US" sz="1200" b="0" i="1" smtClean="0">
+                              <a:latin typeface="Cambria Math" panose="02040503050406030204" pitchFamily="18" charset="0"/>
+                            </a:rPr>
+                            <m:t>,</m:t>
+                          </m:r>
+                          <m:sSub>
+                            <m:sSubPr>
+                              <m:ctrlPr>
+                                <a:rPr lang="en-US" sz="1200" b="0" i="1" smtClean="0">
+                                  <a:latin typeface="Cambria Math" panose="02040503050406030204" pitchFamily="18" charset="0"/>
+                                </a:rPr>
+                              </m:ctrlPr>
+                            </m:sSubPr>
+                            <m:e>
+                              <m:r>
+                                <a:rPr lang="en-US" sz="1200" b="0" i="1" smtClean="0">
+                                  <a:latin typeface="Cambria Math" panose="02040503050406030204" pitchFamily="18" charset="0"/>
+                                </a:rPr>
+                                <m:t>𝐴</m:t>
+                              </m:r>
+                            </m:e>
+                            <m:sub>
+                              <m:r>
+                                <a:rPr lang="en-US" sz="1200" b="0" i="1" smtClean="0">
+                                  <a:latin typeface="Cambria Math" panose="02040503050406030204" pitchFamily="18" charset="0"/>
+                                </a:rPr>
+                                <m:t>𝑡</m:t>
+                              </m:r>
+                            </m:sub>
+                          </m:sSub>
+                          <m:r>
+                            <a:rPr lang="en-US" sz="1200" i="1">
+                              <a:latin typeface="Cambria Math" panose="02040503050406030204" pitchFamily="18" charset="0"/>
+                            </a:rPr>
+                            <m:t>)</m:t>
+                          </m:r>
+                        </m:oMath>
+                      </m:oMathPara>
+                    </a14:m>
+                    <a:endParaRPr lang="en-US" sz="1200" dirty="0"/>
+                  </a:p>
+                </p:txBody>
+              </p:sp>
+            </mc:Choice>
+            <mc:Fallback xmlns="">
+              <p:sp>
+                <p:nvSpPr>
+                  <p:cNvPr id="18" name="TextBox 17">
+                    <a:extLst>
+                      <a:ext uri="{FF2B5EF4-FFF2-40B4-BE49-F238E27FC236}">
+                        <a16:creationId xmlns:a16="http://schemas.microsoft.com/office/drawing/2014/main" id="{DB63FB16-329F-D55F-9114-898178CEA391}"/>
+                      </a:ext>
+                    </a:extLst>
+                  </p:cNvPr>
+                  <p:cNvSpPr txBox="1">
+                    <a:spLocks noRot="1" noChangeAspect="1" noMove="1" noResize="1" noEditPoints="1" noAdjustHandles="1" noChangeArrowheads="1" noChangeShapeType="1" noTextEdit="1"/>
+                  </p:cNvSpPr>
+                  <p:nvPr/>
+                </p:nvSpPr>
+                <p:spPr>
+                  <a:xfrm>
+                    <a:off x="3380142" y="3423317"/>
+                    <a:ext cx="1049672" cy="285206"/>
+                  </a:xfrm>
+                  <a:prstGeom prst="rect">
+                    <a:avLst/>
+                  </a:prstGeom>
+                  <a:blipFill>
+                    <a:blip r:embed="rId26"/>
+                    <a:stretch>
+                      <a:fillRect b="-4255"/>
+                    </a:stretch>
+                  </a:blipFill>
+                </p:spPr>
+                <p:txBody>
+                  <a:bodyPr/>
+                  <a:lstStyle/>
+                  <a:p>
+                    <a:r>
+                      <a:rPr lang="en-US">
+                        <a:noFill/>
+                      </a:rPr>
+                      <a:t> </a:t>
+                    </a:r>
+                  </a:p>
+                </p:txBody>
+              </p:sp>
+            </mc:Fallback>
+          </mc:AlternateContent>
+          <mc:AlternateContent xmlns:mc="http://schemas.openxmlformats.org/markup-compatibility/2006" xmlns:a14="http://schemas.microsoft.com/office/drawing/2010/main">
+            <mc:Choice Requires="a14">
+              <p:sp>
+                <p:nvSpPr>
+                  <p:cNvPr id="19" name="TextBox 18">
+                    <a:extLst>
+                      <a:ext uri="{FF2B5EF4-FFF2-40B4-BE49-F238E27FC236}">
+                        <a16:creationId xmlns:a16="http://schemas.microsoft.com/office/drawing/2014/main" id="{CCC48D9B-D98F-0C33-B10A-3DC1477DEDA2}"/>
+                      </a:ext>
+                    </a:extLst>
+                  </p:cNvPr>
+                  <p:cNvSpPr txBox="1"/>
+                  <p:nvPr/>
+                </p:nvSpPr>
+                <p:spPr>
+                  <a:xfrm>
+                    <a:off x="4614828" y="3421985"/>
+                    <a:ext cx="1049672" cy="276999"/>
+                  </a:xfrm>
+                  <a:prstGeom prst="rect">
+                    <a:avLst/>
+                  </a:prstGeom>
+                  <a:noFill/>
+                </p:spPr>
+                <p:txBody>
+                  <a:bodyPr wrap="square">
+                    <a:spAutoFit/>
+                  </a:bodyPr>
+                  <a:lstStyle/>
+                  <a:p>
+                    <a:pPr/>
+                    <a14:m>
+                      <m:oMathPara xmlns:m="http://schemas.openxmlformats.org/officeDocument/2006/math">
+                        <m:oMathParaPr>
+                          <m:jc m:val="centerGroup"/>
+                        </m:oMathParaPr>
+                        <m:oMath xmlns:m="http://schemas.openxmlformats.org/officeDocument/2006/math">
+                          <m:r>
+                            <a:rPr lang="en-US" sz="1200" b="0" i="1" smtClean="0">
+                              <a:latin typeface="Cambria Math" panose="02040503050406030204" pitchFamily="18" charset="0"/>
+                            </a:rPr>
+                            <m:t>𝑄</m:t>
+                          </m:r>
+                          <m:r>
+                            <a:rPr lang="en-US" sz="1200" i="1" smtClean="0">
+                              <a:latin typeface="Cambria Math" panose="02040503050406030204" pitchFamily="18" charset="0"/>
+                            </a:rPr>
+                            <m:t>(</m:t>
+                          </m:r>
+                          <m:sSub>
+                            <m:sSubPr>
+                              <m:ctrlPr>
+                                <a:rPr lang="en-US" sz="1200" i="1">
+                                  <a:latin typeface="Cambria Math" panose="02040503050406030204" pitchFamily="18" charset="0"/>
+                                </a:rPr>
+                              </m:ctrlPr>
+                            </m:sSubPr>
+                            <m:e>
+                              <m:r>
+                                <a:rPr lang="en-US" sz="1200" i="1">
+                                  <a:latin typeface="Cambria Math" panose="02040503050406030204" pitchFamily="18" charset="0"/>
+                                </a:rPr>
+                                <m:t>𝑆</m:t>
+                              </m:r>
+                            </m:e>
+                            <m:sub>
+                              <m:r>
+                                <a:rPr lang="en-US" sz="1200" i="1">
+                                  <a:latin typeface="Cambria Math" panose="02040503050406030204" pitchFamily="18" charset="0"/>
+                                </a:rPr>
+                                <m:t>𝑡</m:t>
+                              </m:r>
+                              <m:r>
+                                <a:rPr lang="en-US" sz="1200" i="1">
+                                  <a:latin typeface="Cambria Math" panose="02040503050406030204" pitchFamily="18" charset="0"/>
+                                </a:rPr>
+                                <m:t>+1</m:t>
+                              </m:r>
+                            </m:sub>
+                          </m:sSub>
+                          <m:r>
+                            <a:rPr lang="en-US" sz="1200" b="0" i="1" smtClean="0">
+                              <a:latin typeface="Cambria Math" panose="02040503050406030204" pitchFamily="18" charset="0"/>
+                            </a:rPr>
+                            <m:t>,</m:t>
+                          </m:r>
+                          <m:sSub>
+                            <m:sSubPr>
+                              <m:ctrlPr>
+                                <a:rPr lang="en-US" sz="1200" b="0" i="1" smtClean="0">
+                                  <a:latin typeface="Cambria Math" panose="02040503050406030204" pitchFamily="18" charset="0"/>
+                                </a:rPr>
+                              </m:ctrlPr>
+                            </m:sSubPr>
+                            <m:e>
+                              <m:r>
+                                <a:rPr lang="en-US" sz="1200" b="0" i="1" smtClean="0">
+                                  <a:latin typeface="Cambria Math" panose="02040503050406030204" pitchFamily="18" charset="0"/>
+                                </a:rPr>
+                                <m:t>𝐴</m:t>
+                              </m:r>
+                            </m:e>
+                            <m:sub>
+                              <m:r>
+                                <a:rPr lang="en-US" sz="1200" b="0" i="1" smtClean="0">
+                                  <a:latin typeface="Cambria Math" panose="02040503050406030204" pitchFamily="18" charset="0"/>
+                                </a:rPr>
+                                <m:t>𝑡</m:t>
+                              </m:r>
+                              <m:r>
+                                <a:rPr lang="en-US" sz="1200" b="0" i="1" smtClean="0">
+                                  <a:latin typeface="Cambria Math" panose="02040503050406030204" pitchFamily="18" charset="0"/>
+                                </a:rPr>
+                                <m:t>+1</m:t>
+                              </m:r>
+                            </m:sub>
+                          </m:sSub>
+                          <m:r>
+                            <a:rPr lang="en-US" sz="1200" i="1">
+                              <a:latin typeface="Cambria Math" panose="02040503050406030204" pitchFamily="18" charset="0"/>
+                            </a:rPr>
+                            <m:t>)</m:t>
+                          </m:r>
+                        </m:oMath>
+                      </m:oMathPara>
+                    </a14:m>
+                    <a:endParaRPr lang="en-US" sz="1200" dirty="0"/>
+                  </a:p>
+                </p:txBody>
+              </p:sp>
+            </mc:Choice>
+            <mc:Fallback xmlns="">
+              <p:sp>
+                <p:nvSpPr>
+                  <p:cNvPr id="19" name="TextBox 18">
+                    <a:extLst>
+                      <a:ext uri="{FF2B5EF4-FFF2-40B4-BE49-F238E27FC236}">
+                        <a16:creationId xmlns:a16="http://schemas.microsoft.com/office/drawing/2014/main" id="{CCC48D9B-D98F-0C33-B10A-3DC1477DEDA2}"/>
+                      </a:ext>
+                    </a:extLst>
+                  </p:cNvPr>
+                  <p:cNvSpPr txBox="1">
+                    <a:spLocks noRot="1" noChangeAspect="1" noMove="1" noResize="1" noEditPoints="1" noAdjustHandles="1" noChangeArrowheads="1" noChangeShapeType="1" noTextEdit="1"/>
+                  </p:cNvSpPr>
+                  <p:nvPr/>
+                </p:nvSpPr>
+                <p:spPr>
+                  <a:xfrm>
+                    <a:off x="4614828" y="3421985"/>
+                    <a:ext cx="1049672" cy="276999"/>
+                  </a:xfrm>
+                  <a:prstGeom prst="rect">
+                    <a:avLst/>
+                  </a:prstGeom>
+                  <a:blipFill>
+                    <a:blip r:embed="rId13"/>
+                    <a:stretch>
+                      <a:fillRect b="-6522"/>
+                    </a:stretch>
+                  </a:blipFill>
+                </p:spPr>
+                <p:txBody>
+                  <a:bodyPr/>
+                  <a:lstStyle/>
+                  <a:p>
+                    <a:r>
+                      <a:rPr lang="en-US">
+                        <a:noFill/>
+                      </a:rPr>
+                      <a:t> </a:t>
+                    </a:r>
+                  </a:p>
+                </p:txBody>
+              </p:sp>
+            </mc:Fallback>
+          </mc:AlternateContent>
+          <p:sp>
+            <p:nvSpPr>
+              <p:cNvPr id="20" name="Arc 19">
+                <a:extLst>
+                  <a:ext uri="{FF2B5EF4-FFF2-40B4-BE49-F238E27FC236}">
+                    <a16:creationId xmlns:a16="http://schemas.microsoft.com/office/drawing/2014/main" id="{EB6D555F-71D5-466F-AA26-1C0B46F3DF17}"/>
+                  </a:ext>
+                </a:extLst>
+              </p:cNvPr>
+              <p:cNvSpPr/>
+              <p:nvPr/>
+            </p:nvSpPr>
+            <p:spPr>
+              <a:xfrm>
+                <a:off x="3797229" y="2582670"/>
+                <a:ext cx="464096" cy="1177771"/>
+              </a:xfrm>
+              <a:prstGeom prst="arc">
+                <a:avLst>
+                  <a:gd name="adj1" fmla="val 535615"/>
+                  <a:gd name="adj2" fmla="val 6095713"/>
+                </a:avLst>
+              </a:prstGeom>
+              <a:ln>
+                <a:headEnd type="none" w="med" len="med"/>
+                <a:tailEnd type="triangle" w="med" len="med"/>
+              </a:ln>
+            </p:spPr>
+            <p:style>
+              <a:lnRef idx="2">
+                <a:schemeClr val="accent1"/>
+              </a:lnRef>
+              <a:fillRef idx="0">
+                <a:schemeClr val="accent1"/>
+              </a:fillRef>
+              <a:effectRef idx="1">
+                <a:schemeClr val="accent1"/>
+              </a:effectRef>
+              <a:fontRef idx="minor">
+                <a:schemeClr val="tx1"/>
+              </a:fontRef>
+            </p:style>
+            <p:txBody>
+              <a:bodyPr rtlCol="0" anchor="ctr"/>
+              <a:lstStyle/>
+              <a:p>
+                <a:pPr algn="ctr"/>
+                <a:endParaRPr lang="en-US"/>
+              </a:p>
+            </p:txBody>
+          </p:sp>
+          <p:sp>
+            <p:nvSpPr>
+              <p:cNvPr id="21" name="TextBox 20">
+                <a:extLst>
+                  <a:ext uri="{FF2B5EF4-FFF2-40B4-BE49-F238E27FC236}">
+                    <a16:creationId xmlns:a16="http://schemas.microsoft.com/office/drawing/2014/main" id="{DB447D22-5746-B9E6-4B7F-D58201646AB7}"/>
+                  </a:ext>
+                </a:extLst>
+              </p:cNvPr>
+              <p:cNvSpPr txBox="1"/>
+              <p:nvPr/>
+            </p:nvSpPr>
+            <p:spPr>
+              <a:xfrm>
+                <a:off x="3744294" y="3929686"/>
+                <a:ext cx="1514911" cy="523220"/>
+              </a:xfrm>
+              <a:prstGeom prst="rect">
+                <a:avLst/>
+              </a:prstGeom>
+              <a:noFill/>
+            </p:spPr>
+            <p:txBody>
+              <a:bodyPr wrap="square" rtlCol="0">
+                <a:spAutoFit/>
+              </a:bodyPr>
+              <a:lstStyle/>
+              <a:p>
+                <a:pPr algn="ctr"/>
+                <a:r>
+                  <a:rPr lang="en-US" sz="1400" dirty="0">
+                    <a:solidFill>
+                      <a:schemeClr val="tx2">
+                        <a:lumMod val="90000"/>
+                        <a:lumOff val="10000"/>
+                      </a:schemeClr>
+                    </a:solidFill>
+                  </a:rPr>
+                  <a:t>Update to reduce the TD error</a:t>
+                </a:r>
+              </a:p>
+            </p:txBody>
+          </p:sp>
+          <p:sp>
+            <p:nvSpPr>
+              <p:cNvPr id="22" name="Right Brace 21">
+                <a:extLst>
+                  <a:ext uri="{FF2B5EF4-FFF2-40B4-BE49-F238E27FC236}">
+                    <a16:creationId xmlns:a16="http://schemas.microsoft.com/office/drawing/2014/main" id="{E25CDC5A-37CC-002F-E578-D71B185F9446}"/>
+                  </a:ext>
+                </a:extLst>
+              </p:cNvPr>
+              <p:cNvSpPr/>
+              <p:nvPr/>
+            </p:nvSpPr>
+            <p:spPr>
+              <a:xfrm rot="16200000">
+                <a:off x="4138402" y="2045388"/>
+                <a:ext cx="202889" cy="1731162"/>
+              </a:xfrm>
+              <a:prstGeom prst="rightBrace">
+                <a:avLst/>
+              </a:prstGeom>
+            </p:spPr>
+            <p:style>
+              <a:lnRef idx="2">
+                <a:schemeClr val="accent1"/>
+              </a:lnRef>
+              <a:fillRef idx="0">
+                <a:schemeClr val="accent1"/>
+              </a:fillRef>
+              <a:effectRef idx="1">
+                <a:schemeClr val="accent1"/>
+              </a:effectRef>
+              <a:fontRef idx="minor">
+                <a:schemeClr val="tx1"/>
+              </a:fontRef>
+            </p:style>
+            <p:txBody>
+              <a:bodyPr rtlCol="0" anchor="ctr"/>
+              <a:lstStyle/>
+              <a:p>
+                <a:pPr algn="ctr"/>
+                <a:endParaRPr lang="en-US"/>
+              </a:p>
+            </p:txBody>
+          </p:sp>
+          <p:sp>
+            <p:nvSpPr>
+              <p:cNvPr id="23" name="TextBox 22">
+                <a:extLst>
+                  <a:ext uri="{FF2B5EF4-FFF2-40B4-BE49-F238E27FC236}">
+                    <a16:creationId xmlns:a16="http://schemas.microsoft.com/office/drawing/2014/main" id="{77225B51-8649-F146-DE31-A737A77E9A34}"/>
+                  </a:ext>
+                </a:extLst>
+              </p:cNvPr>
+              <p:cNvSpPr txBox="1"/>
+              <p:nvPr/>
+            </p:nvSpPr>
+            <p:spPr>
+              <a:xfrm>
+                <a:off x="3877022" y="2587111"/>
+                <a:ext cx="725648" cy="261610"/>
+              </a:xfrm>
+              <a:prstGeom prst="rect">
+                <a:avLst/>
+              </a:prstGeom>
+              <a:noFill/>
+            </p:spPr>
+            <p:txBody>
+              <a:bodyPr wrap="square" rtlCol="0">
+                <a:spAutoFit/>
+              </a:bodyPr>
+              <a:lstStyle/>
+              <a:p>
+                <a:pPr algn="ctr"/>
+                <a:r>
+                  <a:rPr lang="en-US" sz="1100" dirty="0">
+                    <a:solidFill>
+                      <a:schemeClr val="tx2">
+                        <a:lumMod val="90000"/>
+                        <a:lumOff val="10000"/>
+                      </a:schemeClr>
+                    </a:solidFill>
+                  </a:rPr>
+                  <a:t>1-step</a:t>
+                </a:r>
+              </a:p>
+            </p:txBody>
+          </p:sp>
+        </p:grpSp>
+        <mc:AlternateContent xmlns:mc="http://schemas.openxmlformats.org/markup-compatibility/2006" xmlns:a14="http://schemas.microsoft.com/office/drawing/2010/main">
+          <mc:Choice Requires="a14">
+            <p:sp>
+              <p:nvSpPr>
+                <p:cNvPr id="6" name="Speech Bubble: Rectangle with Corners Rounded 5">
+                  <a:extLst>
+                    <a:ext uri="{FF2B5EF4-FFF2-40B4-BE49-F238E27FC236}">
+                      <a16:creationId xmlns:a16="http://schemas.microsoft.com/office/drawing/2014/main" id="{AE3E163A-3FD0-7FFA-C2DB-4366ECEC4DFF}"/>
+                    </a:ext>
+                  </a:extLst>
+                </p:cNvPr>
+                <p:cNvSpPr/>
+                <p:nvPr/>
+              </p:nvSpPr>
+              <p:spPr>
+                <a:xfrm>
+                  <a:off x="6021159" y="4193325"/>
+                  <a:ext cx="2320978" cy="606381"/>
+                </a:xfrm>
+                <a:prstGeom prst="wedgeRoundRectCallout">
+                  <a:avLst>
+                    <a:gd name="adj1" fmla="val -72489"/>
+                    <a:gd name="adj2" fmla="val -87969"/>
+                    <a:gd name="adj3" fmla="val 16667"/>
+                  </a:avLst>
+                </a:prstGeom>
+              </p:spPr>
+              <p:style>
+                <a:lnRef idx="2">
+                  <a:schemeClr val="accent1">
+                    <a:shade val="15000"/>
+                  </a:schemeClr>
+                </a:lnRef>
+                <a:fillRef idx="1">
+                  <a:schemeClr val="accent1"/>
+                </a:fillRef>
+                <a:effectRef idx="0">
+                  <a:schemeClr val="accent1"/>
+                </a:effectRef>
+                <a:fontRef idx="minor">
+                  <a:schemeClr val="lt1"/>
+                </a:fontRef>
+              </p:style>
+              <p:txBody>
+                <a:bodyPr rtlCol="0" anchor="ctr"/>
+                <a:lstStyle/>
+                <a:p>
+                  <a:pPr algn="ctr"/>
+                  <a:r>
+                    <a:rPr lang="en-US" sz="1400" dirty="0"/>
+                    <a:t>Bootstrap estimate of the remaining return </a:t>
+                  </a:r>
+                  <a14:m>
+                    <m:oMath xmlns:m="http://schemas.openxmlformats.org/officeDocument/2006/math">
+                      <m:sSub>
+                        <m:sSubPr>
+                          <m:ctrlPr>
+                            <a:rPr lang="en-US" sz="1400" b="0" i="1" smtClean="0">
+                              <a:latin typeface="Cambria Math" panose="02040503050406030204" pitchFamily="18" charset="0"/>
+                            </a:rPr>
+                          </m:ctrlPr>
+                        </m:sSubPr>
+                        <m:e>
+                          <m:r>
+                            <a:rPr lang="en-US" sz="1400" b="0" i="1" smtClean="0">
+                              <a:latin typeface="Cambria Math" panose="02040503050406030204" pitchFamily="18" charset="0"/>
+                            </a:rPr>
+                            <m:t>𝐺</m:t>
+                          </m:r>
+                        </m:e>
+                        <m:sub>
+                          <m:r>
+                            <a:rPr lang="en-US" sz="1400" b="0" i="1" smtClean="0">
+                              <a:latin typeface="Cambria Math" panose="02040503050406030204" pitchFamily="18" charset="0"/>
+                            </a:rPr>
+                            <m:t>𝑡</m:t>
+                          </m:r>
+                          <m:r>
+                            <a:rPr lang="en-US" sz="1400" b="0" i="1" smtClean="0">
+                              <a:latin typeface="Cambria Math" panose="02040503050406030204" pitchFamily="18" charset="0"/>
+                            </a:rPr>
+                            <m:t>+1</m:t>
+                          </m:r>
+                        </m:sub>
+                      </m:sSub>
+                    </m:oMath>
+                  </a14:m>
+                  <a:endParaRPr lang="en-US" sz="1400" dirty="0"/>
+                </a:p>
+              </p:txBody>
+            </p:sp>
+          </mc:Choice>
+          <mc:Fallback xmlns="">
+            <p:sp>
+              <p:nvSpPr>
+                <p:cNvPr id="6" name="Speech Bubble: Rectangle with Corners Rounded 5">
+                  <a:extLst>
+                    <a:ext uri="{FF2B5EF4-FFF2-40B4-BE49-F238E27FC236}">
+                      <a16:creationId xmlns:a16="http://schemas.microsoft.com/office/drawing/2014/main" id="{AE3E163A-3FD0-7FFA-C2DB-4366ECEC4DFF}"/>
+                    </a:ext>
+                  </a:extLst>
+                </p:cNvPr>
+                <p:cNvSpPr>
+                  <a:spLocks noRot="1" noChangeAspect="1" noMove="1" noResize="1" noEditPoints="1" noAdjustHandles="1" noChangeArrowheads="1" noChangeShapeType="1" noTextEdit="1"/>
+                </p:cNvSpPr>
+                <p:nvPr/>
+              </p:nvSpPr>
+              <p:spPr>
+                <a:xfrm>
+                  <a:off x="6021159" y="4193325"/>
+                  <a:ext cx="2320978" cy="606381"/>
+                </a:xfrm>
+                <a:prstGeom prst="wedgeRoundRectCallout">
+                  <a:avLst>
+                    <a:gd name="adj1" fmla="val -72489"/>
+                    <a:gd name="adj2" fmla="val -87969"/>
+                    <a:gd name="adj3" fmla="val 16667"/>
+                  </a:avLst>
+                </a:prstGeom>
+                <a:blipFill>
+                  <a:blip r:embed="rId14"/>
+                  <a:stretch>
+                    <a:fillRect b="-699"/>
                   </a:stretch>
                 </a:blipFill>
               </p:spPr>
@@ -13924,8 +13924,8 @@
         </p:nvSpPr>
         <p:spPr>
           <a:xfrm>
-            <a:off x="887061" y="5748746"/>
-            <a:ext cx="2986924" cy="923330"/>
+            <a:off x="1260901" y="5748746"/>
+            <a:ext cx="3192011" cy="523220"/>
           </a:xfrm>
           <a:prstGeom prst="rect">
             <a:avLst/>
@@ -13954,7 +13954,7 @@
           <a:lstStyle/>
           <a:p>
             <a:r>
-              <a:rPr lang="en-US" dirty="0"/>
+              <a:rPr lang="en-US" sz="1400" dirty="0"/>
               <a:t>On-policy: Updates with a next action following the learned policy.</a:t>
             </a:r>
           </a:p>
@@ -13974,8 +13974,8 @@
         </p:nvSpPr>
         <p:spPr>
           <a:xfrm>
-            <a:off x="4374750" y="5748746"/>
-            <a:ext cx="2861646" cy="923330"/>
+            <a:off x="4732910" y="5748746"/>
+            <a:ext cx="3058131" cy="523220"/>
           </a:xfrm>
           <a:prstGeom prst="rect">
             <a:avLst/>
@@ -14004,7 +14004,7 @@
           <a:lstStyle/>
           <a:p>
             <a:r>
-              <a:rPr lang="en-US" dirty="0"/>
+              <a:rPr lang="en-US" sz="1400" dirty="0"/>
               <a:t>Off-policy: Updates with the best next action for the target policy.</a:t>
             </a:r>
           </a:p>
@@ -14024,8 +14024,8 @@
         </p:nvSpPr>
         <p:spPr>
           <a:xfrm>
-            <a:off x="7654424" y="5748746"/>
-            <a:ext cx="2986924" cy="923330"/>
+            <a:off x="8028264" y="5748746"/>
+            <a:ext cx="3460459" cy="523220"/>
           </a:xfrm>
           <a:prstGeom prst="rect">
             <a:avLst/>
@@ -14054,12 +14054,835 @@
           <a:lstStyle/>
           <a:p>
             <a:r>
-              <a:rPr lang="en-US" dirty="0"/>
+              <a:rPr lang="en-US" sz="1400" dirty="0"/>
               <a:t>On-policy: Updates with the expectation over the action for the learned policy.</a:t>
             </a:r>
           </a:p>
         </p:txBody>
       </p:sp>
+      <mc:AlternateContent xmlns:mc="http://schemas.openxmlformats.org/markup-compatibility/2006">
+        <mc:Choice xmlns:a14="http://schemas.microsoft.com/office/drawing/2010/main" Requires="a14">
+          <p:sp>
+            <p:nvSpPr>
+              <p:cNvPr id="28" name="TextBox 27">
+                <a:extLst>
+                  <a:ext uri="{FF2B5EF4-FFF2-40B4-BE49-F238E27FC236}">
+                    <a16:creationId xmlns:a16="http://schemas.microsoft.com/office/drawing/2014/main" id="{4BAD7055-DE67-506C-6C69-5BC88E3D54E4}"/>
+                  </a:ext>
+                </a:extLst>
+              </p:cNvPr>
+              <p:cNvSpPr txBox="1"/>
+              <p:nvPr/>
+            </p:nvSpPr>
+            <p:spPr>
+              <a:xfrm>
+                <a:off x="1579111" y="3481304"/>
+                <a:ext cx="2464898" cy="307777"/>
+              </a:xfrm>
+              <a:prstGeom prst="rect">
+                <a:avLst/>
+              </a:prstGeom>
+              <a:noFill/>
+            </p:spPr>
+            <p:txBody>
+              <a:bodyPr wrap="square">
+                <a:spAutoFit/>
+              </a:bodyPr>
+              <a:lstStyle/>
+              <a:p>
+                <a:pPr/>
+                <a14:m>
+                  <m:oMathPara xmlns:m="http://schemas.openxmlformats.org/officeDocument/2006/math">
+                    <m:oMathParaPr>
+                      <m:jc m:val="centerGroup"/>
+                    </m:oMathParaPr>
+                    <m:oMath xmlns:m="http://schemas.openxmlformats.org/officeDocument/2006/math">
+                      <m:r>
+                        <a:rPr lang="en-US" sz="1400" b="0" i="1" smtClean="0">
+                          <a:latin typeface="Cambria Math" panose="02040503050406030204" pitchFamily="18" charset="0"/>
+                        </a:rPr>
+                        <m:t>𝑈</m:t>
+                      </m:r>
+                      <m:r>
+                        <a:rPr lang="en-US" sz="1400" b="0" i="1" smtClean="0">
+                          <a:latin typeface="Cambria Math" panose="02040503050406030204" pitchFamily="18" charset="0"/>
+                        </a:rPr>
+                        <m:t>=</m:t>
+                      </m:r>
+                      <m:sSub>
+                        <m:sSubPr>
+                          <m:ctrlPr>
+                            <a:rPr lang="en-US" sz="1400" b="0" i="1" smtClean="0">
+                              <a:latin typeface="Cambria Math" panose="02040503050406030204" pitchFamily="18" charset="0"/>
+                            </a:rPr>
+                          </m:ctrlPr>
+                        </m:sSubPr>
+                        <m:e>
+                          <m:r>
+                            <a:rPr lang="en-US" sz="1400" b="0" i="1" smtClean="0">
+                              <a:latin typeface="Cambria Math" panose="02040503050406030204" pitchFamily="18" charset="0"/>
+                            </a:rPr>
+                            <m:t>𝑅</m:t>
+                          </m:r>
+                        </m:e>
+                        <m:sub>
+                          <m:r>
+                            <a:rPr lang="en-US" sz="1400" b="0" i="1" smtClean="0">
+                              <a:latin typeface="Cambria Math" panose="02040503050406030204" pitchFamily="18" charset="0"/>
+                            </a:rPr>
+                            <m:t>𝑡</m:t>
+                          </m:r>
+                          <m:r>
+                            <a:rPr lang="en-US" sz="1400" b="0" i="1" smtClean="0">
+                              <a:latin typeface="Cambria Math" panose="02040503050406030204" pitchFamily="18" charset="0"/>
+                            </a:rPr>
+                            <m:t>+1</m:t>
+                          </m:r>
+                        </m:sub>
+                      </m:sSub>
+                      <m:r>
+                        <a:rPr lang="en-US" sz="1400" b="0" i="1" smtClean="0">
+                          <a:latin typeface="Cambria Math" panose="02040503050406030204" pitchFamily="18" charset="0"/>
+                        </a:rPr>
+                        <m:t>+</m:t>
+                      </m:r>
+                      <m:r>
+                        <a:rPr lang="en-US" sz="1400" b="0" i="1" smtClean="0">
+                          <a:latin typeface="Cambria Math" panose="02040503050406030204" pitchFamily="18" charset="0"/>
+                        </a:rPr>
+                        <m:t>𝛾</m:t>
+                      </m:r>
+                      <m:r>
+                        <a:rPr lang="en-US" sz="1400" b="0" i="1" smtClean="0">
+                          <a:latin typeface="Cambria Math" panose="02040503050406030204" pitchFamily="18" charset="0"/>
+                        </a:rPr>
+                        <m:t>𝑄</m:t>
+                      </m:r>
+                      <m:r>
+                        <a:rPr lang="en-US" sz="1400" i="1" smtClean="0">
+                          <a:latin typeface="Cambria Math" panose="02040503050406030204" pitchFamily="18" charset="0"/>
+                        </a:rPr>
+                        <m:t>(</m:t>
+                      </m:r>
+                      <m:sSub>
+                        <m:sSubPr>
+                          <m:ctrlPr>
+                            <a:rPr lang="en-US" sz="1400" i="1">
+                              <a:latin typeface="Cambria Math" panose="02040503050406030204" pitchFamily="18" charset="0"/>
+                            </a:rPr>
+                          </m:ctrlPr>
+                        </m:sSubPr>
+                        <m:e>
+                          <m:r>
+                            <a:rPr lang="en-US" sz="1400" i="1">
+                              <a:latin typeface="Cambria Math" panose="02040503050406030204" pitchFamily="18" charset="0"/>
+                            </a:rPr>
+                            <m:t>𝑆</m:t>
+                          </m:r>
+                        </m:e>
+                        <m:sub>
+                          <m:r>
+                            <a:rPr lang="en-US" sz="1400" i="1">
+                              <a:latin typeface="Cambria Math" panose="02040503050406030204" pitchFamily="18" charset="0"/>
+                            </a:rPr>
+                            <m:t>𝑡</m:t>
+                          </m:r>
+                          <m:r>
+                            <a:rPr lang="en-US" sz="1400" b="0" i="1" smtClean="0">
+                              <a:latin typeface="Cambria Math" panose="02040503050406030204" pitchFamily="18" charset="0"/>
+                            </a:rPr>
+                            <m:t>+1</m:t>
+                          </m:r>
+                        </m:sub>
+                      </m:sSub>
+                      <m:r>
+                        <a:rPr lang="en-US" sz="1400" b="0" i="1" smtClean="0">
+                          <a:latin typeface="Cambria Math" panose="02040503050406030204" pitchFamily="18" charset="0"/>
+                        </a:rPr>
+                        <m:t>,</m:t>
+                      </m:r>
+                      <m:sSub>
+                        <m:sSubPr>
+                          <m:ctrlPr>
+                            <a:rPr lang="en-US" sz="1400" b="0" i="1" smtClean="0">
+                              <a:latin typeface="Cambria Math" panose="02040503050406030204" pitchFamily="18" charset="0"/>
+                            </a:rPr>
+                          </m:ctrlPr>
+                        </m:sSubPr>
+                        <m:e>
+                          <m:r>
+                            <a:rPr lang="en-US" sz="1400" b="0" i="1" smtClean="0">
+                              <a:latin typeface="Cambria Math" panose="02040503050406030204" pitchFamily="18" charset="0"/>
+                            </a:rPr>
+                            <m:t>𝐴</m:t>
+                          </m:r>
+                        </m:e>
+                        <m:sub>
+                          <m:r>
+                            <a:rPr lang="en-US" sz="1400" b="0" i="1" smtClean="0">
+                              <a:latin typeface="Cambria Math" panose="02040503050406030204" pitchFamily="18" charset="0"/>
+                            </a:rPr>
+                            <m:t>𝑡</m:t>
+                          </m:r>
+                          <m:r>
+                            <a:rPr lang="en-US" sz="1400" b="0" i="1" smtClean="0">
+                              <a:latin typeface="Cambria Math" panose="02040503050406030204" pitchFamily="18" charset="0"/>
+                            </a:rPr>
+                            <m:t>+1</m:t>
+                          </m:r>
+                        </m:sub>
+                      </m:sSub>
+                      <m:r>
+                        <a:rPr lang="en-US" sz="1400" i="1">
+                          <a:latin typeface="Cambria Math" panose="02040503050406030204" pitchFamily="18" charset="0"/>
+                        </a:rPr>
+                        <m:t>)</m:t>
+                      </m:r>
+                    </m:oMath>
+                  </m:oMathPara>
+                </a14:m>
+                <a:endParaRPr lang="en-US" sz="1400" dirty="0"/>
+              </a:p>
+            </p:txBody>
+          </p:sp>
+        </mc:Choice>
+        <mc:Fallback>
+          <p:sp>
+            <p:nvSpPr>
+              <p:cNvPr id="28" name="TextBox 27">
+                <a:extLst>
+                  <a:ext uri="{FF2B5EF4-FFF2-40B4-BE49-F238E27FC236}">
+                    <a16:creationId xmlns:a16="http://schemas.microsoft.com/office/drawing/2014/main" id="{4BAD7055-DE67-506C-6C69-5BC88E3D54E4}"/>
+                  </a:ext>
+                </a:extLst>
+              </p:cNvPr>
+              <p:cNvSpPr txBox="1">
+                <a:spLocks noRot="1" noChangeAspect="1" noMove="1" noResize="1" noEditPoints="1" noAdjustHandles="1" noChangeArrowheads="1" noChangeShapeType="1" noTextEdit="1"/>
+              </p:cNvSpPr>
+              <p:nvPr/>
+            </p:nvSpPr>
+            <p:spPr>
+              <a:xfrm>
+                <a:off x="1579111" y="3481304"/>
+                <a:ext cx="2464898" cy="307777"/>
+              </a:xfrm>
+              <a:prstGeom prst="rect">
+                <a:avLst/>
+              </a:prstGeom>
+              <a:blipFill>
+                <a:blip r:embed="rId27"/>
+                <a:stretch>
+                  <a:fillRect b="-5882"/>
+                </a:stretch>
+              </a:blipFill>
+            </p:spPr>
+            <p:txBody>
+              <a:bodyPr/>
+              <a:lstStyle/>
+              <a:p>
+                <a:r>
+                  <a:rPr lang="en-US">
+                    <a:noFill/>
+                  </a:rPr>
+                  <a:t> </a:t>
+                </a:r>
+              </a:p>
+            </p:txBody>
+          </p:sp>
+        </mc:Fallback>
+      </mc:AlternateContent>
+      <mc:AlternateContent xmlns:mc="http://schemas.openxmlformats.org/markup-compatibility/2006">
+        <mc:Choice xmlns:a14="http://schemas.microsoft.com/office/drawing/2010/main" Requires="a14">
+          <p:sp>
+            <p:nvSpPr>
+              <p:cNvPr id="29" name="TextBox 28">
+                <a:extLst>
+                  <a:ext uri="{FF2B5EF4-FFF2-40B4-BE49-F238E27FC236}">
+                    <a16:creationId xmlns:a16="http://schemas.microsoft.com/office/drawing/2014/main" id="{910E339F-8641-BC7F-CC47-A19D94CC02F4}"/>
+                  </a:ext>
+                </a:extLst>
+              </p:cNvPr>
+              <p:cNvSpPr txBox="1"/>
+              <p:nvPr/>
+            </p:nvSpPr>
+            <p:spPr>
+              <a:xfrm>
+                <a:off x="4452912" y="3502559"/>
+                <a:ext cx="2743202" cy="374205"/>
+              </a:xfrm>
+              <a:prstGeom prst="rect">
+                <a:avLst/>
+              </a:prstGeom>
+              <a:noFill/>
+            </p:spPr>
+            <p:txBody>
+              <a:bodyPr wrap="square">
+                <a:spAutoFit/>
+              </a:bodyPr>
+              <a:lstStyle/>
+              <a:p>
+                <a:pPr/>
+                <a14:m>
+                  <m:oMathPara xmlns:m="http://schemas.openxmlformats.org/officeDocument/2006/math">
+                    <m:oMathParaPr>
+                      <m:jc m:val="centerGroup"/>
+                    </m:oMathParaPr>
+                    <m:oMath xmlns:m="http://schemas.openxmlformats.org/officeDocument/2006/math">
+                      <m:r>
+                        <a:rPr lang="en-US" sz="1400" b="0" i="1" smtClean="0">
+                          <a:latin typeface="Cambria Math" panose="02040503050406030204" pitchFamily="18" charset="0"/>
+                        </a:rPr>
+                        <m:t>𝑈</m:t>
+                      </m:r>
+                      <m:r>
+                        <a:rPr lang="en-US" sz="1400" b="0" i="1" smtClean="0">
+                          <a:latin typeface="Cambria Math" panose="02040503050406030204" pitchFamily="18" charset="0"/>
+                        </a:rPr>
+                        <m:t>=</m:t>
+                      </m:r>
+                      <m:sSub>
+                        <m:sSubPr>
+                          <m:ctrlPr>
+                            <a:rPr lang="en-US" sz="1400" b="0" i="1" smtClean="0">
+                              <a:latin typeface="Cambria Math" panose="02040503050406030204" pitchFamily="18" charset="0"/>
+                            </a:rPr>
+                          </m:ctrlPr>
+                        </m:sSubPr>
+                        <m:e>
+                          <m:r>
+                            <a:rPr lang="en-US" sz="1400" b="0" i="1" smtClean="0">
+                              <a:latin typeface="Cambria Math" panose="02040503050406030204" pitchFamily="18" charset="0"/>
+                            </a:rPr>
+                            <m:t>𝑅</m:t>
+                          </m:r>
+                        </m:e>
+                        <m:sub>
+                          <m:r>
+                            <a:rPr lang="en-US" sz="1400" b="0" i="1" smtClean="0">
+                              <a:latin typeface="Cambria Math" panose="02040503050406030204" pitchFamily="18" charset="0"/>
+                            </a:rPr>
+                            <m:t>𝑡</m:t>
+                          </m:r>
+                          <m:r>
+                            <a:rPr lang="en-US" sz="1400" b="0" i="1" smtClean="0">
+                              <a:latin typeface="Cambria Math" panose="02040503050406030204" pitchFamily="18" charset="0"/>
+                            </a:rPr>
+                            <m:t>+1</m:t>
+                          </m:r>
+                        </m:sub>
+                      </m:sSub>
+                      <m:r>
+                        <a:rPr lang="en-US" sz="1400" b="0" i="1" smtClean="0">
+                          <a:latin typeface="Cambria Math" panose="02040503050406030204" pitchFamily="18" charset="0"/>
+                        </a:rPr>
+                        <m:t>+</m:t>
+                      </m:r>
+                      <m:r>
+                        <a:rPr lang="en-US" sz="1400" b="0" i="1" smtClean="0">
+                          <a:latin typeface="Cambria Math" panose="02040503050406030204" pitchFamily="18" charset="0"/>
+                        </a:rPr>
+                        <m:t>𝛾</m:t>
+                      </m:r>
+                      <m:func>
+                        <m:funcPr>
+                          <m:ctrlPr>
+                            <a:rPr lang="en-US" sz="1400" b="0" i="1" smtClean="0">
+                              <a:latin typeface="Cambria Math" panose="02040503050406030204" pitchFamily="18" charset="0"/>
+                            </a:rPr>
+                          </m:ctrlPr>
+                        </m:funcPr>
+                        <m:fName>
+                          <m:limLow>
+                            <m:limLowPr>
+                              <m:ctrlPr>
+                                <a:rPr lang="en-US" sz="1400" b="0" i="1" smtClean="0">
+                                  <a:latin typeface="Cambria Math" panose="02040503050406030204" pitchFamily="18" charset="0"/>
+                                </a:rPr>
+                              </m:ctrlPr>
+                            </m:limLowPr>
+                            <m:e>
+                              <m:r>
+                                <m:rPr>
+                                  <m:sty m:val="p"/>
+                                </m:rPr>
+                                <a:rPr lang="en-US" sz="1400" b="0" i="0" smtClean="0">
+                                  <a:latin typeface="Cambria Math" panose="02040503050406030204" pitchFamily="18" charset="0"/>
+                                </a:rPr>
+                                <m:t>max</m:t>
+                              </m:r>
+                            </m:e>
+                            <m:lim>
+                              <m:r>
+                                <a:rPr lang="en-US" sz="1400" b="0" i="1" smtClean="0">
+                                  <a:latin typeface="Cambria Math" panose="02040503050406030204" pitchFamily="18" charset="0"/>
+                                </a:rPr>
+                                <m:t>𝑎</m:t>
+                              </m:r>
+                            </m:lim>
+                          </m:limLow>
+                        </m:fName>
+                        <m:e>
+                          <m:r>
+                            <a:rPr lang="en-US" sz="1400" i="1">
+                              <a:latin typeface="Cambria Math" panose="02040503050406030204" pitchFamily="18" charset="0"/>
+                            </a:rPr>
+                            <m:t>𝑄</m:t>
+                          </m:r>
+                          <m:r>
+                            <a:rPr lang="en-US" sz="1400" i="1">
+                              <a:latin typeface="Cambria Math" panose="02040503050406030204" pitchFamily="18" charset="0"/>
+                            </a:rPr>
+                            <m:t>(</m:t>
+                          </m:r>
+                          <m:sSub>
+                            <m:sSubPr>
+                              <m:ctrlPr>
+                                <a:rPr lang="en-US" sz="1400" i="1">
+                                  <a:latin typeface="Cambria Math" panose="02040503050406030204" pitchFamily="18" charset="0"/>
+                                </a:rPr>
+                              </m:ctrlPr>
+                            </m:sSubPr>
+                            <m:e>
+                              <m:r>
+                                <a:rPr lang="en-US" sz="1400" i="1">
+                                  <a:latin typeface="Cambria Math" panose="02040503050406030204" pitchFamily="18" charset="0"/>
+                                </a:rPr>
+                                <m:t>𝑆</m:t>
+                              </m:r>
+                            </m:e>
+                            <m:sub>
+                              <m:r>
+                                <a:rPr lang="en-US" sz="1400" i="1">
+                                  <a:latin typeface="Cambria Math" panose="02040503050406030204" pitchFamily="18" charset="0"/>
+                                </a:rPr>
+                                <m:t>𝑡</m:t>
+                              </m:r>
+                              <m:r>
+                                <a:rPr lang="en-US" sz="1400" i="1">
+                                  <a:latin typeface="Cambria Math" panose="02040503050406030204" pitchFamily="18" charset="0"/>
+                                </a:rPr>
+                                <m:t>+1</m:t>
+                              </m:r>
+                            </m:sub>
+                          </m:sSub>
+                          <m:r>
+                            <a:rPr lang="en-US" sz="1400" b="0" i="1" smtClean="0">
+                              <a:latin typeface="Cambria Math" panose="02040503050406030204" pitchFamily="18" charset="0"/>
+                            </a:rPr>
+                            <m:t>,</m:t>
+                          </m:r>
+                          <m:r>
+                            <a:rPr lang="en-US" sz="1400" b="0" i="1" smtClean="0">
+                              <a:latin typeface="Cambria Math" panose="02040503050406030204" pitchFamily="18" charset="0"/>
+                            </a:rPr>
+                            <m:t>𝑎</m:t>
+                          </m:r>
+                          <m:r>
+                            <a:rPr lang="en-US" sz="1400" i="1">
+                              <a:latin typeface="Cambria Math" panose="02040503050406030204" pitchFamily="18" charset="0"/>
+                            </a:rPr>
+                            <m:t>)</m:t>
+                          </m:r>
+                        </m:e>
+                      </m:func>
+                    </m:oMath>
+                  </m:oMathPara>
+                </a14:m>
+                <a:endParaRPr lang="en-US" sz="1400" dirty="0"/>
+              </a:p>
+            </p:txBody>
+          </p:sp>
+        </mc:Choice>
+        <mc:Fallback>
+          <p:sp>
+            <p:nvSpPr>
+              <p:cNvPr id="29" name="TextBox 28">
+                <a:extLst>
+                  <a:ext uri="{FF2B5EF4-FFF2-40B4-BE49-F238E27FC236}">
+                    <a16:creationId xmlns:a16="http://schemas.microsoft.com/office/drawing/2014/main" id="{910E339F-8641-BC7F-CC47-A19D94CC02F4}"/>
+                  </a:ext>
+                </a:extLst>
+              </p:cNvPr>
+              <p:cNvSpPr txBox="1">
+                <a:spLocks noRot="1" noChangeAspect="1" noMove="1" noResize="1" noEditPoints="1" noAdjustHandles="1" noChangeArrowheads="1" noChangeShapeType="1" noTextEdit="1"/>
+              </p:cNvSpPr>
+              <p:nvPr/>
+            </p:nvSpPr>
+            <p:spPr>
+              <a:xfrm>
+                <a:off x="4452912" y="3502559"/>
+                <a:ext cx="2743202" cy="374205"/>
+              </a:xfrm>
+              <a:prstGeom prst="rect">
+                <a:avLst/>
+              </a:prstGeom>
+              <a:blipFill>
+                <a:blip r:embed="rId28"/>
+                <a:stretch>
+                  <a:fillRect/>
+                </a:stretch>
+              </a:blipFill>
+            </p:spPr>
+            <p:txBody>
+              <a:bodyPr/>
+              <a:lstStyle/>
+              <a:p>
+                <a:r>
+                  <a:rPr lang="en-US">
+                    <a:noFill/>
+                  </a:rPr>
+                  <a:t> </a:t>
+                </a:r>
+              </a:p>
+            </p:txBody>
+          </p:sp>
+        </mc:Fallback>
+      </mc:AlternateContent>
+      <p:sp>
+        <p:nvSpPr>
+          <p:cNvPr id="30" name="TextBox 29">
+            <a:extLst>
+              <a:ext uri="{FF2B5EF4-FFF2-40B4-BE49-F238E27FC236}">
+                <a16:creationId xmlns:a16="http://schemas.microsoft.com/office/drawing/2014/main" id="{1E83FA3B-81BD-8362-6C7F-87B12A33FE94}"/>
+              </a:ext>
+            </a:extLst>
+          </p:cNvPr>
+          <p:cNvSpPr txBox="1"/>
+          <p:nvPr/>
+        </p:nvSpPr>
+        <p:spPr>
+          <a:xfrm>
+            <a:off x="602122" y="3429000"/>
+            <a:ext cx="903702" cy="369332"/>
+          </a:xfrm>
+          <a:prstGeom prst="rect">
+            <a:avLst/>
+          </a:prstGeom>
+          <a:noFill/>
+        </p:spPr>
+        <p:txBody>
+          <a:bodyPr wrap="square" rtlCol="0">
+            <a:spAutoFit/>
+          </a:bodyPr>
+          <a:lstStyle/>
+          <a:p>
+            <a:r>
+              <a:rPr lang="en-US" dirty="0"/>
+              <a:t>Target:</a:t>
+            </a:r>
+          </a:p>
+        </p:txBody>
+      </p:sp>
+      <mc:AlternateContent xmlns:mc="http://schemas.openxmlformats.org/markup-compatibility/2006">
+        <mc:Choice xmlns:a14="http://schemas.microsoft.com/office/drawing/2010/main" Requires="a14">
+          <p:sp>
+            <p:nvSpPr>
+              <p:cNvPr id="31" name="TextBox 30">
+                <a:extLst>
+                  <a:ext uri="{FF2B5EF4-FFF2-40B4-BE49-F238E27FC236}">
+                    <a16:creationId xmlns:a16="http://schemas.microsoft.com/office/drawing/2014/main" id="{035652D5-8773-F074-8427-A5AC9770001F}"/>
+                  </a:ext>
+                </a:extLst>
+              </p:cNvPr>
+              <p:cNvSpPr txBox="1"/>
+              <p:nvPr/>
+            </p:nvSpPr>
+            <p:spPr>
+              <a:xfrm>
+                <a:off x="8028263" y="3519297"/>
+                <a:ext cx="3020037" cy="307777"/>
+              </a:xfrm>
+              <a:prstGeom prst="rect">
+                <a:avLst/>
+              </a:prstGeom>
+              <a:noFill/>
+            </p:spPr>
+            <p:txBody>
+              <a:bodyPr wrap="square">
+                <a:spAutoFit/>
+              </a:bodyPr>
+              <a:lstStyle/>
+              <a:p>
+                <a:pPr/>
+                <a14:m>
+                  <m:oMathPara xmlns:m="http://schemas.openxmlformats.org/officeDocument/2006/math">
+                    <m:oMathParaPr>
+                      <m:jc m:val="centerGroup"/>
+                    </m:oMathParaPr>
+                    <m:oMath xmlns:m="http://schemas.openxmlformats.org/officeDocument/2006/math">
+                      <m:r>
+                        <a:rPr lang="en-US" sz="1400" b="0" i="1" smtClean="0">
+                          <a:latin typeface="Cambria Math" panose="02040503050406030204" pitchFamily="18" charset="0"/>
+                        </a:rPr>
+                        <m:t>𝑈</m:t>
+                      </m:r>
+                      <m:r>
+                        <a:rPr lang="en-US" sz="1400" b="0" i="1" smtClean="0">
+                          <a:latin typeface="Cambria Math" panose="02040503050406030204" pitchFamily="18" charset="0"/>
+                        </a:rPr>
+                        <m:t>=</m:t>
+                      </m:r>
+                      <m:sSub>
+                        <m:sSubPr>
+                          <m:ctrlPr>
+                            <a:rPr lang="en-US" sz="1400" b="0" i="1" smtClean="0">
+                              <a:latin typeface="Cambria Math" panose="02040503050406030204" pitchFamily="18" charset="0"/>
+                            </a:rPr>
+                          </m:ctrlPr>
+                        </m:sSubPr>
+                        <m:e>
+                          <m:r>
+                            <a:rPr lang="en-US" sz="1400" b="0" i="1" smtClean="0">
+                              <a:latin typeface="Cambria Math" panose="02040503050406030204" pitchFamily="18" charset="0"/>
+                            </a:rPr>
+                            <m:t>𝑅</m:t>
+                          </m:r>
+                        </m:e>
+                        <m:sub>
+                          <m:r>
+                            <a:rPr lang="en-US" sz="1400" b="0" i="1" smtClean="0">
+                              <a:latin typeface="Cambria Math" panose="02040503050406030204" pitchFamily="18" charset="0"/>
+                            </a:rPr>
+                            <m:t>𝑡</m:t>
+                          </m:r>
+                          <m:r>
+                            <a:rPr lang="en-US" sz="1400" b="0" i="1" smtClean="0">
+                              <a:latin typeface="Cambria Math" panose="02040503050406030204" pitchFamily="18" charset="0"/>
+                            </a:rPr>
+                            <m:t>+1</m:t>
+                          </m:r>
+                        </m:sub>
+                      </m:sSub>
+                      <m:r>
+                        <a:rPr lang="en-US" sz="1400" b="0" i="1" smtClean="0">
+                          <a:latin typeface="Cambria Math" panose="02040503050406030204" pitchFamily="18" charset="0"/>
+                        </a:rPr>
+                        <m:t>+</m:t>
+                      </m:r>
+                      <m:r>
+                        <a:rPr lang="en-US" sz="1400" b="0" i="1" smtClean="0">
+                          <a:latin typeface="Cambria Math" panose="02040503050406030204" pitchFamily="18" charset="0"/>
+                        </a:rPr>
+                        <m:t>𝛾</m:t>
+                      </m:r>
+                      <m:sSub>
+                        <m:sSubPr>
+                          <m:ctrlPr>
+                            <a:rPr lang="en-US" sz="1400" i="1">
+                              <a:latin typeface="Cambria Math" panose="02040503050406030204" pitchFamily="18" charset="0"/>
+                              <a:ea typeface="Cambria Math" panose="02040503050406030204" pitchFamily="18" charset="0"/>
+                            </a:rPr>
+                          </m:ctrlPr>
+                        </m:sSubPr>
+                        <m:e>
+                          <m:r>
+                            <a:rPr lang="en-US" sz="1400" i="1">
+                              <a:latin typeface="Cambria Math" panose="02040503050406030204" pitchFamily="18" charset="0"/>
+                              <a:ea typeface="Cambria Math" panose="02040503050406030204" pitchFamily="18" charset="0"/>
+                            </a:rPr>
+                            <m:t>𝔼</m:t>
+                          </m:r>
+                        </m:e>
+                        <m:sub>
+                          <m:r>
+                            <a:rPr lang="en-US" sz="1400" i="1">
+                              <a:latin typeface="Cambria Math" panose="02040503050406030204" pitchFamily="18" charset="0"/>
+                              <a:ea typeface="Cambria Math" panose="02040503050406030204" pitchFamily="18" charset="0"/>
+                            </a:rPr>
+                            <m:t>𝜋</m:t>
+                          </m:r>
+                        </m:sub>
+                      </m:sSub>
+                      <m:r>
+                        <a:rPr lang="en-US" sz="1400" b="0" i="1" smtClean="0">
+                          <a:latin typeface="Cambria Math" panose="02040503050406030204" pitchFamily="18" charset="0"/>
+                          <a:ea typeface="Cambria Math" panose="02040503050406030204" pitchFamily="18" charset="0"/>
+                        </a:rPr>
+                        <m:t>[</m:t>
+                      </m:r>
+                      <m:r>
+                        <a:rPr lang="en-US" sz="1400" i="1">
+                          <a:latin typeface="Cambria Math" panose="02040503050406030204" pitchFamily="18" charset="0"/>
+                        </a:rPr>
+                        <m:t>𝑄</m:t>
+                      </m:r>
+                      <m:r>
+                        <a:rPr lang="en-US" sz="1400" i="1">
+                          <a:latin typeface="Cambria Math" panose="02040503050406030204" pitchFamily="18" charset="0"/>
+                        </a:rPr>
+                        <m:t>(</m:t>
+                      </m:r>
+                      <m:sSub>
+                        <m:sSubPr>
+                          <m:ctrlPr>
+                            <a:rPr lang="en-US" sz="1400" i="1">
+                              <a:latin typeface="Cambria Math" panose="02040503050406030204" pitchFamily="18" charset="0"/>
+                            </a:rPr>
+                          </m:ctrlPr>
+                        </m:sSubPr>
+                        <m:e>
+                          <m:r>
+                            <a:rPr lang="en-US" sz="1400" i="1">
+                              <a:latin typeface="Cambria Math" panose="02040503050406030204" pitchFamily="18" charset="0"/>
+                            </a:rPr>
+                            <m:t>𝑆</m:t>
+                          </m:r>
+                        </m:e>
+                        <m:sub>
+                          <m:r>
+                            <a:rPr lang="en-US" sz="1400" i="1">
+                              <a:latin typeface="Cambria Math" panose="02040503050406030204" pitchFamily="18" charset="0"/>
+                            </a:rPr>
+                            <m:t>𝑡</m:t>
+                          </m:r>
+                          <m:r>
+                            <a:rPr lang="en-US" sz="1400" i="1">
+                              <a:latin typeface="Cambria Math" panose="02040503050406030204" pitchFamily="18" charset="0"/>
+                            </a:rPr>
+                            <m:t>+1</m:t>
+                          </m:r>
+                        </m:sub>
+                      </m:sSub>
+                      <m:r>
+                        <a:rPr lang="en-US" sz="1400" i="1">
+                          <a:latin typeface="Cambria Math" panose="02040503050406030204" pitchFamily="18" charset="0"/>
+                        </a:rPr>
+                        <m:t>,</m:t>
+                      </m:r>
+                      <m:sSub>
+                        <m:sSubPr>
+                          <m:ctrlPr>
+                            <a:rPr lang="en-US" sz="1400" i="1">
+                              <a:latin typeface="Cambria Math" panose="02040503050406030204" pitchFamily="18" charset="0"/>
+                            </a:rPr>
+                          </m:ctrlPr>
+                        </m:sSubPr>
+                        <m:e>
+                          <m:r>
+                            <a:rPr lang="en-US" sz="1400" i="1">
+                              <a:latin typeface="Cambria Math" panose="02040503050406030204" pitchFamily="18" charset="0"/>
+                            </a:rPr>
+                            <m:t>𝐴</m:t>
+                          </m:r>
+                        </m:e>
+                        <m:sub>
+                          <m:r>
+                            <a:rPr lang="en-US" sz="1400" i="1">
+                              <a:latin typeface="Cambria Math" panose="02040503050406030204" pitchFamily="18" charset="0"/>
+                            </a:rPr>
+                            <m:t>𝑡</m:t>
+                          </m:r>
+                          <m:r>
+                            <a:rPr lang="en-US" sz="1400" i="1">
+                              <a:latin typeface="Cambria Math" panose="02040503050406030204" pitchFamily="18" charset="0"/>
+                            </a:rPr>
+                            <m:t>+1</m:t>
+                          </m:r>
+                        </m:sub>
+                      </m:sSub>
+                      <m:r>
+                        <a:rPr lang="en-US" sz="1400" i="1">
+                          <a:latin typeface="Cambria Math" panose="02040503050406030204" pitchFamily="18" charset="0"/>
+                        </a:rPr>
+                        <m:t>)</m:t>
+                      </m:r>
+                      <m:r>
+                        <a:rPr lang="en-US" sz="1400" b="0" i="1" smtClean="0">
+                          <a:latin typeface="Cambria Math" panose="02040503050406030204" pitchFamily="18" charset="0"/>
+                        </a:rPr>
+                        <m:t>|</m:t>
+                      </m:r>
+                      <m:sSub>
+                        <m:sSubPr>
+                          <m:ctrlPr>
+                            <a:rPr lang="en-US" sz="1400" b="0" i="1" smtClean="0">
+                              <a:latin typeface="Cambria Math" panose="02040503050406030204" pitchFamily="18" charset="0"/>
+                            </a:rPr>
+                          </m:ctrlPr>
+                        </m:sSubPr>
+                        <m:e>
+                          <m:r>
+                            <a:rPr lang="en-US" sz="1400" b="0" i="1" smtClean="0">
+                              <a:latin typeface="Cambria Math" panose="02040503050406030204" pitchFamily="18" charset="0"/>
+                            </a:rPr>
+                            <m:t>𝑆</m:t>
+                          </m:r>
+                        </m:e>
+                        <m:sub>
+                          <m:r>
+                            <a:rPr lang="en-US" sz="1400" b="0" i="1" smtClean="0">
+                              <a:latin typeface="Cambria Math" panose="02040503050406030204" pitchFamily="18" charset="0"/>
+                            </a:rPr>
+                            <m:t>𝑡</m:t>
+                          </m:r>
+                          <m:r>
+                            <a:rPr lang="en-US" sz="1400" b="0" i="1" smtClean="0">
+                              <a:latin typeface="Cambria Math" panose="02040503050406030204" pitchFamily="18" charset="0"/>
+                            </a:rPr>
+                            <m:t>+1</m:t>
+                          </m:r>
+                        </m:sub>
+                      </m:sSub>
+                      <m:r>
+                        <a:rPr lang="en-US" sz="1400" b="0" i="1" smtClean="0">
+                          <a:latin typeface="Cambria Math" panose="02040503050406030204" pitchFamily="18" charset="0"/>
+                          <a:ea typeface="Cambria Math" panose="02040503050406030204" pitchFamily="18" charset="0"/>
+                        </a:rPr>
+                        <m:t>]</m:t>
+                      </m:r>
+                    </m:oMath>
+                  </m:oMathPara>
+                </a14:m>
+                <a:endParaRPr lang="en-US" sz="1400" dirty="0"/>
+              </a:p>
+            </p:txBody>
+          </p:sp>
+        </mc:Choice>
+        <mc:Fallback>
+          <p:sp>
+            <p:nvSpPr>
+              <p:cNvPr id="31" name="TextBox 30">
+                <a:extLst>
+                  <a:ext uri="{FF2B5EF4-FFF2-40B4-BE49-F238E27FC236}">
+                    <a16:creationId xmlns:a16="http://schemas.microsoft.com/office/drawing/2014/main" id="{035652D5-8773-F074-8427-A5AC9770001F}"/>
+                  </a:ext>
+                </a:extLst>
+              </p:cNvPr>
+              <p:cNvSpPr txBox="1">
+                <a:spLocks noRot="1" noChangeAspect="1" noMove="1" noResize="1" noEditPoints="1" noAdjustHandles="1" noChangeArrowheads="1" noChangeShapeType="1" noTextEdit="1"/>
+              </p:cNvSpPr>
+              <p:nvPr/>
+            </p:nvSpPr>
+            <p:spPr>
+              <a:xfrm>
+                <a:off x="8028263" y="3519297"/>
+                <a:ext cx="3020037" cy="307777"/>
+              </a:xfrm>
+              <a:prstGeom prst="rect">
+                <a:avLst/>
+              </a:prstGeom>
+              <a:blipFill>
+                <a:blip r:embed="rId29"/>
+                <a:stretch>
+                  <a:fillRect b="-7843"/>
+                </a:stretch>
+              </a:blipFill>
+            </p:spPr>
+            <p:txBody>
+              <a:bodyPr/>
+              <a:lstStyle/>
+              <a:p>
+                <a:r>
+                  <a:rPr lang="en-US">
+                    <a:noFill/>
+                  </a:rPr>
+                  <a:t> </a:t>
+                </a:r>
+              </a:p>
+            </p:txBody>
+          </p:sp>
+        </mc:Fallback>
+      </mc:AlternateContent>
     </p:spTree>
     <p:extLst>
       <p:ext uri="{BB962C8B-B14F-4D97-AF65-F5344CB8AC3E}">
@@ -19411,26 +20234,26 @@
         </p:nvSpPr>
         <p:spPr>
           <a:xfrm>
-            <a:off x="838200" y="1397330"/>
-            <a:ext cx="6532841" cy="4838578"/>
+            <a:off x="838201" y="1397330"/>
+            <a:ext cx="6309220" cy="4139404"/>
           </a:xfrm>
         </p:spPr>
         <p:txBody>
           <a:bodyPr>
-            <a:normAutofit fontScale="77500" lnSpcReduction="20000"/>
+            <a:noAutofit/>
           </a:bodyPr>
           <a:lstStyle/>
           <a:p>
             <a:r>
-              <a:rPr lang="en-US" b="1" dirty="0"/>
+              <a:rPr lang="en-US" sz="1600" b="1" dirty="0"/>
               <a:t>Finite MDPs</a:t>
             </a:r>
             <a:r>
-              <a:rPr lang="en-US" dirty="0"/>
+              <a:rPr lang="en-US" sz="1600" dirty="0"/>
               <a:t>: </a:t>
             </a:r>
             <a:r>
-              <a:rPr lang="en-US" b="1" dirty="0">
+              <a:rPr lang="en-US" sz="1600" b="1" dirty="0">
                 <a:solidFill>
                   <a:schemeClr val="accent2"/>
                 </a:solidFill>
@@ -19438,28 +20261,28 @@
               <a:t>Bellman Expectation Equations </a:t>
             </a:r>
             <a:r>
-              <a:rPr lang="en-US" dirty="0"/>
+              <a:rPr lang="en-US" sz="1600" dirty="0"/>
               <a:t>convert expected return maximization into an easier value function consistency problem.</a:t>
             </a:r>
           </a:p>
           <a:p>
-            <a:endParaRPr lang="en-US" dirty="0"/>
+            <a:endParaRPr lang="en-US" sz="1600" dirty="0"/>
           </a:p>
           <a:p>
             <a:r>
-              <a:rPr lang="en-US" b="1" dirty="0"/>
+              <a:rPr lang="en-US" sz="1600" b="1" dirty="0"/>
               <a:t>Dynamic Programming (DP)</a:t>
             </a:r>
             <a:r>
-              <a:rPr lang="en-US" dirty="0"/>
+              <a:rPr lang="en-US" sz="1600" dirty="0"/>
               <a:t>: </a:t>
             </a:r>
             <a:r>
-              <a:rPr lang="en-US" b="1" dirty="0"/>
+              <a:rPr lang="en-US" sz="1600" b="1" dirty="0"/>
               <a:t> </a:t>
             </a:r>
             <a:r>
-              <a:rPr lang="en-US" b="1" dirty="0">
+              <a:rPr lang="en-US" sz="1600" b="1" dirty="0">
                 <a:solidFill>
                   <a:schemeClr val="accent2"/>
                 </a:solidFill>
@@ -19467,32 +20290,32 @@
               <a:t>Policy evaluation </a:t>
             </a:r>
             <a:r>
-              <a:rPr lang="en-US" dirty="0"/>
+              <a:rPr lang="en-US" sz="1600" dirty="0"/>
               <a:t>solves the Bellman Expectation Equations by updating the value function iteratively (planning).</a:t>
             </a:r>
           </a:p>
           <a:p>
-            <a:endParaRPr lang="en-US" dirty="0"/>
+            <a:endParaRPr lang="en-US" sz="1600" dirty="0"/>
           </a:p>
           <a:p>
             <a:r>
-              <a:rPr lang="en-US" b="1" dirty="0"/>
+              <a:rPr lang="en-US" sz="1600" b="1" dirty="0"/>
               <a:t>Generalized Policy Iteration (GPI)</a:t>
             </a:r>
             <a:r>
-              <a:rPr lang="en-US" dirty="0"/>
+              <a:rPr lang="en-US" sz="1600" dirty="0"/>
               <a:t>:</a:t>
             </a:r>
             <a:r>
-              <a:rPr lang="en-US" b="1" dirty="0"/>
+              <a:rPr lang="en-US" sz="1600" b="1" dirty="0"/>
               <a:t> </a:t>
             </a:r>
             <a:r>
-              <a:rPr lang="en-US" dirty="0"/>
+              <a:rPr lang="en-US" sz="1600" dirty="0"/>
               <a:t>Iterates between policy evaluation and </a:t>
             </a:r>
             <a:r>
-              <a:rPr lang="en-US" b="1" dirty="0">
+              <a:rPr lang="en-US" sz="1600" b="1" dirty="0">
                 <a:solidFill>
                   <a:schemeClr val="accent2"/>
                 </a:solidFill>
@@ -19500,7 +20323,7 @@
               <a:t>greedy policy improvement </a:t>
             </a:r>
             <a:r>
-              <a:rPr lang="en-US" dirty="0"/>
+              <a:rPr lang="en-US" sz="1600" dirty="0"/>
               <a:t>to find the optimal policy.</a:t>
             </a:r>
           </a:p>
@@ -19508,27 +20331,27 @@
             <a:pPr marL="0" indent="0">
               <a:buNone/>
             </a:pPr>
-            <a:endParaRPr lang="en-US" dirty="0"/>
+            <a:endParaRPr lang="en-US" sz="1600" dirty="0"/>
           </a:p>
           <a:p>
             <a:r>
-              <a:rPr lang="en-US" b="1" dirty="0"/>
+              <a:rPr lang="en-US" sz="1600" b="1" dirty="0"/>
               <a:t>Monte Carlo Methods (MC)</a:t>
             </a:r>
             <a:r>
-              <a:rPr lang="en-US" dirty="0"/>
+              <a:rPr lang="en-US" sz="1600" dirty="0"/>
               <a:t>:</a:t>
             </a:r>
             <a:r>
-              <a:rPr lang="en-US" b="1" dirty="0"/>
+              <a:rPr lang="en-US" sz="1600" b="1" dirty="0"/>
               <a:t> </a:t>
             </a:r>
             <a:r>
-              <a:rPr lang="en-US" dirty="0"/>
+              <a:rPr lang="en-US" sz="1600" dirty="0"/>
               <a:t>Uses </a:t>
             </a:r>
             <a:r>
-              <a:rPr lang="en-US" b="1" dirty="0">
+              <a:rPr lang="en-US" sz="1600" b="1" dirty="0">
                 <a:solidFill>
                   <a:schemeClr val="accent2"/>
                 </a:solidFill>
@@ -19536,7 +20359,7 @@
               <a:t>sample-averaging for policy evaluation</a:t>
             </a:r>
             <a:r>
-              <a:rPr lang="en-US" dirty="0"/>
+              <a:rPr lang="en-US" sz="1600" dirty="0"/>
               <a:t> in GPI (update after complete sample episode).</a:t>
             </a:r>
           </a:p>
@@ -19610,7 +20433,7 @@
         </p:nvSpPr>
         <p:spPr>
           <a:xfrm>
-            <a:off x="7718304" y="3753394"/>
+            <a:off x="7718304" y="3429000"/>
             <a:ext cx="4106074" cy="830997"/>
           </a:xfrm>
           <a:prstGeom prst="rect">
@@ -19664,7 +20487,7 @@
         </p:nvSpPr>
         <p:spPr>
           <a:xfrm>
-            <a:off x="7718304" y="2877862"/>
+            <a:off x="7718304" y="2623345"/>
             <a:ext cx="4129923" cy="338554"/>
           </a:xfrm>
           <a:prstGeom prst="rect">
@@ -19714,7 +20537,7 @@
         </p:nvSpPr>
         <p:spPr>
           <a:xfrm>
-            <a:off x="7718304" y="5010013"/>
+            <a:off x="7718304" y="4675985"/>
             <a:ext cx="4106074" cy="830997"/>
           </a:xfrm>
           <a:prstGeom prst="rect">
@@ -19750,6 +20573,58 @@
             <a:r>
               <a:rPr lang="en-US" sz="1600" dirty="0"/>
               <a:t>Guarantees convergence.</a:t>
+            </a:r>
+          </a:p>
+        </p:txBody>
+      </p:sp>
+      <p:sp>
+        <p:nvSpPr>
+          <p:cNvPr id="4" name="TextBox 3">
+            <a:extLst>
+              <a:ext uri="{FF2B5EF4-FFF2-40B4-BE49-F238E27FC236}">
+                <a16:creationId xmlns:a16="http://schemas.microsoft.com/office/drawing/2014/main" id="{86CC438B-160D-F8B6-00EB-0A6C2FBD3C59}"/>
+              </a:ext>
+            </a:extLst>
+          </p:cNvPr>
+          <p:cNvSpPr txBox="1"/>
+          <p:nvPr/>
+        </p:nvSpPr>
+        <p:spPr>
+          <a:xfrm>
+            <a:off x="2260833" y="6030203"/>
+            <a:ext cx="7503952" cy="369332"/>
+          </a:xfrm>
+          <a:prstGeom prst="rect">
+            <a:avLst/>
+          </a:prstGeom>
+        </p:spPr>
+        <p:style>
+          <a:lnRef idx="2">
+            <a:schemeClr val="accent2"/>
+          </a:lnRef>
+          <a:fillRef idx="1">
+            <a:schemeClr val="lt1"/>
+          </a:fillRef>
+          <a:effectRef idx="0">
+            <a:schemeClr val="accent2"/>
+          </a:effectRef>
+          <a:fontRef idx="minor">
+            <a:schemeClr val="dk1"/>
+          </a:fontRef>
+        </p:style>
+        <p:txBody>
+          <a:bodyPr wrap="square" rtlCol="0">
+            <a:spAutoFit/>
+          </a:bodyPr>
+          <a:lstStyle/>
+          <a:p>
+            <a:r>
+              <a:rPr lang="en-US" dirty="0"/>
+              <a:t>Temporal-Differencing provides another mechanism for </a:t>
+            </a:r>
+            <a:r>
+              <a:rPr lang="en-US" b="1" dirty="0"/>
+              <a:t>policy evaluation.</a:t>
             </a:r>
           </a:p>
         </p:txBody>
@@ -20099,6 +20974,51 @@
                       </p:childTnLst>
                     </p:cTn>
                   </p:par>
+                  <p:par>
+                    <p:cTn id="31" fill="hold">
+                      <p:stCondLst>
+                        <p:cond delay="indefinite"/>
+                      </p:stCondLst>
+                      <p:childTnLst>
+                        <p:par>
+                          <p:cTn id="32" fill="hold">
+                            <p:stCondLst>
+                              <p:cond delay="0"/>
+                            </p:stCondLst>
+                            <p:childTnLst>
+                              <p:par>
+                                <p:cTn id="33" presetID="1" presetClass="entr" presetSubtype="0" fill="hold" grpId="0" nodeType="clickEffect">
+                                  <p:stCondLst>
+                                    <p:cond delay="0"/>
+                                  </p:stCondLst>
+                                  <p:childTnLst>
+                                    <p:set>
+                                      <p:cBhvr>
+                                        <p:cTn id="34" dur="1" fill="hold">
+                                          <p:stCondLst>
+                                            <p:cond delay="0"/>
+                                          </p:stCondLst>
+                                        </p:cTn>
+                                        <p:tgtEl>
+                                          <p:spTgt spid="4"/>
+                                        </p:tgtEl>
+                                        <p:attrNameLst>
+                                          <p:attrName>style.visibility</p:attrName>
+                                        </p:attrNameLst>
+                                      </p:cBhvr>
+                                      <p:to>
+                                        <p:strVal val="visible"/>
+                                      </p:to>
+                                    </p:set>
+                                  </p:childTnLst>
+                                </p:cTn>
+                              </p:par>
+                            </p:childTnLst>
+                          </p:cTn>
+                        </p:par>
+                      </p:childTnLst>
+                    </p:cTn>
+                  </p:par>
                 </p:childTnLst>
               </p:cTn>
               <p:prevCondLst>
@@ -20125,6 +21045,7 @@
       <p:bldP spid="7" grpId="0" animBg="1"/>
       <p:bldP spid="9" grpId="0" animBg="1"/>
       <p:bldP spid="11" grpId="0" animBg="1"/>
+      <p:bldP spid="4" grpId="0" animBg="1"/>
     </p:bldLst>
   </p:timing>
 </p:sld>
@@ -20175,8 +21096,8 @@
           </a:p>
         </p:txBody>
       </p:sp>
-      <mc:AlternateContent xmlns:mc="http://schemas.openxmlformats.org/markup-compatibility/2006">
-        <mc:Choice xmlns:a14="http://schemas.microsoft.com/office/drawing/2010/main" Requires="a14">
+      <mc:AlternateContent xmlns:mc="http://schemas.openxmlformats.org/markup-compatibility/2006" xmlns:a14="http://schemas.microsoft.com/office/drawing/2010/main">
+        <mc:Choice Requires="a14">
           <p:sp>
             <p:nvSpPr>
               <p:cNvPr id="3" name="Content Placeholder 2">
@@ -21246,7 +22167,7 @@
             </p:txBody>
           </p:sp>
         </mc:Choice>
-        <mc:Fallback>
+        <mc:Fallback xmlns="">
           <p:sp>
             <p:nvSpPr>
               <p:cNvPr id="3" name="Content Placeholder 2">
@@ -25004,8 +25925,8 @@
           </a:p>
         </p:txBody>
       </p:sp>
-      <mc:AlternateContent xmlns:mc="http://schemas.openxmlformats.org/markup-compatibility/2006">
-        <mc:Choice xmlns:a14="http://schemas.microsoft.com/office/drawing/2010/main" Requires="a14">
+      <mc:AlternateContent xmlns:mc="http://schemas.openxmlformats.org/markup-compatibility/2006" xmlns:a14="http://schemas.microsoft.com/office/drawing/2010/main">
+        <mc:Choice Requires="a14">
           <p:sp>
             <p:nvSpPr>
               <p:cNvPr id="3" name="Content Placeholder 2">
@@ -25659,7 +26580,7 @@
             </p:txBody>
           </p:sp>
         </mc:Choice>
-        <mc:Fallback>
+        <mc:Fallback xmlns="">
           <p:sp>
             <p:nvSpPr>
               <p:cNvPr id="3" name="Content Placeholder 2">
@@ -25699,8 +26620,8 @@
           </p:sp>
         </mc:Fallback>
       </mc:AlternateContent>
-      <mc:AlternateContent xmlns:mc="http://schemas.openxmlformats.org/markup-compatibility/2006">
-        <mc:Choice xmlns:a14="http://schemas.microsoft.com/office/drawing/2010/main" Requires="a14">
+      <mc:AlternateContent xmlns:mc="http://schemas.openxmlformats.org/markup-compatibility/2006" xmlns:a14="http://schemas.microsoft.com/office/drawing/2010/main">
+        <mc:Choice Requires="a14">
           <p:sp>
             <p:nvSpPr>
               <p:cNvPr id="6" name="TextBox 5">
@@ -25934,7 +26855,7 @@
             </p:txBody>
           </p:sp>
         </mc:Choice>
-        <mc:Fallback>
+        <mc:Fallback xmlns="">
           <p:sp>
             <p:nvSpPr>
               <p:cNvPr id="6" name="TextBox 5">

--- a/slides/Lecture_Chapter06.pptx
+++ b/slides/Lecture_Chapter06.pptx
@@ -280,7 +280,7 @@
           <a:p>
             <a:fld id="{2A92B22A-BE2A-43CB-B312-FF3A0A14567B}" type="datetimeFigureOut">
               <a:rPr lang="en-US" smtClean="0"/>
-              <a:t>2/18/2026</a:t>
+              <a:t>2/19/2026</a:t>
             </a:fld>
             <a:endParaRPr lang="en-US"/>
           </a:p>
@@ -778,7 +778,7 @@
           <a:p>
             <a:fld id="{3E22BF2E-04DA-469E-97C5-BB68A0368813}" type="datetimeFigureOut">
               <a:rPr lang="en-US" smtClean="0"/>
-              <a:t>2/18/2026</a:t>
+              <a:t>2/19/2026</a:t>
             </a:fld>
             <a:endParaRPr lang="en-US"/>
           </a:p>
@@ -976,7 +976,7 @@
           <a:p>
             <a:fld id="{3E22BF2E-04DA-469E-97C5-BB68A0368813}" type="datetimeFigureOut">
               <a:rPr lang="en-US" smtClean="0"/>
-              <a:t>2/18/2026</a:t>
+              <a:t>2/19/2026</a:t>
             </a:fld>
             <a:endParaRPr lang="en-US"/>
           </a:p>
@@ -1184,7 +1184,7 @@
           <a:p>
             <a:fld id="{3E22BF2E-04DA-469E-97C5-BB68A0368813}" type="datetimeFigureOut">
               <a:rPr lang="en-US" smtClean="0"/>
-              <a:t>2/18/2026</a:t>
+              <a:t>2/19/2026</a:t>
             </a:fld>
             <a:endParaRPr lang="en-US"/>
           </a:p>
@@ -1392,7 +1392,7 @@
           <a:p>
             <a:fld id="{3E22BF2E-04DA-469E-97C5-BB68A0368813}" type="datetimeFigureOut">
               <a:rPr lang="en-US" smtClean="0"/>
-              <a:t>2/18/2026</a:t>
+              <a:t>2/19/2026</a:t>
             </a:fld>
             <a:endParaRPr lang="en-US"/>
           </a:p>
@@ -1667,7 +1667,7 @@
           <a:p>
             <a:fld id="{3E22BF2E-04DA-469E-97C5-BB68A0368813}" type="datetimeFigureOut">
               <a:rPr lang="en-US" smtClean="0"/>
-              <a:t>2/18/2026</a:t>
+              <a:t>2/19/2026</a:t>
             </a:fld>
             <a:endParaRPr lang="en-US"/>
           </a:p>
@@ -1932,7 +1932,7 @@
           <a:p>
             <a:fld id="{3E22BF2E-04DA-469E-97C5-BB68A0368813}" type="datetimeFigureOut">
               <a:rPr lang="en-US" smtClean="0"/>
-              <a:t>2/18/2026</a:t>
+              <a:t>2/19/2026</a:t>
             </a:fld>
             <a:endParaRPr lang="en-US"/>
           </a:p>
@@ -2344,7 +2344,7 @@
           <a:p>
             <a:fld id="{3E22BF2E-04DA-469E-97C5-BB68A0368813}" type="datetimeFigureOut">
               <a:rPr lang="en-US" smtClean="0"/>
-              <a:t>2/18/2026</a:t>
+              <a:t>2/19/2026</a:t>
             </a:fld>
             <a:endParaRPr lang="en-US"/>
           </a:p>
@@ -2485,7 +2485,7 @@
           <a:p>
             <a:fld id="{3E22BF2E-04DA-469E-97C5-BB68A0368813}" type="datetimeFigureOut">
               <a:rPr lang="en-US" smtClean="0"/>
-              <a:t>2/18/2026</a:t>
+              <a:t>2/19/2026</a:t>
             </a:fld>
             <a:endParaRPr lang="en-US"/>
           </a:p>
@@ -2598,7 +2598,7 @@
           <a:p>
             <a:fld id="{3E22BF2E-04DA-469E-97C5-BB68A0368813}" type="datetimeFigureOut">
               <a:rPr lang="en-US" smtClean="0"/>
-              <a:t>2/18/2026</a:t>
+              <a:t>2/19/2026</a:t>
             </a:fld>
             <a:endParaRPr lang="en-US"/>
           </a:p>
@@ -2909,7 +2909,7 @@
           <a:p>
             <a:fld id="{3E22BF2E-04DA-469E-97C5-BB68A0368813}" type="datetimeFigureOut">
               <a:rPr lang="en-US" smtClean="0"/>
-              <a:t>2/18/2026</a:t>
+              <a:t>2/19/2026</a:t>
             </a:fld>
             <a:endParaRPr lang="en-US"/>
           </a:p>
@@ -3197,7 +3197,7 @@
           <a:p>
             <a:fld id="{3E22BF2E-04DA-469E-97C5-BB68A0368813}" type="datetimeFigureOut">
               <a:rPr lang="en-US" smtClean="0"/>
-              <a:t>2/18/2026</a:t>
+              <a:t>2/19/2026</a:t>
             </a:fld>
             <a:endParaRPr lang="en-US"/>
           </a:p>
@@ -3438,7 +3438,7 @@
           <a:p>
             <a:fld id="{3E22BF2E-04DA-469E-97C5-BB68A0368813}" type="datetimeFigureOut">
               <a:rPr lang="en-US" smtClean="0"/>
-              <a:t>2/18/2026</a:t>
+              <a:t>2/19/2026</a:t>
             </a:fld>
             <a:endParaRPr lang="en-US"/>
           </a:p>
@@ -6425,8 +6425,8 @@
             </a:fontRef>
           </p:style>
         </p:cxnSp>
-        <mc:AlternateContent xmlns:mc="http://schemas.openxmlformats.org/markup-compatibility/2006" xmlns:a14="http://schemas.microsoft.com/office/drawing/2010/main">
-          <mc:Choice Requires="a14">
+        <mc:AlternateContent xmlns:mc="http://schemas.openxmlformats.org/markup-compatibility/2006">
+          <mc:Choice xmlns:a14="http://schemas.microsoft.com/office/drawing/2010/main" Requires="a14">
             <p:sp>
               <p:nvSpPr>
                 <p:cNvPr id="11" name="TextBox 10">
@@ -6493,8 +6493,22 @@
                               <a:schemeClr val="accent3"/>
                             </a:solidFill>
                             <a:latin typeface="Cambria Math" panose="02040503050406030204" pitchFamily="18" charset="0"/>
+                            <a:ea typeface="Cambria Math" panose="02040503050406030204" pitchFamily="18" charset="0"/>
                           </a:rPr>
-                          <m:t>soft</m:t>
+                          <m:t> </m:t>
+                        </m:r>
+                        <m:r>
+                          <m:rPr>
+                            <m:sty m:val="p"/>
+                          </m:rPr>
+                          <a:rPr lang="en-US" sz="1200" b="0" i="1" smtClean="0">
+                            <a:solidFill>
+                              <a:schemeClr val="accent3"/>
+                            </a:solidFill>
+                            <a:latin typeface="Cambria Math" panose="02040503050406030204" pitchFamily="18" charset="0"/>
+                            <a:ea typeface="Cambria Math" panose="02040503050406030204" pitchFamily="18" charset="0"/>
+                          </a:rPr>
+                          <m:t>ϵ</m:t>
                         </m:r>
                         <m:r>
                           <m:rPr>
@@ -6505,8 +6519,9 @@
                               <a:schemeClr val="accent3"/>
                             </a:solidFill>
                             <a:latin typeface="Cambria Math" panose="02040503050406030204" pitchFamily="18" charset="0"/>
+                            <a:ea typeface="Cambria Math" panose="02040503050406030204" pitchFamily="18" charset="0"/>
                           </a:rPr>
-                          <m:t>−</m:t>
+                          <m:t>-</m:t>
                         </m:r>
                         <m:r>
                           <m:rPr>
@@ -6559,7 +6574,7 @@
               </p:txBody>
             </p:sp>
           </mc:Choice>
-          <mc:Fallback xmlns="">
+          <mc:Fallback>
             <p:sp>
               <p:nvSpPr>
                 <p:cNvPr id="11" name="TextBox 10">
@@ -7496,7 +7511,7 @@
             <p:spPr/>
             <p:txBody>
               <a:bodyPr>
-                <a:normAutofit fontScale="85000" lnSpcReduction="20000"/>
+                <a:normAutofit fontScale="77500" lnSpcReduction="20000"/>
               </a:bodyPr>
               <a:lstStyle/>
               <a:p>
@@ -8016,7 +8031,21 @@
                 </a14:m>
                 <a:r>
                   <a:rPr lang="en-US" dirty="0"/>
-                  <a:t> independent of the behavior policy being followed because it ignores the next behavior action and updates with the next action for the greedy target policy instead.</a:t>
+                  <a:t> independent of the behavior policy being followed because it ignores the next behavior action and updates with the next action for the greedy target policy instead. Note: There is no need for importance sampling, it relies on </a:t>
+                </a:r>
+                <a14:m>
+                  <m:oMath xmlns:m="http://schemas.openxmlformats.org/officeDocument/2006/math">
+                    <m:r>
+                      <a:rPr lang="en-US" b="0" i="1" smtClean="0">
+                        <a:latin typeface="Cambria Math" panose="02040503050406030204" pitchFamily="18" charset="0"/>
+                      </a:rPr>
+                      <m:t>𝑄</m:t>
+                    </m:r>
+                  </m:oMath>
+                </a14:m>
+                <a:r>
+                  <a:rPr lang="en-US" dirty="0"/>
+                  <a:t> estimates instead.</a:t>
                 </a:r>
               </a:p>
               <a:p>
@@ -8036,7 +8065,7 @@
                 </a:pPr>
                 <a:r>
                   <a:rPr lang="en-US" dirty="0"/>
-                  <a:t>State-action pairs are represented discretely (e.g., in a table).</a:t>
+                  <a:t>State-action pairs can be independently updated (e.g., represented in a table).</a:t>
                 </a:r>
               </a:p>
               <a:p>
@@ -8073,7 +8102,7 @@
               <a:blipFill>
                 <a:blip r:embed="rId2"/>
                 <a:stretch>
-                  <a:fillRect l="-812" t="-2806"/>
+                  <a:fillRect l="-696" t="-2551"/>
                 </a:stretch>
               </a:blipFill>
             </p:spPr>
@@ -12421,8 +12450,8 @@
             </p:sp>
           </mc:Fallback>
         </mc:AlternateContent>
-        <mc:AlternateContent xmlns:mc="http://schemas.openxmlformats.org/markup-compatibility/2006">
-          <mc:Choice xmlns:a14="http://schemas.microsoft.com/office/drawing/2010/main" Requires="a14">
+        <mc:AlternateContent xmlns:mc="http://schemas.openxmlformats.org/markup-compatibility/2006" xmlns:a14="http://schemas.microsoft.com/office/drawing/2010/main">
+          <mc:Choice Requires="a14">
             <p:sp>
               <p:nvSpPr>
                 <p:cNvPr id="13" name="TextBox 12">
@@ -12497,7 +12526,7 @@
               </p:txBody>
             </p:sp>
           </mc:Choice>
-          <mc:Fallback>
+          <mc:Fallback xmlns="">
             <p:sp>
               <p:nvSpPr>
                 <p:cNvPr id="13" name="TextBox 12">
@@ -12542,8 +12571,8 @@
             </p:sp>
           </mc:Fallback>
         </mc:AlternateContent>
-        <mc:AlternateContent xmlns:mc="http://schemas.openxmlformats.org/markup-compatibility/2006">
-          <mc:Choice xmlns:a14="http://schemas.microsoft.com/office/drawing/2010/main" Requires="a14">
+        <mc:AlternateContent xmlns:mc="http://schemas.openxmlformats.org/markup-compatibility/2006" xmlns:a14="http://schemas.microsoft.com/office/drawing/2010/main">
+          <mc:Choice Requires="a14">
             <p:sp>
               <p:nvSpPr>
                 <p:cNvPr id="14" name="TextBox 13">
@@ -12593,7 +12622,7 @@
               </p:txBody>
             </p:sp>
           </mc:Choice>
-          <mc:Fallback>
+          <mc:Fallback xmlns="">
             <p:sp>
               <p:nvSpPr>
                 <p:cNvPr id="14" name="TextBox 13">
@@ -12638,8 +12667,8 @@
             </p:sp>
           </mc:Fallback>
         </mc:AlternateContent>
-        <mc:AlternateContent xmlns:mc="http://schemas.openxmlformats.org/markup-compatibility/2006">
-          <mc:Choice xmlns:a14="http://schemas.microsoft.com/office/drawing/2010/main" Requires="a14">
+        <mc:AlternateContent xmlns:mc="http://schemas.openxmlformats.org/markup-compatibility/2006" xmlns:a14="http://schemas.microsoft.com/office/drawing/2010/main">
+          <mc:Choice Requires="a14">
             <p:sp>
               <p:nvSpPr>
                 <p:cNvPr id="15" name="TextBox 14">
@@ -12711,7 +12740,7 @@
               </p:txBody>
             </p:sp>
           </mc:Choice>
-          <mc:Fallback>
+          <mc:Fallback xmlns="">
             <p:sp>
               <p:nvSpPr>
                 <p:cNvPr id="15" name="TextBox 14">
@@ -12920,8 +12949,8 @@
             </p:sp>
           </mc:Fallback>
         </mc:AlternateContent>
-        <mc:AlternateContent xmlns:mc="http://schemas.openxmlformats.org/markup-compatibility/2006">
-          <mc:Choice xmlns:a14="http://schemas.microsoft.com/office/drawing/2010/main" Requires="a14">
+        <mc:AlternateContent xmlns:mc="http://schemas.openxmlformats.org/markup-compatibility/2006" xmlns:a14="http://schemas.microsoft.com/office/drawing/2010/main">
+          <mc:Choice Requires="a14">
             <p:sp>
               <p:nvSpPr>
                 <p:cNvPr id="25" name="TextBox 24">
@@ -13051,7 +13080,7 @@
               </p:txBody>
             </p:sp>
           </mc:Choice>
-          <mc:Fallback>
+          <mc:Fallback xmlns="">
             <p:sp>
               <p:nvSpPr>
                 <p:cNvPr id="25" name="TextBox 24">
@@ -14060,8 +14089,8 @@
           </a:p>
         </p:txBody>
       </p:sp>
-      <mc:AlternateContent xmlns:mc="http://schemas.openxmlformats.org/markup-compatibility/2006">
-        <mc:Choice xmlns:a14="http://schemas.microsoft.com/office/drawing/2010/main" Requires="a14">
+      <mc:AlternateContent xmlns:mc="http://schemas.openxmlformats.org/markup-compatibility/2006" xmlns:a14="http://schemas.microsoft.com/office/drawing/2010/main">
+        <mc:Choice Requires="a14">
           <p:sp>
             <p:nvSpPr>
               <p:cNvPr id="28" name="TextBox 27">
@@ -14246,7 +14275,7 @@
             </p:txBody>
           </p:sp>
         </mc:Choice>
-        <mc:Fallback>
+        <mc:Fallback xmlns="">
           <p:sp>
             <p:nvSpPr>
               <p:cNvPr id="28" name="TextBox 27">
@@ -14291,8 +14320,8 @@
           </p:sp>
         </mc:Fallback>
       </mc:AlternateContent>
-      <mc:AlternateContent xmlns:mc="http://schemas.openxmlformats.org/markup-compatibility/2006">
-        <mc:Choice xmlns:a14="http://schemas.microsoft.com/office/drawing/2010/main" Requires="a14">
+      <mc:AlternateContent xmlns:mc="http://schemas.openxmlformats.org/markup-compatibility/2006" xmlns:a14="http://schemas.microsoft.com/office/drawing/2010/main">
+        <mc:Choice Requires="a14">
           <p:sp>
             <p:nvSpPr>
               <p:cNvPr id="29" name="TextBox 28">
@@ -14493,7 +14522,7 @@
             </p:txBody>
           </p:sp>
         </mc:Choice>
-        <mc:Fallback>
+        <mc:Fallback xmlns="">
           <p:sp>
             <p:nvSpPr>
               <p:cNvPr id="29" name="TextBox 28">
@@ -14573,8 +14602,8 @@
           </a:p>
         </p:txBody>
       </p:sp>
-      <mc:AlternateContent xmlns:mc="http://schemas.openxmlformats.org/markup-compatibility/2006">
-        <mc:Choice xmlns:a14="http://schemas.microsoft.com/office/drawing/2010/main" Requires="a14">
+      <mc:AlternateContent xmlns:mc="http://schemas.openxmlformats.org/markup-compatibility/2006" xmlns:a14="http://schemas.microsoft.com/office/drawing/2010/main">
+        <mc:Choice Requires="a14">
           <p:sp>
             <p:nvSpPr>
               <p:cNvPr id="31" name="TextBox 30">
@@ -14838,7 +14867,7 @@
             </p:txBody>
           </p:sp>
         </mc:Choice>
-        <mc:Fallback>
+        <mc:Fallback xmlns="">
           <p:sp>
             <p:nvSpPr>
               <p:cNvPr id="31" name="TextBox 30">

--- a/slides/Lecture_Chapter06.pptx
+++ b/slides/Lecture_Chapter06.pptx
@@ -280,7 +280,7 @@
           <a:p>
             <a:fld id="{2A92B22A-BE2A-43CB-B312-FF3A0A14567B}" type="datetimeFigureOut">
               <a:rPr lang="en-US" smtClean="0"/>
-              <a:t>2/19/2026</a:t>
+              <a:t>3/30/2026</a:t>
             </a:fld>
             <a:endParaRPr lang="en-US"/>
           </a:p>
@@ -778,7 +778,7 @@
           <a:p>
             <a:fld id="{3E22BF2E-04DA-469E-97C5-BB68A0368813}" type="datetimeFigureOut">
               <a:rPr lang="en-US" smtClean="0"/>
-              <a:t>2/19/2026</a:t>
+              <a:t>3/30/2026</a:t>
             </a:fld>
             <a:endParaRPr lang="en-US"/>
           </a:p>
@@ -976,7 +976,7 @@
           <a:p>
             <a:fld id="{3E22BF2E-04DA-469E-97C5-BB68A0368813}" type="datetimeFigureOut">
               <a:rPr lang="en-US" smtClean="0"/>
-              <a:t>2/19/2026</a:t>
+              <a:t>3/30/2026</a:t>
             </a:fld>
             <a:endParaRPr lang="en-US"/>
           </a:p>
@@ -1184,7 +1184,7 @@
           <a:p>
             <a:fld id="{3E22BF2E-04DA-469E-97C5-BB68A0368813}" type="datetimeFigureOut">
               <a:rPr lang="en-US" smtClean="0"/>
-              <a:t>2/19/2026</a:t>
+              <a:t>3/30/2026</a:t>
             </a:fld>
             <a:endParaRPr lang="en-US"/>
           </a:p>
@@ -1392,7 +1392,7 @@
           <a:p>
             <a:fld id="{3E22BF2E-04DA-469E-97C5-BB68A0368813}" type="datetimeFigureOut">
               <a:rPr lang="en-US" smtClean="0"/>
-              <a:t>2/19/2026</a:t>
+              <a:t>3/30/2026</a:t>
             </a:fld>
             <a:endParaRPr lang="en-US"/>
           </a:p>
@@ -1667,7 +1667,7 @@
           <a:p>
             <a:fld id="{3E22BF2E-04DA-469E-97C5-BB68A0368813}" type="datetimeFigureOut">
               <a:rPr lang="en-US" smtClean="0"/>
-              <a:t>2/19/2026</a:t>
+              <a:t>3/30/2026</a:t>
             </a:fld>
             <a:endParaRPr lang="en-US"/>
           </a:p>
@@ -1932,7 +1932,7 @@
           <a:p>
             <a:fld id="{3E22BF2E-04DA-469E-97C5-BB68A0368813}" type="datetimeFigureOut">
               <a:rPr lang="en-US" smtClean="0"/>
-              <a:t>2/19/2026</a:t>
+              <a:t>3/30/2026</a:t>
             </a:fld>
             <a:endParaRPr lang="en-US"/>
           </a:p>
@@ -2344,7 +2344,7 @@
           <a:p>
             <a:fld id="{3E22BF2E-04DA-469E-97C5-BB68A0368813}" type="datetimeFigureOut">
               <a:rPr lang="en-US" smtClean="0"/>
-              <a:t>2/19/2026</a:t>
+              <a:t>3/30/2026</a:t>
             </a:fld>
             <a:endParaRPr lang="en-US"/>
           </a:p>
@@ -2485,7 +2485,7 @@
           <a:p>
             <a:fld id="{3E22BF2E-04DA-469E-97C5-BB68A0368813}" type="datetimeFigureOut">
               <a:rPr lang="en-US" smtClean="0"/>
-              <a:t>2/19/2026</a:t>
+              <a:t>3/30/2026</a:t>
             </a:fld>
             <a:endParaRPr lang="en-US"/>
           </a:p>
@@ -2598,7 +2598,7 @@
           <a:p>
             <a:fld id="{3E22BF2E-04DA-469E-97C5-BB68A0368813}" type="datetimeFigureOut">
               <a:rPr lang="en-US" smtClean="0"/>
-              <a:t>2/19/2026</a:t>
+              <a:t>3/30/2026</a:t>
             </a:fld>
             <a:endParaRPr lang="en-US"/>
           </a:p>
@@ -2909,7 +2909,7 @@
           <a:p>
             <a:fld id="{3E22BF2E-04DA-469E-97C5-BB68A0368813}" type="datetimeFigureOut">
               <a:rPr lang="en-US" smtClean="0"/>
-              <a:t>2/19/2026</a:t>
+              <a:t>3/30/2026</a:t>
             </a:fld>
             <a:endParaRPr lang="en-US"/>
           </a:p>
@@ -3197,7 +3197,7 @@
           <a:p>
             <a:fld id="{3E22BF2E-04DA-469E-97C5-BB68A0368813}" type="datetimeFigureOut">
               <a:rPr lang="en-US" smtClean="0"/>
-              <a:t>2/19/2026</a:t>
+              <a:t>3/30/2026</a:t>
             </a:fld>
             <a:endParaRPr lang="en-US"/>
           </a:p>
@@ -3438,7 +3438,7 @@
           <a:p>
             <a:fld id="{3E22BF2E-04DA-469E-97C5-BB68A0368813}" type="datetimeFigureOut">
               <a:rPr lang="en-US" smtClean="0"/>
-              <a:t>2/19/2026</a:t>
+              <a:t>3/30/2026</a:t>
             </a:fld>
             <a:endParaRPr lang="en-US"/>
           </a:p>
@@ -4462,6 +4462,87 @@
           </a:extLst>
         </p:spPr>
       </p:pic>
+      <p:grpSp>
+        <p:nvGrpSpPr>
+          <p:cNvPr id="7" name="Group 6">
+            <a:extLst>
+              <a:ext uri="{FF2B5EF4-FFF2-40B4-BE49-F238E27FC236}">
+                <a16:creationId xmlns:a16="http://schemas.microsoft.com/office/drawing/2014/main" id="{DA1C6744-BD97-2C10-F393-A0B726F71E7A}"/>
+              </a:ext>
+            </a:extLst>
+          </p:cNvPr>
+          <p:cNvGrpSpPr/>
+          <p:nvPr/>
+        </p:nvGrpSpPr>
+        <p:grpSpPr>
+          <a:xfrm>
+            <a:off x="10961015" y="4868822"/>
+            <a:ext cx="1037459" cy="1303078"/>
+            <a:chOff x="5248582" y="2401735"/>
+            <a:chExt cx="1694835" cy="2054530"/>
+          </a:xfrm>
+        </p:grpSpPr>
+        <p:pic>
+          <p:nvPicPr>
+            <p:cNvPr id="8" name="Picture 7">
+              <a:extLst>
+                <a:ext uri="{FF2B5EF4-FFF2-40B4-BE49-F238E27FC236}">
+                  <a16:creationId xmlns:a16="http://schemas.microsoft.com/office/drawing/2014/main" id="{2F5FC233-1ACF-0EE9-5B1F-F0A29270EECF}"/>
+                </a:ext>
+              </a:extLst>
+            </p:cNvPr>
+            <p:cNvPicPr>
+              <a:picLocks noChangeAspect="1"/>
+            </p:cNvPicPr>
+            <p:nvPr/>
+          </p:nvPicPr>
+          <p:blipFill>
+            <a:blip r:embed="rId6"/>
+            <a:stretch>
+              <a:fillRect/>
+            </a:stretch>
+          </p:blipFill>
+          <p:spPr>
+            <a:xfrm>
+              <a:off x="5248582" y="2401735"/>
+              <a:ext cx="1694835" cy="2054530"/>
+            </a:xfrm>
+            <a:prstGeom prst="rect">
+              <a:avLst/>
+            </a:prstGeom>
+          </p:spPr>
+        </p:pic>
+        <p:pic>
+          <p:nvPicPr>
+            <p:cNvPr id="9" name="Picture 8">
+              <a:extLst>
+                <a:ext uri="{FF2B5EF4-FFF2-40B4-BE49-F238E27FC236}">
+                  <a16:creationId xmlns:a16="http://schemas.microsoft.com/office/drawing/2014/main" id="{26CB3135-CE78-1137-FBA3-29AA8592D8FA}"/>
+                </a:ext>
+              </a:extLst>
+            </p:cNvPr>
+            <p:cNvPicPr>
+              <a:picLocks noChangeAspect="1"/>
+            </p:cNvPicPr>
+            <p:nvPr/>
+          </p:nvPicPr>
+          <p:blipFill>
+            <a:blip r:embed="rId7"/>
+            <a:stretch>
+              <a:fillRect/>
+            </a:stretch>
+          </p:blipFill>
+          <p:spPr>
+            <a:xfrm>
+              <a:off x="5315643" y="2435129"/>
+              <a:ext cx="1560711" cy="1560711"/>
+            </a:xfrm>
+            <a:prstGeom prst="rect">
+              <a:avLst/>
+            </a:prstGeom>
+          </p:spPr>
+        </p:pic>
+      </p:grpSp>
     </p:spTree>
     <p:extLst>
       <p:ext uri="{BB962C8B-B14F-4D97-AF65-F5344CB8AC3E}">
@@ -6425,8 +6506,8 @@
             </a:fontRef>
           </p:style>
         </p:cxnSp>
-        <mc:AlternateContent xmlns:mc="http://schemas.openxmlformats.org/markup-compatibility/2006">
-          <mc:Choice xmlns:a14="http://schemas.microsoft.com/office/drawing/2010/main" Requires="a14">
+        <mc:AlternateContent xmlns:mc="http://schemas.openxmlformats.org/markup-compatibility/2006" xmlns:a14="http://schemas.microsoft.com/office/drawing/2010/main">
+          <mc:Choice Requires="a14">
             <p:sp>
               <p:nvSpPr>
                 <p:cNvPr id="11" name="TextBox 10">
@@ -6521,7 +6602,7 @@
                             <a:latin typeface="Cambria Math" panose="02040503050406030204" pitchFamily="18" charset="0"/>
                             <a:ea typeface="Cambria Math" panose="02040503050406030204" pitchFamily="18" charset="0"/>
                           </a:rPr>
-                          <m:t>-</m:t>
+                          <m:t>−</m:t>
                         </m:r>
                         <m:r>
                           <m:rPr>
@@ -6574,7 +6655,7 @@
               </p:txBody>
             </p:sp>
           </mc:Choice>
-          <mc:Fallback>
+          <mc:Fallback xmlns="">
             <p:sp>
               <p:nvSpPr>
                 <p:cNvPr id="11" name="TextBox 10">

--- a/slides/Lecture_Chapter06.pptx
+++ b/slides/Lecture_Chapter06.pptx
@@ -280,7 +280,7 @@
           <a:p>
             <a:fld id="{2A92B22A-BE2A-43CB-B312-FF3A0A14567B}" type="datetimeFigureOut">
               <a:rPr lang="en-US" smtClean="0"/>
-              <a:t>3/30/2026</a:t>
+              <a:t>4/22/2026</a:t>
             </a:fld>
             <a:endParaRPr lang="en-US"/>
           </a:p>
@@ -778,7 +778,7 @@
           <a:p>
             <a:fld id="{3E22BF2E-04DA-469E-97C5-BB68A0368813}" type="datetimeFigureOut">
               <a:rPr lang="en-US" smtClean="0"/>
-              <a:t>3/30/2026</a:t>
+              <a:t>4/22/2026</a:t>
             </a:fld>
             <a:endParaRPr lang="en-US"/>
           </a:p>
@@ -976,7 +976,7 @@
           <a:p>
             <a:fld id="{3E22BF2E-04DA-469E-97C5-BB68A0368813}" type="datetimeFigureOut">
               <a:rPr lang="en-US" smtClean="0"/>
-              <a:t>3/30/2026</a:t>
+              <a:t>4/22/2026</a:t>
             </a:fld>
             <a:endParaRPr lang="en-US"/>
           </a:p>
@@ -1184,7 +1184,7 @@
           <a:p>
             <a:fld id="{3E22BF2E-04DA-469E-97C5-BB68A0368813}" type="datetimeFigureOut">
               <a:rPr lang="en-US" smtClean="0"/>
-              <a:t>3/30/2026</a:t>
+              <a:t>4/22/2026</a:t>
             </a:fld>
             <a:endParaRPr lang="en-US"/>
           </a:p>
@@ -1392,7 +1392,7 @@
           <a:p>
             <a:fld id="{3E22BF2E-04DA-469E-97C5-BB68A0368813}" type="datetimeFigureOut">
               <a:rPr lang="en-US" smtClean="0"/>
-              <a:t>3/30/2026</a:t>
+              <a:t>4/22/2026</a:t>
             </a:fld>
             <a:endParaRPr lang="en-US"/>
           </a:p>
@@ -1667,7 +1667,7 @@
           <a:p>
             <a:fld id="{3E22BF2E-04DA-469E-97C5-BB68A0368813}" type="datetimeFigureOut">
               <a:rPr lang="en-US" smtClean="0"/>
-              <a:t>3/30/2026</a:t>
+              <a:t>4/22/2026</a:t>
             </a:fld>
             <a:endParaRPr lang="en-US"/>
           </a:p>
@@ -1932,7 +1932,7 @@
           <a:p>
             <a:fld id="{3E22BF2E-04DA-469E-97C5-BB68A0368813}" type="datetimeFigureOut">
               <a:rPr lang="en-US" smtClean="0"/>
-              <a:t>3/30/2026</a:t>
+              <a:t>4/22/2026</a:t>
             </a:fld>
             <a:endParaRPr lang="en-US"/>
           </a:p>
@@ -2344,7 +2344,7 @@
           <a:p>
             <a:fld id="{3E22BF2E-04DA-469E-97C5-BB68A0368813}" type="datetimeFigureOut">
               <a:rPr lang="en-US" smtClean="0"/>
-              <a:t>3/30/2026</a:t>
+              <a:t>4/22/2026</a:t>
             </a:fld>
             <a:endParaRPr lang="en-US"/>
           </a:p>
@@ -2485,7 +2485,7 @@
           <a:p>
             <a:fld id="{3E22BF2E-04DA-469E-97C5-BB68A0368813}" type="datetimeFigureOut">
               <a:rPr lang="en-US" smtClean="0"/>
-              <a:t>3/30/2026</a:t>
+              <a:t>4/22/2026</a:t>
             </a:fld>
             <a:endParaRPr lang="en-US"/>
           </a:p>
@@ -2598,7 +2598,7 @@
           <a:p>
             <a:fld id="{3E22BF2E-04DA-469E-97C5-BB68A0368813}" type="datetimeFigureOut">
               <a:rPr lang="en-US" smtClean="0"/>
-              <a:t>3/30/2026</a:t>
+              <a:t>4/22/2026</a:t>
             </a:fld>
             <a:endParaRPr lang="en-US"/>
           </a:p>
@@ -2909,7 +2909,7 @@
           <a:p>
             <a:fld id="{3E22BF2E-04DA-469E-97C5-BB68A0368813}" type="datetimeFigureOut">
               <a:rPr lang="en-US" smtClean="0"/>
-              <a:t>3/30/2026</a:t>
+              <a:t>4/22/2026</a:t>
             </a:fld>
             <a:endParaRPr lang="en-US"/>
           </a:p>
@@ -3197,7 +3197,7 @@
           <a:p>
             <a:fld id="{3E22BF2E-04DA-469E-97C5-BB68A0368813}" type="datetimeFigureOut">
               <a:rPr lang="en-US" smtClean="0"/>
-              <a:t>3/30/2026</a:t>
+              <a:t>4/22/2026</a:t>
             </a:fld>
             <a:endParaRPr lang="en-US"/>
           </a:p>
@@ -3438,7 +3438,7 @@
           <a:p>
             <a:fld id="{3E22BF2E-04DA-469E-97C5-BB68A0368813}" type="datetimeFigureOut">
               <a:rPr lang="en-US" smtClean="0"/>
-              <a:t>3/30/2026</a:t>
+              <a:t>4/22/2026</a:t>
             </a:fld>
             <a:endParaRPr lang="en-US"/>
           </a:p>
@@ -21206,8 +21206,8 @@
           </a:p>
         </p:txBody>
       </p:sp>
-      <mc:AlternateContent xmlns:mc="http://schemas.openxmlformats.org/markup-compatibility/2006" xmlns:a14="http://schemas.microsoft.com/office/drawing/2010/main">
-        <mc:Choice Requires="a14">
+      <mc:AlternateContent xmlns:mc="http://schemas.openxmlformats.org/markup-compatibility/2006">
+        <mc:Choice xmlns:a14="http://schemas.microsoft.com/office/drawing/2010/main" Requires="a14">
           <p:sp>
             <p:nvSpPr>
               <p:cNvPr id="3" name="Content Placeholder 2">
@@ -22256,7 +22256,15 @@
                 </a14:m>
                 <a:r>
                   <a:rPr lang="en-US" dirty="0"/>
-                  <a:t> tuples)</a:t>
+                  <a:t> tuples), but only uses one reward which </a:t>
+                </a:r>
+                <a:r>
+                  <a:rPr lang="en-US" b="1" dirty="0"/>
+                  <a:t>reduces variance</a:t>
+                </a:r>
+                <a:r>
+                  <a:rPr lang="en-US" dirty="0"/>
+                  <a:t>.</a:t>
                 </a:r>
               </a:p>
               <a:p>
@@ -22271,13 +22279,21 @@
                 </a:r>
                 <a:r>
                   <a:rPr lang="en-US" dirty="0"/>
-                  <a:t>.</a:t>
+                  <a:t>. The result is </a:t>
+                </a:r>
+                <a:r>
+                  <a:rPr lang="en-US" b="1" dirty="0"/>
+                  <a:t>biased</a:t>
+                </a:r>
+                <a:r>
+                  <a:rPr lang="en-US" dirty="0"/>
+                  <a:t> towards the estimate.</a:t>
                 </a:r>
               </a:p>
             </p:txBody>
           </p:sp>
         </mc:Choice>
-        <mc:Fallback xmlns="">
+        <mc:Fallback>
           <p:sp>
             <p:nvSpPr>
               <p:cNvPr id="3" name="Content Placeholder 2">
